--- a/slides/pptx/第12回_AIを前提に事業を組み直す.pptx
+++ b/slides/pptx/第12回_AIを前提に事業を組み直す.pptx
@@ -12,9 +12,14 @@
     <p:sldId id="260" r:id="rId6"/>
     <p:sldId id="261" r:id="rId7"/>
     <p:sldId id="262" r:id="rId8"/>
+    <p:sldId id="263" r:id="rId9"/>
+    <p:sldId id="264" r:id="rId10"/>
+    <p:sldId id="265" r:id="rId11"/>
+    <p:sldId id="266" r:id="rId12"/>
+    <p:sldId id="267" r:id="rId13"/>
   </p:sldIdLst>
   <p:notesMasterIdLst>
-    <p:notesMasterId r:id="rId9"/>
+    <p:notesMasterId r:id="rId14"/>
   </p:notesMasterIdLst>
   <p:sldSz cx="12192000" cy="6858000"/>
   <p:notesSz cx="6858000" cy="12192000"/>
@@ -508,8 +513,7 @@
           <a:p>
             <a:r>
               <a:rPr lang="en-US" dirty="0"/>
-              <a:t>最終回です。社員のみなさんにも同席いただきます。
-【ゴール】浮いた時間と変わった原価構造を、提供価値と人員計画につなぎます。</a:t>
+              <a:t>社員同席の回。冒頭で講師から趣旨説明。第6回に来た方に加え、この半年で実際に使った社員を必ず呼んでおく（事前準備）。</a:t>
             </a:r>
             <a:endParaRPr lang="en-US" dirty="0"/>
           </a:p>
@@ -533,6 +537,270 @@
             <a:fld id="{F7021451-1387-4CA6-816F-3879F97B5CBC}" type="slidenum">
               <a:rPr lang="en-US"/>
               <a:t>1</a:t>
+            </a:fld>
+            <a:endParaRPr lang="en-US"/>
+          </a:p>
+        </p:txBody>
+      </p:sp>
+    </p:spTree>
+    <p:extLst>
+      <p:ext uri="{BB962C8B-B14F-4D97-AF65-F5344CB8AC3E}">
+        <p14:creationId xmlns:p14="http://schemas.microsoft.com/office/powerpoint/2010/main" val="1024086991"/>
+      </p:ext>
+    </p:extLst>
+  </p:cSld>
+  <p:clrMapOvr>
+    <a:masterClrMapping/>
+  </p:clrMapOvr>
+</p:notes>
+</file>
+
+<file path=ppt/notesSlides/notesSlide10.xml><?xml version="1.0" encoding="utf-8"?>
+<p:notes xmlns:a="http://schemas.openxmlformats.org/drawingml/2006/main" xmlns:r="http://schemas.openxmlformats.org/officeDocument/2006/relationships" xmlns:p="http://schemas.openxmlformats.org/presentationml/2006/main">
+  <p:cSld>
+    <p:spTree>
+      <p:nvGrpSpPr>
+        <p:cNvPr id="1" name=""/>
+        <p:cNvGrpSpPr/>
+        <p:nvPr/>
+      </p:nvGrpSpPr>
+      <p:grpSpPr>
+        <a:xfrm>
+          <a:off x="0" y="0"/>
+          <a:ext cx="0" cy="0"/>
+          <a:chOff x="0" y="0"/>
+          <a:chExt cx="0" cy="0"/>
+        </a:xfrm>
+      </p:grpSpPr>
+      <p:sp>
+        <p:nvSpPr>
+          <p:cNvPr id="2" name="Slide Image Placeholder 1"/>
+          <p:cNvSpPr>
+            <a:spLocks noGrp="1" noRot="1" noChangeAspect="1"/>
+          </p:cNvSpPr>
+          <p:nvPr>
+            <p:ph type="sldImg"/>
+          </p:nvPr>
+        </p:nvSpPr>
+        <p:spPr/>
+      </p:sp>
+      <p:sp>
+        <p:nvSpPr>
+          <p:cNvPr id="3" name="Notes Placeholder 2"/>
+          <p:cNvSpPr>
+            <a:spLocks noGrp="1"/>
+          </p:cNvSpPr>
+          <p:nvPr>
+            <p:ph type="body" idx="1"/>
+          </p:nvPr>
+        </p:nvSpPr>
+        <p:spPr/>
+        <p:txBody>
+          <a:bodyPr/>
+          <a:lstStyle/>
+          <a:p>
+            <a:r>
+              <a:rPr lang="en-US" dirty="0"/>
+              <a:t>掲載許諾は必ず書面で。数値の公開範囲まで確認する。口頭の了解で事例に使わない。</a:t>
+            </a:r>
+            <a:endParaRPr lang="en-US" dirty="0"/>
+          </a:p>
+        </p:txBody>
+      </p:sp>
+      <p:sp>
+        <p:nvSpPr>
+          <p:cNvPr id="4" name="Slide Number Placeholder 3"/>
+          <p:cNvSpPr>
+            <a:spLocks noGrp="1"/>
+          </p:cNvSpPr>
+          <p:nvPr>
+            <p:ph type="sldNum" sz="quarter" idx="10"/>
+          </p:nvPr>
+        </p:nvSpPr>
+        <p:spPr/>
+        <p:txBody>
+          <a:bodyPr/>
+          <a:lstStyle/>
+          <a:p>
+            <a:fld id="{F7021451-1387-4CA6-816F-3879F97B5CBC}" type="slidenum">
+              <a:rPr lang="en-US"/>
+              <a:t>10</a:t>
+            </a:fld>
+            <a:endParaRPr lang="en-US"/>
+          </a:p>
+        </p:txBody>
+      </p:sp>
+    </p:spTree>
+    <p:extLst>
+      <p:ext uri="{BB962C8B-B14F-4D97-AF65-F5344CB8AC3E}">
+        <p14:creationId xmlns:p14="http://schemas.microsoft.com/office/powerpoint/2010/main" val="1024086991"/>
+      </p:ext>
+    </p:extLst>
+  </p:cSld>
+  <p:clrMapOvr>
+    <a:masterClrMapping/>
+  </p:clrMapOvr>
+</p:notes>
+</file>
+
+<file path=ppt/notesSlides/notesSlide11.xml><?xml version="1.0" encoding="utf-8"?>
+<p:notes xmlns:a="http://schemas.openxmlformats.org/drawingml/2006/main" xmlns:r="http://schemas.openxmlformats.org/officeDocument/2006/relationships" xmlns:p="http://schemas.openxmlformats.org/presentationml/2006/main">
+  <p:cSld>
+    <p:spTree>
+      <p:nvGrpSpPr>
+        <p:cNvPr id="1" name=""/>
+        <p:cNvGrpSpPr/>
+        <p:nvPr/>
+      </p:nvGrpSpPr>
+      <p:grpSpPr>
+        <a:xfrm>
+          <a:off x="0" y="0"/>
+          <a:ext cx="0" cy="0"/>
+          <a:chOff x="0" y="0"/>
+          <a:chExt cx="0" cy="0"/>
+        </a:xfrm>
+      </p:grpSpPr>
+      <p:sp>
+        <p:nvSpPr>
+          <p:cNvPr id="2" name="Slide Image Placeholder 1"/>
+          <p:cNvSpPr>
+            <a:spLocks noGrp="1" noRot="1" noChangeAspect="1"/>
+          </p:cNvSpPr>
+          <p:nvPr>
+            <p:ph type="sldImg"/>
+          </p:nvPr>
+        </p:nvSpPr>
+        <p:spPr/>
+      </p:sp>
+      <p:sp>
+        <p:nvSpPr>
+          <p:cNvPr id="3" name="Notes Placeholder 2"/>
+          <p:cNvSpPr>
+            <a:spLocks noGrp="1"/>
+          </p:cNvSpPr>
+          <p:nvPr>
+            <p:ph type="body" idx="1"/>
+          </p:nvPr>
+        </p:nvSpPr>
+        <p:spPr/>
+        <p:txBody>
+          <a:bodyPr/>
+          <a:lstStyle/>
+          <a:p>
+            <a:r>
+              <a:rPr lang="en-US" dirty="0"/>
+              <a:t>最後のメッセージ。資料は読まず、自分の言葉で。この一言が、修了後の行動を左右する。</a:t>
+            </a:r>
+            <a:endParaRPr lang="en-US" dirty="0"/>
+          </a:p>
+        </p:txBody>
+      </p:sp>
+      <p:sp>
+        <p:nvSpPr>
+          <p:cNvPr id="4" name="Slide Number Placeholder 3"/>
+          <p:cNvSpPr>
+            <a:spLocks noGrp="1"/>
+          </p:cNvSpPr>
+          <p:nvPr>
+            <p:ph type="sldNum" sz="quarter" idx="10"/>
+          </p:nvPr>
+        </p:nvSpPr>
+        <p:spPr/>
+        <p:txBody>
+          <a:bodyPr/>
+          <a:lstStyle/>
+          <a:p>
+            <a:fld id="{F7021451-1387-4CA6-816F-3879F97B5CBC}" type="slidenum">
+              <a:rPr lang="en-US"/>
+              <a:t>11</a:t>
+            </a:fld>
+            <a:endParaRPr lang="en-US"/>
+          </a:p>
+        </p:txBody>
+      </p:sp>
+    </p:spTree>
+    <p:extLst>
+      <p:ext uri="{BB962C8B-B14F-4D97-AF65-F5344CB8AC3E}">
+        <p14:creationId xmlns:p14="http://schemas.microsoft.com/office/powerpoint/2010/main" val="1024086991"/>
+      </p:ext>
+    </p:extLst>
+  </p:cSld>
+  <p:clrMapOvr>
+    <a:masterClrMapping/>
+  </p:clrMapOvr>
+</p:notes>
+</file>
+
+<file path=ppt/notesSlides/notesSlide12.xml><?xml version="1.0" encoding="utf-8"?>
+<p:notes xmlns:a="http://schemas.openxmlformats.org/drawingml/2006/main" xmlns:r="http://schemas.openxmlformats.org/officeDocument/2006/relationships" xmlns:p="http://schemas.openxmlformats.org/presentationml/2006/main">
+  <p:cSld>
+    <p:spTree>
+      <p:nvGrpSpPr>
+        <p:cNvPr id="1" name=""/>
+        <p:cNvGrpSpPr/>
+        <p:nvPr/>
+      </p:nvGrpSpPr>
+      <p:grpSpPr>
+        <a:xfrm>
+          <a:off x="0" y="0"/>
+          <a:ext cx="0" cy="0"/>
+          <a:chOff x="0" y="0"/>
+          <a:chExt cx="0" cy="0"/>
+        </a:xfrm>
+      </p:grpSpPr>
+      <p:sp>
+        <p:nvSpPr>
+          <p:cNvPr id="2" name="Slide Image Placeholder 1"/>
+          <p:cNvSpPr>
+            <a:spLocks noGrp="1" noRot="1" noChangeAspect="1"/>
+          </p:cNvSpPr>
+          <p:nvPr>
+            <p:ph type="sldImg"/>
+          </p:nvPr>
+        </p:nvSpPr>
+        <p:spPr/>
+      </p:sp>
+      <p:sp>
+        <p:nvSpPr>
+          <p:cNvPr id="3" name="Notes Placeholder 2"/>
+          <p:cNvSpPr>
+            <a:spLocks noGrp="1"/>
+          </p:cNvSpPr>
+          <p:nvPr>
+            <p:ph type="body" idx="1"/>
+          </p:nvPr>
+        </p:nvSpPr>
+        <p:spPr/>
+        <p:txBody>
+          <a:bodyPr/>
+          <a:lstStyle/>
+          <a:p>
+            <a:r>
+              <a:rPr lang="en-US" dirty="0"/>
+              <a:t>3か月後のフォローを、この場で日程まで仮押さえできると理想的。落ちるのは2か月目、と伝えておく。</a:t>
+            </a:r>
+            <a:endParaRPr lang="en-US" dirty="0"/>
+          </a:p>
+        </p:txBody>
+      </p:sp>
+      <p:sp>
+        <p:nvSpPr>
+          <p:cNvPr id="4" name="Slide Number Placeholder 3"/>
+          <p:cNvSpPr>
+            <a:spLocks noGrp="1"/>
+          </p:cNvSpPr>
+          <p:nvPr>
+            <p:ph type="sldNum" sz="quarter" idx="10"/>
+          </p:nvPr>
+        </p:nvSpPr>
+        <p:spPr/>
+        <p:txBody>
+          <a:bodyPr/>
+          <a:lstStyle/>
+          <a:p>
+            <a:fld id="{F7021451-1387-4CA6-816F-3879F97B5CBC}" type="slidenum">
+              <a:rPr lang="en-US"/>
+              <a:t>12</a:t>
             </a:fld>
             <a:endParaRPr lang="en-US"/>
           </a:p>
@@ -597,7 +865,7 @@
           <a:p>
             <a:r>
               <a:rPr lang="en-US" dirty="0"/>
-              <a:t>ここは30秒で。今日の到達点だけ言って、すぐ本題へ。</a:t>
+              <a:t>「時間が浮いただけでは経営数値は動かない」は、経営者にいちばん刺さる一文。ここから事業の話に切り替える。</a:t>
             </a:r>
             <a:endParaRPr lang="en-US" dirty="0"/>
           </a:p>
@@ -685,7 +953,7 @@
           <a:p>
             <a:r>
               <a:rPr lang="en-US" dirty="0"/>
-              <a:t>先に結論を言わず、受講者の実物を題材にしてこの型に当てはめて見せる。</a:t>
+              <a:t>最終回であることを言い、道具の話は終わり、と宣言する。ここで空気が変わる。</a:t>
             </a:r>
             <a:endParaRPr lang="en-US" dirty="0"/>
           </a:p>
@@ -773,7 +1041,7 @@
           <a:p>
             <a:r>
               <a:rPr lang="en-US" dirty="0"/>
-              <a:t>必ず左（失敗例）から。自分の失敗として話す。うまくいく例だけ見せると、受講者は自分の失敗を言わなくなる。</a:t>
+              <a:t>4つ目（やらないと決めること）を最も強調する。ここを書けるかどうかで構想の質が決まる。</a:t>
             </a:r>
             <a:endParaRPr lang="en-US" dirty="0"/>
           </a:p>
@@ -861,7 +1129,7 @@
           <a:p>
             <a:r>
               <a:rPr lang="en-US" dirty="0"/>
-              <a:t>ここから講師は口頭指示のみ。画面を操作するのは必ず受講者。歯がゆくても手を出さない。</a:t>
+              <a:t>第1回の観察記録シートを実際に開いて突き合わせる。本人は変化に気づいていないことが多いので、記録で見せる。診断スコアの伸びもここで。</a:t>
             </a:r>
             <a:endParaRPr lang="en-US" dirty="0"/>
           </a:p>
@@ -949,7 +1217,7 @@
           <a:p>
             <a:r>
               <a:rPr lang="en-US" dirty="0"/>
-              <a:t>ここは資料を読み上げない。自分の言葉と、匿名事例で話す。</a:t>
+              <a:t>「もっと活用していく」と書きかけたら、この例を見せる。責めずに、具体に落とす作業を一緒にやる。</a:t>
             </a:r>
             <a:endParaRPr lang="en-US" dirty="0"/>
           </a:p>
@@ -1037,7 +1305,7 @@
           <a:p>
             <a:r>
               <a:rPr lang="en-US" dirty="0"/>
-              <a:t>その場でカレンダーに入れてもらう。口頭の約束で終わらせない。</a:t>
+              <a:t>事業の言葉に翻訳できた瞬間が、この講座の到達点。ここまで来たら、あとは本人が進められる。</a:t>
             </a:r>
             <a:endParaRPr lang="en-US" dirty="0"/>
           </a:p>
@@ -1061,6 +1329,182 @@
             <a:fld id="{F7021451-1387-4CA6-816F-3879F97B5CBC}" type="slidenum">
               <a:rPr lang="en-US"/>
               <a:t>7</a:t>
+            </a:fld>
+            <a:endParaRPr lang="en-US"/>
+          </a:p>
+        </p:txBody>
+      </p:sp>
+    </p:spTree>
+    <p:extLst>
+      <p:ext uri="{BB962C8B-B14F-4D97-AF65-F5344CB8AC3E}">
+        <p14:creationId xmlns:p14="http://schemas.microsoft.com/office/powerpoint/2010/main" val="1024086991"/>
+      </p:ext>
+    </p:extLst>
+  </p:cSld>
+  <p:clrMapOvr>
+    <a:masterClrMapping/>
+  </p:clrMapOvr>
+</p:notes>
+</file>
+
+<file path=ppt/notesSlides/notesSlide8.xml><?xml version="1.0" encoding="utf-8"?>
+<p:notes xmlns:a="http://schemas.openxmlformats.org/drawingml/2006/main" xmlns:r="http://schemas.openxmlformats.org/officeDocument/2006/relationships" xmlns:p="http://schemas.openxmlformats.org/presentationml/2006/main">
+  <p:cSld>
+    <p:spTree>
+      <p:nvGrpSpPr>
+        <p:cNvPr id="1" name=""/>
+        <p:cNvGrpSpPr/>
+        <p:nvPr/>
+      </p:nvGrpSpPr>
+      <p:grpSpPr>
+        <a:xfrm>
+          <a:off x="0" y="0"/>
+          <a:ext cx="0" cy="0"/>
+          <a:chOff x="0" y="0"/>
+          <a:chExt cx="0" cy="0"/>
+        </a:xfrm>
+      </p:grpSpPr>
+      <p:sp>
+        <p:nvSpPr>
+          <p:cNvPr id="2" name="Slide Image Placeholder 1"/>
+          <p:cNvSpPr>
+            <a:spLocks noGrp="1" noRot="1" noChangeAspect="1"/>
+          </p:cNvSpPr>
+          <p:nvPr>
+            <p:ph type="sldImg"/>
+          </p:nvPr>
+        </p:nvSpPr>
+        <p:spPr/>
+      </p:sp>
+      <p:sp>
+        <p:nvSpPr>
+          <p:cNvPr id="3" name="Notes Placeholder 2"/>
+          <p:cNvSpPr>
+            <a:spLocks noGrp="1"/>
+          </p:cNvSpPr>
+          <p:nvPr>
+            <p:ph type="body" idx="1"/>
+          </p:nvPr>
+        </p:nvSpPr>
+        <p:spPr/>
+        <p:txBody>
+          <a:bodyPr/>
+          <a:lstStyle/>
+          <a:p>
+            <a:r>
+              <a:rPr lang="en-US" dirty="0"/>
+              <a:t>2つ目（成果が乏しい）は取り繕わない。正直に言語化したほうが、継続の相談につながることが多い。</a:t>
+            </a:r>
+            <a:endParaRPr lang="en-US" dirty="0"/>
+          </a:p>
+        </p:txBody>
+      </p:sp>
+      <p:sp>
+        <p:nvSpPr>
+          <p:cNvPr id="4" name="Slide Number Placeholder 3"/>
+          <p:cNvSpPr>
+            <a:spLocks noGrp="1"/>
+          </p:cNvSpPr>
+          <p:nvPr>
+            <p:ph type="sldNum" sz="quarter" idx="10"/>
+          </p:nvPr>
+        </p:nvSpPr>
+        <p:spPr/>
+        <p:txBody>
+          <a:bodyPr/>
+          <a:lstStyle/>
+          <a:p>
+            <a:fld id="{F7021451-1387-4CA6-816F-3879F97B5CBC}" type="slidenum">
+              <a:rPr lang="en-US"/>
+              <a:t>8</a:t>
+            </a:fld>
+            <a:endParaRPr lang="en-US"/>
+          </a:p>
+        </p:txBody>
+      </p:sp>
+    </p:spTree>
+    <p:extLst>
+      <p:ext uri="{BB962C8B-B14F-4D97-AF65-F5344CB8AC3E}">
+        <p14:creationId xmlns:p14="http://schemas.microsoft.com/office/powerpoint/2010/main" val="1024086991"/>
+      </p:ext>
+    </p:extLst>
+  </p:cSld>
+  <p:clrMapOvr>
+    <a:masterClrMapping/>
+  </p:clrMapOvr>
+</p:notes>
+</file>
+
+<file path=ppt/notesSlides/notesSlide9.xml><?xml version="1.0" encoding="utf-8"?>
+<p:notes xmlns:a="http://schemas.openxmlformats.org/drawingml/2006/main" xmlns:r="http://schemas.openxmlformats.org/officeDocument/2006/relationships" xmlns:p="http://schemas.openxmlformats.org/presentationml/2006/main">
+  <p:cSld>
+    <p:spTree>
+      <p:nvGrpSpPr>
+        <p:cNvPr id="1" name=""/>
+        <p:cNvGrpSpPr/>
+        <p:nvPr/>
+      </p:nvGrpSpPr>
+      <p:grpSpPr>
+        <a:xfrm>
+          <a:off x="0" y="0"/>
+          <a:ext cx="0" cy="0"/>
+          <a:chOff x="0" y="0"/>
+          <a:chExt cx="0" cy="0"/>
+        </a:xfrm>
+      </p:grpSpPr>
+      <p:sp>
+        <p:nvSpPr>
+          <p:cNvPr id="2" name="Slide Image Placeholder 1"/>
+          <p:cNvSpPr>
+            <a:spLocks noGrp="1" noRot="1" noChangeAspect="1"/>
+          </p:cNvSpPr>
+          <p:nvPr>
+            <p:ph type="sldImg"/>
+          </p:nvPr>
+        </p:nvSpPr>
+        <p:spPr/>
+      </p:sp>
+      <p:sp>
+        <p:nvSpPr>
+          <p:cNvPr id="3" name="Notes Placeholder 2"/>
+          <p:cNvSpPr>
+            <a:spLocks noGrp="1"/>
+          </p:cNvSpPr>
+          <p:nvPr>
+            <p:ph type="body" idx="1"/>
+          </p:nvPr>
+        </p:nvSpPr>
+        <p:spPr/>
+        <p:txBody>
+          <a:bodyPr/>
+          <a:lstStyle/>
+          <a:p>
+            <a:r>
+              <a:rPr lang="en-US" dirty="0"/>
+              <a:t>社員がいる時間帯と、退席後の作業を分ける。社員の前で内輪の作業を始めない。</a:t>
+            </a:r>
+            <a:endParaRPr lang="en-US" dirty="0"/>
+          </a:p>
+        </p:txBody>
+      </p:sp>
+      <p:sp>
+        <p:nvSpPr>
+          <p:cNvPr id="4" name="Slide Number Placeholder 3"/>
+          <p:cNvSpPr>
+            <a:spLocks noGrp="1"/>
+          </p:cNvSpPr>
+          <p:nvPr>
+            <p:ph type="sldNum" sz="quarter" idx="10"/>
+          </p:nvPr>
+        </p:nvSpPr>
+        <p:spPr/>
+        <p:txBody>
+          <a:bodyPr/>
+          <a:lstStyle/>
+          <a:p>
+            <a:fld id="{F7021451-1387-4CA6-816F-3879F97B5CBC}" type="slidenum">
+              <a:rPr lang="en-US"/>
+              <a:t>9</a:t>
             </a:fld>
             <a:endParaRPr lang="en-US"/>
           </a:p>
@@ -1680,6 +2124,1284 @@
 </p:sld>
 </file>
 
+<file path=ppt/slides/slide10.xml><?xml version="1.0" encoding="utf-8"?>
+<p:sld xmlns:a="http://schemas.openxmlformats.org/drawingml/2006/main" xmlns:r="http://schemas.openxmlformats.org/officeDocument/2006/relationships" xmlns:p="http://schemas.openxmlformats.org/presentationml/2006/main">
+  <p:cSld name="Slide 10">
+    <p:bg>
+      <p:bgPr>
+        <a:solidFill>
+          <a:srgbClr val="F6F2EA"/>
+        </a:solidFill>
+      </p:bgPr>
+    </p:bg>
+    <p:spTree>
+      <p:nvGrpSpPr>
+        <p:cNvPr id="1" name=""/>
+        <p:cNvGrpSpPr/>
+        <p:nvPr/>
+      </p:nvGrpSpPr>
+      <p:grpSpPr>
+        <a:xfrm>
+          <a:off x="0" y="0"/>
+          <a:ext cx="0" cy="0"/>
+          <a:chOff x="0" y="0"/>
+          <a:chExt cx="0" cy="0"/>
+        </a:xfrm>
+      </p:grpSpPr>
+      <p:sp>
+        <p:nvSpPr>
+          <p:cNvPr id="2" name="Text 0"/>
+          <p:cNvSpPr txBox="1"/>
+          <p:nvPr/>
+        </p:nvSpPr>
+        <p:spPr>
+          <a:xfrm>
+            <a:off x="777240" y="566928"/>
+            <a:ext cx="10607040" cy="274320"/>
+          </a:xfrm>
+          <a:prstGeom prst="rect">
+            <a:avLst/>
+          </a:prstGeom>
+          <a:noFill/>
+          <a:ln/>
+        </p:spPr>
+        <p:txBody>
+          <a:bodyPr wrap="square" lIns="0" tIns="0" rIns="0" bIns="0" rtlCol="0" anchor="ctr"/>
+          <a:lstStyle/>
+          <a:p>
+            <a:pPr indent="0" marL="0">
+              <a:buNone/>
+            </a:pPr>
+            <a:r>
+              <a:rPr lang="en-US" sz="1100" b="1" spc="250" kern="0" dirty="0">
+                <a:solidFill>
+                  <a:srgbClr val="3B6B4A"/>
+                </a:solidFill>
+                <a:latin typeface="Yu Gothic" pitchFamily="34" charset="0"/>
+                <a:ea typeface="Yu Gothic" pitchFamily="34" charset="-122"/>
+                <a:cs typeface="Yu Gothic" pitchFamily="34" charset="-120"/>
+              </a:rPr>
+              <a:t>業務への組み込み</a:t>
+            </a:r>
+            <a:endParaRPr lang="en-US" sz="1100" dirty="0"/>
+          </a:p>
+        </p:txBody>
+      </p:sp>
+      <p:sp>
+        <p:nvSpPr>
+          <p:cNvPr id="3" name="Text 1"/>
+          <p:cNvSpPr txBox="1"/>
+          <p:nvPr/>
+        </p:nvSpPr>
+        <p:spPr>
+          <a:xfrm>
+            <a:off x="777240" y="896112"/>
+            <a:ext cx="10607040" cy="640080"/>
+          </a:xfrm>
+          <a:prstGeom prst="rect">
+            <a:avLst/>
+          </a:prstGeom>
+          <a:noFill/>
+          <a:ln/>
+        </p:spPr>
+        <p:txBody>
+          <a:bodyPr wrap="square" lIns="0" tIns="0" rIns="0" bIns="0" rtlCol="0" anchor="ctr"/>
+          <a:lstStyle/>
+          <a:p>
+            <a:pPr indent="0" marL="0">
+              <a:buNone/>
+            </a:pPr>
+            <a:r>
+              <a:rPr lang="en-US" sz="2600" b="1" dirty="0">
+                <a:solidFill>
+                  <a:srgbClr val="23201D"/>
+                </a:solidFill>
+                <a:latin typeface="Yu Gothic" pitchFamily="34" charset="0"/>
+                <a:ea typeface="Yu Gothic" pitchFamily="34" charset="-122"/>
+                <a:cs typeface="Yu Gothic" pitchFamily="34" charset="-120"/>
+              </a:rPr>
+              <a:t>修了時にすること</a:t>
+            </a:r>
+            <a:endParaRPr lang="en-US" sz="2600" dirty="0"/>
+          </a:p>
+        </p:txBody>
+      </p:sp>
+      <p:sp>
+        <p:nvSpPr>
+          <p:cNvPr id="4" name="Text 2"/>
+          <p:cNvSpPr txBox="1"/>
+          <p:nvPr/>
+        </p:nvSpPr>
+        <p:spPr>
+          <a:xfrm>
+            <a:off x="777240" y="1572768"/>
+            <a:ext cx="10607040" cy="320040"/>
+          </a:xfrm>
+          <a:prstGeom prst="rect">
+            <a:avLst/>
+          </a:prstGeom>
+          <a:noFill/>
+          <a:ln/>
+        </p:spPr>
+        <p:txBody>
+          <a:bodyPr wrap="square" lIns="0" tIns="0" rIns="0" bIns="0" rtlCol="0" anchor="ctr"/>
+          <a:lstStyle/>
+          <a:p>
+            <a:pPr indent="0" marL="0">
+              <a:buNone/>
+            </a:pPr>
+            <a:r>
+              <a:rPr lang="en-US" sz="1250" b="1" dirty="0">
+                <a:solidFill>
+                  <a:srgbClr val="3B6B4A"/>
+                </a:solidFill>
+                <a:latin typeface="Yu Gothic" pitchFamily="34" charset="0"/>
+                <a:ea typeface="Yu Gothic" pitchFamily="34" charset="-122"/>
+                <a:cs typeface="Yu Gothic" pitchFamily="34" charset="-120"/>
+              </a:rPr>
+              <a:t>ここを決めないと、持ち帰っても使われません。紙に書きます。</a:t>
+            </a:r>
+            <a:endParaRPr lang="en-US" sz="1250" dirty="0"/>
+          </a:p>
+        </p:txBody>
+      </p:sp>
+      <p:sp>
+        <p:nvSpPr>
+          <p:cNvPr id="5" name="Shape 3"/>
+          <p:cNvSpPr/>
+          <p:nvPr/>
+        </p:nvSpPr>
+        <p:spPr>
+          <a:xfrm>
+            <a:off x="777240" y="2103120"/>
+            <a:ext cx="10607040" cy="914400"/>
+          </a:xfrm>
+          <a:prstGeom prst="rect">
+            <a:avLst/>
+          </a:prstGeom>
+          <a:solidFill>
+            <a:srgbClr val="FFFFFF"/>
+          </a:solidFill>
+          <a:ln w="12700">
+            <a:solidFill>
+              <a:srgbClr val="EDE7DB"/>
+            </a:solidFill>
+            <a:prstDash val="solid"/>
+          </a:ln>
+        </p:spPr>
+      </p:sp>
+      <p:sp>
+        <p:nvSpPr>
+          <p:cNvPr id="6" name="Shape 4"/>
+          <p:cNvSpPr/>
+          <p:nvPr/>
+        </p:nvSpPr>
+        <p:spPr>
+          <a:xfrm>
+            <a:off x="777240" y="2103120"/>
+            <a:ext cx="54864" cy="914400"/>
+          </a:xfrm>
+          <a:prstGeom prst="rect">
+            <a:avLst/>
+          </a:prstGeom>
+          <a:solidFill>
+            <a:srgbClr val="3B6B4A"/>
+          </a:solidFill>
+          <a:ln w="12700">
+            <a:solidFill>
+              <a:srgbClr val="333333"/>
+            </a:solidFill>
+            <a:prstDash val="solid"/>
+          </a:ln>
+        </p:spPr>
+      </p:sp>
+      <p:sp>
+        <p:nvSpPr>
+          <p:cNvPr id="7" name="Text 5"/>
+          <p:cNvSpPr txBox="1"/>
+          <p:nvPr/>
+        </p:nvSpPr>
+        <p:spPr>
+          <a:xfrm>
+            <a:off x="1143000" y="2176272"/>
+            <a:ext cx="2757830" cy="768096"/>
+          </a:xfrm>
+          <a:prstGeom prst="rect">
+            <a:avLst/>
+          </a:prstGeom>
+          <a:noFill/>
+          <a:ln/>
+        </p:spPr>
+        <p:txBody>
+          <a:bodyPr wrap="square" lIns="0" tIns="0" rIns="0" bIns="0" rtlCol="0" anchor="ctr"/>
+          <a:lstStyle/>
+          <a:p>
+            <a:pPr indent="0" marL="0">
+              <a:buNone/>
+            </a:pPr>
+            <a:r>
+              <a:rPr lang="en-US" sz="1400" b="1" dirty="0">
+                <a:solidFill>
+                  <a:srgbClr val="3B6B4A"/>
+                </a:solidFill>
+                <a:latin typeface="Yu Gothic" pitchFamily="34" charset="0"/>
+                <a:ea typeface="Yu Gothic" pitchFamily="34" charset="-122"/>
+                <a:cs typeface="Yu Gothic" pitchFamily="34" charset="-120"/>
+              </a:rPr>
+              <a:t>診断をもう一度</a:t>
+            </a:r>
+            <a:endParaRPr lang="en-US" sz="1400" dirty="0"/>
+          </a:p>
+        </p:txBody>
+      </p:sp>
+      <p:sp>
+        <p:nvSpPr>
+          <p:cNvPr id="8" name="Text 6"/>
+          <p:cNvSpPr txBox="1"/>
+          <p:nvPr/>
+        </p:nvSpPr>
+        <p:spPr>
+          <a:xfrm>
+            <a:off x="4006901" y="2176272"/>
+            <a:ext cx="7011619" cy="768096"/>
+          </a:xfrm>
+          <a:prstGeom prst="rect">
+            <a:avLst/>
+          </a:prstGeom>
+          <a:noFill/>
+          <a:ln/>
+        </p:spPr>
+        <p:txBody>
+          <a:bodyPr wrap="square" lIns="0" tIns="0" rIns="0" bIns="0" rtlCol="0" anchor="ctr"/>
+          <a:lstStyle/>
+          <a:p>
+            <a:pPr indent="0" marL="0">
+              <a:lnSpc>
+                <a:spcPct val="130000"/>
+              </a:lnSpc>
+              <a:buNone/>
+            </a:pPr>
+            <a:r>
+              <a:rPr lang="en-US" sz="1250" dirty="0">
+                <a:solidFill>
+                  <a:srgbClr val="3F3933"/>
+                </a:solidFill>
+                <a:latin typeface="Yu Gothic" pitchFamily="34" charset="0"/>
+                <a:ea typeface="Yu Gothic" pitchFamily="34" charset="-122"/>
+                <a:cs typeface="Yu Gothic" pitchFamily="34" charset="-120"/>
+              </a:rPr>
+              <a:t>受講前と同じ設問です。点数の伸びが、そのまま効果測定になります</a:t>
+            </a:r>
+            <a:endParaRPr lang="en-US" sz="1250" dirty="0"/>
+          </a:p>
+        </p:txBody>
+      </p:sp>
+      <p:sp>
+        <p:nvSpPr>
+          <p:cNvPr id="9" name="Shape 7"/>
+          <p:cNvSpPr/>
+          <p:nvPr/>
+        </p:nvSpPr>
+        <p:spPr>
+          <a:xfrm>
+            <a:off x="777240" y="3154680"/>
+            <a:ext cx="10607040" cy="914400"/>
+          </a:xfrm>
+          <a:prstGeom prst="rect">
+            <a:avLst/>
+          </a:prstGeom>
+          <a:solidFill>
+            <a:srgbClr val="FFFFFF"/>
+          </a:solidFill>
+          <a:ln w="12700">
+            <a:solidFill>
+              <a:srgbClr val="EDE7DB"/>
+            </a:solidFill>
+            <a:prstDash val="solid"/>
+          </a:ln>
+        </p:spPr>
+      </p:sp>
+      <p:sp>
+        <p:nvSpPr>
+          <p:cNvPr id="10" name="Shape 8"/>
+          <p:cNvSpPr/>
+          <p:nvPr/>
+        </p:nvSpPr>
+        <p:spPr>
+          <a:xfrm>
+            <a:off x="777240" y="3154680"/>
+            <a:ext cx="54864" cy="914400"/>
+          </a:xfrm>
+          <a:prstGeom prst="rect">
+            <a:avLst/>
+          </a:prstGeom>
+          <a:solidFill>
+            <a:srgbClr val="3B6B4A"/>
+          </a:solidFill>
+          <a:ln w="12700">
+            <a:solidFill>
+              <a:srgbClr val="333333"/>
+            </a:solidFill>
+            <a:prstDash val="solid"/>
+          </a:ln>
+        </p:spPr>
+      </p:sp>
+      <p:sp>
+        <p:nvSpPr>
+          <p:cNvPr id="11" name="Text 9"/>
+          <p:cNvSpPr txBox="1"/>
+          <p:nvPr/>
+        </p:nvSpPr>
+        <p:spPr>
+          <a:xfrm>
+            <a:off x="1143000" y="3227832"/>
+            <a:ext cx="2757830" cy="768096"/>
+          </a:xfrm>
+          <a:prstGeom prst="rect">
+            <a:avLst/>
+          </a:prstGeom>
+          <a:noFill/>
+          <a:ln/>
+        </p:spPr>
+        <p:txBody>
+          <a:bodyPr wrap="square" lIns="0" tIns="0" rIns="0" bIns="0" rtlCol="0" anchor="ctr"/>
+          <a:lstStyle/>
+          <a:p>
+            <a:pPr indent="0" marL="0">
+              <a:buNone/>
+            </a:pPr>
+            <a:r>
+              <a:rPr lang="en-US" sz="1400" b="1" dirty="0">
+                <a:solidFill>
+                  <a:srgbClr val="3B6B4A"/>
+                </a:solidFill>
+                <a:latin typeface="Yu Gothic" pitchFamily="34" charset="0"/>
+                <a:ea typeface="Yu Gothic" pitchFamily="34" charset="-122"/>
+                <a:cs typeface="Yu Gothic" pitchFamily="34" charset="-120"/>
+              </a:rPr>
+              <a:t>成果報告シートの記入</a:t>
+            </a:r>
+            <a:endParaRPr lang="en-US" sz="1400" dirty="0"/>
+          </a:p>
+        </p:txBody>
+      </p:sp>
+      <p:sp>
+        <p:nvSpPr>
+          <p:cNvPr id="12" name="Text 10"/>
+          <p:cNvSpPr txBox="1"/>
+          <p:nvPr/>
+        </p:nvSpPr>
+        <p:spPr>
+          <a:xfrm>
+            <a:off x="4006901" y="3227832"/>
+            <a:ext cx="7011619" cy="768096"/>
+          </a:xfrm>
+          <a:prstGeom prst="rect">
+            <a:avLst/>
+          </a:prstGeom>
+          <a:noFill/>
+          <a:ln/>
+        </p:spPr>
+        <p:txBody>
+          <a:bodyPr wrap="square" lIns="0" tIns="0" rIns="0" bIns="0" rtlCol="0" anchor="ctr"/>
+          <a:lstStyle/>
+          <a:p>
+            <a:pPr indent="0" marL="0">
+              <a:lnSpc>
+                <a:spcPct val="130000"/>
+              </a:lnSpc>
+              <a:buNone/>
+            </a:pPr>
+            <a:r>
+              <a:rPr lang="en-US" sz="1250" dirty="0">
+                <a:solidFill>
+                  <a:srgbClr val="3F3933"/>
+                </a:solidFill>
+                <a:latin typeface="Yu Gothic" pitchFamily="34" charset="0"/>
+                <a:ea typeface="Yu Gothic" pitchFamily="34" charset="-122"/>
+                <a:cs typeface="Yu Gothic" pitchFamily="34" charset="-120"/>
+              </a:rPr>
+              <a:t>削減時間と社員の反応を数字に。うまくいかなかったことも書いてください</a:t>
+            </a:r>
+            <a:endParaRPr lang="en-US" sz="1250" dirty="0"/>
+          </a:p>
+        </p:txBody>
+      </p:sp>
+      <p:sp>
+        <p:nvSpPr>
+          <p:cNvPr id="13" name="Shape 11"/>
+          <p:cNvSpPr/>
+          <p:nvPr/>
+        </p:nvSpPr>
+        <p:spPr>
+          <a:xfrm>
+            <a:off x="777240" y="4206240"/>
+            <a:ext cx="10607040" cy="914400"/>
+          </a:xfrm>
+          <a:prstGeom prst="rect">
+            <a:avLst/>
+          </a:prstGeom>
+          <a:solidFill>
+            <a:srgbClr val="FFFFFF"/>
+          </a:solidFill>
+          <a:ln w="12700">
+            <a:solidFill>
+              <a:srgbClr val="EDE7DB"/>
+            </a:solidFill>
+            <a:prstDash val="solid"/>
+          </a:ln>
+        </p:spPr>
+      </p:sp>
+      <p:sp>
+        <p:nvSpPr>
+          <p:cNvPr id="14" name="Shape 12"/>
+          <p:cNvSpPr/>
+          <p:nvPr/>
+        </p:nvSpPr>
+        <p:spPr>
+          <a:xfrm>
+            <a:off x="777240" y="4206240"/>
+            <a:ext cx="54864" cy="914400"/>
+          </a:xfrm>
+          <a:prstGeom prst="rect">
+            <a:avLst/>
+          </a:prstGeom>
+          <a:solidFill>
+            <a:srgbClr val="3B6B4A"/>
+          </a:solidFill>
+          <a:ln w="12700">
+            <a:solidFill>
+              <a:srgbClr val="333333"/>
+            </a:solidFill>
+            <a:prstDash val="solid"/>
+          </a:ln>
+        </p:spPr>
+      </p:sp>
+      <p:sp>
+        <p:nvSpPr>
+          <p:cNvPr id="15" name="Text 13"/>
+          <p:cNvSpPr txBox="1"/>
+          <p:nvPr/>
+        </p:nvSpPr>
+        <p:spPr>
+          <a:xfrm>
+            <a:off x="1143000" y="4279392"/>
+            <a:ext cx="2757830" cy="768096"/>
+          </a:xfrm>
+          <a:prstGeom prst="rect">
+            <a:avLst/>
+          </a:prstGeom>
+          <a:noFill/>
+          <a:ln/>
+        </p:spPr>
+        <p:txBody>
+          <a:bodyPr wrap="square" lIns="0" tIns="0" rIns="0" bIns="0" rtlCol="0" anchor="ctr"/>
+          <a:lstStyle/>
+          <a:p>
+            <a:pPr indent="0" marL="0">
+              <a:buNone/>
+            </a:pPr>
+            <a:r>
+              <a:rPr lang="en-US" sz="1400" b="1" dirty="0">
+                <a:solidFill>
+                  <a:srgbClr val="3B6B4A"/>
+                </a:solidFill>
+                <a:latin typeface="Yu Gothic" pitchFamily="34" charset="0"/>
+                <a:ea typeface="Yu Gothic" pitchFamily="34" charset="-122"/>
+                <a:cs typeface="Yu Gothic" pitchFamily="34" charset="-120"/>
+              </a:rPr>
+              <a:t>掲載の許諾確認</a:t>
+            </a:r>
+            <a:endParaRPr lang="en-US" sz="1400" dirty="0"/>
+          </a:p>
+        </p:txBody>
+      </p:sp>
+      <p:sp>
+        <p:nvSpPr>
+          <p:cNvPr id="16" name="Text 14"/>
+          <p:cNvSpPr txBox="1"/>
+          <p:nvPr/>
+        </p:nvSpPr>
+        <p:spPr>
+          <a:xfrm>
+            <a:off x="4006901" y="4279392"/>
+            <a:ext cx="7011619" cy="768096"/>
+          </a:xfrm>
+          <a:prstGeom prst="rect">
+            <a:avLst/>
+          </a:prstGeom>
+          <a:noFill/>
+          <a:ln/>
+        </p:spPr>
+        <p:txBody>
+          <a:bodyPr wrap="square" lIns="0" tIns="0" rIns="0" bIns="0" rtlCol="0" anchor="ctr"/>
+          <a:lstStyle/>
+          <a:p>
+            <a:pPr indent="0" marL="0">
+              <a:lnSpc>
+                <a:spcPct val="130000"/>
+              </a:lnSpc>
+              <a:buNone/>
+            </a:pPr>
+            <a:r>
+              <a:rPr lang="en-US" sz="1250" dirty="0">
+                <a:solidFill>
+                  <a:srgbClr val="3F3933"/>
+                </a:solidFill>
+                <a:latin typeface="Yu Gothic" pitchFamily="34" charset="0"/>
+                <a:ea typeface="Yu Gothic" pitchFamily="34" charset="-122"/>
+                <a:cs typeface="Yu Gothic" pitchFamily="34" charset="-120"/>
+              </a:rPr>
+              <a:t>事例として使う場合は、社名を出さず「従業員◯名の◯◯業」の形で。数値の公開範囲も確認します</a:t>
+            </a:r>
+            <a:endParaRPr lang="en-US" sz="1250" dirty="0"/>
+          </a:p>
+        </p:txBody>
+      </p:sp>
+      <p:sp>
+        <p:nvSpPr>
+          <p:cNvPr id="17" name="Text 15"/>
+          <p:cNvSpPr txBox="1"/>
+          <p:nvPr/>
+        </p:nvSpPr>
+        <p:spPr>
+          <a:xfrm>
+            <a:off x="777240" y="6382512"/>
+            <a:ext cx="7424928" cy="256032"/>
+          </a:xfrm>
+          <a:prstGeom prst="rect">
+            <a:avLst/>
+          </a:prstGeom>
+          <a:noFill/>
+          <a:ln/>
+        </p:spPr>
+        <p:txBody>
+          <a:bodyPr wrap="square" lIns="0" tIns="0" rIns="0" bIns="0" rtlCol="0" anchor="ctr"/>
+          <a:lstStyle/>
+          <a:p>
+            <a:pPr indent="0" marL="0">
+              <a:buNone/>
+            </a:pPr>
+            <a:r>
+              <a:rPr lang="en-US" sz="900" dirty="0">
+                <a:solidFill>
+                  <a:srgbClr val="8A8177"/>
+                </a:solidFill>
+                <a:latin typeface="Yu Gothic" pitchFamily="34" charset="0"/>
+                <a:ea typeface="Yu Gothic" pitchFamily="34" charset="-122"/>
+                <a:cs typeface="Yu Gothic" pitchFamily="34" charset="-120"/>
+              </a:rPr>
+              <a:t>第12回　AIを前提に事業を組み直す</a:t>
+            </a:r>
+            <a:endParaRPr lang="en-US" sz="900" dirty="0"/>
+          </a:p>
+        </p:txBody>
+      </p:sp>
+      <p:sp>
+        <p:nvSpPr>
+          <p:cNvPr id="18" name="Text 16"/>
+          <p:cNvSpPr txBox="1"/>
+          <p:nvPr/>
+        </p:nvSpPr>
+        <p:spPr>
+          <a:xfrm>
+            <a:off x="8202168" y="6382512"/>
+            <a:ext cx="3182112" cy="256032"/>
+          </a:xfrm>
+          <a:prstGeom prst="rect">
+            <a:avLst/>
+          </a:prstGeom>
+          <a:noFill/>
+          <a:ln/>
+        </p:spPr>
+        <p:txBody>
+          <a:bodyPr wrap="square" lIns="0" tIns="0" rIns="0" bIns="0" rtlCol="0" anchor="ctr"/>
+          <a:lstStyle/>
+          <a:p>
+            <a:pPr algn="r" indent="0" marL="0">
+              <a:buNone/>
+            </a:pPr>
+            <a:r>
+              <a:rPr lang="en-US" sz="900" dirty="0">
+                <a:solidFill>
+                  <a:srgbClr val="8A8177"/>
+                </a:solidFill>
+                <a:latin typeface="Yu Gothic" pitchFamily="34" charset="0"/>
+                <a:ea typeface="Yu Gothic" pitchFamily="34" charset="-122"/>
+                <a:cs typeface="Yu Gothic" pitchFamily="34" charset="-120"/>
+              </a:rPr>
+              <a:t>組み込み</a:t>
+            </a:r>
+            <a:endParaRPr lang="en-US" sz="900" dirty="0"/>
+          </a:p>
+        </p:txBody>
+      </p:sp>
+    </p:spTree>
+  </p:cSld>
+  <p:clrMapOvr>
+    <a:masterClrMapping/>
+  </p:clrMapOvr>
+</p:sld>
+</file>
+
+<file path=ppt/slides/slide11.xml><?xml version="1.0" encoding="utf-8"?>
+<p:sld xmlns:a="http://schemas.openxmlformats.org/drawingml/2006/main" xmlns:r="http://schemas.openxmlformats.org/officeDocument/2006/relationships" xmlns:p="http://schemas.openxmlformats.org/presentationml/2006/main">
+  <p:cSld name="Slide 11">
+    <p:bg>
+      <p:bgPr>
+        <a:solidFill>
+          <a:srgbClr val="F6F2EA"/>
+        </a:solidFill>
+      </p:bgPr>
+    </p:bg>
+    <p:spTree>
+      <p:nvGrpSpPr>
+        <p:cNvPr id="1" name=""/>
+        <p:cNvGrpSpPr/>
+        <p:nvPr/>
+      </p:nvGrpSpPr>
+      <p:grpSpPr>
+        <a:xfrm>
+          <a:off x="0" y="0"/>
+          <a:ext cx="0" cy="0"/>
+          <a:chOff x="0" y="0"/>
+          <a:chExt cx="0" cy="0"/>
+        </a:xfrm>
+      </p:grpSpPr>
+      <p:sp>
+        <p:nvSpPr>
+          <p:cNvPr id="2" name="Text 0"/>
+          <p:cNvSpPr txBox="1"/>
+          <p:nvPr/>
+        </p:nvSpPr>
+        <p:spPr>
+          <a:xfrm>
+            <a:off x="777240" y="566928"/>
+            <a:ext cx="10607040" cy="274320"/>
+          </a:xfrm>
+          <a:prstGeom prst="rect">
+            <a:avLst/>
+          </a:prstGeom>
+          <a:noFill/>
+          <a:ln/>
+        </p:spPr>
+        <p:txBody>
+          <a:bodyPr wrap="square" lIns="0" tIns="0" rIns="0" bIns="0" rtlCol="0" anchor="ctr"/>
+          <a:lstStyle/>
+          <a:p>
+            <a:pPr indent="0" marL="0">
+              <a:buNone/>
+            </a:pPr>
+            <a:r>
+              <a:rPr lang="en-US" sz="1100" b="1" spc="250" kern="0" dirty="0">
+                <a:solidFill>
+                  <a:srgbClr val="B04A2F"/>
+                </a:solidFill>
+                <a:latin typeface="Yu Gothic" pitchFamily="34" charset="0"/>
+                <a:ea typeface="Yu Gothic" pitchFamily="34" charset="-122"/>
+                <a:cs typeface="Yu Gothic" pitchFamily="34" charset="-120"/>
+              </a:rPr>
+              <a:t>ここだけは</a:t>
+            </a:r>
+            <a:endParaRPr lang="en-US" sz="1100" dirty="0"/>
+          </a:p>
+        </p:txBody>
+      </p:sp>
+      <p:sp>
+        <p:nvSpPr>
+          <p:cNvPr id="3" name="Text 1"/>
+          <p:cNvSpPr txBox="1"/>
+          <p:nvPr/>
+        </p:nvSpPr>
+        <p:spPr>
+          <a:xfrm>
+            <a:off x="777240" y="1097280"/>
+            <a:ext cx="10607040" cy="640080"/>
+          </a:xfrm>
+          <a:prstGeom prst="rect">
+            <a:avLst/>
+          </a:prstGeom>
+          <a:noFill/>
+          <a:ln/>
+        </p:spPr>
+        <p:txBody>
+          <a:bodyPr wrap="square" lIns="0" tIns="0" rIns="0" bIns="0" rtlCol="0" anchor="ctr"/>
+          <a:lstStyle/>
+          <a:p>
+            <a:pPr indent="0" marL="0">
+              <a:buNone/>
+            </a:pPr>
+            <a:r>
+              <a:rPr lang="en-US" sz="2600" b="1" dirty="0">
+                <a:solidFill>
+                  <a:srgbClr val="23201D"/>
+                </a:solidFill>
+                <a:latin typeface="Yu Gothic" pitchFamily="34" charset="0"/>
+                <a:ea typeface="Yu Gothic" pitchFamily="34" charset="-122"/>
+                <a:cs typeface="Yu Gothic" pitchFamily="34" charset="-120"/>
+              </a:rPr>
+              <a:t>最後に、ひとつだけ</a:t>
+            </a:r>
+            <a:endParaRPr lang="en-US" sz="2600" dirty="0"/>
+          </a:p>
+        </p:txBody>
+      </p:sp>
+      <p:sp>
+        <p:nvSpPr>
+          <p:cNvPr id="4" name="Shape 2"/>
+          <p:cNvSpPr/>
+          <p:nvPr/>
+        </p:nvSpPr>
+        <p:spPr>
+          <a:xfrm>
+            <a:off x="777240" y="2148840"/>
+            <a:ext cx="64008" cy="2194560"/>
+          </a:xfrm>
+          <a:prstGeom prst="rect">
+            <a:avLst/>
+          </a:prstGeom>
+          <a:solidFill>
+            <a:srgbClr val="B04A2F"/>
+          </a:solidFill>
+          <a:ln w="12700">
+            <a:solidFill>
+              <a:srgbClr val="333333"/>
+            </a:solidFill>
+            <a:prstDash val="solid"/>
+          </a:ln>
+        </p:spPr>
+      </p:sp>
+      <p:sp>
+        <p:nvSpPr>
+          <p:cNvPr id="5" name="Text 3"/>
+          <p:cNvSpPr txBox="1"/>
+          <p:nvPr/>
+        </p:nvSpPr>
+        <p:spPr>
+          <a:xfrm>
+            <a:off x="1188720" y="2148840"/>
+            <a:ext cx="9966960" cy="2194560"/>
+          </a:xfrm>
+          <a:prstGeom prst="rect">
+            <a:avLst/>
+          </a:prstGeom>
+          <a:noFill/>
+          <a:ln/>
+        </p:spPr>
+        <p:txBody>
+          <a:bodyPr wrap="square" lIns="0" tIns="0" rIns="0" bIns="0" rtlCol="0" anchor="ctr"/>
+          <a:lstStyle/>
+          <a:p>
+            <a:pPr indent="0" marL="0">
+              <a:lnSpc>
+                <a:spcPct val="160000"/>
+              </a:lnSpc>
+              <a:buNone/>
+            </a:pPr>
+            <a:r>
+              <a:rPr lang="en-US" sz="1650" dirty="0">
+                <a:solidFill>
+                  <a:srgbClr val="3F3933"/>
+                </a:solidFill>
+                <a:latin typeface="Yu Gothic" pitchFamily="34" charset="0"/>
+                <a:ea typeface="Yu Gothic" pitchFamily="34" charset="-122"/>
+                <a:cs typeface="Yu Gothic" pitchFamily="34" charset="-120"/>
+              </a:rPr>
+              <a:t>この12回で最も効いたのは、講座の中で作ったものを翌日に一度使ってみることでした。使わなかったものは、どれだけよくできていても2週間で忘れます。逆に、一度でも実務で使えば、それは御社の仕組みになります。これから作るものについても、同じです。</a:t>
+            </a:r>
+            <a:endParaRPr lang="en-US" sz="1650" dirty="0"/>
+          </a:p>
+        </p:txBody>
+      </p:sp>
+      <p:sp>
+        <p:nvSpPr>
+          <p:cNvPr id="6" name="Shape 4"/>
+          <p:cNvSpPr/>
+          <p:nvPr/>
+        </p:nvSpPr>
+        <p:spPr>
+          <a:xfrm>
+            <a:off x="777240" y="4709160"/>
+            <a:ext cx="10607040" cy="960120"/>
+          </a:xfrm>
+          <a:prstGeom prst="rect">
+            <a:avLst/>
+          </a:prstGeom>
+          <a:solidFill>
+            <a:srgbClr val="EDE7DB"/>
+          </a:solidFill>
+          <a:ln w="12700">
+            <a:solidFill>
+              <a:srgbClr val="333333"/>
+            </a:solidFill>
+            <a:prstDash val="solid"/>
+          </a:ln>
+        </p:spPr>
+      </p:sp>
+      <p:sp>
+        <p:nvSpPr>
+          <p:cNvPr id="7" name="Text 5"/>
+          <p:cNvSpPr txBox="1"/>
+          <p:nvPr/>
+        </p:nvSpPr>
+        <p:spPr>
+          <a:xfrm>
+            <a:off x="1051560" y="4800600"/>
+            <a:ext cx="1463040" cy="256032"/>
+          </a:xfrm>
+          <a:prstGeom prst="rect">
+            <a:avLst/>
+          </a:prstGeom>
+          <a:noFill/>
+          <a:ln/>
+        </p:spPr>
+        <p:txBody>
+          <a:bodyPr wrap="square" lIns="0" tIns="0" rIns="0" bIns="0" rtlCol="0" anchor="ctr"/>
+          <a:lstStyle/>
+          <a:p>
+            <a:pPr indent="0" marL="0">
+              <a:buNone/>
+            </a:pPr>
+            <a:r>
+              <a:rPr lang="en-US" sz="900" b="1" spc="150" kern="0" dirty="0">
+                <a:solidFill>
+                  <a:srgbClr val="B04A2F"/>
+                </a:solidFill>
+                <a:latin typeface="Yu Gothic" pitchFamily="34" charset="0"/>
+                <a:ea typeface="Yu Gothic" pitchFamily="34" charset="-122"/>
+                <a:cs typeface="Yu Gothic" pitchFamily="34" charset="-120"/>
+              </a:rPr>
+              <a:t>他社では</a:t>
+            </a:r>
+            <a:endParaRPr lang="en-US" sz="900" dirty="0"/>
+          </a:p>
+        </p:txBody>
+      </p:sp>
+      <p:sp>
+        <p:nvSpPr>
+          <p:cNvPr id="8" name="Text 6"/>
+          <p:cNvSpPr txBox="1"/>
+          <p:nvPr/>
+        </p:nvSpPr>
+        <p:spPr>
+          <a:xfrm>
+            <a:off x="1051560" y="5029200"/>
+            <a:ext cx="10058400" cy="566928"/>
+          </a:xfrm>
+          <a:prstGeom prst="rect">
+            <a:avLst/>
+          </a:prstGeom>
+          <a:noFill/>
+          <a:ln/>
+        </p:spPr>
+        <p:txBody>
+          <a:bodyPr wrap="square" lIns="0" tIns="0" rIns="0" bIns="0" rtlCol="0" anchor="ctr"/>
+          <a:lstStyle/>
+          <a:p>
+            <a:pPr indent="0" marL="0">
+              <a:lnSpc>
+                <a:spcPct val="130000"/>
+              </a:lnSpc>
+              <a:buNone/>
+            </a:pPr>
+            <a:r>
+              <a:rPr lang="en-US" sz="1250" dirty="0">
+                <a:solidFill>
+                  <a:srgbClr val="3F3933"/>
+                </a:solidFill>
+                <a:latin typeface="Yu Gothic" pitchFamily="34" charset="0"/>
+                <a:ea typeface="Yu Gothic" pitchFamily="34" charset="-122"/>
+                <a:cs typeface="Yu Gothic" pitchFamily="34" charset="-120"/>
+              </a:rPr>
+              <a:t>3年構想に「AIで受けられる仕事の種類を増やす」と書いた会社があります。1年後に実際に増えたのは種類ではなく、受注できる案件の規模でした。構想どおりにはならなかったが、構想を書いたから気づけた、と社長が言っていました。</a:t>
+            </a:r>
+            <a:endParaRPr lang="en-US" sz="1250" dirty="0"/>
+          </a:p>
+        </p:txBody>
+      </p:sp>
+      <p:sp>
+        <p:nvSpPr>
+          <p:cNvPr id="9" name="Text 7"/>
+          <p:cNvSpPr txBox="1"/>
+          <p:nvPr/>
+        </p:nvSpPr>
+        <p:spPr>
+          <a:xfrm>
+            <a:off x="777240" y="6382512"/>
+            <a:ext cx="7424928" cy="256032"/>
+          </a:xfrm>
+          <a:prstGeom prst="rect">
+            <a:avLst/>
+          </a:prstGeom>
+          <a:noFill/>
+          <a:ln/>
+        </p:spPr>
+        <p:txBody>
+          <a:bodyPr wrap="square" lIns="0" tIns="0" rIns="0" bIns="0" rtlCol="0" anchor="ctr"/>
+          <a:lstStyle/>
+          <a:p>
+            <a:pPr indent="0" marL="0">
+              <a:buNone/>
+            </a:pPr>
+            <a:r>
+              <a:rPr lang="en-US" sz="900" dirty="0">
+                <a:solidFill>
+                  <a:srgbClr val="8A8177"/>
+                </a:solidFill>
+                <a:latin typeface="Yu Gothic" pitchFamily="34" charset="0"/>
+                <a:ea typeface="Yu Gothic" pitchFamily="34" charset="-122"/>
+                <a:cs typeface="Yu Gothic" pitchFamily="34" charset="-120"/>
+              </a:rPr>
+              <a:t>第12回　AIを前提に事業を組み直す</a:t>
+            </a:r>
+            <a:endParaRPr lang="en-US" sz="900" dirty="0"/>
+          </a:p>
+        </p:txBody>
+      </p:sp>
+      <p:sp>
+        <p:nvSpPr>
+          <p:cNvPr id="10" name="Text 8"/>
+          <p:cNvSpPr txBox="1"/>
+          <p:nvPr/>
+        </p:nvSpPr>
+        <p:spPr>
+          <a:xfrm>
+            <a:off x="8202168" y="6382512"/>
+            <a:ext cx="3182112" cy="256032"/>
+          </a:xfrm>
+          <a:prstGeom prst="rect">
+            <a:avLst/>
+          </a:prstGeom>
+          <a:noFill/>
+          <a:ln/>
+        </p:spPr>
+        <p:txBody>
+          <a:bodyPr wrap="square" lIns="0" tIns="0" rIns="0" bIns="0" rtlCol="0" anchor="ctr"/>
+          <a:lstStyle/>
+          <a:p>
+            <a:pPr algn="r" indent="0" marL="0">
+              <a:buNone/>
+            </a:pPr>
+            <a:r>
+              <a:rPr lang="en-US" sz="900" dirty="0">
+                <a:solidFill>
+                  <a:srgbClr val="8A8177"/>
+                </a:solidFill>
+                <a:latin typeface="Yu Gothic" pitchFamily="34" charset="0"/>
+                <a:ea typeface="Yu Gothic" pitchFamily="34" charset="-122"/>
+                <a:cs typeface="Yu Gothic" pitchFamily="34" charset="-120"/>
+              </a:rPr>
+              <a:t>ここだけは</a:t>
+            </a:r>
+            <a:endParaRPr lang="en-US" sz="900" dirty="0"/>
+          </a:p>
+        </p:txBody>
+      </p:sp>
+    </p:spTree>
+  </p:cSld>
+  <p:clrMapOvr>
+    <a:masterClrMapping/>
+  </p:clrMapOvr>
+</p:sld>
+</file>
+
+<file path=ppt/slides/slide12.xml><?xml version="1.0" encoding="utf-8"?>
+<p:sld xmlns:a="http://schemas.openxmlformats.org/drawingml/2006/main" xmlns:r="http://schemas.openxmlformats.org/officeDocument/2006/relationships" xmlns:p="http://schemas.openxmlformats.org/presentationml/2006/main">
+  <p:cSld name="Slide 12">
+    <p:bg>
+      <p:bgPr>
+        <a:solidFill>
+          <a:srgbClr val="23201D"/>
+        </a:solidFill>
+      </p:bgPr>
+    </p:bg>
+    <p:spTree>
+      <p:nvGrpSpPr>
+        <p:cNvPr id="1" name=""/>
+        <p:cNvGrpSpPr/>
+        <p:nvPr/>
+      </p:nvGrpSpPr>
+      <p:grpSpPr>
+        <a:xfrm>
+          <a:off x="0" y="0"/>
+          <a:ext cx="0" cy="0"/>
+          <a:chOff x="0" y="0"/>
+          <a:chExt cx="0" cy="0"/>
+        </a:xfrm>
+      </p:grpSpPr>
+      <p:sp>
+        <p:nvSpPr>
+          <p:cNvPr id="2" name="Text 0"/>
+          <p:cNvSpPr txBox="1"/>
+          <p:nvPr/>
+        </p:nvSpPr>
+        <p:spPr>
+          <a:xfrm>
+            <a:off x="777240" y="1280160"/>
+            <a:ext cx="10607040" cy="365760"/>
+          </a:xfrm>
+          <a:prstGeom prst="rect">
+            <a:avLst/>
+          </a:prstGeom>
+          <a:noFill/>
+          <a:ln/>
+        </p:spPr>
+        <p:txBody>
+          <a:bodyPr wrap="square" lIns="0" tIns="0" rIns="0" bIns="0" rtlCol="0" anchor="ctr"/>
+          <a:lstStyle/>
+          <a:p>
+            <a:pPr indent="0" marL="0">
+              <a:buNone/>
+            </a:pPr>
+            <a:r>
+              <a:rPr lang="en-US" sz="1200" b="1" spc="300" kern="0" dirty="0">
+                <a:solidFill>
+                  <a:srgbClr val="B04A2F"/>
+                </a:solidFill>
+                <a:latin typeface="Yu Gothic" pitchFamily="34" charset="0"/>
+                <a:ea typeface="Yu Gothic" pitchFamily="34" charset="-122"/>
+                <a:cs typeface="Yu Gothic" pitchFamily="34" charset="-120"/>
+              </a:rPr>
+              <a:t>今日の宿題</a:t>
+            </a:r>
+            <a:endParaRPr lang="en-US" sz="1200" dirty="0"/>
+          </a:p>
+        </p:txBody>
+      </p:sp>
+      <p:sp>
+        <p:nvSpPr>
+          <p:cNvPr id="3" name="Text 1"/>
+          <p:cNvSpPr txBox="1"/>
+          <p:nvPr/>
+        </p:nvSpPr>
+        <p:spPr>
+          <a:xfrm>
+            <a:off x="777240" y="1691640"/>
+            <a:ext cx="10607040" cy="640080"/>
+          </a:xfrm>
+          <a:prstGeom prst="rect">
+            <a:avLst/>
+          </a:prstGeom>
+          <a:noFill/>
+          <a:ln/>
+        </p:spPr>
+        <p:txBody>
+          <a:bodyPr wrap="square" lIns="0" tIns="0" rIns="0" bIns="0" rtlCol="0" anchor="ctr"/>
+          <a:lstStyle/>
+          <a:p>
+            <a:pPr indent="0" marL="0">
+              <a:buNone/>
+            </a:pPr>
+            <a:r>
+              <a:rPr lang="en-US" sz="3200" b="1" dirty="0">
+                <a:solidFill>
+                  <a:srgbClr val="FFFFFF"/>
+                </a:solidFill>
+                <a:latin typeface="Yu Gothic" pitchFamily="34" charset="0"/>
+                <a:ea typeface="Yu Gothic" pitchFamily="34" charset="-122"/>
+                <a:cs typeface="Yu Gothic" pitchFamily="34" charset="-120"/>
+              </a:rPr>
+              <a:t>ひとつだけ</a:t>
+            </a:r>
+            <a:endParaRPr lang="en-US" sz="3200" dirty="0"/>
+          </a:p>
+        </p:txBody>
+      </p:sp>
+      <p:sp>
+        <p:nvSpPr>
+          <p:cNvPr id="4" name="Shape 2"/>
+          <p:cNvSpPr/>
+          <p:nvPr/>
+        </p:nvSpPr>
+        <p:spPr>
+          <a:xfrm>
+            <a:off x="777240" y="2651760"/>
+            <a:ext cx="10607040" cy="1371600"/>
+          </a:xfrm>
+          <a:prstGeom prst="rect">
+            <a:avLst/>
+          </a:prstGeom>
+          <a:solidFill>
+            <a:srgbClr val="2E2A26"/>
+          </a:solidFill>
+          <a:ln w="12700">
+            <a:solidFill>
+              <a:srgbClr val="B04A2F"/>
+            </a:solidFill>
+            <a:prstDash val="solid"/>
+          </a:ln>
+        </p:spPr>
+      </p:sp>
+      <p:sp>
+        <p:nvSpPr>
+          <p:cNvPr id="5" name="Text 3"/>
+          <p:cNvSpPr txBox="1"/>
+          <p:nvPr/>
+        </p:nvSpPr>
+        <p:spPr>
+          <a:xfrm>
+            <a:off x="1234440" y="2743200"/>
+            <a:ext cx="9692640" cy="1188720"/>
+          </a:xfrm>
+          <a:prstGeom prst="rect">
+            <a:avLst/>
+          </a:prstGeom>
+          <a:noFill/>
+          <a:ln/>
+        </p:spPr>
+        <p:txBody>
+          <a:bodyPr wrap="square" lIns="0" tIns="0" rIns="0" bIns="0" rtlCol="0" anchor="ctr"/>
+          <a:lstStyle/>
+          <a:p>
+            <a:pPr indent="0" marL="0">
+              <a:lnSpc>
+                <a:spcPct val="140000"/>
+              </a:lnSpc>
+              <a:buNone/>
+            </a:pPr>
+            <a:r>
+              <a:rPr lang="en-US" sz="1900" b="1" dirty="0">
+                <a:solidFill>
+                  <a:srgbClr val="FFFFFF"/>
+                </a:solidFill>
+                <a:latin typeface="Yu Gothic" pitchFamily="34" charset="0"/>
+                <a:ea typeface="Yu Gothic" pitchFamily="34" charset="-122"/>
+                <a:cs typeface="Yu Gothic" pitchFamily="34" charset="-120"/>
+              </a:rPr>
+              <a:t>（修了後）3か月後のフォローで、進捗をお聞かせください。</a:t>
+            </a:r>
+            <a:endParaRPr lang="en-US" sz="1900" dirty="0"/>
+          </a:p>
+        </p:txBody>
+      </p:sp>
+      <p:sp>
+        <p:nvSpPr>
+          <p:cNvPr id="6" name="Text 4"/>
+          <p:cNvSpPr txBox="1"/>
+          <p:nvPr/>
+        </p:nvSpPr>
+        <p:spPr>
+          <a:xfrm>
+            <a:off x="777240" y="4297680"/>
+            <a:ext cx="10607040" cy="274320"/>
+          </a:xfrm>
+          <a:prstGeom prst="rect">
+            <a:avLst/>
+          </a:prstGeom>
+          <a:noFill/>
+          <a:ln/>
+        </p:spPr>
+        <p:txBody>
+          <a:bodyPr wrap="square" lIns="0" tIns="0" rIns="0" bIns="0" rtlCol="0" anchor="ctr"/>
+          <a:lstStyle/>
+          <a:p>
+            <a:pPr indent="0" marL="0">
+              <a:buNone/>
+            </a:pPr>
+            <a:r>
+              <a:rPr lang="en-US" sz="1000" b="1" spc="200" kern="0" dirty="0">
+                <a:solidFill>
+                  <a:srgbClr val="B04A2F"/>
+                </a:solidFill>
+                <a:latin typeface="Yu Gothic" pitchFamily="34" charset="0"/>
+                <a:ea typeface="Yu Gothic" pitchFamily="34" charset="-122"/>
+                <a:cs typeface="Yu Gothic" pitchFamily="34" charset="-120"/>
+              </a:rPr>
+              <a:t>なぜこの宿題か</a:t>
+            </a:r>
+            <a:endParaRPr lang="en-US" sz="1000" dirty="0"/>
+          </a:p>
+        </p:txBody>
+      </p:sp>
+      <p:sp>
+        <p:nvSpPr>
+          <p:cNvPr id="7" name="Text 5"/>
+          <p:cNvSpPr txBox="1"/>
+          <p:nvPr/>
+        </p:nvSpPr>
+        <p:spPr>
+          <a:xfrm>
+            <a:off x="777240" y="4572000"/>
+            <a:ext cx="9546336" cy="914400"/>
+          </a:xfrm>
+          <a:prstGeom prst="rect">
+            <a:avLst/>
+          </a:prstGeom>
+          <a:noFill/>
+          <a:ln/>
+        </p:spPr>
+        <p:txBody>
+          <a:bodyPr wrap="square" lIns="0" tIns="0" rIns="0" bIns="0" rtlCol="0" anchor="ctr"/>
+          <a:lstStyle/>
+          <a:p>
+            <a:pPr indent="0" marL="0">
+              <a:lnSpc>
+                <a:spcPct val="145000"/>
+              </a:lnSpc>
+              <a:buNone/>
+            </a:pPr>
+            <a:r>
+              <a:rPr lang="en-US" sz="1350" dirty="0">
+                <a:solidFill>
+                  <a:srgbClr val="CFC6B8"/>
+                </a:solidFill>
+                <a:latin typeface="Yu Gothic" pitchFamily="34" charset="0"/>
+                <a:ea typeface="Yu Gothic" pitchFamily="34" charset="-122"/>
+                <a:cs typeface="Yu Gothic" pitchFamily="34" charset="-120"/>
+              </a:rPr>
+              <a:t>修了直後は勢いがあります。落ちるのは2か月目です。3か月後に一度お話しすることで、止まりかけたものを立て直せます。ご負担のない範囲で結構です。</a:t>
+            </a:r>
+            <a:endParaRPr lang="en-US" sz="1350" dirty="0"/>
+          </a:p>
+        </p:txBody>
+      </p:sp>
+      <p:sp>
+        <p:nvSpPr>
+          <p:cNvPr id="8" name="Text 6"/>
+          <p:cNvSpPr txBox="1"/>
+          <p:nvPr/>
+        </p:nvSpPr>
+        <p:spPr>
+          <a:xfrm>
+            <a:off x="777240" y="6382512"/>
+            <a:ext cx="10607040" cy="256032"/>
+          </a:xfrm>
+          <a:prstGeom prst="rect">
+            <a:avLst/>
+          </a:prstGeom>
+          <a:noFill/>
+          <a:ln/>
+        </p:spPr>
+        <p:txBody>
+          <a:bodyPr wrap="square" lIns="0" tIns="0" rIns="0" bIns="0" rtlCol="0" anchor="ctr"/>
+          <a:lstStyle/>
+          <a:p>
+            <a:pPr indent="0" marL="0">
+              <a:buNone/>
+            </a:pPr>
+            <a:r>
+              <a:rPr lang="en-US" sz="900" dirty="0">
+                <a:solidFill>
+                  <a:srgbClr val="6E6558"/>
+                </a:solidFill>
+                <a:latin typeface="Yu Gothic" pitchFamily="34" charset="0"/>
+                <a:ea typeface="Yu Gothic" pitchFamily="34" charset="-122"/>
+                <a:cs typeface="Yu Gothic" pitchFamily="34" charset="-120"/>
+              </a:rPr>
+              <a:t>第12回　AIを前提に事業を組み直す</a:t>
+            </a:r>
+            <a:endParaRPr lang="en-US" sz="900" dirty="0"/>
+          </a:p>
+        </p:txBody>
+      </p:sp>
+    </p:spTree>
+  </p:cSld>
+  <p:clrMapOvr>
+    <a:masterClrMapping/>
+  </p:clrMapOvr>
+</p:sld>
+</file>
+
 <file path=ppt/slides/slide2.xml><?xml version="1.0" encoding="utf-8"?>
 <p:sld xmlns:a="http://schemas.openxmlformats.org/drawingml/2006/main" xmlns:r="http://schemas.openxmlformats.org/officeDocument/2006/relationships" xmlns:p="http://schemas.openxmlformats.org/presentationml/2006/main">
   <p:cSld name="Slide 2">
@@ -1712,7 +3434,7 @@
         </p:nvSpPr>
         <p:spPr>
           <a:xfrm>
-            <a:off x="777240" y="777240"/>
+            <a:off x="777240" y="566928"/>
             <a:ext cx="10607040" cy="274320"/>
           </a:xfrm>
           <a:prstGeom prst="rect">
@@ -1737,7 +3459,7 @@
                 <a:ea typeface="Yu Gothic" pitchFamily="34" charset="-122"/>
                 <a:cs typeface="Yu Gothic" pitchFamily="34" charset="-120"/>
               </a:rPr>
-              <a:t>今日のゴール</a:t>
+              <a:t>今日の出発点</a:t>
             </a:r>
             <a:endParaRPr lang="en-US" sz="1100" dirty="0"/>
           </a:p>
@@ -1751,27 +3473,24 @@
         </p:nvSpPr>
         <p:spPr>
           <a:xfrm>
-            <a:off x="777240" y="1280160"/>
-            <a:ext cx="9758477" cy="1828800"/>
-          </a:xfrm>
-          <a:prstGeom prst="rect">
-            <a:avLst/>
-          </a:prstGeom>
-          <a:noFill/>
-          <a:ln/>
-        </p:spPr>
-        <p:txBody>
-          <a:bodyPr wrap="square" lIns="0" tIns="0" rIns="0" bIns="0" rtlCol="0" anchor="ctr"/>
-          <a:lstStyle/>
-          <a:p>
-            <a:pPr indent="0" marL="0">
-              <a:lnSpc>
-                <a:spcPct val="145000"/>
-              </a:lnSpc>
-              <a:buNone/>
-            </a:pPr>
-            <a:r>
-              <a:rPr lang="en-US" sz="2800" b="1" dirty="0">
+            <a:off x="777240" y="896112"/>
+            <a:ext cx="10607040" cy="640080"/>
+          </a:xfrm>
+          <a:prstGeom prst="rect">
+            <a:avLst/>
+          </a:prstGeom>
+          <a:noFill/>
+          <a:ln/>
+        </p:spPr>
+        <p:txBody>
+          <a:bodyPr wrap="square" lIns="0" tIns="0" rIns="0" bIns="0" rtlCol="0" anchor="ctr"/>
+          <a:lstStyle/>
+          <a:p>
+            <a:pPr indent="0" marL="0">
+              <a:buNone/>
+            </a:pPr>
+            <a:r>
+              <a:rPr lang="en-US" sz="2600" b="1" dirty="0">
                 <a:solidFill>
                   <a:srgbClr val="23201D"/>
                 </a:solidFill>
@@ -1779,9 +3498,9 @@
                 <a:ea typeface="Yu Gothic" pitchFamily="34" charset="-122"/>
                 <a:cs typeface="Yu Gothic" pitchFamily="34" charset="-120"/>
               </a:rPr>
-              <a:t>浮いた時間と変わった原価構造を、提供価値と人員計画につなぎます。</a:t>
-            </a:r>
-            <a:endParaRPr lang="en-US" sz="2800" dirty="0"/>
+              <a:t>時間が浮いただけでは、経営数値は動きません。</a:t>
+            </a:r>
+            <a:endParaRPr lang="en-US" sz="2600" dirty="0"/>
           </a:p>
         </p:txBody>
       </p:sp>
@@ -1793,14 +3512,323 @@
         </p:nvSpPr>
         <p:spPr>
           <a:xfrm>
-            <a:off x="777240" y="3429000"/>
-            <a:ext cx="10607040" cy="18288"/>
+            <a:off x="777240" y="1783080"/>
+            <a:ext cx="10607040" cy="713232"/>
           </a:xfrm>
           <a:prstGeom prst="rect">
             <a:avLst/>
           </a:prstGeom>
           <a:solidFill>
-            <a:srgbClr val="EDE7DB"/>
+            <a:srgbClr val="FFFFFF"/>
+          </a:solidFill>
+          <a:ln w="12700">
+            <a:solidFill>
+              <a:srgbClr val="EDE7DB"/>
+            </a:solidFill>
+            <a:prstDash val="solid"/>
+          </a:ln>
+        </p:spPr>
+      </p:sp>
+      <p:sp>
+        <p:nvSpPr>
+          <p:cNvPr id="5" name="Text 3"/>
+          <p:cNvSpPr txBox="1"/>
+          <p:nvPr/>
+        </p:nvSpPr>
+        <p:spPr>
+          <a:xfrm>
+            <a:off x="1051560" y="1783080"/>
+            <a:ext cx="365760" cy="713232"/>
+          </a:xfrm>
+          <a:prstGeom prst="rect">
+            <a:avLst/>
+          </a:prstGeom>
+          <a:noFill/>
+          <a:ln/>
+        </p:spPr>
+        <p:txBody>
+          <a:bodyPr wrap="square" lIns="0" tIns="0" rIns="0" bIns="0" rtlCol="0" anchor="ctr"/>
+          <a:lstStyle/>
+          <a:p>
+            <a:pPr indent="0" marL="0">
+              <a:buNone/>
+            </a:pPr>
+            <a:r>
+              <a:rPr lang="en-US" sz="1400" dirty="0">
+                <a:solidFill>
+                  <a:srgbClr val="8A8177"/>
+                </a:solidFill>
+                <a:latin typeface="Yu Gothic" pitchFamily="34" charset="0"/>
+                <a:ea typeface="Yu Gothic" pitchFamily="34" charset="-122"/>
+                <a:cs typeface="Yu Gothic" pitchFamily="34" charset="-120"/>
+              </a:rPr>
+              <a:t>―</a:t>
+            </a:r>
+            <a:endParaRPr lang="en-US" sz="1400" dirty="0"/>
+          </a:p>
+        </p:txBody>
+      </p:sp>
+      <p:sp>
+        <p:nvSpPr>
+          <p:cNvPr id="6" name="Text 4"/>
+          <p:cNvSpPr txBox="1"/>
+          <p:nvPr/>
+        </p:nvSpPr>
+        <p:spPr>
+          <a:xfrm>
+            <a:off x="1508760" y="1783080"/>
+            <a:ext cx="9601200" cy="713232"/>
+          </a:xfrm>
+          <a:prstGeom prst="rect">
+            <a:avLst/>
+          </a:prstGeom>
+          <a:noFill/>
+          <a:ln/>
+        </p:spPr>
+        <p:txBody>
+          <a:bodyPr wrap="square" lIns="0" tIns="0" rIns="0" bIns="0" rtlCol="0" anchor="ctr"/>
+          <a:lstStyle/>
+          <a:p>
+            <a:pPr indent="0" marL="0">
+              <a:buNone/>
+            </a:pPr>
+            <a:r>
+              <a:rPr lang="en-US" sz="1500" dirty="0">
+                <a:solidFill>
+                  <a:srgbClr val="23201D"/>
+                </a:solidFill>
+                <a:latin typeface="Yu Gothic" pitchFamily="34" charset="0"/>
+                <a:ea typeface="Yu Gothic" pitchFamily="34" charset="-122"/>
+                <a:cs typeface="Yu Gothic" pitchFamily="34" charset="-120"/>
+              </a:rPr>
+              <a:t>11回かけて、手は空きました</a:t>
+            </a:r>
+            <a:endParaRPr lang="en-US" sz="1500" dirty="0"/>
+          </a:p>
+        </p:txBody>
+      </p:sp>
+      <p:sp>
+        <p:nvSpPr>
+          <p:cNvPr id="7" name="Shape 5"/>
+          <p:cNvSpPr/>
+          <p:nvPr/>
+        </p:nvSpPr>
+        <p:spPr>
+          <a:xfrm>
+            <a:off x="777240" y="2624328"/>
+            <a:ext cx="10607040" cy="713232"/>
+          </a:xfrm>
+          <a:prstGeom prst="rect">
+            <a:avLst/>
+          </a:prstGeom>
+          <a:solidFill>
+            <a:srgbClr val="FFFFFF"/>
+          </a:solidFill>
+          <a:ln w="12700">
+            <a:solidFill>
+              <a:srgbClr val="EDE7DB"/>
+            </a:solidFill>
+            <a:prstDash val="solid"/>
+          </a:ln>
+        </p:spPr>
+      </p:sp>
+      <p:sp>
+        <p:nvSpPr>
+          <p:cNvPr id="8" name="Text 6"/>
+          <p:cNvSpPr txBox="1"/>
+          <p:nvPr/>
+        </p:nvSpPr>
+        <p:spPr>
+          <a:xfrm>
+            <a:off x="1051560" y="2624328"/>
+            <a:ext cx="365760" cy="713232"/>
+          </a:xfrm>
+          <a:prstGeom prst="rect">
+            <a:avLst/>
+          </a:prstGeom>
+          <a:noFill/>
+          <a:ln/>
+        </p:spPr>
+        <p:txBody>
+          <a:bodyPr wrap="square" lIns="0" tIns="0" rIns="0" bIns="0" rtlCol="0" anchor="ctr"/>
+          <a:lstStyle/>
+          <a:p>
+            <a:pPr indent="0" marL="0">
+              <a:buNone/>
+            </a:pPr>
+            <a:r>
+              <a:rPr lang="en-US" sz="1400" dirty="0">
+                <a:solidFill>
+                  <a:srgbClr val="8A8177"/>
+                </a:solidFill>
+                <a:latin typeface="Yu Gothic" pitchFamily="34" charset="0"/>
+                <a:ea typeface="Yu Gothic" pitchFamily="34" charset="-122"/>
+                <a:cs typeface="Yu Gothic" pitchFamily="34" charset="-120"/>
+              </a:rPr>
+              <a:t>―</a:t>
+            </a:r>
+            <a:endParaRPr lang="en-US" sz="1400" dirty="0"/>
+          </a:p>
+        </p:txBody>
+      </p:sp>
+      <p:sp>
+        <p:nvSpPr>
+          <p:cNvPr id="9" name="Text 7"/>
+          <p:cNvSpPr txBox="1"/>
+          <p:nvPr/>
+        </p:nvSpPr>
+        <p:spPr>
+          <a:xfrm>
+            <a:off x="1508760" y="2624328"/>
+            <a:ext cx="9601200" cy="713232"/>
+          </a:xfrm>
+          <a:prstGeom prst="rect">
+            <a:avLst/>
+          </a:prstGeom>
+          <a:noFill/>
+          <a:ln/>
+        </p:spPr>
+        <p:txBody>
+          <a:bodyPr wrap="square" lIns="0" tIns="0" rIns="0" bIns="0" rtlCol="0" anchor="ctr"/>
+          <a:lstStyle/>
+          <a:p>
+            <a:pPr indent="0" marL="0">
+              <a:buNone/>
+            </a:pPr>
+            <a:r>
+              <a:rPr lang="en-US" sz="1500" dirty="0">
+                <a:solidFill>
+                  <a:srgbClr val="23201D"/>
+                </a:solidFill>
+                <a:latin typeface="Yu Gothic" pitchFamily="34" charset="0"/>
+                <a:ea typeface="Yu Gothic" pitchFamily="34" charset="-122"/>
+                <a:cs typeface="Yu Gothic" pitchFamily="34" charset="-120"/>
+              </a:rPr>
+              <a:t>ただ、空いた時間の使い道を決めていなければ、元に戻ります</a:t>
+            </a:r>
+            <a:endParaRPr lang="en-US" sz="1500" dirty="0"/>
+          </a:p>
+        </p:txBody>
+      </p:sp>
+      <p:sp>
+        <p:nvSpPr>
+          <p:cNvPr id="10" name="Shape 8"/>
+          <p:cNvSpPr/>
+          <p:nvPr/>
+        </p:nvSpPr>
+        <p:spPr>
+          <a:xfrm>
+            <a:off x="777240" y="3465576"/>
+            <a:ext cx="10607040" cy="713232"/>
+          </a:xfrm>
+          <a:prstGeom prst="rect">
+            <a:avLst/>
+          </a:prstGeom>
+          <a:solidFill>
+            <a:srgbClr val="FFFFFF"/>
+          </a:solidFill>
+          <a:ln w="12700">
+            <a:solidFill>
+              <a:srgbClr val="EDE7DB"/>
+            </a:solidFill>
+            <a:prstDash val="solid"/>
+          </a:ln>
+        </p:spPr>
+      </p:sp>
+      <p:sp>
+        <p:nvSpPr>
+          <p:cNvPr id="11" name="Text 9"/>
+          <p:cNvSpPr txBox="1"/>
+          <p:nvPr/>
+        </p:nvSpPr>
+        <p:spPr>
+          <a:xfrm>
+            <a:off x="1051560" y="3465576"/>
+            <a:ext cx="365760" cy="713232"/>
+          </a:xfrm>
+          <a:prstGeom prst="rect">
+            <a:avLst/>
+          </a:prstGeom>
+          <a:noFill/>
+          <a:ln/>
+        </p:spPr>
+        <p:txBody>
+          <a:bodyPr wrap="square" lIns="0" tIns="0" rIns="0" bIns="0" rtlCol="0" anchor="ctr"/>
+          <a:lstStyle/>
+          <a:p>
+            <a:pPr indent="0" marL="0">
+              <a:buNone/>
+            </a:pPr>
+            <a:r>
+              <a:rPr lang="en-US" sz="1400" dirty="0">
+                <a:solidFill>
+                  <a:srgbClr val="8A8177"/>
+                </a:solidFill>
+                <a:latin typeface="Yu Gothic" pitchFamily="34" charset="0"/>
+                <a:ea typeface="Yu Gothic" pitchFamily="34" charset="-122"/>
+                <a:cs typeface="Yu Gothic" pitchFamily="34" charset="-120"/>
+              </a:rPr>
+              <a:t>―</a:t>
+            </a:r>
+            <a:endParaRPr lang="en-US" sz="1400" dirty="0"/>
+          </a:p>
+        </p:txBody>
+      </p:sp>
+      <p:sp>
+        <p:nvSpPr>
+          <p:cNvPr id="12" name="Text 10"/>
+          <p:cNvSpPr txBox="1"/>
+          <p:nvPr/>
+        </p:nvSpPr>
+        <p:spPr>
+          <a:xfrm>
+            <a:off x="1508760" y="3465576"/>
+            <a:ext cx="9601200" cy="713232"/>
+          </a:xfrm>
+          <a:prstGeom prst="rect">
+            <a:avLst/>
+          </a:prstGeom>
+          <a:noFill/>
+          <a:ln/>
+        </p:spPr>
+        <p:txBody>
+          <a:bodyPr wrap="square" lIns="0" tIns="0" rIns="0" bIns="0" rtlCol="0" anchor="ctr"/>
+          <a:lstStyle/>
+          <a:p>
+            <a:pPr indent="0" marL="0">
+              <a:buNone/>
+            </a:pPr>
+            <a:r>
+              <a:rPr lang="en-US" sz="1500" dirty="0">
+                <a:solidFill>
+                  <a:srgbClr val="23201D"/>
+                </a:solidFill>
+                <a:latin typeface="Yu Gothic" pitchFamily="34" charset="0"/>
+                <a:ea typeface="Yu Gothic" pitchFamily="34" charset="-122"/>
+                <a:cs typeface="Yu Gothic" pitchFamily="34" charset="-120"/>
+              </a:rPr>
+              <a:t>今日は道具の話を終えて、事業の話に戻ります</a:t>
+            </a:r>
+            <a:endParaRPr lang="en-US" sz="1500" dirty="0"/>
+          </a:p>
+        </p:txBody>
+      </p:sp>
+      <p:sp>
+        <p:nvSpPr>
+          <p:cNvPr id="13" name="Shape 11"/>
+          <p:cNvSpPr/>
+          <p:nvPr/>
+        </p:nvSpPr>
+        <p:spPr>
+          <a:xfrm>
+            <a:off x="777240" y="4526280"/>
+            <a:ext cx="10607040" cy="914400"/>
+          </a:xfrm>
+          <a:prstGeom prst="rect">
+            <a:avLst/>
+          </a:prstGeom>
+          <a:solidFill>
+            <a:srgbClr val="B04A2F"/>
           </a:solidFill>
           <a:ln w="12700">
             <a:solidFill>
@@ -1812,14 +3840,14 @@
       </p:sp>
       <p:sp>
         <p:nvSpPr>
-          <p:cNvPr id="5" name="Text 3"/>
-          <p:cNvSpPr txBox="1"/>
-          <p:nvPr/>
-        </p:nvSpPr>
-        <p:spPr>
-          <a:xfrm>
-            <a:off x="777240" y="3657600"/>
-            <a:ext cx="9015984" cy="822960"/>
+          <p:cNvPr id="14" name="Text 12"/>
+          <p:cNvSpPr txBox="1"/>
+          <p:nvPr/>
+        </p:nvSpPr>
+        <p:spPr>
+          <a:xfrm>
+            <a:off x="1143000" y="4526280"/>
+            <a:ext cx="9875520" cy="914400"/>
           </a:xfrm>
           <a:prstGeom prst="rect">
             <a:avLst/>
@@ -1833,84 +3861,59 @@
           <a:p>
             <a:pPr indent="0" marL="0">
               <a:lnSpc>
-                <a:spcPct val="140000"/>
+                <a:spcPct val="130000"/>
               </a:lnSpc>
               <a:buNone/>
             </a:pPr>
             <a:r>
-              <a:rPr lang="en-US" sz="1500" dirty="0">
-                <a:solidFill>
-                  <a:srgbClr val="5A534A"/>
-                </a:solidFill>
-                <a:latin typeface="Yu Gothic" pitchFamily="34" charset="0"/>
-                <a:ea typeface="Yu Gothic" pitchFamily="34" charset="-122"/>
-                <a:cs typeface="Yu Gothic" pitchFamily="34" charset="-120"/>
-              </a:rPr>
-              <a:t>最終回です。社員のみなさんにも同席いただきます。</a:t>
-            </a:r>
-            <a:endParaRPr lang="en-US" sz="1500" dirty="0"/>
-          </a:p>
-        </p:txBody>
-      </p:sp>
-      <p:sp>
-        <p:nvSpPr>
-          <p:cNvPr id="6" name="Shape 4"/>
-          <p:cNvSpPr/>
-          <p:nvPr/>
-        </p:nvSpPr>
-        <p:spPr>
-          <a:xfrm>
-            <a:off x="777240" y="4846320"/>
-            <a:ext cx="10607040" cy="777240"/>
-          </a:xfrm>
-          <a:prstGeom prst="rect">
-            <a:avLst/>
-          </a:prstGeom>
-          <a:solidFill>
-            <a:srgbClr val="EDE7DB"/>
-          </a:solidFill>
-          <a:ln w="12700">
-            <a:solidFill>
-              <a:srgbClr val="333333"/>
-            </a:solidFill>
-            <a:prstDash val="solid"/>
-          </a:ln>
-        </p:spPr>
-      </p:sp>
-      <p:sp>
-        <p:nvSpPr>
-          <p:cNvPr id="7" name="Text 5"/>
-          <p:cNvSpPr txBox="1"/>
-          <p:nvPr/>
-        </p:nvSpPr>
-        <p:spPr>
-          <a:xfrm>
-            <a:off x="960120" y="4956048"/>
-            <a:ext cx="1956816" cy="237744"/>
-          </a:xfrm>
-          <a:prstGeom prst="rect">
-            <a:avLst/>
-          </a:prstGeom>
-          <a:noFill/>
-          <a:ln/>
-        </p:spPr>
-        <p:txBody>
-          <a:bodyPr wrap="square" lIns="0" tIns="0" rIns="0" bIns="0" rtlCol="0" anchor="ctr"/>
-          <a:lstStyle/>
-          <a:p>
-            <a:pPr indent="0" marL="0">
-              <a:buNone/>
-            </a:pPr>
-            <a:r>
-              <a:rPr lang="en-US" sz="900" b="1" dirty="0">
-                <a:solidFill>
-                  <a:srgbClr val="B04A2F"/>
-                </a:solidFill>
-                <a:latin typeface="Yu Gothic" pitchFamily="34" charset="0"/>
-                <a:ea typeface="Yu Gothic" pitchFamily="34" charset="-122"/>
-                <a:cs typeface="Yu Gothic" pitchFamily="34" charset="-120"/>
-              </a:rPr>
-              <a:t>0-15分</a:t>
+              <a:rPr lang="en-US" sz="1800" b="1" dirty="0">
+                <a:solidFill>
+                  <a:srgbClr val="FFFFFF"/>
+                </a:solidFill>
+                <a:latin typeface="Yu Gothic" pitchFamily="34" charset="0"/>
+                <a:ea typeface="Yu Gothic" pitchFamily="34" charset="-122"/>
+                <a:cs typeface="Yu Gothic" pitchFamily="34" charset="-120"/>
+              </a:rPr>
+              <a:t>浮いた時間を何に移すか。それを決めるのが、経営者の仕事です。</a:t>
+            </a:r>
+            <a:endParaRPr lang="en-US" sz="1800" dirty="0"/>
+          </a:p>
+        </p:txBody>
+      </p:sp>
+      <p:sp>
+        <p:nvSpPr>
+          <p:cNvPr id="15" name="Text 13"/>
+          <p:cNvSpPr txBox="1"/>
+          <p:nvPr/>
+        </p:nvSpPr>
+        <p:spPr>
+          <a:xfrm>
+            <a:off x="777240" y="6382512"/>
+            <a:ext cx="7424928" cy="256032"/>
+          </a:xfrm>
+          <a:prstGeom prst="rect">
+            <a:avLst/>
+          </a:prstGeom>
+          <a:noFill/>
+          <a:ln/>
+        </p:spPr>
+        <p:txBody>
+          <a:bodyPr wrap="square" lIns="0" tIns="0" rIns="0" bIns="0" rtlCol="0" anchor="ctr"/>
+          <a:lstStyle/>
+          <a:p>
+            <a:pPr indent="0" marL="0">
+              <a:buNone/>
+            </a:pPr>
+            <a:r>
+              <a:rPr lang="en-US" sz="900" dirty="0">
+                <a:solidFill>
+                  <a:srgbClr val="8A8177"/>
+                </a:solidFill>
+                <a:latin typeface="Yu Gothic" pitchFamily="34" charset="0"/>
+                <a:ea typeface="Yu Gothic" pitchFamily="34" charset="-122"/>
+                <a:cs typeface="Yu Gothic" pitchFamily="34" charset="-120"/>
+              </a:rPr>
+              <a:t>第12回　AIを前提に事業を組み直す</a:t>
             </a:r>
             <a:endParaRPr lang="en-US" sz="900" dirty="0"/>
           </a:p>
@@ -1918,377 +3921,26 @@
       </p:sp>
       <p:sp>
         <p:nvSpPr>
-          <p:cNvPr id="8" name="Text 6"/>
-          <p:cNvSpPr txBox="1"/>
-          <p:nvPr/>
-        </p:nvSpPr>
-        <p:spPr>
-          <a:xfrm>
-            <a:off x="960120" y="5193792"/>
-            <a:ext cx="1956816" cy="365760"/>
-          </a:xfrm>
-          <a:prstGeom prst="rect">
-            <a:avLst/>
-          </a:prstGeom>
-          <a:noFill/>
-          <a:ln/>
-        </p:spPr>
-        <p:txBody>
-          <a:bodyPr wrap="square" lIns="0" tIns="0" rIns="0" bIns="0" rtlCol="0" anchor="ctr"/>
-          <a:lstStyle/>
-          <a:p>
-            <a:pPr indent="0" marL="0">
-              <a:buNone/>
-            </a:pPr>
-            <a:r>
-              <a:rPr lang="en-US" sz="1100" dirty="0">
-                <a:solidFill>
-                  <a:srgbClr val="23201D"/>
-                </a:solidFill>
-                <a:latin typeface="Yu Gothic" pitchFamily="34" charset="0"/>
-                <a:ea typeface="Yu Gothic" pitchFamily="34" charset="-122"/>
-                <a:cs typeface="Yu Gothic" pitchFamily="34" charset="-120"/>
-              </a:rPr>
-              <a:t>前回の宿題を実物で</a:t>
-            </a:r>
-            <a:endParaRPr lang="en-US" sz="1100" dirty="0"/>
-          </a:p>
-        </p:txBody>
-      </p:sp>
-      <p:sp>
-        <p:nvSpPr>
-          <p:cNvPr id="9" name="Text 7"/>
-          <p:cNvSpPr txBox="1"/>
-          <p:nvPr/>
-        </p:nvSpPr>
-        <p:spPr>
-          <a:xfrm>
-            <a:off x="3008376" y="4956048"/>
-            <a:ext cx="1956816" cy="237744"/>
-          </a:xfrm>
-          <a:prstGeom prst="rect">
-            <a:avLst/>
-          </a:prstGeom>
-          <a:noFill/>
-          <a:ln/>
-        </p:spPr>
-        <p:txBody>
-          <a:bodyPr wrap="square" lIns="0" tIns="0" rIns="0" bIns="0" rtlCol="0" anchor="ctr"/>
-          <a:lstStyle/>
-          <a:p>
-            <a:pPr indent="0" marL="0">
-              <a:buNone/>
-            </a:pPr>
-            <a:r>
-              <a:rPr lang="en-US" sz="900" b="1" dirty="0">
-                <a:solidFill>
-                  <a:srgbClr val="B04A2F"/>
-                </a:solidFill>
-                <a:latin typeface="Yu Gothic" pitchFamily="34" charset="0"/>
-                <a:ea typeface="Yu Gothic" pitchFamily="34" charset="-122"/>
-                <a:cs typeface="Yu Gothic" pitchFamily="34" charset="-120"/>
-              </a:rPr>
-              <a:t>15-35分</a:t>
-            </a:r>
-            <a:endParaRPr lang="en-US" sz="900" dirty="0"/>
-          </a:p>
-        </p:txBody>
-      </p:sp>
-      <p:sp>
-        <p:nvSpPr>
-          <p:cNvPr id="10" name="Text 8"/>
-          <p:cNvSpPr txBox="1"/>
-          <p:nvPr/>
-        </p:nvSpPr>
-        <p:spPr>
-          <a:xfrm>
-            <a:off x="3008376" y="5193792"/>
-            <a:ext cx="1956816" cy="365760"/>
-          </a:xfrm>
-          <a:prstGeom prst="rect">
-            <a:avLst/>
-          </a:prstGeom>
-          <a:noFill/>
-          <a:ln/>
-        </p:spPr>
-        <p:txBody>
-          <a:bodyPr wrap="square" lIns="0" tIns="0" rIns="0" bIns="0" rtlCol="0" anchor="ctr"/>
-          <a:lstStyle/>
-          <a:p>
-            <a:pPr indent="0" marL="0">
-              <a:buNone/>
-            </a:pPr>
-            <a:r>
-              <a:rPr lang="en-US" sz="1100" dirty="0">
-                <a:solidFill>
-                  <a:srgbClr val="23201D"/>
-                </a:solidFill>
-                <a:latin typeface="Yu Gothic" pitchFamily="34" charset="0"/>
-                <a:ea typeface="Yu Gothic" pitchFamily="34" charset="-122"/>
-                <a:cs typeface="Yu Gothic" pitchFamily="34" charset="-120"/>
-              </a:rPr>
-              <a:t>テーマとデモ</a:t>
-            </a:r>
-            <a:endParaRPr lang="en-US" sz="1100" dirty="0"/>
-          </a:p>
-        </p:txBody>
-      </p:sp>
-      <p:sp>
-        <p:nvSpPr>
-          <p:cNvPr id="11" name="Text 9"/>
-          <p:cNvSpPr txBox="1"/>
-          <p:nvPr/>
-        </p:nvSpPr>
-        <p:spPr>
-          <a:xfrm>
-            <a:off x="5056632" y="4956048"/>
-            <a:ext cx="1956816" cy="237744"/>
-          </a:xfrm>
-          <a:prstGeom prst="rect">
-            <a:avLst/>
-          </a:prstGeom>
-          <a:noFill/>
-          <a:ln/>
-        </p:spPr>
-        <p:txBody>
-          <a:bodyPr wrap="square" lIns="0" tIns="0" rIns="0" bIns="0" rtlCol="0" anchor="ctr"/>
-          <a:lstStyle/>
-          <a:p>
-            <a:pPr indent="0" marL="0">
-              <a:buNone/>
-            </a:pPr>
-            <a:r>
-              <a:rPr lang="en-US" sz="900" b="1" dirty="0">
-                <a:solidFill>
-                  <a:srgbClr val="B04A2F"/>
-                </a:solidFill>
-                <a:latin typeface="Yu Gothic" pitchFamily="34" charset="0"/>
-                <a:ea typeface="Yu Gothic" pitchFamily="34" charset="-122"/>
-                <a:cs typeface="Yu Gothic" pitchFamily="34" charset="-120"/>
-              </a:rPr>
-              <a:t>35-90分</a:t>
-            </a:r>
-            <a:endParaRPr lang="en-US" sz="900" dirty="0"/>
-          </a:p>
-        </p:txBody>
-      </p:sp>
-      <p:sp>
-        <p:nvSpPr>
-          <p:cNvPr id="12" name="Text 10"/>
-          <p:cNvSpPr txBox="1"/>
-          <p:nvPr/>
-        </p:nvSpPr>
-        <p:spPr>
-          <a:xfrm>
-            <a:off x="5056632" y="5193792"/>
-            <a:ext cx="1956816" cy="365760"/>
-          </a:xfrm>
-          <a:prstGeom prst="rect">
-            <a:avLst/>
-          </a:prstGeom>
-          <a:noFill/>
-          <a:ln/>
-        </p:spPr>
-        <p:txBody>
-          <a:bodyPr wrap="square" lIns="0" tIns="0" rIns="0" bIns="0" rtlCol="0" anchor="ctr"/>
-          <a:lstStyle/>
-          <a:p>
-            <a:pPr indent="0" marL="0">
-              <a:buNone/>
-            </a:pPr>
-            <a:r>
-              <a:rPr lang="en-US" sz="1100" dirty="0">
-                <a:solidFill>
-                  <a:srgbClr val="23201D"/>
-                </a:solidFill>
-                <a:latin typeface="Yu Gothic" pitchFamily="34" charset="0"/>
-                <a:ea typeface="Yu Gothic" pitchFamily="34" charset="-122"/>
-                <a:cs typeface="Yu Gothic" pitchFamily="34" charset="-120"/>
-              </a:rPr>
-              <a:t>一緒に手を動かす</a:t>
-            </a:r>
-            <a:endParaRPr lang="en-US" sz="1100" dirty="0"/>
-          </a:p>
-        </p:txBody>
-      </p:sp>
-      <p:sp>
-        <p:nvSpPr>
-          <p:cNvPr id="13" name="Text 11"/>
-          <p:cNvSpPr txBox="1"/>
-          <p:nvPr/>
-        </p:nvSpPr>
-        <p:spPr>
-          <a:xfrm>
-            <a:off x="7104888" y="4956048"/>
-            <a:ext cx="1956816" cy="237744"/>
-          </a:xfrm>
-          <a:prstGeom prst="rect">
-            <a:avLst/>
-          </a:prstGeom>
-          <a:noFill/>
-          <a:ln/>
-        </p:spPr>
-        <p:txBody>
-          <a:bodyPr wrap="square" lIns="0" tIns="0" rIns="0" bIns="0" rtlCol="0" anchor="ctr"/>
-          <a:lstStyle/>
-          <a:p>
-            <a:pPr indent="0" marL="0">
-              <a:buNone/>
-            </a:pPr>
-            <a:r>
-              <a:rPr lang="en-US" sz="900" b="1" dirty="0">
-                <a:solidFill>
-                  <a:srgbClr val="B04A2F"/>
-                </a:solidFill>
-                <a:latin typeface="Yu Gothic" pitchFamily="34" charset="0"/>
-                <a:ea typeface="Yu Gothic" pitchFamily="34" charset="-122"/>
-                <a:cs typeface="Yu Gothic" pitchFamily="34" charset="-120"/>
-              </a:rPr>
-              <a:t>90-105分</a:t>
-            </a:r>
-            <a:endParaRPr lang="en-US" sz="900" dirty="0"/>
-          </a:p>
-        </p:txBody>
-      </p:sp>
-      <p:sp>
-        <p:nvSpPr>
-          <p:cNvPr id="14" name="Text 12"/>
-          <p:cNvSpPr txBox="1"/>
-          <p:nvPr/>
-        </p:nvSpPr>
-        <p:spPr>
-          <a:xfrm>
-            <a:off x="7104888" y="5193792"/>
-            <a:ext cx="1956816" cy="365760"/>
-          </a:xfrm>
-          <a:prstGeom prst="rect">
-            <a:avLst/>
-          </a:prstGeom>
-          <a:noFill/>
-          <a:ln/>
-        </p:spPr>
-        <p:txBody>
-          <a:bodyPr wrap="square" lIns="0" tIns="0" rIns="0" bIns="0" rtlCol="0" anchor="ctr"/>
-          <a:lstStyle/>
-          <a:p>
-            <a:pPr indent="0" marL="0">
-              <a:buNone/>
-            </a:pPr>
-            <a:r>
-              <a:rPr lang="en-US" sz="1100" dirty="0">
-                <a:solidFill>
-                  <a:srgbClr val="23201D"/>
-                </a:solidFill>
-                <a:latin typeface="Yu Gothic" pitchFamily="34" charset="0"/>
-                <a:ea typeface="Yu Gothic" pitchFamily="34" charset="-122"/>
-                <a:cs typeface="Yu Gothic" pitchFamily="34" charset="-120"/>
-              </a:rPr>
-              <a:t>業務への組み込み</a:t>
-            </a:r>
-            <a:endParaRPr lang="en-US" sz="1100" dirty="0"/>
-          </a:p>
-        </p:txBody>
-      </p:sp>
-      <p:sp>
-        <p:nvSpPr>
-          <p:cNvPr id="15" name="Text 13"/>
-          <p:cNvSpPr txBox="1"/>
-          <p:nvPr/>
-        </p:nvSpPr>
-        <p:spPr>
-          <a:xfrm>
-            <a:off x="9153144" y="4956048"/>
-            <a:ext cx="1956816" cy="237744"/>
-          </a:xfrm>
-          <a:prstGeom prst="rect">
-            <a:avLst/>
-          </a:prstGeom>
-          <a:noFill/>
-          <a:ln/>
-        </p:spPr>
-        <p:txBody>
-          <a:bodyPr wrap="square" lIns="0" tIns="0" rIns="0" bIns="0" rtlCol="0" anchor="ctr"/>
-          <a:lstStyle/>
-          <a:p>
-            <a:pPr indent="0" marL="0">
-              <a:buNone/>
-            </a:pPr>
-            <a:r>
-              <a:rPr lang="en-US" sz="900" b="1" dirty="0">
-                <a:solidFill>
-                  <a:srgbClr val="B04A2F"/>
-                </a:solidFill>
-                <a:latin typeface="Yu Gothic" pitchFamily="34" charset="0"/>
-                <a:ea typeface="Yu Gothic" pitchFamily="34" charset="-122"/>
-                <a:cs typeface="Yu Gothic" pitchFamily="34" charset="-120"/>
-              </a:rPr>
-              <a:t>105-120分</a:t>
-            </a:r>
-            <a:endParaRPr lang="en-US" sz="900" dirty="0"/>
-          </a:p>
-        </p:txBody>
-      </p:sp>
-      <p:sp>
-        <p:nvSpPr>
           <p:cNvPr id="16" name="Text 14"/>
           <p:cNvSpPr txBox="1"/>
           <p:nvPr/>
         </p:nvSpPr>
         <p:spPr>
           <a:xfrm>
-            <a:off x="9153144" y="5193792"/>
-            <a:ext cx="1956816" cy="365760"/>
-          </a:xfrm>
-          <a:prstGeom prst="rect">
-            <a:avLst/>
-          </a:prstGeom>
-          <a:noFill/>
-          <a:ln/>
-        </p:spPr>
-        <p:txBody>
-          <a:bodyPr wrap="square" lIns="0" tIns="0" rIns="0" bIns="0" rtlCol="0" anchor="ctr"/>
-          <a:lstStyle/>
-          <a:p>
-            <a:pPr indent="0" marL="0">
-              <a:buNone/>
-            </a:pPr>
-            <a:r>
-              <a:rPr lang="en-US" sz="1100" dirty="0">
-                <a:solidFill>
-                  <a:srgbClr val="23201D"/>
-                </a:solidFill>
-                <a:latin typeface="Yu Gothic" pitchFamily="34" charset="0"/>
-                <a:ea typeface="Yu Gothic" pitchFamily="34" charset="-122"/>
-                <a:cs typeface="Yu Gothic" pitchFamily="34" charset="-120"/>
-              </a:rPr>
-              <a:t>宿題・記録</a:t>
-            </a:r>
-            <a:endParaRPr lang="en-US" sz="1100" dirty="0"/>
-          </a:p>
-        </p:txBody>
-      </p:sp>
-      <p:sp>
-        <p:nvSpPr>
-          <p:cNvPr id="17" name="Text 15"/>
-          <p:cNvSpPr txBox="1"/>
-          <p:nvPr/>
-        </p:nvSpPr>
-        <p:spPr>
-          <a:xfrm>
-            <a:off x="777240" y="6355080"/>
-            <a:ext cx="7424928" cy="274320"/>
-          </a:xfrm>
-          <a:prstGeom prst="rect">
-            <a:avLst/>
-          </a:prstGeom>
-          <a:noFill/>
-          <a:ln/>
-        </p:spPr>
-        <p:txBody>
-          <a:bodyPr wrap="square" lIns="0" tIns="0" rIns="0" bIns="0" rtlCol="0" anchor="ctr"/>
-          <a:lstStyle/>
-          <a:p>
-            <a:pPr indent="0" marL="0">
+            <a:off x="8202168" y="6382512"/>
+            <a:ext cx="3182112" cy="256032"/>
+          </a:xfrm>
+          <a:prstGeom prst="rect">
+            <a:avLst/>
+          </a:prstGeom>
+          <a:noFill/>
+          <a:ln/>
+        </p:spPr>
+        <p:txBody>
+          <a:bodyPr wrap="square" lIns="0" tIns="0" rIns="0" bIns="0" rtlCol="0" anchor="ctr"/>
+          <a:lstStyle/>
+          <a:p>
+            <a:pPr algn="r" indent="0" marL="0">
               <a:buNone/>
             </a:pPr>
             <a:r>
@@ -2300,46 +3952,7 @@
                 <a:ea typeface="Yu Gothic" pitchFamily="34" charset="-122"/>
                 <a:cs typeface="Yu Gothic" pitchFamily="34" charset="-120"/>
               </a:rPr>
-              <a:t>第12回　AIを前提に事業を組み直す</a:t>
-            </a:r>
-            <a:endParaRPr lang="en-US" sz="900" dirty="0"/>
-          </a:p>
-        </p:txBody>
-      </p:sp>
-      <p:sp>
-        <p:nvSpPr>
-          <p:cNvPr id="18" name="Text 16"/>
-          <p:cNvSpPr txBox="1"/>
-          <p:nvPr/>
-        </p:nvSpPr>
-        <p:spPr>
-          <a:xfrm>
-            <a:off x="8202168" y="6355080"/>
-            <a:ext cx="3182112" cy="274320"/>
-          </a:xfrm>
-          <a:prstGeom prst="rect">
-            <a:avLst/>
-          </a:prstGeom>
-          <a:noFill/>
-          <a:ln/>
-        </p:spPr>
-        <p:txBody>
-          <a:bodyPr wrap="square" lIns="0" tIns="0" rIns="0" bIns="0" rtlCol="0" anchor="ctr"/>
-          <a:lstStyle/>
-          <a:p>
-            <a:pPr algn="r" indent="0" marL="0">
-              <a:buNone/>
-            </a:pPr>
-            <a:r>
-              <a:rPr lang="en-US" sz="900" dirty="0">
-                <a:solidFill>
-                  <a:srgbClr val="8A8177"/>
-                </a:solidFill>
-                <a:latin typeface="Yu Gothic" pitchFamily="34" charset="0"/>
-                <a:ea typeface="Yu Gothic" pitchFamily="34" charset="-122"/>
-                <a:cs typeface="Yu Gothic" pitchFamily="34" charset="-120"/>
-              </a:rPr>
-              <a:t>今日のゴール</a:t>
+              <a:t>出発点</a:t>
             </a:r>
             <a:endParaRPr lang="en-US" sz="900" dirty="0"/>
           </a:p>
@@ -2385,7 +3998,7 @@
         </p:nvSpPr>
         <p:spPr>
           <a:xfrm>
-            <a:off x="777240" y="640080"/>
+            <a:off x="777240" y="566928"/>
             <a:ext cx="10607040" cy="274320"/>
           </a:xfrm>
           <a:prstGeom prst="rect">
@@ -2410,7 +4023,7 @@
                 <a:ea typeface="Yu Gothic" pitchFamily="34" charset="-122"/>
                 <a:cs typeface="Yu Gothic" pitchFamily="34" charset="-120"/>
               </a:rPr>
-              <a:t>考え方</a:t>
+              <a:t>今日のゴール</a:t>
             </a:r>
             <a:endParaRPr lang="en-US" sz="1100" dirty="0"/>
           </a:p>
@@ -2424,24 +4037,27 @@
         </p:nvSpPr>
         <p:spPr>
           <a:xfrm>
-            <a:off x="777240" y="960120"/>
-            <a:ext cx="10607040" cy="640080"/>
-          </a:xfrm>
-          <a:prstGeom prst="rect">
-            <a:avLst/>
-          </a:prstGeom>
-          <a:noFill/>
-          <a:ln/>
-        </p:spPr>
-        <p:txBody>
-          <a:bodyPr wrap="square" lIns="0" tIns="0" rIns="0" bIns="0" rtlCol="0" anchor="ctr"/>
-          <a:lstStyle/>
-          <a:p>
-            <a:pPr indent="0" marL="0">
-              <a:buNone/>
-            </a:pPr>
-            <a:r>
-              <a:rPr lang="en-US" sz="2700" b="1" dirty="0">
+            <a:off x="777240" y="1143000"/>
+            <a:ext cx="9864547" cy="1645920"/>
+          </a:xfrm>
+          <a:prstGeom prst="rect">
+            <a:avLst/>
+          </a:prstGeom>
+          <a:noFill/>
+          <a:ln/>
+        </p:spPr>
+        <p:txBody>
+          <a:bodyPr wrap="square" lIns="0" tIns="0" rIns="0" bIns="0" rtlCol="0" anchor="ctr"/>
+          <a:lstStyle/>
+          <a:p>
+            <a:pPr indent="0" marL="0">
+              <a:lnSpc>
+                <a:spcPct val="145000"/>
+              </a:lnSpc>
+              <a:buNone/>
+            </a:pPr>
+            <a:r>
+              <a:rPr lang="en-US" sz="2600" b="1" dirty="0">
                 <a:solidFill>
                   <a:srgbClr val="23201D"/>
                 </a:solidFill>
@@ -2449,9 +4065,9 @@
                 <a:ea typeface="Yu Gothic" pitchFamily="34" charset="-122"/>
                 <a:cs typeface="Yu Gothic" pitchFamily="34" charset="-120"/>
               </a:rPr>
-              <a:t>3年構想は、4つの問いで書きます</a:t>
-            </a:r>
-            <a:endParaRPr lang="en-US" sz="2700" dirty="0"/>
+              <a:t>浮いた時間と変わった原価構造を、提供価値と人員計画につなぎます。</a:t>
+            </a:r>
+            <a:endParaRPr lang="en-US" sz="2600" dirty="0"/>
           </a:p>
         </p:txBody>
       </p:sp>
@@ -2463,18 +4079,18 @@
         </p:nvSpPr>
         <p:spPr>
           <a:xfrm>
-            <a:off x="777240" y="1783080"/>
-            <a:ext cx="10607040" cy="838962"/>
+            <a:off x="777240" y="3063240"/>
+            <a:ext cx="10607040" cy="18288"/>
           </a:xfrm>
           <a:prstGeom prst="rect">
             <a:avLst/>
           </a:prstGeom>
           <a:solidFill>
-            <a:srgbClr val="FFFFFF"/>
+            <a:srgbClr val="EDE7DB"/>
           </a:solidFill>
           <a:ln w="12700">
             <a:solidFill>
-              <a:srgbClr val="EDE7DB"/>
+              <a:srgbClr val="333333"/>
             </a:solidFill>
             <a:prstDash val="solid"/>
           </a:ln>
@@ -2482,24 +4098,66 @@
       </p:sp>
       <p:sp>
         <p:nvSpPr>
-          <p:cNvPr id="5" name="Shape 3"/>
+          <p:cNvPr id="5" name="Text 3"/>
+          <p:cNvSpPr txBox="1"/>
+          <p:nvPr/>
+        </p:nvSpPr>
+        <p:spPr>
+          <a:xfrm>
+            <a:off x="777240" y="3291840"/>
+            <a:ext cx="9334195" cy="1005840"/>
+          </a:xfrm>
+          <a:prstGeom prst="rect">
+            <a:avLst/>
+          </a:prstGeom>
+          <a:noFill/>
+          <a:ln/>
+        </p:spPr>
+        <p:txBody>
+          <a:bodyPr wrap="square" lIns="0" tIns="0" rIns="0" bIns="0" rtlCol="0" anchor="ctr"/>
+          <a:lstStyle/>
+          <a:p>
+            <a:pPr indent="0" marL="0">
+              <a:lnSpc>
+                <a:spcPct val="140000"/>
+              </a:lnSpc>
+              <a:buNone/>
+            </a:pPr>
+            <a:r>
+              <a:rPr lang="en-US" sz="1450" dirty="0">
+                <a:solidFill>
+                  <a:srgbClr val="5A534A"/>
+                </a:solidFill>
+                <a:latin typeface="Yu Gothic" pitchFamily="34" charset="0"/>
+                <a:ea typeface="Yu Gothic" pitchFamily="34" charset="-122"/>
+                <a:cs typeface="Yu Gothic" pitchFamily="34" charset="-120"/>
+              </a:rPr>
+              <a:t>最終回です。社員のみなさんにも同席いただき、これからの方針をお伝えします。</a:t>
+            </a:r>
+            <a:endParaRPr lang="en-US" sz="1450" dirty="0"/>
+          </a:p>
+        </p:txBody>
+      </p:sp>
+      <p:sp>
+        <p:nvSpPr>
+          <p:cNvPr id="6" name="Shape 4"/>
           <p:cNvSpPr/>
           <p:nvPr/>
         </p:nvSpPr>
         <p:spPr>
           <a:xfrm>
-            <a:off x="1033272" y="2010537"/>
-            <a:ext cx="384048" cy="384048"/>
-          </a:xfrm>
-          <a:prstGeom prst="ellipse">
+            <a:off x="777240" y="4754880"/>
+            <a:ext cx="10607040" cy="822960"/>
+          </a:xfrm>
+          <a:prstGeom prst="rect">
             <a:avLst/>
           </a:prstGeom>
           <a:solidFill>
-            <a:srgbClr val="B04A2F"/>
+            <a:srgbClr val="EDE7DB"/>
           </a:solidFill>
           <a:ln w="12700">
             <a:solidFill>
-              <a:srgbClr val="B04A2F"/>
+              <a:srgbClr val="333333"/>
             </a:solidFill>
             <a:prstDash val="solid"/>
           </a:ln>
@@ -2507,69 +4165,69 @@
       </p:sp>
       <p:sp>
         <p:nvSpPr>
-          <p:cNvPr id="6" name="Text 4"/>
-          <p:cNvSpPr txBox="1"/>
-          <p:nvPr/>
-        </p:nvSpPr>
-        <p:spPr>
-          <a:xfrm>
-            <a:off x="1033272" y="2010537"/>
-            <a:ext cx="384048" cy="384048"/>
-          </a:xfrm>
-          <a:prstGeom prst="rect">
-            <a:avLst/>
-          </a:prstGeom>
-          <a:noFill/>
-          <a:ln/>
-        </p:spPr>
-        <p:txBody>
-          <a:bodyPr wrap="square" lIns="0" tIns="0" rIns="0" bIns="0" rtlCol="0" anchor="ctr"/>
-          <a:lstStyle/>
-          <a:p>
-            <a:pPr algn="ctr" indent="0" marL="0">
-              <a:buNone/>
-            </a:pPr>
-            <a:r>
-              <a:rPr lang="en-US" sz="1400" b="1" dirty="0">
-                <a:solidFill>
-                  <a:srgbClr val="FFFFFF"/>
-                </a:solidFill>
-                <a:latin typeface="Yu Gothic" pitchFamily="34" charset="0"/>
-                <a:ea typeface="Yu Gothic" pitchFamily="34" charset="-122"/>
-                <a:cs typeface="Yu Gothic" pitchFamily="34" charset="-120"/>
-              </a:rPr>
-              <a:t>1</a:t>
-            </a:r>
-            <a:endParaRPr lang="en-US" sz="1400" dirty="0"/>
-          </a:p>
-        </p:txBody>
-      </p:sp>
-      <p:sp>
-        <p:nvSpPr>
           <p:cNvPr id="7" name="Text 5"/>
           <p:cNvSpPr txBox="1"/>
           <p:nvPr/>
         </p:nvSpPr>
         <p:spPr>
           <a:xfrm>
-            <a:off x="1645920" y="1874520"/>
-            <a:ext cx="3394253" cy="656082"/>
-          </a:xfrm>
-          <a:prstGeom prst="rect">
-            <a:avLst/>
-          </a:prstGeom>
-          <a:noFill/>
-          <a:ln/>
-        </p:spPr>
-        <p:txBody>
-          <a:bodyPr wrap="square" lIns="0" tIns="0" rIns="0" bIns="0" rtlCol="0" anchor="ctr"/>
-          <a:lstStyle/>
-          <a:p>
-            <a:pPr indent="0" marL="0">
-              <a:buNone/>
-            </a:pPr>
-            <a:r>
-              <a:rPr lang="en-US" sz="1500" b="1" dirty="0">
+            <a:off x="960120" y="4873752"/>
+            <a:ext cx="1956816" cy="237744"/>
+          </a:xfrm>
+          <a:prstGeom prst="rect">
+            <a:avLst/>
+          </a:prstGeom>
+          <a:noFill/>
+          <a:ln/>
+        </p:spPr>
+        <p:txBody>
+          <a:bodyPr wrap="square" lIns="0" tIns="0" rIns="0" bIns="0" rtlCol="0" anchor="ctr"/>
+          <a:lstStyle/>
+          <a:p>
+            <a:pPr indent="0" marL="0">
+              <a:buNone/>
+            </a:pPr>
+            <a:r>
+              <a:rPr lang="en-US" sz="900" b="1" dirty="0">
+                <a:solidFill>
+                  <a:srgbClr val="B04A2F"/>
+                </a:solidFill>
+                <a:latin typeface="Yu Gothic" pitchFamily="34" charset="0"/>
+                <a:ea typeface="Yu Gothic" pitchFamily="34" charset="-122"/>
+                <a:cs typeface="Yu Gothic" pitchFamily="34" charset="-120"/>
+              </a:rPr>
+              <a:t>0-15分</a:t>
+            </a:r>
+            <a:endParaRPr lang="en-US" sz="900" dirty="0"/>
+          </a:p>
+        </p:txBody>
+      </p:sp>
+      <p:sp>
+        <p:nvSpPr>
+          <p:cNvPr id="8" name="Text 6"/>
+          <p:cNvSpPr txBox="1"/>
+          <p:nvPr/>
+        </p:nvSpPr>
+        <p:spPr>
+          <a:xfrm>
+            <a:off x="960120" y="5111496"/>
+            <a:ext cx="1956816" cy="384048"/>
+          </a:xfrm>
+          <a:prstGeom prst="rect">
+            <a:avLst/>
+          </a:prstGeom>
+          <a:noFill/>
+          <a:ln/>
+        </p:spPr>
+        <p:txBody>
+          <a:bodyPr wrap="square" lIns="0" tIns="0" rIns="0" bIns="0" rtlCol="0" anchor="ctr"/>
+          <a:lstStyle/>
+          <a:p>
+            <a:pPr indent="0" marL="0">
+              <a:buNone/>
+            </a:pPr>
+            <a:r>
+              <a:rPr lang="en-US" sz="1100" dirty="0">
                 <a:solidFill>
                   <a:srgbClr val="23201D"/>
                 </a:solidFill>
@@ -2577,103 +4235,89 @@
                 <a:ea typeface="Yu Gothic" pitchFamily="34" charset="-122"/>
                 <a:cs typeface="Yu Gothic" pitchFamily="34" charset="-120"/>
               </a:rPr>
-              <a:t>3年後、AIがやっている仕事は何か</a:t>
-            </a:r>
-            <a:endParaRPr lang="en-US" sz="1500" dirty="0"/>
-          </a:p>
-        </p:txBody>
-      </p:sp>
-      <p:sp>
-        <p:nvSpPr>
-          <p:cNvPr id="8" name="Text 6"/>
-          <p:cNvSpPr txBox="1"/>
-          <p:nvPr/>
-        </p:nvSpPr>
-        <p:spPr>
-          <a:xfrm>
-            <a:off x="5146243" y="1874520"/>
-            <a:ext cx="5963717" cy="656082"/>
-          </a:xfrm>
-          <a:prstGeom prst="rect">
-            <a:avLst/>
-          </a:prstGeom>
-          <a:noFill/>
-          <a:ln/>
-        </p:spPr>
-        <p:txBody>
-          <a:bodyPr wrap="square" lIns="0" tIns="0" rIns="0" bIns="0" rtlCol="0" anchor="ctr"/>
-          <a:lstStyle/>
-          <a:p>
-            <a:pPr indent="0" marL="0">
-              <a:lnSpc>
-                <a:spcPct val="130000"/>
-              </a:lnSpc>
-              <a:buNone/>
-            </a:pPr>
-            <a:r>
-              <a:rPr lang="en-US" sz="1250" dirty="0">
-                <a:solidFill>
-                  <a:srgbClr val="5A534A"/>
-                </a:solidFill>
-                <a:latin typeface="Yu Gothic" pitchFamily="34" charset="0"/>
-                <a:ea typeface="Yu Gothic" pitchFamily="34" charset="-122"/>
-                <a:cs typeface="Yu Gothic" pitchFamily="34" charset="-120"/>
-              </a:rPr>
-              <a:t>業務名で3つ挙げます</a:t>
-            </a:r>
-            <a:endParaRPr lang="en-US" sz="1250" dirty="0"/>
-          </a:p>
-        </p:txBody>
-      </p:sp>
-      <p:sp>
-        <p:nvSpPr>
-          <p:cNvPr id="9" name="Shape 7"/>
-          <p:cNvSpPr/>
-          <p:nvPr/>
-        </p:nvSpPr>
-        <p:spPr>
-          <a:xfrm>
-            <a:off x="777240" y="2768346"/>
-            <a:ext cx="10607040" cy="838962"/>
-          </a:xfrm>
-          <a:prstGeom prst="rect">
-            <a:avLst/>
-          </a:prstGeom>
-          <a:solidFill>
-            <a:srgbClr val="FFFFFF"/>
-          </a:solidFill>
-          <a:ln w="12700">
-            <a:solidFill>
-              <a:srgbClr val="EDE7DB"/>
-            </a:solidFill>
-            <a:prstDash val="solid"/>
-          </a:ln>
-        </p:spPr>
-      </p:sp>
-      <p:sp>
-        <p:nvSpPr>
-          <p:cNvPr id="10" name="Shape 8"/>
-          <p:cNvSpPr/>
-          <p:nvPr/>
-        </p:nvSpPr>
-        <p:spPr>
-          <a:xfrm>
-            <a:off x="1033272" y="2995803"/>
-            <a:ext cx="384048" cy="384048"/>
-          </a:xfrm>
-          <a:prstGeom prst="ellipse">
-            <a:avLst/>
-          </a:prstGeom>
-          <a:solidFill>
-            <a:srgbClr val="B04A2F"/>
-          </a:solidFill>
-          <a:ln w="12700">
-            <a:solidFill>
-              <a:srgbClr val="B04A2F"/>
-            </a:solidFill>
-            <a:prstDash val="solid"/>
-          </a:ln>
-        </p:spPr>
+              <a:t>前回の宿題を実物で</a:t>
+            </a:r>
+            <a:endParaRPr lang="en-US" sz="1100" dirty="0"/>
+          </a:p>
+        </p:txBody>
+      </p:sp>
+      <p:sp>
+        <p:nvSpPr>
+          <p:cNvPr id="9" name="Text 7"/>
+          <p:cNvSpPr txBox="1"/>
+          <p:nvPr/>
+        </p:nvSpPr>
+        <p:spPr>
+          <a:xfrm>
+            <a:off x="3008376" y="4873752"/>
+            <a:ext cx="1956816" cy="237744"/>
+          </a:xfrm>
+          <a:prstGeom prst="rect">
+            <a:avLst/>
+          </a:prstGeom>
+          <a:noFill/>
+          <a:ln/>
+        </p:spPr>
+        <p:txBody>
+          <a:bodyPr wrap="square" lIns="0" tIns="0" rIns="0" bIns="0" rtlCol="0" anchor="ctr"/>
+          <a:lstStyle/>
+          <a:p>
+            <a:pPr indent="0" marL="0">
+              <a:buNone/>
+            </a:pPr>
+            <a:r>
+              <a:rPr lang="en-US" sz="900" b="1" dirty="0">
+                <a:solidFill>
+                  <a:srgbClr val="B04A2F"/>
+                </a:solidFill>
+                <a:latin typeface="Yu Gothic" pitchFamily="34" charset="0"/>
+                <a:ea typeface="Yu Gothic" pitchFamily="34" charset="-122"/>
+                <a:cs typeface="Yu Gothic" pitchFamily="34" charset="-120"/>
+              </a:rPr>
+              <a:t>15-35分</a:t>
+            </a:r>
+            <a:endParaRPr lang="en-US" sz="900" dirty="0"/>
+          </a:p>
+        </p:txBody>
+      </p:sp>
+      <p:sp>
+        <p:nvSpPr>
+          <p:cNvPr id="10" name="Text 8"/>
+          <p:cNvSpPr txBox="1"/>
+          <p:nvPr/>
+        </p:nvSpPr>
+        <p:spPr>
+          <a:xfrm>
+            <a:off x="3008376" y="5111496"/>
+            <a:ext cx="1956816" cy="384048"/>
+          </a:xfrm>
+          <a:prstGeom prst="rect">
+            <a:avLst/>
+          </a:prstGeom>
+          <a:noFill/>
+          <a:ln/>
+        </p:spPr>
+        <p:txBody>
+          <a:bodyPr wrap="square" lIns="0" tIns="0" rIns="0" bIns="0" rtlCol="0" anchor="ctr"/>
+          <a:lstStyle/>
+          <a:p>
+            <a:pPr indent="0" marL="0">
+              <a:buNone/>
+            </a:pPr>
+            <a:r>
+              <a:rPr lang="en-US" sz="1100" dirty="0">
+                <a:solidFill>
+                  <a:srgbClr val="23201D"/>
+                </a:solidFill>
+                <a:latin typeface="Yu Gothic" pitchFamily="34" charset="0"/>
+                <a:ea typeface="Yu Gothic" pitchFamily="34" charset="-122"/>
+                <a:cs typeface="Yu Gothic" pitchFamily="34" charset="-120"/>
+              </a:rPr>
+              <a:t>テーマとデモ</a:t>
+            </a:r>
+            <a:endParaRPr lang="en-US" sz="1100" dirty="0"/>
+          </a:p>
+        </p:txBody>
       </p:sp>
       <p:sp>
         <p:nvSpPr>
@@ -2683,34 +4327,34 @@
         </p:nvSpPr>
         <p:spPr>
           <a:xfrm>
-            <a:off x="1033272" y="2995803"/>
-            <a:ext cx="384048" cy="384048"/>
-          </a:xfrm>
-          <a:prstGeom prst="rect">
-            <a:avLst/>
-          </a:prstGeom>
-          <a:noFill/>
-          <a:ln/>
-        </p:spPr>
-        <p:txBody>
-          <a:bodyPr wrap="square" lIns="0" tIns="0" rIns="0" bIns="0" rtlCol="0" anchor="ctr"/>
-          <a:lstStyle/>
-          <a:p>
-            <a:pPr algn="ctr" indent="0" marL="0">
-              <a:buNone/>
-            </a:pPr>
-            <a:r>
-              <a:rPr lang="en-US" sz="1400" b="1" dirty="0">
-                <a:solidFill>
-                  <a:srgbClr val="FFFFFF"/>
-                </a:solidFill>
-                <a:latin typeface="Yu Gothic" pitchFamily="34" charset="0"/>
-                <a:ea typeface="Yu Gothic" pitchFamily="34" charset="-122"/>
-                <a:cs typeface="Yu Gothic" pitchFamily="34" charset="-120"/>
-              </a:rPr>
-              <a:t>2</a:t>
-            </a:r>
-            <a:endParaRPr lang="en-US" sz="1400" dirty="0"/>
+            <a:off x="5056632" y="4873752"/>
+            <a:ext cx="1956816" cy="237744"/>
+          </a:xfrm>
+          <a:prstGeom prst="rect">
+            <a:avLst/>
+          </a:prstGeom>
+          <a:noFill/>
+          <a:ln/>
+        </p:spPr>
+        <p:txBody>
+          <a:bodyPr wrap="square" lIns="0" tIns="0" rIns="0" bIns="0" rtlCol="0" anchor="ctr"/>
+          <a:lstStyle/>
+          <a:p>
+            <a:pPr indent="0" marL="0">
+              <a:buNone/>
+            </a:pPr>
+            <a:r>
+              <a:rPr lang="en-US" sz="900" b="1" dirty="0">
+                <a:solidFill>
+                  <a:srgbClr val="B04A2F"/>
+                </a:solidFill>
+                <a:latin typeface="Yu Gothic" pitchFamily="34" charset="0"/>
+                <a:ea typeface="Yu Gothic" pitchFamily="34" charset="-122"/>
+                <a:cs typeface="Yu Gothic" pitchFamily="34" charset="-120"/>
+              </a:rPr>
+              <a:t>35-90分</a:t>
+            </a:r>
+            <a:endParaRPr lang="en-US" sz="900" dirty="0"/>
           </a:p>
         </p:txBody>
       </p:sp>
@@ -2722,24 +4366,24 @@
         </p:nvSpPr>
         <p:spPr>
           <a:xfrm>
-            <a:off x="1645920" y="2859786"/>
-            <a:ext cx="3394253" cy="656082"/>
-          </a:xfrm>
-          <a:prstGeom prst="rect">
-            <a:avLst/>
-          </a:prstGeom>
-          <a:noFill/>
-          <a:ln/>
-        </p:spPr>
-        <p:txBody>
-          <a:bodyPr wrap="square" lIns="0" tIns="0" rIns="0" bIns="0" rtlCol="0" anchor="ctr"/>
-          <a:lstStyle/>
-          <a:p>
-            <a:pPr indent="0" marL="0">
-              <a:buNone/>
-            </a:pPr>
-            <a:r>
-              <a:rPr lang="en-US" sz="1500" b="1" dirty="0">
+            <a:off x="5056632" y="5111496"/>
+            <a:ext cx="1956816" cy="384048"/>
+          </a:xfrm>
+          <a:prstGeom prst="rect">
+            <a:avLst/>
+          </a:prstGeom>
+          <a:noFill/>
+          <a:ln/>
+        </p:spPr>
+        <p:txBody>
+          <a:bodyPr wrap="square" lIns="0" tIns="0" rIns="0" bIns="0" rtlCol="0" anchor="ctr"/>
+          <a:lstStyle/>
+          <a:p>
+            <a:pPr indent="0" marL="0">
+              <a:buNone/>
+            </a:pPr>
+            <a:r>
+              <a:rPr lang="en-US" sz="1100" dirty="0">
                 <a:solidFill>
                   <a:srgbClr val="23201D"/>
                 </a:solidFill>
@@ -2747,9 +4391,9 @@
                 <a:ea typeface="Yu Gothic" pitchFamily="34" charset="-122"/>
                 <a:cs typeface="Yu Gothic" pitchFamily="34" charset="-120"/>
               </a:rPr>
-              <a:t>その結果、人は何をしているか</a:t>
-            </a:r>
-            <a:endParaRPr lang="en-US" sz="1500" dirty="0"/>
+              <a:t>一緒に手を動かす</a:t>
+            </a:r>
+            <a:endParaRPr lang="en-US" sz="1100" dirty="0"/>
           </a:p>
         </p:txBody>
       </p:sp>
@@ -2761,89 +4405,114 @@
         </p:nvSpPr>
         <p:spPr>
           <a:xfrm>
-            <a:off x="5146243" y="2859786"/>
-            <a:ext cx="5963717" cy="656082"/>
-          </a:xfrm>
-          <a:prstGeom prst="rect">
-            <a:avLst/>
-          </a:prstGeom>
-          <a:noFill/>
-          <a:ln/>
-        </p:spPr>
-        <p:txBody>
-          <a:bodyPr wrap="square" lIns="0" tIns="0" rIns="0" bIns="0" rtlCol="0" anchor="ctr"/>
-          <a:lstStyle/>
-          <a:p>
-            <a:pPr indent="0" marL="0">
-              <a:lnSpc>
-                <a:spcPct val="130000"/>
-              </a:lnSpc>
-              <a:buNone/>
-            </a:pPr>
-            <a:r>
-              <a:rPr lang="en-US" sz="1250" dirty="0">
-                <a:solidFill>
-                  <a:srgbClr val="5A534A"/>
-                </a:solidFill>
-                <a:latin typeface="Yu Gothic" pitchFamily="34" charset="0"/>
-                <a:ea typeface="Yu Gothic" pitchFamily="34" charset="-122"/>
-                <a:cs typeface="Yu Gothic" pitchFamily="34" charset="-120"/>
-              </a:rPr>
-              <a:t>減らす話ではなく、移す話として書きます</a:t>
-            </a:r>
-            <a:endParaRPr lang="en-US" sz="1250" dirty="0"/>
-          </a:p>
-        </p:txBody>
-      </p:sp>
-      <p:sp>
-        <p:nvSpPr>
-          <p:cNvPr id="14" name="Shape 12"/>
-          <p:cNvSpPr/>
-          <p:nvPr/>
-        </p:nvSpPr>
-        <p:spPr>
-          <a:xfrm>
-            <a:off x="777240" y="3753612"/>
-            <a:ext cx="10607040" cy="838962"/>
-          </a:xfrm>
-          <a:prstGeom prst="rect">
-            <a:avLst/>
-          </a:prstGeom>
-          <a:solidFill>
-            <a:srgbClr val="FFFFFF"/>
-          </a:solidFill>
-          <a:ln w="12700">
-            <a:solidFill>
-              <a:srgbClr val="EDE7DB"/>
-            </a:solidFill>
-            <a:prstDash val="solid"/>
-          </a:ln>
-        </p:spPr>
-      </p:sp>
-      <p:sp>
-        <p:nvSpPr>
-          <p:cNvPr id="15" name="Shape 13"/>
-          <p:cNvSpPr/>
-          <p:nvPr/>
-        </p:nvSpPr>
-        <p:spPr>
-          <a:xfrm>
-            <a:off x="1033272" y="3981069"/>
-            <a:ext cx="384048" cy="384048"/>
-          </a:xfrm>
-          <a:prstGeom prst="ellipse">
-            <a:avLst/>
-          </a:prstGeom>
-          <a:solidFill>
-            <a:srgbClr val="B04A2F"/>
-          </a:solidFill>
-          <a:ln w="12700">
-            <a:solidFill>
-              <a:srgbClr val="B04A2F"/>
-            </a:solidFill>
-            <a:prstDash val="solid"/>
-          </a:ln>
-        </p:spPr>
+            <a:off x="7104888" y="4873752"/>
+            <a:ext cx="1956816" cy="237744"/>
+          </a:xfrm>
+          <a:prstGeom prst="rect">
+            <a:avLst/>
+          </a:prstGeom>
+          <a:noFill/>
+          <a:ln/>
+        </p:spPr>
+        <p:txBody>
+          <a:bodyPr wrap="square" lIns="0" tIns="0" rIns="0" bIns="0" rtlCol="0" anchor="ctr"/>
+          <a:lstStyle/>
+          <a:p>
+            <a:pPr indent="0" marL="0">
+              <a:buNone/>
+            </a:pPr>
+            <a:r>
+              <a:rPr lang="en-US" sz="900" b="1" dirty="0">
+                <a:solidFill>
+                  <a:srgbClr val="B04A2F"/>
+                </a:solidFill>
+                <a:latin typeface="Yu Gothic" pitchFamily="34" charset="0"/>
+                <a:ea typeface="Yu Gothic" pitchFamily="34" charset="-122"/>
+                <a:cs typeface="Yu Gothic" pitchFamily="34" charset="-120"/>
+              </a:rPr>
+              <a:t>90-105分</a:t>
+            </a:r>
+            <a:endParaRPr lang="en-US" sz="900" dirty="0"/>
+          </a:p>
+        </p:txBody>
+      </p:sp>
+      <p:sp>
+        <p:nvSpPr>
+          <p:cNvPr id="14" name="Text 12"/>
+          <p:cNvSpPr txBox="1"/>
+          <p:nvPr/>
+        </p:nvSpPr>
+        <p:spPr>
+          <a:xfrm>
+            <a:off x="7104888" y="5111496"/>
+            <a:ext cx="1956816" cy="384048"/>
+          </a:xfrm>
+          <a:prstGeom prst="rect">
+            <a:avLst/>
+          </a:prstGeom>
+          <a:noFill/>
+          <a:ln/>
+        </p:spPr>
+        <p:txBody>
+          <a:bodyPr wrap="square" lIns="0" tIns="0" rIns="0" bIns="0" rtlCol="0" anchor="ctr"/>
+          <a:lstStyle/>
+          <a:p>
+            <a:pPr indent="0" marL="0">
+              <a:buNone/>
+            </a:pPr>
+            <a:r>
+              <a:rPr lang="en-US" sz="1100" dirty="0">
+                <a:solidFill>
+                  <a:srgbClr val="23201D"/>
+                </a:solidFill>
+                <a:latin typeface="Yu Gothic" pitchFamily="34" charset="0"/>
+                <a:ea typeface="Yu Gothic" pitchFamily="34" charset="-122"/>
+                <a:cs typeface="Yu Gothic" pitchFamily="34" charset="-120"/>
+              </a:rPr>
+              <a:t>業務への組み込み</a:t>
+            </a:r>
+            <a:endParaRPr lang="en-US" sz="1100" dirty="0"/>
+          </a:p>
+        </p:txBody>
+      </p:sp>
+      <p:sp>
+        <p:nvSpPr>
+          <p:cNvPr id="15" name="Text 13"/>
+          <p:cNvSpPr txBox="1"/>
+          <p:nvPr/>
+        </p:nvSpPr>
+        <p:spPr>
+          <a:xfrm>
+            <a:off x="9153144" y="4873752"/>
+            <a:ext cx="1956816" cy="237744"/>
+          </a:xfrm>
+          <a:prstGeom prst="rect">
+            <a:avLst/>
+          </a:prstGeom>
+          <a:noFill/>
+          <a:ln/>
+        </p:spPr>
+        <p:txBody>
+          <a:bodyPr wrap="square" lIns="0" tIns="0" rIns="0" bIns="0" rtlCol="0" anchor="ctr"/>
+          <a:lstStyle/>
+          <a:p>
+            <a:pPr indent="0" marL="0">
+              <a:buNone/>
+            </a:pPr>
+            <a:r>
+              <a:rPr lang="en-US" sz="900" b="1" dirty="0">
+                <a:solidFill>
+                  <a:srgbClr val="B04A2F"/>
+                </a:solidFill>
+                <a:latin typeface="Yu Gothic" pitchFamily="34" charset="0"/>
+                <a:ea typeface="Yu Gothic" pitchFamily="34" charset="-122"/>
+                <a:cs typeface="Yu Gothic" pitchFamily="34" charset="-120"/>
+              </a:rPr>
+              <a:t>105-120分</a:t>
+            </a:r>
+            <a:endParaRPr lang="en-US" sz="900" dirty="0"/>
+          </a:p>
+        </p:txBody>
       </p:sp>
       <p:sp>
         <p:nvSpPr>
@@ -2853,34 +4522,34 @@
         </p:nvSpPr>
         <p:spPr>
           <a:xfrm>
-            <a:off x="1033272" y="3981069"/>
-            <a:ext cx="384048" cy="384048"/>
-          </a:xfrm>
-          <a:prstGeom prst="rect">
-            <a:avLst/>
-          </a:prstGeom>
-          <a:noFill/>
-          <a:ln/>
-        </p:spPr>
-        <p:txBody>
-          <a:bodyPr wrap="square" lIns="0" tIns="0" rIns="0" bIns="0" rtlCol="0" anchor="ctr"/>
-          <a:lstStyle/>
-          <a:p>
-            <a:pPr algn="ctr" indent="0" marL="0">
-              <a:buNone/>
-            </a:pPr>
-            <a:r>
-              <a:rPr lang="en-US" sz="1400" b="1" dirty="0">
-                <a:solidFill>
-                  <a:srgbClr val="FFFFFF"/>
-                </a:solidFill>
-                <a:latin typeface="Yu Gothic" pitchFamily="34" charset="0"/>
-                <a:ea typeface="Yu Gothic" pitchFamily="34" charset="-122"/>
-                <a:cs typeface="Yu Gothic" pitchFamily="34" charset="-120"/>
-              </a:rPr>
-              <a:t>3</a:t>
-            </a:r>
-            <a:endParaRPr lang="en-US" sz="1400" dirty="0"/>
+            <a:off x="9153144" y="5111496"/>
+            <a:ext cx="1956816" cy="384048"/>
+          </a:xfrm>
+          <a:prstGeom prst="rect">
+            <a:avLst/>
+          </a:prstGeom>
+          <a:noFill/>
+          <a:ln/>
+        </p:spPr>
+        <p:txBody>
+          <a:bodyPr wrap="square" lIns="0" tIns="0" rIns="0" bIns="0" rtlCol="0" anchor="ctr"/>
+          <a:lstStyle/>
+          <a:p>
+            <a:pPr indent="0" marL="0">
+              <a:buNone/>
+            </a:pPr>
+            <a:r>
+              <a:rPr lang="en-US" sz="1100" dirty="0">
+                <a:solidFill>
+                  <a:srgbClr val="23201D"/>
+                </a:solidFill>
+                <a:latin typeface="Yu Gothic" pitchFamily="34" charset="0"/>
+                <a:ea typeface="Yu Gothic" pitchFamily="34" charset="-122"/>
+                <a:cs typeface="Yu Gothic" pitchFamily="34" charset="-120"/>
+              </a:rPr>
+              <a:t>宿題・記録</a:t>
+            </a:r>
+            <a:endParaRPr lang="en-US" sz="1100" dirty="0"/>
           </a:p>
         </p:txBody>
       </p:sp>
@@ -2892,34 +4561,34 @@
         </p:nvSpPr>
         <p:spPr>
           <a:xfrm>
-            <a:off x="1645920" y="3845052"/>
-            <a:ext cx="3394253" cy="656082"/>
-          </a:xfrm>
-          <a:prstGeom prst="rect">
-            <a:avLst/>
-          </a:prstGeom>
-          <a:noFill/>
-          <a:ln/>
-        </p:spPr>
-        <p:txBody>
-          <a:bodyPr wrap="square" lIns="0" tIns="0" rIns="0" bIns="0" rtlCol="0" anchor="ctr"/>
-          <a:lstStyle/>
-          <a:p>
-            <a:pPr indent="0" marL="0">
-              <a:buNone/>
-            </a:pPr>
-            <a:r>
-              <a:rPr lang="en-US" sz="1500" b="1" dirty="0">
-                <a:solidFill>
-                  <a:srgbClr val="23201D"/>
-                </a:solidFill>
-                <a:latin typeface="Yu Gothic" pitchFamily="34" charset="0"/>
-                <a:ea typeface="Yu Gothic" pitchFamily="34" charset="-122"/>
-                <a:cs typeface="Yu Gothic" pitchFamily="34" charset="-120"/>
-              </a:rPr>
-              <a:t>そのために、今ない資産は何か</a:t>
-            </a:r>
-            <a:endParaRPr lang="en-US" sz="1500" dirty="0"/>
+            <a:off x="777240" y="6382512"/>
+            <a:ext cx="7424928" cy="256032"/>
+          </a:xfrm>
+          <a:prstGeom prst="rect">
+            <a:avLst/>
+          </a:prstGeom>
+          <a:noFill/>
+          <a:ln/>
+        </p:spPr>
+        <p:txBody>
+          <a:bodyPr wrap="square" lIns="0" tIns="0" rIns="0" bIns="0" rtlCol="0" anchor="ctr"/>
+          <a:lstStyle/>
+          <a:p>
+            <a:pPr indent="0" marL="0">
+              <a:buNone/>
+            </a:pPr>
+            <a:r>
+              <a:rPr lang="en-US" sz="900" dirty="0">
+                <a:solidFill>
+                  <a:srgbClr val="8A8177"/>
+                </a:solidFill>
+                <a:latin typeface="Yu Gothic" pitchFamily="34" charset="0"/>
+                <a:ea typeface="Yu Gothic" pitchFamily="34" charset="-122"/>
+                <a:cs typeface="Yu Gothic" pitchFamily="34" charset="-120"/>
+              </a:rPr>
+              <a:t>第12回　AIを前提に事業を組み直す</a:t>
+            </a:r>
+            <a:endParaRPr lang="en-US" sz="900" dirty="0"/>
           </a:p>
         </p:txBody>
       </p:sp>
@@ -2931,271 +4600,20 @@
         </p:nvSpPr>
         <p:spPr>
           <a:xfrm>
-            <a:off x="5146243" y="3845052"/>
-            <a:ext cx="5963717" cy="656082"/>
-          </a:xfrm>
-          <a:prstGeom prst="rect">
-            <a:avLst/>
-          </a:prstGeom>
-          <a:noFill/>
-          <a:ln/>
-        </p:spPr>
-        <p:txBody>
-          <a:bodyPr wrap="square" lIns="0" tIns="0" rIns="0" bIns="0" rtlCol="0" anchor="ctr"/>
-          <a:lstStyle/>
-          <a:p>
-            <a:pPr indent="0" marL="0">
-              <a:lnSpc>
-                <a:spcPct val="130000"/>
-              </a:lnSpc>
-              <a:buNone/>
-            </a:pPr>
-            <a:r>
-              <a:rPr lang="en-US" sz="1250" dirty="0">
-                <a:solidFill>
-                  <a:srgbClr val="5A534A"/>
-                </a:solidFill>
-                <a:latin typeface="Yu Gothic" pitchFamily="34" charset="0"/>
-                <a:ea typeface="Yu Gothic" pitchFamily="34" charset="-122"/>
-                <a:cs typeface="Yu Gothic" pitchFamily="34" charset="-120"/>
-              </a:rPr>
-              <a:t>データ・資料・人・仕組み</a:t>
-            </a:r>
-            <a:endParaRPr lang="en-US" sz="1250" dirty="0"/>
-          </a:p>
-        </p:txBody>
-      </p:sp>
-      <p:sp>
-        <p:nvSpPr>
-          <p:cNvPr id="19" name="Shape 17"/>
-          <p:cNvSpPr/>
-          <p:nvPr/>
-        </p:nvSpPr>
-        <p:spPr>
-          <a:xfrm>
-            <a:off x="777240" y="4738878"/>
-            <a:ext cx="10607040" cy="838962"/>
-          </a:xfrm>
-          <a:prstGeom prst="rect">
-            <a:avLst/>
-          </a:prstGeom>
-          <a:solidFill>
-            <a:srgbClr val="FFFFFF"/>
-          </a:solidFill>
-          <a:ln w="12700">
-            <a:solidFill>
-              <a:srgbClr val="EDE7DB"/>
-            </a:solidFill>
-            <a:prstDash val="solid"/>
-          </a:ln>
-        </p:spPr>
-      </p:sp>
-      <p:sp>
-        <p:nvSpPr>
-          <p:cNvPr id="20" name="Shape 18"/>
-          <p:cNvSpPr/>
-          <p:nvPr/>
-        </p:nvSpPr>
-        <p:spPr>
-          <a:xfrm>
-            <a:off x="1033272" y="4966335"/>
-            <a:ext cx="384048" cy="384048"/>
-          </a:xfrm>
-          <a:prstGeom prst="ellipse">
-            <a:avLst/>
-          </a:prstGeom>
-          <a:solidFill>
-            <a:srgbClr val="B04A2F"/>
-          </a:solidFill>
-          <a:ln w="12700">
-            <a:solidFill>
-              <a:srgbClr val="B04A2F"/>
-            </a:solidFill>
-            <a:prstDash val="solid"/>
-          </a:ln>
-        </p:spPr>
-      </p:sp>
-      <p:sp>
-        <p:nvSpPr>
-          <p:cNvPr id="21" name="Text 19"/>
-          <p:cNvSpPr txBox="1"/>
-          <p:nvPr/>
-        </p:nvSpPr>
-        <p:spPr>
-          <a:xfrm>
-            <a:off x="1033272" y="4966335"/>
-            <a:ext cx="384048" cy="384048"/>
-          </a:xfrm>
-          <a:prstGeom prst="rect">
-            <a:avLst/>
-          </a:prstGeom>
-          <a:noFill/>
-          <a:ln/>
-        </p:spPr>
-        <p:txBody>
-          <a:bodyPr wrap="square" lIns="0" tIns="0" rIns="0" bIns="0" rtlCol="0" anchor="ctr"/>
-          <a:lstStyle/>
-          <a:p>
-            <a:pPr algn="ctr" indent="0" marL="0">
-              <a:buNone/>
-            </a:pPr>
-            <a:r>
-              <a:rPr lang="en-US" sz="1400" b="1" dirty="0">
-                <a:solidFill>
-                  <a:srgbClr val="FFFFFF"/>
-                </a:solidFill>
-                <a:latin typeface="Yu Gothic" pitchFamily="34" charset="0"/>
-                <a:ea typeface="Yu Gothic" pitchFamily="34" charset="-122"/>
-                <a:cs typeface="Yu Gothic" pitchFamily="34" charset="-120"/>
-              </a:rPr>
-              <a:t>4</a:t>
-            </a:r>
-            <a:endParaRPr lang="en-US" sz="1400" dirty="0"/>
-          </a:p>
-        </p:txBody>
-      </p:sp>
-      <p:sp>
-        <p:nvSpPr>
-          <p:cNvPr id="22" name="Text 20"/>
-          <p:cNvSpPr txBox="1"/>
-          <p:nvPr/>
-        </p:nvSpPr>
-        <p:spPr>
-          <a:xfrm>
-            <a:off x="1645920" y="4830318"/>
-            <a:ext cx="3394253" cy="656082"/>
-          </a:xfrm>
-          <a:prstGeom prst="rect">
-            <a:avLst/>
-          </a:prstGeom>
-          <a:noFill/>
-          <a:ln/>
-        </p:spPr>
-        <p:txBody>
-          <a:bodyPr wrap="square" lIns="0" tIns="0" rIns="0" bIns="0" rtlCol="0" anchor="ctr"/>
-          <a:lstStyle/>
-          <a:p>
-            <a:pPr indent="0" marL="0">
-              <a:buNone/>
-            </a:pPr>
-            <a:r>
-              <a:rPr lang="en-US" sz="1500" b="1" dirty="0">
-                <a:solidFill>
-                  <a:srgbClr val="23201D"/>
-                </a:solidFill>
-                <a:latin typeface="Yu Gothic" pitchFamily="34" charset="0"/>
-                <a:ea typeface="Yu Gothic" pitchFamily="34" charset="-122"/>
-                <a:cs typeface="Yu Gothic" pitchFamily="34" charset="-120"/>
-              </a:rPr>
-              <a:t>やらないと決めることは何か</a:t>
-            </a:r>
-            <a:endParaRPr lang="en-US" sz="1500" dirty="0"/>
-          </a:p>
-        </p:txBody>
-      </p:sp>
-      <p:sp>
-        <p:nvSpPr>
-          <p:cNvPr id="23" name="Text 21"/>
-          <p:cNvSpPr txBox="1"/>
-          <p:nvPr/>
-        </p:nvSpPr>
-        <p:spPr>
-          <a:xfrm>
-            <a:off x="5146243" y="4830318"/>
-            <a:ext cx="5963717" cy="656082"/>
-          </a:xfrm>
-          <a:prstGeom prst="rect">
-            <a:avLst/>
-          </a:prstGeom>
-          <a:noFill/>
-          <a:ln/>
-        </p:spPr>
-        <p:txBody>
-          <a:bodyPr wrap="square" lIns="0" tIns="0" rIns="0" bIns="0" rtlCol="0" anchor="ctr"/>
-          <a:lstStyle/>
-          <a:p>
-            <a:pPr indent="0" marL="0">
-              <a:lnSpc>
-                <a:spcPct val="130000"/>
-              </a:lnSpc>
-              <a:buNone/>
-            </a:pPr>
-            <a:r>
-              <a:rPr lang="en-US" sz="1250" dirty="0">
-                <a:solidFill>
-                  <a:srgbClr val="5A534A"/>
-                </a:solidFill>
-                <a:latin typeface="Yu Gothic" pitchFamily="34" charset="0"/>
-                <a:ea typeface="Yu Gothic" pitchFamily="34" charset="-122"/>
-                <a:cs typeface="Yu Gothic" pitchFamily="34" charset="-120"/>
-              </a:rPr>
-              <a:t>捨てるものを決めます</a:t>
-            </a:r>
-            <a:endParaRPr lang="en-US" sz="1250" dirty="0"/>
-          </a:p>
-        </p:txBody>
-      </p:sp>
-      <p:sp>
-        <p:nvSpPr>
-          <p:cNvPr id="24" name="Text 22"/>
-          <p:cNvSpPr txBox="1"/>
-          <p:nvPr/>
-        </p:nvSpPr>
-        <p:spPr>
-          <a:xfrm>
-            <a:off x="777240" y="5715000"/>
-            <a:ext cx="10607040" cy="457200"/>
-          </a:xfrm>
-          <a:prstGeom prst="rect">
-            <a:avLst/>
-          </a:prstGeom>
-          <a:noFill/>
-          <a:ln/>
-        </p:spPr>
-        <p:txBody>
-          <a:bodyPr wrap="square" lIns="0" tIns="0" rIns="0" bIns="0" rtlCol="0" anchor="ctr"/>
-          <a:lstStyle/>
-          <a:p>
-            <a:pPr indent="0" marL="0">
-              <a:buNone/>
-            </a:pPr>
-            <a:r>
-              <a:rPr lang="en-US" sz="1200" b="1" dirty="0">
-                <a:solidFill>
-                  <a:srgbClr val="B04A2F"/>
-                </a:solidFill>
-                <a:latin typeface="Yu Gothic" pitchFamily="34" charset="0"/>
-                <a:ea typeface="Yu Gothic" pitchFamily="34" charset="-122"/>
-                <a:cs typeface="Yu Gothic" pitchFamily="34" charset="-120"/>
-              </a:rPr>
-              <a:t>4つ目がいちばん重要です。全部やろうとして何も進まない会社が多くあります。</a:t>
-            </a:r>
-            <a:endParaRPr lang="en-US" sz="1200" dirty="0"/>
-          </a:p>
-        </p:txBody>
-      </p:sp>
-      <p:sp>
-        <p:nvSpPr>
-          <p:cNvPr id="25" name="Text 23"/>
-          <p:cNvSpPr txBox="1"/>
-          <p:nvPr/>
-        </p:nvSpPr>
-        <p:spPr>
-          <a:xfrm>
-            <a:off x="777240" y="6355080"/>
-            <a:ext cx="7424928" cy="274320"/>
-          </a:xfrm>
-          <a:prstGeom prst="rect">
-            <a:avLst/>
-          </a:prstGeom>
-          <a:noFill/>
-          <a:ln/>
-        </p:spPr>
-        <p:txBody>
-          <a:bodyPr wrap="square" lIns="0" tIns="0" rIns="0" bIns="0" rtlCol="0" anchor="ctr"/>
-          <a:lstStyle/>
-          <a:p>
-            <a:pPr indent="0" marL="0">
+            <a:off x="8202168" y="6382512"/>
+            <a:ext cx="3182112" cy="256032"/>
+          </a:xfrm>
+          <a:prstGeom prst="rect">
+            <a:avLst/>
+          </a:prstGeom>
+          <a:noFill/>
+          <a:ln/>
+        </p:spPr>
+        <p:txBody>
+          <a:bodyPr wrap="square" lIns="0" tIns="0" rIns="0" bIns="0" rtlCol="0" anchor="ctr"/>
+          <a:lstStyle/>
+          <a:p>
+            <a:pPr algn="r" indent="0" marL="0">
               <a:buNone/>
             </a:pPr>
             <a:r>
@@ -3207,46 +4625,7 @@
                 <a:ea typeface="Yu Gothic" pitchFamily="34" charset="-122"/>
                 <a:cs typeface="Yu Gothic" pitchFamily="34" charset="-120"/>
               </a:rPr>
-              <a:t>第12回　AIを前提に事業を組み直す</a:t>
-            </a:r>
-            <a:endParaRPr lang="en-US" sz="900" dirty="0"/>
-          </a:p>
-        </p:txBody>
-      </p:sp>
-      <p:sp>
-        <p:nvSpPr>
-          <p:cNvPr id="26" name="Text 24"/>
-          <p:cNvSpPr txBox="1"/>
-          <p:nvPr/>
-        </p:nvSpPr>
-        <p:spPr>
-          <a:xfrm>
-            <a:off x="8202168" y="6355080"/>
-            <a:ext cx="3182112" cy="274320"/>
-          </a:xfrm>
-          <a:prstGeom prst="rect">
-            <a:avLst/>
-          </a:prstGeom>
-          <a:noFill/>
-          <a:ln/>
-        </p:spPr>
-        <p:txBody>
-          <a:bodyPr wrap="square" lIns="0" tIns="0" rIns="0" bIns="0" rtlCol="0" anchor="ctr"/>
-          <a:lstStyle/>
-          <a:p>
-            <a:pPr algn="r" indent="0" marL="0">
-              <a:buNone/>
-            </a:pPr>
-            <a:r>
-              <a:rPr lang="en-US" sz="900" dirty="0">
-                <a:solidFill>
-                  <a:srgbClr val="8A8177"/>
-                </a:solidFill>
-                <a:latin typeface="Yu Gothic" pitchFamily="34" charset="0"/>
-                <a:ea typeface="Yu Gothic" pitchFamily="34" charset="-122"/>
-                <a:cs typeface="Yu Gothic" pitchFamily="34" charset="-120"/>
-              </a:rPr>
-              <a:t>考え方</a:t>
+              <a:t>ゴール</a:t>
             </a:r>
             <a:endParaRPr lang="en-US" sz="900" dirty="0"/>
           </a:p>
@@ -3292,7 +4671,7 @@
         </p:nvSpPr>
         <p:spPr>
           <a:xfrm>
-            <a:off x="777240" y="640080"/>
+            <a:off x="777240" y="566928"/>
             <a:ext cx="10607040" cy="274320"/>
           </a:xfrm>
           <a:prstGeom prst="rect">
@@ -3317,7 +4696,7 @@
                 <a:ea typeface="Yu Gothic" pitchFamily="34" charset="-122"/>
                 <a:cs typeface="Yu Gothic" pitchFamily="34" charset="-120"/>
               </a:rPr>
-              <a:t>実演</a:t>
+              <a:t>考え方</a:t>
             </a:r>
             <a:endParaRPr lang="en-US" sz="1100" dirty="0"/>
           </a:p>
@@ -3331,7 +4710,7 @@
         </p:nvSpPr>
         <p:spPr>
           <a:xfrm>
-            <a:off x="777240" y="960120"/>
+            <a:off x="777240" y="896112"/>
             <a:ext cx="10607040" cy="640080"/>
           </a:xfrm>
           <a:prstGeom prst="rect">
@@ -3348,7 +4727,7 @@
               <a:buNone/>
             </a:pPr>
             <a:r>
-              <a:rPr lang="en-US" sz="2700" b="1" dirty="0">
+              <a:rPr lang="en-US" sz="2600" b="1" dirty="0">
                 <a:solidFill>
                   <a:srgbClr val="23201D"/>
                 </a:solidFill>
@@ -3356,9 +4735,9 @@
                 <a:ea typeface="Yu Gothic" pitchFamily="34" charset="-122"/>
                 <a:cs typeface="Yu Gothic" pitchFamily="34" charset="-120"/>
               </a:rPr>
-              <a:t>この12回で変わったこと</a:t>
-            </a:r>
-            <a:endParaRPr lang="en-US" sz="2700" dirty="0"/>
+              <a:t>3年構想は、4つの問いで書きます</a:t>
+            </a:r>
+            <a:endParaRPr lang="en-US" sz="2600" dirty="0"/>
           </a:p>
         </p:txBody>
       </p:sp>
@@ -3370,18 +4749,18 @@
         </p:nvSpPr>
         <p:spPr>
           <a:xfrm>
-            <a:off x="777240" y="1828800"/>
-            <a:ext cx="4983480" cy="3566160"/>
+            <a:off x="777240" y="1691640"/>
+            <a:ext cx="10607040" cy="864108"/>
           </a:xfrm>
           <a:prstGeom prst="rect">
             <a:avLst/>
           </a:prstGeom>
           <a:solidFill>
-            <a:srgbClr val="EDE7DB"/>
+            <a:srgbClr val="FFFFFF"/>
           </a:solidFill>
-          <a:ln w="15875">
+          <a:ln w="12700">
             <a:solidFill>
-              <a:srgbClr val="8A8177"/>
+              <a:srgbClr val="EDE7DB"/>
             </a:solidFill>
             <a:prstDash val="solid"/>
           </a:ln>
@@ -3395,455 +4774,8 @@
         </p:nvSpPr>
         <p:spPr>
           <a:xfrm>
-            <a:off x="777240" y="1828800"/>
-            <a:ext cx="4983480" cy="566928"/>
-          </a:xfrm>
-          <a:prstGeom prst="rect">
-            <a:avLst/>
-          </a:prstGeom>
-          <a:solidFill>
-            <a:srgbClr val="8A8177"/>
-          </a:solidFill>
-          <a:ln w="12700">
-            <a:solidFill>
-              <a:srgbClr val="333333"/>
-            </a:solidFill>
-            <a:prstDash val="solid"/>
-          </a:ln>
-        </p:spPr>
-      </p:sp>
-      <p:sp>
-        <p:nvSpPr>
-          <p:cNvPr id="6" name="Text 4"/>
-          <p:cNvSpPr txBox="1"/>
-          <p:nvPr/>
-        </p:nvSpPr>
-        <p:spPr>
-          <a:xfrm>
-            <a:off x="1005840" y="1883664"/>
-            <a:ext cx="4526280" cy="457200"/>
-          </a:xfrm>
-          <a:prstGeom prst="rect">
-            <a:avLst/>
-          </a:prstGeom>
-          <a:noFill/>
-          <a:ln/>
-        </p:spPr>
-        <p:txBody>
-          <a:bodyPr wrap="square" lIns="0" tIns="0" rIns="0" bIns="0" rtlCol="0" anchor="ctr"/>
-          <a:lstStyle/>
-          <a:p>
-            <a:pPr indent="0" marL="0">
-              <a:buNone/>
-            </a:pPr>
-            <a:r>
-              <a:rPr lang="en-US" sz="1400" b="1" dirty="0">
-                <a:solidFill>
-                  <a:srgbClr val="FFFFFF"/>
-                </a:solidFill>
-                <a:latin typeface="Yu Gothic" pitchFamily="34" charset="0"/>
-                <a:ea typeface="Yu Gothic" pitchFamily="34" charset="-122"/>
-                <a:cs typeface="Yu Gothic" pitchFamily="34" charset="-120"/>
-              </a:rPr>
-              <a:t>受講前</a:t>
-            </a:r>
-            <a:endParaRPr lang="en-US" sz="1400" dirty="0"/>
-          </a:p>
-        </p:txBody>
-      </p:sp>
-      <p:sp>
-        <p:nvSpPr>
-          <p:cNvPr id="7" name="Text 5"/>
-          <p:cNvSpPr txBox="1"/>
-          <p:nvPr/>
-        </p:nvSpPr>
-        <p:spPr>
-          <a:xfrm>
-            <a:off x="1097280" y="2606040"/>
-            <a:ext cx="4343400" cy="548640"/>
-          </a:xfrm>
-          <a:prstGeom prst="rect">
-            <a:avLst/>
-          </a:prstGeom>
-          <a:noFill/>
-          <a:ln/>
-        </p:spPr>
-        <p:txBody>
-          <a:bodyPr wrap="square" lIns="0" tIns="0" rIns="0" bIns="0" rtlCol="0" anchor="ctr"/>
-          <a:lstStyle/>
-          <a:p>
-            <a:pPr indent="0" marL="0">
-              <a:lnSpc>
-                <a:spcPct val="125000"/>
-              </a:lnSpc>
-              <a:buNone/>
-            </a:pPr>
-            <a:r>
-              <a:rPr lang="en-US" sz="1300" dirty="0">
-                <a:solidFill>
-                  <a:srgbClr val="23201D"/>
-                </a:solidFill>
-                <a:latin typeface="Yu Gothic" pitchFamily="34" charset="0"/>
-                <a:ea typeface="Yu Gothic" pitchFamily="34" charset="-122"/>
-                <a:cs typeface="Yu Gothic" pitchFamily="34" charset="-120"/>
-              </a:rPr>
-              <a:t>ChatGPTは毎日開くが、会話は使い捨て</a:t>
-            </a:r>
-            <a:endParaRPr lang="en-US" sz="1300" dirty="0"/>
-          </a:p>
-        </p:txBody>
-      </p:sp>
-      <p:sp>
-        <p:nvSpPr>
-          <p:cNvPr id="8" name="Text 6"/>
-          <p:cNvSpPr txBox="1"/>
-          <p:nvPr/>
-        </p:nvSpPr>
-        <p:spPr>
-          <a:xfrm>
-            <a:off x="1097280" y="3172968"/>
-            <a:ext cx="4343400" cy="548640"/>
-          </a:xfrm>
-          <a:prstGeom prst="rect">
-            <a:avLst/>
-          </a:prstGeom>
-          <a:noFill/>
-          <a:ln/>
-        </p:spPr>
-        <p:txBody>
-          <a:bodyPr wrap="square" lIns="0" tIns="0" rIns="0" bIns="0" rtlCol="0" anchor="ctr"/>
-          <a:lstStyle/>
-          <a:p>
-            <a:pPr indent="0" marL="0">
-              <a:lnSpc>
-                <a:spcPct val="125000"/>
-              </a:lnSpc>
-              <a:buNone/>
-            </a:pPr>
-            <a:r>
-              <a:rPr lang="en-US" sz="1300" dirty="0">
-                <a:solidFill>
-                  <a:srgbClr val="23201D"/>
-                </a:solidFill>
-                <a:latin typeface="Yu Gothic" pitchFamily="34" charset="0"/>
-                <a:ea typeface="Yu Gothic" pitchFamily="34" charset="-122"/>
-                <a:cs typeface="Yu Gothic" pitchFamily="34" charset="-120"/>
-              </a:rPr>
-              <a:t>うまくいった指示が翌日には見つからない</a:t>
-            </a:r>
-            <a:endParaRPr lang="en-US" sz="1300" dirty="0"/>
-          </a:p>
-        </p:txBody>
-      </p:sp>
-      <p:sp>
-        <p:nvSpPr>
-          <p:cNvPr id="9" name="Text 7"/>
-          <p:cNvSpPr txBox="1"/>
-          <p:nvPr/>
-        </p:nvSpPr>
-        <p:spPr>
-          <a:xfrm>
-            <a:off x="1097280" y="3739896"/>
-            <a:ext cx="4343400" cy="548640"/>
-          </a:xfrm>
-          <a:prstGeom prst="rect">
-            <a:avLst/>
-          </a:prstGeom>
-          <a:noFill/>
-          <a:ln/>
-        </p:spPr>
-        <p:txBody>
-          <a:bodyPr wrap="square" lIns="0" tIns="0" rIns="0" bIns="0" rtlCol="0" anchor="ctr"/>
-          <a:lstStyle/>
-          <a:p>
-            <a:pPr indent="0" marL="0">
-              <a:lnSpc>
-                <a:spcPct val="125000"/>
-              </a:lnSpc>
-              <a:buNone/>
-            </a:pPr>
-            <a:r>
-              <a:rPr lang="en-US" sz="1300" dirty="0">
-                <a:solidFill>
-                  <a:srgbClr val="23201D"/>
-                </a:solidFill>
-                <a:latin typeface="Yu Gothic" pitchFamily="34" charset="0"/>
-                <a:ea typeface="Yu Gothic" pitchFamily="34" charset="-122"/>
-                <a:cs typeface="Yu Gothic" pitchFamily="34" charset="-120"/>
-              </a:rPr>
-              <a:t>効果を聞かれても「たぶん速くなった」</a:t>
-            </a:r>
-            <a:endParaRPr lang="en-US" sz="1300" dirty="0"/>
-          </a:p>
-        </p:txBody>
-      </p:sp>
-      <p:sp>
-        <p:nvSpPr>
-          <p:cNvPr id="10" name="Shape 8"/>
-          <p:cNvSpPr/>
-          <p:nvPr/>
-        </p:nvSpPr>
-        <p:spPr>
-          <a:xfrm>
-            <a:off x="6400800" y="1828800"/>
-            <a:ext cx="4983480" cy="3566160"/>
-          </a:xfrm>
-          <a:prstGeom prst="rect">
-            <a:avLst/>
-          </a:prstGeom>
-          <a:solidFill>
-            <a:srgbClr val="FFFFFF"/>
-          </a:solidFill>
-          <a:ln w="15875">
-            <a:solidFill>
-              <a:srgbClr val="3B6B4A"/>
-            </a:solidFill>
-            <a:prstDash val="solid"/>
-          </a:ln>
-        </p:spPr>
-      </p:sp>
-      <p:sp>
-        <p:nvSpPr>
-          <p:cNvPr id="11" name="Shape 9"/>
-          <p:cNvSpPr/>
-          <p:nvPr/>
-        </p:nvSpPr>
-        <p:spPr>
-          <a:xfrm>
-            <a:off x="6400800" y="1828800"/>
-            <a:ext cx="4983480" cy="566928"/>
-          </a:xfrm>
-          <a:prstGeom prst="rect">
-            <a:avLst/>
-          </a:prstGeom>
-          <a:solidFill>
-            <a:srgbClr val="3B6B4A"/>
-          </a:solidFill>
-          <a:ln w="12700">
-            <a:solidFill>
-              <a:srgbClr val="333333"/>
-            </a:solidFill>
-            <a:prstDash val="solid"/>
-          </a:ln>
-        </p:spPr>
-      </p:sp>
-      <p:sp>
-        <p:nvSpPr>
-          <p:cNvPr id="12" name="Text 10"/>
-          <p:cNvSpPr txBox="1"/>
-          <p:nvPr/>
-        </p:nvSpPr>
-        <p:spPr>
-          <a:xfrm>
-            <a:off x="6629400" y="1883664"/>
-            <a:ext cx="4526280" cy="457200"/>
-          </a:xfrm>
-          <a:prstGeom prst="rect">
-            <a:avLst/>
-          </a:prstGeom>
-          <a:noFill/>
-          <a:ln/>
-        </p:spPr>
-        <p:txBody>
-          <a:bodyPr wrap="square" lIns="0" tIns="0" rIns="0" bIns="0" rtlCol="0" anchor="ctr"/>
-          <a:lstStyle/>
-          <a:p>
-            <a:pPr indent="0" marL="0">
-              <a:buNone/>
-            </a:pPr>
-            <a:r>
-              <a:rPr lang="en-US" sz="1400" b="1" dirty="0">
-                <a:solidFill>
-                  <a:srgbClr val="FFFFFF"/>
-                </a:solidFill>
-                <a:latin typeface="Yu Gothic" pitchFamily="34" charset="0"/>
-                <a:ea typeface="Yu Gothic" pitchFamily="34" charset="-122"/>
-                <a:cs typeface="Yu Gothic" pitchFamily="34" charset="-120"/>
-              </a:rPr>
-              <a:t>いま</a:t>
-            </a:r>
-            <a:endParaRPr lang="en-US" sz="1400" dirty="0"/>
-          </a:p>
-        </p:txBody>
-      </p:sp>
-      <p:sp>
-        <p:nvSpPr>
-          <p:cNvPr id="13" name="Text 11"/>
-          <p:cNvSpPr txBox="1"/>
-          <p:nvPr/>
-        </p:nvSpPr>
-        <p:spPr>
-          <a:xfrm>
-            <a:off x="6720840" y="2606040"/>
-            <a:ext cx="4343400" cy="548640"/>
-          </a:xfrm>
-          <a:prstGeom prst="rect">
-            <a:avLst/>
-          </a:prstGeom>
-          <a:noFill/>
-          <a:ln/>
-        </p:spPr>
-        <p:txBody>
-          <a:bodyPr wrap="square" lIns="0" tIns="0" rIns="0" bIns="0" rtlCol="0" anchor="ctr"/>
-          <a:lstStyle/>
-          <a:p>
-            <a:pPr indent="0" marL="0">
-              <a:lnSpc>
-                <a:spcPct val="125000"/>
-              </a:lnSpc>
-              <a:buNone/>
-            </a:pPr>
-            <a:r>
-              <a:rPr lang="en-US" sz="1300" dirty="0">
-                <a:solidFill>
-                  <a:srgbClr val="23201D"/>
-                </a:solidFill>
-                <a:latin typeface="Yu Gothic" pitchFamily="34" charset="0"/>
-                <a:ea typeface="Yu Gothic" pitchFamily="34" charset="-122"/>
-                <a:cs typeface="Yu Gothic" pitchFamily="34" charset="-120"/>
-              </a:rPr>
-              <a:t>指示文が15本、決まった場所にたまっている</a:t>
-            </a:r>
-            <a:endParaRPr lang="en-US" sz="1300" dirty="0"/>
-          </a:p>
-        </p:txBody>
-      </p:sp>
-      <p:sp>
-        <p:nvSpPr>
-          <p:cNvPr id="14" name="Text 12"/>
-          <p:cNvSpPr txBox="1"/>
-          <p:nvPr/>
-        </p:nvSpPr>
-        <p:spPr>
-          <a:xfrm>
-            <a:off x="6720840" y="3172968"/>
-            <a:ext cx="4343400" cy="548640"/>
-          </a:xfrm>
-          <a:prstGeom prst="rect">
-            <a:avLst/>
-          </a:prstGeom>
-          <a:noFill/>
-          <a:ln/>
-        </p:spPr>
-        <p:txBody>
-          <a:bodyPr wrap="square" lIns="0" tIns="0" rIns="0" bIns="0" rtlCol="0" anchor="ctr"/>
-          <a:lstStyle/>
-          <a:p>
-            <a:pPr indent="0" marL="0">
-              <a:lnSpc>
-                <a:spcPct val="125000"/>
-              </a:lnSpc>
-              <a:buNone/>
-            </a:pPr>
-            <a:r>
-              <a:rPr lang="en-US" sz="1300" dirty="0">
-                <a:solidFill>
-                  <a:srgbClr val="23201D"/>
-                </a:solidFill>
-                <a:latin typeface="Yu Gothic" pitchFamily="34" charset="0"/>
-                <a:ea typeface="Yu Gothic" pitchFamily="34" charset="-122"/>
-                <a:cs typeface="Yu Gothic" pitchFamily="34" charset="-120"/>
-              </a:rPr>
-              <a:t>自社資料を読むAIを社員が使っている</a:t>
-            </a:r>
-            <a:endParaRPr lang="en-US" sz="1300" dirty="0"/>
-          </a:p>
-        </p:txBody>
-      </p:sp>
-      <p:sp>
-        <p:nvSpPr>
-          <p:cNvPr id="15" name="Text 13"/>
-          <p:cNvSpPr txBox="1"/>
-          <p:nvPr/>
-        </p:nvSpPr>
-        <p:spPr>
-          <a:xfrm>
-            <a:off x="6720840" y="3739896"/>
-            <a:ext cx="4343400" cy="548640"/>
-          </a:xfrm>
-          <a:prstGeom prst="rect">
-            <a:avLst/>
-          </a:prstGeom>
-          <a:noFill/>
-          <a:ln/>
-        </p:spPr>
-        <p:txBody>
-          <a:bodyPr wrap="square" lIns="0" tIns="0" rIns="0" bIns="0" rtlCol="0" anchor="ctr"/>
-          <a:lstStyle/>
-          <a:p>
-            <a:pPr indent="0" marL="0">
-              <a:lnSpc>
-                <a:spcPct val="125000"/>
-              </a:lnSpc>
-              <a:buNone/>
-            </a:pPr>
-            <a:r>
-              <a:rPr lang="en-US" sz="1300" dirty="0">
-                <a:solidFill>
-                  <a:srgbClr val="23201D"/>
-                </a:solidFill>
-                <a:latin typeface="Yu Gothic" pitchFamily="34" charset="0"/>
-                <a:ea typeface="Yu Gothic" pitchFamily="34" charset="-122"/>
-                <a:cs typeface="Yu Gothic" pitchFamily="34" charset="-120"/>
-              </a:rPr>
-              <a:t>品質を毎月同じ10件で採点している</a:t>
-            </a:r>
-            <a:endParaRPr lang="en-US" sz="1300" dirty="0"/>
-          </a:p>
-        </p:txBody>
-      </p:sp>
-      <p:sp>
-        <p:nvSpPr>
-          <p:cNvPr id="16" name="Text 14"/>
-          <p:cNvSpPr txBox="1"/>
-          <p:nvPr/>
-        </p:nvSpPr>
-        <p:spPr>
-          <a:xfrm>
-            <a:off x="6720840" y="4306824"/>
-            <a:ext cx="4343400" cy="548640"/>
-          </a:xfrm>
-          <a:prstGeom prst="rect">
-            <a:avLst/>
-          </a:prstGeom>
-          <a:noFill/>
-          <a:ln/>
-        </p:spPr>
-        <p:txBody>
-          <a:bodyPr wrap="square" lIns="0" tIns="0" rIns="0" bIns="0" rtlCol="0" anchor="ctr"/>
-          <a:lstStyle/>
-          <a:p>
-            <a:pPr indent="0" marL="0">
-              <a:lnSpc>
-                <a:spcPct val="125000"/>
-              </a:lnSpc>
-              <a:buNone/>
-            </a:pPr>
-            <a:r>
-              <a:rPr lang="en-US" sz="1300" dirty="0">
-                <a:solidFill>
-                  <a:srgbClr val="23201D"/>
-                </a:solidFill>
-                <a:latin typeface="Yu Gothic" pitchFamily="34" charset="0"/>
-                <a:ea typeface="Yu Gothic" pitchFamily="34" charset="-122"/>
-                <a:cs typeface="Yu Gothic" pitchFamily="34" charset="-120"/>
-              </a:rPr>
-              <a:t>推進役・費用・権限が紙になっている</a:t>
-            </a:r>
-            <a:endParaRPr lang="en-US" sz="1300" dirty="0"/>
-          </a:p>
-        </p:txBody>
-      </p:sp>
-      <p:sp>
-        <p:nvSpPr>
-          <p:cNvPr id="17" name="Shape 15"/>
-          <p:cNvSpPr/>
-          <p:nvPr/>
-        </p:nvSpPr>
-        <p:spPr>
-          <a:xfrm>
-            <a:off x="5815584" y="3337560"/>
-            <a:ext cx="512064" cy="512064"/>
+            <a:off x="1014984" y="1940814"/>
+            <a:ext cx="365760" cy="365760"/>
           </a:xfrm>
           <a:prstGeom prst="ellipse">
             <a:avLst/>
@@ -3861,14 +4793,524 @@
       </p:sp>
       <p:sp>
         <p:nvSpPr>
+          <p:cNvPr id="6" name="Text 4"/>
+          <p:cNvSpPr txBox="1"/>
+          <p:nvPr/>
+        </p:nvSpPr>
+        <p:spPr>
+          <a:xfrm>
+            <a:off x="1014984" y="1940814"/>
+            <a:ext cx="365760" cy="365760"/>
+          </a:xfrm>
+          <a:prstGeom prst="rect">
+            <a:avLst/>
+          </a:prstGeom>
+          <a:noFill/>
+          <a:ln/>
+        </p:spPr>
+        <p:txBody>
+          <a:bodyPr wrap="square" lIns="0" tIns="0" rIns="0" bIns="0" rtlCol="0" anchor="ctr"/>
+          <a:lstStyle/>
+          <a:p>
+            <a:pPr algn="ctr" indent="0" marL="0">
+              <a:buNone/>
+            </a:pPr>
+            <a:r>
+              <a:rPr lang="en-US" sz="1300" b="1" dirty="0">
+                <a:solidFill>
+                  <a:srgbClr val="FFFFFF"/>
+                </a:solidFill>
+                <a:latin typeface="Yu Gothic" pitchFamily="34" charset="0"/>
+                <a:ea typeface="Yu Gothic" pitchFamily="34" charset="-122"/>
+                <a:cs typeface="Yu Gothic" pitchFamily="34" charset="-120"/>
+              </a:rPr>
+              <a:t>1</a:t>
+            </a:r>
+            <a:endParaRPr lang="en-US" sz="1300" dirty="0"/>
+          </a:p>
+        </p:txBody>
+      </p:sp>
+      <p:sp>
+        <p:nvSpPr>
+          <p:cNvPr id="7" name="Text 5"/>
+          <p:cNvSpPr txBox="1"/>
+          <p:nvPr/>
+        </p:nvSpPr>
+        <p:spPr>
+          <a:xfrm>
+            <a:off x="1600200" y="1764792"/>
+            <a:ext cx="3182112" cy="717804"/>
+          </a:xfrm>
+          <a:prstGeom prst="rect">
+            <a:avLst/>
+          </a:prstGeom>
+          <a:noFill/>
+          <a:ln/>
+        </p:spPr>
+        <p:txBody>
+          <a:bodyPr wrap="square" lIns="0" tIns="0" rIns="0" bIns="0" rtlCol="0" anchor="ctr"/>
+          <a:lstStyle/>
+          <a:p>
+            <a:pPr indent="0" marL="0">
+              <a:buNone/>
+            </a:pPr>
+            <a:r>
+              <a:rPr lang="en-US" sz="1450" b="1" dirty="0">
+                <a:solidFill>
+                  <a:srgbClr val="23201D"/>
+                </a:solidFill>
+                <a:latin typeface="Yu Gothic" pitchFamily="34" charset="0"/>
+                <a:ea typeface="Yu Gothic" pitchFamily="34" charset="-122"/>
+                <a:cs typeface="Yu Gothic" pitchFamily="34" charset="-120"/>
+              </a:rPr>
+              <a:t>3年後、AIがやっている仕事は何か</a:t>
+            </a:r>
+            <a:endParaRPr lang="en-US" sz="1450" dirty="0"/>
+          </a:p>
+        </p:txBody>
+      </p:sp>
+      <p:sp>
+        <p:nvSpPr>
+          <p:cNvPr id="8" name="Text 6"/>
+          <p:cNvSpPr txBox="1"/>
+          <p:nvPr/>
+        </p:nvSpPr>
+        <p:spPr>
+          <a:xfrm>
+            <a:off x="4888382" y="1764792"/>
+            <a:ext cx="6267298" cy="717804"/>
+          </a:xfrm>
+          <a:prstGeom prst="rect">
+            <a:avLst/>
+          </a:prstGeom>
+          <a:noFill/>
+          <a:ln/>
+        </p:spPr>
+        <p:txBody>
+          <a:bodyPr wrap="square" lIns="0" tIns="0" rIns="0" bIns="0" rtlCol="0" anchor="ctr"/>
+          <a:lstStyle/>
+          <a:p>
+            <a:pPr indent="0" marL="0">
+              <a:lnSpc>
+                <a:spcPct val="130000"/>
+              </a:lnSpc>
+              <a:buNone/>
+            </a:pPr>
+            <a:r>
+              <a:rPr lang="en-US" sz="1200" dirty="0">
+                <a:solidFill>
+                  <a:srgbClr val="5A534A"/>
+                </a:solidFill>
+                <a:latin typeface="Yu Gothic" pitchFamily="34" charset="0"/>
+                <a:ea typeface="Yu Gothic" pitchFamily="34" charset="-122"/>
+                <a:cs typeface="Yu Gothic" pitchFamily="34" charset="-120"/>
+              </a:rPr>
+              <a:t>業務名で3つ挙げます</a:t>
+            </a:r>
+            <a:endParaRPr lang="en-US" sz="1200" dirty="0"/>
+          </a:p>
+        </p:txBody>
+      </p:sp>
+      <p:sp>
+        <p:nvSpPr>
+          <p:cNvPr id="9" name="Shape 7"/>
+          <p:cNvSpPr/>
+          <p:nvPr/>
+        </p:nvSpPr>
+        <p:spPr>
+          <a:xfrm>
+            <a:off x="777240" y="2683764"/>
+            <a:ext cx="10607040" cy="864108"/>
+          </a:xfrm>
+          <a:prstGeom prst="rect">
+            <a:avLst/>
+          </a:prstGeom>
+          <a:solidFill>
+            <a:srgbClr val="FFFFFF"/>
+          </a:solidFill>
+          <a:ln w="12700">
+            <a:solidFill>
+              <a:srgbClr val="EDE7DB"/>
+            </a:solidFill>
+            <a:prstDash val="solid"/>
+          </a:ln>
+        </p:spPr>
+      </p:sp>
+      <p:sp>
+        <p:nvSpPr>
+          <p:cNvPr id="10" name="Shape 8"/>
+          <p:cNvSpPr/>
+          <p:nvPr/>
+        </p:nvSpPr>
+        <p:spPr>
+          <a:xfrm>
+            <a:off x="1014984" y="2932938"/>
+            <a:ext cx="365760" cy="365760"/>
+          </a:xfrm>
+          <a:prstGeom prst="ellipse">
+            <a:avLst/>
+          </a:prstGeom>
+          <a:solidFill>
+            <a:srgbClr val="B04A2F"/>
+          </a:solidFill>
+          <a:ln w="12700">
+            <a:solidFill>
+              <a:srgbClr val="333333"/>
+            </a:solidFill>
+            <a:prstDash val="solid"/>
+          </a:ln>
+        </p:spPr>
+      </p:sp>
+      <p:sp>
+        <p:nvSpPr>
+          <p:cNvPr id="11" name="Text 9"/>
+          <p:cNvSpPr txBox="1"/>
+          <p:nvPr/>
+        </p:nvSpPr>
+        <p:spPr>
+          <a:xfrm>
+            <a:off x="1014984" y="2932938"/>
+            <a:ext cx="365760" cy="365760"/>
+          </a:xfrm>
+          <a:prstGeom prst="rect">
+            <a:avLst/>
+          </a:prstGeom>
+          <a:noFill/>
+          <a:ln/>
+        </p:spPr>
+        <p:txBody>
+          <a:bodyPr wrap="square" lIns="0" tIns="0" rIns="0" bIns="0" rtlCol="0" anchor="ctr"/>
+          <a:lstStyle/>
+          <a:p>
+            <a:pPr algn="ctr" indent="0" marL="0">
+              <a:buNone/>
+            </a:pPr>
+            <a:r>
+              <a:rPr lang="en-US" sz="1300" b="1" dirty="0">
+                <a:solidFill>
+                  <a:srgbClr val="FFFFFF"/>
+                </a:solidFill>
+                <a:latin typeface="Yu Gothic" pitchFamily="34" charset="0"/>
+                <a:ea typeface="Yu Gothic" pitchFamily="34" charset="-122"/>
+                <a:cs typeface="Yu Gothic" pitchFamily="34" charset="-120"/>
+              </a:rPr>
+              <a:t>2</a:t>
+            </a:r>
+            <a:endParaRPr lang="en-US" sz="1300" dirty="0"/>
+          </a:p>
+        </p:txBody>
+      </p:sp>
+      <p:sp>
+        <p:nvSpPr>
+          <p:cNvPr id="12" name="Text 10"/>
+          <p:cNvSpPr txBox="1"/>
+          <p:nvPr/>
+        </p:nvSpPr>
+        <p:spPr>
+          <a:xfrm>
+            <a:off x="1600200" y="2756916"/>
+            <a:ext cx="3182112" cy="717804"/>
+          </a:xfrm>
+          <a:prstGeom prst="rect">
+            <a:avLst/>
+          </a:prstGeom>
+          <a:noFill/>
+          <a:ln/>
+        </p:spPr>
+        <p:txBody>
+          <a:bodyPr wrap="square" lIns="0" tIns="0" rIns="0" bIns="0" rtlCol="0" anchor="ctr"/>
+          <a:lstStyle/>
+          <a:p>
+            <a:pPr indent="0" marL="0">
+              <a:buNone/>
+            </a:pPr>
+            <a:r>
+              <a:rPr lang="en-US" sz="1450" b="1" dirty="0">
+                <a:solidFill>
+                  <a:srgbClr val="23201D"/>
+                </a:solidFill>
+                <a:latin typeface="Yu Gothic" pitchFamily="34" charset="0"/>
+                <a:ea typeface="Yu Gothic" pitchFamily="34" charset="-122"/>
+                <a:cs typeface="Yu Gothic" pitchFamily="34" charset="-120"/>
+              </a:rPr>
+              <a:t>その結果、人は何をしているか</a:t>
+            </a:r>
+            <a:endParaRPr lang="en-US" sz="1450" dirty="0"/>
+          </a:p>
+        </p:txBody>
+      </p:sp>
+      <p:sp>
+        <p:nvSpPr>
+          <p:cNvPr id="13" name="Text 11"/>
+          <p:cNvSpPr txBox="1"/>
+          <p:nvPr/>
+        </p:nvSpPr>
+        <p:spPr>
+          <a:xfrm>
+            <a:off x="4888382" y="2756916"/>
+            <a:ext cx="6267298" cy="717804"/>
+          </a:xfrm>
+          <a:prstGeom prst="rect">
+            <a:avLst/>
+          </a:prstGeom>
+          <a:noFill/>
+          <a:ln/>
+        </p:spPr>
+        <p:txBody>
+          <a:bodyPr wrap="square" lIns="0" tIns="0" rIns="0" bIns="0" rtlCol="0" anchor="ctr"/>
+          <a:lstStyle/>
+          <a:p>
+            <a:pPr indent="0" marL="0">
+              <a:lnSpc>
+                <a:spcPct val="130000"/>
+              </a:lnSpc>
+              <a:buNone/>
+            </a:pPr>
+            <a:r>
+              <a:rPr lang="en-US" sz="1200" dirty="0">
+                <a:solidFill>
+                  <a:srgbClr val="5A534A"/>
+                </a:solidFill>
+                <a:latin typeface="Yu Gothic" pitchFamily="34" charset="0"/>
+                <a:ea typeface="Yu Gothic" pitchFamily="34" charset="-122"/>
+                <a:cs typeface="Yu Gothic" pitchFamily="34" charset="-120"/>
+              </a:rPr>
+              <a:t>減らす話ではなく、移す話として書きます</a:t>
+            </a:r>
+            <a:endParaRPr lang="en-US" sz="1200" dirty="0"/>
+          </a:p>
+        </p:txBody>
+      </p:sp>
+      <p:sp>
+        <p:nvSpPr>
+          <p:cNvPr id="14" name="Shape 12"/>
+          <p:cNvSpPr/>
+          <p:nvPr/>
+        </p:nvSpPr>
+        <p:spPr>
+          <a:xfrm>
+            <a:off x="777240" y="3675888"/>
+            <a:ext cx="10607040" cy="864108"/>
+          </a:xfrm>
+          <a:prstGeom prst="rect">
+            <a:avLst/>
+          </a:prstGeom>
+          <a:solidFill>
+            <a:srgbClr val="FFFFFF"/>
+          </a:solidFill>
+          <a:ln w="12700">
+            <a:solidFill>
+              <a:srgbClr val="EDE7DB"/>
+            </a:solidFill>
+            <a:prstDash val="solid"/>
+          </a:ln>
+        </p:spPr>
+      </p:sp>
+      <p:sp>
+        <p:nvSpPr>
+          <p:cNvPr id="15" name="Shape 13"/>
+          <p:cNvSpPr/>
+          <p:nvPr/>
+        </p:nvSpPr>
+        <p:spPr>
+          <a:xfrm>
+            <a:off x="1014984" y="3925062"/>
+            <a:ext cx="365760" cy="365760"/>
+          </a:xfrm>
+          <a:prstGeom prst="ellipse">
+            <a:avLst/>
+          </a:prstGeom>
+          <a:solidFill>
+            <a:srgbClr val="B04A2F"/>
+          </a:solidFill>
+          <a:ln w="12700">
+            <a:solidFill>
+              <a:srgbClr val="333333"/>
+            </a:solidFill>
+            <a:prstDash val="solid"/>
+          </a:ln>
+        </p:spPr>
+      </p:sp>
+      <p:sp>
+        <p:nvSpPr>
+          <p:cNvPr id="16" name="Text 14"/>
+          <p:cNvSpPr txBox="1"/>
+          <p:nvPr/>
+        </p:nvSpPr>
+        <p:spPr>
+          <a:xfrm>
+            <a:off x="1014984" y="3925062"/>
+            <a:ext cx="365760" cy="365760"/>
+          </a:xfrm>
+          <a:prstGeom prst="rect">
+            <a:avLst/>
+          </a:prstGeom>
+          <a:noFill/>
+          <a:ln/>
+        </p:spPr>
+        <p:txBody>
+          <a:bodyPr wrap="square" lIns="0" tIns="0" rIns="0" bIns="0" rtlCol="0" anchor="ctr"/>
+          <a:lstStyle/>
+          <a:p>
+            <a:pPr algn="ctr" indent="0" marL="0">
+              <a:buNone/>
+            </a:pPr>
+            <a:r>
+              <a:rPr lang="en-US" sz="1300" b="1" dirty="0">
+                <a:solidFill>
+                  <a:srgbClr val="FFFFFF"/>
+                </a:solidFill>
+                <a:latin typeface="Yu Gothic" pitchFamily="34" charset="0"/>
+                <a:ea typeface="Yu Gothic" pitchFamily="34" charset="-122"/>
+                <a:cs typeface="Yu Gothic" pitchFamily="34" charset="-120"/>
+              </a:rPr>
+              <a:t>3</a:t>
+            </a:r>
+            <a:endParaRPr lang="en-US" sz="1300" dirty="0"/>
+          </a:p>
+        </p:txBody>
+      </p:sp>
+      <p:sp>
+        <p:nvSpPr>
+          <p:cNvPr id="17" name="Text 15"/>
+          <p:cNvSpPr txBox="1"/>
+          <p:nvPr/>
+        </p:nvSpPr>
+        <p:spPr>
+          <a:xfrm>
+            <a:off x="1600200" y="3749040"/>
+            <a:ext cx="3182112" cy="717804"/>
+          </a:xfrm>
+          <a:prstGeom prst="rect">
+            <a:avLst/>
+          </a:prstGeom>
+          <a:noFill/>
+          <a:ln/>
+        </p:spPr>
+        <p:txBody>
+          <a:bodyPr wrap="square" lIns="0" tIns="0" rIns="0" bIns="0" rtlCol="0" anchor="ctr"/>
+          <a:lstStyle/>
+          <a:p>
+            <a:pPr indent="0" marL="0">
+              <a:buNone/>
+            </a:pPr>
+            <a:r>
+              <a:rPr lang="en-US" sz="1450" b="1" dirty="0">
+                <a:solidFill>
+                  <a:srgbClr val="23201D"/>
+                </a:solidFill>
+                <a:latin typeface="Yu Gothic" pitchFamily="34" charset="0"/>
+                <a:ea typeface="Yu Gothic" pitchFamily="34" charset="-122"/>
+                <a:cs typeface="Yu Gothic" pitchFamily="34" charset="-120"/>
+              </a:rPr>
+              <a:t>そのために、今ない資産は何か</a:t>
+            </a:r>
+            <a:endParaRPr lang="en-US" sz="1450" dirty="0"/>
+          </a:p>
+        </p:txBody>
+      </p:sp>
+      <p:sp>
+        <p:nvSpPr>
           <p:cNvPr id="18" name="Text 16"/>
           <p:cNvSpPr txBox="1"/>
           <p:nvPr/>
         </p:nvSpPr>
         <p:spPr>
           <a:xfrm>
-            <a:off x="5815584" y="3337560"/>
-            <a:ext cx="512064" cy="512064"/>
+            <a:off x="4888382" y="3749040"/>
+            <a:ext cx="6267298" cy="717804"/>
+          </a:xfrm>
+          <a:prstGeom prst="rect">
+            <a:avLst/>
+          </a:prstGeom>
+          <a:noFill/>
+          <a:ln/>
+        </p:spPr>
+        <p:txBody>
+          <a:bodyPr wrap="square" lIns="0" tIns="0" rIns="0" bIns="0" rtlCol="0" anchor="ctr"/>
+          <a:lstStyle/>
+          <a:p>
+            <a:pPr indent="0" marL="0">
+              <a:lnSpc>
+                <a:spcPct val="130000"/>
+              </a:lnSpc>
+              <a:buNone/>
+            </a:pPr>
+            <a:r>
+              <a:rPr lang="en-US" sz="1200" dirty="0">
+                <a:solidFill>
+                  <a:srgbClr val="5A534A"/>
+                </a:solidFill>
+                <a:latin typeface="Yu Gothic" pitchFamily="34" charset="0"/>
+                <a:ea typeface="Yu Gothic" pitchFamily="34" charset="-122"/>
+                <a:cs typeface="Yu Gothic" pitchFamily="34" charset="-120"/>
+              </a:rPr>
+              <a:t>データ・資料・人・仕組み。第8回のリストが効きます</a:t>
+            </a:r>
+            <a:endParaRPr lang="en-US" sz="1200" dirty="0"/>
+          </a:p>
+        </p:txBody>
+      </p:sp>
+      <p:sp>
+        <p:nvSpPr>
+          <p:cNvPr id="19" name="Shape 17"/>
+          <p:cNvSpPr/>
+          <p:nvPr/>
+        </p:nvSpPr>
+        <p:spPr>
+          <a:xfrm>
+            <a:off x="777240" y="4668012"/>
+            <a:ext cx="10607040" cy="864108"/>
+          </a:xfrm>
+          <a:prstGeom prst="rect">
+            <a:avLst/>
+          </a:prstGeom>
+          <a:solidFill>
+            <a:srgbClr val="FFFFFF"/>
+          </a:solidFill>
+          <a:ln w="12700">
+            <a:solidFill>
+              <a:srgbClr val="EDE7DB"/>
+            </a:solidFill>
+            <a:prstDash val="solid"/>
+          </a:ln>
+        </p:spPr>
+      </p:sp>
+      <p:sp>
+        <p:nvSpPr>
+          <p:cNvPr id="20" name="Shape 18"/>
+          <p:cNvSpPr/>
+          <p:nvPr/>
+        </p:nvSpPr>
+        <p:spPr>
+          <a:xfrm>
+            <a:off x="1014984" y="4917186"/>
+            <a:ext cx="365760" cy="365760"/>
+          </a:xfrm>
+          <a:prstGeom prst="ellipse">
+            <a:avLst/>
+          </a:prstGeom>
+          <a:solidFill>
+            <a:srgbClr val="B04A2F"/>
+          </a:solidFill>
+          <a:ln w="12700">
+            <a:solidFill>
+              <a:srgbClr val="333333"/>
+            </a:solidFill>
+            <a:prstDash val="solid"/>
+          </a:ln>
+        </p:spPr>
+      </p:sp>
+      <p:sp>
+        <p:nvSpPr>
+          <p:cNvPr id="21" name="Text 19"/>
+          <p:cNvSpPr txBox="1"/>
+          <p:nvPr/>
+        </p:nvSpPr>
+        <p:spPr>
+          <a:xfrm>
+            <a:off x="1014984" y="4917186"/>
+            <a:ext cx="365760" cy="365760"/>
           </a:xfrm>
           <a:prstGeom prst="rect">
             <a:avLst/>
@@ -3884,7 +5326,7 @@
               <a:buNone/>
             </a:pPr>
             <a:r>
-              <a:rPr lang="en-US" sz="1800" b="1" dirty="0">
+              <a:rPr lang="en-US" sz="1300" b="1" dirty="0">
                 <a:solidFill>
                   <a:srgbClr val="FFFFFF"/>
                 </a:solidFill>
@@ -3892,22 +5334,142 @@
                 <a:ea typeface="Yu Gothic" pitchFamily="34" charset="-122"/>
                 <a:cs typeface="Yu Gothic" pitchFamily="34" charset="-120"/>
               </a:rPr>
-              <a:t>→</a:t>
-            </a:r>
-            <a:endParaRPr lang="en-US" sz="1800" dirty="0"/>
-          </a:p>
-        </p:txBody>
-      </p:sp>
-      <p:sp>
-        <p:nvSpPr>
-          <p:cNvPr id="19" name="Text 17"/>
-          <p:cNvSpPr txBox="1"/>
-          <p:nvPr/>
-        </p:nvSpPr>
-        <p:spPr>
-          <a:xfrm>
-            <a:off x="777240" y="6355080"/>
-            <a:ext cx="7424928" cy="274320"/>
+              <a:t>4</a:t>
+            </a:r>
+            <a:endParaRPr lang="en-US" sz="1300" dirty="0"/>
+          </a:p>
+        </p:txBody>
+      </p:sp>
+      <p:sp>
+        <p:nvSpPr>
+          <p:cNvPr id="22" name="Text 20"/>
+          <p:cNvSpPr txBox="1"/>
+          <p:nvPr/>
+        </p:nvSpPr>
+        <p:spPr>
+          <a:xfrm>
+            <a:off x="1600200" y="4741164"/>
+            <a:ext cx="3182112" cy="717804"/>
+          </a:xfrm>
+          <a:prstGeom prst="rect">
+            <a:avLst/>
+          </a:prstGeom>
+          <a:noFill/>
+          <a:ln/>
+        </p:spPr>
+        <p:txBody>
+          <a:bodyPr wrap="square" lIns="0" tIns="0" rIns="0" bIns="0" rtlCol="0" anchor="ctr"/>
+          <a:lstStyle/>
+          <a:p>
+            <a:pPr indent="0" marL="0">
+              <a:buNone/>
+            </a:pPr>
+            <a:r>
+              <a:rPr lang="en-US" sz="1450" b="1" dirty="0">
+                <a:solidFill>
+                  <a:srgbClr val="23201D"/>
+                </a:solidFill>
+                <a:latin typeface="Yu Gothic" pitchFamily="34" charset="0"/>
+                <a:ea typeface="Yu Gothic" pitchFamily="34" charset="-122"/>
+                <a:cs typeface="Yu Gothic" pitchFamily="34" charset="-120"/>
+              </a:rPr>
+              <a:t>やらないと決めることは何か</a:t>
+            </a:r>
+            <a:endParaRPr lang="en-US" sz="1450" dirty="0"/>
+          </a:p>
+        </p:txBody>
+      </p:sp>
+      <p:sp>
+        <p:nvSpPr>
+          <p:cNvPr id="23" name="Text 21"/>
+          <p:cNvSpPr txBox="1"/>
+          <p:nvPr/>
+        </p:nvSpPr>
+        <p:spPr>
+          <a:xfrm>
+            <a:off x="4888382" y="4741164"/>
+            <a:ext cx="6267298" cy="717804"/>
+          </a:xfrm>
+          <a:prstGeom prst="rect">
+            <a:avLst/>
+          </a:prstGeom>
+          <a:noFill/>
+          <a:ln/>
+        </p:spPr>
+        <p:txBody>
+          <a:bodyPr wrap="square" lIns="0" tIns="0" rIns="0" bIns="0" rtlCol="0" anchor="ctr"/>
+          <a:lstStyle/>
+          <a:p>
+            <a:pPr indent="0" marL="0">
+              <a:lnSpc>
+                <a:spcPct val="130000"/>
+              </a:lnSpc>
+              <a:buNone/>
+            </a:pPr>
+            <a:r>
+              <a:rPr lang="en-US" sz="1200" dirty="0">
+                <a:solidFill>
+                  <a:srgbClr val="5A534A"/>
+                </a:solidFill>
+                <a:latin typeface="Yu Gothic" pitchFamily="34" charset="0"/>
+                <a:ea typeface="Yu Gothic" pitchFamily="34" charset="-122"/>
+                <a:cs typeface="Yu Gothic" pitchFamily="34" charset="-120"/>
+              </a:rPr>
+              <a:t>捨てるものを決めます。ここが構想の質を決めます</a:t>
+            </a:r>
+            <a:endParaRPr lang="en-US" sz="1200" dirty="0"/>
+          </a:p>
+        </p:txBody>
+      </p:sp>
+      <p:sp>
+        <p:nvSpPr>
+          <p:cNvPr id="24" name="Text 22"/>
+          <p:cNvSpPr txBox="1"/>
+          <p:nvPr/>
+        </p:nvSpPr>
+        <p:spPr>
+          <a:xfrm>
+            <a:off x="777240" y="5669280"/>
+            <a:ext cx="10607040" cy="411480"/>
+          </a:xfrm>
+          <a:prstGeom prst="rect">
+            <a:avLst/>
+          </a:prstGeom>
+          <a:noFill/>
+          <a:ln/>
+        </p:spPr>
+        <p:txBody>
+          <a:bodyPr wrap="square" lIns="0" tIns="0" rIns="0" bIns="0" rtlCol="0" anchor="ctr"/>
+          <a:lstStyle/>
+          <a:p>
+            <a:pPr indent="0" marL="0">
+              <a:buNone/>
+            </a:pPr>
+            <a:r>
+              <a:rPr lang="en-US" sz="1200" b="1" dirty="0">
+                <a:solidFill>
+                  <a:srgbClr val="B04A2F"/>
+                </a:solidFill>
+                <a:latin typeface="Yu Gothic" pitchFamily="34" charset="0"/>
+                <a:ea typeface="Yu Gothic" pitchFamily="34" charset="-122"/>
+                <a:cs typeface="Yu Gothic" pitchFamily="34" charset="-120"/>
+              </a:rPr>
+              <a:t>4つ目がいちばん重要です。全部やろうとして何も進まない会社が、いちばん多くあります。</a:t>
+            </a:r>
+            <a:endParaRPr lang="en-US" sz="1200" dirty="0"/>
+          </a:p>
+        </p:txBody>
+      </p:sp>
+      <p:sp>
+        <p:nvSpPr>
+          <p:cNvPr id="25" name="Text 23"/>
+          <p:cNvSpPr txBox="1"/>
+          <p:nvPr/>
+        </p:nvSpPr>
+        <p:spPr>
+          <a:xfrm>
+            <a:off x="777240" y="6382512"/>
+            <a:ext cx="7424928" cy="256032"/>
           </a:xfrm>
           <a:prstGeom prst="rect">
             <a:avLst/>
@@ -3939,14 +5501,14 @@
       </p:sp>
       <p:sp>
         <p:nvSpPr>
-          <p:cNvPr id="20" name="Text 18"/>
-          <p:cNvSpPr txBox="1"/>
-          <p:nvPr/>
-        </p:nvSpPr>
-        <p:spPr>
-          <a:xfrm>
-            <a:off x="8202168" y="6355080"/>
-            <a:ext cx="3182112" cy="274320"/>
+          <p:cNvPr id="26" name="Text 24"/>
+          <p:cNvSpPr txBox="1"/>
+          <p:nvPr/>
+        </p:nvSpPr>
+        <p:spPr>
+          <a:xfrm>
+            <a:off x="8202168" y="6382512"/>
+            <a:ext cx="3182112" cy="256032"/>
           </a:xfrm>
           <a:prstGeom prst="rect">
             <a:avLst/>
@@ -3970,7 +5532,7 @@
                 <a:ea typeface="Yu Gothic" pitchFamily="34" charset="-122"/>
                 <a:cs typeface="Yu Gothic" pitchFamily="34" charset="-120"/>
               </a:rPr>
-              <a:t>実演</a:t>
+              <a:t>考え方</a:t>
             </a:r>
             <a:endParaRPr lang="en-US" sz="900" dirty="0"/>
           </a:p>
@@ -4016,7 +5578,7 @@
         </p:nvSpPr>
         <p:spPr>
           <a:xfrm>
-            <a:off x="777240" y="640080"/>
+            <a:off x="777240" y="566928"/>
             <a:ext cx="10607040" cy="274320"/>
           </a:xfrm>
           <a:prstGeom prst="rect">
@@ -4041,7 +5603,7 @@
                 <a:ea typeface="Yu Gothic" pitchFamily="34" charset="-122"/>
                 <a:cs typeface="Yu Gothic" pitchFamily="34" charset="-120"/>
               </a:rPr>
-              <a:t>演習</a:t>
+              <a:t>あてはめ</a:t>
             </a:r>
             <a:endParaRPr lang="en-US" sz="1100" dirty="0"/>
           </a:p>
@@ -4055,7 +5617,7 @@
         </p:nvSpPr>
         <p:spPr>
           <a:xfrm>
-            <a:off x="777240" y="960120"/>
+            <a:off x="777240" y="896112"/>
             <a:ext cx="10607040" cy="640080"/>
           </a:xfrm>
           <a:prstGeom prst="rect">
@@ -4072,7 +5634,7 @@
               <a:buNone/>
             </a:pPr>
             <a:r>
-              <a:rPr lang="en-US" sz="2700" b="1" dirty="0">
+              <a:rPr lang="en-US" sz="2600" b="1" dirty="0">
                 <a:solidFill>
                   <a:srgbClr val="23201D"/>
                 </a:solidFill>
@@ -4080,61 +5642,22 @@
                 <a:ea typeface="Yu Gothic" pitchFamily="34" charset="-122"/>
                 <a:cs typeface="Yu Gothic" pitchFamily="34" charset="-120"/>
               </a:rPr>
-              <a:t>今日の流れ</a:t>
-            </a:r>
-            <a:endParaRPr lang="en-US" sz="2700" dirty="0"/>
-          </a:p>
-        </p:txBody>
-      </p:sp>
-      <p:sp>
-        <p:nvSpPr>
-          <p:cNvPr id="4" name="Text 2"/>
-          <p:cNvSpPr txBox="1"/>
-          <p:nvPr/>
-        </p:nvSpPr>
-        <p:spPr>
-          <a:xfrm>
-            <a:off x="777240" y="1627632"/>
-            <a:ext cx="10607040" cy="320040"/>
-          </a:xfrm>
-          <a:prstGeom prst="rect">
-            <a:avLst/>
-          </a:prstGeom>
-          <a:noFill/>
-          <a:ln/>
-        </p:spPr>
-        <p:txBody>
-          <a:bodyPr wrap="square" lIns="0" tIns="0" rIns="0" bIns="0" rtlCol="0" anchor="ctr"/>
-          <a:lstStyle/>
-          <a:p>
-            <a:pPr indent="0" marL="0">
-              <a:buNone/>
-            </a:pPr>
-            <a:r>
-              <a:rPr lang="en-US" sz="1250" b="1" dirty="0">
-                <a:solidFill>
-                  <a:srgbClr val="2F4F6B"/>
-                </a:solidFill>
-                <a:latin typeface="Yu Gothic" pitchFamily="34" charset="0"/>
-                <a:ea typeface="Yu Gothic" pitchFamily="34" charset="-122"/>
-                <a:cs typeface="Yu Gothic" pitchFamily="34" charset="-120"/>
-              </a:rPr>
-              <a:t>55分。操作するのはご自身です。</a:t>
-            </a:r>
-            <a:endParaRPr lang="en-US" sz="1250" dirty="0"/>
-          </a:p>
-        </p:txBody>
-      </p:sp>
-      <p:sp>
-        <p:nvSpPr>
-          <p:cNvPr id="5" name="Shape 3"/>
+              <a:t>この12回で変わったこと</a:t>
+            </a:r>
+            <a:endParaRPr lang="en-US" sz="2600" dirty="0"/>
+          </a:p>
+        </p:txBody>
+      </p:sp>
+      <p:sp>
+        <p:nvSpPr>
+          <p:cNvPr id="4" name="Shape 2"/>
           <p:cNvSpPr/>
           <p:nvPr/>
         </p:nvSpPr>
         <p:spPr>
           <a:xfrm>
-            <a:off x="777240" y="2240280"/>
-            <a:ext cx="3383280" cy="2697480"/>
+            <a:off x="777240" y="1691640"/>
+            <a:ext cx="10607040" cy="3931920"/>
           </a:xfrm>
           <a:prstGeom prst="rect">
             <a:avLst/>
@@ -4142,9 +5665,9 @@
           <a:solidFill>
             <a:srgbClr val="FFFFFF"/>
           </a:solidFill>
-          <a:ln w="12700">
+          <a:ln w="15875">
             <a:solidFill>
-              <a:srgbClr val="EDE7DB"/>
+              <a:srgbClr val="2F4F6B"/>
             </a:solidFill>
             <a:prstDash val="solid"/>
           </a:ln>
@@ -4152,16 +5675,16 @@
       </p:sp>
       <p:sp>
         <p:nvSpPr>
-          <p:cNvPr id="6" name="Shape 4"/>
+          <p:cNvPr id="5" name="Shape 3"/>
           <p:cNvSpPr/>
           <p:nvPr/>
         </p:nvSpPr>
         <p:spPr>
           <a:xfrm>
-            <a:off x="1051560" y="2487168"/>
-            <a:ext cx="438912" cy="438912"/>
-          </a:xfrm>
-          <a:prstGeom prst="ellipse">
+            <a:off x="777240" y="1691640"/>
+            <a:ext cx="10607040" cy="457200"/>
+          </a:xfrm>
+          <a:prstGeom prst="rect">
             <a:avLst/>
           </a:prstGeom>
           <a:solidFill>
@@ -4169,7 +5692,7 @@
           </a:solidFill>
           <a:ln w="12700">
             <a:solidFill>
-              <a:srgbClr val="2F4F6B"/>
+              <a:srgbClr val="333333"/>
             </a:solidFill>
             <a:prstDash val="solid"/>
           </a:ln>
@@ -4177,40 +5700,82 @@
       </p:sp>
       <p:sp>
         <p:nvSpPr>
+          <p:cNvPr id="6" name="Text 4"/>
+          <p:cNvSpPr txBox="1"/>
+          <p:nvPr/>
+        </p:nvSpPr>
+        <p:spPr>
+          <a:xfrm>
+            <a:off x="1051560" y="1709928"/>
+            <a:ext cx="10058400" cy="420624"/>
+          </a:xfrm>
+          <a:prstGeom prst="rect">
+            <a:avLst/>
+          </a:prstGeom>
+          <a:noFill/>
+          <a:ln/>
+        </p:spPr>
+        <p:txBody>
+          <a:bodyPr wrap="square" lIns="0" tIns="0" rIns="0" bIns="0" rtlCol="0" anchor="ctr"/>
+          <a:lstStyle/>
+          <a:p>
+            <a:pPr indent="0" marL="0">
+              <a:buNone/>
+            </a:pPr>
+            <a:r>
+              <a:rPr lang="en-US" sz="1200" b="1" dirty="0">
+                <a:solidFill>
+                  <a:srgbClr val="FFFFFF"/>
+                </a:solidFill>
+                <a:latin typeface="Yu Gothic" pitchFamily="34" charset="0"/>
+                <a:ea typeface="Yu Gothic" pitchFamily="34" charset="-122"/>
+                <a:cs typeface="Yu Gothic" pitchFamily="34" charset="-120"/>
+              </a:rPr>
+              <a:t>受講前 → いま（第1回の記録と突き合わせます）</a:t>
+            </a:r>
+            <a:endParaRPr lang="en-US" sz="1200" dirty="0"/>
+          </a:p>
+        </p:txBody>
+      </p:sp>
+      <p:sp>
+        <p:nvSpPr>
           <p:cNvPr id="7" name="Text 5"/>
           <p:cNvSpPr txBox="1"/>
           <p:nvPr/>
         </p:nvSpPr>
         <p:spPr>
           <a:xfrm>
-            <a:off x="1051560" y="2487168"/>
-            <a:ext cx="438912" cy="438912"/>
-          </a:xfrm>
-          <a:prstGeom prst="rect">
-            <a:avLst/>
-          </a:prstGeom>
-          <a:noFill/>
-          <a:ln/>
-        </p:spPr>
-        <p:txBody>
-          <a:bodyPr wrap="square" lIns="0" tIns="0" rIns="0" bIns="0" rtlCol="0" anchor="ctr"/>
-          <a:lstStyle/>
-          <a:p>
-            <a:pPr algn="ctr" indent="0" marL="0">
-              <a:buNone/>
-            </a:pPr>
-            <a:r>
-              <a:rPr lang="en-US" sz="1400" b="1" dirty="0">
-                <a:solidFill>
-                  <a:srgbClr val="FFFFFF"/>
-                </a:solidFill>
-                <a:latin typeface="Yu Gothic" pitchFamily="34" charset="0"/>
-                <a:ea typeface="Yu Gothic" pitchFamily="34" charset="-122"/>
-                <a:cs typeface="Yu Gothic" pitchFamily="34" charset="-120"/>
-              </a:rPr>
-              <a:t>1</a:t>
-            </a:r>
-            <a:endParaRPr lang="en-US" sz="1400" dirty="0"/>
+            <a:off x="1097280" y="2331720"/>
+            <a:ext cx="2057400" cy="530352"/>
+          </a:xfrm>
+          <a:prstGeom prst="rect">
+            <a:avLst/>
+          </a:prstGeom>
+          <a:noFill/>
+          <a:ln/>
+        </p:spPr>
+        <p:txBody>
+          <a:bodyPr wrap="square" lIns="0" tIns="0" rIns="0" bIns="0" rtlCol="0" anchor="ctr"/>
+          <a:lstStyle/>
+          <a:p>
+            <a:pPr indent="0" marL="0">
+              <a:lnSpc>
+                <a:spcPct val="110000"/>
+              </a:lnSpc>
+              <a:buNone/>
+            </a:pPr>
+            <a:r>
+              <a:rPr lang="en-US" sz="1100" b="1" dirty="0">
+                <a:solidFill>
+                  <a:srgbClr val="2F4F6B"/>
+                </a:solidFill>
+                <a:latin typeface="Yu Gothic" pitchFamily="34" charset="0"/>
+                <a:ea typeface="Yu Gothic" pitchFamily="34" charset="-122"/>
+                <a:cs typeface="Yu Gothic" pitchFamily="34" charset="-120"/>
+              </a:rPr>
+              <a:t>指示の出し方</a:t>
+            </a:r>
+            <a:endParaRPr lang="en-US" sz="1100" dirty="0"/>
           </a:p>
         </p:txBody>
       </p:sp>
@@ -4222,8 +5787,8 @@
         </p:nvSpPr>
         <p:spPr>
           <a:xfrm>
-            <a:off x="1051560" y="3035808"/>
-            <a:ext cx="2834640" cy="777240"/>
+            <a:off x="3291840" y="2331720"/>
+            <a:ext cx="7772400" cy="530352"/>
           </a:xfrm>
           <a:prstGeom prst="rect">
             <a:avLst/>
@@ -4237,22 +5802,22 @@
           <a:p>
             <a:pPr indent="0" marL="0">
               <a:lnSpc>
-                <a:spcPct val="125000"/>
+                <a:spcPct val="115000"/>
               </a:lnSpc>
               <a:buNone/>
             </a:pPr>
             <a:r>
-              <a:rPr lang="en-US" sz="1500" b="1" dirty="0">
+              <a:rPr lang="en-US" sz="1150" dirty="0">
                 <a:solidFill>
                   <a:srgbClr val="23201D"/>
                 </a:solidFill>
-                <a:latin typeface="Yu Gothic" pitchFamily="34" charset="0"/>
-                <a:ea typeface="Yu Gothic" pitchFamily="34" charset="-122"/>
-                <a:cs typeface="Yu Gothic" pitchFamily="34" charset="-120"/>
-              </a:rPr>
-              <a:t>作ったものを全部並べる</a:t>
-            </a:r>
-            <a:endParaRPr lang="en-US" sz="1500" dirty="0"/>
+                <a:latin typeface="Consolas" pitchFamily="34" charset="0"/>
+                <a:ea typeface="Consolas" pitchFamily="34" charset="-122"/>
+                <a:cs typeface="Consolas" pitchFamily="34" charset="-120"/>
+              </a:rPr>
+              <a:t>毎回ゼロから → 型で書き、15本が決まった場所にある</a:t>
+            </a:r>
+            <a:endParaRPr lang="en-US" sz="1150" dirty="0"/>
           </a:p>
         </p:txBody>
       </p:sp>
@@ -4264,8 +5829,8 @@
         </p:nvSpPr>
         <p:spPr>
           <a:xfrm>
-            <a:off x="1051560" y="3822192"/>
-            <a:ext cx="2834640" cy="960120"/>
+            <a:off x="1097280" y="2862072"/>
+            <a:ext cx="2057400" cy="530352"/>
           </a:xfrm>
           <a:prstGeom prst="rect">
             <a:avLst/>
@@ -4279,12 +5844,432 @@
           <a:p>
             <a:pPr indent="0" marL="0">
               <a:lnSpc>
-                <a:spcPct val="130000"/>
+                <a:spcPct val="110000"/>
               </a:lnSpc>
               <a:buNone/>
             </a:pPr>
             <a:r>
-              <a:rPr lang="en-US" sz="1200" dirty="0">
+              <a:rPr lang="en-US" sz="1100" b="1" dirty="0">
+                <a:solidFill>
+                  <a:srgbClr val="2F4F6B"/>
+                </a:solidFill>
+                <a:latin typeface="Yu Gothic" pitchFamily="34" charset="0"/>
+                <a:ea typeface="Yu Gothic" pitchFamily="34" charset="-122"/>
+                <a:cs typeface="Yu Gothic" pitchFamily="34" charset="-120"/>
+              </a:rPr>
+              <a:t>社内の広がり</a:t>
+            </a:r>
+            <a:endParaRPr lang="en-US" sz="1100" dirty="0"/>
+          </a:p>
+        </p:txBody>
+      </p:sp>
+      <p:sp>
+        <p:nvSpPr>
+          <p:cNvPr id="10" name="Text 8"/>
+          <p:cNvSpPr txBox="1"/>
+          <p:nvPr/>
+        </p:nvSpPr>
+        <p:spPr>
+          <a:xfrm>
+            <a:off x="3291840" y="2862072"/>
+            <a:ext cx="7772400" cy="530352"/>
+          </a:xfrm>
+          <a:prstGeom prst="rect">
+            <a:avLst/>
+          </a:prstGeom>
+          <a:noFill/>
+          <a:ln/>
+        </p:spPr>
+        <p:txBody>
+          <a:bodyPr wrap="square" lIns="0" tIns="0" rIns="0" bIns="0" rtlCol="0" anchor="ctr"/>
+          <a:lstStyle/>
+          <a:p>
+            <a:pPr indent="0" marL="0">
+              <a:lnSpc>
+                <a:spcPct val="115000"/>
+              </a:lnSpc>
+              <a:buNone/>
+            </a:pPr>
+            <a:r>
+              <a:rPr lang="en-US" sz="1150" dirty="0">
+                <a:solidFill>
+                  <a:srgbClr val="23201D"/>
+                </a:solidFill>
+                <a:latin typeface="Consolas" pitchFamily="34" charset="0"/>
+                <a:ea typeface="Consolas" pitchFamily="34" charset="-122"/>
+                <a:cs typeface="Consolas" pitchFamily="34" charset="-120"/>
+              </a:rPr>
+              <a:t>社長のみ → 社員◯名が業務で使用</a:t>
+            </a:r>
+            <a:endParaRPr lang="en-US" sz="1150" dirty="0"/>
+          </a:p>
+        </p:txBody>
+      </p:sp>
+      <p:sp>
+        <p:nvSpPr>
+          <p:cNvPr id="11" name="Text 9"/>
+          <p:cNvSpPr txBox="1"/>
+          <p:nvPr/>
+        </p:nvSpPr>
+        <p:spPr>
+          <a:xfrm>
+            <a:off x="1097280" y="3392424"/>
+            <a:ext cx="2057400" cy="530352"/>
+          </a:xfrm>
+          <a:prstGeom prst="rect">
+            <a:avLst/>
+          </a:prstGeom>
+          <a:noFill/>
+          <a:ln/>
+        </p:spPr>
+        <p:txBody>
+          <a:bodyPr wrap="square" lIns="0" tIns="0" rIns="0" bIns="0" rtlCol="0" anchor="ctr"/>
+          <a:lstStyle/>
+          <a:p>
+            <a:pPr indent="0" marL="0">
+              <a:lnSpc>
+                <a:spcPct val="110000"/>
+              </a:lnSpc>
+              <a:buNone/>
+            </a:pPr>
+            <a:r>
+              <a:rPr lang="en-US" sz="1100" b="1" dirty="0">
+                <a:solidFill>
+                  <a:srgbClr val="2F4F6B"/>
+                </a:solidFill>
+                <a:latin typeface="Yu Gothic" pitchFamily="34" charset="0"/>
+                <a:ea typeface="Yu Gothic" pitchFamily="34" charset="-122"/>
+                <a:cs typeface="Yu Gothic" pitchFamily="34" charset="-120"/>
+              </a:rPr>
+              <a:t>数字の扱い</a:t>
+            </a:r>
+            <a:endParaRPr lang="en-US" sz="1100" dirty="0"/>
+          </a:p>
+        </p:txBody>
+      </p:sp>
+      <p:sp>
+        <p:nvSpPr>
+          <p:cNvPr id="12" name="Text 10"/>
+          <p:cNvSpPr txBox="1"/>
+          <p:nvPr/>
+        </p:nvSpPr>
+        <p:spPr>
+          <a:xfrm>
+            <a:off x="3291840" y="3392424"/>
+            <a:ext cx="7772400" cy="530352"/>
+          </a:xfrm>
+          <a:prstGeom prst="rect">
+            <a:avLst/>
+          </a:prstGeom>
+          <a:noFill/>
+          <a:ln/>
+        </p:spPr>
+        <p:txBody>
+          <a:bodyPr wrap="square" lIns="0" tIns="0" rIns="0" bIns="0" rtlCol="0" anchor="ctr"/>
+          <a:lstStyle/>
+          <a:p>
+            <a:pPr indent="0" marL="0">
+              <a:lnSpc>
+                <a:spcPct val="115000"/>
+              </a:lnSpc>
+              <a:buNone/>
+            </a:pPr>
+            <a:r>
+              <a:rPr lang="en-US" sz="1150" dirty="0">
+                <a:solidFill>
+                  <a:srgbClr val="23201D"/>
+                </a:solidFill>
+                <a:latin typeface="Consolas" pitchFamily="34" charset="0"/>
+                <a:ea typeface="Consolas" pitchFamily="34" charset="-122"/>
+                <a:cs typeface="Consolas" pitchFamily="34" charset="-120"/>
+              </a:rPr>
+              <a:t>勘と経験 → 月次レポートの雛形で毎月回している</a:t>
+            </a:r>
+            <a:endParaRPr lang="en-US" sz="1150" dirty="0"/>
+          </a:p>
+        </p:txBody>
+      </p:sp>
+      <p:sp>
+        <p:nvSpPr>
+          <p:cNvPr id="13" name="Text 11"/>
+          <p:cNvSpPr txBox="1"/>
+          <p:nvPr/>
+        </p:nvSpPr>
+        <p:spPr>
+          <a:xfrm>
+            <a:off x="1097280" y="3922776"/>
+            <a:ext cx="2057400" cy="530352"/>
+          </a:xfrm>
+          <a:prstGeom prst="rect">
+            <a:avLst/>
+          </a:prstGeom>
+          <a:noFill/>
+          <a:ln/>
+        </p:spPr>
+        <p:txBody>
+          <a:bodyPr wrap="square" lIns="0" tIns="0" rIns="0" bIns="0" rtlCol="0" anchor="ctr"/>
+          <a:lstStyle/>
+          <a:p>
+            <a:pPr indent="0" marL="0">
+              <a:lnSpc>
+                <a:spcPct val="110000"/>
+              </a:lnSpc>
+              <a:buNone/>
+            </a:pPr>
+            <a:r>
+              <a:rPr lang="en-US" sz="1100" b="1" dirty="0">
+                <a:solidFill>
+                  <a:srgbClr val="2F4F6B"/>
+                </a:solidFill>
+                <a:latin typeface="Yu Gothic" pitchFamily="34" charset="0"/>
+                <a:ea typeface="Yu Gothic" pitchFamily="34" charset="-122"/>
+                <a:cs typeface="Yu Gothic" pitchFamily="34" charset="-120"/>
+              </a:rPr>
+              <a:t>品質</a:t>
+            </a:r>
+            <a:endParaRPr lang="en-US" sz="1100" dirty="0"/>
+          </a:p>
+        </p:txBody>
+      </p:sp>
+      <p:sp>
+        <p:nvSpPr>
+          <p:cNvPr id="14" name="Text 12"/>
+          <p:cNvSpPr txBox="1"/>
+          <p:nvPr/>
+        </p:nvSpPr>
+        <p:spPr>
+          <a:xfrm>
+            <a:off x="3291840" y="3922776"/>
+            <a:ext cx="7772400" cy="530352"/>
+          </a:xfrm>
+          <a:prstGeom prst="rect">
+            <a:avLst/>
+          </a:prstGeom>
+          <a:noFill/>
+          <a:ln/>
+        </p:spPr>
+        <p:txBody>
+          <a:bodyPr wrap="square" lIns="0" tIns="0" rIns="0" bIns="0" rtlCol="0" anchor="ctr"/>
+          <a:lstStyle/>
+          <a:p>
+            <a:pPr indent="0" marL="0">
+              <a:lnSpc>
+                <a:spcPct val="115000"/>
+              </a:lnSpc>
+              <a:buNone/>
+            </a:pPr>
+            <a:r>
+              <a:rPr lang="en-US" sz="1150" dirty="0">
+                <a:solidFill>
+                  <a:srgbClr val="23201D"/>
+                </a:solidFill>
+                <a:latin typeface="Consolas" pitchFamily="34" charset="0"/>
+                <a:ea typeface="Consolas" pitchFamily="34" charset="-122"/>
+                <a:cs typeface="Consolas" pitchFamily="34" charset="-120"/>
+              </a:rPr>
+              <a:t>なんとなく → 正解セット10件で毎月採点</a:t>
+            </a:r>
+            <a:endParaRPr lang="en-US" sz="1150" dirty="0"/>
+          </a:p>
+        </p:txBody>
+      </p:sp>
+      <p:sp>
+        <p:nvSpPr>
+          <p:cNvPr id="15" name="Text 13"/>
+          <p:cNvSpPr txBox="1"/>
+          <p:nvPr/>
+        </p:nvSpPr>
+        <p:spPr>
+          <a:xfrm>
+            <a:off x="1097280" y="4453128"/>
+            <a:ext cx="2057400" cy="530352"/>
+          </a:xfrm>
+          <a:prstGeom prst="rect">
+            <a:avLst/>
+          </a:prstGeom>
+          <a:noFill/>
+          <a:ln/>
+        </p:spPr>
+        <p:txBody>
+          <a:bodyPr wrap="square" lIns="0" tIns="0" rIns="0" bIns="0" rtlCol="0" anchor="ctr"/>
+          <a:lstStyle/>
+          <a:p>
+            <a:pPr indent="0" marL="0">
+              <a:lnSpc>
+                <a:spcPct val="110000"/>
+              </a:lnSpc>
+              <a:buNone/>
+            </a:pPr>
+            <a:r>
+              <a:rPr lang="en-US" sz="1100" b="1" dirty="0">
+                <a:solidFill>
+                  <a:srgbClr val="2F4F6B"/>
+                </a:solidFill>
+                <a:latin typeface="Yu Gothic" pitchFamily="34" charset="0"/>
+                <a:ea typeface="Yu Gothic" pitchFamily="34" charset="-122"/>
+                <a:cs typeface="Yu Gothic" pitchFamily="34" charset="-120"/>
+              </a:rPr>
+              <a:t>体制</a:t>
+            </a:r>
+            <a:endParaRPr lang="en-US" sz="1100" dirty="0"/>
+          </a:p>
+        </p:txBody>
+      </p:sp>
+      <p:sp>
+        <p:nvSpPr>
+          <p:cNvPr id="16" name="Text 14"/>
+          <p:cNvSpPr txBox="1"/>
+          <p:nvPr/>
+        </p:nvSpPr>
+        <p:spPr>
+          <a:xfrm>
+            <a:off x="3291840" y="4453128"/>
+            <a:ext cx="7772400" cy="530352"/>
+          </a:xfrm>
+          <a:prstGeom prst="rect">
+            <a:avLst/>
+          </a:prstGeom>
+          <a:noFill/>
+          <a:ln/>
+        </p:spPr>
+        <p:txBody>
+          <a:bodyPr wrap="square" lIns="0" tIns="0" rIns="0" bIns="0" rtlCol="0" anchor="ctr"/>
+          <a:lstStyle/>
+          <a:p>
+            <a:pPr indent="0" marL="0">
+              <a:lnSpc>
+                <a:spcPct val="115000"/>
+              </a:lnSpc>
+              <a:buNone/>
+            </a:pPr>
+            <a:r>
+              <a:rPr lang="en-US" sz="1150" dirty="0">
+                <a:solidFill>
+                  <a:srgbClr val="23201D"/>
+                </a:solidFill>
+                <a:latin typeface="Consolas" pitchFamily="34" charset="0"/>
+                <a:ea typeface="Consolas" pitchFamily="34" charset="-122"/>
+                <a:cs typeface="Consolas" pitchFamily="34" charset="-120"/>
+              </a:rPr>
+              <a:t>社長が全部 → 推進役・費用・権限が紙になっている</a:t>
+            </a:r>
+            <a:endParaRPr lang="en-US" sz="1150" dirty="0"/>
+          </a:p>
+        </p:txBody>
+      </p:sp>
+      <p:sp>
+        <p:nvSpPr>
+          <p:cNvPr id="17" name="Text 15"/>
+          <p:cNvSpPr txBox="1"/>
+          <p:nvPr/>
+        </p:nvSpPr>
+        <p:spPr>
+          <a:xfrm>
+            <a:off x="1097280" y="4983480"/>
+            <a:ext cx="2057400" cy="530352"/>
+          </a:xfrm>
+          <a:prstGeom prst="rect">
+            <a:avLst/>
+          </a:prstGeom>
+          <a:noFill/>
+          <a:ln/>
+        </p:spPr>
+        <p:txBody>
+          <a:bodyPr wrap="square" lIns="0" tIns="0" rIns="0" bIns="0" rtlCol="0" anchor="ctr"/>
+          <a:lstStyle/>
+          <a:p>
+            <a:pPr indent="0" marL="0">
+              <a:lnSpc>
+                <a:spcPct val="110000"/>
+              </a:lnSpc>
+              <a:buNone/>
+            </a:pPr>
+            <a:r>
+              <a:rPr lang="en-US" sz="1100" b="1" dirty="0">
+                <a:solidFill>
+                  <a:srgbClr val="2F4F6B"/>
+                </a:solidFill>
+                <a:latin typeface="Yu Gothic" pitchFamily="34" charset="0"/>
+                <a:ea typeface="Yu Gothic" pitchFamily="34" charset="-122"/>
+                <a:cs typeface="Yu Gothic" pitchFamily="34" charset="-120"/>
+              </a:rPr>
+              <a:t>診断スコア</a:t>
+            </a:r>
+            <a:endParaRPr lang="en-US" sz="1100" dirty="0"/>
+          </a:p>
+        </p:txBody>
+      </p:sp>
+      <p:sp>
+        <p:nvSpPr>
+          <p:cNvPr id="18" name="Text 16"/>
+          <p:cNvSpPr txBox="1"/>
+          <p:nvPr/>
+        </p:nvSpPr>
+        <p:spPr>
+          <a:xfrm>
+            <a:off x="3291840" y="4983480"/>
+            <a:ext cx="7772400" cy="530352"/>
+          </a:xfrm>
+          <a:prstGeom prst="rect">
+            <a:avLst/>
+          </a:prstGeom>
+          <a:noFill/>
+          <a:ln/>
+        </p:spPr>
+        <p:txBody>
+          <a:bodyPr wrap="square" lIns="0" tIns="0" rIns="0" bIns="0" rtlCol="0" anchor="ctr"/>
+          <a:lstStyle/>
+          <a:p>
+            <a:pPr indent="0" marL="0">
+              <a:lnSpc>
+                <a:spcPct val="115000"/>
+              </a:lnSpc>
+              <a:buNone/>
+            </a:pPr>
+            <a:r>
+              <a:rPr lang="en-US" sz="1150" dirty="0">
+                <a:solidFill>
+                  <a:srgbClr val="23201D"/>
+                </a:solidFill>
+                <a:latin typeface="Consolas" pitchFamily="34" charset="0"/>
+                <a:ea typeface="Consolas" pitchFamily="34" charset="-122"/>
+                <a:cs typeface="Consolas" pitchFamily="34" charset="-120"/>
+              </a:rPr>
+              <a:t>受講前 ◯点 → 修了時 ◯点</a:t>
+            </a:r>
+            <a:endParaRPr lang="en-US" sz="1150" dirty="0"/>
+          </a:p>
+        </p:txBody>
+      </p:sp>
+      <p:sp>
+        <p:nvSpPr>
+          <p:cNvPr id="19" name="Text 17"/>
+          <p:cNvSpPr txBox="1"/>
+          <p:nvPr/>
+        </p:nvSpPr>
+        <p:spPr>
+          <a:xfrm>
+            <a:off x="777240" y="5769864"/>
+            <a:ext cx="10607040" cy="548640"/>
+          </a:xfrm>
+          <a:prstGeom prst="rect">
+            <a:avLst/>
+          </a:prstGeom>
+          <a:noFill/>
+          <a:ln/>
+        </p:spPr>
+        <p:txBody>
+          <a:bodyPr wrap="square" lIns="0" tIns="0" rIns="0" bIns="0" rtlCol="0" anchor="ctr"/>
+          <a:lstStyle/>
+          <a:p>
+            <a:pPr indent="0" marL="0">
+              <a:lnSpc>
+                <a:spcPct val="135000"/>
+              </a:lnSpc>
+              <a:buNone/>
+            </a:pPr>
+            <a:r>
+              <a:rPr lang="en-US" sz="1250" dirty="0">
                 <a:solidFill>
                   <a:srgbClr val="5A534A"/>
                 </a:solidFill>
@@ -4292,355 +6277,9 @@
                 <a:ea typeface="Yu Gothic" pitchFamily="34" charset="-122"/>
                 <a:cs typeface="Yu Gothic" pitchFamily="34" charset="-120"/>
               </a:rPr>
-              <a:t>12回分の成果物をお渡しします</a:t>
-            </a:r>
-            <a:endParaRPr lang="en-US" sz="1200" dirty="0"/>
-          </a:p>
-        </p:txBody>
-      </p:sp>
-      <p:sp>
-        <p:nvSpPr>
-          <p:cNvPr id="10" name="Shape 8"/>
-          <p:cNvSpPr/>
-          <p:nvPr/>
-        </p:nvSpPr>
-        <p:spPr>
-          <a:xfrm>
-            <a:off x="4389120" y="2240280"/>
-            <a:ext cx="3383280" cy="2697480"/>
-          </a:xfrm>
-          <a:prstGeom prst="rect">
-            <a:avLst/>
-          </a:prstGeom>
-          <a:solidFill>
-            <a:srgbClr val="FFFFFF"/>
-          </a:solidFill>
-          <a:ln w="12700">
-            <a:solidFill>
-              <a:srgbClr val="EDE7DB"/>
-            </a:solidFill>
-            <a:prstDash val="solid"/>
-          </a:ln>
-        </p:spPr>
-      </p:sp>
-      <p:sp>
-        <p:nvSpPr>
-          <p:cNvPr id="11" name="Shape 9"/>
-          <p:cNvSpPr/>
-          <p:nvPr/>
-        </p:nvSpPr>
-        <p:spPr>
-          <a:xfrm>
-            <a:off x="4663440" y="2487168"/>
-            <a:ext cx="438912" cy="438912"/>
-          </a:xfrm>
-          <a:prstGeom prst="ellipse">
-            <a:avLst/>
-          </a:prstGeom>
-          <a:solidFill>
-            <a:srgbClr val="2F4F6B"/>
-          </a:solidFill>
-          <a:ln w="12700">
-            <a:solidFill>
-              <a:srgbClr val="2F4F6B"/>
-            </a:solidFill>
-            <a:prstDash val="solid"/>
-          </a:ln>
-        </p:spPr>
-      </p:sp>
-      <p:sp>
-        <p:nvSpPr>
-          <p:cNvPr id="12" name="Text 10"/>
-          <p:cNvSpPr txBox="1"/>
-          <p:nvPr/>
-        </p:nvSpPr>
-        <p:spPr>
-          <a:xfrm>
-            <a:off x="4663440" y="2487168"/>
-            <a:ext cx="438912" cy="438912"/>
-          </a:xfrm>
-          <a:prstGeom prst="rect">
-            <a:avLst/>
-          </a:prstGeom>
-          <a:noFill/>
-          <a:ln/>
-        </p:spPr>
-        <p:txBody>
-          <a:bodyPr wrap="square" lIns="0" tIns="0" rIns="0" bIns="0" rtlCol="0" anchor="ctr"/>
-          <a:lstStyle/>
-          <a:p>
-            <a:pPr algn="ctr" indent="0" marL="0">
-              <a:buNone/>
-            </a:pPr>
-            <a:r>
-              <a:rPr lang="en-US" sz="1400" b="1" dirty="0">
-                <a:solidFill>
-                  <a:srgbClr val="FFFFFF"/>
-                </a:solidFill>
-                <a:latin typeface="Yu Gothic" pitchFamily="34" charset="0"/>
-                <a:ea typeface="Yu Gothic" pitchFamily="34" charset="-122"/>
-                <a:cs typeface="Yu Gothic" pitchFamily="34" charset="-120"/>
-              </a:rPr>
-              <a:t>2</a:t>
-            </a:r>
-            <a:endParaRPr lang="en-US" sz="1400" dirty="0"/>
-          </a:p>
-        </p:txBody>
-      </p:sp>
-      <p:sp>
-        <p:nvSpPr>
-          <p:cNvPr id="13" name="Text 11"/>
-          <p:cNvSpPr txBox="1"/>
-          <p:nvPr/>
-        </p:nvSpPr>
-        <p:spPr>
-          <a:xfrm>
-            <a:off x="4663440" y="3035808"/>
-            <a:ext cx="2834640" cy="777240"/>
-          </a:xfrm>
-          <a:prstGeom prst="rect">
-            <a:avLst/>
-          </a:prstGeom>
-          <a:noFill/>
-          <a:ln/>
-        </p:spPr>
-        <p:txBody>
-          <a:bodyPr wrap="square" lIns="0" tIns="0" rIns="0" bIns="0" rtlCol="0" anchor="ctr"/>
-          <a:lstStyle/>
-          <a:p>
-            <a:pPr indent="0" marL="0">
-              <a:lnSpc>
-                <a:spcPct val="125000"/>
-              </a:lnSpc>
-              <a:buNone/>
-            </a:pPr>
-            <a:r>
-              <a:rPr lang="en-US" sz="1500" b="1" dirty="0">
-                <a:solidFill>
-                  <a:srgbClr val="23201D"/>
-                </a:solidFill>
-                <a:latin typeface="Yu Gothic" pitchFamily="34" charset="0"/>
-                <a:ea typeface="Yu Gothic" pitchFamily="34" charset="-122"/>
-                <a:cs typeface="Yu Gothic" pitchFamily="34" charset="-120"/>
-              </a:rPr>
-              <a:t>3年構想を1枚にする</a:t>
-            </a:r>
-            <a:endParaRPr lang="en-US" sz="1500" dirty="0"/>
-          </a:p>
-        </p:txBody>
-      </p:sp>
-      <p:sp>
-        <p:nvSpPr>
-          <p:cNvPr id="14" name="Text 12"/>
-          <p:cNvSpPr txBox="1"/>
-          <p:nvPr/>
-        </p:nvSpPr>
-        <p:spPr>
-          <a:xfrm>
-            <a:off x="4663440" y="3822192"/>
-            <a:ext cx="2834640" cy="960120"/>
-          </a:xfrm>
-          <a:prstGeom prst="rect">
-            <a:avLst/>
-          </a:prstGeom>
-          <a:noFill/>
-          <a:ln/>
-        </p:spPr>
-        <p:txBody>
-          <a:bodyPr wrap="square" lIns="0" tIns="0" rIns="0" bIns="0" rtlCol="0" anchor="ctr"/>
-          <a:lstStyle/>
-          <a:p>
-            <a:pPr indent="0" marL="0">
-              <a:lnSpc>
-                <a:spcPct val="130000"/>
-              </a:lnSpc>
-              <a:buNone/>
-            </a:pPr>
-            <a:r>
-              <a:rPr lang="en-US" sz="1200" dirty="0">
-                <a:solidFill>
-                  <a:srgbClr val="5A534A"/>
-                </a:solidFill>
-                <a:latin typeface="Yu Gothic" pitchFamily="34" charset="0"/>
-                <a:ea typeface="Yu Gothic" pitchFamily="34" charset="-122"/>
-                <a:cs typeface="Yu Gothic" pitchFamily="34" charset="-120"/>
-              </a:rPr>
-              <a:t>4つの問いに答えます</a:t>
-            </a:r>
-            <a:endParaRPr lang="en-US" sz="1200" dirty="0"/>
-          </a:p>
-        </p:txBody>
-      </p:sp>
-      <p:sp>
-        <p:nvSpPr>
-          <p:cNvPr id="15" name="Shape 13"/>
-          <p:cNvSpPr/>
-          <p:nvPr/>
-        </p:nvSpPr>
-        <p:spPr>
-          <a:xfrm>
-            <a:off x="8001000" y="2240280"/>
-            <a:ext cx="3383280" cy="2697480"/>
-          </a:xfrm>
-          <a:prstGeom prst="rect">
-            <a:avLst/>
-          </a:prstGeom>
-          <a:solidFill>
-            <a:srgbClr val="FFFFFF"/>
-          </a:solidFill>
-          <a:ln w="12700">
-            <a:solidFill>
-              <a:srgbClr val="EDE7DB"/>
-            </a:solidFill>
-            <a:prstDash val="solid"/>
-          </a:ln>
-        </p:spPr>
-      </p:sp>
-      <p:sp>
-        <p:nvSpPr>
-          <p:cNvPr id="16" name="Shape 14"/>
-          <p:cNvSpPr/>
-          <p:nvPr/>
-        </p:nvSpPr>
-        <p:spPr>
-          <a:xfrm>
-            <a:off x="8275320" y="2487168"/>
-            <a:ext cx="438912" cy="438912"/>
-          </a:xfrm>
-          <a:prstGeom prst="ellipse">
-            <a:avLst/>
-          </a:prstGeom>
-          <a:solidFill>
-            <a:srgbClr val="2F4F6B"/>
-          </a:solidFill>
-          <a:ln w="12700">
-            <a:solidFill>
-              <a:srgbClr val="2F4F6B"/>
-            </a:solidFill>
-            <a:prstDash val="solid"/>
-          </a:ln>
-        </p:spPr>
-      </p:sp>
-      <p:sp>
-        <p:nvSpPr>
-          <p:cNvPr id="17" name="Text 15"/>
-          <p:cNvSpPr txBox="1"/>
-          <p:nvPr/>
-        </p:nvSpPr>
-        <p:spPr>
-          <a:xfrm>
-            <a:off x="8275320" y="2487168"/>
-            <a:ext cx="438912" cy="438912"/>
-          </a:xfrm>
-          <a:prstGeom prst="rect">
-            <a:avLst/>
-          </a:prstGeom>
-          <a:noFill/>
-          <a:ln/>
-        </p:spPr>
-        <p:txBody>
-          <a:bodyPr wrap="square" lIns="0" tIns="0" rIns="0" bIns="0" rtlCol="0" anchor="ctr"/>
-          <a:lstStyle/>
-          <a:p>
-            <a:pPr algn="ctr" indent="0" marL="0">
-              <a:buNone/>
-            </a:pPr>
-            <a:r>
-              <a:rPr lang="en-US" sz="1400" b="1" dirty="0">
-                <a:solidFill>
-                  <a:srgbClr val="FFFFFF"/>
-                </a:solidFill>
-                <a:latin typeface="Yu Gothic" pitchFamily="34" charset="0"/>
-                <a:ea typeface="Yu Gothic" pitchFamily="34" charset="-122"/>
-                <a:cs typeface="Yu Gothic" pitchFamily="34" charset="-120"/>
-              </a:rPr>
-              <a:t>3</a:t>
-            </a:r>
-            <a:endParaRPr lang="en-US" sz="1400" dirty="0"/>
-          </a:p>
-        </p:txBody>
-      </p:sp>
-      <p:sp>
-        <p:nvSpPr>
-          <p:cNvPr id="18" name="Text 16"/>
-          <p:cNvSpPr txBox="1"/>
-          <p:nvPr/>
-        </p:nvSpPr>
-        <p:spPr>
-          <a:xfrm>
-            <a:off x="8275320" y="3035808"/>
-            <a:ext cx="2834640" cy="777240"/>
-          </a:xfrm>
-          <a:prstGeom prst="rect">
-            <a:avLst/>
-          </a:prstGeom>
-          <a:noFill/>
-          <a:ln/>
-        </p:spPr>
-        <p:txBody>
-          <a:bodyPr wrap="square" lIns="0" tIns="0" rIns="0" bIns="0" rtlCol="0" anchor="ctr"/>
-          <a:lstStyle/>
-          <a:p>
-            <a:pPr indent="0" marL="0">
-              <a:lnSpc>
-                <a:spcPct val="125000"/>
-              </a:lnSpc>
-              <a:buNone/>
-            </a:pPr>
-            <a:r>
-              <a:rPr lang="en-US" sz="1500" b="1" dirty="0">
-                <a:solidFill>
-                  <a:srgbClr val="23201D"/>
-                </a:solidFill>
-                <a:latin typeface="Yu Gothic" pitchFamily="34" charset="0"/>
-                <a:ea typeface="Yu Gothic" pitchFamily="34" charset="-122"/>
-                <a:cs typeface="Yu Gothic" pitchFamily="34" charset="-120"/>
-              </a:rPr>
-              <a:t>社員のみなさんに、方針を話す</a:t>
-            </a:r>
-            <a:endParaRPr lang="en-US" sz="1500" dirty="0"/>
-          </a:p>
-        </p:txBody>
-      </p:sp>
-      <p:sp>
-        <p:nvSpPr>
-          <p:cNvPr id="19" name="Text 17"/>
-          <p:cNvSpPr txBox="1"/>
-          <p:nvPr/>
-        </p:nvSpPr>
-        <p:spPr>
-          <a:xfrm>
-            <a:off x="8275320" y="3822192"/>
-            <a:ext cx="2834640" cy="960120"/>
-          </a:xfrm>
-          <a:prstGeom prst="rect">
-            <a:avLst/>
-          </a:prstGeom>
-          <a:noFill/>
-          <a:ln/>
-        </p:spPr>
-        <p:txBody>
-          <a:bodyPr wrap="square" lIns="0" tIns="0" rIns="0" bIns="0" rtlCol="0" anchor="ctr"/>
-          <a:lstStyle/>
-          <a:p>
-            <a:pPr indent="0" marL="0">
-              <a:lnSpc>
-                <a:spcPct val="130000"/>
-              </a:lnSpc>
-              <a:buNone/>
-            </a:pPr>
-            <a:r>
-              <a:rPr lang="en-US" sz="1200" dirty="0">
-                <a:solidFill>
-                  <a:srgbClr val="5A534A"/>
-                </a:solidFill>
-                <a:latin typeface="Yu Gothic" pitchFamily="34" charset="0"/>
-                <a:ea typeface="Yu Gothic" pitchFamily="34" charset="-122"/>
-                <a:cs typeface="Yu Gothic" pitchFamily="34" charset="-120"/>
-              </a:rPr>
-              <a:t>これからどうするかを、ご自身の言葉で</a:t>
-            </a:r>
-            <a:endParaRPr lang="en-US" sz="1200" dirty="0"/>
+              <a:t>第1回の記録と突き合わせます。自分では気づきにくいので、数字と記録で見ていただきます。</a:t>
+            </a:r>
+            <a:endParaRPr lang="en-US" sz="1250" dirty="0"/>
           </a:p>
         </p:txBody>
       </p:sp>
@@ -4652,8 +6291,8 @@
         </p:nvSpPr>
         <p:spPr>
           <a:xfrm>
-            <a:off x="777240" y="6355080"/>
-            <a:ext cx="7424928" cy="274320"/>
+            <a:off x="777240" y="6382512"/>
+            <a:ext cx="7424928" cy="256032"/>
           </a:xfrm>
           <a:prstGeom prst="rect">
             <a:avLst/>
@@ -4691,8 +6330,8 @@
         </p:nvSpPr>
         <p:spPr>
           <a:xfrm>
-            <a:off x="8202168" y="6355080"/>
-            <a:ext cx="3182112" cy="274320"/>
+            <a:off x="8202168" y="6382512"/>
+            <a:ext cx="3182112" cy="256032"/>
           </a:xfrm>
           <a:prstGeom prst="rect">
             <a:avLst/>
@@ -4716,7 +6355,7 @@
                 <a:ea typeface="Yu Gothic" pitchFamily="34" charset="-122"/>
                 <a:cs typeface="Yu Gothic" pitchFamily="34" charset="-120"/>
               </a:rPr>
-              <a:t>演習</a:t>
+              <a:t>あてはめ</a:t>
             </a:r>
             <a:endParaRPr lang="en-US" sz="900" dirty="0"/>
           </a:p>
@@ -4762,7 +6401,7 @@
         </p:nvSpPr>
         <p:spPr>
           <a:xfrm>
-            <a:off x="777240" y="822960"/>
+            <a:off x="777240" y="566928"/>
             <a:ext cx="10607040" cy="274320"/>
           </a:xfrm>
           <a:prstGeom prst="rect">
@@ -4781,13 +6420,13 @@
             <a:r>
               <a:rPr lang="en-US" sz="1100" b="1" spc="250" kern="0" dirty="0">
                 <a:solidFill>
-                  <a:srgbClr val="B04A2F"/>
-                </a:solidFill>
-                <a:latin typeface="Yu Gothic" pitchFamily="34" charset="0"/>
-                <a:ea typeface="Yu Gothic" pitchFamily="34" charset="-122"/>
-                <a:cs typeface="Yu Gothic" pitchFamily="34" charset="-120"/>
-              </a:rPr>
-              <a:t>ここだけは</a:t>
+                  <a:srgbClr val="8A8177"/>
+                </a:solidFill>
+                <a:latin typeface="Yu Gothic" pitchFamily="34" charset="0"/>
+                <a:ea typeface="Yu Gothic" pitchFamily="34" charset="-122"/>
+                <a:cs typeface="Yu Gothic" pitchFamily="34" charset="-120"/>
+              </a:rPr>
+              <a:t>実演 ①</a:t>
             </a:r>
             <a:endParaRPr lang="en-US" sz="1100" dirty="0"/>
           </a:p>
@@ -4801,24 +6440,24 @@
         </p:nvSpPr>
         <p:spPr>
           <a:xfrm>
-            <a:off x="777240" y="1188720"/>
-            <a:ext cx="9546336" cy="822960"/>
-          </a:xfrm>
-          <a:prstGeom prst="rect">
-            <a:avLst/>
-          </a:prstGeom>
-          <a:noFill/>
-          <a:ln/>
-        </p:spPr>
-        <p:txBody>
-          <a:bodyPr wrap="square" lIns="0" tIns="0" rIns="0" bIns="0" rtlCol="0" anchor="ctr"/>
-          <a:lstStyle/>
-          <a:p>
-            <a:pPr indent="0" marL="0">
-              <a:buNone/>
-            </a:pPr>
-            <a:r>
-              <a:rPr lang="en-US" sz="3000" b="1" dirty="0">
+            <a:off x="777240" y="896112"/>
+            <a:ext cx="10607040" cy="640080"/>
+          </a:xfrm>
+          <a:prstGeom prst="rect">
+            <a:avLst/>
+          </a:prstGeom>
+          <a:noFill/>
+          <a:ln/>
+        </p:spPr>
+        <p:txBody>
+          <a:bodyPr wrap="square" lIns="0" tIns="0" rIns="0" bIns="0" rtlCol="0" anchor="ctr"/>
+          <a:lstStyle/>
+          <a:p>
+            <a:pPr indent="0" marL="0">
+              <a:buNone/>
+            </a:pPr>
+            <a:r>
+              <a:rPr lang="en-US" sz="2600" b="1" dirty="0">
                 <a:solidFill>
                   <a:srgbClr val="23201D"/>
                 </a:solidFill>
@@ -4826,9 +6465,9 @@
                 <a:ea typeface="Yu Gothic" pitchFamily="34" charset="-122"/>
                 <a:cs typeface="Yu Gothic" pitchFamily="34" charset="-120"/>
               </a:rPr>
-              <a:t>最後にひとつだけ</a:t>
-            </a:r>
-            <a:endParaRPr lang="en-US" sz="3000" dirty="0"/>
+              <a:t>よくある3年構想</a:t>
+            </a:r>
+            <a:endParaRPr lang="en-US" sz="2600" dirty="0"/>
           </a:p>
         </p:txBody>
       </p:sp>
@@ -4840,14 +6479,352 @@
         </p:nvSpPr>
         <p:spPr>
           <a:xfrm>
-            <a:off x="777240" y="2331720"/>
-            <a:ext cx="64008" cy="2011680"/>
+            <a:off x="777240" y="1691640"/>
+            <a:ext cx="4879238" cy="1371600"/>
           </a:xfrm>
           <a:prstGeom prst="rect">
             <a:avLst/>
           </a:prstGeom>
           <a:solidFill>
-            <a:srgbClr val="B04A2F"/>
+            <a:srgbClr val="EDE7DB"/>
+          </a:solidFill>
+          <a:ln w="15875">
+            <a:solidFill>
+              <a:srgbClr val="8A8177"/>
+            </a:solidFill>
+            <a:prstDash val="solid"/>
+          </a:ln>
+        </p:spPr>
+      </p:sp>
+      <p:sp>
+        <p:nvSpPr>
+          <p:cNvPr id="5" name="Text 3"/>
+          <p:cNvSpPr txBox="1"/>
+          <p:nvPr/>
+        </p:nvSpPr>
+        <p:spPr>
+          <a:xfrm>
+            <a:off x="1005840" y="1783080"/>
+            <a:ext cx="1828800" cy="274320"/>
+          </a:xfrm>
+          <a:prstGeom prst="rect">
+            <a:avLst/>
+          </a:prstGeom>
+          <a:noFill/>
+          <a:ln/>
+        </p:spPr>
+        <p:txBody>
+          <a:bodyPr wrap="square" lIns="0" tIns="0" rIns="0" bIns="0" rtlCol="0" anchor="ctr"/>
+          <a:lstStyle/>
+          <a:p>
+            <a:pPr indent="0" marL="0">
+              <a:buNone/>
+            </a:pPr>
+            <a:r>
+              <a:rPr lang="en-US" sz="1000" b="1" spc="200" kern="0" dirty="0">
+                <a:solidFill>
+                  <a:srgbClr val="8A8177"/>
+                </a:solidFill>
+                <a:latin typeface="Yu Gothic" pitchFamily="34" charset="0"/>
+                <a:ea typeface="Yu Gothic" pitchFamily="34" charset="-122"/>
+                <a:cs typeface="Yu Gothic" pitchFamily="34" charset="-120"/>
+              </a:rPr>
+              <a:t>入力</a:t>
+            </a:r>
+            <a:endParaRPr lang="en-US" sz="1000" dirty="0"/>
+          </a:p>
+        </p:txBody>
+      </p:sp>
+      <p:sp>
+        <p:nvSpPr>
+          <p:cNvPr id="6" name="Text 4"/>
+          <p:cNvSpPr txBox="1"/>
+          <p:nvPr/>
+        </p:nvSpPr>
+        <p:spPr>
+          <a:xfrm>
+            <a:off x="1005840" y="2084832"/>
+            <a:ext cx="4422038" cy="868680"/>
+          </a:xfrm>
+          <a:prstGeom prst="rect">
+            <a:avLst/>
+          </a:prstGeom>
+          <a:noFill/>
+          <a:ln/>
+        </p:spPr>
+        <p:txBody>
+          <a:bodyPr wrap="square" lIns="0" tIns="0" rIns="0" bIns="0" rtlCol="0" anchor="ctr"/>
+          <a:lstStyle/>
+          <a:p>
+            <a:pPr indent="0" marL="0">
+              <a:lnSpc>
+                <a:spcPct val="125000"/>
+              </a:lnSpc>
+              <a:buNone/>
+            </a:pPr>
+            <a:r>
+              <a:rPr lang="en-US" sz="1200" dirty="0">
+                <a:solidFill>
+                  <a:srgbClr val="23201D"/>
+                </a:solidFill>
+                <a:latin typeface="Consolas" pitchFamily="34" charset="0"/>
+                <a:ea typeface="Consolas" pitchFamily="34" charset="-122"/>
+                <a:cs typeface="Consolas" pitchFamily="34" charset="-120"/>
+              </a:rPr>
+              <a:t>「AIをもっと活用していく」</a:t>
+            </a:r>
+            <a:endParaRPr lang="en-US" sz="1200" dirty="0"/>
+          </a:p>
+        </p:txBody>
+      </p:sp>
+      <p:sp>
+        <p:nvSpPr>
+          <p:cNvPr id="7" name="Shape 5"/>
+          <p:cNvSpPr/>
+          <p:nvPr/>
+        </p:nvSpPr>
+        <p:spPr>
+          <a:xfrm>
+            <a:off x="6080760" y="1691640"/>
+            <a:ext cx="5303520" cy="3017520"/>
+          </a:xfrm>
+          <a:prstGeom prst="rect">
+            <a:avLst/>
+          </a:prstGeom>
+          <a:solidFill>
+            <a:srgbClr val="FFFFFF"/>
+          </a:solidFill>
+          <a:ln w="12700">
+            <a:solidFill>
+              <a:srgbClr val="EDE7DB"/>
+            </a:solidFill>
+            <a:prstDash val="solid"/>
+          </a:ln>
+        </p:spPr>
+      </p:sp>
+      <p:sp>
+        <p:nvSpPr>
+          <p:cNvPr id="8" name="Text 6"/>
+          <p:cNvSpPr txBox="1"/>
+          <p:nvPr/>
+        </p:nvSpPr>
+        <p:spPr>
+          <a:xfrm>
+            <a:off x="6309360" y="1783080"/>
+            <a:ext cx="2743200" cy="274320"/>
+          </a:xfrm>
+          <a:prstGeom prst="rect">
+            <a:avLst/>
+          </a:prstGeom>
+          <a:noFill/>
+          <a:ln/>
+        </p:spPr>
+        <p:txBody>
+          <a:bodyPr wrap="square" lIns="0" tIns="0" rIns="0" bIns="0" rtlCol="0" anchor="ctr"/>
+          <a:lstStyle/>
+          <a:p>
+            <a:pPr indent="0" marL="0">
+              <a:buNone/>
+            </a:pPr>
+            <a:r>
+              <a:rPr lang="en-US" sz="1000" b="1" spc="200" kern="0" dirty="0">
+                <a:solidFill>
+                  <a:srgbClr val="8A8177"/>
+                </a:solidFill>
+                <a:latin typeface="Yu Gothic" pitchFamily="34" charset="0"/>
+                <a:ea typeface="Yu Gothic" pitchFamily="34" charset="-122"/>
+                <a:cs typeface="Yu Gothic" pitchFamily="34" charset="-120"/>
+              </a:rPr>
+              <a:t>出てくるもの</a:t>
+            </a:r>
+            <a:endParaRPr lang="en-US" sz="1000" dirty="0"/>
+          </a:p>
+        </p:txBody>
+      </p:sp>
+      <p:sp>
+        <p:nvSpPr>
+          <p:cNvPr id="9" name="Text 7"/>
+          <p:cNvSpPr txBox="1"/>
+          <p:nvPr/>
+        </p:nvSpPr>
+        <p:spPr>
+          <a:xfrm>
+            <a:off x="6309360" y="2148840"/>
+            <a:ext cx="4846320" cy="566928"/>
+          </a:xfrm>
+          <a:prstGeom prst="rect">
+            <a:avLst/>
+          </a:prstGeom>
+          <a:noFill/>
+          <a:ln/>
+        </p:spPr>
+        <p:txBody>
+          <a:bodyPr wrap="square" lIns="0" tIns="0" rIns="0" bIns="0" rtlCol="0" anchor="ctr"/>
+          <a:lstStyle/>
+          <a:p>
+            <a:pPr indent="0" marL="0">
+              <a:lnSpc>
+                <a:spcPct val="125000"/>
+              </a:lnSpc>
+              <a:buNone/>
+            </a:pPr>
+            <a:r>
+              <a:rPr lang="en-US" sz="1250" dirty="0">
+                <a:solidFill>
+                  <a:srgbClr val="23201D"/>
+                </a:solidFill>
+                <a:latin typeface="Yu Gothic" pitchFamily="34" charset="0"/>
+                <a:ea typeface="Yu Gothic" pitchFamily="34" charset="-122"/>
+                <a:cs typeface="Yu Gothic" pitchFamily="34" charset="-120"/>
+              </a:rPr>
+              <a:t>・何を指すのか、誰にも分からない</a:t>
+            </a:r>
+            <a:endParaRPr lang="en-US" sz="1250" dirty="0"/>
+          </a:p>
+        </p:txBody>
+      </p:sp>
+      <p:sp>
+        <p:nvSpPr>
+          <p:cNvPr id="10" name="Text 8"/>
+          <p:cNvSpPr txBox="1"/>
+          <p:nvPr/>
+        </p:nvSpPr>
+        <p:spPr>
+          <a:xfrm>
+            <a:off x="6309360" y="2752344"/>
+            <a:ext cx="4846320" cy="566928"/>
+          </a:xfrm>
+          <a:prstGeom prst="rect">
+            <a:avLst/>
+          </a:prstGeom>
+          <a:noFill/>
+          <a:ln/>
+        </p:spPr>
+        <p:txBody>
+          <a:bodyPr wrap="square" lIns="0" tIns="0" rIns="0" bIns="0" rtlCol="0" anchor="ctr"/>
+          <a:lstStyle/>
+          <a:p>
+            <a:pPr indent="0" marL="0">
+              <a:lnSpc>
+                <a:spcPct val="125000"/>
+              </a:lnSpc>
+              <a:buNone/>
+            </a:pPr>
+            <a:r>
+              <a:rPr lang="en-US" sz="1250" dirty="0">
+                <a:solidFill>
+                  <a:srgbClr val="23201D"/>
+                </a:solidFill>
+                <a:latin typeface="Yu Gothic" pitchFamily="34" charset="0"/>
+                <a:ea typeface="Yu Gothic" pitchFamily="34" charset="-122"/>
+                <a:cs typeface="Yu Gothic" pitchFamily="34" charset="-120"/>
+              </a:rPr>
+              <a:t>・来年また同じことを書く</a:t>
+            </a:r>
+            <a:endParaRPr lang="en-US" sz="1250" dirty="0"/>
+          </a:p>
+        </p:txBody>
+      </p:sp>
+      <p:sp>
+        <p:nvSpPr>
+          <p:cNvPr id="11" name="Text 9"/>
+          <p:cNvSpPr txBox="1"/>
+          <p:nvPr/>
+        </p:nvSpPr>
+        <p:spPr>
+          <a:xfrm>
+            <a:off x="6309360" y="3355848"/>
+            <a:ext cx="4846320" cy="566928"/>
+          </a:xfrm>
+          <a:prstGeom prst="rect">
+            <a:avLst/>
+          </a:prstGeom>
+          <a:noFill/>
+          <a:ln/>
+        </p:spPr>
+        <p:txBody>
+          <a:bodyPr wrap="square" lIns="0" tIns="0" rIns="0" bIns="0" rtlCol="0" anchor="ctr"/>
+          <a:lstStyle/>
+          <a:p>
+            <a:pPr indent="0" marL="0">
+              <a:lnSpc>
+                <a:spcPct val="125000"/>
+              </a:lnSpc>
+              <a:buNone/>
+            </a:pPr>
+            <a:r>
+              <a:rPr lang="en-US" sz="1250" dirty="0">
+                <a:solidFill>
+                  <a:srgbClr val="23201D"/>
+                </a:solidFill>
+                <a:latin typeface="Yu Gothic" pitchFamily="34" charset="0"/>
+                <a:ea typeface="Yu Gothic" pitchFamily="34" charset="-122"/>
+                <a:cs typeface="Yu Gothic" pitchFamily="34" charset="-120"/>
+              </a:rPr>
+              <a:t>・社員は何をすればいいか分からない</a:t>
+            </a:r>
+            <a:endParaRPr lang="en-US" sz="1250" dirty="0"/>
+          </a:p>
+        </p:txBody>
+      </p:sp>
+      <p:sp>
+        <p:nvSpPr>
+          <p:cNvPr id="12" name="Text 10"/>
+          <p:cNvSpPr txBox="1"/>
+          <p:nvPr/>
+        </p:nvSpPr>
+        <p:spPr>
+          <a:xfrm>
+            <a:off x="6309360" y="3959352"/>
+            <a:ext cx="4846320" cy="566928"/>
+          </a:xfrm>
+          <a:prstGeom prst="rect">
+            <a:avLst/>
+          </a:prstGeom>
+          <a:noFill/>
+          <a:ln/>
+        </p:spPr>
+        <p:txBody>
+          <a:bodyPr wrap="square" lIns="0" tIns="0" rIns="0" bIns="0" rtlCol="0" anchor="ctr"/>
+          <a:lstStyle/>
+          <a:p>
+            <a:pPr indent="0" marL="0">
+              <a:lnSpc>
+                <a:spcPct val="125000"/>
+              </a:lnSpc>
+              <a:buNone/>
+            </a:pPr>
+            <a:r>
+              <a:rPr lang="en-US" sz="1250" dirty="0">
+                <a:solidFill>
+                  <a:srgbClr val="23201D"/>
+                </a:solidFill>
+                <a:latin typeface="Yu Gothic" pitchFamily="34" charset="0"/>
+                <a:ea typeface="Yu Gothic" pitchFamily="34" charset="-122"/>
+                <a:cs typeface="Yu Gothic" pitchFamily="34" charset="-120"/>
+              </a:rPr>
+              <a:t>・結局、何も変わらない</a:t>
+            </a:r>
+            <a:endParaRPr lang="en-US" sz="1250" dirty="0"/>
+          </a:p>
+        </p:txBody>
+      </p:sp>
+      <p:sp>
+        <p:nvSpPr>
+          <p:cNvPr id="13" name="Shape 11"/>
+          <p:cNvSpPr/>
+          <p:nvPr/>
+        </p:nvSpPr>
+        <p:spPr>
+          <a:xfrm>
+            <a:off x="777240" y="3291840"/>
+            <a:ext cx="4879238" cy="1417320"/>
+          </a:xfrm>
+          <a:prstGeom prst="rect">
+            <a:avLst/>
+          </a:prstGeom>
+          <a:solidFill>
+            <a:srgbClr val="E4DFD5"/>
           </a:solidFill>
           <a:ln w="12700">
             <a:solidFill>
@@ -4859,14 +6836,14 @@
       </p:sp>
       <p:sp>
         <p:nvSpPr>
-          <p:cNvPr id="5" name="Text 3"/>
-          <p:cNvSpPr txBox="1"/>
-          <p:nvPr/>
-        </p:nvSpPr>
-        <p:spPr>
-          <a:xfrm>
-            <a:off x="1188720" y="2331720"/>
-            <a:ext cx="9966960" cy="2011680"/>
+          <p:cNvPr id="14" name="Text 12"/>
+          <p:cNvSpPr txBox="1"/>
+          <p:nvPr/>
+        </p:nvSpPr>
+        <p:spPr>
+          <a:xfrm>
+            <a:off x="1005840" y="3383280"/>
+            <a:ext cx="4422038" cy="1234440"/>
           </a:xfrm>
           <a:prstGeom prst="rect">
             <a:avLst/>
@@ -4880,12 +6857,12 @@
           <a:p>
             <a:pPr indent="0" marL="0">
               <a:lnSpc>
-                <a:spcPct val="160000"/>
+                <a:spcPct val="135000"/>
               </a:lnSpc>
               <a:buNone/>
             </a:pPr>
             <a:r>
-              <a:rPr lang="en-US" sz="1700" dirty="0">
+              <a:rPr lang="en-US" sz="1250" dirty="0">
                 <a:solidFill>
                   <a:srgbClr val="3F3933"/>
                 </a:solidFill>
@@ -4893,22 +6870,86 @@
                 <a:ea typeface="Yu Gothic" pitchFamily="34" charset="-122"/>
                 <a:cs typeface="Yu Gothic" pitchFamily="34" charset="-120"/>
               </a:rPr>
-              <a:t>この12回で最も効くのは、作ったものを翌日に一度使ってみることです。使わなかったものは2週間で忘れます。一度でも実務で使えば、それは御社の仕組みになります。</a:t>
-            </a:r>
-            <a:endParaRPr lang="en-US" sz="1700" dirty="0"/>
-          </a:p>
-        </p:txBody>
-      </p:sp>
-      <p:sp>
-        <p:nvSpPr>
-          <p:cNvPr id="6" name="Text 4"/>
-          <p:cNvSpPr txBox="1"/>
-          <p:nvPr/>
-        </p:nvSpPr>
-        <p:spPr>
-          <a:xfrm>
-            <a:off x="777240" y="6355080"/>
-            <a:ext cx="7424928" cy="274320"/>
+              <a:t>抽象的な構想は、書いた本人以外には伝わりません。そして本人も、半年後には忘れています。</a:t>
+            </a:r>
+            <a:endParaRPr lang="en-US" sz="1250" dirty="0"/>
+          </a:p>
+        </p:txBody>
+      </p:sp>
+      <p:sp>
+        <p:nvSpPr>
+          <p:cNvPr id="15" name="Shape 13"/>
+          <p:cNvSpPr/>
+          <p:nvPr/>
+        </p:nvSpPr>
+        <p:spPr>
+          <a:xfrm>
+            <a:off x="777240" y="4983480"/>
+            <a:ext cx="10607040" cy="685800"/>
+          </a:xfrm>
+          <a:prstGeom prst="rect">
+            <a:avLst/>
+          </a:prstGeom>
+          <a:solidFill>
+            <a:srgbClr val="8A8177"/>
+          </a:solidFill>
+          <a:ln w="12700">
+            <a:solidFill>
+              <a:srgbClr val="333333"/>
+            </a:solidFill>
+            <a:prstDash val="solid"/>
+          </a:ln>
+        </p:spPr>
+      </p:sp>
+      <p:sp>
+        <p:nvSpPr>
+          <p:cNvPr id="16" name="Text 14"/>
+          <p:cNvSpPr txBox="1"/>
+          <p:nvPr/>
+        </p:nvSpPr>
+        <p:spPr>
+          <a:xfrm>
+            <a:off x="1097280" y="4983480"/>
+            <a:ext cx="9966960" cy="685800"/>
+          </a:xfrm>
+          <a:prstGeom prst="rect">
+            <a:avLst/>
+          </a:prstGeom>
+          <a:noFill/>
+          <a:ln/>
+        </p:spPr>
+        <p:txBody>
+          <a:bodyPr wrap="square" lIns="0" tIns="0" rIns="0" bIns="0" rtlCol="0" anchor="ctr"/>
+          <a:lstStyle/>
+          <a:p>
+            <a:pPr indent="0" marL="0">
+              <a:buNone/>
+            </a:pPr>
+            <a:r>
+              <a:rPr lang="en-US" sz="1450" b="1" dirty="0">
+                <a:solidFill>
+                  <a:srgbClr val="FFFFFF"/>
+                </a:solidFill>
+                <a:latin typeface="Yu Gothic" pitchFamily="34" charset="0"/>
+                <a:ea typeface="Yu Gothic" pitchFamily="34" charset="-122"/>
+                <a:cs typeface="Yu Gothic" pitchFamily="34" charset="-120"/>
+              </a:rPr>
+              <a:t>「もっと活用する」は、構想ではありません</a:t>
+            </a:r>
+            <a:endParaRPr lang="en-US" sz="1450" dirty="0"/>
+          </a:p>
+        </p:txBody>
+      </p:sp>
+      <p:sp>
+        <p:nvSpPr>
+          <p:cNvPr id="17" name="Text 15"/>
+          <p:cNvSpPr txBox="1"/>
+          <p:nvPr/>
+        </p:nvSpPr>
+        <p:spPr>
+          <a:xfrm>
+            <a:off x="777240" y="6382512"/>
+            <a:ext cx="7424928" cy="256032"/>
           </a:xfrm>
           <a:prstGeom prst="rect">
             <a:avLst/>
@@ -4940,14 +6981,14 @@
       </p:sp>
       <p:sp>
         <p:nvSpPr>
-          <p:cNvPr id="7" name="Text 5"/>
-          <p:cNvSpPr txBox="1"/>
-          <p:nvPr/>
-        </p:nvSpPr>
-        <p:spPr>
-          <a:xfrm>
-            <a:off x="8202168" y="6355080"/>
-            <a:ext cx="3182112" cy="274320"/>
+          <p:cNvPr id="18" name="Text 16"/>
+          <p:cNvSpPr txBox="1"/>
+          <p:nvPr/>
+        </p:nvSpPr>
+        <p:spPr>
+          <a:xfrm>
+            <a:off x="8202168" y="6382512"/>
+            <a:ext cx="3182112" cy="256032"/>
           </a:xfrm>
           <a:prstGeom prst="rect">
             <a:avLst/>
@@ -4971,7 +7012,7 @@
                 <a:ea typeface="Yu Gothic" pitchFamily="34" charset="-122"/>
                 <a:cs typeface="Yu Gothic" pitchFamily="34" charset="-120"/>
               </a:rPr>
-              <a:t>ここだけは</a:t>
+              <a:t>実演 ①</a:t>
             </a:r>
             <a:endParaRPr lang="en-US" sz="900" dirty="0"/>
           </a:p>
@@ -4991,7 +7032,7 @@
     <p:bg>
       <p:bgPr>
         <a:solidFill>
-          <a:srgbClr val="23201D"/>
+          <a:srgbClr val="F6F2EA"/>
         </a:solidFill>
       </p:bgPr>
     </p:bg>
@@ -5017,34 +7058,34 @@
         </p:nvSpPr>
         <p:spPr>
           <a:xfrm>
-            <a:off x="777240" y="1371600"/>
-            <a:ext cx="10607040" cy="365760"/>
-          </a:xfrm>
-          <a:prstGeom prst="rect">
-            <a:avLst/>
-          </a:prstGeom>
-          <a:noFill/>
-          <a:ln/>
-        </p:spPr>
-        <p:txBody>
-          <a:bodyPr wrap="square" lIns="0" tIns="0" rIns="0" bIns="0" rtlCol="0" anchor="ctr"/>
-          <a:lstStyle/>
-          <a:p>
-            <a:pPr indent="0" marL="0">
-              <a:buNone/>
-            </a:pPr>
-            <a:r>
-              <a:rPr lang="en-US" sz="1200" b="1" spc="300" kern="0" dirty="0">
-                <a:solidFill>
-                  <a:srgbClr val="B04A2F"/>
-                </a:solidFill>
-                <a:latin typeface="Yu Gothic" pitchFamily="34" charset="0"/>
-                <a:ea typeface="Yu Gothic" pitchFamily="34" charset="-122"/>
-                <a:cs typeface="Yu Gothic" pitchFamily="34" charset="-120"/>
-              </a:rPr>
-              <a:t>今日の宿題</a:t>
-            </a:r>
-            <a:endParaRPr lang="en-US" sz="1200" dirty="0"/>
+            <a:off x="777240" y="566928"/>
+            <a:ext cx="10607040" cy="274320"/>
+          </a:xfrm>
+          <a:prstGeom prst="rect">
+            <a:avLst/>
+          </a:prstGeom>
+          <a:noFill/>
+          <a:ln/>
+        </p:spPr>
+        <p:txBody>
+          <a:bodyPr wrap="square" lIns="0" tIns="0" rIns="0" bIns="0" rtlCol="0" anchor="ctr"/>
+          <a:lstStyle/>
+          <a:p>
+            <a:pPr indent="0" marL="0">
+              <a:buNone/>
+            </a:pPr>
+            <a:r>
+              <a:rPr lang="en-US" sz="1100" b="1" spc="250" kern="0" dirty="0">
+                <a:solidFill>
+                  <a:srgbClr val="3B6B4A"/>
+                </a:solidFill>
+                <a:latin typeface="Yu Gothic" pitchFamily="34" charset="0"/>
+                <a:ea typeface="Yu Gothic" pitchFamily="34" charset="-122"/>
+                <a:cs typeface="Yu Gothic" pitchFamily="34" charset="-120"/>
+              </a:rPr>
+              <a:t>実演 ②</a:t>
+            </a:r>
+            <a:endParaRPr lang="en-US" sz="1100" dirty="0"/>
           </a:p>
         </p:txBody>
       </p:sp>
@@ -5056,7 +7097,7 @@
         </p:nvSpPr>
         <p:spPr>
           <a:xfrm>
-            <a:off x="777240" y="1783080"/>
+            <a:off x="777240" y="896112"/>
             <a:ext cx="10607040" cy="640080"/>
           </a:xfrm>
           <a:prstGeom prst="rect">
@@ -5073,17 +7114,17 @@
               <a:buNone/>
             </a:pPr>
             <a:r>
-              <a:rPr lang="en-US" sz="3200" b="1" dirty="0">
-                <a:solidFill>
-                  <a:srgbClr val="FFFFFF"/>
-                </a:solidFill>
-                <a:latin typeface="Yu Gothic" pitchFamily="34" charset="0"/>
-                <a:ea typeface="Yu Gothic" pitchFamily="34" charset="-122"/>
-                <a:cs typeface="Yu Gothic" pitchFamily="34" charset="-120"/>
-              </a:rPr>
-              <a:t>ひとつだけ</a:t>
-            </a:r>
-            <a:endParaRPr lang="en-US" sz="3200" dirty="0"/>
+              <a:rPr lang="en-US" sz="2600" b="1" dirty="0">
+                <a:solidFill>
+                  <a:srgbClr val="23201D"/>
+                </a:solidFill>
+                <a:latin typeface="Yu Gothic" pitchFamily="34" charset="0"/>
+                <a:ea typeface="Yu Gothic" pitchFamily="34" charset="-122"/>
+                <a:cs typeface="Yu Gothic" pitchFamily="34" charset="-120"/>
+              </a:rPr>
+              <a:t>事業の言葉で書いた構想</a:t>
+            </a:r>
+            <a:endParaRPr lang="en-US" sz="2600" dirty="0"/>
           </a:p>
         </p:txBody>
       </p:sp>
@@ -5095,18 +7136,124 @@
         </p:nvSpPr>
         <p:spPr>
           <a:xfrm>
-            <a:off x="777240" y="2743200"/>
-            <a:ext cx="10607040" cy="1463040"/>
+            <a:off x="777240" y="1691640"/>
+            <a:ext cx="4879238" cy="1371600"/>
           </a:xfrm>
           <a:prstGeom prst="rect">
             <a:avLst/>
           </a:prstGeom>
           <a:solidFill>
-            <a:srgbClr val="2E2A26"/>
+            <a:srgbClr val="FFFFFF"/>
+          </a:solidFill>
+          <a:ln w="15875">
+            <a:solidFill>
+              <a:srgbClr val="3B6B4A"/>
+            </a:solidFill>
+            <a:prstDash val="solid"/>
+          </a:ln>
+        </p:spPr>
+      </p:sp>
+      <p:sp>
+        <p:nvSpPr>
+          <p:cNvPr id="5" name="Text 3"/>
+          <p:cNvSpPr txBox="1"/>
+          <p:nvPr/>
+        </p:nvSpPr>
+        <p:spPr>
+          <a:xfrm>
+            <a:off x="1005840" y="1783080"/>
+            <a:ext cx="1828800" cy="274320"/>
+          </a:xfrm>
+          <a:prstGeom prst="rect">
+            <a:avLst/>
+          </a:prstGeom>
+          <a:noFill/>
+          <a:ln/>
+        </p:spPr>
+        <p:txBody>
+          <a:bodyPr wrap="square" lIns="0" tIns="0" rIns="0" bIns="0" rtlCol="0" anchor="ctr"/>
+          <a:lstStyle/>
+          <a:p>
+            <a:pPr indent="0" marL="0">
+              <a:buNone/>
+            </a:pPr>
+            <a:r>
+              <a:rPr lang="en-US" sz="1000" b="1" spc="200" kern="0" dirty="0">
+                <a:solidFill>
+                  <a:srgbClr val="3B6B4A"/>
+                </a:solidFill>
+                <a:latin typeface="Yu Gothic" pitchFamily="34" charset="0"/>
+                <a:ea typeface="Yu Gothic" pitchFamily="34" charset="-122"/>
+                <a:cs typeface="Yu Gothic" pitchFamily="34" charset="-120"/>
+              </a:rPr>
+              <a:t>入力</a:t>
+            </a:r>
+            <a:endParaRPr lang="en-US" sz="1000" dirty="0"/>
+          </a:p>
+        </p:txBody>
+      </p:sp>
+      <p:sp>
+        <p:nvSpPr>
+          <p:cNvPr id="6" name="Text 4"/>
+          <p:cNvSpPr txBox="1"/>
+          <p:nvPr/>
+        </p:nvSpPr>
+        <p:spPr>
+          <a:xfrm>
+            <a:off x="1005840" y="2084832"/>
+            <a:ext cx="4422038" cy="868680"/>
+          </a:xfrm>
+          <a:prstGeom prst="rect">
+            <a:avLst/>
+          </a:prstGeom>
+          <a:noFill/>
+          <a:ln/>
+        </p:spPr>
+        <p:txBody>
+          <a:bodyPr wrap="square" lIns="0" tIns="0" rIns="0" bIns="0" rtlCol="0" anchor="ctr"/>
+          <a:lstStyle/>
+          <a:p>
+            <a:pPr indent="0" marL="0">
+              <a:lnSpc>
+                <a:spcPct val="125000"/>
+              </a:lnSpc>
+              <a:buNone/>
+            </a:pPr>
+            <a:r>
+              <a:rPr lang="en-US" sz="1200" dirty="0">
+                <a:solidFill>
+                  <a:srgbClr val="23201D"/>
+                </a:solidFill>
+                <a:latin typeface="Consolas" pitchFamily="34" charset="0"/>
+                <a:ea typeface="Consolas" pitchFamily="34" charset="-122"/>
+                <a:cs typeface="Consolas" pitchFamily="34" charset="-120"/>
+              </a:rPr>
+              <a:t>「見積の即日回答を強みにして、小口案件を取る」</a:t>
+            </a:r>
+            <a:endParaRPr lang="en-US" sz="1200" dirty="0"/>
+          </a:p>
+        </p:txBody>
+      </p:sp>
+      <p:sp>
+        <p:nvSpPr>
+          <p:cNvPr id="7" name="Shape 5"/>
+          <p:cNvSpPr/>
+          <p:nvPr/>
+        </p:nvSpPr>
+        <p:spPr>
+          <a:xfrm>
+            <a:off x="6080760" y="1691640"/>
+            <a:ext cx="5303520" cy="3017520"/>
+          </a:xfrm>
+          <a:prstGeom prst="rect">
+            <a:avLst/>
+          </a:prstGeom>
+          <a:solidFill>
+            <a:srgbClr val="FFFFFF"/>
           </a:solidFill>
           <a:ln w="12700">
             <a:solidFill>
-              <a:srgbClr val="B04A2F"/>
+              <a:srgbClr val="EDE7DB"/>
             </a:solidFill>
             <a:prstDash val="solid"/>
           </a:ln>
@@ -5114,14 +7261,604 @@
       </p:sp>
       <p:sp>
         <p:nvSpPr>
+          <p:cNvPr id="8" name="Text 6"/>
+          <p:cNvSpPr txBox="1"/>
+          <p:nvPr/>
+        </p:nvSpPr>
+        <p:spPr>
+          <a:xfrm>
+            <a:off x="6309360" y="1783080"/>
+            <a:ext cx="2743200" cy="274320"/>
+          </a:xfrm>
+          <a:prstGeom prst="rect">
+            <a:avLst/>
+          </a:prstGeom>
+          <a:noFill/>
+          <a:ln/>
+        </p:spPr>
+        <p:txBody>
+          <a:bodyPr wrap="square" lIns="0" tIns="0" rIns="0" bIns="0" rtlCol="0" anchor="ctr"/>
+          <a:lstStyle/>
+          <a:p>
+            <a:pPr indent="0" marL="0">
+              <a:buNone/>
+            </a:pPr>
+            <a:r>
+              <a:rPr lang="en-US" sz="1000" b="1" spc="200" kern="0" dirty="0">
+                <a:solidFill>
+                  <a:srgbClr val="8A8177"/>
+                </a:solidFill>
+                <a:latin typeface="Yu Gothic" pitchFamily="34" charset="0"/>
+                <a:ea typeface="Yu Gothic" pitchFamily="34" charset="-122"/>
+                <a:cs typeface="Yu Gothic" pitchFamily="34" charset="-120"/>
+              </a:rPr>
+              <a:t>出てくるもの</a:t>
+            </a:r>
+            <a:endParaRPr lang="en-US" sz="1000" dirty="0"/>
+          </a:p>
+        </p:txBody>
+      </p:sp>
+      <p:sp>
+        <p:nvSpPr>
+          <p:cNvPr id="9" name="Text 7"/>
+          <p:cNvSpPr txBox="1"/>
+          <p:nvPr/>
+        </p:nvSpPr>
+        <p:spPr>
+          <a:xfrm>
+            <a:off x="6309360" y="2148840"/>
+            <a:ext cx="4846320" cy="566928"/>
+          </a:xfrm>
+          <a:prstGeom prst="rect">
+            <a:avLst/>
+          </a:prstGeom>
+          <a:noFill/>
+          <a:ln/>
+        </p:spPr>
+        <p:txBody>
+          <a:bodyPr wrap="square" lIns="0" tIns="0" rIns="0" bIns="0" rtlCol="0" anchor="ctr"/>
+          <a:lstStyle/>
+          <a:p>
+            <a:pPr indent="0" marL="0">
+              <a:lnSpc>
+                <a:spcPct val="125000"/>
+              </a:lnSpc>
+              <a:buNone/>
+            </a:pPr>
+            <a:r>
+              <a:rPr lang="en-US" sz="1250" dirty="0">
+                <a:solidFill>
+                  <a:srgbClr val="23201D"/>
+                </a:solidFill>
+                <a:latin typeface="Yu Gothic" pitchFamily="34" charset="0"/>
+                <a:ea typeface="Yu Gothic" pitchFamily="34" charset="-122"/>
+                <a:cs typeface="Yu Gothic" pitchFamily="34" charset="-120"/>
+              </a:rPr>
+              <a:t>・AIが何をするかが決まる（見積の下書き）</a:t>
+            </a:r>
+            <a:endParaRPr lang="en-US" sz="1250" dirty="0"/>
+          </a:p>
+        </p:txBody>
+      </p:sp>
+      <p:sp>
+        <p:nvSpPr>
+          <p:cNvPr id="10" name="Text 8"/>
+          <p:cNvSpPr txBox="1"/>
+          <p:nvPr/>
+        </p:nvSpPr>
+        <p:spPr>
+          <a:xfrm>
+            <a:off x="6309360" y="2752344"/>
+            <a:ext cx="4846320" cy="566928"/>
+          </a:xfrm>
+          <a:prstGeom prst="rect">
+            <a:avLst/>
+          </a:prstGeom>
+          <a:noFill/>
+          <a:ln/>
+        </p:spPr>
+        <p:txBody>
+          <a:bodyPr wrap="square" lIns="0" tIns="0" rIns="0" bIns="0" rtlCol="0" anchor="ctr"/>
+          <a:lstStyle/>
+          <a:p>
+            <a:pPr indent="0" marL="0">
+              <a:lnSpc>
+                <a:spcPct val="125000"/>
+              </a:lnSpc>
+              <a:buNone/>
+            </a:pPr>
+            <a:r>
+              <a:rPr lang="en-US" sz="1250" dirty="0">
+                <a:solidFill>
+                  <a:srgbClr val="23201D"/>
+                </a:solidFill>
+                <a:latin typeface="Yu Gothic" pitchFamily="34" charset="0"/>
+                <a:ea typeface="Yu Gothic" pitchFamily="34" charset="-122"/>
+                <a:cs typeface="Yu Gothic" pitchFamily="34" charset="-120"/>
+              </a:rPr>
+              <a:t>・人が何をするかが決まる（提案と交渉）</a:t>
+            </a:r>
+            <a:endParaRPr lang="en-US" sz="1250" dirty="0"/>
+          </a:p>
+        </p:txBody>
+      </p:sp>
+      <p:sp>
+        <p:nvSpPr>
+          <p:cNvPr id="11" name="Text 9"/>
+          <p:cNvSpPr txBox="1"/>
+          <p:nvPr/>
+        </p:nvSpPr>
+        <p:spPr>
+          <a:xfrm>
+            <a:off x="6309360" y="3355848"/>
+            <a:ext cx="4846320" cy="566928"/>
+          </a:xfrm>
+          <a:prstGeom prst="rect">
+            <a:avLst/>
+          </a:prstGeom>
+          <a:noFill/>
+          <a:ln/>
+        </p:spPr>
+        <p:txBody>
+          <a:bodyPr wrap="square" lIns="0" tIns="0" rIns="0" bIns="0" rtlCol="0" anchor="ctr"/>
+          <a:lstStyle/>
+          <a:p>
+            <a:pPr indent="0" marL="0">
+              <a:lnSpc>
+                <a:spcPct val="125000"/>
+              </a:lnSpc>
+              <a:buNone/>
+            </a:pPr>
+            <a:r>
+              <a:rPr lang="en-US" sz="1250" dirty="0">
+                <a:solidFill>
+                  <a:srgbClr val="23201D"/>
+                </a:solidFill>
+                <a:latin typeface="Yu Gothic" pitchFamily="34" charset="0"/>
+                <a:ea typeface="Yu Gothic" pitchFamily="34" charset="-122"/>
+                <a:cs typeface="Yu Gothic" pitchFamily="34" charset="-120"/>
+              </a:rPr>
+              <a:t>・必要な資産が分かる（過去実績のデータ化）</a:t>
+            </a:r>
+            <a:endParaRPr lang="en-US" sz="1250" dirty="0"/>
+          </a:p>
+        </p:txBody>
+      </p:sp>
+      <p:sp>
+        <p:nvSpPr>
+          <p:cNvPr id="12" name="Text 10"/>
+          <p:cNvSpPr txBox="1"/>
+          <p:nvPr/>
+        </p:nvSpPr>
+        <p:spPr>
+          <a:xfrm>
+            <a:off x="6309360" y="3959352"/>
+            <a:ext cx="4846320" cy="566928"/>
+          </a:xfrm>
+          <a:prstGeom prst="rect">
+            <a:avLst/>
+          </a:prstGeom>
+          <a:noFill/>
+          <a:ln/>
+        </p:spPr>
+        <p:txBody>
+          <a:bodyPr wrap="square" lIns="0" tIns="0" rIns="0" bIns="0" rtlCol="0" anchor="ctr"/>
+          <a:lstStyle/>
+          <a:p>
+            <a:pPr indent="0" marL="0">
+              <a:lnSpc>
+                <a:spcPct val="125000"/>
+              </a:lnSpc>
+              <a:buNone/>
+            </a:pPr>
+            <a:r>
+              <a:rPr lang="en-US" sz="1250" dirty="0">
+                <a:solidFill>
+                  <a:srgbClr val="23201D"/>
+                </a:solidFill>
+                <a:latin typeface="Yu Gothic" pitchFamily="34" charset="0"/>
+                <a:ea typeface="Yu Gothic" pitchFamily="34" charset="-122"/>
+                <a:cs typeface="Yu Gothic" pitchFamily="34" charset="-120"/>
+              </a:rPr>
+              <a:t>・やらないことも決まる（大型案件の深追い）</a:t>
+            </a:r>
+            <a:endParaRPr lang="en-US" sz="1250" dirty="0"/>
+          </a:p>
+        </p:txBody>
+      </p:sp>
+      <p:sp>
+        <p:nvSpPr>
+          <p:cNvPr id="13" name="Shape 11"/>
+          <p:cNvSpPr/>
+          <p:nvPr/>
+        </p:nvSpPr>
+        <p:spPr>
+          <a:xfrm>
+            <a:off x="777240" y="3291840"/>
+            <a:ext cx="4879238" cy="1417320"/>
+          </a:xfrm>
+          <a:prstGeom prst="rect">
+            <a:avLst/>
+          </a:prstGeom>
+          <a:solidFill>
+            <a:srgbClr val="E7F0E9"/>
+          </a:solidFill>
+          <a:ln w="12700">
+            <a:solidFill>
+              <a:srgbClr val="333333"/>
+            </a:solidFill>
+            <a:prstDash val="solid"/>
+          </a:ln>
+        </p:spPr>
+      </p:sp>
+      <p:sp>
+        <p:nvSpPr>
+          <p:cNvPr id="14" name="Text 12"/>
+          <p:cNvSpPr txBox="1"/>
+          <p:nvPr/>
+        </p:nvSpPr>
+        <p:spPr>
+          <a:xfrm>
+            <a:off x="1005840" y="3383280"/>
+            <a:ext cx="4422038" cy="1234440"/>
+          </a:xfrm>
+          <a:prstGeom prst="rect">
+            <a:avLst/>
+          </a:prstGeom>
+          <a:noFill/>
+          <a:ln/>
+        </p:spPr>
+        <p:txBody>
+          <a:bodyPr wrap="square" lIns="0" tIns="0" rIns="0" bIns="0" rtlCol="0" anchor="ctr"/>
+          <a:lstStyle/>
+          <a:p>
+            <a:pPr indent="0" marL="0">
+              <a:lnSpc>
+                <a:spcPct val="135000"/>
+              </a:lnSpc>
+              <a:buNone/>
+            </a:pPr>
+            <a:r>
+              <a:rPr lang="en-US" sz="1250" dirty="0">
+                <a:solidFill>
+                  <a:srgbClr val="3F3933"/>
+                </a:solidFill>
+                <a:latin typeface="Yu Gothic" pitchFamily="34" charset="0"/>
+                <a:ea typeface="Yu Gothic" pitchFamily="34" charset="-122"/>
+                <a:cs typeface="Yu Gothic" pitchFamily="34" charset="-120"/>
+              </a:rPr>
+              <a:t>事業の言葉に翻訳できたとき、はじめてAIは経営の道具になります。</a:t>
+            </a:r>
+            <a:endParaRPr lang="en-US" sz="1250" dirty="0"/>
+          </a:p>
+        </p:txBody>
+      </p:sp>
+      <p:sp>
+        <p:nvSpPr>
+          <p:cNvPr id="15" name="Shape 13"/>
+          <p:cNvSpPr/>
+          <p:nvPr/>
+        </p:nvSpPr>
+        <p:spPr>
+          <a:xfrm>
+            <a:off x="777240" y="4983480"/>
+            <a:ext cx="10607040" cy="685800"/>
+          </a:xfrm>
+          <a:prstGeom prst="rect">
+            <a:avLst/>
+          </a:prstGeom>
+          <a:solidFill>
+            <a:srgbClr val="3B6B4A"/>
+          </a:solidFill>
+          <a:ln w="12700">
+            <a:solidFill>
+              <a:srgbClr val="333333"/>
+            </a:solidFill>
+            <a:prstDash val="solid"/>
+          </a:ln>
+        </p:spPr>
+      </p:sp>
+      <p:sp>
+        <p:nvSpPr>
+          <p:cNvPr id="16" name="Text 14"/>
+          <p:cNvSpPr txBox="1"/>
+          <p:nvPr/>
+        </p:nvSpPr>
+        <p:spPr>
+          <a:xfrm>
+            <a:off x="1097280" y="4983480"/>
+            <a:ext cx="9966960" cy="685800"/>
+          </a:xfrm>
+          <a:prstGeom prst="rect">
+            <a:avLst/>
+          </a:prstGeom>
+          <a:noFill/>
+          <a:ln/>
+        </p:spPr>
+        <p:txBody>
+          <a:bodyPr wrap="square" lIns="0" tIns="0" rIns="0" bIns="0" rtlCol="0" anchor="ctr"/>
+          <a:lstStyle/>
+          <a:p>
+            <a:pPr indent="0" marL="0">
+              <a:buNone/>
+            </a:pPr>
+            <a:r>
+              <a:rPr lang="en-US" sz="1450" b="1" dirty="0">
+                <a:solidFill>
+                  <a:srgbClr val="FFFFFF"/>
+                </a:solidFill>
+                <a:latin typeface="Yu Gothic" pitchFamily="34" charset="0"/>
+                <a:ea typeface="Yu Gothic" pitchFamily="34" charset="-122"/>
+                <a:cs typeface="Yu Gothic" pitchFamily="34" charset="-120"/>
+              </a:rPr>
+              <a:t>AIの話ではなく、何で勝つかの話にする</a:t>
+            </a:r>
+            <a:endParaRPr lang="en-US" sz="1450" dirty="0"/>
+          </a:p>
+        </p:txBody>
+      </p:sp>
+      <p:sp>
+        <p:nvSpPr>
+          <p:cNvPr id="17" name="Text 15"/>
+          <p:cNvSpPr txBox="1"/>
+          <p:nvPr/>
+        </p:nvSpPr>
+        <p:spPr>
+          <a:xfrm>
+            <a:off x="777240" y="6382512"/>
+            <a:ext cx="7424928" cy="256032"/>
+          </a:xfrm>
+          <a:prstGeom prst="rect">
+            <a:avLst/>
+          </a:prstGeom>
+          <a:noFill/>
+          <a:ln/>
+        </p:spPr>
+        <p:txBody>
+          <a:bodyPr wrap="square" lIns="0" tIns="0" rIns="0" bIns="0" rtlCol="0" anchor="ctr"/>
+          <a:lstStyle/>
+          <a:p>
+            <a:pPr indent="0" marL="0">
+              <a:buNone/>
+            </a:pPr>
+            <a:r>
+              <a:rPr lang="en-US" sz="900" dirty="0">
+                <a:solidFill>
+                  <a:srgbClr val="8A8177"/>
+                </a:solidFill>
+                <a:latin typeface="Yu Gothic" pitchFamily="34" charset="0"/>
+                <a:ea typeface="Yu Gothic" pitchFamily="34" charset="-122"/>
+                <a:cs typeface="Yu Gothic" pitchFamily="34" charset="-120"/>
+              </a:rPr>
+              <a:t>第12回　AIを前提に事業を組み直す</a:t>
+            </a:r>
+            <a:endParaRPr lang="en-US" sz="900" dirty="0"/>
+          </a:p>
+        </p:txBody>
+      </p:sp>
+      <p:sp>
+        <p:nvSpPr>
+          <p:cNvPr id="18" name="Text 16"/>
+          <p:cNvSpPr txBox="1"/>
+          <p:nvPr/>
+        </p:nvSpPr>
+        <p:spPr>
+          <a:xfrm>
+            <a:off x="8202168" y="6382512"/>
+            <a:ext cx="3182112" cy="256032"/>
+          </a:xfrm>
+          <a:prstGeom prst="rect">
+            <a:avLst/>
+          </a:prstGeom>
+          <a:noFill/>
+          <a:ln/>
+        </p:spPr>
+        <p:txBody>
+          <a:bodyPr wrap="square" lIns="0" tIns="0" rIns="0" bIns="0" rtlCol="0" anchor="ctr"/>
+          <a:lstStyle/>
+          <a:p>
+            <a:pPr algn="r" indent="0" marL="0">
+              <a:buNone/>
+            </a:pPr>
+            <a:r>
+              <a:rPr lang="en-US" sz="900" dirty="0">
+                <a:solidFill>
+                  <a:srgbClr val="8A8177"/>
+                </a:solidFill>
+                <a:latin typeface="Yu Gothic" pitchFamily="34" charset="0"/>
+                <a:ea typeface="Yu Gothic" pitchFamily="34" charset="-122"/>
+                <a:cs typeface="Yu Gothic" pitchFamily="34" charset="-120"/>
+              </a:rPr>
+              <a:t>実演 ②</a:t>
+            </a:r>
+            <a:endParaRPr lang="en-US" sz="900" dirty="0"/>
+          </a:p>
+        </p:txBody>
+      </p:sp>
+    </p:spTree>
+  </p:cSld>
+  <p:clrMapOvr>
+    <a:masterClrMapping/>
+  </p:clrMapOvr>
+</p:sld>
+</file>
+
+<file path=ppt/slides/slide8.xml><?xml version="1.0" encoding="utf-8"?>
+<p:sld xmlns:a="http://schemas.openxmlformats.org/drawingml/2006/main" xmlns:r="http://schemas.openxmlformats.org/officeDocument/2006/relationships" xmlns:p="http://schemas.openxmlformats.org/presentationml/2006/main">
+  <p:cSld name="Slide 8">
+    <p:bg>
+      <p:bgPr>
+        <a:solidFill>
+          <a:srgbClr val="F6F2EA"/>
+        </a:solidFill>
+      </p:bgPr>
+    </p:bg>
+    <p:spTree>
+      <p:nvGrpSpPr>
+        <p:cNvPr id="1" name=""/>
+        <p:cNvGrpSpPr/>
+        <p:nvPr/>
+      </p:nvGrpSpPr>
+      <p:grpSpPr>
+        <a:xfrm>
+          <a:off x="0" y="0"/>
+          <a:ext cx="0" cy="0"/>
+          <a:chOff x="0" y="0"/>
+          <a:chExt cx="0" cy="0"/>
+        </a:xfrm>
+      </p:grpSpPr>
+      <p:sp>
+        <p:nvSpPr>
+          <p:cNvPr id="2" name="Text 0"/>
+          <p:cNvSpPr txBox="1"/>
+          <p:nvPr/>
+        </p:nvSpPr>
+        <p:spPr>
+          <a:xfrm>
+            <a:off x="777240" y="566928"/>
+            <a:ext cx="10607040" cy="274320"/>
+          </a:xfrm>
+          <a:prstGeom prst="rect">
+            <a:avLst/>
+          </a:prstGeom>
+          <a:noFill/>
+          <a:ln/>
+        </p:spPr>
+        <p:txBody>
+          <a:bodyPr wrap="square" lIns="0" tIns="0" rIns="0" bIns="0" rtlCol="0" anchor="ctr"/>
+          <a:lstStyle/>
+          <a:p>
+            <a:pPr indent="0" marL="0">
+              <a:buNone/>
+            </a:pPr>
+            <a:r>
+              <a:rPr lang="en-US" sz="1100" b="1" spc="250" kern="0" dirty="0">
+                <a:solidFill>
+                  <a:srgbClr val="B04A2F"/>
+                </a:solidFill>
+                <a:latin typeface="Yu Gothic" pitchFamily="34" charset="0"/>
+                <a:ea typeface="Yu Gothic" pitchFamily="34" charset="-122"/>
+                <a:cs typeface="Yu Gothic" pitchFamily="34" charset="-120"/>
+              </a:rPr>
+              <a:t>つまずきやすいところ</a:t>
+            </a:r>
+            <a:endParaRPr lang="en-US" sz="1100" dirty="0"/>
+          </a:p>
+        </p:txBody>
+      </p:sp>
+      <p:sp>
+        <p:nvSpPr>
+          <p:cNvPr id="3" name="Text 1"/>
+          <p:cNvSpPr txBox="1"/>
+          <p:nvPr/>
+        </p:nvSpPr>
+        <p:spPr>
+          <a:xfrm>
+            <a:off x="777240" y="896112"/>
+            <a:ext cx="10607040" cy="640080"/>
+          </a:xfrm>
+          <a:prstGeom prst="rect">
+            <a:avLst/>
+          </a:prstGeom>
+          <a:noFill/>
+          <a:ln/>
+        </p:spPr>
+        <p:txBody>
+          <a:bodyPr wrap="square" lIns="0" tIns="0" rIns="0" bIns="0" rtlCol="0" anchor="ctr"/>
+          <a:lstStyle/>
+          <a:p>
+            <a:pPr indent="0" marL="0">
+              <a:buNone/>
+            </a:pPr>
+            <a:r>
+              <a:rPr lang="en-US" sz="2600" b="1" dirty="0">
+                <a:solidFill>
+                  <a:srgbClr val="23201D"/>
+                </a:solidFill>
+                <a:latin typeface="Yu Gothic" pitchFamily="34" charset="0"/>
+                <a:ea typeface="Yu Gothic" pitchFamily="34" charset="-122"/>
+                <a:cs typeface="Yu Gothic" pitchFamily="34" charset="-120"/>
+              </a:rPr>
+              <a:t>この回で、よく起きること</a:t>
+            </a:r>
+            <a:endParaRPr lang="en-US" sz="2600" dirty="0"/>
+          </a:p>
+        </p:txBody>
+      </p:sp>
+      <p:sp>
+        <p:nvSpPr>
+          <p:cNvPr id="4" name="Shape 2"/>
+          <p:cNvSpPr/>
+          <p:nvPr/>
+        </p:nvSpPr>
+        <p:spPr>
+          <a:xfrm>
+            <a:off x="777240" y="1737360"/>
+            <a:ext cx="10607040" cy="1078992"/>
+          </a:xfrm>
+          <a:prstGeom prst="rect">
+            <a:avLst/>
+          </a:prstGeom>
+          <a:solidFill>
+            <a:srgbClr val="FFFFFF"/>
+          </a:solidFill>
+          <a:ln w="12700">
+            <a:solidFill>
+              <a:srgbClr val="EDE7DB"/>
+            </a:solidFill>
+            <a:prstDash val="solid"/>
+          </a:ln>
+        </p:spPr>
+      </p:sp>
+      <p:sp>
+        <p:nvSpPr>
           <p:cNvPr id="5" name="Text 3"/>
           <p:cNvSpPr txBox="1"/>
           <p:nvPr/>
         </p:nvSpPr>
         <p:spPr>
           <a:xfrm>
-            <a:off x="1234440" y="2880360"/>
-            <a:ext cx="9692640" cy="1188720"/>
+            <a:off x="1051560" y="1856232"/>
+            <a:ext cx="1463040" cy="256032"/>
+          </a:xfrm>
+          <a:prstGeom prst="rect">
+            <a:avLst/>
+          </a:prstGeom>
+          <a:noFill/>
+          <a:ln/>
+        </p:spPr>
+        <p:txBody>
+          <a:bodyPr wrap="square" lIns="0" tIns="0" rIns="0" bIns="0" rtlCol="0" anchor="ctr"/>
+          <a:lstStyle/>
+          <a:p>
+            <a:pPr indent="0" marL="0">
+              <a:buNone/>
+            </a:pPr>
+            <a:r>
+              <a:rPr lang="en-US" sz="900" b="1" spc="150" kern="0" dirty="0">
+                <a:solidFill>
+                  <a:srgbClr val="8A8177"/>
+                </a:solidFill>
+                <a:latin typeface="Yu Gothic" pitchFamily="34" charset="0"/>
+                <a:ea typeface="Yu Gothic" pitchFamily="34" charset="-122"/>
+                <a:cs typeface="Yu Gothic" pitchFamily="34" charset="-120"/>
+              </a:rPr>
+              <a:t>こうなったら</a:t>
+            </a:r>
+            <a:endParaRPr lang="en-US" sz="900" dirty="0"/>
+          </a:p>
+        </p:txBody>
+      </p:sp>
+      <p:sp>
+        <p:nvSpPr>
+          <p:cNvPr id="6" name="Text 4"/>
+          <p:cNvSpPr txBox="1"/>
+          <p:nvPr/>
+        </p:nvSpPr>
+        <p:spPr>
+          <a:xfrm>
+            <a:off x="1051560" y="2121408"/>
+            <a:ext cx="4454957" cy="566928"/>
           </a:xfrm>
           <a:prstGeom prst="rect">
             <a:avLst/>
@@ -5135,12 +7872,858 @@
           <a:p>
             <a:pPr indent="0" marL="0">
               <a:lnSpc>
-                <a:spcPct val="140000"/>
+                <a:spcPct val="120000"/>
               </a:lnSpc>
               <a:buNone/>
             </a:pPr>
             <a:r>
-              <a:rPr lang="en-US" sz="1900" b="1" dirty="0">
+              <a:rPr lang="en-US" sz="1350" b="1" dirty="0">
+                <a:solidFill>
+                  <a:srgbClr val="23201D"/>
+                </a:solidFill>
+                <a:latin typeface="Yu Gothic" pitchFamily="34" charset="0"/>
+                <a:ea typeface="Yu Gothic" pitchFamily="34" charset="-122"/>
+                <a:cs typeface="Yu Gothic" pitchFamily="34" charset="-120"/>
+              </a:rPr>
+              <a:t>3年の話が「もっとAIを使う」で止まる</a:t>
+            </a:r>
+            <a:endParaRPr lang="en-US" sz="1350" dirty="0"/>
+          </a:p>
+        </p:txBody>
+      </p:sp>
+      <p:sp>
+        <p:nvSpPr>
+          <p:cNvPr id="7" name="Shape 5"/>
+          <p:cNvSpPr/>
+          <p:nvPr/>
+        </p:nvSpPr>
+        <p:spPr>
+          <a:xfrm>
+            <a:off x="5762549" y="1847088"/>
+            <a:ext cx="18288" cy="859536"/>
+          </a:xfrm>
+          <a:prstGeom prst="rect">
+            <a:avLst/>
+          </a:prstGeom>
+          <a:solidFill>
+            <a:srgbClr val="EDE7DB"/>
+          </a:solidFill>
+          <a:ln w="12700">
+            <a:solidFill>
+              <a:srgbClr val="333333"/>
+            </a:solidFill>
+            <a:prstDash val="solid"/>
+          </a:ln>
+        </p:spPr>
+      </p:sp>
+      <p:sp>
+        <p:nvSpPr>
+          <p:cNvPr id="8" name="Text 6"/>
+          <p:cNvSpPr txBox="1"/>
+          <p:nvPr/>
+        </p:nvSpPr>
+        <p:spPr>
+          <a:xfrm>
+            <a:off x="6080760" y="1856232"/>
+            <a:ext cx="1463040" cy="256032"/>
+          </a:xfrm>
+          <a:prstGeom prst="rect">
+            <a:avLst/>
+          </a:prstGeom>
+          <a:noFill/>
+          <a:ln/>
+        </p:spPr>
+        <p:txBody>
+          <a:bodyPr wrap="square" lIns="0" tIns="0" rIns="0" bIns="0" rtlCol="0" anchor="ctr"/>
+          <a:lstStyle/>
+          <a:p>
+            <a:pPr indent="0" marL="0">
+              <a:buNone/>
+            </a:pPr>
+            <a:r>
+              <a:rPr lang="en-US" sz="900" b="1" spc="150" kern="0" dirty="0">
+                <a:solidFill>
+                  <a:srgbClr val="B04A2F"/>
+                </a:solidFill>
+                <a:latin typeface="Yu Gothic" pitchFamily="34" charset="0"/>
+                <a:ea typeface="Yu Gothic" pitchFamily="34" charset="-122"/>
+                <a:cs typeface="Yu Gothic" pitchFamily="34" charset="-120"/>
+              </a:rPr>
+              <a:t>こうする</a:t>
+            </a:r>
+            <a:endParaRPr lang="en-US" sz="900" dirty="0"/>
+          </a:p>
+        </p:txBody>
+      </p:sp>
+      <p:sp>
+        <p:nvSpPr>
+          <p:cNvPr id="9" name="Text 7"/>
+          <p:cNvSpPr txBox="1"/>
+          <p:nvPr/>
+        </p:nvSpPr>
+        <p:spPr>
+          <a:xfrm>
+            <a:off x="6080760" y="2121408"/>
+            <a:ext cx="5091379" cy="566928"/>
+          </a:xfrm>
+          <a:prstGeom prst="rect">
+            <a:avLst/>
+          </a:prstGeom>
+          <a:noFill/>
+          <a:ln/>
+        </p:spPr>
+        <p:txBody>
+          <a:bodyPr wrap="square" lIns="0" tIns="0" rIns="0" bIns="0" rtlCol="0" anchor="ctr"/>
+          <a:lstStyle/>
+          <a:p>
+            <a:pPr indent="0" marL="0">
+              <a:lnSpc>
+                <a:spcPct val="125000"/>
+              </a:lnSpc>
+              <a:buNone/>
+            </a:pPr>
+            <a:r>
+              <a:rPr lang="en-US" sz="1250" dirty="0">
+                <a:solidFill>
+                  <a:srgbClr val="3F3933"/>
+                </a:solidFill>
+                <a:latin typeface="Yu Gothic" pitchFamily="34" charset="0"/>
+                <a:ea typeface="Yu Gothic" pitchFamily="34" charset="-122"/>
+                <a:cs typeface="Yu Gothic" pitchFamily="34" charset="-120"/>
+              </a:rPr>
+              <a:t>4つの問いの2番目（人は何をしているか）に戻します。事業の言葉が出るまで粘ります</a:t>
+            </a:r>
+            <a:endParaRPr lang="en-US" sz="1250" dirty="0"/>
+          </a:p>
+        </p:txBody>
+      </p:sp>
+      <p:sp>
+        <p:nvSpPr>
+          <p:cNvPr id="10" name="Shape 8"/>
+          <p:cNvSpPr/>
+          <p:nvPr/>
+        </p:nvSpPr>
+        <p:spPr>
+          <a:xfrm>
+            <a:off x="777240" y="2944368"/>
+            <a:ext cx="10607040" cy="1078992"/>
+          </a:xfrm>
+          <a:prstGeom prst="rect">
+            <a:avLst/>
+          </a:prstGeom>
+          <a:solidFill>
+            <a:srgbClr val="FFFFFF"/>
+          </a:solidFill>
+          <a:ln w="12700">
+            <a:solidFill>
+              <a:srgbClr val="EDE7DB"/>
+            </a:solidFill>
+            <a:prstDash val="solid"/>
+          </a:ln>
+        </p:spPr>
+      </p:sp>
+      <p:sp>
+        <p:nvSpPr>
+          <p:cNvPr id="11" name="Text 9"/>
+          <p:cNvSpPr txBox="1"/>
+          <p:nvPr/>
+        </p:nvSpPr>
+        <p:spPr>
+          <a:xfrm>
+            <a:off x="1051560" y="3063240"/>
+            <a:ext cx="1463040" cy="256032"/>
+          </a:xfrm>
+          <a:prstGeom prst="rect">
+            <a:avLst/>
+          </a:prstGeom>
+          <a:noFill/>
+          <a:ln/>
+        </p:spPr>
+        <p:txBody>
+          <a:bodyPr wrap="square" lIns="0" tIns="0" rIns="0" bIns="0" rtlCol="0" anchor="ctr"/>
+          <a:lstStyle/>
+          <a:p>
+            <a:pPr indent="0" marL="0">
+              <a:buNone/>
+            </a:pPr>
+            <a:r>
+              <a:rPr lang="en-US" sz="900" b="1" spc="150" kern="0" dirty="0">
+                <a:solidFill>
+                  <a:srgbClr val="8A8177"/>
+                </a:solidFill>
+                <a:latin typeface="Yu Gothic" pitchFamily="34" charset="0"/>
+                <a:ea typeface="Yu Gothic" pitchFamily="34" charset="-122"/>
+                <a:cs typeface="Yu Gothic" pitchFamily="34" charset="-120"/>
+              </a:rPr>
+              <a:t>こうなったら</a:t>
+            </a:r>
+            <a:endParaRPr lang="en-US" sz="900" dirty="0"/>
+          </a:p>
+        </p:txBody>
+      </p:sp>
+      <p:sp>
+        <p:nvSpPr>
+          <p:cNvPr id="12" name="Text 10"/>
+          <p:cNvSpPr txBox="1"/>
+          <p:nvPr/>
+        </p:nvSpPr>
+        <p:spPr>
+          <a:xfrm>
+            <a:off x="1051560" y="3328416"/>
+            <a:ext cx="4454957" cy="566928"/>
+          </a:xfrm>
+          <a:prstGeom prst="rect">
+            <a:avLst/>
+          </a:prstGeom>
+          <a:noFill/>
+          <a:ln/>
+        </p:spPr>
+        <p:txBody>
+          <a:bodyPr wrap="square" lIns="0" tIns="0" rIns="0" bIns="0" rtlCol="0" anchor="ctr"/>
+          <a:lstStyle/>
+          <a:p>
+            <a:pPr indent="0" marL="0">
+              <a:lnSpc>
+                <a:spcPct val="120000"/>
+              </a:lnSpc>
+              <a:buNone/>
+            </a:pPr>
+            <a:r>
+              <a:rPr lang="en-US" sz="1350" b="1" dirty="0">
+                <a:solidFill>
+                  <a:srgbClr val="23201D"/>
+                </a:solidFill>
+                <a:latin typeface="Yu Gothic" pitchFamily="34" charset="0"/>
+                <a:ea typeface="Yu Gothic" pitchFamily="34" charset="-122"/>
+                <a:cs typeface="Yu Gothic" pitchFamily="34" charset="-120"/>
+              </a:rPr>
+              <a:t>成果が乏しいまま最終回を迎えた</a:t>
+            </a:r>
+            <a:endParaRPr lang="en-US" sz="1350" dirty="0"/>
+          </a:p>
+        </p:txBody>
+      </p:sp>
+      <p:sp>
+        <p:nvSpPr>
+          <p:cNvPr id="13" name="Shape 11"/>
+          <p:cNvSpPr/>
+          <p:nvPr/>
+        </p:nvSpPr>
+        <p:spPr>
+          <a:xfrm>
+            <a:off x="5762549" y="3054096"/>
+            <a:ext cx="18288" cy="859536"/>
+          </a:xfrm>
+          <a:prstGeom prst="rect">
+            <a:avLst/>
+          </a:prstGeom>
+          <a:solidFill>
+            <a:srgbClr val="EDE7DB"/>
+          </a:solidFill>
+          <a:ln w="12700">
+            <a:solidFill>
+              <a:srgbClr val="333333"/>
+            </a:solidFill>
+            <a:prstDash val="solid"/>
+          </a:ln>
+        </p:spPr>
+      </p:sp>
+      <p:sp>
+        <p:nvSpPr>
+          <p:cNvPr id="14" name="Text 12"/>
+          <p:cNvSpPr txBox="1"/>
+          <p:nvPr/>
+        </p:nvSpPr>
+        <p:spPr>
+          <a:xfrm>
+            <a:off x="6080760" y="3063240"/>
+            <a:ext cx="1463040" cy="256032"/>
+          </a:xfrm>
+          <a:prstGeom prst="rect">
+            <a:avLst/>
+          </a:prstGeom>
+          <a:noFill/>
+          <a:ln/>
+        </p:spPr>
+        <p:txBody>
+          <a:bodyPr wrap="square" lIns="0" tIns="0" rIns="0" bIns="0" rtlCol="0" anchor="ctr"/>
+          <a:lstStyle/>
+          <a:p>
+            <a:pPr indent="0" marL="0">
+              <a:buNone/>
+            </a:pPr>
+            <a:r>
+              <a:rPr lang="en-US" sz="900" b="1" spc="150" kern="0" dirty="0">
+                <a:solidFill>
+                  <a:srgbClr val="B04A2F"/>
+                </a:solidFill>
+                <a:latin typeface="Yu Gothic" pitchFamily="34" charset="0"/>
+                <a:ea typeface="Yu Gothic" pitchFamily="34" charset="-122"/>
+                <a:cs typeface="Yu Gothic" pitchFamily="34" charset="-120"/>
+              </a:rPr>
+              <a:t>こうする</a:t>
+            </a:r>
+            <a:endParaRPr lang="en-US" sz="900" dirty="0"/>
+          </a:p>
+        </p:txBody>
+      </p:sp>
+      <p:sp>
+        <p:nvSpPr>
+          <p:cNvPr id="15" name="Text 13"/>
+          <p:cNvSpPr txBox="1"/>
+          <p:nvPr/>
+        </p:nvSpPr>
+        <p:spPr>
+          <a:xfrm>
+            <a:off x="6080760" y="3328416"/>
+            <a:ext cx="5091379" cy="566928"/>
+          </a:xfrm>
+          <a:prstGeom prst="rect">
+            <a:avLst/>
+          </a:prstGeom>
+          <a:noFill/>
+          <a:ln/>
+        </p:spPr>
+        <p:txBody>
+          <a:bodyPr wrap="square" lIns="0" tIns="0" rIns="0" bIns="0" rtlCol="0" anchor="ctr"/>
+          <a:lstStyle/>
+          <a:p>
+            <a:pPr indent="0" marL="0">
+              <a:lnSpc>
+                <a:spcPct val="125000"/>
+              </a:lnSpc>
+              <a:buNone/>
+            </a:pPr>
+            <a:r>
+              <a:rPr lang="en-US" sz="1250" dirty="0">
+                <a:solidFill>
+                  <a:srgbClr val="3F3933"/>
+                </a:solidFill>
+                <a:latin typeface="Yu Gothic" pitchFamily="34" charset="0"/>
+                <a:ea typeface="Yu Gothic" pitchFamily="34" charset="-122"/>
+                <a:cs typeface="Yu Gothic" pitchFamily="34" charset="-120"/>
+              </a:rPr>
+              <a:t>取り繕いません。何が進まなかったかを一緒に言語化するほうが、次につながります。理由は大半が「時間」と「人」です</a:t>
+            </a:r>
+            <a:endParaRPr lang="en-US" sz="1250" dirty="0"/>
+          </a:p>
+        </p:txBody>
+      </p:sp>
+      <p:sp>
+        <p:nvSpPr>
+          <p:cNvPr id="16" name="Shape 14"/>
+          <p:cNvSpPr/>
+          <p:nvPr/>
+        </p:nvSpPr>
+        <p:spPr>
+          <a:xfrm>
+            <a:off x="777240" y="4151376"/>
+            <a:ext cx="10607040" cy="1078992"/>
+          </a:xfrm>
+          <a:prstGeom prst="rect">
+            <a:avLst/>
+          </a:prstGeom>
+          <a:solidFill>
+            <a:srgbClr val="FFFFFF"/>
+          </a:solidFill>
+          <a:ln w="12700">
+            <a:solidFill>
+              <a:srgbClr val="EDE7DB"/>
+            </a:solidFill>
+            <a:prstDash val="solid"/>
+          </a:ln>
+        </p:spPr>
+      </p:sp>
+      <p:sp>
+        <p:nvSpPr>
+          <p:cNvPr id="17" name="Text 15"/>
+          <p:cNvSpPr txBox="1"/>
+          <p:nvPr/>
+        </p:nvSpPr>
+        <p:spPr>
+          <a:xfrm>
+            <a:off x="1051560" y="4270248"/>
+            <a:ext cx="1463040" cy="256032"/>
+          </a:xfrm>
+          <a:prstGeom prst="rect">
+            <a:avLst/>
+          </a:prstGeom>
+          <a:noFill/>
+          <a:ln/>
+        </p:spPr>
+        <p:txBody>
+          <a:bodyPr wrap="square" lIns="0" tIns="0" rIns="0" bIns="0" rtlCol="0" anchor="ctr"/>
+          <a:lstStyle/>
+          <a:p>
+            <a:pPr indent="0" marL="0">
+              <a:buNone/>
+            </a:pPr>
+            <a:r>
+              <a:rPr lang="en-US" sz="900" b="1" spc="150" kern="0" dirty="0">
+                <a:solidFill>
+                  <a:srgbClr val="8A8177"/>
+                </a:solidFill>
+                <a:latin typeface="Yu Gothic" pitchFamily="34" charset="0"/>
+                <a:ea typeface="Yu Gothic" pitchFamily="34" charset="-122"/>
+                <a:cs typeface="Yu Gothic" pitchFamily="34" charset="-120"/>
+              </a:rPr>
+              <a:t>こうなったら</a:t>
+            </a:r>
+            <a:endParaRPr lang="en-US" sz="900" dirty="0"/>
+          </a:p>
+        </p:txBody>
+      </p:sp>
+      <p:sp>
+        <p:nvSpPr>
+          <p:cNvPr id="18" name="Text 16"/>
+          <p:cNvSpPr txBox="1"/>
+          <p:nvPr/>
+        </p:nvSpPr>
+        <p:spPr>
+          <a:xfrm>
+            <a:off x="1051560" y="4535424"/>
+            <a:ext cx="4454957" cy="566928"/>
+          </a:xfrm>
+          <a:prstGeom prst="rect">
+            <a:avLst/>
+          </a:prstGeom>
+          <a:noFill/>
+          <a:ln/>
+        </p:spPr>
+        <p:txBody>
+          <a:bodyPr wrap="square" lIns="0" tIns="0" rIns="0" bIns="0" rtlCol="0" anchor="ctr"/>
+          <a:lstStyle/>
+          <a:p>
+            <a:pPr indent="0" marL="0">
+              <a:lnSpc>
+                <a:spcPct val="120000"/>
+              </a:lnSpc>
+              <a:buNone/>
+            </a:pPr>
+            <a:r>
+              <a:rPr lang="en-US" sz="1350" b="1" dirty="0">
+                <a:solidFill>
+                  <a:srgbClr val="23201D"/>
+                </a:solidFill>
+                <a:latin typeface="Yu Gothic" pitchFamily="34" charset="0"/>
+                <a:ea typeface="Yu Gothic" pitchFamily="34" charset="-122"/>
+                <a:cs typeface="Yu Gothic" pitchFamily="34" charset="-120"/>
+              </a:rPr>
+              <a:t>継続の相談をされる</a:t>
+            </a:r>
+            <a:endParaRPr lang="en-US" sz="1350" dirty="0"/>
+          </a:p>
+        </p:txBody>
+      </p:sp>
+      <p:sp>
+        <p:nvSpPr>
+          <p:cNvPr id="19" name="Shape 17"/>
+          <p:cNvSpPr/>
+          <p:nvPr/>
+        </p:nvSpPr>
+        <p:spPr>
+          <a:xfrm>
+            <a:off x="5762549" y="4261104"/>
+            <a:ext cx="18288" cy="859536"/>
+          </a:xfrm>
+          <a:prstGeom prst="rect">
+            <a:avLst/>
+          </a:prstGeom>
+          <a:solidFill>
+            <a:srgbClr val="EDE7DB"/>
+          </a:solidFill>
+          <a:ln w="12700">
+            <a:solidFill>
+              <a:srgbClr val="333333"/>
+            </a:solidFill>
+            <a:prstDash val="solid"/>
+          </a:ln>
+        </p:spPr>
+      </p:sp>
+      <p:sp>
+        <p:nvSpPr>
+          <p:cNvPr id="20" name="Text 18"/>
+          <p:cNvSpPr txBox="1"/>
+          <p:nvPr/>
+        </p:nvSpPr>
+        <p:spPr>
+          <a:xfrm>
+            <a:off x="6080760" y="4270248"/>
+            <a:ext cx="1463040" cy="256032"/>
+          </a:xfrm>
+          <a:prstGeom prst="rect">
+            <a:avLst/>
+          </a:prstGeom>
+          <a:noFill/>
+          <a:ln/>
+        </p:spPr>
+        <p:txBody>
+          <a:bodyPr wrap="square" lIns="0" tIns="0" rIns="0" bIns="0" rtlCol="0" anchor="ctr"/>
+          <a:lstStyle/>
+          <a:p>
+            <a:pPr indent="0" marL="0">
+              <a:buNone/>
+            </a:pPr>
+            <a:r>
+              <a:rPr lang="en-US" sz="900" b="1" spc="150" kern="0" dirty="0">
+                <a:solidFill>
+                  <a:srgbClr val="B04A2F"/>
+                </a:solidFill>
+                <a:latin typeface="Yu Gothic" pitchFamily="34" charset="0"/>
+                <a:ea typeface="Yu Gothic" pitchFamily="34" charset="-122"/>
+                <a:cs typeface="Yu Gothic" pitchFamily="34" charset="-120"/>
+              </a:rPr>
+              <a:t>こうする</a:t>
+            </a:r>
+            <a:endParaRPr lang="en-US" sz="900" dirty="0"/>
+          </a:p>
+        </p:txBody>
+      </p:sp>
+      <p:sp>
+        <p:nvSpPr>
+          <p:cNvPr id="21" name="Text 19"/>
+          <p:cNvSpPr txBox="1"/>
+          <p:nvPr/>
+        </p:nvSpPr>
+        <p:spPr>
+          <a:xfrm>
+            <a:off x="6080760" y="4535424"/>
+            <a:ext cx="5091379" cy="566928"/>
+          </a:xfrm>
+          <a:prstGeom prst="rect">
+            <a:avLst/>
+          </a:prstGeom>
+          <a:noFill/>
+          <a:ln/>
+        </p:spPr>
+        <p:txBody>
+          <a:bodyPr wrap="square" lIns="0" tIns="0" rIns="0" bIns="0" rtlCol="0" anchor="ctr"/>
+          <a:lstStyle/>
+          <a:p>
+            <a:pPr indent="0" marL="0">
+              <a:lnSpc>
+                <a:spcPct val="125000"/>
+              </a:lnSpc>
+              <a:buNone/>
+            </a:pPr>
+            <a:r>
+              <a:rPr lang="en-US" sz="1250" dirty="0">
+                <a:solidFill>
+                  <a:srgbClr val="3F3933"/>
+                </a:solidFill>
+                <a:latin typeface="Yu Gothic" pitchFamily="34" charset="0"/>
+                <a:ea typeface="Yu Gothic" pitchFamily="34" charset="-122"/>
+                <a:cs typeface="Yu Gothic" pitchFamily="34" charset="-120"/>
+              </a:rPr>
+              <a:t>講座の延長ではなく、月1回の伴走として別建てにするのが自然です。第10回の月次チェックが接点になります</a:t>
+            </a:r>
+            <a:endParaRPr lang="en-US" sz="1250" dirty="0"/>
+          </a:p>
+        </p:txBody>
+      </p:sp>
+      <p:sp>
+        <p:nvSpPr>
+          <p:cNvPr id="22" name="Text 20"/>
+          <p:cNvSpPr txBox="1"/>
+          <p:nvPr/>
+        </p:nvSpPr>
+        <p:spPr>
+          <a:xfrm>
+            <a:off x="777240" y="6382512"/>
+            <a:ext cx="7424928" cy="256032"/>
+          </a:xfrm>
+          <a:prstGeom prst="rect">
+            <a:avLst/>
+          </a:prstGeom>
+          <a:noFill/>
+          <a:ln/>
+        </p:spPr>
+        <p:txBody>
+          <a:bodyPr wrap="square" lIns="0" tIns="0" rIns="0" bIns="0" rtlCol="0" anchor="ctr"/>
+          <a:lstStyle/>
+          <a:p>
+            <a:pPr indent="0" marL="0">
+              <a:buNone/>
+            </a:pPr>
+            <a:r>
+              <a:rPr lang="en-US" sz="900" dirty="0">
+                <a:solidFill>
+                  <a:srgbClr val="8A8177"/>
+                </a:solidFill>
+                <a:latin typeface="Yu Gothic" pitchFamily="34" charset="0"/>
+                <a:ea typeface="Yu Gothic" pitchFamily="34" charset="-122"/>
+                <a:cs typeface="Yu Gothic" pitchFamily="34" charset="-120"/>
+              </a:rPr>
+              <a:t>第12回　AIを前提に事業を組み直す</a:t>
+            </a:r>
+            <a:endParaRPr lang="en-US" sz="900" dirty="0"/>
+          </a:p>
+        </p:txBody>
+      </p:sp>
+      <p:sp>
+        <p:nvSpPr>
+          <p:cNvPr id="23" name="Text 21"/>
+          <p:cNvSpPr txBox="1"/>
+          <p:nvPr/>
+        </p:nvSpPr>
+        <p:spPr>
+          <a:xfrm>
+            <a:off x="8202168" y="6382512"/>
+            <a:ext cx="3182112" cy="256032"/>
+          </a:xfrm>
+          <a:prstGeom prst="rect">
+            <a:avLst/>
+          </a:prstGeom>
+          <a:noFill/>
+          <a:ln/>
+        </p:spPr>
+        <p:txBody>
+          <a:bodyPr wrap="square" lIns="0" tIns="0" rIns="0" bIns="0" rtlCol="0" anchor="ctr"/>
+          <a:lstStyle/>
+          <a:p>
+            <a:pPr algn="r" indent="0" marL="0">
+              <a:buNone/>
+            </a:pPr>
+            <a:r>
+              <a:rPr lang="en-US" sz="900" dirty="0">
+                <a:solidFill>
+                  <a:srgbClr val="8A8177"/>
+                </a:solidFill>
+                <a:latin typeface="Yu Gothic" pitchFamily="34" charset="0"/>
+                <a:ea typeface="Yu Gothic" pitchFamily="34" charset="-122"/>
+                <a:cs typeface="Yu Gothic" pitchFamily="34" charset="-120"/>
+              </a:rPr>
+              <a:t>つまずき</a:t>
+            </a:r>
+            <a:endParaRPr lang="en-US" sz="900" dirty="0"/>
+          </a:p>
+        </p:txBody>
+      </p:sp>
+    </p:spTree>
+  </p:cSld>
+  <p:clrMapOvr>
+    <a:masterClrMapping/>
+  </p:clrMapOvr>
+</p:sld>
+</file>
+
+<file path=ppt/slides/slide9.xml><?xml version="1.0" encoding="utf-8"?>
+<p:sld xmlns:a="http://schemas.openxmlformats.org/drawingml/2006/main" xmlns:r="http://schemas.openxmlformats.org/officeDocument/2006/relationships" xmlns:p="http://schemas.openxmlformats.org/presentationml/2006/main">
+  <p:cSld name="Slide 9">
+    <p:bg>
+      <p:bgPr>
+        <a:solidFill>
+          <a:srgbClr val="F6F2EA"/>
+        </a:solidFill>
+      </p:bgPr>
+    </p:bg>
+    <p:spTree>
+      <p:nvGrpSpPr>
+        <p:cNvPr id="1" name=""/>
+        <p:cNvGrpSpPr/>
+        <p:nvPr/>
+      </p:nvGrpSpPr>
+      <p:grpSpPr>
+        <a:xfrm>
+          <a:off x="0" y="0"/>
+          <a:ext cx="0" cy="0"/>
+          <a:chOff x="0" y="0"/>
+          <a:chExt cx="0" cy="0"/>
+        </a:xfrm>
+      </p:grpSpPr>
+      <p:sp>
+        <p:nvSpPr>
+          <p:cNvPr id="2" name="Text 0"/>
+          <p:cNvSpPr txBox="1"/>
+          <p:nvPr/>
+        </p:nvSpPr>
+        <p:spPr>
+          <a:xfrm>
+            <a:off x="777240" y="566928"/>
+            <a:ext cx="10607040" cy="274320"/>
+          </a:xfrm>
+          <a:prstGeom prst="rect">
+            <a:avLst/>
+          </a:prstGeom>
+          <a:noFill/>
+          <a:ln/>
+        </p:spPr>
+        <p:txBody>
+          <a:bodyPr wrap="square" lIns="0" tIns="0" rIns="0" bIns="0" rtlCol="0" anchor="ctr"/>
+          <a:lstStyle/>
+          <a:p>
+            <a:pPr indent="0" marL="0">
+              <a:buNone/>
+            </a:pPr>
+            <a:r>
+              <a:rPr lang="en-US" sz="1100" b="1" spc="250" kern="0" dirty="0">
+                <a:solidFill>
+                  <a:srgbClr val="2F4F6B"/>
+                </a:solidFill>
+                <a:latin typeface="Yu Gothic" pitchFamily="34" charset="0"/>
+                <a:ea typeface="Yu Gothic" pitchFamily="34" charset="-122"/>
+                <a:cs typeface="Yu Gothic" pitchFamily="34" charset="-120"/>
+              </a:rPr>
+              <a:t>演習</a:t>
+            </a:r>
+            <a:endParaRPr lang="en-US" sz="1100" dirty="0"/>
+          </a:p>
+        </p:txBody>
+      </p:sp>
+      <p:sp>
+        <p:nvSpPr>
+          <p:cNvPr id="3" name="Text 1"/>
+          <p:cNvSpPr txBox="1"/>
+          <p:nvPr/>
+        </p:nvSpPr>
+        <p:spPr>
+          <a:xfrm>
+            <a:off x="777240" y="896112"/>
+            <a:ext cx="10607040" cy="640080"/>
+          </a:xfrm>
+          <a:prstGeom prst="rect">
+            <a:avLst/>
+          </a:prstGeom>
+          <a:noFill/>
+          <a:ln/>
+        </p:spPr>
+        <p:txBody>
+          <a:bodyPr wrap="square" lIns="0" tIns="0" rIns="0" bIns="0" rtlCol="0" anchor="ctr"/>
+          <a:lstStyle/>
+          <a:p>
+            <a:pPr indent="0" marL="0">
+              <a:buNone/>
+            </a:pPr>
+            <a:r>
+              <a:rPr lang="en-US" sz="2600" b="1" dirty="0">
+                <a:solidFill>
+                  <a:srgbClr val="23201D"/>
+                </a:solidFill>
+                <a:latin typeface="Yu Gothic" pitchFamily="34" charset="0"/>
+                <a:ea typeface="Yu Gothic" pitchFamily="34" charset="-122"/>
+                <a:cs typeface="Yu Gothic" pitchFamily="34" charset="-120"/>
+              </a:rPr>
+              <a:t>今日の流れ</a:t>
+            </a:r>
+            <a:endParaRPr lang="en-US" sz="2600" dirty="0"/>
+          </a:p>
+        </p:txBody>
+      </p:sp>
+      <p:sp>
+        <p:nvSpPr>
+          <p:cNvPr id="4" name="Text 2"/>
+          <p:cNvSpPr txBox="1"/>
+          <p:nvPr/>
+        </p:nvSpPr>
+        <p:spPr>
+          <a:xfrm>
+            <a:off x="777240" y="1572768"/>
+            <a:ext cx="10607040" cy="320040"/>
+          </a:xfrm>
+          <a:prstGeom prst="rect">
+            <a:avLst/>
+          </a:prstGeom>
+          <a:noFill/>
+          <a:ln/>
+        </p:spPr>
+        <p:txBody>
+          <a:bodyPr wrap="square" lIns="0" tIns="0" rIns="0" bIns="0" rtlCol="0" anchor="ctr"/>
+          <a:lstStyle/>
+          <a:p>
+            <a:pPr indent="0" marL="0">
+              <a:buNone/>
+            </a:pPr>
+            <a:r>
+              <a:rPr lang="en-US" sz="1250" b="1" dirty="0">
+                <a:solidFill>
+                  <a:srgbClr val="2F4F6B"/>
+                </a:solidFill>
+                <a:latin typeface="Yu Gothic" pitchFamily="34" charset="0"/>
+                <a:ea typeface="Yu Gothic" pitchFamily="34" charset="-122"/>
+                <a:cs typeface="Yu Gothic" pitchFamily="34" charset="-120"/>
+              </a:rPr>
+              <a:t>55分。操作するのはご自身です。</a:t>
+            </a:r>
+            <a:endParaRPr lang="en-US" sz="1250" dirty="0"/>
+          </a:p>
+        </p:txBody>
+      </p:sp>
+      <p:sp>
+        <p:nvSpPr>
+          <p:cNvPr id="5" name="Shape 3"/>
+          <p:cNvSpPr/>
+          <p:nvPr/>
+        </p:nvSpPr>
+        <p:spPr>
+          <a:xfrm>
+            <a:off x="777240" y="2148840"/>
+            <a:ext cx="3383280" cy="2880360"/>
+          </a:xfrm>
+          <a:prstGeom prst="rect">
+            <a:avLst/>
+          </a:prstGeom>
+          <a:solidFill>
+            <a:srgbClr val="FFFFFF"/>
+          </a:solidFill>
+          <a:ln w="12700">
+            <a:solidFill>
+              <a:srgbClr val="EDE7DB"/>
+            </a:solidFill>
+            <a:prstDash val="solid"/>
+          </a:ln>
+        </p:spPr>
+      </p:sp>
+      <p:sp>
+        <p:nvSpPr>
+          <p:cNvPr id="6" name="Shape 4"/>
+          <p:cNvSpPr/>
+          <p:nvPr/>
+        </p:nvSpPr>
+        <p:spPr>
+          <a:xfrm>
+            <a:off x="1051560" y="2395728"/>
+            <a:ext cx="438912" cy="438912"/>
+          </a:xfrm>
+          <a:prstGeom prst="ellipse">
+            <a:avLst/>
+          </a:prstGeom>
+          <a:solidFill>
+            <a:srgbClr val="2F4F6B"/>
+          </a:solidFill>
+          <a:ln w="12700">
+            <a:solidFill>
+              <a:srgbClr val="333333"/>
+            </a:solidFill>
+            <a:prstDash val="solid"/>
+          </a:ln>
+        </p:spPr>
+      </p:sp>
+      <p:sp>
+        <p:nvSpPr>
+          <p:cNvPr id="7" name="Text 5"/>
+          <p:cNvSpPr txBox="1"/>
+          <p:nvPr/>
+        </p:nvSpPr>
+        <p:spPr>
+          <a:xfrm>
+            <a:off x="1051560" y="2395728"/>
+            <a:ext cx="438912" cy="438912"/>
+          </a:xfrm>
+          <a:prstGeom prst="rect">
+            <a:avLst/>
+          </a:prstGeom>
+          <a:noFill/>
+          <a:ln/>
+        </p:spPr>
+        <p:txBody>
+          <a:bodyPr wrap="square" lIns="0" tIns="0" rIns="0" bIns="0" rtlCol="0" anchor="ctr"/>
+          <a:lstStyle/>
+          <a:p>
+            <a:pPr algn="ctr" indent="0" marL="0">
+              <a:buNone/>
+            </a:pPr>
+            <a:r>
+              <a:rPr lang="en-US" sz="1300" b="1" dirty="0">
                 <a:solidFill>
                   <a:srgbClr val="FFFFFF"/>
                 </a:solidFill>
@@ -5148,22 +8731,22 @@
                 <a:ea typeface="Yu Gothic" pitchFamily="34" charset="-122"/>
                 <a:cs typeface="Yu Gothic" pitchFamily="34" charset="-120"/>
               </a:rPr>
-              <a:t>（修了後）3か月後のフォローで、進捗をお聞かせください。</a:t>
-            </a:r>
-            <a:endParaRPr lang="en-US" sz="1900" dirty="0"/>
-          </a:p>
-        </p:txBody>
-      </p:sp>
-      <p:sp>
-        <p:nvSpPr>
-          <p:cNvPr id="6" name="Text 4"/>
-          <p:cNvSpPr txBox="1"/>
-          <p:nvPr/>
-        </p:nvSpPr>
-        <p:spPr>
-          <a:xfrm>
-            <a:off x="777240" y="4572000"/>
-            <a:ext cx="10607040" cy="822960"/>
+              <a:t>1</a:t>
+            </a:r>
+            <a:endParaRPr lang="en-US" sz="1300" dirty="0"/>
+          </a:p>
+        </p:txBody>
+      </p:sp>
+      <p:sp>
+        <p:nvSpPr>
+          <p:cNvPr id="8" name="Text 6"/>
+          <p:cNvSpPr txBox="1"/>
+          <p:nvPr/>
+        </p:nvSpPr>
+        <p:spPr>
+          <a:xfrm>
+            <a:off x="1051560" y="2944368"/>
+            <a:ext cx="2834640" cy="731520"/>
           </a:xfrm>
           <a:prstGeom prst="rect">
             <a:avLst/>
@@ -5177,40 +8760,324 @@
           <a:p>
             <a:pPr indent="0" marL="0">
               <a:lnSpc>
-                <a:spcPct val="145000"/>
+                <a:spcPct val="125000"/>
               </a:lnSpc>
               <a:buNone/>
             </a:pPr>
             <a:r>
-              <a:rPr lang="en-US" sz="1300" dirty="0">
-                <a:solidFill>
-                  <a:srgbClr val="B9B0A4"/>
-                </a:solidFill>
-                <a:latin typeface="Yu Gothic" pitchFamily="34" charset="0"/>
-                <a:ea typeface="Yu Gothic" pitchFamily="34" charset="-122"/>
-                <a:cs typeface="Yu Gothic" pitchFamily="34" charset="-120"/>
-              </a:rPr>
-              <a:t>15分で終わる大きさにしてあります。できなかった回があっても構いません。</a:t>
+              <a:rPr lang="en-US" sz="1450" b="1" dirty="0">
+                <a:solidFill>
+                  <a:srgbClr val="23201D"/>
+                </a:solidFill>
+                <a:latin typeface="Yu Gothic" pitchFamily="34" charset="0"/>
+                <a:ea typeface="Yu Gothic" pitchFamily="34" charset="-122"/>
+                <a:cs typeface="Yu Gothic" pitchFamily="34" charset="-120"/>
+              </a:rPr>
+              <a:t>作ったものを全部並べる</a:t>
+            </a:r>
+            <a:endParaRPr lang="en-US" sz="1450" dirty="0"/>
+          </a:p>
+        </p:txBody>
+      </p:sp>
+      <p:sp>
+        <p:nvSpPr>
+          <p:cNvPr id="9" name="Text 7"/>
+          <p:cNvSpPr txBox="1"/>
+          <p:nvPr/>
+        </p:nvSpPr>
+        <p:spPr>
+          <a:xfrm>
+            <a:off x="1051560" y="3703320"/>
+            <a:ext cx="2834640" cy="1188720"/>
+          </a:xfrm>
+          <a:prstGeom prst="rect">
+            <a:avLst/>
+          </a:prstGeom>
+          <a:noFill/>
+          <a:ln/>
+        </p:spPr>
+        <p:txBody>
+          <a:bodyPr wrap="square" lIns="0" tIns="0" rIns="0" bIns="0" rtlCol="0" anchor="ctr"/>
+          <a:lstStyle/>
+          <a:p>
+            <a:pPr indent="0" marL="0">
+              <a:lnSpc>
+                <a:spcPct val="130000"/>
+              </a:lnSpc>
+              <a:buNone/>
+            </a:pPr>
+            <a:r>
+              <a:rPr lang="en-US" sz="1150" dirty="0">
+                <a:solidFill>
+                  <a:srgbClr val="5A534A"/>
+                </a:solidFill>
+                <a:latin typeface="Yu Gothic" pitchFamily="34" charset="0"/>
+                <a:ea typeface="Yu Gothic" pitchFamily="34" charset="-122"/>
+                <a:cs typeface="Yu Gothic" pitchFamily="34" charset="-120"/>
+              </a:rPr>
+              <a:t>12回分の成果物をお渡しします。第1回の記録とも突き合わせます</a:t>
+            </a:r>
+            <a:endParaRPr lang="en-US" sz="1150" dirty="0"/>
+          </a:p>
+        </p:txBody>
+      </p:sp>
+      <p:sp>
+        <p:nvSpPr>
+          <p:cNvPr id="10" name="Shape 8"/>
+          <p:cNvSpPr/>
+          <p:nvPr/>
+        </p:nvSpPr>
+        <p:spPr>
+          <a:xfrm>
+            <a:off x="4389120" y="2148840"/>
+            <a:ext cx="3383280" cy="2880360"/>
+          </a:xfrm>
+          <a:prstGeom prst="rect">
+            <a:avLst/>
+          </a:prstGeom>
+          <a:solidFill>
+            <a:srgbClr val="FFFFFF"/>
+          </a:solidFill>
+          <a:ln w="12700">
+            <a:solidFill>
+              <a:srgbClr val="EDE7DB"/>
+            </a:solidFill>
+            <a:prstDash val="solid"/>
+          </a:ln>
+        </p:spPr>
+      </p:sp>
+      <p:sp>
+        <p:nvSpPr>
+          <p:cNvPr id="11" name="Shape 9"/>
+          <p:cNvSpPr/>
+          <p:nvPr/>
+        </p:nvSpPr>
+        <p:spPr>
+          <a:xfrm>
+            <a:off x="4663440" y="2395728"/>
+            <a:ext cx="438912" cy="438912"/>
+          </a:xfrm>
+          <a:prstGeom prst="ellipse">
+            <a:avLst/>
+          </a:prstGeom>
+          <a:solidFill>
+            <a:srgbClr val="2F4F6B"/>
+          </a:solidFill>
+          <a:ln w="12700">
+            <a:solidFill>
+              <a:srgbClr val="333333"/>
+            </a:solidFill>
+            <a:prstDash val="solid"/>
+          </a:ln>
+        </p:spPr>
+      </p:sp>
+      <p:sp>
+        <p:nvSpPr>
+          <p:cNvPr id="12" name="Text 10"/>
+          <p:cNvSpPr txBox="1"/>
+          <p:nvPr/>
+        </p:nvSpPr>
+        <p:spPr>
+          <a:xfrm>
+            <a:off x="4663440" y="2395728"/>
+            <a:ext cx="438912" cy="438912"/>
+          </a:xfrm>
+          <a:prstGeom prst="rect">
+            <a:avLst/>
+          </a:prstGeom>
+          <a:noFill/>
+          <a:ln/>
+        </p:spPr>
+        <p:txBody>
+          <a:bodyPr wrap="square" lIns="0" tIns="0" rIns="0" bIns="0" rtlCol="0" anchor="ctr"/>
+          <a:lstStyle/>
+          <a:p>
+            <a:pPr algn="ctr" indent="0" marL="0">
+              <a:buNone/>
+            </a:pPr>
+            <a:r>
+              <a:rPr lang="en-US" sz="1300" b="1" dirty="0">
+                <a:solidFill>
+                  <a:srgbClr val="FFFFFF"/>
+                </a:solidFill>
+                <a:latin typeface="Yu Gothic" pitchFamily="34" charset="0"/>
+                <a:ea typeface="Yu Gothic" pitchFamily="34" charset="-122"/>
+                <a:cs typeface="Yu Gothic" pitchFamily="34" charset="-120"/>
+              </a:rPr>
+              <a:t>2</a:t>
             </a:r>
             <a:endParaRPr lang="en-US" sz="1300" dirty="0"/>
           </a:p>
+        </p:txBody>
+      </p:sp>
+      <p:sp>
+        <p:nvSpPr>
+          <p:cNvPr id="13" name="Text 11"/>
+          <p:cNvSpPr txBox="1"/>
+          <p:nvPr/>
+        </p:nvSpPr>
+        <p:spPr>
+          <a:xfrm>
+            <a:off x="4663440" y="2944368"/>
+            <a:ext cx="2834640" cy="731520"/>
+          </a:xfrm>
+          <a:prstGeom prst="rect">
+            <a:avLst/>
+          </a:prstGeom>
+          <a:noFill/>
+          <a:ln/>
+        </p:spPr>
+        <p:txBody>
+          <a:bodyPr wrap="square" lIns="0" tIns="0" rIns="0" bIns="0" rtlCol="0" anchor="ctr"/>
+          <a:lstStyle/>
           <a:p>
             <a:pPr indent="0" marL="0">
               <a:lnSpc>
-                <a:spcPct val="145000"/>
+                <a:spcPct val="125000"/>
               </a:lnSpc>
               <a:buNone/>
             </a:pPr>
             <a:r>
-              <a:rPr lang="en-US" sz="1300" dirty="0">
-                <a:solidFill>
-                  <a:srgbClr val="B9B0A4"/>
-                </a:solidFill>
-                <a:latin typeface="Yu Gothic" pitchFamily="34" charset="0"/>
-                <a:ea typeface="Yu Gothic" pitchFamily="34" charset="-122"/>
-                <a:cs typeface="Yu Gothic" pitchFamily="34" charset="-120"/>
-              </a:rPr>
-              <a:t>2回続いたら、宿題の出し方を見直します。</a:t>
+              <a:rPr lang="en-US" sz="1450" b="1" dirty="0">
+                <a:solidFill>
+                  <a:srgbClr val="23201D"/>
+                </a:solidFill>
+                <a:latin typeface="Yu Gothic" pitchFamily="34" charset="0"/>
+                <a:ea typeface="Yu Gothic" pitchFamily="34" charset="-122"/>
+                <a:cs typeface="Yu Gothic" pitchFamily="34" charset="-120"/>
+              </a:rPr>
+              <a:t>3年構想を1枚にする</a:t>
+            </a:r>
+            <a:endParaRPr lang="en-US" sz="1450" dirty="0"/>
+          </a:p>
+        </p:txBody>
+      </p:sp>
+      <p:sp>
+        <p:nvSpPr>
+          <p:cNvPr id="14" name="Text 12"/>
+          <p:cNvSpPr txBox="1"/>
+          <p:nvPr/>
+        </p:nvSpPr>
+        <p:spPr>
+          <a:xfrm>
+            <a:off x="4663440" y="3703320"/>
+            <a:ext cx="2834640" cy="1188720"/>
+          </a:xfrm>
+          <a:prstGeom prst="rect">
+            <a:avLst/>
+          </a:prstGeom>
+          <a:noFill/>
+          <a:ln/>
+        </p:spPr>
+        <p:txBody>
+          <a:bodyPr wrap="square" lIns="0" tIns="0" rIns="0" bIns="0" rtlCol="0" anchor="ctr"/>
+          <a:lstStyle/>
+          <a:p>
+            <a:pPr indent="0" marL="0">
+              <a:lnSpc>
+                <a:spcPct val="130000"/>
+              </a:lnSpc>
+              <a:buNone/>
+            </a:pPr>
+            <a:r>
+              <a:rPr lang="en-US" sz="1150" dirty="0">
+                <a:solidFill>
+                  <a:srgbClr val="5A534A"/>
+                </a:solidFill>
+                <a:latin typeface="Yu Gothic" pitchFamily="34" charset="0"/>
+                <a:ea typeface="Yu Gothic" pitchFamily="34" charset="-122"/>
+                <a:cs typeface="Yu Gothic" pitchFamily="34" charset="-120"/>
+              </a:rPr>
+              <a:t>4つの問いに答えます。ここは社員退席後でも構いません</a:t>
+            </a:r>
+            <a:endParaRPr lang="en-US" sz="1150" dirty="0"/>
+          </a:p>
+        </p:txBody>
+      </p:sp>
+      <p:sp>
+        <p:nvSpPr>
+          <p:cNvPr id="15" name="Shape 13"/>
+          <p:cNvSpPr/>
+          <p:nvPr/>
+        </p:nvSpPr>
+        <p:spPr>
+          <a:xfrm>
+            <a:off x="8001000" y="2148840"/>
+            <a:ext cx="3383280" cy="2880360"/>
+          </a:xfrm>
+          <a:prstGeom prst="rect">
+            <a:avLst/>
+          </a:prstGeom>
+          <a:solidFill>
+            <a:srgbClr val="FFFFFF"/>
+          </a:solidFill>
+          <a:ln w="12700">
+            <a:solidFill>
+              <a:srgbClr val="EDE7DB"/>
+            </a:solidFill>
+            <a:prstDash val="solid"/>
+          </a:ln>
+        </p:spPr>
+      </p:sp>
+      <p:sp>
+        <p:nvSpPr>
+          <p:cNvPr id="16" name="Shape 14"/>
+          <p:cNvSpPr/>
+          <p:nvPr/>
+        </p:nvSpPr>
+        <p:spPr>
+          <a:xfrm>
+            <a:off x="8275320" y="2395728"/>
+            <a:ext cx="438912" cy="438912"/>
+          </a:xfrm>
+          <a:prstGeom prst="ellipse">
+            <a:avLst/>
+          </a:prstGeom>
+          <a:solidFill>
+            <a:srgbClr val="2F4F6B"/>
+          </a:solidFill>
+          <a:ln w="12700">
+            <a:solidFill>
+              <a:srgbClr val="333333"/>
+            </a:solidFill>
+            <a:prstDash val="solid"/>
+          </a:ln>
+        </p:spPr>
+      </p:sp>
+      <p:sp>
+        <p:nvSpPr>
+          <p:cNvPr id="17" name="Text 15"/>
+          <p:cNvSpPr txBox="1"/>
+          <p:nvPr/>
+        </p:nvSpPr>
+        <p:spPr>
+          <a:xfrm>
+            <a:off x="8275320" y="2395728"/>
+            <a:ext cx="438912" cy="438912"/>
+          </a:xfrm>
+          <a:prstGeom prst="rect">
+            <a:avLst/>
+          </a:prstGeom>
+          <a:noFill/>
+          <a:ln/>
+        </p:spPr>
+        <p:txBody>
+          <a:bodyPr wrap="square" lIns="0" tIns="0" rIns="0" bIns="0" rtlCol="0" anchor="ctr"/>
+          <a:lstStyle/>
+          <a:p>
+            <a:pPr algn="ctr" indent="0" marL="0">
+              <a:buNone/>
+            </a:pPr>
+            <a:r>
+              <a:rPr lang="en-US" sz="1300" b="1" dirty="0">
+                <a:solidFill>
+                  <a:srgbClr val="FFFFFF"/>
+                </a:solidFill>
+                <a:latin typeface="Yu Gothic" pitchFamily="34" charset="0"/>
+                <a:ea typeface="Yu Gothic" pitchFamily="34" charset="-122"/>
+                <a:cs typeface="Yu Gothic" pitchFamily="34" charset="-120"/>
+              </a:rPr>
+              <a:t>3</a:t>
             </a:r>
             <a:endParaRPr lang="en-US" sz="1300" dirty="0"/>
           </a:p>
@@ -5218,14 +9085,98 @@
       </p:sp>
       <p:sp>
         <p:nvSpPr>
-          <p:cNvPr id="7" name="Text 5"/>
-          <p:cNvSpPr txBox="1"/>
-          <p:nvPr/>
-        </p:nvSpPr>
-        <p:spPr>
-          <a:xfrm>
-            <a:off x="777240" y="6355080"/>
-            <a:ext cx="10607040" cy="274320"/>
+          <p:cNvPr id="18" name="Text 16"/>
+          <p:cNvSpPr txBox="1"/>
+          <p:nvPr/>
+        </p:nvSpPr>
+        <p:spPr>
+          <a:xfrm>
+            <a:off x="8275320" y="2944368"/>
+            <a:ext cx="2834640" cy="731520"/>
+          </a:xfrm>
+          <a:prstGeom prst="rect">
+            <a:avLst/>
+          </a:prstGeom>
+          <a:noFill/>
+          <a:ln/>
+        </p:spPr>
+        <p:txBody>
+          <a:bodyPr wrap="square" lIns="0" tIns="0" rIns="0" bIns="0" rtlCol="0" anchor="ctr"/>
+          <a:lstStyle/>
+          <a:p>
+            <a:pPr indent="0" marL="0">
+              <a:lnSpc>
+                <a:spcPct val="125000"/>
+              </a:lnSpc>
+              <a:buNone/>
+            </a:pPr>
+            <a:r>
+              <a:rPr lang="en-US" sz="1450" b="1" dirty="0">
+                <a:solidFill>
+                  <a:srgbClr val="23201D"/>
+                </a:solidFill>
+                <a:latin typeface="Yu Gothic" pitchFamily="34" charset="0"/>
+                <a:ea typeface="Yu Gothic" pitchFamily="34" charset="-122"/>
+                <a:cs typeface="Yu Gothic" pitchFamily="34" charset="-120"/>
+              </a:rPr>
+              <a:t>社員のみなさんに方針を話す</a:t>
+            </a:r>
+            <a:endParaRPr lang="en-US" sz="1450" dirty="0"/>
+          </a:p>
+        </p:txBody>
+      </p:sp>
+      <p:sp>
+        <p:nvSpPr>
+          <p:cNvPr id="19" name="Text 17"/>
+          <p:cNvSpPr txBox="1"/>
+          <p:nvPr/>
+        </p:nvSpPr>
+        <p:spPr>
+          <a:xfrm>
+            <a:off x="8275320" y="3703320"/>
+            <a:ext cx="2834640" cy="1188720"/>
+          </a:xfrm>
+          <a:prstGeom prst="rect">
+            <a:avLst/>
+          </a:prstGeom>
+          <a:noFill/>
+          <a:ln/>
+        </p:spPr>
+        <p:txBody>
+          <a:bodyPr wrap="square" lIns="0" tIns="0" rIns="0" bIns="0" rtlCol="0" anchor="ctr"/>
+          <a:lstStyle/>
+          <a:p>
+            <a:pPr indent="0" marL="0">
+              <a:lnSpc>
+                <a:spcPct val="130000"/>
+              </a:lnSpc>
+              <a:buNone/>
+            </a:pPr>
+            <a:r>
+              <a:rPr lang="en-US" sz="1150" dirty="0">
+                <a:solidFill>
+                  <a:srgbClr val="5A534A"/>
+                </a:solidFill>
+                <a:latin typeface="Yu Gothic" pitchFamily="34" charset="0"/>
+                <a:ea typeface="Yu Gothic" pitchFamily="34" charset="-122"/>
+                <a:cs typeface="Yu Gothic" pitchFamily="34" charset="-120"/>
+              </a:rPr>
+              <a:t>これからどうするかを、社長ご自身の言葉で</a:t>
+            </a:r>
+            <a:endParaRPr lang="en-US" sz="1150" dirty="0"/>
+          </a:p>
+        </p:txBody>
+      </p:sp>
+      <p:sp>
+        <p:nvSpPr>
+          <p:cNvPr id="20" name="Text 18"/>
+          <p:cNvSpPr txBox="1"/>
+          <p:nvPr/>
+        </p:nvSpPr>
+        <p:spPr>
+          <a:xfrm>
+            <a:off x="777240" y="6382512"/>
+            <a:ext cx="7424928" cy="256032"/>
           </a:xfrm>
           <a:prstGeom prst="rect">
             <a:avLst/>
@@ -5243,13 +9194,52 @@
             <a:r>
               <a:rPr lang="en-US" sz="900" dirty="0">
                 <a:solidFill>
-                  <a:srgbClr val="6E6558"/>
+                  <a:srgbClr val="8A8177"/>
                 </a:solidFill>
                 <a:latin typeface="Yu Gothic" pitchFamily="34" charset="0"/>
                 <a:ea typeface="Yu Gothic" pitchFamily="34" charset="-122"/>
                 <a:cs typeface="Yu Gothic" pitchFamily="34" charset="-120"/>
               </a:rPr>
               <a:t>第12回　AIを前提に事業を組み直す</a:t>
+            </a:r>
+            <a:endParaRPr lang="en-US" sz="900" dirty="0"/>
+          </a:p>
+        </p:txBody>
+      </p:sp>
+      <p:sp>
+        <p:nvSpPr>
+          <p:cNvPr id="21" name="Text 19"/>
+          <p:cNvSpPr txBox="1"/>
+          <p:nvPr/>
+        </p:nvSpPr>
+        <p:spPr>
+          <a:xfrm>
+            <a:off x="8202168" y="6382512"/>
+            <a:ext cx="3182112" cy="256032"/>
+          </a:xfrm>
+          <a:prstGeom prst="rect">
+            <a:avLst/>
+          </a:prstGeom>
+          <a:noFill/>
+          <a:ln/>
+        </p:spPr>
+        <p:txBody>
+          <a:bodyPr wrap="square" lIns="0" tIns="0" rIns="0" bIns="0" rtlCol="0" anchor="ctr"/>
+          <a:lstStyle/>
+          <a:p>
+            <a:pPr algn="r" indent="0" marL="0">
+              <a:buNone/>
+            </a:pPr>
+            <a:r>
+              <a:rPr lang="en-US" sz="900" dirty="0">
+                <a:solidFill>
+                  <a:srgbClr val="8A8177"/>
+                </a:solidFill>
+                <a:latin typeface="Yu Gothic" pitchFamily="34" charset="0"/>
+                <a:ea typeface="Yu Gothic" pitchFamily="34" charset="-122"/>
+                <a:cs typeface="Yu Gothic" pitchFamily="34" charset="-120"/>
+              </a:rPr>
+              <a:t>演習</a:t>
             </a:r>
             <a:endParaRPr lang="en-US" sz="900" dirty="0"/>
           </a:p>

--- a/slides/pptx/第12回_AIを前提に事業を組み直す.pptx
+++ b/slides/pptx/第12回_AIを前提に事業を組み直す.pptx
@@ -17,9 +17,12 @@
     <p:sldId id="265" r:id="rId11"/>
     <p:sldId id="266" r:id="rId12"/>
     <p:sldId id="267" r:id="rId13"/>
+    <p:sldId id="268" r:id="rId14"/>
+    <p:sldId id="269" r:id="rId15"/>
+    <p:sldId id="270" r:id="rId16"/>
   </p:sldIdLst>
   <p:notesMasterIdLst>
-    <p:notesMasterId r:id="rId14"/>
+    <p:notesMasterId r:id="rId17"/>
   </p:notesMasterIdLst>
   <p:sldSz cx="12192000" cy="6858000"/>
   <p:notesSz cx="6858000" cy="12192000"/>
@@ -601,7 +604,7 @@
           <a:p>
             <a:r>
               <a:rPr lang="en-US" dirty="0"/>
-              <a:t>掲載許諾は必ず書面で。数値の公開範囲まで確認する。口頭の了解で事例に使わない。</a:t>
+              <a:t>12回を通しての共通言語の確認。ここが揃っていれば、修了後も社内で会話が成立する。</a:t>
             </a:r>
             <a:endParaRPr lang="en-US" dirty="0"/>
           </a:p>
@@ -689,7 +692,7 @@
           <a:p>
             <a:r>
               <a:rPr lang="en-US" dirty="0"/>
-              <a:t>最後のメッセージ。資料は読まず、自分の言葉で。この一言が、修了後の行動を左右する。</a:t>
+              <a:t>社員がいる時間帯と、退席後の作業を分ける。社員の前で内輪の作業を始めない。</a:t>
             </a:r>
             <a:endParaRPr lang="en-US" dirty="0"/>
           </a:p>
@@ -777,7 +780,7 @@
           <a:p>
             <a:r>
               <a:rPr lang="en-US" dirty="0"/>
-              <a:t>3か月後のフォローを、この場で日程まで仮押さえできると理想的。落ちるのは2か月目、と伝えておく。</a:t>
+              <a:t>掲載許諾は必ず書面で。数値の公開範囲まで確認する。口頭の了解で事例に使わない。</a:t>
             </a:r>
             <a:endParaRPr lang="en-US" dirty="0"/>
           </a:p>
@@ -801,6 +804,270 @@
             <a:fld id="{F7021451-1387-4CA6-816F-3879F97B5CBC}" type="slidenum">
               <a:rPr lang="en-US"/>
               <a:t>12</a:t>
+            </a:fld>
+            <a:endParaRPr lang="en-US"/>
+          </a:p>
+        </p:txBody>
+      </p:sp>
+    </p:spTree>
+    <p:extLst>
+      <p:ext uri="{BB962C8B-B14F-4D97-AF65-F5344CB8AC3E}">
+        <p14:creationId xmlns:p14="http://schemas.microsoft.com/office/powerpoint/2010/main" val="1024086991"/>
+      </p:ext>
+    </p:extLst>
+  </p:cSld>
+  <p:clrMapOvr>
+    <a:masterClrMapping/>
+  </p:clrMapOvr>
+</p:notes>
+</file>
+
+<file path=ppt/notesSlides/notesSlide13.xml><?xml version="1.0" encoding="utf-8"?>
+<p:notes xmlns:a="http://schemas.openxmlformats.org/drawingml/2006/main" xmlns:r="http://schemas.openxmlformats.org/officeDocument/2006/relationships" xmlns:p="http://schemas.openxmlformats.org/presentationml/2006/main">
+  <p:cSld>
+    <p:spTree>
+      <p:nvGrpSpPr>
+        <p:cNvPr id="1" name=""/>
+        <p:cNvGrpSpPr/>
+        <p:nvPr/>
+      </p:nvGrpSpPr>
+      <p:grpSpPr>
+        <a:xfrm>
+          <a:off x="0" y="0"/>
+          <a:ext cx="0" cy="0"/>
+          <a:chOff x="0" y="0"/>
+          <a:chExt cx="0" cy="0"/>
+        </a:xfrm>
+      </p:grpSpPr>
+      <p:sp>
+        <p:nvSpPr>
+          <p:cNvPr id="2" name="Slide Image Placeholder 1"/>
+          <p:cNvSpPr>
+            <a:spLocks noGrp="1" noRot="1" noChangeAspect="1"/>
+          </p:cNvSpPr>
+          <p:nvPr>
+            <p:ph type="sldImg"/>
+          </p:nvPr>
+        </p:nvSpPr>
+        <p:spPr/>
+      </p:sp>
+      <p:sp>
+        <p:nvSpPr>
+          <p:cNvPr id="3" name="Notes Placeholder 2"/>
+          <p:cNvSpPr>
+            <a:spLocks noGrp="1"/>
+          </p:cNvSpPr>
+          <p:nvPr>
+            <p:ph type="body" idx="1"/>
+          </p:nvPr>
+        </p:nvSpPr>
+        <p:spPr/>
+        <p:txBody>
+          <a:bodyPr/>
+          <a:lstStyle/>
+          <a:p>
+            <a:r>
+              <a:rPr lang="en-US" dirty="0"/>
+              <a:t>最後のメッセージ。資料は読まず、自分の言葉で。この一言が、修了後の行動を左右する。</a:t>
+            </a:r>
+            <a:endParaRPr lang="en-US" dirty="0"/>
+          </a:p>
+        </p:txBody>
+      </p:sp>
+      <p:sp>
+        <p:nvSpPr>
+          <p:cNvPr id="4" name="Slide Number Placeholder 3"/>
+          <p:cNvSpPr>
+            <a:spLocks noGrp="1"/>
+          </p:cNvSpPr>
+          <p:nvPr>
+            <p:ph type="sldNum" sz="quarter" idx="10"/>
+          </p:nvPr>
+        </p:nvSpPr>
+        <p:spPr/>
+        <p:txBody>
+          <a:bodyPr/>
+          <a:lstStyle/>
+          <a:p>
+            <a:fld id="{F7021451-1387-4CA6-816F-3879F97B5CBC}" type="slidenum">
+              <a:rPr lang="en-US"/>
+              <a:t>13</a:t>
+            </a:fld>
+            <a:endParaRPr lang="en-US"/>
+          </a:p>
+        </p:txBody>
+      </p:sp>
+    </p:spTree>
+    <p:extLst>
+      <p:ext uri="{BB962C8B-B14F-4D97-AF65-F5344CB8AC3E}">
+        <p14:creationId xmlns:p14="http://schemas.microsoft.com/office/powerpoint/2010/main" val="1024086991"/>
+      </p:ext>
+    </p:extLst>
+  </p:cSld>
+  <p:clrMapOvr>
+    <a:masterClrMapping/>
+  </p:clrMapOvr>
+</p:notes>
+</file>
+
+<file path=ppt/notesSlides/notesSlide14.xml><?xml version="1.0" encoding="utf-8"?>
+<p:notes xmlns:a="http://schemas.openxmlformats.org/drawingml/2006/main" xmlns:r="http://schemas.openxmlformats.org/officeDocument/2006/relationships" xmlns:p="http://schemas.openxmlformats.org/presentationml/2006/main">
+  <p:cSld>
+    <p:spTree>
+      <p:nvGrpSpPr>
+        <p:cNvPr id="1" name=""/>
+        <p:cNvGrpSpPr/>
+        <p:nvPr/>
+      </p:nvGrpSpPr>
+      <p:grpSpPr>
+        <a:xfrm>
+          <a:off x="0" y="0"/>
+          <a:ext cx="0" cy="0"/>
+          <a:chOff x="0" y="0"/>
+          <a:chExt cx="0" cy="0"/>
+        </a:xfrm>
+      </p:grpSpPr>
+      <p:sp>
+        <p:nvSpPr>
+          <p:cNvPr id="2" name="Slide Image Placeholder 1"/>
+          <p:cNvSpPr>
+            <a:spLocks noGrp="1" noRot="1" noChangeAspect="1"/>
+          </p:cNvSpPr>
+          <p:nvPr>
+            <p:ph type="sldImg"/>
+          </p:nvPr>
+        </p:nvSpPr>
+        <p:spPr/>
+      </p:sp>
+      <p:sp>
+        <p:nvSpPr>
+          <p:cNvPr id="3" name="Notes Placeholder 2"/>
+          <p:cNvSpPr>
+            <a:spLocks noGrp="1"/>
+          </p:cNvSpPr>
+          <p:nvPr>
+            <p:ph type="body" idx="1"/>
+          </p:nvPr>
+        </p:nvSpPr>
+        <p:spPr/>
+        <p:txBody>
+          <a:bodyPr/>
+          <a:lstStyle/>
+          <a:p>
+            <a:r>
+              <a:rPr lang="en-US" dirty="0"/>
+              <a:t>3か月後のフォロー日程を、この場で仮押さえできると理想的。カレンダーに入れてもらう。</a:t>
+            </a:r>
+            <a:endParaRPr lang="en-US" dirty="0"/>
+          </a:p>
+        </p:txBody>
+      </p:sp>
+      <p:sp>
+        <p:nvSpPr>
+          <p:cNvPr id="4" name="Slide Number Placeholder 3"/>
+          <p:cNvSpPr>
+            <a:spLocks noGrp="1"/>
+          </p:cNvSpPr>
+          <p:nvPr>
+            <p:ph type="sldNum" sz="quarter" idx="10"/>
+          </p:nvPr>
+        </p:nvSpPr>
+        <p:spPr/>
+        <p:txBody>
+          <a:bodyPr/>
+          <a:lstStyle/>
+          <a:p>
+            <a:fld id="{F7021451-1387-4CA6-816F-3879F97B5CBC}" type="slidenum">
+              <a:rPr lang="en-US"/>
+              <a:t>14</a:t>
+            </a:fld>
+            <a:endParaRPr lang="en-US"/>
+          </a:p>
+        </p:txBody>
+      </p:sp>
+    </p:spTree>
+    <p:extLst>
+      <p:ext uri="{BB962C8B-B14F-4D97-AF65-F5344CB8AC3E}">
+        <p14:creationId xmlns:p14="http://schemas.microsoft.com/office/powerpoint/2010/main" val="1024086991"/>
+      </p:ext>
+    </p:extLst>
+  </p:cSld>
+  <p:clrMapOvr>
+    <a:masterClrMapping/>
+  </p:clrMapOvr>
+</p:notes>
+</file>
+
+<file path=ppt/notesSlides/notesSlide15.xml><?xml version="1.0" encoding="utf-8"?>
+<p:notes xmlns:a="http://schemas.openxmlformats.org/drawingml/2006/main" xmlns:r="http://schemas.openxmlformats.org/officeDocument/2006/relationships" xmlns:p="http://schemas.openxmlformats.org/presentationml/2006/main">
+  <p:cSld>
+    <p:spTree>
+      <p:nvGrpSpPr>
+        <p:cNvPr id="1" name=""/>
+        <p:cNvGrpSpPr/>
+        <p:nvPr/>
+      </p:nvGrpSpPr>
+      <p:grpSpPr>
+        <a:xfrm>
+          <a:off x="0" y="0"/>
+          <a:ext cx="0" cy="0"/>
+          <a:chOff x="0" y="0"/>
+          <a:chExt cx="0" cy="0"/>
+        </a:xfrm>
+      </p:grpSpPr>
+      <p:sp>
+        <p:nvSpPr>
+          <p:cNvPr id="2" name="Slide Image Placeholder 1"/>
+          <p:cNvSpPr>
+            <a:spLocks noGrp="1" noRot="1" noChangeAspect="1"/>
+          </p:cNvSpPr>
+          <p:nvPr>
+            <p:ph type="sldImg"/>
+          </p:nvPr>
+        </p:nvSpPr>
+        <p:spPr/>
+      </p:sp>
+      <p:sp>
+        <p:nvSpPr>
+          <p:cNvPr id="3" name="Notes Placeholder 2"/>
+          <p:cNvSpPr>
+            <a:spLocks noGrp="1"/>
+          </p:cNvSpPr>
+          <p:nvPr>
+            <p:ph type="body" idx="1"/>
+          </p:nvPr>
+        </p:nvSpPr>
+        <p:spPr/>
+        <p:txBody>
+          <a:bodyPr/>
+          <a:lstStyle/>
+          <a:p>
+            <a:r>
+              <a:rPr lang="en-US" dirty="0"/>
+              <a:t>3か月後のフォローを、この場で日程まで仮押さえできると理想的。落ちるのは2か月目、と伝えておく。</a:t>
+            </a:r>
+            <a:endParaRPr lang="en-US" dirty="0"/>
+          </a:p>
+        </p:txBody>
+      </p:sp>
+      <p:sp>
+        <p:nvSpPr>
+          <p:cNvPr id="4" name="Slide Number Placeholder 3"/>
+          <p:cNvSpPr>
+            <a:spLocks noGrp="1"/>
+          </p:cNvSpPr>
+          <p:nvPr>
+            <p:ph type="sldNum" sz="quarter" idx="10"/>
+          </p:nvPr>
+        </p:nvSpPr>
+        <p:spPr/>
+        <p:txBody>
+          <a:bodyPr/>
+          <a:lstStyle/>
+          <a:p>
+            <a:fld id="{F7021451-1387-4CA6-816F-3879F97B5CBC}" type="slidenum">
+              <a:rPr lang="en-US"/>
+              <a:t>15</a:t>
             </a:fld>
             <a:endParaRPr lang="en-US"/>
           </a:p>
@@ -1481,7 +1748,7 @@
           <a:p>
             <a:r>
               <a:rPr lang="en-US" dirty="0"/>
-              <a:t>社員がいる時間帯と、退席後の作業を分ける。社員の前で内輪の作業を始めない。</a:t>
+              <a:t>社員向け。3つ目（やめることもあるか）に正直に答えると、かえって信頼される。無理に続ける前提で話さない。</a:t>
             </a:r>
             <a:endParaRPr lang="en-US" dirty="0"/>
           </a:p>
@@ -2175,13 +2442,13 @@
             <a:r>
               <a:rPr lang="en-US" sz="1100" b="1" spc="250" kern="0" dirty="0">
                 <a:solidFill>
-                  <a:srgbClr val="3B6B4A"/>
-                </a:solidFill>
-                <a:latin typeface="Yu Gothic" pitchFamily="34" charset="0"/>
-                <a:ea typeface="Yu Gothic" pitchFamily="34" charset="-122"/>
-                <a:cs typeface="Yu Gothic" pitchFamily="34" charset="-120"/>
-              </a:rPr>
-              <a:t>業務への組み込み</a:t>
+                  <a:srgbClr val="8A8177"/>
+                </a:solidFill>
+                <a:latin typeface="Yu Gothic" pitchFamily="34" charset="0"/>
+                <a:ea typeface="Yu Gothic" pitchFamily="34" charset="-122"/>
+                <a:cs typeface="Yu Gothic" pitchFamily="34" charset="-120"/>
+              </a:rPr>
+              <a:t>用語</a:t>
             </a:r>
             <a:endParaRPr lang="en-US" sz="1100" dirty="0"/>
           </a:p>
@@ -2220,7 +2487,7 @@
                 <a:ea typeface="Yu Gothic" pitchFamily="34" charset="-122"/>
                 <a:cs typeface="Yu Gothic" pitchFamily="34" charset="-120"/>
               </a:rPr>
-              <a:t>修了時にすること</a:t>
+              <a:t>この12回で使った言葉</a:t>
             </a:r>
             <a:endParaRPr lang="en-US" sz="2600" dirty="0"/>
           </a:p>
@@ -2228,53 +2495,14 @@
       </p:sp>
       <p:sp>
         <p:nvSpPr>
-          <p:cNvPr id="4" name="Text 2"/>
-          <p:cNvSpPr txBox="1"/>
-          <p:nvPr/>
-        </p:nvSpPr>
-        <p:spPr>
-          <a:xfrm>
-            <a:off x="777240" y="1572768"/>
-            <a:ext cx="10607040" cy="320040"/>
-          </a:xfrm>
-          <a:prstGeom prst="rect">
-            <a:avLst/>
-          </a:prstGeom>
-          <a:noFill/>
-          <a:ln/>
-        </p:spPr>
-        <p:txBody>
-          <a:bodyPr wrap="square" lIns="0" tIns="0" rIns="0" bIns="0" rtlCol="0" anchor="ctr"/>
-          <a:lstStyle/>
-          <a:p>
-            <a:pPr indent="0" marL="0">
-              <a:buNone/>
-            </a:pPr>
-            <a:r>
-              <a:rPr lang="en-US" sz="1250" b="1" dirty="0">
-                <a:solidFill>
-                  <a:srgbClr val="3B6B4A"/>
-                </a:solidFill>
-                <a:latin typeface="Yu Gothic" pitchFamily="34" charset="0"/>
-                <a:ea typeface="Yu Gothic" pitchFamily="34" charset="-122"/>
-                <a:cs typeface="Yu Gothic" pitchFamily="34" charset="-120"/>
-              </a:rPr>
-              <a:t>ここを決めないと、持ち帰っても使われません。紙に書きます。</a:t>
-            </a:r>
-            <a:endParaRPr lang="en-US" sz="1250" dirty="0"/>
-          </a:p>
-        </p:txBody>
-      </p:sp>
-      <p:sp>
-        <p:nvSpPr>
-          <p:cNvPr id="5" name="Shape 3"/>
+          <p:cNvPr id="4" name="Shape 2"/>
           <p:cNvSpPr/>
           <p:nvPr/>
         </p:nvSpPr>
         <p:spPr>
           <a:xfrm>
-            <a:off x="777240" y="2103120"/>
-            <a:ext cx="10607040" cy="914400"/>
+            <a:off x="777240" y="1828800"/>
+            <a:ext cx="10607040" cy="1078992"/>
           </a:xfrm>
           <a:prstGeom prst="rect">
             <a:avLst/>
@@ -2292,20 +2520,59 @@
       </p:sp>
       <p:sp>
         <p:nvSpPr>
+          <p:cNvPr id="5" name="Text 3"/>
+          <p:cNvSpPr txBox="1"/>
+          <p:nvPr/>
+        </p:nvSpPr>
+        <p:spPr>
+          <a:xfrm>
+            <a:off x="1097280" y="1920240"/>
+            <a:ext cx="2969971" cy="896112"/>
+          </a:xfrm>
+          <a:prstGeom prst="rect">
+            <a:avLst/>
+          </a:prstGeom>
+          <a:noFill/>
+          <a:ln/>
+        </p:spPr>
+        <p:txBody>
+          <a:bodyPr wrap="square" lIns="0" tIns="0" rIns="0" bIns="0" rtlCol="0" anchor="ctr"/>
+          <a:lstStyle/>
+          <a:p>
+            <a:pPr indent="0" marL="0">
+              <a:buNone/>
+            </a:pPr>
+            <a:r>
+              <a:rPr lang="en-US" sz="1500" b="1" dirty="0">
+                <a:solidFill>
+                  <a:srgbClr val="23201D"/>
+                </a:solidFill>
+                <a:latin typeface="Yu Gothic" pitchFamily="34" charset="0"/>
+                <a:ea typeface="Yu Gothic" pitchFamily="34" charset="-122"/>
+                <a:cs typeface="Yu Gothic" pitchFamily="34" charset="-120"/>
+              </a:rPr>
+              <a:t>指示の型</a:t>
+            </a:r>
+            <a:endParaRPr lang="en-US" sz="1500" dirty="0"/>
+          </a:p>
+        </p:txBody>
+      </p:sp>
+      <p:sp>
+        <p:nvSpPr>
           <p:cNvPr id="6" name="Shape 4"/>
           <p:cNvSpPr/>
           <p:nvPr/>
         </p:nvSpPr>
         <p:spPr>
           <a:xfrm>
-            <a:off x="777240" y="2103120"/>
-            <a:ext cx="54864" cy="914400"/>
+            <a:off x="4065422" y="1956816"/>
+            <a:ext cx="18288" cy="822960"/>
           </a:xfrm>
           <a:prstGeom prst="rect">
             <a:avLst/>
           </a:prstGeom>
           <a:solidFill>
-            <a:srgbClr val="3B6B4A"/>
+            <a:srgbClr val="EDE7DB"/>
           </a:solidFill>
           <a:ln w="12700">
             <a:solidFill>
@@ -2323,47 +2590,8 @@
         </p:nvSpPr>
         <p:spPr>
           <a:xfrm>
-            <a:off x="1143000" y="2176272"/>
-            <a:ext cx="2757830" cy="768096"/>
-          </a:xfrm>
-          <a:prstGeom prst="rect">
-            <a:avLst/>
-          </a:prstGeom>
-          <a:noFill/>
-          <a:ln/>
-        </p:spPr>
-        <p:txBody>
-          <a:bodyPr wrap="square" lIns="0" tIns="0" rIns="0" bIns="0" rtlCol="0" anchor="ctr"/>
-          <a:lstStyle/>
-          <a:p>
-            <a:pPr indent="0" marL="0">
-              <a:buNone/>
-            </a:pPr>
-            <a:r>
-              <a:rPr lang="en-US" sz="1400" b="1" dirty="0">
-                <a:solidFill>
-                  <a:srgbClr val="3B6B4A"/>
-                </a:solidFill>
-                <a:latin typeface="Yu Gothic" pitchFamily="34" charset="0"/>
-                <a:ea typeface="Yu Gothic" pitchFamily="34" charset="-122"/>
-                <a:cs typeface="Yu Gothic" pitchFamily="34" charset="-120"/>
-              </a:rPr>
-              <a:t>診断をもう一度</a:t>
-            </a:r>
-            <a:endParaRPr lang="en-US" sz="1400" dirty="0"/>
-          </a:p>
-        </p:txBody>
-      </p:sp>
-      <p:sp>
-        <p:nvSpPr>
-          <p:cNvPr id="8" name="Text 6"/>
-          <p:cNvSpPr txBox="1"/>
-          <p:nvPr/>
-        </p:nvSpPr>
-        <p:spPr>
-          <a:xfrm>
-            <a:off x="4006901" y="2176272"/>
-            <a:ext cx="7011619" cy="768096"/>
+            <a:off x="4383634" y="1920240"/>
+            <a:ext cx="6682435" cy="896112"/>
           </a:xfrm>
           <a:prstGeom prst="rect">
             <a:avLst/>
@@ -2384,13 +2612,13 @@
             <a:r>
               <a:rPr lang="en-US" sz="1250" dirty="0">
                 <a:solidFill>
-                  <a:srgbClr val="3F3933"/>
-                </a:solidFill>
-                <a:latin typeface="Yu Gothic" pitchFamily="34" charset="0"/>
-                <a:ea typeface="Yu Gothic" pitchFamily="34" charset="-122"/>
-                <a:cs typeface="Yu Gothic" pitchFamily="34" charset="-120"/>
-              </a:rPr>
-              <a:t>受講前と同じ設問です。点数の伸びが、そのまま効果測定になります</a:t>
+                  <a:srgbClr val="5A534A"/>
+                </a:solidFill>
+                <a:latin typeface="Yu Gothic" pitchFamily="34" charset="0"/>
+                <a:ea typeface="Yu Gothic" pitchFamily="34" charset="-122"/>
+                <a:cs typeface="Yu Gothic" pitchFamily="34" charset="-120"/>
+              </a:rPr>
+              <a:t>役割・前提・依頼・制約・出力形式の5要素。すべての出発点です</a:t>
             </a:r>
             <a:endParaRPr lang="en-US" sz="1250" dirty="0"/>
           </a:p>
@@ -2398,14 +2626,14 @@
       </p:sp>
       <p:sp>
         <p:nvSpPr>
-          <p:cNvPr id="9" name="Shape 7"/>
+          <p:cNvPr id="8" name="Shape 6"/>
           <p:cNvSpPr/>
           <p:nvPr/>
         </p:nvSpPr>
         <p:spPr>
           <a:xfrm>
-            <a:off x="777240" y="3154680"/>
-            <a:ext cx="10607040" cy="914400"/>
+            <a:off x="777240" y="3063240"/>
+            <a:ext cx="10607040" cy="1078992"/>
           </a:xfrm>
           <a:prstGeom prst="rect">
             <a:avLst/>
@@ -2423,20 +2651,59 @@
       </p:sp>
       <p:sp>
         <p:nvSpPr>
+          <p:cNvPr id="9" name="Text 7"/>
+          <p:cNvSpPr txBox="1"/>
+          <p:nvPr/>
+        </p:nvSpPr>
+        <p:spPr>
+          <a:xfrm>
+            <a:off x="1097280" y="3154680"/>
+            <a:ext cx="2969971" cy="896112"/>
+          </a:xfrm>
+          <a:prstGeom prst="rect">
+            <a:avLst/>
+          </a:prstGeom>
+          <a:noFill/>
+          <a:ln/>
+        </p:spPr>
+        <p:txBody>
+          <a:bodyPr wrap="square" lIns="0" tIns="0" rIns="0" bIns="0" rtlCol="0" anchor="ctr"/>
+          <a:lstStyle/>
+          <a:p>
+            <a:pPr indent="0" marL="0">
+              <a:buNone/>
+            </a:pPr>
+            <a:r>
+              <a:rPr lang="en-US" sz="1500" b="1" dirty="0">
+                <a:solidFill>
+                  <a:srgbClr val="23201D"/>
+                </a:solidFill>
+                <a:latin typeface="Yu Gothic" pitchFamily="34" charset="0"/>
+                <a:ea typeface="Yu Gothic" pitchFamily="34" charset="-122"/>
+                <a:cs typeface="Yu Gothic" pitchFamily="34" charset="-120"/>
+              </a:rPr>
+              <a:t>確認ポイント</a:t>
+            </a:r>
+            <a:endParaRPr lang="en-US" sz="1500" dirty="0"/>
+          </a:p>
+        </p:txBody>
+      </p:sp>
+      <p:sp>
+        <p:nvSpPr>
           <p:cNvPr id="10" name="Shape 8"/>
           <p:cNvSpPr/>
           <p:nvPr/>
         </p:nvSpPr>
         <p:spPr>
           <a:xfrm>
-            <a:off x="777240" y="3154680"/>
-            <a:ext cx="54864" cy="914400"/>
+            <a:off x="4065422" y="3191256"/>
+            <a:ext cx="18288" cy="822960"/>
           </a:xfrm>
           <a:prstGeom prst="rect">
             <a:avLst/>
           </a:prstGeom>
           <a:solidFill>
-            <a:srgbClr val="3B6B4A"/>
+            <a:srgbClr val="EDE7DB"/>
           </a:solidFill>
           <a:ln w="12700">
             <a:solidFill>
@@ -2454,47 +2721,8 @@
         </p:nvSpPr>
         <p:spPr>
           <a:xfrm>
-            <a:off x="1143000" y="3227832"/>
-            <a:ext cx="2757830" cy="768096"/>
-          </a:xfrm>
-          <a:prstGeom prst="rect">
-            <a:avLst/>
-          </a:prstGeom>
-          <a:noFill/>
-          <a:ln/>
-        </p:spPr>
-        <p:txBody>
-          <a:bodyPr wrap="square" lIns="0" tIns="0" rIns="0" bIns="0" rtlCol="0" anchor="ctr"/>
-          <a:lstStyle/>
-          <a:p>
-            <a:pPr indent="0" marL="0">
-              <a:buNone/>
-            </a:pPr>
-            <a:r>
-              <a:rPr lang="en-US" sz="1400" b="1" dirty="0">
-                <a:solidFill>
-                  <a:srgbClr val="3B6B4A"/>
-                </a:solidFill>
-                <a:latin typeface="Yu Gothic" pitchFamily="34" charset="0"/>
-                <a:ea typeface="Yu Gothic" pitchFamily="34" charset="-122"/>
-                <a:cs typeface="Yu Gothic" pitchFamily="34" charset="-120"/>
-              </a:rPr>
-              <a:t>成果報告シートの記入</a:t>
-            </a:r>
-            <a:endParaRPr lang="en-US" sz="1400" dirty="0"/>
-          </a:p>
-        </p:txBody>
-      </p:sp>
-      <p:sp>
-        <p:nvSpPr>
-          <p:cNvPr id="12" name="Text 10"/>
-          <p:cNvSpPr txBox="1"/>
-          <p:nvPr/>
-        </p:nvSpPr>
-        <p:spPr>
-          <a:xfrm>
-            <a:off x="4006901" y="3227832"/>
-            <a:ext cx="7011619" cy="768096"/>
+            <a:off x="4383634" y="3154680"/>
+            <a:ext cx="6682435" cy="896112"/>
           </a:xfrm>
           <a:prstGeom prst="rect">
             <a:avLst/>
@@ -2515,13 +2743,13 @@
             <a:r>
               <a:rPr lang="en-US" sz="1250" dirty="0">
                 <a:solidFill>
-                  <a:srgbClr val="3F3933"/>
-                </a:solidFill>
-                <a:latin typeface="Yu Gothic" pitchFamily="34" charset="0"/>
-                <a:ea typeface="Yu Gothic" pitchFamily="34" charset="-122"/>
-                <a:cs typeface="Yu Gothic" pitchFamily="34" charset="-120"/>
-              </a:rPr>
-              <a:t>削減時間と社員の反応を数字に。うまくいかなかったことも書いてください</a:t>
+                  <a:srgbClr val="5A534A"/>
+                </a:solidFill>
+                <a:latin typeface="Yu Gothic" pitchFamily="34" charset="0"/>
+                <a:ea typeface="Yu Gothic" pitchFamily="34" charset="-122"/>
+                <a:cs typeface="Yu Gothic" pitchFamily="34" charset="-120"/>
+              </a:rPr>
+              <a:t>人が止める場所。金額・社外・不可逆の前に置きます</a:t>
             </a:r>
             <a:endParaRPr lang="en-US" sz="1250" dirty="0"/>
           </a:p>
@@ -2529,14 +2757,14 @@
       </p:sp>
       <p:sp>
         <p:nvSpPr>
-          <p:cNvPr id="13" name="Shape 11"/>
+          <p:cNvPr id="12" name="Shape 10"/>
           <p:cNvSpPr/>
           <p:nvPr/>
         </p:nvSpPr>
         <p:spPr>
           <a:xfrm>
-            <a:off x="777240" y="4206240"/>
-            <a:ext cx="10607040" cy="914400"/>
+            <a:off x="777240" y="4297680"/>
+            <a:ext cx="10607040" cy="1078992"/>
           </a:xfrm>
           <a:prstGeom prst="rect">
             <a:avLst/>
@@ -2554,20 +2782,59 @@
       </p:sp>
       <p:sp>
         <p:nvSpPr>
+          <p:cNvPr id="13" name="Text 11"/>
+          <p:cNvSpPr txBox="1"/>
+          <p:nvPr/>
+        </p:nvSpPr>
+        <p:spPr>
+          <a:xfrm>
+            <a:off x="1097280" y="4389120"/>
+            <a:ext cx="2969971" cy="896112"/>
+          </a:xfrm>
+          <a:prstGeom prst="rect">
+            <a:avLst/>
+          </a:prstGeom>
+          <a:noFill/>
+          <a:ln/>
+        </p:spPr>
+        <p:txBody>
+          <a:bodyPr wrap="square" lIns="0" tIns="0" rIns="0" bIns="0" rtlCol="0" anchor="ctr"/>
+          <a:lstStyle/>
+          <a:p>
+            <a:pPr indent="0" marL="0">
+              <a:buNone/>
+            </a:pPr>
+            <a:r>
+              <a:rPr lang="en-US" sz="1500" b="1" dirty="0">
+                <a:solidFill>
+                  <a:srgbClr val="23201D"/>
+                </a:solidFill>
+                <a:latin typeface="Yu Gothic" pitchFamily="34" charset="0"/>
+                <a:ea typeface="Yu Gothic" pitchFamily="34" charset="-122"/>
+                <a:cs typeface="Yu Gothic" pitchFamily="34" charset="-120"/>
+              </a:rPr>
+              <a:t>正解セット</a:t>
+            </a:r>
+            <a:endParaRPr lang="en-US" sz="1500" dirty="0"/>
+          </a:p>
+        </p:txBody>
+      </p:sp>
+      <p:sp>
+        <p:nvSpPr>
           <p:cNvPr id="14" name="Shape 12"/>
           <p:cNvSpPr/>
           <p:nvPr/>
         </p:nvSpPr>
         <p:spPr>
           <a:xfrm>
-            <a:off x="777240" y="4206240"/>
-            <a:ext cx="54864" cy="914400"/>
+            <a:off x="4065422" y="4425696"/>
+            <a:ext cx="18288" cy="822960"/>
           </a:xfrm>
           <a:prstGeom prst="rect">
             <a:avLst/>
           </a:prstGeom>
           <a:solidFill>
-            <a:srgbClr val="3B6B4A"/>
+            <a:srgbClr val="EDE7DB"/>
           </a:solidFill>
           <a:ln w="12700">
             <a:solidFill>
@@ -2585,47 +2852,8 @@
         </p:nvSpPr>
         <p:spPr>
           <a:xfrm>
-            <a:off x="1143000" y="4279392"/>
-            <a:ext cx="2757830" cy="768096"/>
-          </a:xfrm>
-          <a:prstGeom prst="rect">
-            <a:avLst/>
-          </a:prstGeom>
-          <a:noFill/>
-          <a:ln/>
-        </p:spPr>
-        <p:txBody>
-          <a:bodyPr wrap="square" lIns="0" tIns="0" rIns="0" bIns="0" rtlCol="0" anchor="ctr"/>
-          <a:lstStyle/>
-          <a:p>
-            <a:pPr indent="0" marL="0">
-              <a:buNone/>
-            </a:pPr>
-            <a:r>
-              <a:rPr lang="en-US" sz="1400" b="1" dirty="0">
-                <a:solidFill>
-                  <a:srgbClr val="3B6B4A"/>
-                </a:solidFill>
-                <a:latin typeface="Yu Gothic" pitchFamily="34" charset="0"/>
-                <a:ea typeface="Yu Gothic" pitchFamily="34" charset="-122"/>
-                <a:cs typeface="Yu Gothic" pitchFamily="34" charset="-120"/>
-              </a:rPr>
-              <a:t>掲載の許諾確認</a:t>
-            </a:r>
-            <a:endParaRPr lang="en-US" sz="1400" dirty="0"/>
-          </a:p>
-        </p:txBody>
-      </p:sp>
-      <p:sp>
-        <p:nvSpPr>
-          <p:cNvPr id="16" name="Text 14"/>
-          <p:cNvSpPr txBox="1"/>
-          <p:nvPr/>
-        </p:nvSpPr>
-        <p:spPr>
-          <a:xfrm>
-            <a:off x="4006901" y="4279392"/>
-            <a:ext cx="7011619" cy="768096"/>
+            <a:off x="4383634" y="4389120"/>
+            <a:ext cx="6682435" cy="896112"/>
           </a:xfrm>
           <a:prstGeom prst="rect">
             <a:avLst/>
@@ -2646,15 +2874,54 @@
             <a:r>
               <a:rPr lang="en-US" sz="1250" dirty="0">
                 <a:solidFill>
-                  <a:srgbClr val="3F3933"/>
-                </a:solidFill>
-                <a:latin typeface="Yu Gothic" pitchFamily="34" charset="0"/>
-                <a:ea typeface="Yu Gothic" pitchFamily="34" charset="-122"/>
-                <a:cs typeface="Yu Gothic" pitchFamily="34" charset="-120"/>
-              </a:rPr>
-              <a:t>事例として使う場合は、社名を出さず「従業員◯名の◯◯業」の形で。数値の公開範囲も確認します</a:t>
+                  <a:srgbClr val="5A534A"/>
+                </a:solidFill>
+                <a:latin typeface="Yu Gothic" pitchFamily="34" charset="0"/>
+                <a:ea typeface="Yu Gothic" pitchFamily="34" charset="-122"/>
+                <a:cs typeface="Yu Gothic" pitchFamily="34" charset="-120"/>
+              </a:rPr>
+              <a:t>毎月同じ10件で採点する仕組み。品質を数字で語るための道具です</a:t>
             </a:r>
             <a:endParaRPr lang="en-US" sz="1250" dirty="0"/>
+          </a:p>
+        </p:txBody>
+      </p:sp>
+      <p:sp>
+        <p:nvSpPr>
+          <p:cNvPr id="16" name="Text 14"/>
+          <p:cNvSpPr txBox="1"/>
+          <p:nvPr/>
+        </p:nvSpPr>
+        <p:spPr>
+          <a:xfrm>
+            <a:off x="777240" y="5623560"/>
+            <a:ext cx="10607040" cy="411480"/>
+          </a:xfrm>
+          <a:prstGeom prst="rect">
+            <a:avLst/>
+          </a:prstGeom>
+          <a:noFill/>
+          <a:ln/>
+        </p:spPr>
+        <p:txBody>
+          <a:bodyPr wrap="square" lIns="0" tIns="0" rIns="0" bIns="0" rtlCol="0" anchor="ctr"/>
+          <a:lstStyle/>
+          <a:p>
+            <a:pPr indent="0" marL="0">
+              <a:buNone/>
+            </a:pPr>
+            <a:r>
+              <a:rPr lang="en-US" sz="1150" dirty="0">
+                <a:solidFill>
+                  <a:srgbClr val="8A8177"/>
+                </a:solidFill>
+                <a:latin typeface="Yu Gothic" pitchFamily="34" charset="0"/>
+                <a:ea typeface="Yu Gothic" pitchFamily="34" charset="-122"/>
+                <a:cs typeface="Yu Gothic" pitchFamily="34" charset="-120"/>
+              </a:rPr>
+              <a:t>配布した用語辞典にも同じものが載っています。覚える必要はありません。</a:t>
+            </a:r>
+            <a:endParaRPr lang="en-US" sz="1150" dirty="0"/>
           </a:p>
         </p:txBody>
       </p:sp>
@@ -2730,7 +2997,7 @@
                 <a:ea typeface="Yu Gothic" pitchFamily="34" charset="-122"/>
                 <a:cs typeface="Yu Gothic" pitchFamily="34" charset="-120"/>
               </a:rPr>
-              <a:t>組み込み</a:t>
+              <a:t>用語</a:t>
             </a:r>
             <a:endParaRPr lang="en-US" sz="900" dirty="0"/>
           </a:p>
@@ -2795,13 +3062,13 @@
             <a:r>
               <a:rPr lang="en-US" sz="1100" b="1" spc="250" kern="0" dirty="0">
                 <a:solidFill>
-                  <a:srgbClr val="B04A2F"/>
-                </a:solidFill>
-                <a:latin typeface="Yu Gothic" pitchFamily="34" charset="0"/>
-                <a:ea typeface="Yu Gothic" pitchFamily="34" charset="-122"/>
-                <a:cs typeface="Yu Gothic" pitchFamily="34" charset="-120"/>
-              </a:rPr>
-              <a:t>ここだけは</a:t>
+                  <a:srgbClr val="2F4F6B"/>
+                </a:solidFill>
+                <a:latin typeface="Yu Gothic" pitchFamily="34" charset="0"/>
+                <a:ea typeface="Yu Gothic" pitchFamily="34" charset="-122"/>
+                <a:cs typeface="Yu Gothic" pitchFamily="34" charset="-120"/>
+              </a:rPr>
+              <a:t>演習</a:t>
             </a:r>
             <a:endParaRPr lang="en-US" sz="1100" dirty="0"/>
           </a:p>
@@ -2815,7 +3082,7 @@
         </p:nvSpPr>
         <p:spPr>
           <a:xfrm>
-            <a:off x="777240" y="1097280"/>
+            <a:off x="777240" y="896112"/>
             <a:ext cx="10607040" cy="640080"/>
           </a:xfrm>
           <a:prstGeom prst="rect">
@@ -2840,7 +3107,7 @@
                 <a:ea typeface="Yu Gothic" pitchFamily="34" charset="-122"/>
                 <a:cs typeface="Yu Gothic" pitchFamily="34" charset="-120"/>
               </a:rPr>
-              <a:t>最後に、ひとつだけ</a:t>
+              <a:t>今日の流れ</a:t>
             </a:r>
             <a:endParaRPr lang="en-US" sz="2600" dirty="0"/>
           </a:p>
@@ -2848,20 +3115,84 @@
       </p:sp>
       <p:sp>
         <p:nvSpPr>
-          <p:cNvPr id="4" name="Shape 2"/>
+          <p:cNvPr id="4" name="Text 2"/>
+          <p:cNvSpPr txBox="1"/>
+          <p:nvPr/>
+        </p:nvSpPr>
+        <p:spPr>
+          <a:xfrm>
+            <a:off x="777240" y="1572768"/>
+            <a:ext cx="10607040" cy="320040"/>
+          </a:xfrm>
+          <a:prstGeom prst="rect">
+            <a:avLst/>
+          </a:prstGeom>
+          <a:noFill/>
+          <a:ln/>
+        </p:spPr>
+        <p:txBody>
+          <a:bodyPr wrap="square" lIns="0" tIns="0" rIns="0" bIns="0" rtlCol="0" anchor="ctr"/>
+          <a:lstStyle/>
+          <a:p>
+            <a:pPr indent="0" marL="0">
+              <a:buNone/>
+            </a:pPr>
+            <a:r>
+              <a:rPr lang="en-US" sz="1250" b="1" dirty="0">
+                <a:solidFill>
+                  <a:srgbClr val="2F4F6B"/>
+                </a:solidFill>
+                <a:latin typeface="Yu Gothic" pitchFamily="34" charset="0"/>
+                <a:ea typeface="Yu Gothic" pitchFamily="34" charset="-122"/>
+                <a:cs typeface="Yu Gothic" pitchFamily="34" charset="-120"/>
+              </a:rPr>
+              <a:t>55分。操作するのはご自身です。</a:t>
+            </a:r>
+            <a:endParaRPr lang="en-US" sz="1250" dirty="0"/>
+          </a:p>
+        </p:txBody>
+      </p:sp>
+      <p:sp>
+        <p:nvSpPr>
+          <p:cNvPr id="5" name="Shape 3"/>
           <p:cNvSpPr/>
           <p:nvPr/>
         </p:nvSpPr>
         <p:spPr>
           <a:xfrm>
             <a:off x="777240" y="2148840"/>
-            <a:ext cx="64008" cy="2194560"/>
+            <a:ext cx="3383280" cy="2880360"/>
           </a:xfrm>
           <a:prstGeom prst="rect">
             <a:avLst/>
           </a:prstGeom>
           <a:solidFill>
-            <a:srgbClr val="B04A2F"/>
+            <a:srgbClr val="FFFFFF"/>
+          </a:solidFill>
+          <a:ln w="12700">
+            <a:solidFill>
+              <a:srgbClr val="EDE7DB"/>
+            </a:solidFill>
+            <a:prstDash val="solid"/>
+          </a:ln>
+        </p:spPr>
+      </p:sp>
+      <p:sp>
+        <p:nvSpPr>
+          <p:cNvPr id="6" name="Shape 4"/>
+          <p:cNvSpPr/>
+          <p:nvPr/>
+        </p:nvSpPr>
+        <p:spPr>
+          <a:xfrm>
+            <a:off x="1051560" y="2395728"/>
+            <a:ext cx="438912" cy="438912"/>
+          </a:xfrm>
+          <a:prstGeom prst="ellipse">
+            <a:avLst/>
+          </a:prstGeom>
+          <a:solidFill>
+            <a:srgbClr val="2F4F6B"/>
           </a:solidFill>
           <a:ln w="12700">
             <a:solidFill>
@@ -2873,14 +3204,53 @@
       </p:sp>
       <p:sp>
         <p:nvSpPr>
-          <p:cNvPr id="5" name="Text 3"/>
-          <p:cNvSpPr txBox="1"/>
-          <p:nvPr/>
-        </p:nvSpPr>
-        <p:spPr>
-          <a:xfrm>
-            <a:off x="1188720" y="2148840"/>
-            <a:ext cx="9966960" cy="2194560"/>
+          <p:cNvPr id="7" name="Text 5"/>
+          <p:cNvSpPr txBox="1"/>
+          <p:nvPr/>
+        </p:nvSpPr>
+        <p:spPr>
+          <a:xfrm>
+            <a:off x="1051560" y="2395728"/>
+            <a:ext cx="438912" cy="438912"/>
+          </a:xfrm>
+          <a:prstGeom prst="rect">
+            <a:avLst/>
+          </a:prstGeom>
+          <a:noFill/>
+          <a:ln/>
+        </p:spPr>
+        <p:txBody>
+          <a:bodyPr wrap="square" lIns="0" tIns="0" rIns="0" bIns="0" rtlCol="0" anchor="ctr"/>
+          <a:lstStyle/>
+          <a:p>
+            <a:pPr algn="ctr" indent="0" marL="0">
+              <a:buNone/>
+            </a:pPr>
+            <a:r>
+              <a:rPr lang="en-US" sz="1300" b="1" dirty="0">
+                <a:solidFill>
+                  <a:srgbClr val="FFFFFF"/>
+                </a:solidFill>
+                <a:latin typeface="Yu Gothic" pitchFamily="34" charset="0"/>
+                <a:ea typeface="Yu Gothic" pitchFamily="34" charset="-122"/>
+                <a:cs typeface="Yu Gothic" pitchFamily="34" charset="-120"/>
+              </a:rPr>
+              <a:t>1</a:t>
+            </a:r>
+            <a:endParaRPr lang="en-US" sz="1300" dirty="0"/>
+          </a:p>
+        </p:txBody>
+      </p:sp>
+      <p:sp>
+        <p:nvSpPr>
+          <p:cNvPr id="8" name="Text 6"/>
+          <p:cNvSpPr txBox="1"/>
+          <p:nvPr/>
+        </p:nvSpPr>
+        <p:spPr>
+          <a:xfrm>
+            <a:off x="1051560" y="2944368"/>
+            <a:ext cx="2834640" cy="731520"/>
           </a:xfrm>
           <a:prstGeom prst="rect">
             <a:avLst/>
@@ -2894,41 +3264,108 @@
           <a:p>
             <a:pPr indent="0" marL="0">
               <a:lnSpc>
-                <a:spcPct val="160000"/>
+                <a:spcPct val="125000"/>
               </a:lnSpc>
               <a:buNone/>
             </a:pPr>
             <a:r>
-              <a:rPr lang="en-US" sz="1650" dirty="0">
-                <a:solidFill>
-                  <a:srgbClr val="3F3933"/>
-                </a:solidFill>
-                <a:latin typeface="Yu Gothic" pitchFamily="34" charset="0"/>
-                <a:ea typeface="Yu Gothic" pitchFamily="34" charset="-122"/>
-                <a:cs typeface="Yu Gothic" pitchFamily="34" charset="-120"/>
-              </a:rPr>
-              <a:t>この12回で最も効いたのは、講座の中で作ったものを翌日に一度使ってみることでした。使わなかったものは、どれだけよくできていても2週間で忘れます。逆に、一度でも実務で使えば、それは御社の仕組みになります。これから作るものについても、同じです。</a:t>
-            </a:r>
-            <a:endParaRPr lang="en-US" sz="1650" dirty="0"/>
-          </a:p>
-        </p:txBody>
-      </p:sp>
-      <p:sp>
-        <p:nvSpPr>
-          <p:cNvPr id="6" name="Shape 4"/>
+              <a:rPr lang="en-US" sz="1450" b="1" dirty="0">
+                <a:solidFill>
+                  <a:srgbClr val="23201D"/>
+                </a:solidFill>
+                <a:latin typeface="Yu Gothic" pitchFamily="34" charset="0"/>
+                <a:ea typeface="Yu Gothic" pitchFamily="34" charset="-122"/>
+                <a:cs typeface="Yu Gothic" pitchFamily="34" charset="-120"/>
+              </a:rPr>
+              <a:t>作ったものを全部並べる</a:t>
+            </a:r>
+            <a:endParaRPr lang="en-US" sz="1450" dirty="0"/>
+          </a:p>
+        </p:txBody>
+      </p:sp>
+      <p:sp>
+        <p:nvSpPr>
+          <p:cNvPr id="9" name="Text 7"/>
+          <p:cNvSpPr txBox="1"/>
+          <p:nvPr/>
+        </p:nvSpPr>
+        <p:spPr>
+          <a:xfrm>
+            <a:off x="1051560" y="3703320"/>
+            <a:ext cx="2834640" cy="1188720"/>
+          </a:xfrm>
+          <a:prstGeom prst="rect">
+            <a:avLst/>
+          </a:prstGeom>
+          <a:noFill/>
+          <a:ln/>
+        </p:spPr>
+        <p:txBody>
+          <a:bodyPr wrap="square" lIns="0" tIns="0" rIns="0" bIns="0" rtlCol="0" anchor="ctr"/>
+          <a:lstStyle/>
+          <a:p>
+            <a:pPr indent="0" marL="0">
+              <a:lnSpc>
+                <a:spcPct val="130000"/>
+              </a:lnSpc>
+              <a:buNone/>
+            </a:pPr>
+            <a:r>
+              <a:rPr lang="en-US" sz="1150" dirty="0">
+                <a:solidFill>
+                  <a:srgbClr val="5A534A"/>
+                </a:solidFill>
+                <a:latin typeface="Yu Gothic" pitchFamily="34" charset="0"/>
+                <a:ea typeface="Yu Gothic" pitchFamily="34" charset="-122"/>
+                <a:cs typeface="Yu Gothic" pitchFamily="34" charset="-120"/>
+              </a:rPr>
+              <a:t>12回分の成果物をお渡しします。第1回の記録とも突き合わせます</a:t>
+            </a:r>
+            <a:endParaRPr lang="en-US" sz="1150" dirty="0"/>
+          </a:p>
+        </p:txBody>
+      </p:sp>
+      <p:sp>
+        <p:nvSpPr>
+          <p:cNvPr id="10" name="Shape 8"/>
           <p:cNvSpPr/>
           <p:nvPr/>
         </p:nvSpPr>
         <p:spPr>
           <a:xfrm>
-            <a:off x="777240" y="4709160"/>
-            <a:ext cx="10607040" cy="960120"/>
+            <a:off x="4389120" y="2148840"/>
+            <a:ext cx="3383280" cy="2880360"/>
           </a:xfrm>
           <a:prstGeom prst="rect">
             <a:avLst/>
           </a:prstGeom>
           <a:solidFill>
-            <a:srgbClr val="EDE7DB"/>
+            <a:srgbClr val="FFFFFF"/>
+          </a:solidFill>
+          <a:ln w="12700">
+            <a:solidFill>
+              <a:srgbClr val="EDE7DB"/>
+            </a:solidFill>
+            <a:prstDash val="solid"/>
+          </a:ln>
+        </p:spPr>
+      </p:sp>
+      <p:sp>
+        <p:nvSpPr>
+          <p:cNvPr id="11" name="Shape 9"/>
+          <p:cNvSpPr/>
+          <p:nvPr/>
+        </p:nvSpPr>
+        <p:spPr>
+          <a:xfrm>
+            <a:off x="4663440" y="2395728"/>
+            <a:ext cx="438912" cy="438912"/>
+          </a:xfrm>
+          <a:prstGeom prst="ellipse">
+            <a:avLst/>
+          </a:prstGeom>
+          <a:solidFill>
+            <a:srgbClr val="2F4F6B"/>
           </a:solidFill>
           <a:ln w="12700">
             <a:solidFill>
@@ -2940,53 +3377,95 @@
       </p:sp>
       <p:sp>
         <p:nvSpPr>
-          <p:cNvPr id="7" name="Text 5"/>
-          <p:cNvSpPr txBox="1"/>
-          <p:nvPr/>
-        </p:nvSpPr>
-        <p:spPr>
-          <a:xfrm>
-            <a:off x="1051560" y="4800600"/>
-            <a:ext cx="1463040" cy="256032"/>
-          </a:xfrm>
-          <a:prstGeom prst="rect">
-            <a:avLst/>
-          </a:prstGeom>
-          <a:noFill/>
-          <a:ln/>
-        </p:spPr>
-        <p:txBody>
-          <a:bodyPr wrap="square" lIns="0" tIns="0" rIns="0" bIns="0" rtlCol="0" anchor="ctr"/>
-          <a:lstStyle/>
-          <a:p>
-            <a:pPr indent="0" marL="0">
-              <a:buNone/>
-            </a:pPr>
-            <a:r>
-              <a:rPr lang="en-US" sz="900" b="1" spc="150" kern="0" dirty="0">
-                <a:solidFill>
-                  <a:srgbClr val="B04A2F"/>
-                </a:solidFill>
-                <a:latin typeface="Yu Gothic" pitchFamily="34" charset="0"/>
-                <a:ea typeface="Yu Gothic" pitchFamily="34" charset="-122"/>
-                <a:cs typeface="Yu Gothic" pitchFamily="34" charset="-120"/>
-              </a:rPr>
-              <a:t>他社では</a:t>
-            </a:r>
-            <a:endParaRPr lang="en-US" sz="900" dirty="0"/>
-          </a:p>
-        </p:txBody>
-      </p:sp>
-      <p:sp>
-        <p:nvSpPr>
-          <p:cNvPr id="8" name="Text 6"/>
-          <p:cNvSpPr txBox="1"/>
-          <p:nvPr/>
-        </p:nvSpPr>
-        <p:spPr>
-          <a:xfrm>
-            <a:off x="1051560" y="5029200"/>
-            <a:ext cx="10058400" cy="566928"/>
+          <p:cNvPr id="12" name="Text 10"/>
+          <p:cNvSpPr txBox="1"/>
+          <p:nvPr/>
+        </p:nvSpPr>
+        <p:spPr>
+          <a:xfrm>
+            <a:off x="4663440" y="2395728"/>
+            <a:ext cx="438912" cy="438912"/>
+          </a:xfrm>
+          <a:prstGeom prst="rect">
+            <a:avLst/>
+          </a:prstGeom>
+          <a:noFill/>
+          <a:ln/>
+        </p:spPr>
+        <p:txBody>
+          <a:bodyPr wrap="square" lIns="0" tIns="0" rIns="0" bIns="0" rtlCol="0" anchor="ctr"/>
+          <a:lstStyle/>
+          <a:p>
+            <a:pPr algn="ctr" indent="0" marL="0">
+              <a:buNone/>
+            </a:pPr>
+            <a:r>
+              <a:rPr lang="en-US" sz="1300" b="1" dirty="0">
+                <a:solidFill>
+                  <a:srgbClr val="FFFFFF"/>
+                </a:solidFill>
+                <a:latin typeface="Yu Gothic" pitchFamily="34" charset="0"/>
+                <a:ea typeface="Yu Gothic" pitchFamily="34" charset="-122"/>
+                <a:cs typeface="Yu Gothic" pitchFamily="34" charset="-120"/>
+              </a:rPr>
+              <a:t>2</a:t>
+            </a:r>
+            <a:endParaRPr lang="en-US" sz="1300" dirty="0"/>
+          </a:p>
+        </p:txBody>
+      </p:sp>
+      <p:sp>
+        <p:nvSpPr>
+          <p:cNvPr id="13" name="Text 11"/>
+          <p:cNvSpPr txBox="1"/>
+          <p:nvPr/>
+        </p:nvSpPr>
+        <p:spPr>
+          <a:xfrm>
+            <a:off x="4663440" y="2944368"/>
+            <a:ext cx="2834640" cy="731520"/>
+          </a:xfrm>
+          <a:prstGeom prst="rect">
+            <a:avLst/>
+          </a:prstGeom>
+          <a:noFill/>
+          <a:ln/>
+        </p:spPr>
+        <p:txBody>
+          <a:bodyPr wrap="square" lIns="0" tIns="0" rIns="0" bIns="0" rtlCol="0" anchor="ctr"/>
+          <a:lstStyle/>
+          <a:p>
+            <a:pPr indent="0" marL="0">
+              <a:lnSpc>
+                <a:spcPct val="125000"/>
+              </a:lnSpc>
+              <a:buNone/>
+            </a:pPr>
+            <a:r>
+              <a:rPr lang="en-US" sz="1450" b="1" dirty="0">
+                <a:solidFill>
+                  <a:srgbClr val="23201D"/>
+                </a:solidFill>
+                <a:latin typeface="Yu Gothic" pitchFamily="34" charset="0"/>
+                <a:ea typeface="Yu Gothic" pitchFamily="34" charset="-122"/>
+                <a:cs typeface="Yu Gothic" pitchFamily="34" charset="-120"/>
+              </a:rPr>
+              <a:t>3年構想を1枚にする</a:t>
+            </a:r>
+            <a:endParaRPr lang="en-US" sz="1450" dirty="0"/>
+          </a:p>
+        </p:txBody>
+      </p:sp>
+      <p:sp>
+        <p:nvSpPr>
+          <p:cNvPr id="14" name="Text 12"/>
+          <p:cNvSpPr txBox="1"/>
+          <p:nvPr/>
+        </p:nvSpPr>
+        <p:spPr>
+          <a:xfrm>
+            <a:off x="4663440" y="3703320"/>
+            <a:ext cx="2834640" cy="1188720"/>
           </a:xfrm>
           <a:prstGeom prst="rect">
             <a:avLst/>
@@ -3005,23 +3484,196 @@
               <a:buNone/>
             </a:pPr>
             <a:r>
-              <a:rPr lang="en-US" sz="1250" dirty="0">
-                <a:solidFill>
-                  <a:srgbClr val="3F3933"/>
-                </a:solidFill>
-                <a:latin typeface="Yu Gothic" pitchFamily="34" charset="0"/>
-                <a:ea typeface="Yu Gothic" pitchFamily="34" charset="-122"/>
-                <a:cs typeface="Yu Gothic" pitchFamily="34" charset="-120"/>
-              </a:rPr>
-              <a:t>3年構想に「AIで受けられる仕事の種類を増やす」と書いた会社があります。1年後に実際に増えたのは種類ではなく、受注できる案件の規模でした。構想どおりにはならなかったが、構想を書いたから気づけた、と社長が言っていました。</a:t>
-            </a:r>
-            <a:endParaRPr lang="en-US" sz="1250" dirty="0"/>
-          </a:p>
-        </p:txBody>
-      </p:sp>
-      <p:sp>
-        <p:nvSpPr>
-          <p:cNvPr id="9" name="Text 7"/>
+              <a:rPr lang="en-US" sz="1150" dirty="0">
+                <a:solidFill>
+                  <a:srgbClr val="5A534A"/>
+                </a:solidFill>
+                <a:latin typeface="Yu Gothic" pitchFamily="34" charset="0"/>
+                <a:ea typeface="Yu Gothic" pitchFamily="34" charset="-122"/>
+                <a:cs typeface="Yu Gothic" pitchFamily="34" charset="-120"/>
+              </a:rPr>
+              <a:t>4つの問いに答えます。ここは社員退席後でも構いません</a:t>
+            </a:r>
+            <a:endParaRPr lang="en-US" sz="1150" dirty="0"/>
+          </a:p>
+        </p:txBody>
+      </p:sp>
+      <p:sp>
+        <p:nvSpPr>
+          <p:cNvPr id="15" name="Shape 13"/>
+          <p:cNvSpPr/>
+          <p:nvPr/>
+        </p:nvSpPr>
+        <p:spPr>
+          <a:xfrm>
+            <a:off x="8001000" y="2148840"/>
+            <a:ext cx="3383280" cy="2880360"/>
+          </a:xfrm>
+          <a:prstGeom prst="rect">
+            <a:avLst/>
+          </a:prstGeom>
+          <a:solidFill>
+            <a:srgbClr val="FFFFFF"/>
+          </a:solidFill>
+          <a:ln w="12700">
+            <a:solidFill>
+              <a:srgbClr val="EDE7DB"/>
+            </a:solidFill>
+            <a:prstDash val="solid"/>
+          </a:ln>
+        </p:spPr>
+      </p:sp>
+      <p:sp>
+        <p:nvSpPr>
+          <p:cNvPr id="16" name="Shape 14"/>
+          <p:cNvSpPr/>
+          <p:nvPr/>
+        </p:nvSpPr>
+        <p:spPr>
+          <a:xfrm>
+            <a:off x="8275320" y="2395728"/>
+            <a:ext cx="438912" cy="438912"/>
+          </a:xfrm>
+          <a:prstGeom prst="ellipse">
+            <a:avLst/>
+          </a:prstGeom>
+          <a:solidFill>
+            <a:srgbClr val="2F4F6B"/>
+          </a:solidFill>
+          <a:ln w="12700">
+            <a:solidFill>
+              <a:srgbClr val="333333"/>
+            </a:solidFill>
+            <a:prstDash val="solid"/>
+          </a:ln>
+        </p:spPr>
+      </p:sp>
+      <p:sp>
+        <p:nvSpPr>
+          <p:cNvPr id="17" name="Text 15"/>
+          <p:cNvSpPr txBox="1"/>
+          <p:nvPr/>
+        </p:nvSpPr>
+        <p:spPr>
+          <a:xfrm>
+            <a:off x="8275320" y="2395728"/>
+            <a:ext cx="438912" cy="438912"/>
+          </a:xfrm>
+          <a:prstGeom prst="rect">
+            <a:avLst/>
+          </a:prstGeom>
+          <a:noFill/>
+          <a:ln/>
+        </p:spPr>
+        <p:txBody>
+          <a:bodyPr wrap="square" lIns="0" tIns="0" rIns="0" bIns="0" rtlCol="0" anchor="ctr"/>
+          <a:lstStyle/>
+          <a:p>
+            <a:pPr algn="ctr" indent="0" marL="0">
+              <a:buNone/>
+            </a:pPr>
+            <a:r>
+              <a:rPr lang="en-US" sz="1300" b="1" dirty="0">
+                <a:solidFill>
+                  <a:srgbClr val="FFFFFF"/>
+                </a:solidFill>
+                <a:latin typeface="Yu Gothic" pitchFamily="34" charset="0"/>
+                <a:ea typeface="Yu Gothic" pitchFamily="34" charset="-122"/>
+                <a:cs typeface="Yu Gothic" pitchFamily="34" charset="-120"/>
+              </a:rPr>
+              <a:t>3</a:t>
+            </a:r>
+            <a:endParaRPr lang="en-US" sz="1300" dirty="0"/>
+          </a:p>
+        </p:txBody>
+      </p:sp>
+      <p:sp>
+        <p:nvSpPr>
+          <p:cNvPr id="18" name="Text 16"/>
+          <p:cNvSpPr txBox="1"/>
+          <p:nvPr/>
+        </p:nvSpPr>
+        <p:spPr>
+          <a:xfrm>
+            <a:off x="8275320" y="2944368"/>
+            <a:ext cx="2834640" cy="731520"/>
+          </a:xfrm>
+          <a:prstGeom prst="rect">
+            <a:avLst/>
+          </a:prstGeom>
+          <a:noFill/>
+          <a:ln/>
+        </p:spPr>
+        <p:txBody>
+          <a:bodyPr wrap="square" lIns="0" tIns="0" rIns="0" bIns="0" rtlCol="0" anchor="ctr"/>
+          <a:lstStyle/>
+          <a:p>
+            <a:pPr indent="0" marL="0">
+              <a:lnSpc>
+                <a:spcPct val="125000"/>
+              </a:lnSpc>
+              <a:buNone/>
+            </a:pPr>
+            <a:r>
+              <a:rPr lang="en-US" sz="1450" b="1" dirty="0">
+                <a:solidFill>
+                  <a:srgbClr val="23201D"/>
+                </a:solidFill>
+                <a:latin typeface="Yu Gothic" pitchFamily="34" charset="0"/>
+                <a:ea typeface="Yu Gothic" pitchFamily="34" charset="-122"/>
+                <a:cs typeface="Yu Gothic" pitchFamily="34" charset="-120"/>
+              </a:rPr>
+              <a:t>社員のみなさんに方針を話す</a:t>
+            </a:r>
+            <a:endParaRPr lang="en-US" sz="1450" dirty="0"/>
+          </a:p>
+        </p:txBody>
+      </p:sp>
+      <p:sp>
+        <p:nvSpPr>
+          <p:cNvPr id="19" name="Text 17"/>
+          <p:cNvSpPr txBox="1"/>
+          <p:nvPr/>
+        </p:nvSpPr>
+        <p:spPr>
+          <a:xfrm>
+            <a:off x="8275320" y="3703320"/>
+            <a:ext cx="2834640" cy="1188720"/>
+          </a:xfrm>
+          <a:prstGeom prst="rect">
+            <a:avLst/>
+          </a:prstGeom>
+          <a:noFill/>
+          <a:ln/>
+        </p:spPr>
+        <p:txBody>
+          <a:bodyPr wrap="square" lIns="0" tIns="0" rIns="0" bIns="0" rtlCol="0" anchor="ctr"/>
+          <a:lstStyle/>
+          <a:p>
+            <a:pPr indent="0" marL="0">
+              <a:lnSpc>
+                <a:spcPct val="130000"/>
+              </a:lnSpc>
+              <a:buNone/>
+            </a:pPr>
+            <a:r>
+              <a:rPr lang="en-US" sz="1150" dirty="0">
+                <a:solidFill>
+                  <a:srgbClr val="5A534A"/>
+                </a:solidFill>
+                <a:latin typeface="Yu Gothic" pitchFamily="34" charset="0"/>
+                <a:ea typeface="Yu Gothic" pitchFamily="34" charset="-122"/>
+                <a:cs typeface="Yu Gothic" pitchFamily="34" charset="-120"/>
+              </a:rPr>
+              <a:t>これからどうするかを、社長ご自身の言葉で</a:t>
+            </a:r>
+            <a:endParaRPr lang="en-US" sz="1150" dirty="0"/>
+          </a:p>
+        </p:txBody>
+      </p:sp>
+      <p:sp>
+        <p:nvSpPr>
+          <p:cNvPr id="20" name="Text 18"/>
           <p:cNvSpPr txBox="1"/>
           <p:nvPr/>
         </p:nvSpPr>
@@ -3060,7 +3712,7 @@
       </p:sp>
       <p:sp>
         <p:nvSpPr>
-          <p:cNvPr id="10" name="Text 8"/>
+          <p:cNvPr id="21" name="Text 19"/>
           <p:cNvSpPr txBox="1"/>
           <p:nvPr/>
         </p:nvSpPr>
@@ -3091,7 +3743,7 @@
                 <a:ea typeface="Yu Gothic" pitchFamily="34" charset="-122"/>
                 <a:cs typeface="Yu Gothic" pitchFamily="34" charset="-120"/>
               </a:rPr>
-              <a:t>ここだけは</a:t>
+              <a:t>演習</a:t>
             </a:r>
             <a:endParaRPr lang="en-US" sz="900" dirty="0"/>
           </a:p>
@@ -3108,6 +3760,1490 @@
 <file path=ppt/slides/slide12.xml><?xml version="1.0" encoding="utf-8"?>
 <p:sld xmlns:a="http://schemas.openxmlformats.org/drawingml/2006/main" xmlns:r="http://schemas.openxmlformats.org/officeDocument/2006/relationships" xmlns:p="http://schemas.openxmlformats.org/presentationml/2006/main">
   <p:cSld name="Slide 12">
+    <p:bg>
+      <p:bgPr>
+        <a:solidFill>
+          <a:srgbClr val="F6F2EA"/>
+        </a:solidFill>
+      </p:bgPr>
+    </p:bg>
+    <p:spTree>
+      <p:nvGrpSpPr>
+        <p:cNvPr id="1" name=""/>
+        <p:cNvGrpSpPr/>
+        <p:nvPr/>
+      </p:nvGrpSpPr>
+      <p:grpSpPr>
+        <a:xfrm>
+          <a:off x="0" y="0"/>
+          <a:ext cx="0" cy="0"/>
+          <a:chOff x="0" y="0"/>
+          <a:chExt cx="0" cy="0"/>
+        </a:xfrm>
+      </p:grpSpPr>
+      <p:sp>
+        <p:nvSpPr>
+          <p:cNvPr id="2" name="Text 0"/>
+          <p:cNvSpPr txBox="1"/>
+          <p:nvPr/>
+        </p:nvSpPr>
+        <p:spPr>
+          <a:xfrm>
+            <a:off x="777240" y="566928"/>
+            <a:ext cx="10607040" cy="274320"/>
+          </a:xfrm>
+          <a:prstGeom prst="rect">
+            <a:avLst/>
+          </a:prstGeom>
+          <a:noFill/>
+          <a:ln/>
+        </p:spPr>
+        <p:txBody>
+          <a:bodyPr wrap="square" lIns="0" tIns="0" rIns="0" bIns="0" rtlCol="0" anchor="ctr"/>
+          <a:lstStyle/>
+          <a:p>
+            <a:pPr indent="0" marL="0">
+              <a:buNone/>
+            </a:pPr>
+            <a:r>
+              <a:rPr lang="en-US" sz="1100" b="1" spc="250" kern="0" dirty="0">
+                <a:solidFill>
+                  <a:srgbClr val="3B6B4A"/>
+                </a:solidFill>
+                <a:latin typeface="Yu Gothic" pitchFamily="34" charset="0"/>
+                <a:ea typeface="Yu Gothic" pitchFamily="34" charset="-122"/>
+                <a:cs typeface="Yu Gothic" pitchFamily="34" charset="-120"/>
+              </a:rPr>
+              <a:t>業務への組み込み</a:t>
+            </a:r>
+            <a:endParaRPr lang="en-US" sz="1100" dirty="0"/>
+          </a:p>
+        </p:txBody>
+      </p:sp>
+      <p:sp>
+        <p:nvSpPr>
+          <p:cNvPr id="3" name="Text 1"/>
+          <p:cNvSpPr txBox="1"/>
+          <p:nvPr/>
+        </p:nvSpPr>
+        <p:spPr>
+          <a:xfrm>
+            <a:off x="777240" y="896112"/>
+            <a:ext cx="10607040" cy="640080"/>
+          </a:xfrm>
+          <a:prstGeom prst="rect">
+            <a:avLst/>
+          </a:prstGeom>
+          <a:noFill/>
+          <a:ln/>
+        </p:spPr>
+        <p:txBody>
+          <a:bodyPr wrap="square" lIns="0" tIns="0" rIns="0" bIns="0" rtlCol="0" anchor="ctr"/>
+          <a:lstStyle/>
+          <a:p>
+            <a:pPr indent="0" marL="0">
+              <a:buNone/>
+            </a:pPr>
+            <a:r>
+              <a:rPr lang="en-US" sz="2600" b="1" dirty="0">
+                <a:solidFill>
+                  <a:srgbClr val="23201D"/>
+                </a:solidFill>
+                <a:latin typeface="Yu Gothic" pitchFamily="34" charset="0"/>
+                <a:ea typeface="Yu Gothic" pitchFamily="34" charset="-122"/>
+                <a:cs typeface="Yu Gothic" pitchFamily="34" charset="-120"/>
+              </a:rPr>
+              <a:t>修了時にすること</a:t>
+            </a:r>
+            <a:endParaRPr lang="en-US" sz="2600" dirty="0"/>
+          </a:p>
+        </p:txBody>
+      </p:sp>
+      <p:sp>
+        <p:nvSpPr>
+          <p:cNvPr id="4" name="Text 2"/>
+          <p:cNvSpPr txBox="1"/>
+          <p:nvPr/>
+        </p:nvSpPr>
+        <p:spPr>
+          <a:xfrm>
+            <a:off x="777240" y="1572768"/>
+            <a:ext cx="10607040" cy="320040"/>
+          </a:xfrm>
+          <a:prstGeom prst="rect">
+            <a:avLst/>
+          </a:prstGeom>
+          <a:noFill/>
+          <a:ln/>
+        </p:spPr>
+        <p:txBody>
+          <a:bodyPr wrap="square" lIns="0" tIns="0" rIns="0" bIns="0" rtlCol="0" anchor="ctr"/>
+          <a:lstStyle/>
+          <a:p>
+            <a:pPr indent="0" marL="0">
+              <a:buNone/>
+            </a:pPr>
+            <a:r>
+              <a:rPr lang="en-US" sz="1250" b="1" dirty="0">
+                <a:solidFill>
+                  <a:srgbClr val="3B6B4A"/>
+                </a:solidFill>
+                <a:latin typeface="Yu Gothic" pitchFamily="34" charset="0"/>
+                <a:ea typeface="Yu Gothic" pitchFamily="34" charset="-122"/>
+                <a:cs typeface="Yu Gothic" pitchFamily="34" charset="-120"/>
+              </a:rPr>
+              <a:t>ここを決めないと、持ち帰っても使われません。紙に書きます。</a:t>
+            </a:r>
+            <a:endParaRPr lang="en-US" sz="1250" dirty="0"/>
+          </a:p>
+        </p:txBody>
+      </p:sp>
+      <p:sp>
+        <p:nvSpPr>
+          <p:cNvPr id="5" name="Shape 3"/>
+          <p:cNvSpPr/>
+          <p:nvPr/>
+        </p:nvSpPr>
+        <p:spPr>
+          <a:xfrm>
+            <a:off x="777240" y="2103120"/>
+            <a:ext cx="10607040" cy="914400"/>
+          </a:xfrm>
+          <a:prstGeom prst="rect">
+            <a:avLst/>
+          </a:prstGeom>
+          <a:solidFill>
+            <a:srgbClr val="FFFFFF"/>
+          </a:solidFill>
+          <a:ln w="12700">
+            <a:solidFill>
+              <a:srgbClr val="EDE7DB"/>
+            </a:solidFill>
+            <a:prstDash val="solid"/>
+          </a:ln>
+        </p:spPr>
+      </p:sp>
+      <p:sp>
+        <p:nvSpPr>
+          <p:cNvPr id="6" name="Shape 4"/>
+          <p:cNvSpPr/>
+          <p:nvPr/>
+        </p:nvSpPr>
+        <p:spPr>
+          <a:xfrm>
+            <a:off x="777240" y="2103120"/>
+            <a:ext cx="54864" cy="914400"/>
+          </a:xfrm>
+          <a:prstGeom prst="rect">
+            <a:avLst/>
+          </a:prstGeom>
+          <a:solidFill>
+            <a:srgbClr val="3B6B4A"/>
+          </a:solidFill>
+          <a:ln w="12700">
+            <a:solidFill>
+              <a:srgbClr val="333333"/>
+            </a:solidFill>
+            <a:prstDash val="solid"/>
+          </a:ln>
+        </p:spPr>
+      </p:sp>
+      <p:sp>
+        <p:nvSpPr>
+          <p:cNvPr id="7" name="Text 5"/>
+          <p:cNvSpPr txBox="1"/>
+          <p:nvPr/>
+        </p:nvSpPr>
+        <p:spPr>
+          <a:xfrm>
+            <a:off x="1143000" y="2176272"/>
+            <a:ext cx="2757830" cy="768096"/>
+          </a:xfrm>
+          <a:prstGeom prst="rect">
+            <a:avLst/>
+          </a:prstGeom>
+          <a:noFill/>
+          <a:ln/>
+        </p:spPr>
+        <p:txBody>
+          <a:bodyPr wrap="square" lIns="0" tIns="0" rIns="0" bIns="0" rtlCol="0" anchor="ctr"/>
+          <a:lstStyle/>
+          <a:p>
+            <a:pPr indent="0" marL="0">
+              <a:buNone/>
+            </a:pPr>
+            <a:r>
+              <a:rPr lang="en-US" sz="1400" b="1" dirty="0">
+                <a:solidFill>
+                  <a:srgbClr val="3B6B4A"/>
+                </a:solidFill>
+                <a:latin typeface="Yu Gothic" pitchFamily="34" charset="0"/>
+                <a:ea typeface="Yu Gothic" pitchFamily="34" charset="-122"/>
+                <a:cs typeface="Yu Gothic" pitchFamily="34" charset="-120"/>
+              </a:rPr>
+              <a:t>診断をもう一度</a:t>
+            </a:r>
+            <a:endParaRPr lang="en-US" sz="1400" dirty="0"/>
+          </a:p>
+        </p:txBody>
+      </p:sp>
+      <p:sp>
+        <p:nvSpPr>
+          <p:cNvPr id="8" name="Text 6"/>
+          <p:cNvSpPr txBox="1"/>
+          <p:nvPr/>
+        </p:nvSpPr>
+        <p:spPr>
+          <a:xfrm>
+            <a:off x="4006901" y="2176272"/>
+            <a:ext cx="7011619" cy="768096"/>
+          </a:xfrm>
+          <a:prstGeom prst="rect">
+            <a:avLst/>
+          </a:prstGeom>
+          <a:noFill/>
+          <a:ln/>
+        </p:spPr>
+        <p:txBody>
+          <a:bodyPr wrap="square" lIns="0" tIns="0" rIns="0" bIns="0" rtlCol="0" anchor="ctr"/>
+          <a:lstStyle/>
+          <a:p>
+            <a:pPr indent="0" marL="0">
+              <a:lnSpc>
+                <a:spcPct val="130000"/>
+              </a:lnSpc>
+              <a:buNone/>
+            </a:pPr>
+            <a:r>
+              <a:rPr lang="en-US" sz="1250" dirty="0">
+                <a:solidFill>
+                  <a:srgbClr val="3F3933"/>
+                </a:solidFill>
+                <a:latin typeface="Yu Gothic" pitchFamily="34" charset="0"/>
+                <a:ea typeface="Yu Gothic" pitchFamily="34" charset="-122"/>
+                <a:cs typeface="Yu Gothic" pitchFamily="34" charset="-120"/>
+              </a:rPr>
+              <a:t>受講前と同じ設問です。点数の伸びが、そのまま効果測定になります</a:t>
+            </a:r>
+            <a:endParaRPr lang="en-US" sz="1250" dirty="0"/>
+          </a:p>
+        </p:txBody>
+      </p:sp>
+      <p:sp>
+        <p:nvSpPr>
+          <p:cNvPr id="9" name="Shape 7"/>
+          <p:cNvSpPr/>
+          <p:nvPr/>
+        </p:nvSpPr>
+        <p:spPr>
+          <a:xfrm>
+            <a:off x="777240" y="3154680"/>
+            <a:ext cx="10607040" cy="914400"/>
+          </a:xfrm>
+          <a:prstGeom prst="rect">
+            <a:avLst/>
+          </a:prstGeom>
+          <a:solidFill>
+            <a:srgbClr val="FFFFFF"/>
+          </a:solidFill>
+          <a:ln w="12700">
+            <a:solidFill>
+              <a:srgbClr val="EDE7DB"/>
+            </a:solidFill>
+            <a:prstDash val="solid"/>
+          </a:ln>
+        </p:spPr>
+      </p:sp>
+      <p:sp>
+        <p:nvSpPr>
+          <p:cNvPr id="10" name="Shape 8"/>
+          <p:cNvSpPr/>
+          <p:nvPr/>
+        </p:nvSpPr>
+        <p:spPr>
+          <a:xfrm>
+            <a:off x="777240" y="3154680"/>
+            <a:ext cx="54864" cy="914400"/>
+          </a:xfrm>
+          <a:prstGeom prst="rect">
+            <a:avLst/>
+          </a:prstGeom>
+          <a:solidFill>
+            <a:srgbClr val="3B6B4A"/>
+          </a:solidFill>
+          <a:ln w="12700">
+            <a:solidFill>
+              <a:srgbClr val="333333"/>
+            </a:solidFill>
+            <a:prstDash val="solid"/>
+          </a:ln>
+        </p:spPr>
+      </p:sp>
+      <p:sp>
+        <p:nvSpPr>
+          <p:cNvPr id="11" name="Text 9"/>
+          <p:cNvSpPr txBox="1"/>
+          <p:nvPr/>
+        </p:nvSpPr>
+        <p:spPr>
+          <a:xfrm>
+            <a:off x="1143000" y="3227832"/>
+            <a:ext cx="2757830" cy="768096"/>
+          </a:xfrm>
+          <a:prstGeom prst="rect">
+            <a:avLst/>
+          </a:prstGeom>
+          <a:noFill/>
+          <a:ln/>
+        </p:spPr>
+        <p:txBody>
+          <a:bodyPr wrap="square" lIns="0" tIns="0" rIns="0" bIns="0" rtlCol="0" anchor="ctr"/>
+          <a:lstStyle/>
+          <a:p>
+            <a:pPr indent="0" marL="0">
+              <a:buNone/>
+            </a:pPr>
+            <a:r>
+              <a:rPr lang="en-US" sz="1400" b="1" dirty="0">
+                <a:solidFill>
+                  <a:srgbClr val="3B6B4A"/>
+                </a:solidFill>
+                <a:latin typeface="Yu Gothic" pitchFamily="34" charset="0"/>
+                <a:ea typeface="Yu Gothic" pitchFamily="34" charset="-122"/>
+                <a:cs typeface="Yu Gothic" pitchFamily="34" charset="-120"/>
+              </a:rPr>
+              <a:t>成果報告シートの記入</a:t>
+            </a:r>
+            <a:endParaRPr lang="en-US" sz="1400" dirty="0"/>
+          </a:p>
+        </p:txBody>
+      </p:sp>
+      <p:sp>
+        <p:nvSpPr>
+          <p:cNvPr id="12" name="Text 10"/>
+          <p:cNvSpPr txBox="1"/>
+          <p:nvPr/>
+        </p:nvSpPr>
+        <p:spPr>
+          <a:xfrm>
+            <a:off x="4006901" y="3227832"/>
+            <a:ext cx="7011619" cy="768096"/>
+          </a:xfrm>
+          <a:prstGeom prst="rect">
+            <a:avLst/>
+          </a:prstGeom>
+          <a:noFill/>
+          <a:ln/>
+        </p:spPr>
+        <p:txBody>
+          <a:bodyPr wrap="square" lIns="0" tIns="0" rIns="0" bIns="0" rtlCol="0" anchor="ctr"/>
+          <a:lstStyle/>
+          <a:p>
+            <a:pPr indent="0" marL="0">
+              <a:lnSpc>
+                <a:spcPct val="130000"/>
+              </a:lnSpc>
+              <a:buNone/>
+            </a:pPr>
+            <a:r>
+              <a:rPr lang="en-US" sz="1250" dirty="0">
+                <a:solidFill>
+                  <a:srgbClr val="3F3933"/>
+                </a:solidFill>
+                <a:latin typeface="Yu Gothic" pitchFamily="34" charset="0"/>
+                <a:ea typeface="Yu Gothic" pitchFamily="34" charset="-122"/>
+                <a:cs typeface="Yu Gothic" pitchFamily="34" charset="-120"/>
+              </a:rPr>
+              <a:t>削減時間と社員の反応を数字に。うまくいかなかったことも書いてください</a:t>
+            </a:r>
+            <a:endParaRPr lang="en-US" sz="1250" dirty="0"/>
+          </a:p>
+        </p:txBody>
+      </p:sp>
+      <p:sp>
+        <p:nvSpPr>
+          <p:cNvPr id="13" name="Shape 11"/>
+          <p:cNvSpPr/>
+          <p:nvPr/>
+        </p:nvSpPr>
+        <p:spPr>
+          <a:xfrm>
+            <a:off x="777240" y="4206240"/>
+            <a:ext cx="10607040" cy="914400"/>
+          </a:xfrm>
+          <a:prstGeom prst="rect">
+            <a:avLst/>
+          </a:prstGeom>
+          <a:solidFill>
+            <a:srgbClr val="FFFFFF"/>
+          </a:solidFill>
+          <a:ln w="12700">
+            <a:solidFill>
+              <a:srgbClr val="EDE7DB"/>
+            </a:solidFill>
+            <a:prstDash val="solid"/>
+          </a:ln>
+        </p:spPr>
+      </p:sp>
+      <p:sp>
+        <p:nvSpPr>
+          <p:cNvPr id="14" name="Shape 12"/>
+          <p:cNvSpPr/>
+          <p:nvPr/>
+        </p:nvSpPr>
+        <p:spPr>
+          <a:xfrm>
+            <a:off x="777240" y="4206240"/>
+            <a:ext cx="54864" cy="914400"/>
+          </a:xfrm>
+          <a:prstGeom prst="rect">
+            <a:avLst/>
+          </a:prstGeom>
+          <a:solidFill>
+            <a:srgbClr val="3B6B4A"/>
+          </a:solidFill>
+          <a:ln w="12700">
+            <a:solidFill>
+              <a:srgbClr val="333333"/>
+            </a:solidFill>
+            <a:prstDash val="solid"/>
+          </a:ln>
+        </p:spPr>
+      </p:sp>
+      <p:sp>
+        <p:nvSpPr>
+          <p:cNvPr id="15" name="Text 13"/>
+          <p:cNvSpPr txBox="1"/>
+          <p:nvPr/>
+        </p:nvSpPr>
+        <p:spPr>
+          <a:xfrm>
+            <a:off x="1143000" y="4279392"/>
+            <a:ext cx="2757830" cy="768096"/>
+          </a:xfrm>
+          <a:prstGeom prst="rect">
+            <a:avLst/>
+          </a:prstGeom>
+          <a:noFill/>
+          <a:ln/>
+        </p:spPr>
+        <p:txBody>
+          <a:bodyPr wrap="square" lIns="0" tIns="0" rIns="0" bIns="0" rtlCol="0" anchor="ctr"/>
+          <a:lstStyle/>
+          <a:p>
+            <a:pPr indent="0" marL="0">
+              <a:buNone/>
+            </a:pPr>
+            <a:r>
+              <a:rPr lang="en-US" sz="1400" b="1" dirty="0">
+                <a:solidFill>
+                  <a:srgbClr val="3B6B4A"/>
+                </a:solidFill>
+                <a:latin typeface="Yu Gothic" pitchFamily="34" charset="0"/>
+                <a:ea typeface="Yu Gothic" pitchFamily="34" charset="-122"/>
+                <a:cs typeface="Yu Gothic" pitchFamily="34" charset="-120"/>
+              </a:rPr>
+              <a:t>掲載の許諾確認</a:t>
+            </a:r>
+            <a:endParaRPr lang="en-US" sz="1400" dirty="0"/>
+          </a:p>
+        </p:txBody>
+      </p:sp>
+      <p:sp>
+        <p:nvSpPr>
+          <p:cNvPr id="16" name="Text 14"/>
+          <p:cNvSpPr txBox="1"/>
+          <p:nvPr/>
+        </p:nvSpPr>
+        <p:spPr>
+          <a:xfrm>
+            <a:off x="4006901" y="4279392"/>
+            <a:ext cx="7011619" cy="768096"/>
+          </a:xfrm>
+          <a:prstGeom prst="rect">
+            <a:avLst/>
+          </a:prstGeom>
+          <a:noFill/>
+          <a:ln/>
+        </p:spPr>
+        <p:txBody>
+          <a:bodyPr wrap="square" lIns="0" tIns="0" rIns="0" bIns="0" rtlCol="0" anchor="ctr"/>
+          <a:lstStyle/>
+          <a:p>
+            <a:pPr indent="0" marL="0">
+              <a:lnSpc>
+                <a:spcPct val="130000"/>
+              </a:lnSpc>
+              <a:buNone/>
+            </a:pPr>
+            <a:r>
+              <a:rPr lang="en-US" sz="1250" dirty="0">
+                <a:solidFill>
+                  <a:srgbClr val="3F3933"/>
+                </a:solidFill>
+                <a:latin typeface="Yu Gothic" pitchFamily="34" charset="0"/>
+                <a:ea typeface="Yu Gothic" pitchFamily="34" charset="-122"/>
+                <a:cs typeface="Yu Gothic" pitchFamily="34" charset="-120"/>
+              </a:rPr>
+              <a:t>事例として使う場合は、社名を出さず「従業員◯名の◯◯業」の形で。数値の公開範囲も確認します</a:t>
+            </a:r>
+            <a:endParaRPr lang="en-US" sz="1250" dirty="0"/>
+          </a:p>
+        </p:txBody>
+      </p:sp>
+      <p:sp>
+        <p:nvSpPr>
+          <p:cNvPr id="17" name="Text 15"/>
+          <p:cNvSpPr txBox="1"/>
+          <p:nvPr/>
+        </p:nvSpPr>
+        <p:spPr>
+          <a:xfrm>
+            <a:off x="777240" y="6382512"/>
+            <a:ext cx="7424928" cy="256032"/>
+          </a:xfrm>
+          <a:prstGeom prst="rect">
+            <a:avLst/>
+          </a:prstGeom>
+          <a:noFill/>
+          <a:ln/>
+        </p:spPr>
+        <p:txBody>
+          <a:bodyPr wrap="square" lIns="0" tIns="0" rIns="0" bIns="0" rtlCol="0" anchor="ctr"/>
+          <a:lstStyle/>
+          <a:p>
+            <a:pPr indent="0" marL="0">
+              <a:buNone/>
+            </a:pPr>
+            <a:r>
+              <a:rPr lang="en-US" sz="900" dirty="0">
+                <a:solidFill>
+                  <a:srgbClr val="8A8177"/>
+                </a:solidFill>
+                <a:latin typeface="Yu Gothic" pitchFamily="34" charset="0"/>
+                <a:ea typeface="Yu Gothic" pitchFamily="34" charset="-122"/>
+                <a:cs typeface="Yu Gothic" pitchFamily="34" charset="-120"/>
+              </a:rPr>
+              <a:t>第12回　AIを前提に事業を組み直す</a:t>
+            </a:r>
+            <a:endParaRPr lang="en-US" sz="900" dirty="0"/>
+          </a:p>
+        </p:txBody>
+      </p:sp>
+      <p:sp>
+        <p:nvSpPr>
+          <p:cNvPr id="18" name="Text 16"/>
+          <p:cNvSpPr txBox="1"/>
+          <p:nvPr/>
+        </p:nvSpPr>
+        <p:spPr>
+          <a:xfrm>
+            <a:off x="8202168" y="6382512"/>
+            <a:ext cx="3182112" cy="256032"/>
+          </a:xfrm>
+          <a:prstGeom prst="rect">
+            <a:avLst/>
+          </a:prstGeom>
+          <a:noFill/>
+          <a:ln/>
+        </p:spPr>
+        <p:txBody>
+          <a:bodyPr wrap="square" lIns="0" tIns="0" rIns="0" bIns="0" rtlCol="0" anchor="ctr"/>
+          <a:lstStyle/>
+          <a:p>
+            <a:pPr algn="r" indent="0" marL="0">
+              <a:buNone/>
+            </a:pPr>
+            <a:r>
+              <a:rPr lang="en-US" sz="900" dirty="0">
+                <a:solidFill>
+                  <a:srgbClr val="8A8177"/>
+                </a:solidFill>
+                <a:latin typeface="Yu Gothic" pitchFamily="34" charset="0"/>
+                <a:ea typeface="Yu Gothic" pitchFamily="34" charset="-122"/>
+                <a:cs typeface="Yu Gothic" pitchFamily="34" charset="-120"/>
+              </a:rPr>
+              <a:t>組み込み</a:t>
+            </a:r>
+            <a:endParaRPr lang="en-US" sz="900" dirty="0"/>
+          </a:p>
+        </p:txBody>
+      </p:sp>
+    </p:spTree>
+  </p:cSld>
+  <p:clrMapOvr>
+    <a:masterClrMapping/>
+  </p:clrMapOvr>
+</p:sld>
+</file>
+
+<file path=ppt/slides/slide13.xml><?xml version="1.0" encoding="utf-8"?>
+<p:sld xmlns:a="http://schemas.openxmlformats.org/drawingml/2006/main" xmlns:r="http://schemas.openxmlformats.org/officeDocument/2006/relationships" xmlns:p="http://schemas.openxmlformats.org/presentationml/2006/main">
+  <p:cSld name="Slide 13">
+    <p:bg>
+      <p:bgPr>
+        <a:solidFill>
+          <a:srgbClr val="F6F2EA"/>
+        </a:solidFill>
+      </p:bgPr>
+    </p:bg>
+    <p:spTree>
+      <p:nvGrpSpPr>
+        <p:cNvPr id="1" name=""/>
+        <p:cNvGrpSpPr/>
+        <p:nvPr/>
+      </p:nvGrpSpPr>
+      <p:grpSpPr>
+        <a:xfrm>
+          <a:off x="0" y="0"/>
+          <a:ext cx="0" cy="0"/>
+          <a:chOff x="0" y="0"/>
+          <a:chExt cx="0" cy="0"/>
+        </a:xfrm>
+      </p:grpSpPr>
+      <p:sp>
+        <p:nvSpPr>
+          <p:cNvPr id="2" name="Text 0"/>
+          <p:cNvSpPr txBox="1"/>
+          <p:nvPr/>
+        </p:nvSpPr>
+        <p:spPr>
+          <a:xfrm>
+            <a:off x="777240" y="566928"/>
+            <a:ext cx="10607040" cy="274320"/>
+          </a:xfrm>
+          <a:prstGeom prst="rect">
+            <a:avLst/>
+          </a:prstGeom>
+          <a:noFill/>
+          <a:ln/>
+        </p:spPr>
+        <p:txBody>
+          <a:bodyPr wrap="square" lIns="0" tIns="0" rIns="0" bIns="0" rtlCol="0" anchor="ctr"/>
+          <a:lstStyle/>
+          <a:p>
+            <a:pPr indent="0" marL="0">
+              <a:buNone/>
+            </a:pPr>
+            <a:r>
+              <a:rPr lang="en-US" sz="1100" b="1" spc="250" kern="0" dirty="0">
+                <a:solidFill>
+                  <a:srgbClr val="B04A2F"/>
+                </a:solidFill>
+                <a:latin typeface="Yu Gothic" pitchFamily="34" charset="0"/>
+                <a:ea typeface="Yu Gothic" pitchFamily="34" charset="-122"/>
+                <a:cs typeface="Yu Gothic" pitchFamily="34" charset="-120"/>
+              </a:rPr>
+              <a:t>ここだけは</a:t>
+            </a:r>
+            <a:endParaRPr lang="en-US" sz="1100" dirty="0"/>
+          </a:p>
+        </p:txBody>
+      </p:sp>
+      <p:sp>
+        <p:nvSpPr>
+          <p:cNvPr id="3" name="Text 1"/>
+          <p:cNvSpPr txBox="1"/>
+          <p:nvPr/>
+        </p:nvSpPr>
+        <p:spPr>
+          <a:xfrm>
+            <a:off x="777240" y="1097280"/>
+            <a:ext cx="10607040" cy="640080"/>
+          </a:xfrm>
+          <a:prstGeom prst="rect">
+            <a:avLst/>
+          </a:prstGeom>
+          <a:noFill/>
+          <a:ln/>
+        </p:spPr>
+        <p:txBody>
+          <a:bodyPr wrap="square" lIns="0" tIns="0" rIns="0" bIns="0" rtlCol="0" anchor="ctr"/>
+          <a:lstStyle/>
+          <a:p>
+            <a:pPr indent="0" marL="0">
+              <a:buNone/>
+            </a:pPr>
+            <a:r>
+              <a:rPr lang="en-US" sz="2600" b="1" dirty="0">
+                <a:solidFill>
+                  <a:srgbClr val="23201D"/>
+                </a:solidFill>
+                <a:latin typeface="Yu Gothic" pitchFamily="34" charset="0"/>
+                <a:ea typeface="Yu Gothic" pitchFamily="34" charset="-122"/>
+                <a:cs typeface="Yu Gothic" pitchFamily="34" charset="-120"/>
+              </a:rPr>
+              <a:t>最後に、ひとつだけ</a:t>
+            </a:r>
+            <a:endParaRPr lang="en-US" sz="2600" dirty="0"/>
+          </a:p>
+        </p:txBody>
+      </p:sp>
+      <p:sp>
+        <p:nvSpPr>
+          <p:cNvPr id="4" name="Shape 2"/>
+          <p:cNvSpPr/>
+          <p:nvPr/>
+        </p:nvSpPr>
+        <p:spPr>
+          <a:xfrm>
+            <a:off x="777240" y="2148840"/>
+            <a:ext cx="64008" cy="2194560"/>
+          </a:xfrm>
+          <a:prstGeom prst="rect">
+            <a:avLst/>
+          </a:prstGeom>
+          <a:solidFill>
+            <a:srgbClr val="B04A2F"/>
+          </a:solidFill>
+          <a:ln w="12700">
+            <a:solidFill>
+              <a:srgbClr val="333333"/>
+            </a:solidFill>
+            <a:prstDash val="solid"/>
+          </a:ln>
+        </p:spPr>
+      </p:sp>
+      <p:sp>
+        <p:nvSpPr>
+          <p:cNvPr id="5" name="Text 3"/>
+          <p:cNvSpPr txBox="1"/>
+          <p:nvPr/>
+        </p:nvSpPr>
+        <p:spPr>
+          <a:xfrm>
+            <a:off x="1188720" y="2148840"/>
+            <a:ext cx="9966960" cy="2194560"/>
+          </a:xfrm>
+          <a:prstGeom prst="rect">
+            <a:avLst/>
+          </a:prstGeom>
+          <a:noFill/>
+          <a:ln/>
+        </p:spPr>
+        <p:txBody>
+          <a:bodyPr wrap="square" lIns="0" tIns="0" rIns="0" bIns="0" rtlCol="0" anchor="ctr"/>
+          <a:lstStyle/>
+          <a:p>
+            <a:pPr indent="0" marL="0">
+              <a:lnSpc>
+                <a:spcPct val="160000"/>
+              </a:lnSpc>
+              <a:buNone/>
+            </a:pPr>
+            <a:r>
+              <a:rPr lang="en-US" sz="1650" dirty="0">
+                <a:solidFill>
+                  <a:srgbClr val="3F3933"/>
+                </a:solidFill>
+                <a:latin typeface="Yu Gothic" pitchFamily="34" charset="0"/>
+                <a:ea typeface="Yu Gothic" pitchFamily="34" charset="-122"/>
+                <a:cs typeface="Yu Gothic" pitchFamily="34" charset="-120"/>
+              </a:rPr>
+              <a:t>この12回で最も効いたのは、講座の中で作ったものを翌日に一度使ってみることでした。使わなかったものは、どれだけよくできていても2週間で忘れます。逆に、一度でも実務で使えば、それは御社の仕組みになります。これから作るものについても、同じです。</a:t>
+            </a:r>
+            <a:endParaRPr lang="en-US" sz="1650" dirty="0"/>
+          </a:p>
+        </p:txBody>
+      </p:sp>
+      <p:sp>
+        <p:nvSpPr>
+          <p:cNvPr id="6" name="Shape 4"/>
+          <p:cNvSpPr/>
+          <p:nvPr/>
+        </p:nvSpPr>
+        <p:spPr>
+          <a:xfrm>
+            <a:off x="777240" y="4709160"/>
+            <a:ext cx="10607040" cy="960120"/>
+          </a:xfrm>
+          <a:prstGeom prst="rect">
+            <a:avLst/>
+          </a:prstGeom>
+          <a:solidFill>
+            <a:srgbClr val="EDE7DB"/>
+          </a:solidFill>
+          <a:ln w="12700">
+            <a:solidFill>
+              <a:srgbClr val="333333"/>
+            </a:solidFill>
+            <a:prstDash val="solid"/>
+          </a:ln>
+        </p:spPr>
+      </p:sp>
+      <p:sp>
+        <p:nvSpPr>
+          <p:cNvPr id="7" name="Text 5"/>
+          <p:cNvSpPr txBox="1"/>
+          <p:nvPr/>
+        </p:nvSpPr>
+        <p:spPr>
+          <a:xfrm>
+            <a:off x="1051560" y="4800600"/>
+            <a:ext cx="1463040" cy="256032"/>
+          </a:xfrm>
+          <a:prstGeom prst="rect">
+            <a:avLst/>
+          </a:prstGeom>
+          <a:noFill/>
+          <a:ln/>
+        </p:spPr>
+        <p:txBody>
+          <a:bodyPr wrap="square" lIns="0" tIns="0" rIns="0" bIns="0" rtlCol="0" anchor="ctr"/>
+          <a:lstStyle/>
+          <a:p>
+            <a:pPr indent="0" marL="0">
+              <a:buNone/>
+            </a:pPr>
+            <a:r>
+              <a:rPr lang="en-US" sz="900" b="1" spc="150" kern="0" dirty="0">
+                <a:solidFill>
+                  <a:srgbClr val="B04A2F"/>
+                </a:solidFill>
+                <a:latin typeface="Yu Gothic" pitchFamily="34" charset="0"/>
+                <a:ea typeface="Yu Gothic" pitchFamily="34" charset="-122"/>
+                <a:cs typeface="Yu Gothic" pitchFamily="34" charset="-120"/>
+              </a:rPr>
+              <a:t>他社では</a:t>
+            </a:r>
+            <a:endParaRPr lang="en-US" sz="900" dirty="0"/>
+          </a:p>
+        </p:txBody>
+      </p:sp>
+      <p:sp>
+        <p:nvSpPr>
+          <p:cNvPr id="8" name="Text 6"/>
+          <p:cNvSpPr txBox="1"/>
+          <p:nvPr/>
+        </p:nvSpPr>
+        <p:spPr>
+          <a:xfrm>
+            <a:off x="1051560" y="5029200"/>
+            <a:ext cx="10058400" cy="566928"/>
+          </a:xfrm>
+          <a:prstGeom prst="rect">
+            <a:avLst/>
+          </a:prstGeom>
+          <a:noFill/>
+          <a:ln/>
+        </p:spPr>
+        <p:txBody>
+          <a:bodyPr wrap="square" lIns="0" tIns="0" rIns="0" bIns="0" rtlCol="0" anchor="ctr"/>
+          <a:lstStyle/>
+          <a:p>
+            <a:pPr indent="0" marL="0">
+              <a:lnSpc>
+                <a:spcPct val="130000"/>
+              </a:lnSpc>
+              <a:buNone/>
+            </a:pPr>
+            <a:r>
+              <a:rPr lang="en-US" sz="1250" dirty="0">
+                <a:solidFill>
+                  <a:srgbClr val="3F3933"/>
+                </a:solidFill>
+                <a:latin typeface="Yu Gothic" pitchFamily="34" charset="0"/>
+                <a:ea typeface="Yu Gothic" pitchFamily="34" charset="-122"/>
+                <a:cs typeface="Yu Gothic" pitchFamily="34" charset="-120"/>
+              </a:rPr>
+              <a:t>3年構想に「AIで受けられる仕事の種類を増やす」と書いた会社があります。1年後に実際に増えたのは種類ではなく、受注できる案件の規模でした。構想どおりにはならなかったが、構想を書いたから気づけた、と社長が言っていました。</a:t>
+            </a:r>
+            <a:endParaRPr lang="en-US" sz="1250" dirty="0"/>
+          </a:p>
+        </p:txBody>
+      </p:sp>
+      <p:sp>
+        <p:nvSpPr>
+          <p:cNvPr id="9" name="Text 7"/>
+          <p:cNvSpPr txBox="1"/>
+          <p:nvPr/>
+        </p:nvSpPr>
+        <p:spPr>
+          <a:xfrm>
+            <a:off x="777240" y="6382512"/>
+            <a:ext cx="7424928" cy="256032"/>
+          </a:xfrm>
+          <a:prstGeom prst="rect">
+            <a:avLst/>
+          </a:prstGeom>
+          <a:noFill/>
+          <a:ln/>
+        </p:spPr>
+        <p:txBody>
+          <a:bodyPr wrap="square" lIns="0" tIns="0" rIns="0" bIns="0" rtlCol="0" anchor="ctr"/>
+          <a:lstStyle/>
+          <a:p>
+            <a:pPr indent="0" marL="0">
+              <a:buNone/>
+            </a:pPr>
+            <a:r>
+              <a:rPr lang="en-US" sz="900" dirty="0">
+                <a:solidFill>
+                  <a:srgbClr val="8A8177"/>
+                </a:solidFill>
+                <a:latin typeface="Yu Gothic" pitchFamily="34" charset="0"/>
+                <a:ea typeface="Yu Gothic" pitchFamily="34" charset="-122"/>
+                <a:cs typeface="Yu Gothic" pitchFamily="34" charset="-120"/>
+              </a:rPr>
+              <a:t>第12回　AIを前提に事業を組み直す</a:t>
+            </a:r>
+            <a:endParaRPr lang="en-US" sz="900" dirty="0"/>
+          </a:p>
+        </p:txBody>
+      </p:sp>
+      <p:sp>
+        <p:nvSpPr>
+          <p:cNvPr id="10" name="Text 8"/>
+          <p:cNvSpPr txBox="1"/>
+          <p:nvPr/>
+        </p:nvSpPr>
+        <p:spPr>
+          <a:xfrm>
+            <a:off x="8202168" y="6382512"/>
+            <a:ext cx="3182112" cy="256032"/>
+          </a:xfrm>
+          <a:prstGeom prst="rect">
+            <a:avLst/>
+          </a:prstGeom>
+          <a:noFill/>
+          <a:ln/>
+        </p:spPr>
+        <p:txBody>
+          <a:bodyPr wrap="square" lIns="0" tIns="0" rIns="0" bIns="0" rtlCol="0" anchor="ctr"/>
+          <a:lstStyle/>
+          <a:p>
+            <a:pPr algn="r" indent="0" marL="0">
+              <a:buNone/>
+            </a:pPr>
+            <a:r>
+              <a:rPr lang="en-US" sz="900" dirty="0">
+                <a:solidFill>
+                  <a:srgbClr val="8A8177"/>
+                </a:solidFill>
+                <a:latin typeface="Yu Gothic" pitchFamily="34" charset="0"/>
+                <a:ea typeface="Yu Gothic" pitchFamily="34" charset="-122"/>
+                <a:cs typeface="Yu Gothic" pitchFamily="34" charset="-120"/>
+              </a:rPr>
+              <a:t>ここだけは</a:t>
+            </a:r>
+            <a:endParaRPr lang="en-US" sz="900" dirty="0"/>
+          </a:p>
+        </p:txBody>
+      </p:sp>
+    </p:spTree>
+  </p:cSld>
+  <p:clrMapOvr>
+    <a:masterClrMapping/>
+  </p:clrMapOvr>
+</p:sld>
+</file>
+
+<file path=ppt/slides/slide14.xml><?xml version="1.0" encoding="utf-8"?>
+<p:sld xmlns:a="http://schemas.openxmlformats.org/drawingml/2006/main" xmlns:r="http://schemas.openxmlformats.org/officeDocument/2006/relationships" xmlns:p="http://schemas.openxmlformats.org/presentationml/2006/main">
+  <p:cSld name="Slide 14">
+    <p:bg>
+      <p:bgPr>
+        <a:solidFill>
+          <a:srgbClr val="F6F2EA"/>
+        </a:solidFill>
+      </p:bgPr>
+    </p:bg>
+    <p:spTree>
+      <p:nvGrpSpPr>
+        <p:cNvPr id="1" name=""/>
+        <p:cNvGrpSpPr/>
+        <p:nvPr/>
+      </p:nvGrpSpPr>
+      <p:grpSpPr>
+        <a:xfrm>
+          <a:off x="0" y="0"/>
+          <a:ext cx="0" cy="0"/>
+          <a:chOff x="0" y="0"/>
+          <a:chExt cx="0" cy="0"/>
+        </a:xfrm>
+      </p:grpSpPr>
+      <p:sp>
+        <p:nvSpPr>
+          <p:cNvPr id="2" name="Text 0"/>
+          <p:cNvSpPr txBox="1"/>
+          <p:nvPr/>
+        </p:nvSpPr>
+        <p:spPr>
+          <a:xfrm>
+            <a:off x="777240" y="566928"/>
+            <a:ext cx="10607040" cy="274320"/>
+          </a:xfrm>
+          <a:prstGeom prst="rect">
+            <a:avLst/>
+          </a:prstGeom>
+          <a:noFill/>
+          <a:ln/>
+        </p:spPr>
+        <p:txBody>
+          <a:bodyPr wrap="square" lIns="0" tIns="0" rIns="0" bIns="0" rtlCol="0" anchor="ctr"/>
+          <a:lstStyle/>
+          <a:p>
+            <a:pPr indent="0" marL="0">
+              <a:buNone/>
+            </a:pPr>
+            <a:r>
+              <a:rPr lang="en-US" sz="1100" b="1" spc="250" kern="0" dirty="0">
+                <a:solidFill>
+                  <a:srgbClr val="3B6B4A"/>
+                </a:solidFill>
+                <a:latin typeface="Yu Gothic" pitchFamily="34" charset="0"/>
+                <a:ea typeface="Yu Gothic" pitchFamily="34" charset="-122"/>
+                <a:cs typeface="Yu Gothic" pitchFamily="34" charset="-120"/>
+              </a:rPr>
+              <a:t>次回まで</a:t>
+            </a:r>
+            <a:endParaRPr lang="en-US" sz="1100" dirty="0"/>
+          </a:p>
+        </p:txBody>
+      </p:sp>
+      <p:sp>
+        <p:nvSpPr>
+          <p:cNvPr id="3" name="Text 1"/>
+          <p:cNvSpPr txBox="1"/>
+          <p:nvPr/>
+        </p:nvSpPr>
+        <p:spPr>
+          <a:xfrm>
+            <a:off x="777240" y="896112"/>
+            <a:ext cx="10607040" cy="640080"/>
+          </a:xfrm>
+          <a:prstGeom prst="rect">
+            <a:avLst/>
+          </a:prstGeom>
+          <a:noFill/>
+          <a:ln/>
+        </p:spPr>
+        <p:txBody>
+          <a:bodyPr wrap="square" lIns="0" tIns="0" rIns="0" bIns="0" rtlCol="0" anchor="ctr"/>
+          <a:lstStyle/>
+          <a:p>
+            <a:pPr indent="0" marL="0">
+              <a:buNone/>
+            </a:pPr>
+            <a:r>
+              <a:rPr lang="en-US" sz="2600" b="1" dirty="0">
+                <a:solidFill>
+                  <a:srgbClr val="23201D"/>
+                </a:solidFill>
+                <a:latin typeface="Yu Gothic" pitchFamily="34" charset="0"/>
+                <a:ea typeface="Yu Gothic" pitchFamily="34" charset="-122"/>
+                <a:cs typeface="Yu Gothic" pitchFamily="34" charset="-120"/>
+              </a:rPr>
+              <a:t>次回は「修了後」</a:t>
+            </a:r>
+            <a:endParaRPr lang="en-US" sz="2600" dirty="0"/>
+          </a:p>
+        </p:txBody>
+      </p:sp>
+      <p:sp>
+        <p:nvSpPr>
+          <p:cNvPr id="4" name="Text 2"/>
+          <p:cNvSpPr txBox="1"/>
+          <p:nvPr/>
+        </p:nvSpPr>
+        <p:spPr>
+          <a:xfrm>
+            <a:off x="777240" y="1572768"/>
+            <a:ext cx="9546336" cy="457200"/>
+          </a:xfrm>
+          <a:prstGeom prst="rect">
+            <a:avLst/>
+          </a:prstGeom>
+          <a:noFill/>
+          <a:ln/>
+        </p:spPr>
+        <p:txBody>
+          <a:bodyPr wrap="square" lIns="0" tIns="0" rIns="0" bIns="0" rtlCol="0" anchor="ctr"/>
+          <a:lstStyle/>
+          <a:p>
+            <a:pPr indent="0" marL="0">
+              <a:buNone/>
+            </a:pPr>
+            <a:r>
+              <a:rPr lang="en-US" sz="1400" b="1" dirty="0">
+                <a:solidFill>
+                  <a:srgbClr val="3B6B4A"/>
+                </a:solidFill>
+                <a:latin typeface="Yu Gothic" pitchFamily="34" charset="0"/>
+                <a:ea typeface="Yu Gothic" pitchFamily="34" charset="-122"/>
+                <a:cs typeface="Yu Gothic" pitchFamily="34" charset="-120"/>
+              </a:rPr>
+              <a:t>落ちるのは2か月目です。3か月後に一度お話しすることで、止まりかけたものを立て直せます。</a:t>
+            </a:r>
+            <a:endParaRPr lang="en-US" sz="1400" dirty="0"/>
+          </a:p>
+        </p:txBody>
+      </p:sp>
+      <p:sp>
+        <p:nvSpPr>
+          <p:cNvPr id="5" name="Shape 3"/>
+          <p:cNvSpPr/>
+          <p:nvPr/>
+        </p:nvSpPr>
+        <p:spPr>
+          <a:xfrm>
+            <a:off x="777240" y="2240280"/>
+            <a:ext cx="4985309" cy="2286000"/>
+          </a:xfrm>
+          <a:prstGeom prst="rect">
+            <a:avLst/>
+          </a:prstGeom>
+          <a:solidFill>
+            <a:srgbClr val="FFFFFF"/>
+          </a:solidFill>
+          <a:ln w="12700">
+            <a:solidFill>
+              <a:srgbClr val="EDE7DB"/>
+            </a:solidFill>
+            <a:prstDash val="solid"/>
+          </a:ln>
+        </p:spPr>
+      </p:sp>
+      <p:sp>
+        <p:nvSpPr>
+          <p:cNvPr id="6" name="Text 4"/>
+          <p:cNvSpPr txBox="1"/>
+          <p:nvPr/>
+        </p:nvSpPr>
+        <p:spPr>
+          <a:xfrm>
+            <a:off x="1051560" y="2377440"/>
+            <a:ext cx="4242816" cy="274320"/>
+          </a:xfrm>
+          <a:prstGeom prst="rect">
+            <a:avLst/>
+          </a:prstGeom>
+          <a:noFill/>
+          <a:ln/>
+        </p:spPr>
+        <p:txBody>
+          <a:bodyPr wrap="square" lIns="0" tIns="0" rIns="0" bIns="0" rtlCol="0" anchor="ctr"/>
+          <a:lstStyle/>
+          <a:p>
+            <a:pPr indent="0" marL="0">
+              <a:buNone/>
+            </a:pPr>
+            <a:r>
+              <a:rPr lang="en-US" sz="1000" b="1" spc="150" kern="0" dirty="0">
+                <a:solidFill>
+                  <a:srgbClr val="B04A2F"/>
+                </a:solidFill>
+                <a:latin typeface="Yu Gothic" pitchFamily="34" charset="0"/>
+                <a:ea typeface="Yu Gothic" pitchFamily="34" charset="-122"/>
+                <a:cs typeface="Yu Gothic" pitchFamily="34" charset="-120"/>
+              </a:rPr>
+              <a:t>次回までにやること</a:t>
+            </a:r>
+            <a:endParaRPr lang="en-US" sz="1000" dirty="0"/>
+          </a:p>
+        </p:txBody>
+      </p:sp>
+      <p:sp>
+        <p:nvSpPr>
+          <p:cNvPr id="7" name="Text 5"/>
+          <p:cNvSpPr txBox="1"/>
+          <p:nvPr/>
+        </p:nvSpPr>
+        <p:spPr>
+          <a:xfrm>
+            <a:off x="1051560" y="2743200"/>
+            <a:ext cx="4436669" cy="1554480"/>
+          </a:xfrm>
+          <a:prstGeom prst="rect">
+            <a:avLst/>
+          </a:prstGeom>
+          <a:noFill/>
+          <a:ln/>
+        </p:spPr>
+        <p:txBody>
+          <a:bodyPr wrap="square" lIns="0" tIns="0" rIns="0" bIns="0" rtlCol="0" anchor="ctr"/>
+          <a:lstStyle/>
+          <a:p>
+            <a:pPr indent="0" marL="0">
+              <a:lnSpc>
+                <a:spcPct val="140000"/>
+              </a:lnSpc>
+              <a:buNone/>
+            </a:pPr>
+            <a:r>
+              <a:rPr lang="en-US" sz="1400" dirty="0">
+                <a:solidFill>
+                  <a:srgbClr val="23201D"/>
+                </a:solidFill>
+                <a:latin typeface="Yu Gothic" pitchFamily="34" charset="0"/>
+                <a:ea typeface="Yu Gothic" pitchFamily="34" charset="-122"/>
+                <a:cs typeface="Yu Gothic" pitchFamily="34" charset="-120"/>
+              </a:rPr>
+              <a:t>3か月後のフォローで、進捗をお聞かせください</a:t>
+            </a:r>
+            <a:endParaRPr lang="en-US" sz="1400" dirty="0"/>
+          </a:p>
+        </p:txBody>
+      </p:sp>
+      <p:sp>
+        <p:nvSpPr>
+          <p:cNvPr id="8" name="Shape 6"/>
+          <p:cNvSpPr/>
+          <p:nvPr/>
+        </p:nvSpPr>
+        <p:spPr>
+          <a:xfrm>
+            <a:off x="6398971" y="2240280"/>
+            <a:ext cx="4985309" cy="2286000"/>
+          </a:xfrm>
+          <a:prstGeom prst="rect">
+            <a:avLst/>
+          </a:prstGeom>
+          <a:solidFill>
+            <a:srgbClr val="FFFFFF"/>
+          </a:solidFill>
+          <a:ln w="12700">
+            <a:solidFill>
+              <a:srgbClr val="EDE7DB"/>
+            </a:solidFill>
+            <a:prstDash val="solid"/>
+          </a:ln>
+        </p:spPr>
+      </p:sp>
+      <p:sp>
+        <p:nvSpPr>
+          <p:cNvPr id="9" name="Text 7"/>
+          <p:cNvSpPr txBox="1"/>
+          <p:nvPr/>
+        </p:nvSpPr>
+        <p:spPr>
+          <a:xfrm>
+            <a:off x="6673291" y="2377440"/>
+            <a:ext cx="4242816" cy="274320"/>
+          </a:xfrm>
+          <a:prstGeom prst="rect">
+            <a:avLst/>
+          </a:prstGeom>
+          <a:noFill/>
+          <a:ln/>
+        </p:spPr>
+        <p:txBody>
+          <a:bodyPr wrap="square" lIns="0" tIns="0" rIns="0" bIns="0" rtlCol="0" anchor="ctr"/>
+          <a:lstStyle/>
+          <a:p>
+            <a:pPr indent="0" marL="0">
+              <a:buNone/>
+            </a:pPr>
+            <a:r>
+              <a:rPr lang="en-US" sz="1000" b="1" spc="150" kern="0" dirty="0">
+                <a:solidFill>
+                  <a:srgbClr val="3B6B4A"/>
+                </a:solidFill>
+                <a:latin typeface="Yu Gothic" pitchFamily="34" charset="0"/>
+                <a:ea typeface="Yu Gothic" pitchFamily="34" charset="-122"/>
+                <a:cs typeface="Yu Gothic" pitchFamily="34" charset="-120"/>
+              </a:rPr>
+              <a:t>次回の持ち物</a:t>
+            </a:r>
+            <a:endParaRPr lang="en-US" sz="1000" dirty="0"/>
+          </a:p>
+        </p:txBody>
+      </p:sp>
+      <p:sp>
+        <p:nvSpPr>
+          <p:cNvPr id="10" name="Text 8"/>
+          <p:cNvSpPr txBox="1"/>
+          <p:nvPr/>
+        </p:nvSpPr>
+        <p:spPr>
+          <a:xfrm>
+            <a:off x="6673291" y="2743200"/>
+            <a:ext cx="4436669" cy="694944"/>
+          </a:xfrm>
+          <a:prstGeom prst="rect">
+            <a:avLst/>
+          </a:prstGeom>
+          <a:noFill/>
+          <a:ln/>
+        </p:spPr>
+        <p:txBody>
+          <a:bodyPr wrap="square" lIns="0" tIns="0" rIns="0" bIns="0" rtlCol="0" anchor="ctr"/>
+          <a:lstStyle/>
+          <a:p>
+            <a:pPr indent="0" marL="0">
+              <a:lnSpc>
+                <a:spcPct val="130000"/>
+              </a:lnSpc>
+              <a:buNone/>
+            </a:pPr>
+            <a:r>
+              <a:rPr lang="en-US" sz="1250" dirty="0">
+                <a:solidFill>
+                  <a:srgbClr val="23201D"/>
+                </a:solidFill>
+                <a:latin typeface="Yu Gothic" pitchFamily="34" charset="0"/>
+                <a:ea typeface="Yu Gothic" pitchFamily="34" charset="-122"/>
+                <a:cs typeface="Yu Gothic" pitchFamily="34" charset="-120"/>
+              </a:rPr>
+              <a:t>・（修了時）診断の再回答／成果報告シート／掲載許諾の確認</a:t>
+            </a:r>
+            <a:endParaRPr lang="en-US" sz="1250" dirty="0"/>
+          </a:p>
+        </p:txBody>
+      </p:sp>
+      <p:sp>
+        <p:nvSpPr>
+          <p:cNvPr id="11" name="Shape 9"/>
+          <p:cNvSpPr/>
+          <p:nvPr/>
+        </p:nvSpPr>
+        <p:spPr>
+          <a:xfrm>
+            <a:off x="777240" y="4800600"/>
+            <a:ext cx="10607040" cy="777240"/>
+          </a:xfrm>
+          <a:prstGeom prst="rect">
+            <a:avLst/>
+          </a:prstGeom>
+          <a:solidFill>
+            <a:srgbClr val="EDE7DB"/>
+          </a:solidFill>
+          <a:ln w="12700">
+            <a:solidFill>
+              <a:srgbClr val="333333"/>
+            </a:solidFill>
+            <a:prstDash val="solid"/>
+          </a:ln>
+        </p:spPr>
+      </p:sp>
+      <p:sp>
+        <p:nvSpPr>
+          <p:cNvPr id="12" name="Text 10"/>
+          <p:cNvSpPr txBox="1"/>
+          <p:nvPr/>
+        </p:nvSpPr>
+        <p:spPr>
+          <a:xfrm>
+            <a:off x="1097280" y="4800600"/>
+            <a:ext cx="9966960" cy="777240"/>
+          </a:xfrm>
+          <a:prstGeom prst="rect">
+            <a:avLst/>
+          </a:prstGeom>
+          <a:noFill/>
+          <a:ln/>
+        </p:spPr>
+        <p:txBody>
+          <a:bodyPr wrap="square" lIns="0" tIns="0" rIns="0" bIns="0" rtlCol="0" anchor="ctr"/>
+          <a:lstStyle/>
+          <a:p>
+            <a:pPr indent="0" marL="0">
+              <a:buNone/>
+            </a:pPr>
+            <a:r>
+              <a:rPr lang="en-US" sz="1250" dirty="0">
+                <a:solidFill>
+                  <a:srgbClr val="5A534A"/>
+                </a:solidFill>
+                <a:latin typeface="Yu Gothic" pitchFamily="34" charset="0"/>
+                <a:ea typeface="Yu Gothic" pitchFamily="34" charset="-122"/>
+                <a:cs typeface="Yu Gothic" pitchFamily="34" charset="-120"/>
+              </a:rPr>
+              <a:t>この内容は、次回の3日前にあらためてお送りします。</a:t>
+            </a:r>
+            <a:endParaRPr lang="en-US" sz="1250" dirty="0"/>
+          </a:p>
+        </p:txBody>
+      </p:sp>
+      <p:sp>
+        <p:nvSpPr>
+          <p:cNvPr id="13" name="Text 11"/>
+          <p:cNvSpPr txBox="1"/>
+          <p:nvPr/>
+        </p:nvSpPr>
+        <p:spPr>
+          <a:xfrm>
+            <a:off x="777240" y="6382512"/>
+            <a:ext cx="7424928" cy="256032"/>
+          </a:xfrm>
+          <a:prstGeom prst="rect">
+            <a:avLst/>
+          </a:prstGeom>
+          <a:noFill/>
+          <a:ln/>
+        </p:spPr>
+        <p:txBody>
+          <a:bodyPr wrap="square" lIns="0" tIns="0" rIns="0" bIns="0" rtlCol="0" anchor="ctr"/>
+          <a:lstStyle/>
+          <a:p>
+            <a:pPr indent="0" marL="0">
+              <a:buNone/>
+            </a:pPr>
+            <a:r>
+              <a:rPr lang="en-US" sz="900" dirty="0">
+                <a:solidFill>
+                  <a:srgbClr val="8A8177"/>
+                </a:solidFill>
+                <a:latin typeface="Yu Gothic" pitchFamily="34" charset="0"/>
+                <a:ea typeface="Yu Gothic" pitchFamily="34" charset="-122"/>
+                <a:cs typeface="Yu Gothic" pitchFamily="34" charset="-120"/>
+              </a:rPr>
+              <a:t>第12回　AIを前提に事業を組み直す</a:t>
+            </a:r>
+            <a:endParaRPr lang="en-US" sz="900" dirty="0"/>
+          </a:p>
+        </p:txBody>
+      </p:sp>
+      <p:sp>
+        <p:nvSpPr>
+          <p:cNvPr id="14" name="Text 12"/>
+          <p:cNvSpPr txBox="1"/>
+          <p:nvPr/>
+        </p:nvSpPr>
+        <p:spPr>
+          <a:xfrm>
+            <a:off x="8202168" y="6382512"/>
+            <a:ext cx="3182112" cy="256032"/>
+          </a:xfrm>
+          <a:prstGeom prst="rect">
+            <a:avLst/>
+          </a:prstGeom>
+          <a:noFill/>
+          <a:ln/>
+        </p:spPr>
+        <p:txBody>
+          <a:bodyPr wrap="square" lIns="0" tIns="0" rIns="0" bIns="0" rtlCol="0" anchor="ctr"/>
+          <a:lstStyle/>
+          <a:p>
+            <a:pPr algn="r" indent="0" marL="0">
+              <a:buNone/>
+            </a:pPr>
+            <a:r>
+              <a:rPr lang="en-US" sz="900" dirty="0">
+                <a:solidFill>
+                  <a:srgbClr val="8A8177"/>
+                </a:solidFill>
+                <a:latin typeface="Yu Gothic" pitchFamily="34" charset="0"/>
+                <a:ea typeface="Yu Gothic" pitchFamily="34" charset="-122"/>
+                <a:cs typeface="Yu Gothic" pitchFamily="34" charset="-120"/>
+              </a:rPr>
+              <a:t>次回まで</a:t>
+            </a:r>
+            <a:endParaRPr lang="en-US" sz="900" dirty="0"/>
+          </a:p>
+        </p:txBody>
+      </p:sp>
+    </p:spTree>
+  </p:cSld>
+  <p:clrMapOvr>
+    <a:masterClrMapping/>
+  </p:clrMapOvr>
+</p:sld>
+</file>
+
+<file path=ppt/slides/slide15.xml><?xml version="1.0" encoding="utf-8"?>
+<p:sld xmlns:a="http://schemas.openxmlformats.org/drawingml/2006/main" xmlns:r="http://schemas.openxmlformats.org/officeDocument/2006/relationships" xmlns:p="http://schemas.openxmlformats.org/presentationml/2006/main">
+  <p:cSld name="Slide 15">
     <p:bg>
       <p:bgPr>
         <a:solidFill>
@@ -8558,13 +10694,13 @@
             <a:r>
               <a:rPr lang="en-US" sz="1100" b="1" spc="250" kern="0" dirty="0">
                 <a:solidFill>
-                  <a:srgbClr val="2F4F6B"/>
-                </a:solidFill>
-                <a:latin typeface="Yu Gothic" pitchFamily="34" charset="0"/>
-                <a:ea typeface="Yu Gothic" pitchFamily="34" charset="-122"/>
-                <a:cs typeface="Yu Gothic" pitchFamily="34" charset="-120"/>
-              </a:rPr>
-              <a:t>演習</a:t>
+                  <a:srgbClr val="B04A2F"/>
+                </a:solidFill>
+                <a:latin typeface="Yu Gothic" pitchFamily="34" charset="0"/>
+                <a:ea typeface="Yu Gothic" pitchFamily="34" charset="-122"/>
+                <a:cs typeface="Yu Gothic" pitchFamily="34" charset="-120"/>
+              </a:rPr>
+              <a:t>想定問答</a:t>
             </a:r>
             <a:endParaRPr lang="en-US" sz="1100" dirty="0"/>
           </a:p>
@@ -8603,7 +10739,7 @@
                 <a:ea typeface="Yu Gothic" pitchFamily="34" charset="-122"/>
                 <a:cs typeface="Yu Gothic" pitchFamily="34" charset="-120"/>
               </a:rPr>
-              <a:t>今日の流れ</a:t>
+              <a:t>みなさんから、よくいただくご質問</a:t>
             </a:r>
             <a:endParaRPr lang="en-US" sz="2600" dirty="0"/>
           </a:p>
@@ -8611,53 +10747,14 @@
       </p:sp>
       <p:sp>
         <p:nvSpPr>
-          <p:cNvPr id="4" name="Text 2"/>
-          <p:cNvSpPr txBox="1"/>
-          <p:nvPr/>
-        </p:nvSpPr>
-        <p:spPr>
-          <a:xfrm>
-            <a:off x="777240" y="1572768"/>
-            <a:ext cx="10607040" cy="320040"/>
-          </a:xfrm>
-          <a:prstGeom prst="rect">
-            <a:avLst/>
-          </a:prstGeom>
-          <a:noFill/>
-          <a:ln/>
-        </p:spPr>
-        <p:txBody>
-          <a:bodyPr wrap="square" lIns="0" tIns="0" rIns="0" bIns="0" rtlCol="0" anchor="ctr"/>
-          <a:lstStyle/>
-          <a:p>
-            <a:pPr indent="0" marL="0">
-              <a:buNone/>
-            </a:pPr>
-            <a:r>
-              <a:rPr lang="en-US" sz="1250" b="1" dirty="0">
-                <a:solidFill>
-                  <a:srgbClr val="2F4F6B"/>
-                </a:solidFill>
-                <a:latin typeface="Yu Gothic" pitchFamily="34" charset="0"/>
-                <a:ea typeface="Yu Gothic" pitchFamily="34" charset="-122"/>
-                <a:cs typeface="Yu Gothic" pitchFamily="34" charset="-120"/>
-              </a:rPr>
-              <a:t>55分。操作するのはご自身です。</a:t>
-            </a:r>
-            <a:endParaRPr lang="en-US" sz="1250" dirty="0"/>
-          </a:p>
-        </p:txBody>
-      </p:sp>
-      <p:sp>
-        <p:nvSpPr>
-          <p:cNvPr id="5" name="Shape 3"/>
+          <p:cNvPr id="4" name="Shape 2"/>
           <p:cNvSpPr/>
           <p:nvPr/>
         </p:nvSpPr>
         <p:spPr>
           <a:xfrm>
-            <a:off x="777240" y="2148840"/>
-            <a:ext cx="3383280" cy="2880360"/>
+            <a:off x="777240" y="1737360"/>
+            <a:ext cx="10607040" cy="1170432"/>
           </a:xfrm>
           <a:prstGeom prst="rect">
             <a:avLst/>
@@ -8675,16 +10772,16 @@
       </p:sp>
       <p:sp>
         <p:nvSpPr>
-          <p:cNvPr id="6" name="Shape 4"/>
+          <p:cNvPr id="5" name="Shape 3"/>
           <p:cNvSpPr/>
           <p:nvPr/>
         </p:nvSpPr>
         <p:spPr>
           <a:xfrm>
-            <a:off x="1051560" y="2395728"/>
-            <a:ext cx="438912" cy="438912"/>
-          </a:xfrm>
-          <a:prstGeom prst="ellipse">
+            <a:off x="777240" y="1737360"/>
+            <a:ext cx="54864" cy="1170432"/>
+          </a:xfrm>
+          <a:prstGeom prst="rect">
             <a:avLst/>
           </a:prstGeom>
           <a:solidFill>
@@ -8700,95 +10797,53 @@
       </p:sp>
       <p:sp>
         <p:nvSpPr>
+          <p:cNvPr id="6" name="Text 4"/>
+          <p:cNvSpPr txBox="1"/>
+          <p:nvPr/>
+        </p:nvSpPr>
+        <p:spPr>
+          <a:xfrm>
+            <a:off x="1097280" y="1828800"/>
+            <a:ext cx="9966960" cy="384048"/>
+          </a:xfrm>
+          <a:prstGeom prst="rect">
+            <a:avLst/>
+          </a:prstGeom>
+          <a:noFill/>
+          <a:ln/>
+        </p:spPr>
+        <p:txBody>
+          <a:bodyPr wrap="square" lIns="0" tIns="0" rIns="0" bIns="0" rtlCol="0" anchor="ctr"/>
+          <a:lstStyle/>
+          <a:p>
+            <a:pPr indent="0" marL="0">
+              <a:buNone/>
+            </a:pPr>
+            <a:r>
+              <a:rPr lang="en-US" sz="1400" b="1" dirty="0">
+                <a:solidFill>
+                  <a:srgbClr val="2F4F6B"/>
+                </a:solidFill>
+                <a:latin typeface="Yu Gothic" pitchFamily="34" charset="0"/>
+                <a:ea typeface="Yu Gothic" pitchFamily="34" charset="-122"/>
+                <a:cs typeface="Yu Gothic" pitchFamily="34" charset="-120"/>
+              </a:rPr>
+              <a:t>「これから、私たちの仕事はどう変わりますか」</a:t>
+            </a:r>
+            <a:endParaRPr lang="en-US" sz="1400" dirty="0"/>
+          </a:p>
+        </p:txBody>
+      </p:sp>
+      <p:sp>
+        <p:nvSpPr>
           <p:cNvPr id="7" name="Text 5"/>
           <p:cNvSpPr txBox="1"/>
           <p:nvPr/>
         </p:nvSpPr>
         <p:spPr>
           <a:xfrm>
-            <a:off x="1051560" y="2395728"/>
-            <a:ext cx="438912" cy="438912"/>
-          </a:xfrm>
-          <a:prstGeom prst="rect">
-            <a:avLst/>
-          </a:prstGeom>
-          <a:noFill/>
-          <a:ln/>
-        </p:spPr>
-        <p:txBody>
-          <a:bodyPr wrap="square" lIns="0" tIns="0" rIns="0" bIns="0" rtlCol="0" anchor="ctr"/>
-          <a:lstStyle/>
-          <a:p>
-            <a:pPr algn="ctr" indent="0" marL="0">
-              <a:buNone/>
-            </a:pPr>
-            <a:r>
-              <a:rPr lang="en-US" sz="1300" b="1" dirty="0">
-                <a:solidFill>
-                  <a:srgbClr val="FFFFFF"/>
-                </a:solidFill>
-                <a:latin typeface="Yu Gothic" pitchFamily="34" charset="0"/>
-                <a:ea typeface="Yu Gothic" pitchFamily="34" charset="-122"/>
-                <a:cs typeface="Yu Gothic" pitchFamily="34" charset="-120"/>
-              </a:rPr>
-              <a:t>1</a:t>
-            </a:r>
-            <a:endParaRPr lang="en-US" sz="1300" dirty="0"/>
-          </a:p>
-        </p:txBody>
-      </p:sp>
-      <p:sp>
-        <p:nvSpPr>
-          <p:cNvPr id="8" name="Text 6"/>
-          <p:cNvSpPr txBox="1"/>
-          <p:nvPr/>
-        </p:nvSpPr>
-        <p:spPr>
-          <a:xfrm>
-            <a:off x="1051560" y="2944368"/>
-            <a:ext cx="2834640" cy="731520"/>
-          </a:xfrm>
-          <a:prstGeom prst="rect">
-            <a:avLst/>
-          </a:prstGeom>
-          <a:noFill/>
-          <a:ln/>
-        </p:spPr>
-        <p:txBody>
-          <a:bodyPr wrap="square" lIns="0" tIns="0" rIns="0" bIns="0" rtlCol="0" anchor="ctr"/>
-          <a:lstStyle/>
-          <a:p>
-            <a:pPr indent="0" marL="0">
-              <a:lnSpc>
-                <a:spcPct val="125000"/>
-              </a:lnSpc>
-              <a:buNone/>
-            </a:pPr>
-            <a:r>
-              <a:rPr lang="en-US" sz="1450" b="1" dirty="0">
-                <a:solidFill>
-                  <a:srgbClr val="23201D"/>
-                </a:solidFill>
-                <a:latin typeface="Yu Gothic" pitchFamily="34" charset="0"/>
-                <a:ea typeface="Yu Gothic" pitchFamily="34" charset="-122"/>
-                <a:cs typeface="Yu Gothic" pitchFamily="34" charset="-120"/>
-              </a:rPr>
-              <a:t>作ったものを全部並べる</a:t>
-            </a:r>
-            <a:endParaRPr lang="en-US" sz="1450" dirty="0"/>
-          </a:p>
-        </p:txBody>
-      </p:sp>
-      <p:sp>
-        <p:nvSpPr>
-          <p:cNvPr id="9" name="Text 7"/>
-          <p:cNvSpPr txBox="1"/>
-          <p:nvPr/>
-        </p:nvSpPr>
-        <p:spPr>
-          <a:xfrm>
-            <a:off x="1051560" y="3703320"/>
-            <a:ext cx="2834640" cy="1188720"/>
+            <a:off x="1097280" y="2231136"/>
+            <a:ext cx="9966960" cy="603504"/>
           </a:xfrm>
           <a:prstGeom prst="rect">
             <a:avLst/>
@@ -8807,30 +10862,30 @@
               <a:buNone/>
             </a:pPr>
             <a:r>
-              <a:rPr lang="en-US" sz="1150" dirty="0">
-                <a:solidFill>
-                  <a:srgbClr val="5A534A"/>
-                </a:solidFill>
-                <a:latin typeface="Yu Gothic" pitchFamily="34" charset="0"/>
-                <a:ea typeface="Yu Gothic" pitchFamily="34" charset="-122"/>
-                <a:cs typeface="Yu Gothic" pitchFamily="34" charset="-120"/>
-              </a:rPr>
-              <a:t>12回分の成果物をお渡しします。第1回の記録とも突き合わせます</a:t>
-            </a:r>
-            <a:endParaRPr lang="en-US" sz="1150" dirty="0"/>
-          </a:p>
-        </p:txBody>
-      </p:sp>
-      <p:sp>
-        <p:nvSpPr>
-          <p:cNvPr id="10" name="Shape 8"/>
+              <a:rPr lang="en-US" sz="1250" dirty="0">
+                <a:solidFill>
+                  <a:srgbClr val="3F3933"/>
+                </a:solidFill>
+                <a:latin typeface="Yu Gothic" pitchFamily="34" charset="0"/>
+                <a:ea typeface="Yu Gothic" pitchFamily="34" charset="-122"/>
+                <a:cs typeface="Yu Gothic" pitchFamily="34" charset="-120"/>
+              </a:rPr>
+              <a:t>下書きと転記が減ります。空いた時間を何に使うかは、これからみなさんと決めていきます。</a:t>
+            </a:r>
+            <a:endParaRPr lang="en-US" sz="1250" dirty="0"/>
+          </a:p>
+        </p:txBody>
+      </p:sp>
+      <p:sp>
+        <p:nvSpPr>
+          <p:cNvPr id="8" name="Shape 6"/>
           <p:cNvSpPr/>
           <p:nvPr/>
         </p:nvSpPr>
         <p:spPr>
           <a:xfrm>
-            <a:off x="4389120" y="2148840"/>
-            <a:ext cx="3383280" cy="2880360"/>
+            <a:off x="777240" y="3035808"/>
+            <a:ext cx="10607040" cy="1170432"/>
           </a:xfrm>
           <a:prstGeom prst="rect">
             <a:avLst/>
@@ -8848,16 +10903,16 @@
       </p:sp>
       <p:sp>
         <p:nvSpPr>
-          <p:cNvPr id="11" name="Shape 9"/>
+          <p:cNvPr id="9" name="Shape 7"/>
           <p:cNvSpPr/>
           <p:nvPr/>
         </p:nvSpPr>
         <p:spPr>
           <a:xfrm>
-            <a:off x="4663440" y="2395728"/>
-            <a:ext cx="438912" cy="438912"/>
-          </a:xfrm>
-          <a:prstGeom prst="ellipse">
+            <a:off x="777240" y="3035808"/>
+            <a:ext cx="54864" cy="1170432"/>
+          </a:xfrm>
+          <a:prstGeom prst="rect">
             <a:avLst/>
           </a:prstGeom>
           <a:solidFill>
@@ -8873,95 +10928,53 @@
       </p:sp>
       <p:sp>
         <p:nvSpPr>
-          <p:cNvPr id="12" name="Text 10"/>
-          <p:cNvSpPr txBox="1"/>
-          <p:nvPr/>
-        </p:nvSpPr>
-        <p:spPr>
-          <a:xfrm>
-            <a:off x="4663440" y="2395728"/>
-            <a:ext cx="438912" cy="438912"/>
-          </a:xfrm>
-          <a:prstGeom prst="rect">
-            <a:avLst/>
-          </a:prstGeom>
-          <a:noFill/>
-          <a:ln/>
-        </p:spPr>
-        <p:txBody>
-          <a:bodyPr wrap="square" lIns="0" tIns="0" rIns="0" bIns="0" rtlCol="0" anchor="ctr"/>
-          <a:lstStyle/>
-          <a:p>
-            <a:pPr algn="ctr" indent="0" marL="0">
-              <a:buNone/>
-            </a:pPr>
-            <a:r>
-              <a:rPr lang="en-US" sz="1300" b="1" dirty="0">
-                <a:solidFill>
-                  <a:srgbClr val="FFFFFF"/>
-                </a:solidFill>
-                <a:latin typeface="Yu Gothic" pitchFamily="34" charset="0"/>
-                <a:ea typeface="Yu Gothic" pitchFamily="34" charset="-122"/>
-                <a:cs typeface="Yu Gothic" pitchFamily="34" charset="-120"/>
-              </a:rPr>
-              <a:t>2</a:t>
-            </a:r>
-            <a:endParaRPr lang="en-US" sz="1300" dirty="0"/>
-          </a:p>
-        </p:txBody>
-      </p:sp>
-      <p:sp>
-        <p:nvSpPr>
-          <p:cNvPr id="13" name="Text 11"/>
-          <p:cNvSpPr txBox="1"/>
-          <p:nvPr/>
-        </p:nvSpPr>
-        <p:spPr>
-          <a:xfrm>
-            <a:off x="4663440" y="2944368"/>
-            <a:ext cx="2834640" cy="731520"/>
-          </a:xfrm>
-          <a:prstGeom prst="rect">
-            <a:avLst/>
-          </a:prstGeom>
-          <a:noFill/>
-          <a:ln/>
-        </p:spPr>
-        <p:txBody>
-          <a:bodyPr wrap="square" lIns="0" tIns="0" rIns="0" bIns="0" rtlCol="0" anchor="ctr"/>
-          <a:lstStyle/>
-          <a:p>
-            <a:pPr indent="0" marL="0">
-              <a:lnSpc>
-                <a:spcPct val="125000"/>
-              </a:lnSpc>
-              <a:buNone/>
-            </a:pPr>
-            <a:r>
-              <a:rPr lang="en-US" sz="1450" b="1" dirty="0">
-                <a:solidFill>
-                  <a:srgbClr val="23201D"/>
-                </a:solidFill>
-                <a:latin typeface="Yu Gothic" pitchFamily="34" charset="0"/>
-                <a:ea typeface="Yu Gothic" pitchFamily="34" charset="-122"/>
-                <a:cs typeface="Yu Gothic" pitchFamily="34" charset="-120"/>
-              </a:rPr>
-              <a:t>3年構想を1枚にする</a:t>
-            </a:r>
-            <a:endParaRPr lang="en-US" sz="1450" dirty="0"/>
-          </a:p>
-        </p:txBody>
-      </p:sp>
-      <p:sp>
-        <p:nvSpPr>
-          <p:cNvPr id="14" name="Text 12"/>
-          <p:cNvSpPr txBox="1"/>
-          <p:nvPr/>
-        </p:nvSpPr>
-        <p:spPr>
-          <a:xfrm>
-            <a:off x="4663440" y="3703320"/>
-            <a:ext cx="2834640" cy="1188720"/>
+          <p:cNvPr id="10" name="Text 8"/>
+          <p:cNvSpPr txBox="1"/>
+          <p:nvPr/>
+        </p:nvSpPr>
+        <p:spPr>
+          <a:xfrm>
+            <a:off x="1097280" y="3127248"/>
+            <a:ext cx="9966960" cy="384048"/>
+          </a:xfrm>
+          <a:prstGeom prst="rect">
+            <a:avLst/>
+          </a:prstGeom>
+          <a:noFill/>
+          <a:ln/>
+        </p:spPr>
+        <p:txBody>
+          <a:bodyPr wrap="square" lIns="0" tIns="0" rIns="0" bIns="0" rtlCol="0" anchor="ctr"/>
+          <a:lstStyle/>
+          <a:p>
+            <a:pPr indent="0" marL="0">
+              <a:buNone/>
+            </a:pPr>
+            <a:r>
+              <a:rPr lang="en-US" sz="1400" b="1" dirty="0">
+                <a:solidFill>
+                  <a:srgbClr val="2F4F6B"/>
+                </a:solidFill>
+                <a:latin typeface="Yu Gothic" pitchFamily="34" charset="0"/>
+                <a:ea typeface="Yu Gothic" pitchFamily="34" charset="-122"/>
+                <a:cs typeface="Yu Gothic" pitchFamily="34" charset="-120"/>
+              </a:rPr>
+              <a:t>「新しく入る人にも、これを教えるのですか」</a:t>
+            </a:r>
+            <a:endParaRPr lang="en-US" sz="1400" dirty="0"/>
+          </a:p>
+        </p:txBody>
+      </p:sp>
+      <p:sp>
+        <p:nvSpPr>
+          <p:cNvPr id="11" name="Text 9"/>
+          <p:cNvSpPr txBox="1"/>
+          <p:nvPr/>
+        </p:nvSpPr>
+        <p:spPr>
+          <a:xfrm>
+            <a:off x="1097280" y="3529584"/>
+            <a:ext cx="9966960" cy="603504"/>
           </a:xfrm>
           <a:prstGeom prst="rect">
             <a:avLst/>
@@ -8980,30 +10993,30 @@
               <a:buNone/>
             </a:pPr>
             <a:r>
-              <a:rPr lang="en-US" sz="1150" dirty="0">
-                <a:solidFill>
-                  <a:srgbClr val="5A534A"/>
-                </a:solidFill>
-                <a:latin typeface="Yu Gothic" pitchFamily="34" charset="0"/>
-                <a:ea typeface="Yu Gothic" pitchFamily="34" charset="-122"/>
-                <a:cs typeface="Yu Gothic" pitchFamily="34" charset="-120"/>
-              </a:rPr>
-              <a:t>4つの問いに答えます。ここは社員退席後でも構いません</a:t>
-            </a:r>
-            <a:endParaRPr lang="en-US" sz="1150" dirty="0"/>
-          </a:p>
-        </p:txBody>
-      </p:sp>
-      <p:sp>
-        <p:nvSpPr>
-          <p:cNvPr id="15" name="Shape 13"/>
+              <a:rPr lang="en-US" sz="1250" dirty="0">
+                <a:solidFill>
+                  <a:srgbClr val="3F3933"/>
+                </a:solidFill>
+                <a:latin typeface="Yu Gothic" pitchFamily="34" charset="0"/>
+                <a:ea typeface="Yu Gothic" pitchFamily="34" charset="-122"/>
+                <a:cs typeface="Yu Gothic" pitchFamily="34" charset="-120"/>
+              </a:rPr>
+              <a:t>教えます。手順書と専用AIがあるので、覚えることはむしろ減っています。</a:t>
+            </a:r>
+            <a:endParaRPr lang="en-US" sz="1250" dirty="0"/>
+          </a:p>
+        </p:txBody>
+      </p:sp>
+      <p:sp>
+        <p:nvSpPr>
+          <p:cNvPr id="12" name="Shape 10"/>
           <p:cNvSpPr/>
           <p:nvPr/>
         </p:nvSpPr>
         <p:spPr>
           <a:xfrm>
-            <a:off x="8001000" y="2148840"/>
-            <a:ext cx="3383280" cy="2880360"/>
+            <a:off x="777240" y="4334256"/>
+            <a:ext cx="10607040" cy="1170432"/>
           </a:xfrm>
           <a:prstGeom prst="rect">
             <a:avLst/>
@@ -9021,16 +11034,16 @@
       </p:sp>
       <p:sp>
         <p:nvSpPr>
-          <p:cNvPr id="16" name="Shape 14"/>
+          <p:cNvPr id="13" name="Shape 11"/>
           <p:cNvSpPr/>
           <p:nvPr/>
         </p:nvSpPr>
         <p:spPr>
           <a:xfrm>
-            <a:off x="8275320" y="2395728"/>
-            <a:ext cx="438912" cy="438912"/>
-          </a:xfrm>
-          <a:prstGeom prst="ellipse">
+            <a:off x="777240" y="4334256"/>
+            <a:ext cx="54864" cy="1170432"/>
+          </a:xfrm>
+          <a:prstGeom prst="rect">
             <a:avLst/>
           </a:prstGeom>
           <a:solidFill>
@@ -9046,95 +11059,53 @@
       </p:sp>
       <p:sp>
         <p:nvSpPr>
-          <p:cNvPr id="17" name="Text 15"/>
-          <p:cNvSpPr txBox="1"/>
-          <p:nvPr/>
-        </p:nvSpPr>
-        <p:spPr>
-          <a:xfrm>
-            <a:off x="8275320" y="2395728"/>
-            <a:ext cx="438912" cy="438912"/>
-          </a:xfrm>
-          <a:prstGeom prst="rect">
-            <a:avLst/>
-          </a:prstGeom>
-          <a:noFill/>
-          <a:ln/>
-        </p:spPr>
-        <p:txBody>
-          <a:bodyPr wrap="square" lIns="0" tIns="0" rIns="0" bIns="0" rtlCol="0" anchor="ctr"/>
-          <a:lstStyle/>
-          <a:p>
-            <a:pPr algn="ctr" indent="0" marL="0">
-              <a:buNone/>
-            </a:pPr>
-            <a:r>
-              <a:rPr lang="en-US" sz="1300" b="1" dirty="0">
-                <a:solidFill>
-                  <a:srgbClr val="FFFFFF"/>
-                </a:solidFill>
-                <a:latin typeface="Yu Gothic" pitchFamily="34" charset="0"/>
-                <a:ea typeface="Yu Gothic" pitchFamily="34" charset="-122"/>
-                <a:cs typeface="Yu Gothic" pitchFamily="34" charset="-120"/>
-              </a:rPr>
-              <a:t>3</a:t>
-            </a:r>
-            <a:endParaRPr lang="en-US" sz="1300" dirty="0"/>
-          </a:p>
-        </p:txBody>
-      </p:sp>
-      <p:sp>
-        <p:nvSpPr>
-          <p:cNvPr id="18" name="Text 16"/>
-          <p:cNvSpPr txBox="1"/>
-          <p:nvPr/>
-        </p:nvSpPr>
-        <p:spPr>
-          <a:xfrm>
-            <a:off x="8275320" y="2944368"/>
-            <a:ext cx="2834640" cy="731520"/>
-          </a:xfrm>
-          <a:prstGeom prst="rect">
-            <a:avLst/>
-          </a:prstGeom>
-          <a:noFill/>
-          <a:ln/>
-        </p:spPr>
-        <p:txBody>
-          <a:bodyPr wrap="square" lIns="0" tIns="0" rIns="0" bIns="0" rtlCol="0" anchor="ctr"/>
-          <a:lstStyle/>
-          <a:p>
-            <a:pPr indent="0" marL="0">
-              <a:lnSpc>
-                <a:spcPct val="125000"/>
-              </a:lnSpc>
-              <a:buNone/>
-            </a:pPr>
-            <a:r>
-              <a:rPr lang="en-US" sz="1450" b="1" dirty="0">
-                <a:solidFill>
-                  <a:srgbClr val="23201D"/>
-                </a:solidFill>
-                <a:latin typeface="Yu Gothic" pitchFamily="34" charset="0"/>
-                <a:ea typeface="Yu Gothic" pitchFamily="34" charset="-122"/>
-                <a:cs typeface="Yu Gothic" pitchFamily="34" charset="-120"/>
-              </a:rPr>
-              <a:t>社員のみなさんに方針を話す</a:t>
-            </a:r>
-            <a:endParaRPr lang="en-US" sz="1450" dirty="0"/>
-          </a:p>
-        </p:txBody>
-      </p:sp>
-      <p:sp>
-        <p:nvSpPr>
-          <p:cNvPr id="19" name="Text 17"/>
-          <p:cNvSpPr txBox="1"/>
-          <p:nvPr/>
-        </p:nvSpPr>
-        <p:spPr>
-          <a:xfrm>
-            <a:off x="8275320" y="3703320"/>
-            <a:ext cx="2834640" cy="1188720"/>
+          <p:cNvPr id="14" name="Text 12"/>
+          <p:cNvSpPr txBox="1"/>
+          <p:nvPr/>
+        </p:nvSpPr>
+        <p:spPr>
+          <a:xfrm>
+            <a:off x="1097280" y="4425696"/>
+            <a:ext cx="9966960" cy="384048"/>
+          </a:xfrm>
+          <a:prstGeom prst="rect">
+            <a:avLst/>
+          </a:prstGeom>
+          <a:noFill/>
+          <a:ln/>
+        </p:spPr>
+        <p:txBody>
+          <a:bodyPr wrap="square" lIns="0" tIns="0" rIns="0" bIns="0" rtlCol="0" anchor="ctr"/>
+          <a:lstStyle/>
+          <a:p>
+            <a:pPr indent="0" marL="0">
+              <a:buNone/>
+            </a:pPr>
+            <a:r>
+              <a:rPr lang="en-US" sz="1400" b="1" dirty="0">
+                <a:solidFill>
+                  <a:srgbClr val="2F4F6B"/>
+                </a:solidFill>
+                <a:latin typeface="Yu Gothic" pitchFamily="34" charset="0"/>
+                <a:ea typeface="Yu Gothic" pitchFamily="34" charset="-122"/>
+                <a:cs typeface="Yu Gothic" pitchFamily="34" charset="-120"/>
+              </a:rPr>
+              <a:t>「うまくいかなかったら、やめることもありますか」</a:t>
+            </a:r>
+            <a:endParaRPr lang="en-US" sz="1400" dirty="0"/>
+          </a:p>
+        </p:txBody>
+      </p:sp>
+      <p:sp>
+        <p:nvSpPr>
+          <p:cNvPr id="15" name="Text 13"/>
+          <p:cNvSpPr txBox="1"/>
+          <p:nvPr/>
+        </p:nvSpPr>
+        <p:spPr>
+          <a:xfrm>
+            <a:off x="1097280" y="4828032"/>
+            <a:ext cx="9966960" cy="603504"/>
           </a:xfrm>
           <a:prstGeom prst="rect">
             <a:avLst/>
@@ -9153,23 +11124,23 @@
               <a:buNone/>
             </a:pPr>
             <a:r>
-              <a:rPr lang="en-US" sz="1150" dirty="0">
-                <a:solidFill>
-                  <a:srgbClr val="5A534A"/>
-                </a:solidFill>
-                <a:latin typeface="Yu Gothic" pitchFamily="34" charset="0"/>
-                <a:ea typeface="Yu Gothic" pitchFamily="34" charset="-122"/>
-                <a:cs typeface="Yu Gothic" pitchFamily="34" charset="-120"/>
-              </a:rPr>
-              <a:t>これからどうするかを、社長ご自身の言葉で</a:t>
-            </a:r>
-            <a:endParaRPr lang="en-US" sz="1150" dirty="0"/>
-          </a:p>
-        </p:txBody>
-      </p:sp>
-      <p:sp>
-        <p:nvSpPr>
-          <p:cNvPr id="20" name="Text 18"/>
+              <a:rPr lang="en-US" sz="1250" dirty="0">
+                <a:solidFill>
+                  <a:srgbClr val="3F3933"/>
+                </a:solidFill>
+                <a:latin typeface="Yu Gothic" pitchFamily="34" charset="0"/>
+                <a:ea typeface="Yu Gothic" pitchFamily="34" charset="-122"/>
+                <a:cs typeface="Yu Gothic" pitchFamily="34" charset="-120"/>
+              </a:rPr>
+              <a:t>あります。3か月ごとに費用と効果を見て、合わなければ縮小します。やめる基準も決めてあります。</a:t>
+            </a:r>
+            <a:endParaRPr lang="en-US" sz="1250" dirty="0"/>
+          </a:p>
+        </p:txBody>
+      </p:sp>
+      <p:sp>
+        <p:nvSpPr>
+          <p:cNvPr id="16" name="Text 14"/>
           <p:cNvSpPr txBox="1"/>
           <p:nvPr/>
         </p:nvSpPr>
@@ -9208,7 +11179,7 @@
       </p:sp>
       <p:sp>
         <p:nvSpPr>
-          <p:cNvPr id="21" name="Text 19"/>
+          <p:cNvPr id="17" name="Text 15"/>
           <p:cNvSpPr txBox="1"/>
           <p:nvPr/>
         </p:nvSpPr>
@@ -9239,7 +11210,7 @@
                 <a:ea typeface="Yu Gothic" pitchFamily="34" charset="-122"/>
                 <a:cs typeface="Yu Gothic" pitchFamily="34" charset="-120"/>
               </a:rPr>
-              <a:t>演習</a:t>
+              <a:t>想定問答</a:t>
             </a:r>
             <a:endParaRPr lang="en-US" sz="900" dirty="0"/>
           </a:p>

--- a/slides/pptx/第12回_AIを前提に事業を組み直す.pptx
+++ b/slides/pptx/第12回_AIを前提に事業を組み直す.pptx
@@ -4604,7 +4604,7 @@
                 <a:ea typeface="Yu Gothic" pitchFamily="34" charset="-122"/>
                 <a:cs typeface="Yu Gothic" pitchFamily="34" charset="-120"/>
               </a:rPr>
-              <a:t>他社では</a:t>
+              <a:t>よくある型</a:t>
             </a:r>
             <a:endParaRPr lang="en-US" sz="900" dirty="0"/>
           </a:p>
@@ -4646,7 +4646,7 @@
                 <a:ea typeface="Yu Gothic" pitchFamily="34" charset="-122"/>
                 <a:cs typeface="Yu Gothic" pitchFamily="34" charset="-120"/>
               </a:rPr>
-              <a:t>3年構想に「AIで受けられる仕事の種類を増やす」と書いた会社があります。1年後に実際に増えたのは種類ではなく、受注できる案件の規模でした。構想どおりにはならなかったが、構想を書いたから気づけた、と社長が言っていました。</a:t>
+              <a:t>3年構想は、書いたとおりにはならない。ただ、書いたから気づけることがある。当てるための紙ではなく、気づくための紙だと考える。</a:t>
             </a:r>
             <a:endParaRPr lang="en-US" sz="1250" dirty="0"/>
           </a:p>

--- a/slides/pptx/第12回_AIを前提に事業を組み直す.pptx
+++ b/slides/pptx/第12回_AIを前提に事業を組み直す.pptx
@@ -3146,7 +3146,7 @@
                 <a:ea typeface="Yu Gothic" pitchFamily="34" charset="-122"/>
                 <a:cs typeface="Yu Gothic" pitchFamily="34" charset="-120"/>
               </a:rPr>
-              <a:t>55分。操作するのはご自身です。</a:t>
+              <a:t>社員同席・発表を含む。操作するのはご自身です。</a:t>
             </a:r>
             <a:endParaRPr lang="en-US" sz="1250" dirty="0"/>
           </a:p>

--- a/slides/pptx/第12回_AIを前提に事業を組み直す.pptx
+++ b/slides/pptx/第12回_AIを前提に事業を組み直す.pptx
@@ -6332,7 +6332,7 @@
                 <a:ea typeface="Yu Gothic" pitchFamily="34" charset="-122"/>
                 <a:cs typeface="Yu Gothic" pitchFamily="34" charset="-120"/>
               </a:rPr>
-              <a:t>0-15分</a:t>
+              <a:t>0-20分</a:t>
             </a:r>
             <a:endParaRPr lang="en-US" sz="900" dirty="0"/>
           </a:p>
@@ -6371,7 +6371,7 @@
                 <a:ea typeface="Yu Gothic" pitchFamily="34" charset="-122"/>
                 <a:cs typeface="Yu Gothic" pitchFamily="34" charset="-120"/>
               </a:rPr>
-              <a:t>前回の宿題を実物で</a:t>
+              <a:t>宿題確認・棚卸し</a:t>
             </a:r>
             <a:endParaRPr lang="en-US" sz="1100" dirty="0"/>
           </a:p>
@@ -6410,7 +6410,7 @@
                 <a:ea typeface="Yu Gothic" pitchFamily="34" charset="-122"/>
                 <a:cs typeface="Yu Gothic" pitchFamily="34" charset="-120"/>
               </a:rPr>
-              <a:t>15-35分</a:t>
+              <a:t>20-50分</a:t>
             </a:r>
             <a:endParaRPr lang="en-US" sz="900" dirty="0"/>
           </a:p>
@@ -6449,7 +6449,7 @@
                 <a:ea typeface="Yu Gothic" pitchFamily="34" charset="-122"/>
                 <a:cs typeface="Yu Gothic" pitchFamily="34" charset="-120"/>
               </a:rPr>
-              <a:t>テーマとデモ</a:t>
+              <a:t>3年構想を書く</a:t>
             </a:r>
             <a:endParaRPr lang="en-US" sz="1100" dirty="0"/>
           </a:p>
@@ -6488,7 +6488,7 @@
                 <a:ea typeface="Yu Gothic" pitchFamily="34" charset="-122"/>
                 <a:cs typeface="Yu Gothic" pitchFamily="34" charset="-120"/>
               </a:rPr>
-              <a:t>35-90分</a:t>
+              <a:t>50-70分</a:t>
             </a:r>
             <a:endParaRPr lang="en-US" sz="900" dirty="0"/>
           </a:p>
@@ -6527,7 +6527,7 @@
                 <a:ea typeface="Yu Gothic" pitchFamily="34" charset="-122"/>
                 <a:cs typeface="Yu Gothic" pitchFamily="34" charset="-120"/>
               </a:rPr>
-              <a:t>一緒に手を動かす</a:t>
+              <a:t>社内向け説明</a:t>
             </a:r>
             <a:endParaRPr lang="en-US" sz="1100" dirty="0"/>
           </a:p>
@@ -6566,7 +6566,7 @@
                 <a:ea typeface="Yu Gothic" pitchFamily="34" charset="-122"/>
                 <a:cs typeface="Yu Gothic" pitchFamily="34" charset="-120"/>
               </a:rPr>
-              <a:t>90-105分</a:t>
+              <a:t>70-105分</a:t>
             </a:r>
             <a:endParaRPr lang="en-US" sz="900" dirty="0"/>
           </a:p>
@@ -6605,7 +6605,7 @@
                 <a:ea typeface="Yu Gothic" pitchFamily="34" charset="-122"/>
                 <a:cs typeface="Yu Gothic" pitchFamily="34" charset="-120"/>
               </a:rPr>
-              <a:t>業務への組み込み</a:t>
+              <a:t>ロードマップ改訂</a:t>
             </a:r>
             <a:endParaRPr lang="en-US" sz="1100" dirty="0"/>
           </a:p>
@@ -6683,7 +6683,7 @@
                 <a:ea typeface="Yu Gothic" pitchFamily="34" charset="-122"/>
                 <a:cs typeface="Yu Gothic" pitchFamily="34" charset="-120"/>
               </a:rPr>
-              <a:t>宿題・記録</a:t>
+              <a:t>引き渡し・締め</a:t>
             </a:r>
             <a:endParaRPr lang="en-US" sz="1100" dirty="0"/>
           </a:p>

--- a/slides/pptx/第12回_AIを前提に事業を組み直す.pptx
+++ b/slides/pptx/第12回_AIを前提に事業を組み直す.pptx
@@ -2304,6 +2304,10 @@
             <a:prstDash val="solid"/>
           </a:ln>
         </p:spPr>
+        <p:txBody>
+          <a:bodyPr/>
+          <a:p/>
+        </p:txBody>
       </p:sp>
       <p:sp>
         <p:nvSpPr>
@@ -2517,6 +2521,10 @@
             <a:prstDash val="solid"/>
           </a:ln>
         </p:spPr>
+        <p:txBody>
+          <a:bodyPr/>
+          <a:p/>
+        </p:txBody>
       </p:sp>
       <p:sp>
         <p:nvSpPr>
@@ -2581,6 +2589,10 @@
             <a:prstDash val="solid"/>
           </a:ln>
         </p:spPr>
+        <p:txBody>
+          <a:bodyPr/>
+          <a:p/>
+        </p:txBody>
       </p:sp>
       <p:sp>
         <p:nvSpPr>
@@ -2648,6 +2660,10 @@
             <a:prstDash val="solid"/>
           </a:ln>
         </p:spPr>
+        <p:txBody>
+          <a:bodyPr/>
+          <a:p/>
+        </p:txBody>
       </p:sp>
       <p:sp>
         <p:nvSpPr>
@@ -2712,6 +2728,10 @@
             <a:prstDash val="solid"/>
           </a:ln>
         </p:spPr>
+        <p:txBody>
+          <a:bodyPr/>
+          <a:p/>
+        </p:txBody>
       </p:sp>
       <p:sp>
         <p:nvSpPr>
@@ -2779,6 +2799,10 @@
             <a:prstDash val="solid"/>
           </a:ln>
         </p:spPr>
+        <p:txBody>
+          <a:bodyPr/>
+          <a:p/>
+        </p:txBody>
       </p:sp>
       <p:sp>
         <p:nvSpPr>
@@ -2843,6 +2867,10 @@
             <a:prstDash val="solid"/>
           </a:ln>
         </p:spPr>
+        <p:txBody>
+          <a:bodyPr/>
+          <a:p/>
+        </p:txBody>
       </p:sp>
       <p:sp>
         <p:nvSpPr>
@@ -3068,7 +3096,7 @@
                 <a:ea typeface="Yu Gothic" pitchFamily="34" charset="-122"/>
                 <a:cs typeface="Yu Gothic" pitchFamily="34" charset="-120"/>
               </a:rPr>
-              <a:t>演習</a:t>
+              <a:t>実演</a:t>
             </a:r>
             <a:endParaRPr lang="en-US" sz="1100" dirty="0"/>
           </a:p>
@@ -3146,7 +3174,7 @@
                 <a:ea typeface="Yu Gothic" pitchFamily="34" charset="-122"/>
                 <a:cs typeface="Yu Gothic" pitchFamily="34" charset="-120"/>
               </a:rPr>
-              <a:t>社員同席・発表を含む。操作するのはご自身です。</a:t>
+              <a:t>社員同席・発表を含む。発表するのは社長ご自身です。</a:t>
             </a:r>
             <a:endParaRPr lang="en-US" sz="1250" dirty="0"/>
           </a:p>
@@ -3176,6 +3204,10 @@
             <a:prstDash val="solid"/>
           </a:ln>
         </p:spPr>
+        <p:txBody>
+          <a:bodyPr/>
+          <a:p/>
+        </p:txBody>
       </p:sp>
       <p:sp>
         <p:nvSpPr>
@@ -3201,6 +3233,10 @@
             <a:prstDash val="solid"/>
           </a:ln>
         </p:spPr>
+        <p:txBody>
+          <a:bodyPr/>
+          <a:p/>
+        </p:txBody>
       </p:sp>
       <p:sp>
         <p:nvSpPr>
@@ -3349,6 +3385,10 @@
             <a:prstDash val="solid"/>
           </a:ln>
         </p:spPr>
+        <p:txBody>
+          <a:bodyPr/>
+          <a:p/>
+        </p:txBody>
       </p:sp>
       <p:sp>
         <p:nvSpPr>
@@ -3374,6 +3414,10 @@
             <a:prstDash val="solid"/>
           </a:ln>
         </p:spPr>
+        <p:txBody>
+          <a:bodyPr/>
+          <a:p/>
+        </p:txBody>
       </p:sp>
       <p:sp>
         <p:nvSpPr>
@@ -3522,6 +3566,10 @@
             <a:prstDash val="solid"/>
           </a:ln>
         </p:spPr>
+        <p:txBody>
+          <a:bodyPr/>
+          <a:p/>
+        </p:txBody>
       </p:sp>
       <p:sp>
         <p:nvSpPr>
@@ -3547,6 +3595,10 @@
             <a:prstDash val="solid"/>
           </a:ln>
         </p:spPr>
+        <p:txBody>
+          <a:bodyPr/>
+          <a:p/>
+        </p:txBody>
       </p:sp>
       <p:sp>
         <p:nvSpPr>
@@ -3743,7 +3795,7 @@
                 <a:ea typeface="Yu Gothic" pitchFamily="34" charset="-122"/>
                 <a:cs typeface="Yu Gothic" pitchFamily="34" charset="-120"/>
               </a:rPr>
-              <a:t>演習</a:t>
+              <a:t>実演</a:t>
             </a:r>
             <a:endParaRPr lang="en-US" sz="900" dirty="0"/>
           </a:p>
@@ -3922,6 +3974,10 @@
             <a:prstDash val="solid"/>
           </a:ln>
         </p:spPr>
+        <p:txBody>
+          <a:bodyPr/>
+          <a:p/>
+        </p:txBody>
       </p:sp>
       <p:sp>
         <p:nvSpPr>
@@ -3947,6 +4003,10 @@
             <a:prstDash val="solid"/>
           </a:ln>
         </p:spPr>
+        <p:txBody>
+          <a:bodyPr/>
+          <a:p/>
+        </p:txBody>
       </p:sp>
       <p:sp>
         <p:nvSpPr>
@@ -4053,6 +4113,10 @@
             <a:prstDash val="solid"/>
           </a:ln>
         </p:spPr>
+        <p:txBody>
+          <a:bodyPr/>
+          <a:p/>
+        </p:txBody>
       </p:sp>
       <p:sp>
         <p:nvSpPr>
@@ -4078,6 +4142,10 @@
             <a:prstDash val="solid"/>
           </a:ln>
         </p:spPr>
+        <p:txBody>
+          <a:bodyPr/>
+          <a:p/>
+        </p:txBody>
       </p:sp>
       <p:sp>
         <p:nvSpPr>
@@ -4184,6 +4252,10 @@
             <a:prstDash val="solid"/>
           </a:ln>
         </p:spPr>
+        <p:txBody>
+          <a:bodyPr/>
+          <a:p/>
+        </p:txBody>
       </p:sp>
       <p:sp>
         <p:nvSpPr>
@@ -4209,6 +4281,10 @@
             <a:prstDash val="solid"/>
           </a:ln>
         </p:spPr>
+        <p:txBody>
+          <a:bodyPr/>
+          <a:p/>
+        </p:txBody>
       </p:sp>
       <p:sp>
         <p:nvSpPr>
@@ -4503,6 +4579,10 @@
             <a:prstDash val="solid"/>
           </a:ln>
         </p:spPr>
+        <p:txBody>
+          <a:bodyPr/>
+          <a:p/>
+        </p:txBody>
       </p:sp>
       <p:sp>
         <p:nvSpPr>
@@ -4570,6 +4650,10 @@
             <a:prstDash val="solid"/>
           </a:ln>
         </p:spPr>
+        <p:txBody>
+          <a:bodyPr/>
+          <a:p/>
+        </p:txBody>
       </p:sp>
       <p:sp>
         <p:nvSpPr>
@@ -4903,6 +4987,10 @@
             <a:prstDash val="solid"/>
           </a:ln>
         </p:spPr>
+        <p:txBody>
+          <a:bodyPr/>
+          <a:p/>
+        </p:txBody>
       </p:sp>
       <p:sp>
         <p:nvSpPr>
@@ -5009,6 +5097,10 @@
             <a:prstDash val="solid"/>
           </a:ln>
         </p:spPr>
+        <p:txBody>
+          <a:bodyPr/>
+          <a:p/>
+        </p:txBody>
       </p:sp>
       <p:sp>
         <p:nvSpPr>
@@ -5115,6 +5207,10 @@
             <a:prstDash val="solid"/>
           </a:ln>
         </p:spPr>
+        <p:txBody>
+          <a:bodyPr/>
+          <a:p/>
+        </p:txBody>
       </p:sp>
       <p:sp>
         <p:nvSpPr>
@@ -5367,6 +5463,10 @@
             <a:prstDash val="solid"/>
           </a:ln>
         </p:spPr>
+        <p:txBody>
+          <a:bodyPr/>
+          <a:p/>
+        </p:txBody>
       </p:sp>
       <p:sp>
         <p:nvSpPr>
@@ -5664,6 +5764,10 @@
             <a:prstDash val="solid"/>
           </a:ln>
         </p:spPr>
+        <p:txBody>
+          <a:bodyPr/>
+          <a:p/>
+        </p:txBody>
       </p:sp>
       <p:sp>
         <p:nvSpPr>
@@ -5767,6 +5871,10 @@
             <a:prstDash val="solid"/>
           </a:ln>
         </p:spPr>
+        <p:txBody>
+          <a:bodyPr/>
+          <a:p/>
+        </p:txBody>
       </p:sp>
       <p:sp>
         <p:nvSpPr>
@@ -5870,6 +5978,10 @@
             <a:prstDash val="solid"/>
           </a:ln>
         </p:spPr>
+        <p:txBody>
+          <a:bodyPr/>
+          <a:p/>
+        </p:txBody>
       </p:sp>
       <p:sp>
         <p:nvSpPr>
@@ -5973,6 +6085,10 @@
             <a:prstDash val="solid"/>
           </a:ln>
         </p:spPr>
+        <p:txBody>
+          <a:bodyPr/>
+          <a:p/>
+        </p:txBody>
       </p:sp>
       <p:sp>
         <p:nvSpPr>
@@ -6231,6 +6347,10 @@
             <a:prstDash val="solid"/>
           </a:ln>
         </p:spPr>
+        <p:txBody>
+          <a:bodyPr/>
+          <a:p/>
+        </p:txBody>
       </p:sp>
       <p:sp>
         <p:nvSpPr>
@@ -6298,6 +6418,10 @@
             <a:prstDash val="solid"/>
           </a:ln>
         </p:spPr>
+        <p:txBody>
+          <a:bodyPr/>
+          <a:p/>
+        </p:txBody>
       </p:sp>
       <p:sp>
         <p:nvSpPr>
@@ -6901,6 +7025,10 @@
             <a:prstDash val="solid"/>
           </a:ln>
         </p:spPr>
+        <p:txBody>
+          <a:bodyPr/>
+          <a:p/>
+        </p:txBody>
       </p:sp>
       <p:sp>
         <p:nvSpPr>
@@ -6926,6 +7054,10 @@
             <a:prstDash val="solid"/>
           </a:ln>
         </p:spPr>
+        <p:txBody>
+          <a:bodyPr/>
+          <a:p/>
+        </p:txBody>
       </p:sp>
       <p:sp>
         <p:nvSpPr>
@@ -7071,6 +7203,10 @@
             <a:prstDash val="solid"/>
           </a:ln>
         </p:spPr>
+        <p:txBody>
+          <a:bodyPr/>
+          <a:p/>
+        </p:txBody>
       </p:sp>
       <p:sp>
         <p:nvSpPr>
@@ -7096,6 +7232,10 @@
             <a:prstDash val="solid"/>
           </a:ln>
         </p:spPr>
+        <p:txBody>
+          <a:bodyPr/>
+          <a:p/>
+        </p:txBody>
       </p:sp>
       <p:sp>
         <p:nvSpPr>
@@ -7241,6 +7381,10 @@
             <a:prstDash val="solid"/>
           </a:ln>
         </p:spPr>
+        <p:txBody>
+          <a:bodyPr/>
+          <a:p/>
+        </p:txBody>
       </p:sp>
       <p:sp>
         <p:nvSpPr>
@@ -7266,6 +7410,10 @@
             <a:prstDash val="solid"/>
           </a:ln>
         </p:spPr>
+        <p:txBody>
+          <a:bodyPr/>
+          <a:p/>
+        </p:txBody>
       </p:sp>
       <p:sp>
         <p:nvSpPr>
@@ -7411,6 +7559,10 @@
             <a:prstDash val="solid"/>
           </a:ln>
         </p:spPr>
+        <p:txBody>
+          <a:bodyPr/>
+          <a:p/>
+        </p:txBody>
       </p:sp>
       <p:sp>
         <p:nvSpPr>
@@ -7436,6 +7588,10 @@
             <a:prstDash val="solid"/>
           </a:ln>
         </p:spPr>
+        <p:txBody>
+          <a:bodyPr/>
+          <a:p/>
+        </p:txBody>
       </p:sp>
       <p:sp>
         <p:nvSpPr>
@@ -7808,6 +7964,10 @@
             <a:prstDash val="solid"/>
           </a:ln>
         </p:spPr>
+        <p:txBody>
+          <a:bodyPr/>
+          <a:p/>
+        </p:txBody>
       </p:sp>
       <p:sp>
         <p:nvSpPr>
@@ -7833,6 +7993,10 @@
             <a:prstDash val="solid"/>
           </a:ln>
         </p:spPr>
+        <p:txBody>
+          <a:bodyPr/>
+          <a:p/>
+        </p:txBody>
       </p:sp>
       <p:sp>
         <p:nvSpPr>
@@ -8631,6 +8795,10 @@
             <a:prstDash val="solid"/>
           </a:ln>
         </p:spPr>
+        <p:txBody>
+          <a:bodyPr/>
+          <a:p/>
+        </p:txBody>
       </p:sp>
       <p:sp>
         <p:nvSpPr>
@@ -8737,6 +8905,10 @@
             <a:prstDash val="solid"/>
           </a:ln>
         </p:spPr>
+        <p:txBody>
+          <a:bodyPr/>
+          <a:p/>
+        </p:txBody>
       </p:sp>
       <p:sp>
         <p:nvSpPr>
@@ -8969,6 +9141,10 @@
             <a:prstDash val="solid"/>
           </a:ln>
         </p:spPr>
+        <p:txBody>
+          <a:bodyPr/>
+          <a:p/>
+        </p:txBody>
       </p:sp>
       <p:sp>
         <p:nvSpPr>
@@ -9036,6 +9212,10 @@
             <a:prstDash val="solid"/>
           </a:ln>
         </p:spPr>
+        <p:txBody>
+          <a:bodyPr/>
+          <a:p/>
+        </p:txBody>
       </p:sp>
       <p:sp>
         <p:nvSpPr>
@@ -9288,6 +9468,10 @@
             <a:prstDash val="solid"/>
           </a:ln>
         </p:spPr>
+        <p:txBody>
+          <a:bodyPr/>
+          <a:p/>
+        </p:txBody>
       </p:sp>
       <p:sp>
         <p:nvSpPr>
@@ -9394,6 +9578,10 @@
             <a:prstDash val="solid"/>
           </a:ln>
         </p:spPr>
+        <p:txBody>
+          <a:bodyPr/>
+          <a:p/>
+        </p:txBody>
       </p:sp>
       <p:sp>
         <p:nvSpPr>
@@ -9626,6 +9814,10 @@
             <a:prstDash val="solid"/>
           </a:ln>
         </p:spPr>
+        <p:txBody>
+          <a:bodyPr/>
+          <a:p/>
+        </p:txBody>
       </p:sp>
       <p:sp>
         <p:nvSpPr>
@@ -9693,6 +9885,10 @@
             <a:prstDash val="solid"/>
           </a:ln>
         </p:spPr>
+        <p:txBody>
+          <a:bodyPr/>
+          <a:p/>
+        </p:txBody>
       </p:sp>
       <p:sp>
         <p:nvSpPr>
@@ -9945,6 +10141,10 @@
             <a:prstDash val="solid"/>
           </a:ln>
         </p:spPr>
+        <p:txBody>
+          <a:bodyPr/>
+          <a:p/>
+        </p:txBody>
       </p:sp>
       <p:sp>
         <p:nvSpPr>
@@ -10051,6 +10251,10 @@
             <a:prstDash val="solid"/>
           </a:ln>
         </p:spPr>
+        <p:txBody>
+          <a:bodyPr/>
+          <a:p/>
+        </p:txBody>
       </p:sp>
       <p:sp>
         <p:nvSpPr>
@@ -10157,6 +10361,10 @@
             <a:prstDash val="solid"/>
           </a:ln>
         </p:spPr>
+        <p:txBody>
+          <a:bodyPr/>
+          <a:p/>
+        </p:txBody>
       </p:sp>
       <p:sp>
         <p:nvSpPr>
@@ -10263,6 +10471,10 @@
             <a:prstDash val="solid"/>
           </a:ln>
         </p:spPr>
+        <p:txBody>
+          <a:bodyPr/>
+          <a:p/>
+        </p:txBody>
       </p:sp>
       <p:sp>
         <p:nvSpPr>
@@ -10369,6 +10581,10 @@
             <a:prstDash val="solid"/>
           </a:ln>
         </p:spPr>
+        <p:txBody>
+          <a:bodyPr/>
+          <a:p/>
+        </p:txBody>
       </p:sp>
       <p:sp>
         <p:nvSpPr>
@@ -10475,6 +10691,10 @@
             <a:prstDash val="solid"/>
           </a:ln>
         </p:spPr>
+        <p:txBody>
+          <a:bodyPr/>
+          <a:p/>
+        </p:txBody>
       </p:sp>
       <p:sp>
         <p:nvSpPr>
@@ -10769,6 +10989,10 @@
             <a:prstDash val="solid"/>
           </a:ln>
         </p:spPr>
+        <p:txBody>
+          <a:bodyPr/>
+          <a:p/>
+        </p:txBody>
       </p:sp>
       <p:sp>
         <p:nvSpPr>
@@ -10794,6 +11018,10 @@
             <a:prstDash val="solid"/>
           </a:ln>
         </p:spPr>
+        <p:txBody>
+          <a:bodyPr/>
+          <a:p/>
+        </p:txBody>
       </p:sp>
       <p:sp>
         <p:nvSpPr>
@@ -10900,6 +11128,10 @@
             <a:prstDash val="solid"/>
           </a:ln>
         </p:spPr>
+        <p:txBody>
+          <a:bodyPr/>
+          <a:p/>
+        </p:txBody>
       </p:sp>
       <p:sp>
         <p:nvSpPr>
@@ -10925,6 +11157,10 @@
             <a:prstDash val="solid"/>
           </a:ln>
         </p:spPr>
+        <p:txBody>
+          <a:bodyPr/>
+          <a:p/>
+        </p:txBody>
       </p:sp>
       <p:sp>
         <p:nvSpPr>
@@ -11031,6 +11267,10 @@
             <a:prstDash val="solid"/>
           </a:ln>
         </p:spPr>
+        <p:txBody>
+          <a:bodyPr/>
+          <a:p/>
+        </p:txBody>
       </p:sp>
       <p:sp>
         <p:nvSpPr>
@@ -11056,6 +11296,10 @@
             <a:prstDash val="solid"/>
           </a:ln>
         </p:spPr>
+        <p:txBody>
+          <a:bodyPr/>
+          <a:p/>
+        </p:txBody>
       </p:sp>
       <p:sp>
         <p:nvSpPr>

--- a/slides/pptx/第12回_AIを前提に事業を組み直す.pptx
+++ b/slides/pptx/第12回_AIを前提に事業を組み直す.pptx
@@ -17,12 +17,9 @@
     <p:sldId id="265" r:id="rId11"/>
     <p:sldId id="266" r:id="rId12"/>
     <p:sldId id="267" r:id="rId13"/>
-    <p:sldId id="268" r:id="rId14"/>
-    <p:sldId id="269" r:id="rId15"/>
-    <p:sldId id="270" r:id="rId16"/>
   </p:sldIdLst>
   <p:notesMasterIdLst>
-    <p:notesMasterId r:id="rId17"/>
+    <p:notesMasterId r:id="rId14"/>
   </p:notesMasterIdLst>
   <p:sldSz cx="12192000" cy="6858000"/>
   <p:notesSz cx="6858000" cy="12192000"/>
@@ -692,7 +689,11 @@
           <a:p>
             <a:r>
               <a:rPr lang="en-US" dirty="0"/>
-              <a:t>社員がいる時間帯と、退席後の作業を分ける。社員の前で内輪の作業を始めない。</a:t>
+              <a:t>掲載許諾は必ず書面で。数値の公開範囲まで確認する。口頭の了解で事例に使わない。
+【補足：この回で必ず伝えること】最後に、ひとつだけ
+この12回で最も効いたのは、講座の中で作ったものを翌日に一度使ってみることでした。使わなかったものは、どれだけよくできていても2週間で忘れます。逆に、一度でも実務で使えば、それは御社の仕組みになります。これから作るものについても、同じです。
+よくある型：3年構想は、書いたとおりにはならない。ただ、書いたから気づけることがある。当てるための紙ではなく、気づくための紙だと考える。
+最後のメッセージ。資料は読まず、自分の言葉で。この一言が、修了後の行動を左右する。</a:t>
             </a:r>
             <a:endParaRPr lang="en-US" dirty="0"/>
           </a:p>
@@ -780,7 +781,8 @@
           <a:p>
             <a:r>
               <a:rPr lang="en-US" dirty="0"/>
-              <a:t>掲載許諾は必ず書面で。数値の公開範囲まで確認する。口頭の了解で事例に使わない。</a:t>
+              <a:t>3か月後のフォローを、この場で日程まで仮押さえできると理想的。落ちるのは2か月目、と伝えておく。
+3か月後のフォロー日程を、この場で仮押さえできると理想的。カレンダーに入れてもらう。</a:t>
             </a:r>
             <a:endParaRPr lang="en-US" dirty="0"/>
           </a:p>
@@ -804,270 +806,6 @@
             <a:fld id="{F7021451-1387-4CA6-816F-3879F97B5CBC}" type="slidenum">
               <a:rPr lang="en-US"/>
               <a:t>12</a:t>
-            </a:fld>
-            <a:endParaRPr lang="en-US"/>
-          </a:p>
-        </p:txBody>
-      </p:sp>
-    </p:spTree>
-    <p:extLst>
-      <p:ext uri="{BB962C8B-B14F-4D97-AF65-F5344CB8AC3E}">
-        <p14:creationId xmlns:p14="http://schemas.microsoft.com/office/powerpoint/2010/main" val="1024086991"/>
-      </p:ext>
-    </p:extLst>
-  </p:cSld>
-  <p:clrMapOvr>
-    <a:masterClrMapping/>
-  </p:clrMapOvr>
-</p:notes>
-</file>
-
-<file path=ppt/notesSlides/notesSlide13.xml><?xml version="1.0" encoding="utf-8"?>
-<p:notes xmlns:a="http://schemas.openxmlformats.org/drawingml/2006/main" xmlns:r="http://schemas.openxmlformats.org/officeDocument/2006/relationships" xmlns:p="http://schemas.openxmlformats.org/presentationml/2006/main">
-  <p:cSld>
-    <p:spTree>
-      <p:nvGrpSpPr>
-        <p:cNvPr id="1" name=""/>
-        <p:cNvGrpSpPr/>
-        <p:nvPr/>
-      </p:nvGrpSpPr>
-      <p:grpSpPr>
-        <a:xfrm>
-          <a:off x="0" y="0"/>
-          <a:ext cx="0" cy="0"/>
-          <a:chOff x="0" y="0"/>
-          <a:chExt cx="0" cy="0"/>
-        </a:xfrm>
-      </p:grpSpPr>
-      <p:sp>
-        <p:nvSpPr>
-          <p:cNvPr id="2" name="Slide Image Placeholder 1"/>
-          <p:cNvSpPr>
-            <a:spLocks noGrp="1" noRot="1" noChangeAspect="1"/>
-          </p:cNvSpPr>
-          <p:nvPr>
-            <p:ph type="sldImg"/>
-          </p:nvPr>
-        </p:nvSpPr>
-        <p:spPr/>
-      </p:sp>
-      <p:sp>
-        <p:nvSpPr>
-          <p:cNvPr id="3" name="Notes Placeholder 2"/>
-          <p:cNvSpPr>
-            <a:spLocks noGrp="1"/>
-          </p:cNvSpPr>
-          <p:nvPr>
-            <p:ph type="body" idx="1"/>
-          </p:nvPr>
-        </p:nvSpPr>
-        <p:spPr/>
-        <p:txBody>
-          <a:bodyPr/>
-          <a:lstStyle/>
-          <a:p>
-            <a:r>
-              <a:rPr lang="en-US" dirty="0"/>
-              <a:t>最後のメッセージ。資料は読まず、自分の言葉で。この一言が、修了後の行動を左右する。</a:t>
-            </a:r>
-            <a:endParaRPr lang="en-US" dirty="0"/>
-          </a:p>
-        </p:txBody>
-      </p:sp>
-      <p:sp>
-        <p:nvSpPr>
-          <p:cNvPr id="4" name="Slide Number Placeholder 3"/>
-          <p:cNvSpPr>
-            <a:spLocks noGrp="1"/>
-          </p:cNvSpPr>
-          <p:nvPr>
-            <p:ph type="sldNum" sz="quarter" idx="10"/>
-          </p:nvPr>
-        </p:nvSpPr>
-        <p:spPr/>
-        <p:txBody>
-          <a:bodyPr/>
-          <a:lstStyle/>
-          <a:p>
-            <a:fld id="{F7021451-1387-4CA6-816F-3879F97B5CBC}" type="slidenum">
-              <a:rPr lang="en-US"/>
-              <a:t>13</a:t>
-            </a:fld>
-            <a:endParaRPr lang="en-US"/>
-          </a:p>
-        </p:txBody>
-      </p:sp>
-    </p:spTree>
-    <p:extLst>
-      <p:ext uri="{BB962C8B-B14F-4D97-AF65-F5344CB8AC3E}">
-        <p14:creationId xmlns:p14="http://schemas.microsoft.com/office/powerpoint/2010/main" val="1024086991"/>
-      </p:ext>
-    </p:extLst>
-  </p:cSld>
-  <p:clrMapOvr>
-    <a:masterClrMapping/>
-  </p:clrMapOvr>
-</p:notes>
-</file>
-
-<file path=ppt/notesSlides/notesSlide14.xml><?xml version="1.0" encoding="utf-8"?>
-<p:notes xmlns:a="http://schemas.openxmlformats.org/drawingml/2006/main" xmlns:r="http://schemas.openxmlformats.org/officeDocument/2006/relationships" xmlns:p="http://schemas.openxmlformats.org/presentationml/2006/main">
-  <p:cSld>
-    <p:spTree>
-      <p:nvGrpSpPr>
-        <p:cNvPr id="1" name=""/>
-        <p:cNvGrpSpPr/>
-        <p:nvPr/>
-      </p:nvGrpSpPr>
-      <p:grpSpPr>
-        <a:xfrm>
-          <a:off x="0" y="0"/>
-          <a:ext cx="0" cy="0"/>
-          <a:chOff x="0" y="0"/>
-          <a:chExt cx="0" cy="0"/>
-        </a:xfrm>
-      </p:grpSpPr>
-      <p:sp>
-        <p:nvSpPr>
-          <p:cNvPr id="2" name="Slide Image Placeholder 1"/>
-          <p:cNvSpPr>
-            <a:spLocks noGrp="1" noRot="1" noChangeAspect="1"/>
-          </p:cNvSpPr>
-          <p:nvPr>
-            <p:ph type="sldImg"/>
-          </p:nvPr>
-        </p:nvSpPr>
-        <p:spPr/>
-      </p:sp>
-      <p:sp>
-        <p:nvSpPr>
-          <p:cNvPr id="3" name="Notes Placeholder 2"/>
-          <p:cNvSpPr>
-            <a:spLocks noGrp="1"/>
-          </p:cNvSpPr>
-          <p:nvPr>
-            <p:ph type="body" idx="1"/>
-          </p:nvPr>
-        </p:nvSpPr>
-        <p:spPr/>
-        <p:txBody>
-          <a:bodyPr/>
-          <a:lstStyle/>
-          <a:p>
-            <a:r>
-              <a:rPr lang="en-US" dirty="0"/>
-              <a:t>3か月後のフォロー日程を、この場で仮押さえできると理想的。カレンダーに入れてもらう。</a:t>
-            </a:r>
-            <a:endParaRPr lang="en-US" dirty="0"/>
-          </a:p>
-        </p:txBody>
-      </p:sp>
-      <p:sp>
-        <p:nvSpPr>
-          <p:cNvPr id="4" name="Slide Number Placeholder 3"/>
-          <p:cNvSpPr>
-            <a:spLocks noGrp="1"/>
-          </p:cNvSpPr>
-          <p:nvPr>
-            <p:ph type="sldNum" sz="quarter" idx="10"/>
-          </p:nvPr>
-        </p:nvSpPr>
-        <p:spPr/>
-        <p:txBody>
-          <a:bodyPr/>
-          <a:lstStyle/>
-          <a:p>
-            <a:fld id="{F7021451-1387-4CA6-816F-3879F97B5CBC}" type="slidenum">
-              <a:rPr lang="en-US"/>
-              <a:t>14</a:t>
-            </a:fld>
-            <a:endParaRPr lang="en-US"/>
-          </a:p>
-        </p:txBody>
-      </p:sp>
-    </p:spTree>
-    <p:extLst>
-      <p:ext uri="{BB962C8B-B14F-4D97-AF65-F5344CB8AC3E}">
-        <p14:creationId xmlns:p14="http://schemas.microsoft.com/office/powerpoint/2010/main" val="1024086991"/>
-      </p:ext>
-    </p:extLst>
-  </p:cSld>
-  <p:clrMapOvr>
-    <a:masterClrMapping/>
-  </p:clrMapOvr>
-</p:notes>
-</file>
-
-<file path=ppt/notesSlides/notesSlide15.xml><?xml version="1.0" encoding="utf-8"?>
-<p:notes xmlns:a="http://schemas.openxmlformats.org/drawingml/2006/main" xmlns:r="http://schemas.openxmlformats.org/officeDocument/2006/relationships" xmlns:p="http://schemas.openxmlformats.org/presentationml/2006/main">
-  <p:cSld>
-    <p:spTree>
-      <p:nvGrpSpPr>
-        <p:cNvPr id="1" name=""/>
-        <p:cNvGrpSpPr/>
-        <p:nvPr/>
-      </p:nvGrpSpPr>
-      <p:grpSpPr>
-        <a:xfrm>
-          <a:off x="0" y="0"/>
-          <a:ext cx="0" cy="0"/>
-          <a:chOff x="0" y="0"/>
-          <a:chExt cx="0" cy="0"/>
-        </a:xfrm>
-      </p:grpSpPr>
-      <p:sp>
-        <p:nvSpPr>
-          <p:cNvPr id="2" name="Slide Image Placeholder 1"/>
-          <p:cNvSpPr>
-            <a:spLocks noGrp="1" noRot="1" noChangeAspect="1"/>
-          </p:cNvSpPr>
-          <p:nvPr>
-            <p:ph type="sldImg"/>
-          </p:nvPr>
-        </p:nvSpPr>
-        <p:spPr/>
-      </p:sp>
-      <p:sp>
-        <p:nvSpPr>
-          <p:cNvPr id="3" name="Notes Placeholder 2"/>
-          <p:cNvSpPr>
-            <a:spLocks noGrp="1"/>
-          </p:cNvSpPr>
-          <p:nvPr>
-            <p:ph type="body" idx="1"/>
-          </p:nvPr>
-        </p:nvSpPr>
-        <p:spPr/>
-        <p:txBody>
-          <a:bodyPr/>
-          <a:lstStyle/>
-          <a:p>
-            <a:r>
-              <a:rPr lang="en-US" dirty="0"/>
-              <a:t>3か月後のフォローを、この場で日程まで仮押さえできると理想的。落ちるのは2か月目、と伝えておく。</a:t>
-            </a:r>
-            <a:endParaRPr lang="en-US" dirty="0"/>
-          </a:p>
-        </p:txBody>
-      </p:sp>
-      <p:sp>
-        <p:nvSpPr>
-          <p:cNvPr id="4" name="Slide Number Placeholder 3"/>
-          <p:cNvSpPr>
-            <a:spLocks noGrp="1"/>
-          </p:cNvSpPr>
-          <p:nvPr>
-            <p:ph type="sldNum" sz="quarter" idx="10"/>
-          </p:nvPr>
-        </p:nvSpPr>
-        <p:spPr/>
-        <p:txBody>
-          <a:bodyPr/>
-          <a:lstStyle/>
-          <a:p>
-            <a:fld id="{F7021451-1387-4CA6-816F-3879F97B5CBC}" type="slidenum">
-              <a:rPr lang="en-US"/>
-              <a:t>15</a:t>
             </a:fld>
             <a:endParaRPr lang="en-US"/>
           </a:p>
@@ -1396,7 +1134,8 @@
           <a:p>
             <a:r>
               <a:rPr lang="en-US" dirty="0"/>
-              <a:t>第1回の観察記録シートを実際に開いて突き合わせる。本人は変化に気づいていないことが多いので、記録で見せる。診断スコアの伸びもここで。</a:t>
+              <a:t>「もっと活用していく」と書きかけたら、この例を見せる。責めずに、具体に落とす作業を一緒にやる。
+事業の言葉に翻訳できた瞬間が、この講座の到達点。ここまで来たら、あとは本人が進められる。</a:t>
             </a:r>
             <a:endParaRPr lang="en-US" dirty="0"/>
           </a:p>
@@ -1484,7 +1223,7 @@
           <a:p>
             <a:r>
               <a:rPr lang="en-US" dirty="0"/>
-              <a:t>「もっと活用していく」と書きかけたら、この例を見せる。責めずに、具体に落とす作業を一緒にやる。</a:t>
+              <a:t>社員がいる時間帯と、退席後の作業を分ける。1つ目と3つ目は社員同席、2つ目と4つ目は退席後でもよい。画面操作は原則なし。</a:t>
             </a:r>
             <a:endParaRPr lang="en-US" dirty="0"/>
           </a:p>
@@ -1572,7 +1311,7 @@
           <a:p>
             <a:r>
               <a:rPr lang="en-US" dirty="0"/>
-              <a:t>事業の言葉に翻訳できた瞬間が、この講座の到達点。ここまで来たら、あとは本人が進められる。</a:t>
+              <a:t>第1回の観察記録シートを実際に開いて突き合わせる。本人は変化に気づいていないことが多いので、記録で見せる。診断スコアの伸びもここで。</a:t>
             </a:r>
             <a:endParaRPr lang="en-US" dirty="0"/>
           </a:p>
@@ -1660,7 +1399,11 @@
           <a:p>
             <a:r>
               <a:rPr lang="en-US" dirty="0"/>
-              <a:t>2つ目（成果が乏しい）は取り繕わない。正直に言語化したほうが、継続の相談につながることが多い。</a:t>
+              <a:t>【講師メモ：この回でよく起きること】
+・3年の話が「もっとAIを使う」で止まる → 4つの問いの2番目（人は何をしているか）に戻します。事業の言葉が出るまで粘ります
+・成果が乏しいまま最終回を迎えた → 取り繕いません。何が進まなかったかを一緒に言語化するほうが、次につながります。理由は大半が「時間」と「人」です
+・継続の相談をされる → 講座の延長ではなく、月1回の伴走として別建てにするのが自然です。第10回の月次チェックが接点になります
+2つ目（成果が乏しい）は取り繕わない。正直に言語化したほうが、継続の相談につながることが多い。</a:t>
             </a:r>
             <a:endParaRPr lang="en-US" dirty="0"/>
           </a:p>
@@ -2304,10 +2047,6 @@
             <a:prstDash val="solid"/>
           </a:ln>
         </p:spPr>
-        <p:txBody>
-          <a:bodyPr/>
-          <a:p/>
-        </p:txBody>
       </p:sp>
       <p:sp>
         <p:nvSpPr>
@@ -2521,10 +2260,6 @@
             <a:prstDash val="solid"/>
           </a:ln>
         </p:spPr>
-        <p:txBody>
-          <a:bodyPr/>
-          <a:p/>
-        </p:txBody>
       </p:sp>
       <p:sp>
         <p:nvSpPr>
@@ -2584,15 +2319,11 @@
           </a:solidFill>
           <a:ln w="12700">
             <a:solidFill>
-              <a:srgbClr val="333333"/>
+              <a:srgbClr val="EDE7DB"/>
             </a:solidFill>
             <a:prstDash val="solid"/>
           </a:ln>
         </p:spPr>
-        <p:txBody>
-          <a:bodyPr/>
-          <a:p/>
-        </p:txBody>
       </p:sp>
       <p:sp>
         <p:nvSpPr>
@@ -2660,10 +2391,6 @@
             <a:prstDash val="solid"/>
           </a:ln>
         </p:spPr>
-        <p:txBody>
-          <a:bodyPr/>
-          <a:p/>
-        </p:txBody>
       </p:sp>
       <p:sp>
         <p:nvSpPr>
@@ -2723,15 +2450,11 @@
           </a:solidFill>
           <a:ln w="12700">
             <a:solidFill>
-              <a:srgbClr val="333333"/>
+              <a:srgbClr val="EDE7DB"/>
             </a:solidFill>
             <a:prstDash val="solid"/>
           </a:ln>
         </p:spPr>
-        <p:txBody>
-          <a:bodyPr/>
-          <a:p/>
-        </p:txBody>
       </p:sp>
       <p:sp>
         <p:nvSpPr>
@@ -2799,10 +2522,6 @@
             <a:prstDash val="solid"/>
           </a:ln>
         </p:spPr>
-        <p:txBody>
-          <a:bodyPr/>
-          <a:p/>
-        </p:txBody>
       </p:sp>
       <p:sp>
         <p:nvSpPr>
@@ -2862,15 +2581,11 @@
           </a:solidFill>
           <a:ln w="12700">
             <a:solidFill>
-              <a:srgbClr val="333333"/>
+              <a:srgbClr val="EDE7DB"/>
             </a:solidFill>
             <a:prstDash val="solid"/>
           </a:ln>
         </p:spPr>
-        <p:txBody>
-          <a:bodyPr/>
-          <a:p/>
-        </p:txBody>
       </p:sp>
       <p:sp>
         <p:nvSpPr>
@@ -3090,13 +2805,13 @@
             <a:r>
               <a:rPr lang="en-US" sz="1100" b="1" spc="250" kern="0" dirty="0">
                 <a:solidFill>
-                  <a:srgbClr val="2F4F6B"/>
-                </a:solidFill>
-                <a:latin typeface="Yu Gothic" pitchFamily="34" charset="0"/>
-                <a:ea typeface="Yu Gothic" pitchFamily="34" charset="-122"/>
-                <a:cs typeface="Yu Gothic" pitchFamily="34" charset="-120"/>
-              </a:rPr>
-              <a:t>実演</a:t>
+                  <a:srgbClr val="3B6B4A"/>
+                </a:solidFill>
+                <a:latin typeface="Yu Gothic" pitchFamily="34" charset="0"/>
+                <a:ea typeface="Yu Gothic" pitchFamily="34" charset="-122"/>
+                <a:cs typeface="Yu Gothic" pitchFamily="34" charset="-120"/>
+              </a:rPr>
+              <a:t>業務への組み込み</a:t>
             </a:r>
             <a:endParaRPr lang="en-US" sz="1100" dirty="0"/>
           </a:p>
@@ -3135,7 +2850,7 @@
                 <a:ea typeface="Yu Gothic" pitchFamily="34" charset="-122"/>
                 <a:cs typeface="Yu Gothic" pitchFamily="34" charset="-120"/>
               </a:rPr>
-              <a:t>今日の流れ</a:t>
+              <a:t>修了時にすること</a:t>
             </a:r>
             <a:endParaRPr lang="en-US" sz="2600" dirty="0"/>
           </a:p>
@@ -3168,13 +2883,13 @@
             <a:r>
               <a:rPr lang="en-US" sz="1250" b="1" dirty="0">
                 <a:solidFill>
-                  <a:srgbClr val="2F4F6B"/>
-                </a:solidFill>
-                <a:latin typeface="Yu Gothic" pitchFamily="34" charset="0"/>
-                <a:ea typeface="Yu Gothic" pitchFamily="34" charset="-122"/>
-                <a:cs typeface="Yu Gothic" pitchFamily="34" charset="-120"/>
-              </a:rPr>
-              <a:t>社員同席・発表を含む。発表するのは社長ご自身です。</a:t>
+                  <a:srgbClr val="3B6B4A"/>
+                </a:solidFill>
+                <a:latin typeface="Yu Gothic" pitchFamily="34" charset="0"/>
+                <a:ea typeface="Yu Gothic" pitchFamily="34" charset="-122"/>
+                <a:cs typeface="Yu Gothic" pitchFamily="34" charset="-120"/>
+              </a:rPr>
+              <a:t>修了の日に、この3つを済ませます。</a:t>
             </a:r>
             <a:endParaRPr lang="en-US" sz="1250" dirty="0"/>
           </a:p>
@@ -3188,8 +2903,8 @@
         </p:nvSpPr>
         <p:spPr>
           <a:xfrm>
-            <a:off x="777240" y="2148840"/>
-            <a:ext cx="3383280" cy="2880360"/>
+            <a:off x="777240" y="2103120"/>
+            <a:ext cx="10607040" cy="914400"/>
           </a:xfrm>
           <a:prstGeom prst="rect">
             <a:avLst/>
@@ -3204,10 +2919,6 @@
             <a:prstDash val="solid"/>
           </a:ln>
         </p:spPr>
-        <p:txBody>
-          <a:bodyPr/>
-          <a:p/>
-        </p:txBody>
       </p:sp>
       <p:sp>
         <p:nvSpPr>
@@ -3217,26 +2928,22 @@
         </p:nvSpPr>
         <p:spPr>
           <a:xfrm>
-            <a:off x="1051560" y="2395728"/>
-            <a:ext cx="438912" cy="438912"/>
-          </a:xfrm>
-          <a:prstGeom prst="ellipse">
+            <a:off x="777240" y="2103120"/>
+            <a:ext cx="54864" cy="914400"/>
+          </a:xfrm>
+          <a:prstGeom prst="rect">
             <a:avLst/>
           </a:prstGeom>
           <a:solidFill>
-            <a:srgbClr val="2F4F6B"/>
+            <a:srgbClr val="3B6B4A"/>
           </a:solidFill>
           <a:ln w="12700">
             <a:solidFill>
-              <a:srgbClr val="333333"/>
+              <a:srgbClr val="3B6B4A"/>
             </a:solidFill>
             <a:prstDash val="solid"/>
           </a:ln>
         </p:spPr>
-        <p:txBody>
-          <a:bodyPr/>
-          <a:p/>
-        </p:txBody>
       </p:sp>
       <p:sp>
         <p:nvSpPr>
@@ -3246,34 +2953,34 @@
         </p:nvSpPr>
         <p:spPr>
           <a:xfrm>
-            <a:off x="1051560" y="2395728"/>
-            <a:ext cx="438912" cy="438912"/>
-          </a:xfrm>
-          <a:prstGeom prst="rect">
-            <a:avLst/>
-          </a:prstGeom>
-          <a:noFill/>
-          <a:ln/>
-        </p:spPr>
-        <p:txBody>
-          <a:bodyPr wrap="square" lIns="0" tIns="0" rIns="0" bIns="0" rtlCol="0" anchor="ctr"/>
-          <a:lstStyle/>
-          <a:p>
-            <a:pPr algn="ctr" indent="0" marL="0">
-              <a:buNone/>
-            </a:pPr>
-            <a:r>
-              <a:rPr lang="en-US" sz="1300" b="1" dirty="0">
-                <a:solidFill>
-                  <a:srgbClr val="FFFFFF"/>
-                </a:solidFill>
-                <a:latin typeface="Yu Gothic" pitchFamily="34" charset="0"/>
-                <a:ea typeface="Yu Gothic" pitchFamily="34" charset="-122"/>
-                <a:cs typeface="Yu Gothic" pitchFamily="34" charset="-120"/>
-              </a:rPr>
-              <a:t>1</a:t>
-            </a:r>
-            <a:endParaRPr lang="en-US" sz="1300" dirty="0"/>
+            <a:off x="1143000" y="2176272"/>
+            <a:ext cx="2757830" cy="768096"/>
+          </a:xfrm>
+          <a:prstGeom prst="rect">
+            <a:avLst/>
+          </a:prstGeom>
+          <a:noFill/>
+          <a:ln/>
+        </p:spPr>
+        <p:txBody>
+          <a:bodyPr wrap="square" lIns="0" tIns="0" rIns="0" bIns="0" rtlCol="0" anchor="ctr"/>
+          <a:lstStyle/>
+          <a:p>
+            <a:pPr indent="0" marL="0">
+              <a:buNone/>
+            </a:pPr>
+            <a:r>
+              <a:rPr lang="en-US" sz="1400" b="1" dirty="0">
+                <a:solidFill>
+                  <a:srgbClr val="3B6B4A"/>
+                </a:solidFill>
+                <a:latin typeface="Yu Gothic" pitchFamily="34" charset="0"/>
+                <a:ea typeface="Yu Gothic" pitchFamily="34" charset="-122"/>
+                <a:cs typeface="Yu Gothic" pitchFamily="34" charset="-120"/>
+              </a:rPr>
+              <a:t>診断をもう一度</a:t>
+            </a:r>
+            <a:endParaRPr lang="en-US" sz="1400" dirty="0"/>
           </a:p>
         </p:txBody>
       </p:sp>
@@ -3285,50 +2992,8 @@
         </p:nvSpPr>
         <p:spPr>
           <a:xfrm>
-            <a:off x="1051560" y="2944368"/>
-            <a:ext cx="2834640" cy="731520"/>
-          </a:xfrm>
-          <a:prstGeom prst="rect">
-            <a:avLst/>
-          </a:prstGeom>
-          <a:noFill/>
-          <a:ln/>
-        </p:spPr>
-        <p:txBody>
-          <a:bodyPr wrap="square" lIns="0" tIns="0" rIns="0" bIns="0" rtlCol="0" anchor="ctr"/>
-          <a:lstStyle/>
-          <a:p>
-            <a:pPr indent="0" marL="0">
-              <a:lnSpc>
-                <a:spcPct val="125000"/>
-              </a:lnSpc>
-              <a:buNone/>
-            </a:pPr>
-            <a:r>
-              <a:rPr lang="en-US" sz="1450" b="1" dirty="0">
-                <a:solidFill>
-                  <a:srgbClr val="23201D"/>
-                </a:solidFill>
-                <a:latin typeface="Yu Gothic" pitchFamily="34" charset="0"/>
-                <a:ea typeface="Yu Gothic" pitchFamily="34" charset="-122"/>
-                <a:cs typeface="Yu Gothic" pitchFamily="34" charset="-120"/>
-              </a:rPr>
-              <a:t>作ったものを全部並べる</a:t>
-            </a:r>
-            <a:endParaRPr lang="en-US" sz="1450" dirty="0"/>
-          </a:p>
-        </p:txBody>
-      </p:sp>
-      <p:sp>
-        <p:nvSpPr>
-          <p:cNvPr id="9" name="Text 7"/>
-          <p:cNvSpPr txBox="1"/>
-          <p:nvPr/>
-        </p:nvSpPr>
-        <p:spPr>
-          <a:xfrm>
-            <a:off x="1051560" y="3703320"/>
-            <a:ext cx="2834640" cy="1188720"/>
+            <a:off x="4006901" y="2176272"/>
+            <a:ext cx="7011619" cy="768096"/>
           </a:xfrm>
           <a:prstGeom prst="rect">
             <a:avLst/>
@@ -3347,30 +3012,30 @@
               <a:buNone/>
             </a:pPr>
             <a:r>
-              <a:rPr lang="en-US" sz="1150" dirty="0">
-                <a:solidFill>
-                  <a:srgbClr val="5A534A"/>
-                </a:solidFill>
-                <a:latin typeface="Yu Gothic" pitchFamily="34" charset="0"/>
-                <a:ea typeface="Yu Gothic" pitchFamily="34" charset="-122"/>
-                <a:cs typeface="Yu Gothic" pitchFamily="34" charset="-120"/>
-              </a:rPr>
-              <a:t>12回分の成果物をお渡しします。第1回の記録とも突き合わせます</a:t>
-            </a:r>
-            <a:endParaRPr lang="en-US" sz="1150" dirty="0"/>
-          </a:p>
-        </p:txBody>
-      </p:sp>
-      <p:sp>
-        <p:nvSpPr>
-          <p:cNvPr id="10" name="Shape 8"/>
+              <a:rPr lang="en-US" sz="1250" dirty="0">
+                <a:solidFill>
+                  <a:srgbClr val="3F3933"/>
+                </a:solidFill>
+                <a:latin typeface="Yu Gothic" pitchFamily="34" charset="0"/>
+                <a:ea typeface="Yu Gothic" pitchFamily="34" charset="-122"/>
+                <a:cs typeface="Yu Gothic" pitchFamily="34" charset="-120"/>
+              </a:rPr>
+              <a:t>受講前と同じ設問です。点数の伸びが、そのまま効果測定になります</a:t>
+            </a:r>
+            <a:endParaRPr lang="en-US" sz="1250" dirty="0"/>
+          </a:p>
+        </p:txBody>
+      </p:sp>
+      <p:sp>
+        <p:nvSpPr>
+          <p:cNvPr id="9" name="Shape 7"/>
           <p:cNvSpPr/>
           <p:nvPr/>
         </p:nvSpPr>
         <p:spPr>
           <a:xfrm>
-            <a:off x="4389120" y="2148840"/>
-            <a:ext cx="3383280" cy="2880360"/>
+            <a:off x="777240" y="3154680"/>
+            <a:ext cx="10607040" cy="914400"/>
           </a:xfrm>
           <a:prstGeom prst="rect">
             <a:avLst/>
@@ -3385,38 +3050,69 @@
             <a:prstDash val="solid"/>
           </a:ln>
         </p:spPr>
-        <p:txBody>
-          <a:bodyPr/>
-          <a:p/>
-        </p:txBody>
-      </p:sp>
-      <p:sp>
-        <p:nvSpPr>
-          <p:cNvPr id="11" name="Shape 9"/>
+      </p:sp>
+      <p:sp>
+        <p:nvSpPr>
+          <p:cNvPr id="10" name="Shape 8"/>
           <p:cNvSpPr/>
           <p:nvPr/>
         </p:nvSpPr>
         <p:spPr>
           <a:xfrm>
-            <a:off x="4663440" y="2395728"/>
-            <a:ext cx="438912" cy="438912"/>
-          </a:xfrm>
-          <a:prstGeom prst="ellipse">
+            <a:off x="777240" y="3154680"/>
+            <a:ext cx="54864" cy="914400"/>
+          </a:xfrm>
+          <a:prstGeom prst="rect">
             <a:avLst/>
           </a:prstGeom>
           <a:solidFill>
-            <a:srgbClr val="2F4F6B"/>
+            <a:srgbClr val="3B6B4A"/>
           </a:solidFill>
           <a:ln w="12700">
             <a:solidFill>
-              <a:srgbClr val="333333"/>
+              <a:srgbClr val="3B6B4A"/>
             </a:solidFill>
             <a:prstDash val="solid"/>
           </a:ln>
         </p:spPr>
-        <p:txBody>
-          <a:bodyPr/>
-          <a:p/>
+      </p:sp>
+      <p:sp>
+        <p:nvSpPr>
+          <p:cNvPr id="11" name="Text 9"/>
+          <p:cNvSpPr txBox="1"/>
+          <p:nvPr/>
+        </p:nvSpPr>
+        <p:spPr>
+          <a:xfrm>
+            <a:off x="1143000" y="3227832"/>
+            <a:ext cx="2757830" cy="768096"/>
+          </a:xfrm>
+          <a:prstGeom prst="rect">
+            <a:avLst/>
+          </a:prstGeom>
+          <a:noFill/>
+          <a:ln/>
+        </p:spPr>
+        <p:txBody>
+          <a:bodyPr wrap="square" lIns="0" tIns="0" rIns="0" bIns="0" rtlCol="0" anchor="ctr"/>
+          <a:lstStyle/>
+          <a:p>
+            <a:pPr indent="0" marL="0">
+              <a:buNone/>
+            </a:pPr>
+            <a:r>
+              <a:rPr lang="en-US" sz="1400" b="1" dirty="0">
+                <a:solidFill>
+                  <a:srgbClr val="3B6B4A"/>
+                </a:solidFill>
+                <a:latin typeface="Yu Gothic" pitchFamily="34" charset="0"/>
+                <a:ea typeface="Yu Gothic" pitchFamily="34" charset="-122"/>
+                <a:cs typeface="Yu Gothic" pitchFamily="34" charset="-120"/>
+              </a:rPr>
+              <a:t>成果報告シートの記入</a:t>
+            </a:r>
+            <a:endParaRPr lang="en-US" sz="1400" dirty="0"/>
+          </a:p>
         </p:txBody>
       </p:sp>
       <p:sp>
@@ -3427,89 +3123,8 @@
         </p:nvSpPr>
         <p:spPr>
           <a:xfrm>
-            <a:off x="4663440" y="2395728"/>
-            <a:ext cx="438912" cy="438912"/>
-          </a:xfrm>
-          <a:prstGeom prst="rect">
-            <a:avLst/>
-          </a:prstGeom>
-          <a:noFill/>
-          <a:ln/>
-        </p:spPr>
-        <p:txBody>
-          <a:bodyPr wrap="square" lIns="0" tIns="0" rIns="0" bIns="0" rtlCol="0" anchor="ctr"/>
-          <a:lstStyle/>
-          <a:p>
-            <a:pPr algn="ctr" indent="0" marL="0">
-              <a:buNone/>
-            </a:pPr>
-            <a:r>
-              <a:rPr lang="en-US" sz="1300" b="1" dirty="0">
-                <a:solidFill>
-                  <a:srgbClr val="FFFFFF"/>
-                </a:solidFill>
-                <a:latin typeface="Yu Gothic" pitchFamily="34" charset="0"/>
-                <a:ea typeface="Yu Gothic" pitchFamily="34" charset="-122"/>
-                <a:cs typeface="Yu Gothic" pitchFamily="34" charset="-120"/>
-              </a:rPr>
-              <a:t>2</a:t>
-            </a:r>
-            <a:endParaRPr lang="en-US" sz="1300" dirty="0"/>
-          </a:p>
-        </p:txBody>
-      </p:sp>
-      <p:sp>
-        <p:nvSpPr>
-          <p:cNvPr id="13" name="Text 11"/>
-          <p:cNvSpPr txBox="1"/>
-          <p:nvPr/>
-        </p:nvSpPr>
-        <p:spPr>
-          <a:xfrm>
-            <a:off x="4663440" y="2944368"/>
-            <a:ext cx="2834640" cy="731520"/>
-          </a:xfrm>
-          <a:prstGeom prst="rect">
-            <a:avLst/>
-          </a:prstGeom>
-          <a:noFill/>
-          <a:ln/>
-        </p:spPr>
-        <p:txBody>
-          <a:bodyPr wrap="square" lIns="0" tIns="0" rIns="0" bIns="0" rtlCol="0" anchor="ctr"/>
-          <a:lstStyle/>
-          <a:p>
-            <a:pPr indent="0" marL="0">
-              <a:lnSpc>
-                <a:spcPct val="125000"/>
-              </a:lnSpc>
-              <a:buNone/>
-            </a:pPr>
-            <a:r>
-              <a:rPr lang="en-US" sz="1450" b="1" dirty="0">
-                <a:solidFill>
-                  <a:srgbClr val="23201D"/>
-                </a:solidFill>
-                <a:latin typeface="Yu Gothic" pitchFamily="34" charset="0"/>
-                <a:ea typeface="Yu Gothic" pitchFamily="34" charset="-122"/>
-                <a:cs typeface="Yu Gothic" pitchFamily="34" charset="-120"/>
-              </a:rPr>
-              <a:t>3年構想を1枚にする</a:t>
-            </a:r>
-            <a:endParaRPr lang="en-US" sz="1450" dirty="0"/>
-          </a:p>
-        </p:txBody>
-      </p:sp>
-      <p:sp>
-        <p:nvSpPr>
-          <p:cNvPr id="14" name="Text 12"/>
-          <p:cNvSpPr txBox="1"/>
-          <p:nvPr/>
-        </p:nvSpPr>
-        <p:spPr>
-          <a:xfrm>
-            <a:off x="4663440" y="3703320"/>
-            <a:ext cx="2834640" cy="1188720"/>
+            <a:off x="4006901" y="3227832"/>
+            <a:ext cx="7011619" cy="768096"/>
           </a:xfrm>
           <a:prstGeom prst="rect">
             <a:avLst/>
@@ -3528,30 +3143,30 @@
               <a:buNone/>
             </a:pPr>
             <a:r>
-              <a:rPr lang="en-US" sz="1150" dirty="0">
-                <a:solidFill>
-                  <a:srgbClr val="5A534A"/>
-                </a:solidFill>
-                <a:latin typeface="Yu Gothic" pitchFamily="34" charset="0"/>
-                <a:ea typeface="Yu Gothic" pitchFamily="34" charset="-122"/>
-                <a:cs typeface="Yu Gothic" pitchFamily="34" charset="-120"/>
-              </a:rPr>
-              <a:t>4つの問いに答えます。ここは社員退席後でも構いません</a:t>
-            </a:r>
-            <a:endParaRPr lang="en-US" sz="1150" dirty="0"/>
-          </a:p>
-        </p:txBody>
-      </p:sp>
-      <p:sp>
-        <p:nvSpPr>
-          <p:cNvPr id="15" name="Shape 13"/>
+              <a:rPr lang="en-US" sz="1250" dirty="0">
+                <a:solidFill>
+                  <a:srgbClr val="3F3933"/>
+                </a:solidFill>
+                <a:latin typeface="Yu Gothic" pitchFamily="34" charset="0"/>
+                <a:ea typeface="Yu Gothic" pitchFamily="34" charset="-122"/>
+                <a:cs typeface="Yu Gothic" pitchFamily="34" charset="-120"/>
+              </a:rPr>
+              <a:t>削減時間と社員の反応を数字に。うまくいかなかったことも書いてください</a:t>
+            </a:r>
+            <a:endParaRPr lang="en-US" sz="1250" dirty="0"/>
+          </a:p>
+        </p:txBody>
+      </p:sp>
+      <p:sp>
+        <p:nvSpPr>
+          <p:cNvPr id="13" name="Shape 11"/>
           <p:cNvSpPr/>
           <p:nvPr/>
         </p:nvSpPr>
         <p:spPr>
           <a:xfrm>
-            <a:off x="8001000" y="2148840"/>
-            <a:ext cx="3383280" cy="2880360"/>
+            <a:off x="777240" y="4206240"/>
+            <a:ext cx="10607040" cy="914400"/>
           </a:xfrm>
           <a:prstGeom prst="rect">
             <a:avLst/>
@@ -3566,131 +3181,81 @@
             <a:prstDash val="solid"/>
           </a:ln>
         </p:spPr>
-        <p:txBody>
-          <a:bodyPr/>
-          <a:p/>
-        </p:txBody>
-      </p:sp>
-      <p:sp>
-        <p:nvSpPr>
-          <p:cNvPr id="16" name="Shape 14"/>
+      </p:sp>
+      <p:sp>
+        <p:nvSpPr>
+          <p:cNvPr id="14" name="Shape 12"/>
           <p:cNvSpPr/>
           <p:nvPr/>
         </p:nvSpPr>
         <p:spPr>
           <a:xfrm>
-            <a:off x="8275320" y="2395728"/>
-            <a:ext cx="438912" cy="438912"/>
-          </a:xfrm>
-          <a:prstGeom prst="ellipse">
+            <a:off x="777240" y="4206240"/>
+            <a:ext cx="54864" cy="914400"/>
+          </a:xfrm>
+          <a:prstGeom prst="rect">
             <a:avLst/>
           </a:prstGeom>
           <a:solidFill>
-            <a:srgbClr val="2F4F6B"/>
+            <a:srgbClr val="3B6B4A"/>
           </a:solidFill>
           <a:ln w="12700">
             <a:solidFill>
-              <a:srgbClr val="333333"/>
+              <a:srgbClr val="3B6B4A"/>
             </a:solidFill>
             <a:prstDash val="solid"/>
           </a:ln>
         </p:spPr>
-        <p:txBody>
-          <a:bodyPr/>
-          <a:p/>
-        </p:txBody>
-      </p:sp>
-      <p:sp>
-        <p:nvSpPr>
-          <p:cNvPr id="17" name="Text 15"/>
-          <p:cNvSpPr txBox="1"/>
-          <p:nvPr/>
-        </p:nvSpPr>
-        <p:spPr>
-          <a:xfrm>
-            <a:off x="8275320" y="2395728"/>
-            <a:ext cx="438912" cy="438912"/>
-          </a:xfrm>
-          <a:prstGeom prst="rect">
-            <a:avLst/>
-          </a:prstGeom>
-          <a:noFill/>
-          <a:ln/>
-        </p:spPr>
-        <p:txBody>
-          <a:bodyPr wrap="square" lIns="0" tIns="0" rIns="0" bIns="0" rtlCol="0" anchor="ctr"/>
-          <a:lstStyle/>
-          <a:p>
-            <a:pPr algn="ctr" indent="0" marL="0">
-              <a:buNone/>
-            </a:pPr>
-            <a:r>
-              <a:rPr lang="en-US" sz="1300" b="1" dirty="0">
-                <a:solidFill>
-                  <a:srgbClr val="FFFFFF"/>
-                </a:solidFill>
-                <a:latin typeface="Yu Gothic" pitchFamily="34" charset="0"/>
-                <a:ea typeface="Yu Gothic" pitchFamily="34" charset="-122"/>
-                <a:cs typeface="Yu Gothic" pitchFamily="34" charset="-120"/>
-              </a:rPr>
-              <a:t>3</a:t>
-            </a:r>
-            <a:endParaRPr lang="en-US" sz="1300" dirty="0"/>
-          </a:p>
-        </p:txBody>
-      </p:sp>
-      <p:sp>
-        <p:nvSpPr>
-          <p:cNvPr id="18" name="Text 16"/>
-          <p:cNvSpPr txBox="1"/>
-          <p:nvPr/>
-        </p:nvSpPr>
-        <p:spPr>
-          <a:xfrm>
-            <a:off x="8275320" y="2944368"/>
-            <a:ext cx="2834640" cy="731520"/>
-          </a:xfrm>
-          <a:prstGeom prst="rect">
-            <a:avLst/>
-          </a:prstGeom>
-          <a:noFill/>
-          <a:ln/>
-        </p:spPr>
-        <p:txBody>
-          <a:bodyPr wrap="square" lIns="0" tIns="0" rIns="0" bIns="0" rtlCol="0" anchor="ctr"/>
-          <a:lstStyle/>
-          <a:p>
-            <a:pPr indent="0" marL="0">
-              <a:lnSpc>
-                <a:spcPct val="125000"/>
-              </a:lnSpc>
-              <a:buNone/>
-            </a:pPr>
-            <a:r>
-              <a:rPr lang="en-US" sz="1450" b="1" dirty="0">
-                <a:solidFill>
-                  <a:srgbClr val="23201D"/>
-                </a:solidFill>
-                <a:latin typeface="Yu Gothic" pitchFamily="34" charset="0"/>
-                <a:ea typeface="Yu Gothic" pitchFamily="34" charset="-122"/>
-                <a:cs typeface="Yu Gothic" pitchFamily="34" charset="-120"/>
-              </a:rPr>
-              <a:t>社員のみなさんに方針を話す</a:t>
-            </a:r>
-            <a:endParaRPr lang="en-US" sz="1450" dirty="0"/>
-          </a:p>
-        </p:txBody>
-      </p:sp>
-      <p:sp>
-        <p:nvSpPr>
-          <p:cNvPr id="19" name="Text 17"/>
-          <p:cNvSpPr txBox="1"/>
-          <p:nvPr/>
-        </p:nvSpPr>
-        <p:spPr>
-          <a:xfrm>
-            <a:off x="8275320" y="3703320"/>
-            <a:ext cx="2834640" cy="1188720"/>
+      </p:sp>
+      <p:sp>
+        <p:nvSpPr>
+          <p:cNvPr id="15" name="Text 13"/>
+          <p:cNvSpPr txBox="1"/>
+          <p:nvPr/>
+        </p:nvSpPr>
+        <p:spPr>
+          <a:xfrm>
+            <a:off x="1143000" y="4279392"/>
+            <a:ext cx="2757830" cy="768096"/>
+          </a:xfrm>
+          <a:prstGeom prst="rect">
+            <a:avLst/>
+          </a:prstGeom>
+          <a:noFill/>
+          <a:ln/>
+        </p:spPr>
+        <p:txBody>
+          <a:bodyPr wrap="square" lIns="0" tIns="0" rIns="0" bIns="0" rtlCol="0" anchor="ctr"/>
+          <a:lstStyle/>
+          <a:p>
+            <a:pPr indent="0" marL="0">
+              <a:buNone/>
+            </a:pPr>
+            <a:r>
+              <a:rPr lang="en-US" sz="1400" b="1" dirty="0">
+                <a:solidFill>
+                  <a:srgbClr val="3B6B4A"/>
+                </a:solidFill>
+                <a:latin typeface="Yu Gothic" pitchFamily="34" charset="0"/>
+                <a:ea typeface="Yu Gothic" pitchFamily="34" charset="-122"/>
+                <a:cs typeface="Yu Gothic" pitchFamily="34" charset="-120"/>
+              </a:rPr>
+              <a:t>掲載の許諾確認</a:t>
+            </a:r>
+            <a:endParaRPr lang="en-US" sz="1400" dirty="0"/>
+          </a:p>
+        </p:txBody>
+      </p:sp>
+      <p:sp>
+        <p:nvSpPr>
+          <p:cNvPr id="16" name="Text 14"/>
+          <p:cNvSpPr txBox="1"/>
+          <p:nvPr/>
+        </p:nvSpPr>
+        <p:spPr>
+          <a:xfrm>
+            <a:off x="4006901" y="4279392"/>
+            <a:ext cx="7011619" cy="768096"/>
           </a:xfrm>
           <a:prstGeom prst="rect">
             <a:avLst/>
@@ -3709,23 +3274,23 @@
               <a:buNone/>
             </a:pPr>
             <a:r>
-              <a:rPr lang="en-US" sz="1150" dirty="0">
-                <a:solidFill>
-                  <a:srgbClr val="5A534A"/>
-                </a:solidFill>
-                <a:latin typeface="Yu Gothic" pitchFamily="34" charset="0"/>
-                <a:ea typeface="Yu Gothic" pitchFamily="34" charset="-122"/>
-                <a:cs typeface="Yu Gothic" pitchFamily="34" charset="-120"/>
-              </a:rPr>
-              <a:t>これからどうするかを、社長ご自身の言葉で</a:t>
-            </a:r>
-            <a:endParaRPr lang="en-US" sz="1150" dirty="0"/>
-          </a:p>
-        </p:txBody>
-      </p:sp>
-      <p:sp>
-        <p:nvSpPr>
-          <p:cNvPr id="20" name="Text 18"/>
+              <a:rPr lang="en-US" sz="1250" dirty="0">
+                <a:solidFill>
+                  <a:srgbClr val="3F3933"/>
+                </a:solidFill>
+                <a:latin typeface="Yu Gothic" pitchFamily="34" charset="0"/>
+                <a:ea typeface="Yu Gothic" pitchFamily="34" charset="-122"/>
+                <a:cs typeface="Yu Gothic" pitchFamily="34" charset="-120"/>
+              </a:rPr>
+              <a:t>事例として使う場合は、社名を出さず「従業員◯名の◯◯業」の形で。数値の公開範囲も確認します</a:t>
+            </a:r>
+            <a:endParaRPr lang="en-US" sz="1250" dirty="0"/>
+          </a:p>
+        </p:txBody>
+      </p:sp>
+      <p:sp>
+        <p:nvSpPr>
+          <p:cNvPr id="17" name="Text 15"/>
           <p:cNvSpPr txBox="1"/>
           <p:nvPr/>
         </p:nvSpPr>
@@ -3764,7 +3329,7 @@
       </p:sp>
       <p:sp>
         <p:nvSpPr>
-          <p:cNvPr id="21" name="Text 19"/>
+          <p:cNvPr id="18" name="Text 16"/>
           <p:cNvSpPr txBox="1"/>
           <p:nvPr/>
         </p:nvSpPr>
@@ -3795,7 +3360,7 @@
                 <a:ea typeface="Yu Gothic" pitchFamily="34" charset="-122"/>
                 <a:cs typeface="Yu Gothic" pitchFamily="34" charset="-120"/>
               </a:rPr>
-              <a:t>実演</a:t>
+              <a:t>組み込み</a:t>
             </a:r>
             <a:endParaRPr lang="en-US" sz="900" dirty="0"/>
           </a:p>
@@ -3812,1534 +3377,6 @@
 <file path=ppt/slides/slide12.xml><?xml version="1.0" encoding="utf-8"?>
 <p:sld xmlns:a="http://schemas.openxmlformats.org/drawingml/2006/main" xmlns:r="http://schemas.openxmlformats.org/officeDocument/2006/relationships" xmlns:p="http://schemas.openxmlformats.org/presentationml/2006/main">
   <p:cSld name="Slide 12">
-    <p:bg>
-      <p:bgPr>
-        <a:solidFill>
-          <a:srgbClr val="F6F2EA"/>
-        </a:solidFill>
-      </p:bgPr>
-    </p:bg>
-    <p:spTree>
-      <p:nvGrpSpPr>
-        <p:cNvPr id="1" name=""/>
-        <p:cNvGrpSpPr/>
-        <p:nvPr/>
-      </p:nvGrpSpPr>
-      <p:grpSpPr>
-        <a:xfrm>
-          <a:off x="0" y="0"/>
-          <a:ext cx="0" cy="0"/>
-          <a:chOff x="0" y="0"/>
-          <a:chExt cx="0" cy="0"/>
-        </a:xfrm>
-      </p:grpSpPr>
-      <p:sp>
-        <p:nvSpPr>
-          <p:cNvPr id="2" name="Text 0"/>
-          <p:cNvSpPr txBox="1"/>
-          <p:nvPr/>
-        </p:nvSpPr>
-        <p:spPr>
-          <a:xfrm>
-            <a:off x="777240" y="566928"/>
-            <a:ext cx="10607040" cy="274320"/>
-          </a:xfrm>
-          <a:prstGeom prst="rect">
-            <a:avLst/>
-          </a:prstGeom>
-          <a:noFill/>
-          <a:ln/>
-        </p:spPr>
-        <p:txBody>
-          <a:bodyPr wrap="square" lIns="0" tIns="0" rIns="0" bIns="0" rtlCol="0" anchor="ctr"/>
-          <a:lstStyle/>
-          <a:p>
-            <a:pPr indent="0" marL="0">
-              <a:buNone/>
-            </a:pPr>
-            <a:r>
-              <a:rPr lang="en-US" sz="1100" b="1" spc="250" kern="0" dirty="0">
-                <a:solidFill>
-                  <a:srgbClr val="3B6B4A"/>
-                </a:solidFill>
-                <a:latin typeface="Yu Gothic" pitchFamily="34" charset="0"/>
-                <a:ea typeface="Yu Gothic" pitchFamily="34" charset="-122"/>
-                <a:cs typeface="Yu Gothic" pitchFamily="34" charset="-120"/>
-              </a:rPr>
-              <a:t>業務への組み込み</a:t>
-            </a:r>
-            <a:endParaRPr lang="en-US" sz="1100" dirty="0"/>
-          </a:p>
-        </p:txBody>
-      </p:sp>
-      <p:sp>
-        <p:nvSpPr>
-          <p:cNvPr id="3" name="Text 1"/>
-          <p:cNvSpPr txBox="1"/>
-          <p:nvPr/>
-        </p:nvSpPr>
-        <p:spPr>
-          <a:xfrm>
-            <a:off x="777240" y="896112"/>
-            <a:ext cx="10607040" cy="640080"/>
-          </a:xfrm>
-          <a:prstGeom prst="rect">
-            <a:avLst/>
-          </a:prstGeom>
-          <a:noFill/>
-          <a:ln/>
-        </p:spPr>
-        <p:txBody>
-          <a:bodyPr wrap="square" lIns="0" tIns="0" rIns="0" bIns="0" rtlCol="0" anchor="ctr"/>
-          <a:lstStyle/>
-          <a:p>
-            <a:pPr indent="0" marL="0">
-              <a:buNone/>
-            </a:pPr>
-            <a:r>
-              <a:rPr lang="en-US" sz="2600" b="1" dirty="0">
-                <a:solidFill>
-                  <a:srgbClr val="23201D"/>
-                </a:solidFill>
-                <a:latin typeface="Yu Gothic" pitchFamily="34" charset="0"/>
-                <a:ea typeface="Yu Gothic" pitchFamily="34" charset="-122"/>
-                <a:cs typeface="Yu Gothic" pitchFamily="34" charset="-120"/>
-              </a:rPr>
-              <a:t>修了時にすること</a:t>
-            </a:r>
-            <a:endParaRPr lang="en-US" sz="2600" dirty="0"/>
-          </a:p>
-        </p:txBody>
-      </p:sp>
-      <p:sp>
-        <p:nvSpPr>
-          <p:cNvPr id="4" name="Text 2"/>
-          <p:cNvSpPr txBox="1"/>
-          <p:nvPr/>
-        </p:nvSpPr>
-        <p:spPr>
-          <a:xfrm>
-            <a:off x="777240" y="1572768"/>
-            <a:ext cx="10607040" cy="320040"/>
-          </a:xfrm>
-          <a:prstGeom prst="rect">
-            <a:avLst/>
-          </a:prstGeom>
-          <a:noFill/>
-          <a:ln/>
-        </p:spPr>
-        <p:txBody>
-          <a:bodyPr wrap="square" lIns="0" tIns="0" rIns="0" bIns="0" rtlCol="0" anchor="ctr"/>
-          <a:lstStyle/>
-          <a:p>
-            <a:pPr indent="0" marL="0">
-              <a:buNone/>
-            </a:pPr>
-            <a:r>
-              <a:rPr lang="en-US" sz="1250" b="1" dirty="0">
-                <a:solidFill>
-                  <a:srgbClr val="3B6B4A"/>
-                </a:solidFill>
-                <a:latin typeface="Yu Gothic" pitchFamily="34" charset="0"/>
-                <a:ea typeface="Yu Gothic" pitchFamily="34" charset="-122"/>
-                <a:cs typeface="Yu Gothic" pitchFamily="34" charset="-120"/>
-              </a:rPr>
-              <a:t>ここを決めないと、持ち帰っても使われません。紙に書きます。</a:t>
-            </a:r>
-            <a:endParaRPr lang="en-US" sz="1250" dirty="0"/>
-          </a:p>
-        </p:txBody>
-      </p:sp>
-      <p:sp>
-        <p:nvSpPr>
-          <p:cNvPr id="5" name="Shape 3"/>
-          <p:cNvSpPr/>
-          <p:nvPr/>
-        </p:nvSpPr>
-        <p:spPr>
-          <a:xfrm>
-            <a:off x="777240" y="2103120"/>
-            <a:ext cx="10607040" cy="914400"/>
-          </a:xfrm>
-          <a:prstGeom prst="rect">
-            <a:avLst/>
-          </a:prstGeom>
-          <a:solidFill>
-            <a:srgbClr val="FFFFFF"/>
-          </a:solidFill>
-          <a:ln w="12700">
-            <a:solidFill>
-              <a:srgbClr val="EDE7DB"/>
-            </a:solidFill>
-            <a:prstDash val="solid"/>
-          </a:ln>
-        </p:spPr>
-        <p:txBody>
-          <a:bodyPr/>
-          <a:p/>
-        </p:txBody>
-      </p:sp>
-      <p:sp>
-        <p:nvSpPr>
-          <p:cNvPr id="6" name="Shape 4"/>
-          <p:cNvSpPr/>
-          <p:nvPr/>
-        </p:nvSpPr>
-        <p:spPr>
-          <a:xfrm>
-            <a:off x="777240" y="2103120"/>
-            <a:ext cx="54864" cy="914400"/>
-          </a:xfrm>
-          <a:prstGeom prst="rect">
-            <a:avLst/>
-          </a:prstGeom>
-          <a:solidFill>
-            <a:srgbClr val="3B6B4A"/>
-          </a:solidFill>
-          <a:ln w="12700">
-            <a:solidFill>
-              <a:srgbClr val="333333"/>
-            </a:solidFill>
-            <a:prstDash val="solid"/>
-          </a:ln>
-        </p:spPr>
-        <p:txBody>
-          <a:bodyPr/>
-          <a:p/>
-        </p:txBody>
-      </p:sp>
-      <p:sp>
-        <p:nvSpPr>
-          <p:cNvPr id="7" name="Text 5"/>
-          <p:cNvSpPr txBox="1"/>
-          <p:nvPr/>
-        </p:nvSpPr>
-        <p:spPr>
-          <a:xfrm>
-            <a:off x="1143000" y="2176272"/>
-            <a:ext cx="2757830" cy="768096"/>
-          </a:xfrm>
-          <a:prstGeom prst="rect">
-            <a:avLst/>
-          </a:prstGeom>
-          <a:noFill/>
-          <a:ln/>
-        </p:spPr>
-        <p:txBody>
-          <a:bodyPr wrap="square" lIns="0" tIns="0" rIns="0" bIns="0" rtlCol="0" anchor="ctr"/>
-          <a:lstStyle/>
-          <a:p>
-            <a:pPr indent="0" marL="0">
-              <a:buNone/>
-            </a:pPr>
-            <a:r>
-              <a:rPr lang="en-US" sz="1400" b="1" dirty="0">
-                <a:solidFill>
-                  <a:srgbClr val="3B6B4A"/>
-                </a:solidFill>
-                <a:latin typeface="Yu Gothic" pitchFamily="34" charset="0"/>
-                <a:ea typeface="Yu Gothic" pitchFamily="34" charset="-122"/>
-                <a:cs typeface="Yu Gothic" pitchFamily="34" charset="-120"/>
-              </a:rPr>
-              <a:t>診断をもう一度</a:t>
-            </a:r>
-            <a:endParaRPr lang="en-US" sz="1400" dirty="0"/>
-          </a:p>
-        </p:txBody>
-      </p:sp>
-      <p:sp>
-        <p:nvSpPr>
-          <p:cNvPr id="8" name="Text 6"/>
-          <p:cNvSpPr txBox="1"/>
-          <p:nvPr/>
-        </p:nvSpPr>
-        <p:spPr>
-          <a:xfrm>
-            <a:off x="4006901" y="2176272"/>
-            <a:ext cx="7011619" cy="768096"/>
-          </a:xfrm>
-          <a:prstGeom prst="rect">
-            <a:avLst/>
-          </a:prstGeom>
-          <a:noFill/>
-          <a:ln/>
-        </p:spPr>
-        <p:txBody>
-          <a:bodyPr wrap="square" lIns="0" tIns="0" rIns="0" bIns="0" rtlCol="0" anchor="ctr"/>
-          <a:lstStyle/>
-          <a:p>
-            <a:pPr indent="0" marL="0">
-              <a:lnSpc>
-                <a:spcPct val="130000"/>
-              </a:lnSpc>
-              <a:buNone/>
-            </a:pPr>
-            <a:r>
-              <a:rPr lang="en-US" sz="1250" dirty="0">
-                <a:solidFill>
-                  <a:srgbClr val="3F3933"/>
-                </a:solidFill>
-                <a:latin typeface="Yu Gothic" pitchFamily="34" charset="0"/>
-                <a:ea typeface="Yu Gothic" pitchFamily="34" charset="-122"/>
-                <a:cs typeface="Yu Gothic" pitchFamily="34" charset="-120"/>
-              </a:rPr>
-              <a:t>受講前と同じ設問です。点数の伸びが、そのまま効果測定になります</a:t>
-            </a:r>
-            <a:endParaRPr lang="en-US" sz="1250" dirty="0"/>
-          </a:p>
-        </p:txBody>
-      </p:sp>
-      <p:sp>
-        <p:nvSpPr>
-          <p:cNvPr id="9" name="Shape 7"/>
-          <p:cNvSpPr/>
-          <p:nvPr/>
-        </p:nvSpPr>
-        <p:spPr>
-          <a:xfrm>
-            <a:off x="777240" y="3154680"/>
-            <a:ext cx="10607040" cy="914400"/>
-          </a:xfrm>
-          <a:prstGeom prst="rect">
-            <a:avLst/>
-          </a:prstGeom>
-          <a:solidFill>
-            <a:srgbClr val="FFFFFF"/>
-          </a:solidFill>
-          <a:ln w="12700">
-            <a:solidFill>
-              <a:srgbClr val="EDE7DB"/>
-            </a:solidFill>
-            <a:prstDash val="solid"/>
-          </a:ln>
-        </p:spPr>
-        <p:txBody>
-          <a:bodyPr/>
-          <a:p/>
-        </p:txBody>
-      </p:sp>
-      <p:sp>
-        <p:nvSpPr>
-          <p:cNvPr id="10" name="Shape 8"/>
-          <p:cNvSpPr/>
-          <p:nvPr/>
-        </p:nvSpPr>
-        <p:spPr>
-          <a:xfrm>
-            <a:off x="777240" y="3154680"/>
-            <a:ext cx="54864" cy="914400"/>
-          </a:xfrm>
-          <a:prstGeom prst="rect">
-            <a:avLst/>
-          </a:prstGeom>
-          <a:solidFill>
-            <a:srgbClr val="3B6B4A"/>
-          </a:solidFill>
-          <a:ln w="12700">
-            <a:solidFill>
-              <a:srgbClr val="333333"/>
-            </a:solidFill>
-            <a:prstDash val="solid"/>
-          </a:ln>
-        </p:spPr>
-        <p:txBody>
-          <a:bodyPr/>
-          <a:p/>
-        </p:txBody>
-      </p:sp>
-      <p:sp>
-        <p:nvSpPr>
-          <p:cNvPr id="11" name="Text 9"/>
-          <p:cNvSpPr txBox="1"/>
-          <p:nvPr/>
-        </p:nvSpPr>
-        <p:spPr>
-          <a:xfrm>
-            <a:off x="1143000" y="3227832"/>
-            <a:ext cx="2757830" cy="768096"/>
-          </a:xfrm>
-          <a:prstGeom prst="rect">
-            <a:avLst/>
-          </a:prstGeom>
-          <a:noFill/>
-          <a:ln/>
-        </p:spPr>
-        <p:txBody>
-          <a:bodyPr wrap="square" lIns="0" tIns="0" rIns="0" bIns="0" rtlCol="0" anchor="ctr"/>
-          <a:lstStyle/>
-          <a:p>
-            <a:pPr indent="0" marL="0">
-              <a:buNone/>
-            </a:pPr>
-            <a:r>
-              <a:rPr lang="en-US" sz="1400" b="1" dirty="0">
-                <a:solidFill>
-                  <a:srgbClr val="3B6B4A"/>
-                </a:solidFill>
-                <a:latin typeface="Yu Gothic" pitchFamily="34" charset="0"/>
-                <a:ea typeface="Yu Gothic" pitchFamily="34" charset="-122"/>
-                <a:cs typeface="Yu Gothic" pitchFamily="34" charset="-120"/>
-              </a:rPr>
-              <a:t>成果報告シートの記入</a:t>
-            </a:r>
-            <a:endParaRPr lang="en-US" sz="1400" dirty="0"/>
-          </a:p>
-        </p:txBody>
-      </p:sp>
-      <p:sp>
-        <p:nvSpPr>
-          <p:cNvPr id="12" name="Text 10"/>
-          <p:cNvSpPr txBox="1"/>
-          <p:nvPr/>
-        </p:nvSpPr>
-        <p:spPr>
-          <a:xfrm>
-            <a:off x="4006901" y="3227832"/>
-            <a:ext cx="7011619" cy="768096"/>
-          </a:xfrm>
-          <a:prstGeom prst="rect">
-            <a:avLst/>
-          </a:prstGeom>
-          <a:noFill/>
-          <a:ln/>
-        </p:spPr>
-        <p:txBody>
-          <a:bodyPr wrap="square" lIns="0" tIns="0" rIns="0" bIns="0" rtlCol="0" anchor="ctr"/>
-          <a:lstStyle/>
-          <a:p>
-            <a:pPr indent="0" marL="0">
-              <a:lnSpc>
-                <a:spcPct val="130000"/>
-              </a:lnSpc>
-              <a:buNone/>
-            </a:pPr>
-            <a:r>
-              <a:rPr lang="en-US" sz="1250" dirty="0">
-                <a:solidFill>
-                  <a:srgbClr val="3F3933"/>
-                </a:solidFill>
-                <a:latin typeface="Yu Gothic" pitchFamily="34" charset="0"/>
-                <a:ea typeface="Yu Gothic" pitchFamily="34" charset="-122"/>
-                <a:cs typeface="Yu Gothic" pitchFamily="34" charset="-120"/>
-              </a:rPr>
-              <a:t>削減時間と社員の反応を数字に。うまくいかなかったことも書いてください</a:t>
-            </a:r>
-            <a:endParaRPr lang="en-US" sz="1250" dirty="0"/>
-          </a:p>
-        </p:txBody>
-      </p:sp>
-      <p:sp>
-        <p:nvSpPr>
-          <p:cNvPr id="13" name="Shape 11"/>
-          <p:cNvSpPr/>
-          <p:nvPr/>
-        </p:nvSpPr>
-        <p:spPr>
-          <a:xfrm>
-            <a:off x="777240" y="4206240"/>
-            <a:ext cx="10607040" cy="914400"/>
-          </a:xfrm>
-          <a:prstGeom prst="rect">
-            <a:avLst/>
-          </a:prstGeom>
-          <a:solidFill>
-            <a:srgbClr val="FFFFFF"/>
-          </a:solidFill>
-          <a:ln w="12700">
-            <a:solidFill>
-              <a:srgbClr val="EDE7DB"/>
-            </a:solidFill>
-            <a:prstDash val="solid"/>
-          </a:ln>
-        </p:spPr>
-        <p:txBody>
-          <a:bodyPr/>
-          <a:p/>
-        </p:txBody>
-      </p:sp>
-      <p:sp>
-        <p:nvSpPr>
-          <p:cNvPr id="14" name="Shape 12"/>
-          <p:cNvSpPr/>
-          <p:nvPr/>
-        </p:nvSpPr>
-        <p:spPr>
-          <a:xfrm>
-            <a:off x="777240" y="4206240"/>
-            <a:ext cx="54864" cy="914400"/>
-          </a:xfrm>
-          <a:prstGeom prst="rect">
-            <a:avLst/>
-          </a:prstGeom>
-          <a:solidFill>
-            <a:srgbClr val="3B6B4A"/>
-          </a:solidFill>
-          <a:ln w="12700">
-            <a:solidFill>
-              <a:srgbClr val="333333"/>
-            </a:solidFill>
-            <a:prstDash val="solid"/>
-          </a:ln>
-        </p:spPr>
-        <p:txBody>
-          <a:bodyPr/>
-          <a:p/>
-        </p:txBody>
-      </p:sp>
-      <p:sp>
-        <p:nvSpPr>
-          <p:cNvPr id="15" name="Text 13"/>
-          <p:cNvSpPr txBox="1"/>
-          <p:nvPr/>
-        </p:nvSpPr>
-        <p:spPr>
-          <a:xfrm>
-            <a:off x="1143000" y="4279392"/>
-            <a:ext cx="2757830" cy="768096"/>
-          </a:xfrm>
-          <a:prstGeom prst="rect">
-            <a:avLst/>
-          </a:prstGeom>
-          <a:noFill/>
-          <a:ln/>
-        </p:spPr>
-        <p:txBody>
-          <a:bodyPr wrap="square" lIns="0" tIns="0" rIns="0" bIns="0" rtlCol="0" anchor="ctr"/>
-          <a:lstStyle/>
-          <a:p>
-            <a:pPr indent="0" marL="0">
-              <a:buNone/>
-            </a:pPr>
-            <a:r>
-              <a:rPr lang="en-US" sz="1400" b="1" dirty="0">
-                <a:solidFill>
-                  <a:srgbClr val="3B6B4A"/>
-                </a:solidFill>
-                <a:latin typeface="Yu Gothic" pitchFamily="34" charset="0"/>
-                <a:ea typeface="Yu Gothic" pitchFamily="34" charset="-122"/>
-                <a:cs typeface="Yu Gothic" pitchFamily="34" charset="-120"/>
-              </a:rPr>
-              <a:t>掲載の許諾確認</a:t>
-            </a:r>
-            <a:endParaRPr lang="en-US" sz="1400" dirty="0"/>
-          </a:p>
-        </p:txBody>
-      </p:sp>
-      <p:sp>
-        <p:nvSpPr>
-          <p:cNvPr id="16" name="Text 14"/>
-          <p:cNvSpPr txBox="1"/>
-          <p:nvPr/>
-        </p:nvSpPr>
-        <p:spPr>
-          <a:xfrm>
-            <a:off x="4006901" y="4279392"/>
-            <a:ext cx="7011619" cy="768096"/>
-          </a:xfrm>
-          <a:prstGeom prst="rect">
-            <a:avLst/>
-          </a:prstGeom>
-          <a:noFill/>
-          <a:ln/>
-        </p:spPr>
-        <p:txBody>
-          <a:bodyPr wrap="square" lIns="0" tIns="0" rIns="0" bIns="0" rtlCol="0" anchor="ctr"/>
-          <a:lstStyle/>
-          <a:p>
-            <a:pPr indent="0" marL="0">
-              <a:lnSpc>
-                <a:spcPct val="130000"/>
-              </a:lnSpc>
-              <a:buNone/>
-            </a:pPr>
-            <a:r>
-              <a:rPr lang="en-US" sz="1250" dirty="0">
-                <a:solidFill>
-                  <a:srgbClr val="3F3933"/>
-                </a:solidFill>
-                <a:latin typeface="Yu Gothic" pitchFamily="34" charset="0"/>
-                <a:ea typeface="Yu Gothic" pitchFamily="34" charset="-122"/>
-                <a:cs typeface="Yu Gothic" pitchFamily="34" charset="-120"/>
-              </a:rPr>
-              <a:t>事例として使う場合は、社名を出さず「従業員◯名の◯◯業」の形で。数値の公開範囲も確認します</a:t>
-            </a:r>
-            <a:endParaRPr lang="en-US" sz="1250" dirty="0"/>
-          </a:p>
-        </p:txBody>
-      </p:sp>
-      <p:sp>
-        <p:nvSpPr>
-          <p:cNvPr id="17" name="Text 15"/>
-          <p:cNvSpPr txBox="1"/>
-          <p:nvPr/>
-        </p:nvSpPr>
-        <p:spPr>
-          <a:xfrm>
-            <a:off x="777240" y="6382512"/>
-            <a:ext cx="7424928" cy="256032"/>
-          </a:xfrm>
-          <a:prstGeom prst="rect">
-            <a:avLst/>
-          </a:prstGeom>
-          <a:noFill/>
-          <a:ln/>
-        </p:spPr>
-        <p:txBody>
-          <a:bodyPr wrap="square" lIns="0" tIns="0" rIns="0" bIns="0" rtlCol="0" anchor="ctr"/>
-          <a:lstStyle/>
-          <a:p>
-            <a:pPr indent="0" marL="0">
-              <a:buNone/>
-            </a:pPr>
-            <a:r>
-              <a:rPr lang="en-US" sz="900" dirty="0">
-                <a:solidFill>
-                  <a:srgbClr val="8A8177"/>
-                </a:solidFill>
-                <a:latin typeface="Yu Gothic" pitchFamily="34" charset="0"/>
-                <a:ea typeface="Yu Gothic" pitchFamily="34" charset="-122"/>
-                <a:cs typeface="Yu Gothic" pitchFamily="34" charset="-120"/>
-              </a:rPr>
-              <a:t>第12回　AIを前提に事業を組み直す</a:t>
-            </a:r>
-            <a:endParaRPr lang="en-US" sz="900" dirty="0"/>
-          </a:p>
-        </p:txBody>
-      </p:sp>
-      <p:sp>
-        <p:nvSpPr>
-          <p:cNvPr id="18" name="Text 16"/>
-          <p:cNvSpPr txBox="1"/>
-          <p:nvPr/>
-        </p:nvSpPr>
-        <p:spPr>
-          <a:xfrm>
-            <a:off x="8202168" y="6382512"/>
-            <a:ext cx="3182112" cy="256032"/>
-          </a:xfrm>
-          <a:prstGeom prst="rect">
-            <a:avLst/>
-          </a:prstGeom>
-          <a:noFill/>
-          <a:ln/>
-        </p:spPr>
-        <p:txBody>
-          <a:bodyPr wrap="square" lIns="0" tIns="0" rIns="0" bIns="0" rtlCol="0" anchor="ctr"/>
-          <a:lstStyle/>
-          <a:p>
-            <a:pPr algn="r" indent="0" marL="0">
-              <a:buNone/>
-            </a:pPr>
-            <a:r>
-              <a:rPr lang="en-US" sz="900" dirty="0">
-                <a:solidFill>
-                  <a:srgbClr val="8A8177"/>
-                </a:solidFill>
-                <a:latin typeface="Yu Gothic" pitchFamily="34" charset="0"/>
-                <a:ea typeface="Yu Gothic" pitchFamily="34" charset="-122"/>
-                <a:cs typeface="Yu Gothic" pitchFamily="34" charset="-120"/>
-              </a:rPr>
-              <a:t>組み込み</a:t>
-            </a:r>
-            <a:endParaRPr lang="en-US" sz="900" dirty="0"/>
-          </a:p>
-        </p:txBody>
-      </p:sp>
-    </p:spTree>
-  </p:cSld>
-  <p:clrMapOvr>
-    <a:masterClrMapping/>
-  </p:clrMapOvr>
-</p:sld>
-</file>
-
-<file path=ppt/slides/slide13.xml><?xml version="1.0" encoding="utf-8"?>
-<p:sld xmlns:a="http://schemas.openxmlformats.org/drawingml/2006/main" xmlns:r="http://schemas.openxmlformats.org/officeDocument/2006/relationships" xmlns:p="http://schemas.openxmlformats.org/presentationml/2006/main">
-  <p:cSld name="Slide 13">
-    <p:bg>
-      <p:bgPr>
-        <a:solidFill>
-          <a:srgbClr val="F6F2EA"/>
-        </a:solidFill>
-      </p:bgPr>
-    </p:bg>
-    <p:spTree>
-      <p:nvGrpSpPr>
-        <p:cNvPr id="1" name=""/>
-        <p:cNvGrpSpPr/>
-        <p:nvPr/>
-      </p:nvGrpSpPr>
-      <p:grpSpPr>
-        <a:xfrm>
-          <a:off x="0" y="0"/>
-          <a:ext cx="0" cy="0"/>
-          <a:chOff x="0" y="0"/>
-          <a:chExt cx="0" cy="0"/>
-        </a:xfrm>
-      </p:grpSpPr>
-      <p:sp>
-        <p:nvSpPr>
-          <p:cNvPr id="2" name="Text 0"/>
-          <p:cNvSpPr txBox="1"/>
-          <p:nvPr/>
-        </p:nvSpPr>
-        <p:spPr>
-          <a:xfrm>
-            <a:off x="777240" y="566928"/>
-            <a:ext cx="10607040" cy="274320"/>
-          </a:xfrm>
-          <a:prstGeom prst="rect">
-            <a:avLst/>
-          </a:prstGeom>
-          <a:noFill/>
-          <a:ln/>
-        </p:spPr>
-        <p:txBody>
-          <a:bodyPr wrap="square" lIns="0" tIns="0" rIns="0" bIns="0" rtlCol="0" anchor="ctr"/>
-          <a:lstStyle/>
-          <a:p>
-            <a:pPr indent="0" marL="0">
-              <a:buNone/>
-            </a:pPr>
-            <a:r>
-              <a:rPr lang="en-US" sz="1100" b="1" spc="250" kern="0" dirty="0">
-                <a:solidFill>
-                  <a:srgbClr val="B04A2F"/>
-                </a:solidFill>
-                <a:latin typeface="Yu Gothic" pitchFamily="34" charset="0"/>
-                <a:ea typeface="Yu Gothic" pitchFamily="34" charset="-122"/>
-                <a:cs typeface="Yu Gothic" pitchFamily="34" charset="-120"/>
-              </a:rPr>
-              <a:t>ここだけは</a:t>
-            </a:r>
-            <a:endParaRPr lang="en-US" sz="1100" dirty="0"/>
-          </a:p>
-        </p:txBody>
-      </p:sp>
-      <p:sp>
-        <p:nvSpPr>
-          <p:cNvPr id="3" name="Text 1"/>
-          <p:cNvSpPr txBox="1"/>
-          <p:nvPr/>
-        </p:nvSpPr>
-        <p:spPr>
-          <a:xfrm>
-            <a:off x="777240" y="1097280"/>
-            <a:ext cx="10607040" cy="640080"/>
-          </a:xfrm>
-          <a:prstGeom prst="rect">
-            <a:avLst/>
-          </a:prstGeom>
-          <a:noFill/>
-          <a:ln/>
-        </p:spPr>
-        <p:txBody>
-          <a:bodyPr wrap="square" lIns="0" tIns="0" rIns="0" bIns="0" rtlCol="0" anchor="ctr"/>
-          <a:lstStyle/>
-          <a:p>
-            <a:pPr indent="0" marL="0">
-              <a:buNone/>
-            </a:pPr>
-            <a:r>
-              <a:rPr lang="en-US" sz="2600" b="1" dirty="0">
-                <a:solidFill>
-                  <a:srgbClr val="23201D"/>
-                </a:solidFill>
-                <a:latin typeface="Yu Gothic" pitchFamily="34" charset="0"/>
-                <a:ea typeface="Yu Gothic" pitchFamily="34" charset="-122"/>
-                <a:cs typeface="Yu Gothic" pitchFamily="34" charset="-120"/>
-              </a:rPr>
-              <a:t>最後に、ひとつだけ</a:t>
-            </a:r>
-            <a:endParaRPr lang="en-US" sz="2600" dirty="0"/>
-          </a:p>
-        </p:txBody>
-      </p:sp>
-      <p:sp>
-        <p:nvSpPr>
-          <p:cNvPr id="4" name="Shape 2"/>
-          <p:cNvSpPr/>
-          <p:nvPr/>
-        </p:nvSpPr>
-        <p:spPr>
-          <a:xfrm>
-            <a:off x="777240" y="2148840"/>
-            <a:ext cx="64008" cy="2194560"/>
-          </a:xfrm>
-          <a:prstGeom prst="rect">
-            <a:avLst/>
-          </a:prstGeom>
-          <a:solidFill>
-            <a:srgbClr val="B04A2F"/>
-          </a:solidFill>
-          <a:ln w="12700">
-            <a:solidFill>
-              <a:srgbClr val="333333"/>
-            </a:solidFill>
-            <a:prstDash val="solid"/>
-          </a:ln>
-        </p:spPr>
-        <p:txBody>
-          <a:bodyPr/>
-          <a:p/>
-        </p:txBody>
-      </p:sp>
-      <p:sp>
-        <p:nvSpPr>
-          <p:cNvPr id="5" name="Text 3"/>
-          <p:cNvSpPr txBox="1"/>
-          <p:nvPr/>
-        </p:nvSpPr>
-        <p:spPr>
-          <a:xfrm>
-            <a:off x="1188720" y="2148840"/>
-            <a:ext cx="9966960" cy="2194560"/>
-          </a:xfrm>
-          <a:prstGeom prst="rect">
-            <a:avLst/>
-          </a:prstGeom>
-          <a:noFill/>
-          <a:ln/>
-        </p:spPr>
-        <p:txBody>
-          <a:bodyPr wrap="square" lIns="0" tIns="0" rIns="0" bIns="0" rtlCol="0" anchor="ctr"/>
-          <a:lstStyle/>
-          <a:p>
-            <a:pPr indent="0" marL="0">
-              <a:lnSpc>
-                <a:spcPct val="160000"/>
-              </a:lnSpc>
-              <a:buNone/>
-            </a:pPr>
-            <a:r>
-              <a:rPr lang="en-US" sz="1650" dirty="0">
-                <a:solidFill>
-                  <a:srgbClr val="3F3933"/>
-                </a:solidFill>
-                <a:latin typeface="Yu Gothic" pitchFamily="34" charset="0"/>
-                <a:ea typeface="Yu Gothic" pitchFamily="34" charset="-122"/>
-                <a:cs typeface="Yu Gothic" pitchFamily="34" charset="-120"/>
-              </a:rPr>
-              <a:t>この12回で最も効いたのは、講座の中で作ったものを翌日に一度使ってみることでした。使わなかったものは、どれだけよくできていても2週間で忘れます。逆に、一度でも実務で使えば、それは御社の仕組みになります。これから作るものについても、同じです。</a:t>
-            </a:r>
-            <a:endParaRPr lang="en-US" sz="1650" dirty="0"/>
-          </a:p>
-        </p:txBody>
-      </p:sp>
-      <p:sp>
-        <p:nvSpPr>
-          <p:cNvPr id="6" name="Shape 4"/>
-          <p:cNvSpPr/>
-          <p:nvPr/>
-        </p:nvSpPr>
-        <p:spPr>
-          <a:xfrm>
-            <a:off x="777240" y="4709160"/>
-            <a:ext cx="10607040" cy="960120"/>
-          </a:xfrm>
-          <a:prstGeom prst="rect">
-            <a:avLst/>
-          </a:prstGeom>
-          <a:solidFill>
-            <a:srgbClr val="EDE7DB"/>
-          </a:solidFill>
-          <a:ln w="12700">
-            <a:solidFill>
-              <a:srgbClr val="333333"/>
-            </a:solidFill>
-            <a:prstDash val="solid"/>
-          </a:ln>
-        </p:spPr>
-        <p:txBody>
-          <a:bodyPr/>
-          <a:p/>
-        </p:txBody>
-      </p:sp>
-      <p:sp>
-        <p:nvSpPr>
-          <p:cNvPr id="7" name="Text 5"/>
-          <p:cNvSpPr txBox="1"/>
-          <p:nvPr/>
-        </p:nvSpPr>
-        <p:spPr>
-          <a:xfrm>
-            <a:off x="1051560" y="4800600"/>
-            <a:ext cx="1463040" cy="256032"/>
-          </a:xfrm>
-          <a:prstGeom prst="rect">
-            <a:avLst/>
-          </a:prstGeom>
-          <a:noFill/>
-          <a:ln/>
-        </p:spPr>
-        <p:txBody>
-          <a:bodyPr wrap="square" lIns="0" tIns="0" rIns="0" bIns="0" rtlCol="0" anchor="ctr"/>
-          <a:lstStyle/>
-          <a:p>
-            <a:pPr indent="0" marL="0">
-              <a:buNone/>
-            </a:pPr>
-            <a:r>
-              <a:rPr lang="en-US" sz="900" b="1" spc="150" kern="0" dirty="0">
-                <a:solidFill>
-                  <a:srgbClr val="B04A2F"/>
-                </a:solidFill>
-                <a:latin typeface="Yu Gothic" pitchFamily="34" charset="0"/>
-                <a:ea typeface="Yu Gothic" pitchFamily="34" charset="-122"/>
-                <a:cs typeface="Yu Gothic" pitchFamily="34" charset="-120"/>
-              </a:rPr>
-              <a:t>よくある型</a:t>
-            </a:r>
-            <a:endParaRPr lang="en-US" sz="900" dirty="0"/>
-          </a:p>
-        </p:txBody>
-      </p:sp>
-      <p:sp>
-        <p:nvSpPr>
-          <p:cNvPr id="8" name="Text 6"/>
-          <p:cNvSpPr txBox="1"/>
-          <p:nvPr/>
-        </p:nvSpPr>
-        <p:spPr>
-          <a:xfrm>
-            <a:off x="1051560" y="5029200"/>
-            <a:ext cx="10058400" cy="566928"/>
-          </a:xfrm>
-          <a:prstGeom prst="rect">
-            <a:avLst/>
-          </a:prstGeom>
-          <a:noFill/>
-          <a:ln/>
-        </p:spPr>
-        <p:txBody>
-          <a:bodyPr wrap="square" lIns="0" tIns="0" rIns="0" bIns="0" rtlCol="0" anchor="ctr"/>
-          <a:lstStyle/>
-          <a:p>
-            <a:pPr indent="0" marL="0">
-              <a:lnSpc>
-                <a:spcPct val="130000"/>
-              </a:lnSpc>
-              <a:buNone/>
-            </a:pPr>
-            <a:r>
-              <a:rPr lang="en-US" sz="1250" dirty="0">
-                <a:solidFill>
-                  <a:srgbClr val="3F3933"/>
-                </a:solidFill>
-                <a:latin typeface="Yu Gothic" pitchFamily="34" charset="0"/>
-                <a:ea typeface="Yu Gothic" pitchFamily="34" charset="-122"/>
-                <a:cs typeface="Yu Gothic" pitchFamily="34" charset="-120"/>
-              </a:rPr>
-              <a:t>3年構想は、書いたとおりにはならない。ただ、書いたから気づけることがある。当てるための紙ではなく、気づくための紙だと考える。</a:t>
-            </a:r>
-            <a:endParaRPr lang="en-US" sz="1250" dirty="0"/>
-          </a:p>
-        </p:txBody>
-      </p:sp>
-      <p:sp>
-        <p:nvSpPr>
-          <p:cNvPr id="9" name="Text 7"/>
-          <p:cNvSpPr txBox="1"/>
-          <p:nvPr/>
-        </p:nvSpPr>
-        <p:spPr>
-          <a:xfrm>
-            <a:off x="777240" y="6382512"/>
-            <a:ext cx="7424928" cy="256032"/>
-          </a:xfrm>
-          <a:prstGeom prst="rect">
-            <a:avLst/>
-          </a:prstGeom>
-          <a:noFill/>
-          <a:ln/>
-        </p:spPr>
-        <p:txBody>
-          <a:bodyPr wrap="square" lIns="0" tIns="0" rIns="0" bIns="0" rtlCol="0" anchor="ctr"/>
-          <a:lstStyle/>
-          <a:p>
-            <a:pPr indent="0" marL="0">
-              <a:buNone/>
-            </a:pPr>
-            <a:r>
-              <a:rPr lang="en-US" sz="900" dirty="0">
-                <a:solidFill>
-                  <a:srgbClr val="8A8177"/>
-                </a:solidFill>
-                <a:latin typeface="Yu Gothic" pitchFamily="34" charset="0"/>
-                <a:ea typeface="Yu Gothic" pitchFamily="34" charset="-122"/>
-                <a:cs typeface="Yu Gothic" pitchFamily="34" charset="-120"/>
-              </a:rPr>
-              <a:t>第12回　AIを前提に事業を組み直す</a:t>
-            </a:r>
-            <a:endParaRPr lang="en-US" sz="900" dirty="0"/>
-          </a:p>
-        </p:txBody>
-      </p:sp>
-      <p:sp>
-        <p:nvSpPr>
-          <p:cNvPr id="10" name="Text 8"/>
-          <p:cNvSpPr txBox="1"/>
-          <p:nvPr/>
-        </p:nvSpPr>
-        <p:spPr>
-          <a:xfrm>
-            <a:off x="8202168" y="6382512"/>
-            <a:ext cx="3182112" cy="256032"/>
-          </a:xfrm>
-          <a:prstGeom prst="rect">
-            <a:avLst/>
-          </a:prstGeom>
-          <a:noFill/>
-          <a:ln/>
-        </p:spPr>
-        <p:txBody>
-          <a:bodyPr wrap="square" lIns="0" tIns="0" rIns="0" bIns="0" rtlCol="0" anchor="ctr"/>
-          <a:lstStyle/>
-          <a:p>
-            <a:pPr algn="r" indent="0" marL="0">
-              <a:buNone/>
-            </a:pPr>
-            <a:r>
-              <a:rPr lang="en-US" sz="900" dirty="0">
-                <a:solidFill>
-                  <a:srgbClr val="8A8177"/>
-                </a:solidFill>
-                <a:latin typeface="Yu Gothic" pitchFamily="34" charset="0"/>
-                <a:ea typeface="Yu Gothic" pitchFamily="34" charset="-122"/>
-                <a:cs typeface="Yu Gothic" pitchFamily="34" charset="-120"/>
-              </a:rPr>
-              <a:t>ここだけは</a:t>
-            </a:r>
-            <a:endParaRPr lang="en-US" sz="900" dirty="0"/>
-          </a:p>
-        </p:txBody>
-      </p:sp>
-    </p:spTree>
-  </p:cSld>
-  <p:clrMapOvr>
-    <a:masterClrMapping/>
-  </p:clrMapOvr>
-</p:sld>
-</file>
-
-<file path=ppt/slides/slide14.xml><?xml version="1.0" encoding="utf-8"?>
-<p:sld xmlns:a="http://schemas.openxmlformats.org/drawingml/2006/main" xmlns:r="http://schemas.openxmlformats.org/officeDocument/2006/relationships" xmlns:p="http://schemas.openxmlformats.org/presentationml/2006/main">
-  <p:cSld name="Slide 14">
-    <p:bg>
-      <p:bgPr>
-        <a:solidFill>
-          <a:srgbClr val="F6F2EA"/>
-        </a:solidFill>
-      </p:bgPr>
-    </p:bg>
-    <p:spTree>
-      <p:nvGrpSpPr>
-        <p:cNvPr id="1" name=""/>
-        <p:cNvGrpSpPr/>
-        <p:nvPr/>
-      </p:nvGrpSpPr>
-      <p:grpSpPr>
-        <a:xfrm>
-          <a:off x="0" y="0"/>
-          <a:ext cx="0" cy="0"/>
-          <a:chOff x="0" y="0"/>
-          <a:chExt cx="0" cy="0"/>
-        </a:xfrm>
-      </p:grpSpPr>
-      <p:sp>
-        <p:nvSpPr>
-          <p:cNvPr id="2" name="Text 0"/>
-          <p:cNvSpPr txBox="1"/>
-          <p:nvPr/>
-        </p:nvSpPr>
-        <p:spPr>
-          <a:xfrm>
-            <a:off x="777240" y="566928"/>
-            <a:ext cx="10607040" cy="274320"/>
-          </a:xfrm>
-          <a:prstGeom prst="rect">
-            <a:avLst/>
-          </a:prstGeom>
-          <a:noFill/>
-          <a:ln/>
-        </p:spPr>
-        <p:txBody>
-          <a:bodyPr wrap="square" lIns="0" tIns="0" rIns="0" bIns="0" rtlCol="0" anchor="ctr"/>
-          <a:lstStyle/>
-          <a:p>
-            <a:pPr indent="0" marL="0">
-              <a:buNone/>
-            </a:pPr>
-            <a:r>
-              <a:rPr lang="en-US" sz="1100" b="1" spc="250" kern="0" dirty="0">
-                <a:solidFill>
-                  <a:srgbClr val="3B6B4A"/>
-                </a:solidFill>
-                <a:latin typeface="Yu Gothic" pitchFamily="34" charset="0"/>
-                <a:ea typeface="Yu Gothic" pitchFamily="34" charset="-122"/>
-                <a:cs typeface="Yu Gothic" pitchFamily="34" charset="-120"/>
-              </a:rPr>
-              <a:t>次回まで</a:t>
-            </a:r>
-            <a:endParaRPr lang="en-US" sz="1100" dirty="0"/>
-          </a:p>
-        </p:txBody>
-      </p:sp>
-      <p:sp>
-        <p:nvSpPr>
-          <p:cNvPr id="3" name="Text 1"/>
-          <p:cNvSpPr txBox="1"/>
-          <p:nvPr/>
-        </p:nvSpPr>
-        <p:spPr>
-          <a:xfrm>
-            <a:off x="777240" y="896112"/>
-            <a:ext cx="10607040" cy="640080"/>
-          </a:xfrm>
-          <a:prstGeom prst="rect">
-            <a:avLst/>
-          </a:prstGeom>
-          <a:noFill/>
-          <a:ln/>
-        </p:spPr>
-        <p:txBody>
-          <a:bodyPr wrap="square" lIns="0" tIns="0" rIns="0" bIns="0" rtlCol="0" anchor="ctr"/>
-          <a:lstStyle/>
-          <a:p>
-            <a:pPr indent="0" marL="0">
-              <a:buNone/>
-            </a:pPr>
-            <a:r>
-              <a:rPr lang="en-US" sz="2600" b="1" dirty="0">
-                <a:solidFill>
-                  <a:srgbClr val="23201D"/>
-                </a:solidFill>
-                <a:latin typeface="Yu Gothic" pitchFamily="34" charset="0"/>
-                <a:ea typeface="Yu Gothic" pitchFamily="34" charset="-122"/>
-                <a:cs typeface="Yu Gothic" pitchFamily="34" charset="-120"/>
-              </a:rPr>
-              <a:t>次回は「修了後」</a:t>
-            </a:r>
-            <a:endParaRPr lang="en-US" sz="2600" dirty="0"/>
-          </a:p>
-        </p:txBody>
-      </p:sp>
-      <p:sp>
-        <p:nvSpPr>
-          <p:cNvPr id="4" name="Text 2"/>
-          <p:cNvSpPr txBox="1"/>
-          <p:nvPr/>
-        </p:nvSpPr>
-        <p:spPr>
-          <a:xfrm>
-            <a:off x="777240" y="1572768"/>
-            <a:ext cx="9546336" cy="457200"/>
-          </a:xfrm>
-          <a:prstGeom prst="rect">
-            <a:avLst/>
-          </a:prstGeom>
-          <a:noFill/>
-          <a:ln/>
-        </p:spPr>
-        <p:txBody>
-          <a:bodyPr wrap="square" lIns="0" tIns="0" rIns="0" bIns="0" rtlCol="0" anchor="ctr"/>
-          <a:lstStyle/>
-          <a:p>
-            <a:pPr indent="0" marL="0">
-              <a:buNone/>
-            </a:pPr>
-            <a:r>
-              <a:rPr lang="en-US" sz="1400" b="1" dirty="0">
-                <a:solidFill>
-                  <a:srgbClr val="3B6B4A"/>
-                </a:solidFill>
-                <a:latin typeface="Yu Gothic" pitchFamily="34" charset="0"/>
-                <a:ea typeface="Yu Gothic" pitchFamily="34" charset="-122"/>
-                <a:cs typeface="Yu Gothic" pitchFamily="34" charset="-120"/>
-              </a:rPr>
-              <a:t>落ちるのは2か月目です。3か月後に一度お話しすることで、止まりかけたものを立て直せます。</a:t>
-            </a:r>
-            <a:endParaRPr lang="en-US" sz="1400" dirty="0"/>
-          </a:p>
-        </p:txBody>
-      </p:sp>
-      <p:sp>
-        <p:nvSpPr>
-          <p:cNvPr id="5" name="Shape 3"/>
-          <p:cNvSpPr/>
-          <p:nvPr/>
-        </p:nvSpPr>
-        <p:spPr>
-          <a:xfrm>
-            <a:off x="777240" y="2240280"/>
-            <a:ext cx="4985309" cy="2286000"/>
-          </a:xfrm>
-          <a:prstGeom prst="rect">
-            <a:avLst/>
-          </a:prstGeom>
-          <a:solidFill>
-            <a:srgbClr val="FFFFFF"/>
-          </a:solidFill>
-          <a:ln w="12700">
-            <a:solidFill>
-              <a:srgbClr val="EDE7DB"/>
-            </a:solidFill>
-            <a:prstDash val="solid"/>
-          </a:ln>
-        </p:spPr>
-        <p:txBody>
-          <a:bodyPr/>
-          <a:p/>
-        </p:txBody>
-      </p:sp>
-      <p:sp>
-        <p:nvSpPr>
-          <p:cNvPr id="6" name="Text 4"/>
-          <p:cNvSpPr txBox="1"/>
-          <p:nvPr/>
-        </p:nvSpPr>
-        <p:spPr>
-          <a:xfrm>
-            <a:off x="1051560" y="2377440"/>
-            <a:ext cx="4242816" cy="274320"/>
-          </a:xfrm>
-          <a:prstGeom prst="rect">
-            <a:avLst/>
-          </a:prstGeom>
-          <a:noFill/>
-          <a:ln/>
-        </p:spPr>
-        <p:txBody>
-          <a:bodyPr wrap="square" lIns="0" tIns="0" rIns="0" bIns="0" rtlCol="0" anchor="ctr"/>
-          <a:lstStyle/>
-          <a:p>
-            <a:pPr indent="0" marL="0">
-              <a:buNone/>
-            </a:pPr>
-            <a:r>
-              <a:rPr lang="en-US" sz="1000" b="1" spc="150" kern="0" dirty="0">
-                <a:solidFill>
-                  <a:srgbClr val="B04A2F"/>
-                </a:solidFill>
-                <a:latin typeface="Yu Gothic" pitchFamily="34" charset="0"/>
-                <a:ea typeface="Yu Gothic" pitchFamily="34" charset="-122"/>
-                <a:cs typeface="Yu Gothic" pitchFamily="34" charset="-120"/>
-              </a:rPr>
-              <a:t>次回までにやること</a:t>
-            </a:r>
-            <a:endParaRPr lang="en-US" sz="1000" dirty="0"/>
-          </a:p>
-        </p:txBody>
-      </p:sp>
-      <p:sp>
-        <p:nvSpPr>
-          <p:cNvPr id="7" name="Text 5"/>
-          <p:cNvSpPr txBox="1"/>
-          <p:nvPr/>
-        </p:nvSpPr>
-        <p:spPr>
-          <a:xfrm>
-            <a:off x="1051560" y="2743200"/>
-            <a:ext cx="4436669" cy="1554480"/>
-          </a:xfrm>
-          <a:prstGeom prst="rect">
-            <a:avLst/>
-          </a:prstGeom>
-          <a:noFill/>
-          <a:ln/>
-        </p:spPr>
-        <p:txBody>
-          <a:bodyPr wrap="square" lIns="0" tIns="0" rIns="0" bIns="0" rtlCol="0" anchor="ctr"/>
-          <a:lstStyle/>
-          <a:p>
-            <a:pPr indent="0" marL="0">
-              <a:lnSpc>
-                <a:spcPct val="140000"/>
-              </a:lnSpc>
-              <a:buNone/>
-            </a:pPr>
-            <a:r>
-              <a:rPr lang="en-US" sz="1400" dirty="0">
-                <a:solidFill>
-                  <a:srgbClr val="23201D"/>
-                </a:solidFill>
-                <a:latin typeface="Yu Gothic" pitchFamily="34" charset="0"/>
-                <a:ea typeface="Yu Gothic" pitchFamily="34" charset="-122"/>
-                <a:cs typeface="Yu Gothic" pitchFamily="34" charset="-120"/>
-              </a:rPr>
-              <a:t>3か月後のフォローで、進捗をお聞かせください</a:t>
-            </a:r>
-            <a:endParaRPr lang="en-US" sz="1400" dirty="0"/>
-          </a:p>
-        </p:txBody>
-      </p:sp>
-      <p:sp>
-        <p:nvSpPr>
-          <p:cNvPr id="8" name="Shape 6"/>
-          <p:cNvSpPr/>
-          <p:nvPr/>
-        </p:nvSpPr>
-        <p:spPr>
-          <a:xfrm>
-            <a:off x="6398971" y="2240280"/>
-            <a:ext cx="4985309" cy="2286000"/>
-          </a:xfrm>
-          <a:prstGeom prst="rect">
-            <a:avLst/>
-          </a:prstGeom>
-          <a:solidFill>
-            <a:srgbClr val="FFFFFF"/>
-          </a:solidFill>
-          <a:ln w="12700">
-            <a:solidFill>
-              <a:srgbClr val="EDE7DB"/>
-            </a:solidFill>
-            <a:prstDash val="solid"/>
-          </a:ln>
-        </p:spPr>
-        <p:txBody>
-          <a:bodyPr/>
-          <a:p/>
-        </p:txBody>
-      </p:sp>
-      <p:sp>
-        <p:nvSpPr>
-          <p:cNvPr id="9" name="Text 7"/>
-          <p:cNvSpPr txBox="1"/>
-          <p:nvPr/>
-        </p:nvSpPr>
-        <p:spPr>
-          <a:xfrm>
-            <a:off x="6673291" y="2377440"/>
-            <a:ext cx="4242816" cy="274320"/>
-          </a:xfrm>
-          <a:prstGeom prst="rect">
-            <a:avLst/>
-          </a:prstGeom>
-          <a:noFill/>
-          <a:ln/>
-        </p:spPr>
-        <p:txBody>
-          <a:bodyPr wrap="square" lIns="0" tIns="0" rIns="0" bIns="0" rtlCol="0" anchor="ctr"/>
-          <a:lstStyle/>
-          <a:p>
-            <a:pPr indent="0" marL="0">
-              <a:buNone/>
-            </a:pPr>
-            <a:r>
-              <a:rPr lang="en-US" sz="1000" b="1" spc="150" kern="0" dirty="0">
-                <a:solidFill>
-                  <a:srgbClr val="3B6B4A"/>
-                </a:solidFill>
-                <a:latin typeface="Yu Gothic" pitchFamily="34" charset="0"/>
-                <a:ea typeface="Yu Gothic" pitchFamily="34" charset="-122"/>
-                <a:cs typeface="Yu Gothic" pitchFamily="34" charset="-120"/>
-              </a:rPr>
-              <a:t>次回の持ち物</a:t>
-            </a:r>
-            <a:endParaRPr lang="en-US" sz="1000" dirty="0"/>
-          </a:p>
-        </p:txBody>
-      </p:sp>
-      <p:sp>
-        <p:nvSpPr>
-          <p:cNvPr id="10" name="Text 8"/>
-          <p:cNvSpPr txBox="1"/>
-          <p:nvPr/>
-        </p:nvSpPr>
-        <p:spPr>
-          <a:xfrm>
-            <a:off x="6673291" y="2743200"/>
-            <a:ext cx="4436669" cy="694944"/>
-          </a:xfrm>
-          <a:prstGeom prst="rect">
-            <a:avLst/>
-          </a:prstGeom>
-          <a:noFill/>
-          <a:ln/>
-        </p:spPr>
-        <p:txBody>
-          <a:bodyPr wrap="square" lIns="0" tIns="0" rIns="0" bIns="0" rtlCol="0" anchor="ctr"/>
-          <a:lstStyle/>
-          <a:p>
-            <a:pPr indent="0" marL="0">
-              <a:lnSpc>
-                <a:spcPct val="130000"/>
-              </a:lnSpc>
-              <a:buNone/>
-            </a:pPr>
-            <a:r>
-              <a:rPr lang="en-US" sz="1250" dirty="0">
-                <a:solidFill>
-                  <a:srgbClr val="23201D"/>
-                </a:solidFill>
-                <a:latin typeface="Yu Gothic" pitchFamily="34" charset="0"/>
-                <a:ea typeface="Yu Gothic" pitchFamily="34" charset="-122"/>
-                <a:cs typeface="Yu Gothic" pitchFamily="34" charset="-120"/>
-              </a:rPr>
-              <a:t>・（修了時）診断の再回答／成果報告シート／掲載許諾の確認</a:t>
-            </a:r>
-            <a:endParaRPr lang="en-US" sz="1250" dirty="0"/>
-          </a:p>
-        </p:txBody>
-      </p:sp>
-      <p:sp>
-        <p:nvSpPr>
-          <p:cNvPr id="11" name="Shape 9"/>
-          <p:cNvSpPr/>
-          <p:nvPr/>
-        </p:nvSpPr>
-        <p:spPr>
-          <a:xfrm>
-            <a:off x="777240" y="4800600"/>
-            <a:ext cx="10607040" cy="777240"/>
-          </a:xfrm>
-          <a:prstGeom prst="rect">
-            <a:avLst/>
-          </a:prstGeom>
-          <a:solidFill>
-            <a:srgbClr val="EDE7DB"/>
-          </a:solidFill>
-          <a:ln w="12700">
-            <a:solidFill>
-              <a:srgbClr val="333333"/>
-            </a:solidFill>
-            <a:prstDash val="solid"/>
-          </a:ln>
-        </p:spPr>
-        <p:txBody>
-          <a:bodyPr/>
-          <a:p/>
-        </p:txBody>
-      </p:sp>
-      <p:sp>
-        <p:nvSpPr>
-          <p:cNvPr id="12" name="Text 10"/>
-          <p:cNvSpPr txBox="1"/>
-          <p:nvPr/>
-        </p:nvSpPr>
-        <p:spPr>
-          <a:xfrm>
-            <a:off x="1097280" y="4800600"/>
-            <a:ext cx="9966960" cy="777240"/>
-          </a:xfrm>
-          <a:prstGeom prst="rect">
-            <a:avLst/>
-          </a:prstGeom>
-          <a:noFill/>
-          <a:ln/>
-        </p:spPr>
-        <p:txBody>
-          <a:bodyPr wrap="square" lIns="0" tIns="0" rIns="0" bIns="0" rtlCol="0" anchor="ctr"/>
-          <a:lstStyle/>
-          <a:p>
-            <a:pPr indent="0" marL="0">
-              <a:buNone/>
-            </a:pPr>
-            <a:r>
-              <a:rPr lang="en-US" sz="1250" dirty="0">
-                <a:solidFill>
-                  <a:srgbClr val="5A534A"/>
-                </a:solidFill>
-                <a:latin typeface="Yu Gothic" pitchFamily="34" charset="0"/>
-                <a:ea typeface="Yu Gothic" pitchFamily="34" charset="-122"/>
-                <a:cs typeface="Yu Gothic" pitchFamily="34" charset="-120"/>
-              </a:rPr>
-              <a:t>この内容は、次回の3日前にあらためてお送りします。</a:t>
-            </a:r>
-            <a:endParaRPr lang="en-US" sz="1250" dirty="0"/>
-          </a:p>
-        </p:txBody>
-      </p:sp>
-      <p:sp>
-        <p:nvSpPr>
-          <p:cNvPr id="13" name="Text 11"/>
-          <p:cNvSpPr txBox="1"/>
-          <p:nvPr/>
-        </p:nvSpPr>
-        <p:spPr>
-          <a:xfrm>
-            <a:off x="777240" y="6382512"/>
-            <a:ext cx="7424928" cy="256032"/>
-          </a:xfrm>
-          <a:prstGeom prst="rect">
-            <a:avLst/>
-          </a:prstGeom>
-          <a:noFill/>
-          <a:ln/>
-        </p:spPr>
-        <p:txBody>
-          <a:bodyPr wrap="square" lIns="0" tIns="0" rIns="0" bIns="0" rtlCol="0" anchor="ctr"/>
-          <a:lstStyle/>
-          <a:p>
-            <a:pPr indent="0" marL="0">
-              <a:buNone/>
-            </a:pPr>
-            <a:r>
-              <a:rPr lang="en-US" sz="900" dirty="0">
-                <a:solidFill>
-                  <a:srgbClr val="8A8177"/>
-                </a:solidFill>
-                <a:latin typeface="Yu Gothic" pitchFamily="34" charset="0"/>
-                <a:ea typeface="Yu Gothic" pitchFamily="34" charset="-122"/>
-                <a:cs typeface="Yu Gothic" pitchFamily="34" charset="-120"/>
-              </a:rPr>
-              <a:t>第12回　AIを前提に事業を組み直す</a:t>
-            </a:r>
-            <a:endParaRPr lang="en-US" sz="900" dirty="0"/>
-          </a:p>
-        </p:txBody>
-      </p:sp>
-      <p:sp>
-        <p:nvSpPr>
-          <p:cNvPr id="14" name="Text 12"/>
-          <p:cNvSpPr txBox="1"/>
-          <p:nvPr/>
-        </p:nvSpPr>
-        <p:spPr>
-          <a:xfrm>
-            <a:off x="8202168" y="6382512"/>
-            <a:ext cx="3182112" cy="256032"/>
-          </a:xfrm>
-          <a:prstGeom prst="rect">
-            <a:avLst/>
-          </a:prstGeom>
-          <a:noFill/>
-          <a:ln/>
-        </p:spPr>
-        <p:txBody>
-          <a:bodyPr wrap="square" lIns="0" tIns="0" rIns="0" bIns="0" rtlCol="0" anchor="ctr"/>
-          <a:lstStyle/>
-          <a:p>
-            <a:pPr algn="r" indent="0" marL="0">
-              <a:buNone/>
-            </a:pPr>
-            <a:r>
-              <a:rPr lang="en-US" sz="900" dirty="0">
-                <a:solidFill>
-                  <a:srgbClr val="8A8177"/>
-                </a:solidFill>
-                <a:latin typeface="Yu Gothic" pitchFamily="34" charset="0"/>
-                <a:ea typeface="Yu Gothic" pitchFamily="34" charset="-122"/>
-                <a:cs typeface="Yu Gothic" pitchFamily="34" charset="-120"/>
-              </a:rPr>
-              <a:t>次回まで</a:t>
-            </a:r>
-            <a:endParaRPr lang="en-US" sz="900" dirty="0"/>
-          </a:p>
-        </p:txBody>
-      </p:sp>
-    </p:spTree>
-  </p:cSld>
-  <p:clrMapOvr>
-    <a:masterClrMapping/>
-  </p:clrMapOvr>
-</p:sld>
-</file>
-
-<file path=ppt/slides/slide15.xml><?xml version="1.0" encoding="utf-8"?>
-<p:sld xmlns:a="http://schemas.openxmlformats.org/drawingml/2006/main" xmlns:r="http://schemas.openxmlformats.org/officeDocument/2006/relationships" xmlns:p="http://schemas.openxmlformats.org/presentationml/2006/main">
-  <p:cSld name="Slide 15">
     <p:bg>
       <p:bgPr>
         <a:solidFill>
@@ -5369,8 +3406,8 @@
         </p:nvSpPr>
         <p:spPr>
           <a:xfrm>
-            <a:off x="777240" y="1280160"/>
-            <a:ext cx="10607040" cy="365760"/>
+            <a:off x="777240" y="685800"/>
+            <a:ext cx="5939942" cy="365760"/>
           </a:xfrm>
           <a:prstGeom prst="rect">
             <a:avLst/>
@@ -5394,7 +3431,7 @@
                 <a:ea typeface="Yu Gothic" pitchFamily="34" charset="-122"/>
                 <a:cs typeface="Yu Gothic" pitchFamily="34" charset="-120"/>
               </a:rPr>
-              <a:t>今日の宿題</a:t>
+              <a:t>修了後のお願い　ひとつだけ</a:t>
             </a:r>
             <a:endParaRPr lang="en-US" sz="1200" dirty="0"/>
           </a:p>
@@ -5402,53 +3439,14 @@
       </p:sp>
       <p:sp>
         <p:nvSpPr>
-          <p:cNvPr id="3" name="Text 1"/>
-          <p:cNvSpPr txBox="1"/>
-          <p:nvPr/>
-        </p:nvSpPr>
-        <p:spPr>
-          <a:xfrm>
-            <a:off x="777240" y="1691640"/>
-            <a:ext cx="10607040" cy="640080"/>
-          </a:xfrm>
-          <a:prstGeom prst="rect">
-            <a:avLst/>
-          </a:prstGeom>
-          <a:noFill/>
-          <a:ln/>
-        </p:spPr>
-        <p:txBody>
-          <a:bodyPr wrap="square" lIns="0" tIns="0" rIns="0" bIns="0" rtlCol="0" anchor="ctr"/>
-          <a:lstStyle/>
-          <a:p>
-            <a:pPr indent="0" marL="0">
-              <a:buNone/>
-            </a:pPr>
-            <a:r>
-              <a:rPr lang="en-US" sz="3200" b="1" dirty="0">
-                <a:solidFill>
-                  <a:srgbClr val="FFFFFF"/>
-                </a:solidFill>
-                <a:latin typeface="Yu Gothic" pitchFamily="34" charset="0"/>
-                <a:ea typeface="Yu Gothic" pitchFamily="34" charset="-122"/>
-                <a:cs typeface="Yu Gothic" pitchFamily="34" charset="-120"/>
-              </a:rPr>
-              <a:t>ひとつだけ</a:t>
-            </a:r>
-            <a:endParaRPr lang="en-US" sz="3200" dirty="0"/>
-          </a:p>
-        </p:txBody>
-      </p:sp>
-      <p:sp>
-        <p:nvSpPr>
-          <p:cNvPr id="4" name="Shape 2"/>
+          <p:cNvPr id="3" name="Shape 1"/>
           <p:cNvSpPr/>
           <p:nvPr/>
         </p:nvSpPr>
         <p:spPr>
           <a:xfrm>
-            <a:off x="777240" y="2651760"/>
-            <a:ext cx="10607040" cy="1371600"/>
+            <a:off x="777240" y="1188720"/>
+            <a:ext cx="5939942" cy="1600200"/>
           </a:xfrm>
           <a:prstGeom prst="rect">
             <a:avLst/>
@@ -5463,9 +3461,47 @@
             <a:prstDash val="solid"/>
           </a:ln>
         </p:spPr>
-        <p:txBody>
-          <a:bodyPr/>
-          <a:p/>
+      </p:sp>
+      <p:sp>
+        <p:nvSpPr>
+          <p:cNvPr id="4" name="Text 2"/>
+          <p:cNvSpPr txBox="1"/>
+          <p:nvPr/>
+        </p:nvSpPr>
+        <p:spPr>
+          <a:xfrm>
+            <a:off x="1143000" y="1261872"/>
+            <a:ext cx="5208422" cy="1463040"/>
+          </a:xfrm>
+          <a:prstGeom prst="rect">
+            <a:avLst/>
+          </a:prstGeom>
+          <a:noFill/>
+          <a:ln/>
+        </p:spPr>
+        <p:txBody>
+          <a:bodyPr wrap="square" lIns="0" tIns="0" rIns="0" bIns="0" rtlCol="0" anchor="ctr"/>
+          <a:lstStyle/>
+          <a:p>
+            <a:pPr indent="0" marL="0">
+              <a:lnSpc>
+                <a:spcPct val="135000"/>
+              </a:lnSpc>
+              <a:buNone/>
+            </a:pPr>
+            <a:r>
+              <a:rPr lang="en-US" sz="1800" b="1" dirty="0">
+                <a:solidFill>
+                  <a:srgbClr val="FFFFFF"/>
+                </a:solidFill>
+                <a:latin typeface="Yu Gothic" pitchFamily="34" charset="0"/>
+                <a:ea typeface="Yu Gothic" pitchFamily="34" charset="-122"/>
+                <a:cs typeface="Yu Gothic" pitchFamily="34" charset="-120"/>
+              </a:rPr>
+              <a:t>3か月後のフォローで、進捗をお聞かせください。</a:t>
+            </a:r>
+            <a:endParaRPr lang="en-US" sz="1800" dirty="0"/>
+          </a:p>
         </p:txBody>
       </p:sp>
       <p:sp>
@@ -5476,17 +3512,204 @@
         </p:nvSpPr>
         <p:spPr>
           <a:xfrm>
-            <a:off x="1234440" y="2743200"/>
-            <a:ext cx="9692640" cy="1188720"/>
-          </a:xfrm>
-          <a:prstGeom prst="rect">
-            <a:avLst/>
-          </a:prstGeom>
-          <a:noFill/>
-          <a:ln/>
-        </p:spPr>
-        <p:txBody>
-          <a:bodyPr wrap="square" lIns="0" tIns="0" rIns="0" bIns="0" rtlCol="0" anchor="ctr"/>
+            <a:off x="777240" y="3063240"/>
+            <a:ext cx="5939942" cy="274320"/>
+          </a:xfrm>
+          <a:prstGeom prst="rect">
+            <a:avLst/>
+          </a:prstGeom>
+          <a:noFill/>
+          <a:ln/>
+        </p:spPr>
+        <p:txBody>
+          <a:bodyPr wrap="square" lIns="0" tIns="0" rIns="0" bIns="0" rtlCol="0" anchor="ctr"/>
+          <a:lstStyle/>
+          <a:p>
+            <a:pPr indent="0" marL="0">
+              <a:buNone/>
+            </a:pPr>
+            <a:r>
+              <a:rPr lang="en-US" sz="1000" b="1" spc="200" kern="0" dirty="0">
+                <a:solidFill>
+                  <a:srgbClr val="B04A2F"/>
+                </a:solidFill>
+                <a:latin typeface="Yu Gothic" pitchFamily="34" charset="0"/>
+                <a:ea typeface="Yu Gothic" pitchFamily="34" charset="-122"/>
+                <a:cs typeface="Yu Gothic" pitchFamily="34" charset="-120"/>
+              </a:rPr>
+              <a:t>なぜこの宿題か</a:t>
+            </a:r>
+            <a:endParaRPr lang="en-US" sz="1000" dirty="0"/>
+          </a:p>
+        </p:txBody>
+      </p:sp>
+      <p:sp>
+        <p:nvSpPr>
+          <p:cNvPr id="6" name="Text 4"/>
+          <p:cNvSpPr txBox="1"/>
+          <p:nvPr/>
+        </p:nvSpPr>
+        <p:spPr>
+          <a:xfrm>
+            <a:off x="777240" y="3383280"/>
+            <a:ext cx="5939942" cy="2194560"/>
+          </a:xfrm>
+          <a:prstGeom prst="rect">
+            <a:avLst/>
+          </a:prstGeom>
+          <a:noFill/>
+          <a:ln/>
+        </p:spPr>
+        <p:txBody>
+          <a:bodyPr wrap="square" lIns="0" tIns="0" rIns="0" bIns="0" rtlCol="0" anchor="t"/>
+          <a:lstStyle/>
+          <a:p>
+            <a:pPr indent="0" marL="0">
+              <a:lnSpc>
+                <a:spcPct val="145000"/>
+              </a:lnSpc>
+              <a:buNone/>
+            </a:pPr>
+            <a:r>
+              <a:rPr lang="en-US" sz="1250" dirty="0">
+                <a:solidFill>
+                  <a:srgbClr val="CFC6B8"/>
+                </a:solidFill>
+                <a:latin typeface="Yu Gothic" pitchFamily="34" charset="0"/>
+                <a:ea typeface="Yu Gothic" pitchFamily="34" charset="-122"/>
+                <a:cs typeface="Yu Gothic" pitchFamily="34" charset="-120"/>
+              </a:rPr>
+              <a:t>修了直後は勢いがあります。落ちるのは2か月目です。3か月後に一度お話しすることで、止まりかけたものを立て直せます。ご負担のない範囲で結構です。</a:t>
+            </a:r>
+            <a:endParaRPr lang="en-US" sz="1250" dirty="0"/>
+          </a:p>
+        </p:txBody>
+      </p:sp>
+      <p:sp>
+        <p:nvSpPr>
+          <p:cNvPr id="7" name="Shape 5"/>
+          <p:cNvSpPr/>
+          <p:nvPr/>
+        </p:nvSpPr>
+        <p:spPr>
+          <a:xfrm>
+            <a:off x="6900062" y="731520"/>
+            <a:ext cx="18288" cy="4937760"/>
+          </a:xfrm>
+          <a:prstGeom prst="rect">
+            <a:avLst/>
+          </a:prstGeom>
+          <a:solidFill>
+            <a:srgbClr val="4A443D"/>
+          </a:solidFill>
+          <a:ln w="12700">
+            <a:solidFill>
+              <a:srgbClr val="4A443D"/>
+            </a:solidFill>
+            <a:prstDash val="solid"/>
+          </a:ln>
+        </p:spPr>
+      </p:sp>
+      <p:sp>
+        <p:nvSpPr>
+          <p:cNvPr id="8" name="Text 6"/>
+          <p:cNvSpPr txBox="1"/>
+          <p:nvPr/>
+        </p:nvSpPr>
+        <p:spPr>
+          <a:xfrm>
+            <a:off x="7082942" y="685800"/>
+            <a:ext cx="4301338" cy="365760"/>
+          </a:xfrm>
+          <a:prstGeom prst="rect">
+            <a:avLst/>
+          </a:prstGeom>
+          <a:noFill/>
+          <a:ln/>
+        </p:spPr>
+        <p:txBody>
+          <a:bodyPr wrap="square" lIns="0" tIns="0" rIns="0" bIns="0" rtlCol="0" anchor="ctr"/>
+          <a:lstStyle/>
+          <a:p>
+            <a:pPr indent="0" marL="0">
+              <a:buNone/>
+            </a:pPr>
+            <a:r>
+              <a:rPr lang="en-US" sz="1200" b="1" spc="300" kern="0" dirty="0">
+                <a:solidFill>
+                  <a:srgbClr val="9FC2A8"/>
+                </a:solidFill>
+                <a:latin typeface="Yu Gothic" pitchFamily="34" charset="0"/>
+                <a:ea typeface="Yu Gothic" pitchFamily="34" charset="-122"/>
+                <a:cs typeface="Yu Gothic" pitchFamily="34" charset="-120"/>
+              </a:rPr>
+              <a:t>次回</a:t>
+            </a:r>
+            <a:endParaRPr lang="en-US" sz="1200" dirty="0"/>
+          </a:p>
+        </p:txBody>
+      </p:sp>
+      <p:sp>
+        <p:nvSpPr>
+          <p:cNvPr id="9" name="Text 7"/>
+          <p:cNvSpPr txBox="1"/>
+          <p:nvPr/>
+        </p:nvSpPr>
+        <p:spPr>
+          <a:xfrm>
+            <a:off x="7082942" y="1188720"/>
+            <a:ext cx="4301338" cy="914400"/>
+          </a:xfrm>
+          <a:prstGeom prst="rect">
+            <a:avLst/>
+          </a:prstGeom>
+          <a:noFill/>
+          <a:ln/>
+        </p:spPr>
+        <p:txBody>
+          <a:bodyPr wrap="square" lIns="0" tIns="0" rIns="0" bIns="0" rtlCol="0" anchor="t"/>
+          <a:lstStyle/>
+          <a:p>
+            <a:pPr indent="0" marL="0">
+              <a:lnSpc>
+                <a:spcPct val="130000"/>
+              </a:lnSpc>
+              <a:buNone/>
+            </a:pPr>
+            <a:r>
+              <a:rPr lang="en-US" sz="1600" b="1" dirty="0">
+                <a:solidFill>
+                  <a:srgbClr val="FFFFFF"/>
+                </a:solidFill>
+                <a:latin typeface="Yu Gothic" pitchFamily="34" charset="0"/>
+                <a:ea typeface="Yu Gothic" pitchFamily="34" charset="-122"/>
+                <a:cs typeface="Yu Gothic" pitchFamily="34" charset="-120"/>
+              </a:rPr>
+              <a:t>修了後について</a:t>
+            </a:r>
+            <a:endParaRPr lang="en-US" sz="1600" dirty="0"/>
+          </a:p>
+        </p:txBody>
+      </p:sp>
+      <p:sp>
+        <p:nvSpPr>
+          <p:cNvPr id="10" name="Text 8"/>
+          <p:cNvSpPr txBox="1"/>
+          <p:nvPr/>
+        </p:nvSpPr>
+        <p:spPr>
+          <a:xfrm>
+            <a:off x="7082942" y="2194560"/>
+            <a:ext cx="4301338" cy="1005840"/>
+          </a:xfrm>
+          <a:prstGeom prst="rect">
+            <a:avLst/>
+          </a:prstGeom>
+          <a:noFill/>
+          <a:ln/>
+        </p:spPr>
+        <p:txBody>
+          <a:bodyPr wrap="square" lIns="0" tIns="0" rIns="0" bIns="0" rtlCol="0" anchor="t"/>
           <a:lstStyle/>
           <a:p>
             <a:pPr indent="0" marL="0">
@@ -5496,7 +3719,91 @@
               <a:buNone/>
             </a:pPr>
             <a:r>
-              <a:rPr lang="en-US" sz="1900" b="1" dirty="0">
+              <a:rPr lang="en-US" sz="1200" dirty="0">
+                <a:solidFill>
+                  <a:srgbClr val="CFC6B8"/>
+                </a:solidFill>
+                <a:latin typeface="Yu Gothic" pitchFamily="34" charset="0"/>
+                <a:ea typeface="Yu Gothic" pitchFamily="34" charset="-122"/>
+                <a:cs typeface="Yu Gothic" pitchFamily="34" charset="-120"/>
+              </a:rPr>
+              <a:t>落ちるのは2か月目です。3か月後に一度お話しすることで、止まりかけたものを立て直せます。</a:t>
+            </a:r>
+            <a:endParaRPr lang="en-US" sz="1200" dirty="0"/>
+          </a:p>
+        </p:txBody>
+      </p:sp>
+      <p:sp>
+        <p:nvSpPr>
+          <p:cNvPr id="11" name="Text 9"/>
+          <p:cNvSpPr txBox="1"/>
+          <p:nvPr/>
+        </p:nvSpPr>
+        <p:spPr>
+          <a:xfrm>
+            <a:off x="7082942" y="3337560"/>
+            <a:ext cx="4301338" cy="274320"/>
+          </a:xfrm>
+          <a:prstGeom prst="rect">
+            <a:avLst/>
+          </a:prstGeom>
+          <a:noFill/>
+          <a:ln/>
+        </p:spPr>
+        <p:txBody>
+          <a:bodyPr wrap="square" lIns="0" tIns="0" rIns="0" bIns="0" rtlCol="0" anchor="ctr"/>
+          <a:lstStyle/>
+          <a:p>
+            <a:pPr indent="0" marL="0">
+              <a:buNone/>
+            </a:pPr>
+            <a:r>
+              <a:rPr lang="en-US" sz="1000" b="1" spc="200" kern="0" dirty="0">
+                <a:solidFill>
+                  <a:srgbClr val="9FC2A8"/>
+                </a:solidFill>
+                <a:latin typeface="Yu Gothic" pitchFamily="34" charset="0"/>
+                <a:ea typeface="Yu Gothic" pitchFamily="34" charset="-122"/>
+                <a:cs typeface="Yu Gothic" pitchFamily="34" charset="-120"/>
+              </a:rPr>
+              <a:t>修了時にすること</a:t>
+            </a:r>
+            <a:endParaRPr lang="en-US" sz="1000" dirty="0"/>
+          </a:p>
+        </p:txBody>
+      </p:sp>
+      <p:sp>
+        <p:nvSpPr>
+          <p:cNvPr id="12" name="Text 10"/>
+          <p:cNvSpPr txBox="1"/>
+          <p:nvPr/>
+        </p:nvSpPr>
+        <p:spPr>
+          <a:xfrm>
+            <a:off x="7082942" y="3657600"/>
+            <a:ext cx="4301338" cy="1554480"/>
+          </a:xfrm>
+          <a:prstGeom prst="rect">
+            <a:avLst/>
+          </a:prstGeom>
+          <a:noFill/>
+          <a:ln/>
+        </p:spPr>
+        <p:txBody>
+          <a:bodyPr wrap="square" lIns="0" tIns="0" rIns="0" bIns="0" rtlCol="0" anchor="t"/>
+          <a:lstStyle/>
+          <a:p>
+            <a:pPr indent="0" marL="0">
+              <a:lnSpc>
+                <a:spcPct val="130000"/>
+              </a:lnSpc>
+              <a:spcAft>
+                <a:spcPts val="600"/>
+              </a:spcAft>
+              <a:buNone/>
+            </a:pPr>
+            <a:r>
+              <a:rPr lang="en-US" sz="1200" dirty="0">
                 <a:solidFill>
                   <a:srgbClr val="FFFFFF"/>
                 </a:solidFill>
@@ -5504,46 +3811,92 @@
                 <a:ea typeface="Yu Gothic" pitchFamily="34" charset="-122"/>
                 <a:cs typeface="Yu Gothic" pitchFamily="34" charset="-120"/>
               </a:rPr>
-              <a:t>（修了後）3か月後のフォローで、進捗をお聞かせください。</a:t>
-            </a:r>
-            <a:endParaRPr lang="en-US" sz="1900" dirty="0"/>
-          </a:p>
-        </p:txBody>
-      </p:sp>
-      <p:sp>
-        <p:nvSpPr>
-          <p:cNvPr id="6" name="Text 4"/>
-          <p:cNvSpPr txBox="1"/>
-          <p:nvPr/>
-        </p:nvSpPr>
-        <p:spPr>
-          <a:xfrm>
-            <a:off x="777240" y="4297680"/>
-            <a:ext cx="10607040" cy="274320"/>
-          </a:xfrm>
-          <a:prstGeom prst="rect">
-            <a:avLst/>
-          </a:prstGeom>
-          <a:noFill/>
-          <a:ln/>
-        </p:spPr>
-        <p:txBody>
-          <a:bodyPr wrap="square" lIns="0" tIns="0" rIns="0" bIns="0" rtlCol="0" anchor="ctr"/>
-          <a:lstStyle/>
-          <a:p>
-            <a:pPr indent="0" marL="0">
-              <a:buNone/>
-            </a:pPr>
-            <a:r>
-              <a:rPr lang="en-US" sz="1000" b="1" spc="200" kern="0" dirty="0">
-                <a:solidFill>
-                  <a:srgbClr val="B04A2F"/>
-                </a:solidFill>
-                <a:latin typeface="Yu Gothic" pitchFamily="34" charset="0"/>
-                <a:ea typeface="Yu Gothic" pitchFamily="34" charset="-122"/>
-                <a:cs typeface="Yu Gothic" pitchFamily="34" charset="-120"/>
-              </a:rPr>
-              <a:t>なぜこの宿題か</a:t>
+              <a:t>・診断をもう一度（受講前と同じ設問）</a:t>
+            </a:r>
+            <a:endParaRPr lang="en-US" sz="1200" dirty="0"/>
+          </a:p>
+          <a:p>
+            <a:pPr indent="0" marL="0">
+              <a:lnSpc>
+                <a:spcPct val="130000"/>
+              </a:lnSpc>
+              <a:spcAft>
+                <a:spcPts val="600"/>
+              </a:spcAft>
+              <a:buNone/>
+            </a:pPr>
+            <a:r>
+              <a:rPr lang="en-US" sz="1200" dirty="0">
+                <a:solidFill>
+                  <a:srgbClr val="FFFFFF"/>
+                </a:solidFill>
+                <a:latin typeface="Yu Gothic" pitchFamily="34" charset="0"/>
+                <a:ea typeface="Yu Gothic" pitchFamily="34" charset="-122"/>
+                <a:cs typeface="Yu Gothic" pitchFamily="34" charset="-120"/>
+              </a:rPr>
+              <a:t>・成果報告シートの記入</a:t>
+            </a:r>
+            <a:endParaRPr lang="en-US" sz="1200" dirty="0"/>
+          </a:p>
+          <a:p>
+            <a:pPr indent="0" marL="0">
+              <a:lnSpc>
+                <a:spcPct val="130000"/>
+              </a:lnSpc>
+              <a:spcAft>
+                <a:spcPts val="600"/>
+              </a:spcAft>
+              <a:buNone/>
+            </a:pPr>
+            <a:r>
+              <a:rPr lang="en-US" sz="1200" dirty="0">
+                <a:solidFill>
+                  <a:srgbClr val="FFFFFF"/>
+                </a:solidFill>
+                <a:latin typeface="Yu Gothic" pitchFamily="34" charset="0"/>
+                <a:ea typeface="Yu Gothic" pitchFamily="34" charset="-122"/>
+                <a:cs typeface="Yu Gothic" pitchFamily="34" charset="-120"/>
+              </a:rPr>
+              <a:t>・掲載の許諾の確認</a:t>
+            </a:r>
+            <a:endParaRPr lang="en-US" sz="1200" dirty="0"/>
+          </a:p>
+        </p:txBody>
+      </p:sp>
+      <p:sp>
+        <p:nvSpPr>
+          <p:cNvPr id="13" name="Text 11"/>
+          <p:cNvSpPr txBox="1"/>
+          <p:nvPr/>
+        </p:nvSpPr>
+        <p:spPr>
+          <a:xfrm>
+            <a:off x="7082942" y="5303520"/>
+            <a:ext cx="4301338" cy="320040"/>
+          </a:xfrm>
+          <a:prstGeom prst="rect">
+            <a:avLst/>
+          </a:prstGeom>
+          <a:noFill/>
+          <a:ln/>
+        </p:spPr>
+        <p:txBody>
+          <a:bodyPr wrap="square" lIns="0" tIns="0" rIns="0" bIns="0" rtlCol="0" anchor="ctr"/>
+          <a:lstStyle/>
+          <a:p>
+            <a:pPr indent="0" marL="0">
+              <a:buNone/>
+            </a:pPr>
+            <a:r>
+              <a:rPr lang="en-US" sz="1000" dirty="0">
+                <a:solidFill>
+                  <a:srgbClr val="8A8177"/>
+                </a:solidFill>
+                <a:latin typeface="Yu Gothic" pitchFamily="34" charset="0"/>
+                <a:ea typeface="Yu Gothic" pitchFamily="34" charset="-122"/>
+                <a:cs typeface="Yu Gothic" pitchFamily="34" charset="-120"/>
+              </a:rPr>
+              <a:t>3か月後の日程は、今日この場で仮に決めます。</a:t>
             </a:r>
             <a:endParaRPr lang="en-US" sz="1000" dirty="0"/>
           </a:p>
@@ -5551,49 +3904,7 @@
       </p:sp>
       <p:sp>
         <p:nvSpPr>
-          <p:cNvPr id="7" name="Text 5"/>
-          <p:cNvSpPr txBox="1"/>
-          <p:nvPr/>
-        </p:nvSpPr>
-        <p:spPr>
-          <a:xfrm>
-            <a:off x="777240" y="4572000"/>
-            <a:ext cx="9546336" cy="914400"/>
-          </a:xfrm>
-          <a:prstGeom prst="rect">
-            <a:avLst/>
-          </a:prstGeom>
-          <a:noFill/>
-          <a:ln/>
-        </p:spPr>
-        <p:txBody>
-          <a:bodyPr wrap="square" lIns="0" tIns="0" rIns="0" bIns="0" rtlCol="0" anchor="ctr"/>
-          <a:lstStyle/>
-          <a:p>
-            <a:pPr indent="0" marL="0">
-              <a:lnSpc>
-                <a:spcPct val="145000"/>
-              </a:lnSpc>
-              <a:buNone/>
-            </a:pPr>
-            <a:r>
-              <a:rPr lang="en-US" sz="1350" dirty="0">
-                <a:solidFill>
-                  <a:srgbClr val="CFC6B8"/>
-                </a:solidFill>
-                <a:latin typeface="Yu Gothic" pitchFamily="34" charset="0"/>
-                <a:ea typeface="Yu Gothic" pitchFamily="34" charset="-122"/>
-                <a:cs typeface="Yu Gothic" pitchFamily="34" charset="-120"/>
-              </a:rPr>
-              <a:t>修了直後は勢いがあります。落ちるのは2か月目です。3か月後に一度お話しすることで、止まりかけたものを立て直せます。ご負担のない範囲で結構です。</a:t>
-            </a:r>
-            <a:endParaRPr lang="en-US" sz="1350" dirty="0"/>
-          </a:p>
-        </p:txBody>
-      </p:sp>
-      <p:sp>
-        <p:nvSpPr>
-          <p:cNvPr id="8" name="Text 6"/>
+          <p:cNvPr id="14" name="Text 12"/>
           <p:cNvSpPr txBox="1"/>
           <p:nvPr/>
         </p:nvSpPr>
@@ -5764,10 +4075,6 @@
             <a:prstDash val="solid"/>
           </a:ln>
         </p:spPr>
-        <p:txBody>
-          <a:bodyPr/>
-          <a:p/>
-        </p:txBody>
       </p:sp>
       <p:sp>
         <p:nvSpPr>
@@ -5871,10 +4178,6 @@
             <a:prstDash val="solid"/>
           </a:ln>
         </p:spPr>
-        <p:txBody>
-          <a:bodyPr/>
-          <a:p/>
-        </p:txBody>
       </p:sp>
       <p:sp>
         <p:nvSpPr>
@@ -5978,10 +4281,6 @@
             <a:prstDash val="solid"/>
           </a:ln>
         </p:spPr>
-        <p:txBody>
-          <a:bodyPr/>
-          <a:p/>
-        </p:txBody>
       </p:sp>
       <p:sp>
         <p:nvSpPr>
@@ -6080,15 +4379,11 @@
           </a:solidFill>
           <a:ln w="12700">
             <a:solidFill>
-              <a:srgbClr val="333333"/>
+              <a:srgbClr val="B04A2F"/>
             </a:solidFill>
             <a:prstDash val="solid"/>
           </a:ln>
         </p:spPr>
-        <p:txBody>
-          <a:bodyPr/>
-          <a:p/>
-        </p:txBody>
       </p:sp>
       <p:sp>
         <p:nvSpPr>
@@ -6342,15 +4637,11 @@
           </a:solidFill>
           <a:ln w="12700">
             <a:solidFill>
-              <a:srgbClr val="333333"/>
+              <a:srgbClr val="EDE7DB"/>
             </a:solidFill>
             <a:prstDash val="solid"/>
           </a:ln>
         </p:spPr>
-        <p:txBody>
-          <a:bodyPr/>
-          <a:p/>
-        </p:txBody>
       </p:sp>
       <p:sp>
         <p:nvSpPr>
@@ -6413,15 +4704,11 @@
           </a:solidFill>
           <a:ln w="12700">
             <a:solidFill>
-              <a:srgbClr val="333333"/>
+              <a:srgbClr val="EDE7DB"/>
             </a:solidFill>
             <a:prstDash val="solid"/>
           </a:ln>
         </p:spPr>
-        <p:txBody>
-          <a:bodyPr/>
-          <a:p/>
-        </p:txBody>
       </p:sp>
       <p:sp>
         <p:nvSpPr>
@@ -7025,10 +5312,6 @@
             <a:prstDash val="solid"/>
           </a:ln>
         </p:spPr>
-        <p:txBody>
-          <a:bodyPr/>
-          <a:p/>
-        </p:txBody>
       </p:sp>
       <p:sp>
         <p:nvSpPr>
@@ -7049,15 +5332,11 @@
           </a:solidFill>
           <a:ln w="12700">
             <a:solidFill>
-              <a:srgbClr val="333333"/>
+              <a:srgbClr val="B04A2F"/>
             </a:solidFill>
             <a:prstDash val="solid"/>
           </a:ln>
         </p:spPr>
-        <p:txBody>
-          <a:bodyPr/>
-          <a:p/>
-        </p:txBody>
       </p:sp>
       <p:sp>
         <p:nvSpPr>
@@ -7203,10 +5482,6 @@
             <a:prstDash val="solid"/>
           </a:ln>
         </p:spPr>
-        <p:txBody>
-          <a:bodyPr/>
-          <a:p/>
-        </p:txBody>
       </p:sp>
       <p:sp>
         <p:nvSpPr>
@@ -7227,15 +5502,11 @@
           </a:solidFill>
           <a:ln w="12700">
             <a:solidFill>
-              <a:srgbClr val="333333"/>
+              <a:srgbClr val="B04A2F"/>
             </a:solidFill>
             <a:prstDash val="solid"/>
           </a:ln>
         </p:spPr>
-        <p:txBody>
-          <a:bodyPr/>
-          <a:p/>
-        </p:txBody>
       </p:sp>
       <p:sp>
         <p:nvSpPr>
@@ -7381,10 +5652,6 @@
             <a:prstDash val="solid"/>
           </a:ln>
         </p:spPr>
-        <p:txBody>
-          <a:bodyPr/>
-          <a:p/>
-        </p:txBody>
       </p:sp>
       <p:sp>
         <p:nvSpPr>
@@ -7405,15 +5672,11 @@
           </a:solidFill>
           <a:ln w="12700">
             <a:solidFill>
-              <a:srgbClr val="333333"/>
+              <a:srgbClr val="B04A2F"/>
             </a:solidFill>
             <a:prstDash val="solid"/>
           </a:ln>
         </p:spPr>
-        <p:txBody>
-          <a:bodyPr/>
-          <a:p/>
-        </p:txBody>
       </p:sp>
       <p:sp>
         <p:nvSpPr>
@@ -7559,10 +5822,6 @@
             <a:prstDash val="solid"/>
           </a:ln>
         </p:spPr>
-        <p:txBody>
-          <a:bodyPr/>
-          <a:p/>
-        </p:txBody>
       </p:sp>
       <p:sp>
         <p:nvSpPr>
@@ -7583,15 +5842,11 @@
           </a:solidFill>
           <a:ln w="12700">
             <a:solidFill>
-              <a:srgbClr val="333333"/>
+              <a:srgbClr val="B04A2F"/>
             </a:solidFill>
             <a:prstDash val="solid"/>
           </a:ln>
         </p:spPr>
-        <p:txBody>
-          <a:bodyPr/>
-          <a:p/>
-        </p:txBody>
       </p:sp>
       <p:sp>
         <p:nvSpPr>
@@ -7889,13 +6144,13 @@
             <a:r>
               <a:rPr lang="en-US" sz="1100" b="1" spc="250" kern="0" dirty="0">
                 <a:solidFill>
-                  <a:srgbClr val="2F4F6B"/>
-                </a:solidFill>
-                <a:latin typeface="Yu Gothic" pitchFamily="34" charset="0"/>
-                <a:ea typeface="Yu Gothic" pitchFamily="34" charset="-122"/>
-                <a:cs typeface="Yu Gothic" pitchFamily="34" charset="-120"/>
-              </a:rPr>
-              <a:t>あてはめ</a:t>
+                  <a:srgbClr val="3B6B4A"/>
+                </a:solidFill>
+                <a:latin typeface="Yu Gothic" pitchFamily="34" charset="0"/>
+                <a:ea typeface="Yu Gothic" pitchFamily="34" charset="-122"/>
+                <a:cs typeface="Yu Gothic" pitchFamily="34" charset="-120"/>
+              </a:rPr>
+              <a:t>比べて見る</a:t>
             </a:r>
             <a:endParaRPr lang="en-US" sz="1100" dirty="0"/>
           </a:p>
@@ -7934,7 +6189,7 @@
                 <a:ea typeface="Yu Gothic" pitchFamily="34" charset="-122"/>
                 <a:cs typeface="Yu Gothic" pitchFamily="34" charset="-120"/>
               </a:rPr>
-              <a:t>この12回で変わったこと</a:t>
+              <a:t>よくある3年構想　→　事業の言葉で書いた構想</a:t>
             </a:r>
             <a:endParaRPr lang="en-US" sz="2600" dirty="0"/>
           </a:p>
@@ -7949,7 +6204,398 @@
         <p:spPr>
           <a:xfrm>
             <a:off x="777240" y="1691640"/>
-            <a:ext cx="10607040" cy="3931920"/>
+            <a:ext cx="5120640" cy="4023360"/>
+          </a:xfrm>
+          <a:prstGeom prst="rect">
+            <a:avLst/>
+          </a:prstGeom>
+          <a:solidFill>
+            <a:srgbClr val="EDE7DB"/>
+          </a:solidFill>
+          <a:ln w="15875">
+            <a:solidFill>
+              <a:srgbClr val="8A8177"/>
+            </a:solidFill>
+            <a:prstDash val="solid"/>
+          </a:ln>
+        </p:spPr>
+      </p:sp>
+      <p:sp>
+        <p:nvSpPr>
+          <p:cNvPr id="5" name="Shape 3"/>
+          <p:cNvSpPr/>
+          <p:nvPr/>
+        </p:nvSpPr>
+        <p:spPr>
+          <a:xfrm>
+            <a:off x="777240" y="1691640"/>
+            <a:ext cx="5120640" cy="384048"/>
+          </a:xfrm>
+          <a:prstGeom prst="rect">
+            <a:avLst/>
+          </a:prstGeom>
+          <a:solidFill>
+            <a:srgbClr val="8A8177"/>
+          </a:solidFill>
+          <a:ln w="12700">
+            <a:solidFill>
+              <a:srgbClr val="8A8177"/>
+            </a:solidFill>
+            <a:prstDash val="solid"/>
+          </a:ln>
+        </p:spPr>
+      </p:sp>
+      <p:sp>
+        <p:nvSpPr>
+          <p:cNvPr id="6" name="Text 4"/>
+          <p:cNvSpPr txBox="1"/>
+          <p:nvPr/>
+        </p:nvSpPr>
+        <p:spPr>
+          <a:xfrm>
+            <a:off x="1005840" y="1691640"/>
+            <a:ext cx="4663440" cy="384048"/>
+          </a:xfrm>
+          <a:prstGeom prst="rect">
+            <a:avLst/>
+          </a:prstGeom>
+          <a:noFill/>
+          <a:ln/>
+        </p:spPr>
+        <p:txBody>
+          <a:bodyPr wrap="square" lIns="0" tIns="0" rIns="0" bIns="0" rtlCol="0" anchor="ctr"/>
+          <a:lstStyle/>
+          <a:p>
+            <a:pPr indent="0" marL="0">
+              <a:buNone/>
+            </a:pPr>
+            <a:r>
+              <a:rPr lang="en-US" sz="1100" b="1" spc="200" kern="0" dirty="0">
+                <a:solidFill>
+                  <a:srgbClr val="FFFFFF"/>
+                </a:solidFill>
+                <a:latin typeface="Yu Gothic" pitchFamily="34" charset="0"/>
+                <a:ea typeface="Yu Gothic" pitchFamily="34" charset="-122"/>
+                <a:cs typeface="Yu Gothic" pitchFamily="34" charset="-120"/>
+              </a:rPr>
+              <a:t>よくあるやり方</a:t>
+            </a:r>
+            <a:endParaRPr lang="en-US" sz="1100" dirty="0"/>
+          </a:p>
+        </p:txBody>
+      </p:sp>
+      <p:sp>
+        <p:nvSpPr>
+          <p:cNvPr id="7" name="Shape 5"/>
+          <p:cNvSpPr/>
+          <p:nvPr/>
+        </p:nvSpPr>
+        <p:spPr>
+          <a:xfrm>
+            <a:off x="978408" y="2212848"/>
+            <a:ext cx="4718304" cy="914400"/>
+          </a:xfrm>
+          <a:prstGeom prst="rect">
+            <a:avLst/>
+          </a:prstGeom>
+          <a:solidFill>
+            <a:srgbClr val="E4DFD5"/>
+          </a:solidFill>
+          <a:ln w="12700">
+            <a:solidFill>
+              <a:srgbClr val="E4DFD5"/>
+            </a:solidFill>
+            <a:prstDash val="solid"/>
+          </a:ln>
+        </p:spPr>
+      </p:sp>
+      <p:sp>
+        <p:nvSpPr>
+          <p:cNvPr id="8" name="Text 6"/>
+          <p:cNvSpPr txBox="1"/>
+          <p:nvPr/>
+        </p:nvSpPr>
+        <p:spPr>
+          <a:xfrm>
+            <a:off x="1106424" y="2249424"/>
+            <a:ext cx="4462272" cy="841248"/>
+          </a:xfrm>
+          <a:prstGeom prst="rect">
+            <a:avLst/>
+          </a:prstGeom>
+          <a:noFill/>
+          <a:ln/>
+        </p:spPr>
+        <p:txBody>
+          <a:bodyPr wrap="square" lIns="0" tIns="0" rIns="0" bIns="0" rtlCol="0" anchor="ctr"/>
+          <a:lstStyle/>
+          <a:p>
+            <a:pPr indent="0" marL="0">
+              <a:lnSpc>
+                <a:spcPct val="120000"/>
+              </a:lnSpc>
+              <a:buNone/>
+            </a:pPr>
+            <a:r>
+              <a:rPr lang="en-US" sz="1250" dirty="0">
+                <a:solidFill>
+                  <a:srgbClr val="23201D"/>
+                </a:solidFill>
+                <a:latin typeface="Consolas" pitchFamily="34" charset="0"/>
+                <a:ea typeface="Consolas" pitchFamily="34" charset="-122"/>
+                <a:cs typeface="Consolas" pitchFamily="34" charset="-120"/>
+              </a:rPr>
+              <a:t>「AIをもっと活用していく」</a:t>
+            </a:r>
+            <a:endParaRPr lang="en-US" sz="1250" dirty="0"/>
+          </a:p>
+        </p:txBody>
+      </p:sp>
+      <p:sp>
+        <p:nvSpPr>
+          <p:cNvPr id="9" name="Text 7"/>
+          <p:cNvSpPr txBox="1"/>
+          <p:nvPr/>
+        </p:nvSpPr>
+        <p:spPr>
+          <a:xfrm>
+            <a:off x="1051560" y="3273552"/>
+            <a:ext cx="4572000" cy="411480"/>
+          </a:xfrm>
+          <a:prstGeom prst="rect">
+            <a:avLst/>
+          </a:prstGeom>
+          <a:noFill/>
+          <a:ln/>
+        </p:spPr>
+        <p:txBody>
+          <a:bodyPr wrap="square" lIns="0" tIns="0" rIns="0" bIns="0" rtlCol="0" anchor="ctr"/>
+          <a:lstStyle/>
+          <a:p>
+            <a:pPr indent="0" marL="0">
+              <a:lnSpc>
+                <a:spcPct val="115000"/>
+              </a:lnSpc>
+              <a:buNone/>
+            </a:pPr>
+            <a:r>
+              <a:rPr lang="en-US" sz="1300" dirty="0">
+                <a:solidFill>
+                  <a:srgbClr val="23201D"/>
+                </a:solidFill>
+                <a:latin typeface="Yu Gothic" pitchFamily="34" charset="0"/>
+                <a:ea typeface="Yu Gothic" pitchFamily="34" charset="-122"/>
+                <a:cs typeface="Yu Gothic" pitchFamily="34" charset="-120"/>
+              </a:rPr>
+              <a:t>・何を指すのか、誰にも分からない</a:t>
+            </a:r>
+            <a:endParaRPr lang="en-US" sz="1300" dirty="0"/>
+          </a:p>
+        </p:txBody>
+      </p:sp>
+      <p:sp>
+        <p:nvSpPr>
+          <p:cNvPr id="10" name="Text 8"/>
+          <p:cNvSpPr txBox="1"/>
+          <p:nvPr/>
+        </p:nvSpPr>
+        <p:spPr>
+          <a:xfrm>
+            <a:off x="1051560" y="3703320"/>
+            <a:ext cx="4572000" cy="411480"/>
+          </a:xfrm>
+          <a:prstGeom prst="rect">
+            <a:avLst/>
+          </a:prstGeom>
+          <a:noFill/>
+          <a:ln/>
+        </p:spPr>
+        <p:txBody>
+          <a:bodyPr wrap="square" lIns="0" tIns="0" rIns="0" bIns="0" rtlCol="0" anchor="ctr"/>
+          <a:lstStyle/>
+          <a:p>
+            <a:pPr indent="0" marL="0">
+              <a:lnSpc>
+                <a:spcPct val="115000"/>
+              </a:lnSpc>
+              <a:buNone/>
+            </a:pPr>
+            <a:r>
+              <a:rPr lang="en-US" sz="1300" dirty="0">
+                <a:solidFill>
+                  <a:srgbClr val="23201D"/>
+                </a:solidFill>
+                <a:latin typeface="Yu Gothic" pitchFamily="34" charset="0"/>
+                <a:ea typeface="Yu Gothic" pitchFamily="34" charset="-122"/>
+                <a:cs typeface="Yu Gothic" pitchFamily="34" charset="-120"/>
+              </a:rPr>
+              <a:t>・来年また同じことを書く</a:t>
+            </a:r>
+            <a:endParaRPr lang="en-US" sz="1300" dirty="0"/>
+          </a:p>
+        </p:txBody>
+      </p:sp>
+      <p:sp>
+        <p:nvSpPr>
+          <p:cNvPr id="11" name="Text 9"/>
+          <p:cNvSpPr txBox="1"/>
+          <p:nvPr/>
+        </p:nvSpPr>
+        <p:spPr>
+          <a:xfrm>
+            <a:off x="1051560" y="4133088"/>
+            <a:ext cx="4572000" cy="411480"/>
+          </a:xfrm>
+          <a:prstGeom prst="rect">
+            <a:avLst/>
+          </a:prstGeom>
+          <a:noFill/>
+          <a:ln/>
+        </p:spPr>
+        <p:txBody>
+          <a:bodyPr wrap="square" lIns="0" tIns="0" rIns="0" bIns="0" rtlCol="0" anchor="ctr"/>
+          <a:lstStyle/>
+          <a:p>
+            <a:pPr indent="0" marL="0">
+              <a:lnSpc>
+                <a:spcPct val="115000"/>
+              </a:lnSpc>
+              <a:buNone/>
+            </a:pPr>
+            <a:r>
+              <a:rPr lang="en-US" sz="1300" dirty="0">
+                <a:solidFill>
+                  <a:srgbClr val="23201D"/>
+                </a:solidFill>
+                <a:latin typeface="Yu Gothic" pitchFamily="34" charset="0"/>
+                <a:ea typeface="Yu Gothic" pitchFamily="34" charset="-122"/>
+                <a:cs typeface="Yu Gothic" pitchFamily="34" charset="-120"/>
+              </a:rPr>
+              <a:t>・社員は何をすればいいか分からない</a:t>
+            </a:r>
+            <a:endParaRPr lang="en-US" sz="1300" dirty="0"/>
+          </a:p>
+        </p:txBody>
+      </p:sp>
+      <p:sp>
+        <p:nvSpPr>
+          <p:cNvPr id="12" name="Text 10"/>
+          <p:cNvSpPr txBox="1"/>
+          <p:nvPr/>
+        </p:nvSpPr>
+        <p:spPr>
+          <a:xfrm>
+            <a:off x="1051560" y="4562856"/>
+            <a:ext cx="4572000" cy="411480"/>
+          </a:xfrm>
+          <a:prstGeom prst="rect">
+            <a:avLst/>
+          </a:prstGeom>
+          <a:noFill/>
+          <a:ln/>
+        </p:spPr>
+        <p:txBody>
+          <a:bodyPr wrap="square" lIns="0" tIns="0" rIns="0" bIns="0" rtlCol="0" anchor="ctr"/>
+          <a:lstStyle/>
+          <a:p>
+            <a:pPr indent="0" marL="0">
+              <a:lnSpc>
+                <a:spcPct val="115000"/>
+              </a:lnSpc>
+              <a:buNone/>
+            </a:pPr>
+            <a:r>
+              <a:rPr lang="en-US" sz="1300" dirty="0">
+                <a:solidFill>
+                  <a:srgbClr val="23201D"/>
+                </a:solidFill>
+                <a:latin typeface="Yu Gothic" pitchFamily="34" charset="0"/>
+                <a:ea typeface="Yu Gothic" pitchFamily="34" charset="-122"/>
+                <a:cs typeface="Yu Gothic" pitchFamily="34" charset="-120"/>
+              </a:rPr>
+              <a:t>・結局、何も変わらない</a:t>
+            </a:r>
+            <a:endParaRPr lang="en-US" sz="1300" dirty="0"/>
+          </a:p>
+        </p:txBody>
+      </p:sp>
+      <p:sp>
+        <p:nvSpPr>
+          <p:cNvPr id="13" name="Shape 11"/>
+          <p:cNvSpPr/>
+          <p:nvPr/>
+        </p:nvSpPr>
+        <p:spPr>
+          <a:xfrm>
+            <a:off x="777240" y="5074920"/>
+            <a:ext cx="5120640" cy="640080"/>
+          </a:xfrm>
+          <a:prstGeom prst="rect">
+            <a:avLst/>
+          </a:prstGeom>
+          <a:solidFill>
+            <a:srgbClr val="8A8177"/>
+          </a:solidFill>
+          <a:ln w="12700">
+            <a:solidFill>
+              <a:srgbClr val="8A8177"/>
+            </a:solidFill>
+            <a:prstDash val="solid"/>
+          </a:ln>
+        </p:spPr>
+      </p:sp>
+      <p:sp>
+        <p:nvSpPr>
+          <p:cNvPr id="14" name="Text 12"/>
+          <p:cNvSpPr txBox="1"/>
+          <p:nvPr/>
+        </p:nvSpPr>
+        <p:spPr>
+          <a:xfrm>
+            <a:off x="1005840" y="5074920"/>
+            <a:ext cx="4663440" cy="640080"/>
+          </a:xfrm>
+          <a:prstGeom prst="rect">
+            <a:avLst/>
+          </a:prstGeom>
+          <a:noFill/>
+          <a:ln/>
+        </p:spPr>
+        <p:txBody>
+          <a:bodyPr wrap="square" lIns="0" tIns="0" rIns="0" bIns="0" rtlCol="0" anchor="ctr"/>
+          <a:lstStyle/>
+          <a:p>
+            <a:pPr indent="0" marL="0">
+              <a:lnSpc>
+                <a:spcPct val="115000"/>
+              </a:lnSpc>
+              <a:buNone/>
+            </a:pPr>
+            <a:r>
+              <a:rPr lang="en-US" sz="1350" b="1" dirty="0">
+                <a:solidFill>
+                  <a:srgbClr val="FFFFFF"/>
+                </a:solidFill>
+                <a:latin typeface="Yu Gothic" pitchFamily="34" charset="0"/>
+                <a:ea typeface="Yu Gothic" pitchFamily="34" charset="-122"/>
+                <a:cs typeface="Yu Gothic" pitchFamily="34" charset="-120"/>
+              </a:rPr>
+              <a:t>「もっと活用する」は、構想ではありません</a:t>
+            </a:r>
+            <a:endParaRPr lang="en-US" sz="1350" dirty="0"/>
+          </a:p>
+        </p:txBody>
+      </p:sp>
+      <p:sp>
+        <p:nvSpPr>
+          <p:cNvPr id="15" name="Shape 13"/>
+          <p:cNvSpPr/>
+          <p:nvPr/>
+        </p:nvSpPr>
+        <p:spPr>
+          <a:xfrm>
+            <a:off x="6263640" y="1691640"/>
+            <a:ext cx="5120640" cy="4023360"/>
           </a:xfrm>
           <a:prstGeom prst="rect">
             <a:avLst/>
@@ -7959,71 +6605,63 @@
           </a:solidFill>
           <a:ln w="15875">
             <a:solidFill>
-              <a:srgbClr val="2F4F6B"/>
+              <a:srgbClr val="3B6B4A"/>
             </a:solidFill>
             <a:prstDash val="solid"/>
           </a:ln>
         </p:spPr>
-        <p:txBody>
-          <a:bodyPr/>
-          <a:p/>
-        </p:txBody>
-      </p:sp>
-      <p:sp>
-        <p:nvSpPr>
-          <p:cNvPr id="5" name="Shape 3"/>
+      </p:sp>
+      <p:sp>
+        <p:nvSpPr>
+          <p:cNvPr id="16" name="Shape 14"/>
           <p:cNvSpPr/>
           <p:nvPr/>
         </p:nvSpPr>
         <p:spPr>
           <a:xfrm>
-            <a:off x="777240" y="1691640"/>
-            <a:ext cx="10607040" cy="457200"/>
+            <a:off x="6263640" y="1691640"/>
+            <a:ext cx="5120640" cy="384048"/>
           </a:xfrm>
           <a:prstGeom prst="rect">
             <a:avLst/>
           </a:prstGeom>
           <a:solidFill>
-            <a:srgbClr val="2F4F6B"/>
+            <a:srgbClr val="3B6B4A"/>
           </a:solidFill>
           <a:ln w="12700">
             <a:solidFill>
-              <a:srgbClr val="333333"/>
+              <a:srgbClr val="3B6B4A"/>
             </a:solidFill>
             <a:prstDash val="solid"/>
           </a:ln>
         </p:spPr>
-        <p:txBody>
-          <a:bodyPr/>
-          <a:p/>
-        </p:txBody>
-      </p:sp>
-      <p:sp>
-        <p:nvSpPr>
-          <p:cNvPr id="6" name="Text 4"/>
-          <p:cNvSpPr txBox="1"/>
-          <p:nvPr/>
-        </p:nvSpPr>
-        <p:spPr>
-          <a:xfrm>
-            <a:off x="1051560" y="1709928"/>
-            <a:ext cx="10058400" cy="420624"/>
-          </a:xfrm>
-          <a:prstGeom prst="rect">
-            <a:avLst/>
-          </a:prstGeom>
-          <a:noFill/>
-          <a:ln/>
-        </p:spPr>
-        <p:txBody>
-          <a:bodyPr wrap="square" lIns="0" tIns="0" rIns="0" bIns="0" rtlCol="0" anchor="ctr"/>
-          <a:lstStyle/>
-          <a:p>
-            <a:pPr indent="0" marL="0">
-              <a:buNone/>
-            </a:pPr>
-            <a:r>
-              <a:rPr lang="en-US" sz="1200" b="1" dirty="0">
+      </p:sp>
+      <p:sp>
+        <p:nvSpPr>
+          <p:cNvPr id="17" name="Text 15"/>
+          <p:cNvSpPr txBox="1"/>
+          <p:nvPr/>
+        </p:nvSpPr>
+        <p:spPr>
+          <a:xfrm>
+            <a:off x="6492240" y="1691640"/>
+            <a:ext cx="4663440" cy="384048"/>
+          </a:xfrm>
+          <a:prstGeom prst="rect">
+            <a:avLst/>
+          </a:prstGeom>
+          <a:noFill/>
+          <a:ln/>
+        </p:spPr>
+        <p:txBody>
+          <a:bodyPr wrap="square" lIns="0" tIns="0" rIns="0" bIns="0" rtlCol="0" anchor="ctr"/>
+          <a:lstStyle/>
+          <a:p>
+            <a:pPr indent="0" marL="0">
+              <a:buNone/>
+            </a:pPr>
+            <a:r>
+              <a:rPr lang="en-US" sz="1100" b="1" spc="200" kern="0" dirty="0">
                 <a:solidFill>
                   <a:srgbClr val="FFFFFF"/>
                 </a:solidFill>
@@ -8031,22 +6669,47 @@
                 <a:ea typeface="Yu Gothic" pitchFamily="34" charset="-122"/>
                 <a:cs typeface="Yu Gothic" pitchFamily="34" charset="-120"/>
               </a:rPr>
-              <a:t>受講前 → いま（第1回の記録と突き合わせます）</a:t>
-            </a:r>
-            <a:endParaRPr lang="en-US" sz="1200" dirty="0"/>
-          </a:p>
-        </p:txBody>
-      </p:sp>
-      <p:sp>
-        <p:nvSpPr>
-          <p:cNvPr id="7" name="Text 5"/>
-          <p:cNvSpPr txBox="1"/>
-          <p:nvPr/>
-        </p:nvSpPr>
-        <p:spPr>
-          <a:xfrm>
-            <a:off x="1097280" y="2331720"/>
-            <a:ext cx="2057400" cy="530352"/>
+              <a:t>こう変える</a:t>
+            </a:r>
+            <a:endParaRPr lang="en-US" sz="1100" dirty="0"/>
+          </a:p>
+        </p:txBody>
+      </p:sp>
+      <p:sp>
+        <p:nvSpPr>
+          <p:cNvPr id="18" name="Shape 16"/>
+          <p:cNvSpPr/>
+          <p:nvPr/>
+        </p:nvSpPr>
+        <p:spPr>
+          <a:xfrm>
+            <a:off x="6464808" y="2212848"/>
+            <a:ext cx="4718304" cy="914400"/>
+          </a:xfrm>
+          <a:prstGeom prst="rect">
+            <a:avLst/>
+          </a:prstGeom>
+          <a:solidFill>
+            <a:srgbClr val="E7F0E9"/>
+          </a:solidFill>
+          <a:ln w="12700">
+            <a:solidFill>
+              <a:srgbClr val="E7F0E9"/>
+            </a:solidFill>
+            <a:prstDash val="solid"/>
+          </a:ln>
+        </p:spPr>
+      </p:sp>
+      <p:sp>
+        <p:nvSpPr>
+          <p:cNvPr id="19" name="Text 17"/>
+          <p:cNvSpPr txBox="1"/>
+          <p:nvPr/>
+        </p:nvSpPr>
+        <p:spPr>
+          <a:xfrm>
+            <a:off x="6592824" y="2249424"/>
+            <a:ext cx="4462272" cy="841248"/>
           </a:xfrm>
           <a:prstGeom prst="rect">
             <a:avLst/>
@@ -8060,35 +6723,35 @@
           <a:p>
             <a:pPr indent="0" marL="0">
               <a:lnSpc>
-                <a:spcPct val="110000"/>
+                <a:spcPct val="120000"/>
               </a:lnSpc>
               <a:buNone/>
             </a:pPr>
             <a:r>
-              <a:rPr lang="en-US" sz="1100" b="1" dirty="0">
-                <a:solidFill>
-                  <a:srgbClr val="2F4F6B"/>
-                </a:solidFill>
-                <a:latin typeface="Yu Gothic" pitchFamily="34" charset="0"/>
-                <a:ea typeface="Yu Gothic" pitchFamily="34" charset="-122"/>
-                <a:cs typeface="Yu Gothic" pitchFamily="34" charset="-120"/>
-              </a:rPr>
-              <a:t>指示の出し方</a:t>
-            </a:r>
-            <a:endParaRPr lang="en-US" sz="1100" dirty="0"/>
-          </a:p>
-        </p:txBody>
-      </p:sp>
-      <p:sp>
-        <p:nvSpPr>
-          <p:cNvPr id="8" name="Text 6"/>
-          <p:cNvSpPr txBox="1"/>
-          <p:nvPr/>
-        </p:nvSpPr>
-        <p:spPr>
-          <a:xfrm>
-            <a:off x="3291840" y="2331720"/>
-            <a:ext cx="7772400" cy="530352"/>
+              <a:rPr lang="en-US" sz="1250" dirty="0">
+                <a:solidFill>
+                  <a:srgbClr val="23201D"/>
+                </a:solidFill>
+                <a:latin typeface="Consolas" pitchFamily="34" charset="0"/>
+                <a:ea typeface="Consolas" pitchFamily="34" charset="-122"/>
+                <a:cs typeface="Consolas" pitchFamily="34" charset="-120"/>
+              </a:rPr>
+              <a:t>「見積の即日回答を強みにして、小口案件を取る」</a:t>
+            </a:r>
+            <a:endParaRPr lang="en-US" sz="1250" dirty="0"/>
+          </a:p>
+        </p:txBody>
+      </p:sp>
+      <p:sp>
+        <p:nvSpPr>
+          <p:cNvPr id="20" name="Text 18"/>
+          <p:cNvSpPr txBox="1"/>
+          <p:nvPr/>
+        </p:nvSpPr>
+        <p:spPr>
+          <a:xfrm>
+            <a:off x="6537960" y="3273552"/>
+            <a:ext cx="4572000" cy="411480"/>
           </a:xfrm>
           <a:prstGeom prst="rect">
             <a:avLst/>
@@ -8107,72 +6770,30 @@
               <a:buNone/>
             </a:pPr>
             <a:r>
-              <a:rPr lang="en-US" sz="1150" dirty="0">
+              <a:rPr lang="en-US" sz="1300" dirty="0">
                 <a:solidFill>
                   <a:srgbClr val="23201D"/>
                 </a:solidFill>
-                <a:latin typeface="Consolas" pitchFamily="34" charset="0"/>
-                <a:ea typeface="Consolas" pitchFamily="34" charset="-122"/>
-                <a:cs typeface="Consolas" pitchFamily="34" charset="-120"/>
-              </a:rPr>
-              <a:t>毎回ゼロから → 型で書き、15本が決まった場所にある</a:t>
-            </a:r>
-            <a:endParaRPr lang="en-US" sz="1150" dirty="0"/>
-          </a:p>
-        </p:txBody>
-      </p:sp>
-      <p:sp>
-        <p:nvSpPr>
-          <p:cNvPr id="9" name="Text 7"/>
-          <p:cNvSpPr txBox="1"/>
-          <p:nvPr/>
-        </p:nvSpPr>
-        <p:spPr>
-          <a:xfrm>
-            <a:off x="1097280" y="2862072"/>
-            <a:ext cx="2057400" cy="530352"/>
-          </a:xfrm>
-          <a:prstGeom prst="rect">
-            <a:avLst/>
-          </a:prstGeom>
-          <a:noFill/>
-          <a:ln/>
-        </p:spPr>
-        <p:txBody>
-          <a:bodyPr wrap="square" lIns="0" tIns="0" rIns="0" bIns="0" rtlCol="0" anchor="ctr"/>
-          <a:lstStyle/>
-          <a:p>
-            <a:pPr indent="0" marL="0">
-              <a:lnSpc>
-                <a:spcPct val="110000"/>
-              </a:lnSpc>
-              <a:buNone/>
-            </a:pPr>
-            <a:r>
-              <a:rPr lang="en-US" sz="1100" b="1" dirty="0">
-                <a:solidFill>
-                  <a:srgbClr val="2F4F6B"/>
-                </a:solidFill>
-                <a:latin typeface="Yu Gothic" pitchFamily="34" charset="0"/>
-                <a:ea typeface="Yu Gothic" pitchFamily="34" charset="-122"/>
-                <a:cs typeface="Yu Gothic" pitchFamily="34" charset="-120"/>
-              </a:rPr>
-              <a:t>社内の広がり</a:t>
-            </a:r>
-            <a:endParaRPr lang="en-US" sz="1100" dirty="0"/>
-          </a:p>
-        </p:txBody>
-      </p:sp>
-      <p:sp>
-        <p:nvSpPr>
-          <p:cNvPr id="10" name="Text 8"/>
-          <p:cNvSpPr txBox="1"/>
-          <p:nvPr/>
-        </p:nvSpPr>
-        <p:spPr>
-          <a:xfrm>
-            <a:off x="3291840" y="2862072"/>
-            <a:ext cx="7772400" cy="530352"/>
+                <a:latin typeface="Yu Gothic" pitchFamily="34" charset="0"/>
+                <a:ea typeface="Yu Gothic" pitchFamily="34" charset="-122"/>
+                <a:cs typeface="Yu Gothic" pitchFamily="34" charset="-120"/>
+              </a:rPr>
+              <a:t>・AIが何をするかが決まる（見積の下書き）</a:t>
+            </a:r>
+            <a:endParaRPr lang="en-US" sz="1300" dirty="0"/>
+          </a:p>
+        </p:txBody>
+      </p:sp>
+      <p:sp>
+        <p:nvSpPr>
+          <p:cNvPr id="21" name="Text 19"/>
+          <p:cNvSpPr txBox="1"/>
+          <p:nvPr/>
+        </p:nvSpPr>
+        <p:spPr>
+          <a:xfrm>
+            <a:off x="6537960" y="3703320"/>
+            <a:ext cx="4572000" cy="411480"/>
           </a:xfrm>
           <a:prstGeom prst="rect">
             <a:avLst/>
@@ -8191,72 +6812,30 @@
               <a:buNone/>
             </a:pPr>
             <a:r>
-              <a:rPr lang="en-US" sz="1150" dirty="0">
+              <a:rPr lang="en-US" sz="1300" dirty="0">
                 <a:solidFill>
                   <a:srgbClr val="23201D"/>
                 </a:solidFill>
-                <a:latin typeface="Consolas" pitchFamily="34" charset="0"/>
-                <a:ea typeface="Consolas" pitchFamily="34" charset="-122"/>
-                <a:cs typeface="Consolas" pitchFamily="34" charset="-120"/>
-              </a:rPr>
-              <a:t>社長のみ → 社員◯名が業務で使用</a:t>
-            </a:r>
-            <a:endParaRPr lang="en-US" sz="1150" dirty="0"/>
-          </a:p>
-        </p:txBody>
-      </p:sp>
-      <p:sp>
-        <p:nvSpPr>
-          <p:cNvPr id="11" name="Text 9"/>
-          <p:cNvSpPr txBox="1"/>
-          <p:nvPr/>
-        </p:nvSpPr>
-        <p:spPr>
-          <a:xfrm>
-            <a:off x="1097280" y="3392424"/>
-            <a:ext cx="2057400" cy="530352"/>
-          </a:xfrm>
-          <a:prstGeom prst="rect">
-            <a:avLst/>
-          </a:prstGeom>
-          <a:noFill/>
-          <a:ln/>
-        </p:spPr>
-        <p:txBody>
-          <a:bodyPr wrap="square" lIns="0" tIns="0" rIns="0" bIns="0" rtlCol="0" anchor="ctr"/>
-          <a:lstStyle/>
-          <a:p>
-            <a:pPr indent="0" marL="0">
-              <a:lnSpc>
-                <a:spcPct val="110000"/>
-              </a:lnSpc>
-              <a:buNone/>
-            </a:pPr>
-            <a:r>
-              <a:rPr lang="en-US" sz="1100" b="1" dirty="0">
-                <a:solidFill>
-                  <a:srgbClr val="2F4F6B"/>
-                </a:solidFill>
-                <a:latin typeface="Yu Gothic" pitchFamily="34" charset="0"/>
-                <a:ea typeface="Yu Gothic" pitchFamily="34" charset="-122"/>
-                <a:cs typeface="Yu Gothic" pitchFamily="34" charset="-120"/>
-              </a:rPr>
-              <a:t>数字の扱い</a:t>
-            </a:r>
-            <a:endParaRPr lang="en-US" sz="1100" dirty="0"/>
-          </a:p>
-        </p:txBody>
-      </p:sp>
-      <p:sp>
-        <p:nvSpPr>
-          <p:cNvPr id="12" name="Text 10"/>
-          <p:cNvSpPr txBox="1"/>
-          <p:nvPr/>
-        </p:nvSpPr>
-        <p:spPr>
-          <a:xfrm>
-            <a:off x="3291840" y="3392424"/>
-            <a:ext cx="7772400" cy="530352"/>
+                <a:latin typeface="Yu Gothic" pitchFamily="34" charset="0"/>
+                <a:ea typeface="Yu Gothic" pitchFamily="34" charset="-122"/>
+                <a:cs typeface="Yu Gothic" pitchFamily="34" charset="-120"/>
+              </a:rPr>
+              <a:t>・人が何をするかが決まる（提案と交渉）</a:t>
+            </a:r>
+            <a:endParaRPr lang="en-US" sz="1300" dirty="0"/>
+          </a:p>
+        </p:txBody>
+      </p:sp>
+      <p:sp>
+        <p:nvSpPr>
+          <p:cNvPr id="22" name="Text 20"/>
+          <p:cNvSpPr txBox="1"/>
+          <p:nvPr/>
+        </p:nvSpPr>
+        <p:spPr>
+          <a:xfrm>
+            <a:off x="6537960" y="4133088"/>
+            <a:ext cx="4572000" cy="411480"/>
           </a:xfrm>
           <a:prstGeom prst="rect">
             <a:avLst/>
@@ -8275,72 +6854,30 @@
               <a:buNone/>
             </a:pPr>
             <a:r>
-              <a:rPr lang="en-US" sz="1150" dirty="0">
+              <a:rPr lang="en-US" sz="1300" dirty="0">
                 <a:solidFill>
                   <a:srgbClr val="23201D"/>
                 </a:solidFill>
-                <a:latin typeface="Consolas" pitchFamily="34" charset="0"/>
-                <a:ea typeface="Consolas" pitchFamily="34" charset="-122"/>
-                <a:cs typeface="Consolas" pitchFamily="34" charset="-120"/>
-              </a:rPr>
-              <a:t>勘と経験 → 月次レポートの雛形で毎月回している</a:t>
-            </a:r>
-            <a:endParaRPr lang="en-US" sz="1150" dirty="0"/>
-          </a:p>
-        </p:txBody>
-      </p:sp>
-      <p:sp>
-        <p:nvSpPr>
-          <p:cNvPr id="13" name="Text 11"/>
-          <p:cNvSpPr txBox="1"/>
-          <p:nvPr/>
-        </p:nvSpPr>
-        <p:spPr>
-          <a:xfrm>
-            <a:off x="1097280" y="3922776"/>
-            <a:ext cx="2057400" cy="530352"/>
-          </a:xfrm>
-          <a:prstGeom prst="rect">
-            <a:avLst/>
-          </a:prstGeom>
-          <a:noFill/>
-          <a:ln/>
-        </p:spPr>
-        <p:txBody>
-          <a:bodyPr wrap="square" lIns="0" tIns="0" rIns="0" bIns="0" rtlCol="0" anchor="ctr"/>
-          <a:lstStyle/>
-          <a:p>
-            <a:pPr indent="0" marL="0">
-              <a:lnSpc>
-                <a:spcPct val="110000"/>
-              </a:lnSpc>
-              <a:buNone/>
-            </a:pPr>
-            <a:r>
-              <a:rPr lang="en-US" sz="1100" b="1" dirty="0">
-                <a:solidFill>
-                  <a:srgbClr val="2F4F6B"/>
-                </a:solidFill>
-                <a:latin typeface="Yu Gothic" pitchFamily="34" charset="0"/>
-                <a:ea typeface="Yu Gothic" pitchFamily="34" charset="-122"/>
-                <a:cs typeface="Yu Gothic" pitchFamily="34" charset="-120"/>
-              </a:rPr>
-              <a:t>品質</a:t>
-            </a:r>
-            <a:endParaRPr lang="en-US" sz="1100" dirty="0"/>
-          </a:p>
-        </p:txBody>
-      </p:sp>
-      <p:sp>
-        <p:nvSpPr>
-          <p:cNvPr id="14" name="Text 12"/>
-          <p:cNvSpPr txBox="1"/>
-          <p:nvPr/>
-        </p:nvSpPr>
-        <p:spPr>
-          <a:xfrm>
-            <a:off x="3291840" y="3922776"/>
-            <a:ext cx="7772400" cy="530352"/>
+                <a:latin typeface="Yu Gothic" pitchFamily="34" charset="0"/>
+                <a:ea typeface="Yu Gothic" pitchFamily="34" charset="-122"/>
+                <a:cs typeface="Yu Gothic" pitchFamily="34" charset="-120"/>
+              </a:rPr>
+              <a:t>・必要な資産が分かる（過去実績のデータ化）</a:t>
+            </a:r>
+            <a:endParaRPr lang="en-US" sz="1300" dirty="0"/>
+          </a:p>
+        </p:txBody>
+      </p:sp>
+      <p:sp>
+        <p:nvSpPr>
+          <p:cNvPr id="23" name="Text 21"/>
+          <p:cNvSpPr txBox="1"/>
+          <p:nvPr/>
+        </p:nvSpPr>
+        <p:spPr>
+          <a:xfrm>
+            <a:off x="6537960" y="4562856"/>
+            <a:ext cx="4572000" cy="411480"/>
           </a:xfrm>
           <a:prstGeom prst="rect">
             <a:avLst/>
@@ -8359,72 +6896,55 @@
               <a:buNone/>
             </a:pPr>
             <a:r>
-              <a:rPr lang="en-US" sz="1150" dirty="0">
+              <a:rPr lang="en-US" sz="1300" dirty="0">
                 <a:solidFill>
                   <a:srgbClr val="23201D"/>
                 </a:solidFill>
-                <a:latin typeface="Consolas" pitchFamily="34" charset="0"/>
-                <a:ea typeface="Consolas" pitchFamily="34" charset="-122"/>
-                <a:cs typeface="Consolas" pitchFamily="34" charset="-120"/>
-              </a:rPr>
-              <a:t>なんとなく → 正解セット10件で毎月採点</a:t>
-            </a:r>
-            <a:endParaRPr lang="en-US" sz="1150" dirty="0"/>
-          </a:p>
-        </p:txBody>
-      </p:sp>
-      <p:sp>
-        <p:nvSpPr>
-          <p:cNvPr id="15" name="Text 13"/>
-          <p:cNvSpPr txBox="1"/>
-          <p:nvPr/>
-        </p:nvSpPr>
-        <p:spPr>
-          <a:xfrm>
-            <a:off x="1097280" y="4453128"/>
-            <a:ext cx="2057400" cy="530352"/>
-          </a:xfrm>
-          <a:prstGeom prst="rect">
-            <a:avLst/>
-          </a:prstGeom>
-          <a:noFill/>
-          <a:ln/>
-        </p:spPr>
-        <p:txBody>
-          <a:bodyPr wrap="square" lIns="0" tIns="0" rIns="0" bIns="0" rtlCol="0" anchor="ctr"/>
-          <a:lstStyle/>
-          <a:p>
-            <a:pPr indent="0" marL="0">
-              <a:lnSpc>
-                <a:spcPct val="110000"/>
-              </a:lnSpc>
-              <a:buNone/>
-            </a:pPr>
-            <a:r>
-              <a:rPr lang="en-US" sz="1100" b="1" dirty="0">
-                <a:solidFill>
-                  <a:srgbClr val="2F4F6B"/>
-                </a:solidFill>
-                <a:latin typeface="Yu Gothic" pitchFamily="34" charset="0"/>
-                <a:ea typeface="Yu Gothic" pitchFamily="34" charset="-122"/>
-                <a:cs typeface="Yu Gothic" pitchFamily="34" charset="-120"/>
-              </a:rPr>
-              <a:t>体制</a:t>
-            </a:r>
-            <a:endParaRPr lang="en-US" sz="1100" dirty="0"/>
-          </a:p>
-        </p:txBody>
-      </p:sp>
-      <p:sp>
-        <p:nvSpPr>
-          <p:cNvPr id="16" name="Text 14"/>
-          <p:cNvSpPr txBox="1"/>
-          <p:nvPr/>
-        </p:nvSpPr>
-        <p:spPr>
-          <a:xfrm>
-            <a:off x="3291840" y="4453128"/>
-            <a:ext cx="7772400" cy="530352"/>
+                <a:latin typeface="Yu Gothic" pitchFamily="34" charset="0"/>
+                <a:ea typeface="Yu Gothic" pitchFamily="34" charset="-122"/>
+                <a:cs typeface="Yu Gothic" pitchFamily="34" charset="-120"/>
+              </a:rPr>
+              <a:t>・やらないことも決まる（大型案件の深追い）</a:t>
+            </a:r>
+            <a:endParaRPr lang="en-US" sz="1300" dirty="0"/>
+          </a:p>
+        </p:txBody>
+      </p:sp>
+      <p:sp>
+        <p:nvSpPr>
+          <p:cNvPr id="24" name="Shape 22"/>
+          <p:cNvSpPr/>
+          <p:nvPr/>
+        </p:nvSpPr>
+        <p:spPr>
+          <a:xfrm>
+            <a:off x="6263640" y="5074920"/>
+            <a:ext cx="5120640" cy="640080"/>
+          </a:xfrm>
+          <a:prstGeom prst="rect">
+            <a:avLst/>
+          </a:prstGeom>
+          <a:solidFill>
+            <a:srgbClr val="3B6B4A"/>
+          </a:solidFill>
+          <a:ln w="12700">
+            <a:solidFill>
+              <a:srgbClr val="3B6B4A"/>
+            </a:solidFill>
+            <a:prstDash val="solid"/>
+          </a:ln>
+        </p:spPr>
+      </p:sp>
+      <p:sp>
+        <p:nvSpPr>
+          <p:cNvPr id="25" name="Text 23"/>
+          <p:cNvSpPr txBox="1"/>
+          <p:nvPr/>
+        </p:nvSpPr>
+        <p:spPr>
+          <a:xfrm>
+            <a:off x="6492240" y="5074920"/>
+            <a:ext cx="4663440" cy="640080"/>
           </a:xfrm>
           <a:prstGeom prst="rect">
             <a:avLst/>
@@ -8443,149 +6963,23 @@
               <a:buNone/>
             </a:pPr>
             <a:r>
-              <a:rPr lang="en-US" sz="1150" dirty="0">
-                <a:solidFill>
-                  <a:srgbClr val="23201D"/>
-                </a:solidFill>
-                <a:latin typeface="Consolas" pitchFamily="34" charset="0"/>
-                <a:ea typeface="Consolas" pitchFamily="34" charset="-122"/>
-                <a:cs typeface="Consolas" pitchFamily="34" charset="-120"/>
-              </a:rPr>
-              <a:t>社長が全部 → 推進役・費用・権限が紙になっている</a:t>
-            </a:r>
-            <a:endParaRPr lang="en-US" sz="1150" dirty="0"/>
-          </a:p>
-        </p:txBody>
-      </p:sp>
-      <p:sp>
-        <p:nvSpPr>
-          <p:cNvPr id="17" name="Text 15"/>
-          <p:cNvSpPr txBox="1"/>
-          <p:nvPr/>
-        </p:nvSpPr>
-        <p:spPr>
-          <a:xfrm>
-            <a:off x="1097280" y="4983480"/>
-            <a:ext cx="2057400" cy="530352"/>
-          </a:xfrm>
-          <a:prstGeom prst="rect">
-            <a:avLst/>
-          </a:prstGeom>
-          <a:noFill/>
-          <a:ln/>
-        </p:spPr>
-        <p:txBody>
-          <a:bodyPr wrap="square" lIns="0" tIns="0" rIns="0" bIns="0" rtlCol="0" anchor="ctr"/>
-          <a:lstStyle/>
-          <a:p>
-            <a:pPr indent="0" marL="0">
-              <a:lnSpc>
-                <a:spcPct val="110000"/>
-              </a:lnSpc>
-              <a:buNone/>
-            </a:pPr>
-            <a:r>
-              <a:rPr lang="en-US" sz="1100" b="1" dirty="0">
-                <a:solidFill>
-                  <a:srgbClr val="2F4F6B"/>
-                </a:solidFill>
-                <a:latin typeface="Yu Gothic" pitchFamily="34" charset="0"/>
-                <a:ea typeface="Yu Gothic" pitchFamily="34" charset="-122"/>
-                <a:cs typeface="Yu Gothic" pitchFamily="34" charset="-120"/>
-              </a:rPr>
-              <a:t>診断スコア</a:t>
-            </a:r>
-            <a:endParaRPr lang="en-US" sz="1100" dirty="0"/>
-          </a:p>
-        </p:txBody>
-      </p:sp>
-      <p:sp>
-        <p:nvSpPr>
-          <p:cNvPr id="18" name="Text 16"/>
-          <p:cNvSpPr txBox="1"/>
-          <p:nvPr/>
-        </p:nvSpPr>
-        <p:spPr>
-          <a:xfrm>
-            <a:off x="3291840" y="4983480"/>
-            <a:ext cx="7772400" cy="530352"/>
-          </a:xfrm>
-          <a:prstGeom prst="rect">
-            <a:avLst/>
-          </a:prstGeom>
-          <a:noFill/>
-          <a:ln/>
-        </p:spPr>
-        <p:txBody>
-          <a:bodyPr wrap="square" lIns="0" tIns="0" rIns="0" bIns="0" rtlCol="0" anchor="ctr"/>
-          <a:lstStyle/>
-          <a:p>
-            <a:pPr indent="0" marL="0">
-              <a:lnSpc>
-                <a:spcPct val="115000"/>
-              </a:lnSpc>
-              <a:buNone/>
-            </a:pPr>
-            <a:r>
-              <a:rPr lang="en-US" sz="1150" dirty="0">
-                <a:solidFill>
-                  <a:srgbClr val="23201D"/>
-                </a:solidFill>
-                <a:latin typeface="Consolas" pitchFamily="34" charset="0"/>
-                <a:ea typeface="Consolas" pitchFamily="34" charset="-122"/>
-                <a:cs typeface="Consolas" pitchFamily="34" charset="-120"/>
-              </a:rPr>
-              <a:t>受講前 ◯点 → 修了時 ◯点</a:t>
-            </a:r>
-            <a:endParaRPr lang="en-US" sz="1150" dirty="0"/>
-          </a:p>
-        </p:txBody>
-      </p:sp>
-      <p:sp>
-        <p:nvSpPr>
-          <p:cNvPr id="19" name="Text 17"/>
-          <p:cNvSpPr txBox="1"/>
-          <p:nvPr/>
-        </p:nvSpPr>
-        <p:spPr>
-          <a:xfrm>
-            <a:off x="777240" y="5769864"/>
-            <a:ext cx="10607040" cy="548640"/>
-          </a:xfrm>
-          <a:prstGeom prst="rect">
-            <a:avLst/>
-          </a:prstGeom>
-          <a:noFill/>
-          <a:ln/>
-        </p:spPr>
-        <p:txBody>
-          <a:bodyPr wrap="square" lIns="0" tIns="0" rIns="0" bIns="0" rtlCol="0" anchor="ctr"/>
-          <a:lstStyle/>
-          <a:p>
-            <a:pPr indent="0" marL="0">
-              <a:lnSpc>
-                <a:spcPct val="135000"/>
-              </a:lnSpc>
-              <a:buNone/>
-            </a:pPr>
-            <a:r>
-              <a:rPr lang="en-US" sz="1250" dirty="0">
-                <a:solidFill>
-                  <a:srgbClr val="5A534A"/>
-                </a:solidFill>
-                <a:latin typeface="Yu Gothic" pitchFamily="34" charset="0"/>
-                <a:ea typeface="Yu Gothic" pitchFamily="34" charset="-122"/>
-                <a:cs typeface="Yu Gothic" pitchFamily="34" charset="-120"/>
-              </a:rPr>
-              <a:t>第1回の記録と突き合わせます。自分では気づきにくいので、数字と記録で見ていただきます。</a:t>
-            </a:r>
-            <a:endParaRPr lang="en-US" sz="1250" dirty="0"/>
-          </a:p>
-        </p:txBody>
-      </p:sp>
-      <p:sp>
-        <p:nvSpPr>
-          <p:cNvPr id="20" name="Text 18"/>
+              <a:rPr lang="en-US" sz="1350" b="1" dirty="0">
+                <a:solidFill>
+                  <a:srgbClr val="FFFFFF"/>
+                </a:solidFill>
+                <a:latin typeface="Yu Gothic" pitchFamily="34" charset="0"/>
+                <a:ea typeface="Yu Gothic" pitchFamily="34" charset="-122"/>
+                <a:cs typeface="Yu Gothic" pitchFamily="34" charset="-120"/>
+              </a:rPr>
+              <a:t>AIの話ではなく、何で勝つかの話にする</a:t>
+            </a:r>
+            <a:endParaRPr lang="en-US" sz="1350" dirty="0"/>
+          </a:p>
+        </p:txBody>
+      </p:sp>
+      <p:sp>
+        <p:nvSpPr>
+          <p:cNvPr id="26" name="Text 24"/>
           <p:cNvSpPr txBox="1"/>
           <p:nvPr/>
         </p:nvSpPr>
@@ -8624,7 +7018,7 @@
       </p:sp>
       <p:sp>
         <p:nvSpPr>
-          <p:cNvPr id="21" name="Text 19"/>
+          <p:cNvPr id="27" name="Text 25"/>
           <p:cNvSpPr txBox="1"/>
           <p:nvPr/>
         </p:nvSpPr>
@@ -8655,7 +7049,7 @@
                 <a:ea typeface="Yu Gothic" pitchFamily="34" charset="-122"/>
                 <a:cs typeface="Yu Gothic" pitchFamily="34" charset="-120"/>
               </a:rPr>
-              <a:t>あてはめ</a:t>
+              <a:t>比べて見る</a:t>
             </a:r>
             <a:endParaRPr lang="en-US" sz="900" dirty="0"/>
           </a:p>
@@ -8720,13 +7114,13 @@
             <a:r>
               <a:rPr lang="en-US" sz="1100" b="1" spc="250" kern="0" dirty="0">
                 <a:solidFill>
-                  <a:srgbClr val="8A8177"/>
-                </a:solidFill>
-                <a:latin typeface="Yu Gothic" pitchFamily="34" charset="0"/>
-                <a:ea typeface="Yu Gothic" pitchFamily="34" charset="-122"/>
-                <a:cs typeface="Yu Gothic" pitchFamily="34" charset="-120"/>
-              </a:rPr>
-              <a:t>実演 ①</a:t>
+                  <a:srgbClr val="2F4F6B"/>
+                </a:solidFill>
+                <a:latin typeface="Yu Gothic" pitchFamily="34" charset="0"/>
+                <a:ea typeface="Yu Gothic" pitchFamily="34" charset="-122"/>
+                <a:cs typeface="Yu Gothic" pitchFamily="34" charset="-120"/>
+              </a:rPr>
+              <a:t>今日の流れ</a:t>
             </a:r>
             <a:endParaRPr lang="en-US" sz="1100" dirty="0"/>
           </a:p>
@@ -8765,7 +7159,7 @@
                 <a:ea typeface="Yu Gothic" pitchFamily="34" charset="-122"/>
                 <a:cs typeface="Yu Gothic" pitchFamily="34" charset="-120"/>
               </a:rPr>
-              <a:t>よくある3年構想</a:t>
+              <a:t>今日は、この順に進めます</a:t>
             </a:r>
             <a:endParaRPr lang="en-US" sz="2600" dirty="0"/>
           </a:p>
@@ -8779,65 +7173,47 @@
         </p:nvSpPr>
         <p:spPr>
           <a:xfrm>
-            <a:off x="777240" y="1691640"/>
-            <a:ext cx="4879238" cy="1371600"/>
+            <a:off x="777240" y="2057400"/>
+            <a:ext cx="2418588" cy="2651760"/>
           </a:xfrm>
           <a:prstGeom prst="rect">
             <a:avLst/>
           </a:prstGeom>
           <a:solidFill>
-            <a:srgbClr val="EDE7DB"/>
+            <a:srgbClr val="FFFFFF"/>
           </a:solidFill>
           <a:ln w="15875">
             <a:solidFill>
-              <a:srgbClr val="8A8177"/>
+              <a:srgbClr val="2F4F6B"/>
             </a:solidFill>
             <a:prstDash val="solid"/>
           </a:ln>
         </p:spPr>
-        <p:txBody>
-          <a:bodyPr/>
-          <a:p/>
-        </p:txBody>
-      </p:sp>
-      <p:sp>
-        <p:nvSpPr>
-          <p:cNvPr id="5" name="Text 3"/>
-          <p:cNvSpPr txBox="1"/>
-          <p:nvPr/>
-        </p:nvSpPr>
-        <p:spPr>
-          <a:xfrm>
-            <a:off x="1005840" y="1783080"/>
-            <a:ext cx="1828800" cy="274320"/>
-          </a:xfrm>
-          <a:prstGeom prst="rect">
-            <a:avLst/>
-          </a:prstGeom>
-          <a:noFill/>
-          <a:ln/>
-        </p:spPr>
-        <p:txBody>
-          <a:bodyPr wrap="square" lIns="0" tIns="0" rIns="0" bIns="0" rtlCol="0" anchor="ctr"/>
-          <a:lstStyle/>
-          <a:p>
-            <a:pPr indent="0" marL="0">
-              <a:buNone/>
-            </a:pPr>
-            <a:r>
-              <a:rPr lang="en-US" sz="1000" b="1" spc="200" kern="0" dirty="0">
-                <a:solidFill>
-                  <a:srgbClr val="8A8177"/>
-                </a:solidFill>
-                <a:latin typeface="Yu Gothic" pitchFamily="34" charset="0"/>
-                <a:ea typeface="Yu Gothic" pitchFamily="34" charset="-122"/>
-                <a:cs typeface="Yu Gothic" pitchFamily="34" charset="-120"/>
-              </a:rPr>
-              <a:t>入力</a:t>
-            </a:r>
-            <a:endParaRPr lang="en-US" sz="1000" dirty="0"/>
-          </a:p>
-        </p:txBody>
+      </p:sp>
+      <p:sp>
+        <p:nvSpPr>
+          <p:cNvPr id="5" name="Shape 3"/>
+          <p:cNvSpPr/>
+          <p:nvPr/>
+        </p:nvSpPr>
+        <p:spPr>
+          <a:xfrm>
+            <a:off x="978408" y="2240280"/>
+            <a:ext cx="384048" cy="384048"/>
+          </a:xfrm>
+          <a:prstGeom prst="ellipse">
+            <a:avLst/>
+          </a:prstGeom>
+          <a:solidFill>
+            <a:srgbClr val="2F4F6B"/>
+          </a:solidFill>
+          <a:ln w="12700">
+            <a:solidFill>
+              <a:srgbClr val="2F4F6B"/>
+            </a:solidFill>
+            <a:prstDash val="solid"/>
+          </a:ln>
+        </p:spPr>
       </p:sp>
       <p:sp>
         <p:nvSpPr>
@@ -8847,17 +7223,98 @@
         </p:nvSpPr>
         <p:spPr>
           <a:xfrm>
-            <a:off x="1005840" y="2084832"/>
-            <a:ext cx="4422038" cy="868680"/>
-          </a:xfrm>
-          <a:prstGeom prst="rect">
-            <a:avLst/>
-          </a:prstGeom>
-          <a:noFill/>
-          <a:ln/>
-        </p:spPr>
-        <p:txBody>
-          <a:bodyPr wrap="square" lIns="0" tIns="0" rIns="0" bIns="0" rtlCol="0" anchor="ctr"/>
+            <a:off x="978408" y="2240280"/>
+            <a:ext cx="384048" cy="384048"/>
+          </a:xfrm>
+          <a:prstGeom prst="rect">
+            <a:avLst/>
+          </a:prstGeom>
+          <a:noFill/>
+          <a:ln/>
+        </p:spPr>
+        <p:txBody>
+          <a:bodyPr wrap="square" lIns="0" tIns="0" rIns="0" bIns="0" rtlCol="0" anchor="ctr"/>
+          <a:lstStyle/>
+          <a:p>
+            <a:pPr algn="ctr" indent="0" marL="0">
+              <a:buNone/>
+            </a:pPr>
+            <a:r>
+              <a:rPr lang="en-US" sz="1300" b="1" dirty="0">
+                <a:solidFill>
+                  <a:srgbClr val="FFFFFF"/>
+                </a:solidFill>
+                <a:latin typeface="Yu Gothic" pitchFamily="34" charset="0"/>
+                <a:ea typeface="Yu Gothic" pitchFamily="34" charset="-122"/>
+                <a:cs typeface="Yu Gothic" pitchFamily="34" charset="-120"/>
+              </a:rPr>
+              <a:t>1</a:t>
+            </a:r>
+            <a:endParaRPr lang="en-US" sz="1300" dirty="0"/>
+          </a:p>
+        </p:txBody>
+      </p:sp>
+      <p:sp>
+        <p:nvSpPr>
+          <p:cNvPr id="7" name="Text 5"/>
+          <p:cNvSpPr txBox="1"/>
+          <p:nvPr/>
+        </p:nvSpPr>
+        <p:spPr>
+          <a:xfrm>
+            <a:off x="978408" y="2807208"/>
+            <a:ext cx="2016252" cy="658368"/>
+          </a:xfrm>
+          <a:prstGeom prst="rect">
+            <a:avLst/>
+          </a:prstGeom>
+          <a:noFill/>
+          <a:ln/>
+        </p:spPr>
+        <p:txBody>
+          <a:bodyPr wrap="square" lIns="0" tIns="0" rIns="0" bIns="0" rtlCol="0" anchor="t"/>
+          <a:lstStyle/>
+          <a:p>
+            <a:pPr indent="0" marL="0">
+              <a:lnSpc>
+                <a:spcPct val="120000"/>
+              </a:lnSpc>
+              <a:buNone/>
+            </a:pPr>
+            <a:r>
+              <a:rPr lang="en-US" sz="1500" b="1" dirty="0">
+                <a:solidFill>
+                  <a:srgbClr val="23201D"/>
+                </a:solidFill>
+                <a:latin typeface="Yu Gothic" pitchFamily="34" charset="0"/>
+                <a:ea typeface="Yu Gothic" pitchFamily="34" charset="-122"/>
+                <a:cs typeface="Yu Gothic" pitchFamily="34" charset="-120"/>
+              </a:rPr>
+              <a:t>作ったものを全部並べる</a:t>
+            </a:r>
+            <a:endParaRPr lang="en-US" sz="1500" dirty="0"/>
+          </a:p>
+        </p:txBody>
+      </p:sp>
+      <p:sp>
+        <p:nvSpPr>
+          <p:cNvPr id="8" name="Text 6"/>
+          <p:cNvSpPr txBox="1"/>
+          <p:nvPr/>
+        </p:nvSpPr>
+        <p:spPr>
+          <a:xfrm>
+            <a:off x="978408" y="3520440"/>
+            <a:ext cx="2016252" cy="1051560"/>
+          </a:xfrm>
+          <a:prstGeom prst="rect">
+            <a:avLst/>
+          </a:prstGeom>
+          <a:noFill/>
+          <a:ln/>
+        </p:spPr>
+        <p:txBody>
+          <a:bodyPr wrap="square" lIns="0" tIns="0" rIns="0" bIns="0" rtlCol="0" anchor="t"/>
           <a:lstStyle/>
           <a:p>
             <a:pPr indent="0" marL="0">
@@ -8867,30 +7324,69 @@
               <a:buNone/>
             </a:pPr>
             <a:r>
-              <a:rPr lang="en-US" sz="1200" dirty="0">
-                <a:solidFill>
-                  <a:srgbClr val="23201D"/>
-                </a:solidFill>
-                <a:latin typeface="Consolas" pitchFamily="34" charset="0"/>
-                <a:ea typeface="Consolas" pitchFamily="34" charset="-122"/>
-                <a:cs typeface="Consolas" pitchFamily="34" charset="-120"/>
-              </a:rPr>
-              <a:t>「AIをもっと活用していく」</a:t>
-            </a:r>
-            <a:endParaRPr lang="en-US" sz="1200" dirty="0"/>
-          </a:p>
-        </p:txBody>
-      </p:sp>
-      <p:sp>
-        <p:nvSpPr>
-          <p:cNvPr id="7" name="Shape 5"/>
+              <a:rPr lang="en-US" sz="1250" dirty="0">
+                <a:solidFill>
+                  <a:srgbClr val="5A534A"/>
+                </a:solidFill>
+                <a:latin typeface="Yu Gothic" pitchFamily="34" charset="0"/>
+                <a:ea typeface="Yu Gothic" pitchFamily="34" charset="-122"/>
+                <a:cs typeface="Yu Gothic" pitchFamily="34" charset="-120"/>
+              </a:rPr>
+              <a:t>12回分の成果物と、第1回の記録を突き合わせます</a:t>
+            </a:r>
+            <a:endParaRPr lang="en-US" sz="1250" dirty="0"/>
+          </a:p>
+        </p:txBody>
+      </p:sp>
+      <p:sp>
+        <p:nvSpPr>
+          <p:cNvPr id="9" name="Text 7"/>
+          <p:cNvSpPr txBox="1"/>
+          <p:nvPr/>
+        </p:nvSpPr>
+        <p:spPr>
+          <a:xfrm>
+            <a:off x="3195828" y="3246120"/>
+            <a:ext cx="310896" cy="274320"/>
+          </a:xfrm>
+          <a:prstGeom prst="rect">
+            <a:avLst/>
+          </a:prstGeom>
+          <a:noFill/>
+          <a:ln/>
+        </p:spPr>
+        <p:txBody>
+          <a:bodyPr wrap="square" lIns="0" tIns="0" rIns="0" bIns="0" rtlCol="0" anchor="ctr"/>
+          <a:lstStyle/>
+          <a:p>
+            <a:pPr algn="ctr" indent="0" marL="0">
+              <a:buNone/>
+            </a:pPr>
+            <a:r>
+              <a:rPr lang="en-US" sz="1100" dirty="0">
+                <a:solidFill>
+                  <a:srgbClr val="2F4F6B"/>
+                </a:solidFill>
+                <a:latin typeface="Yu Gothic" pitchFamily="34" charset="0"/>
+                <a:ea typeface="Yu Gothic" pitchFamily="34" charset="-122"/>
+                <a:cs typeface="Yu Gothic" pitchFamily="34" charset="-120"/>
+              </a:rPr>
+              <a:t>▶</a:t>
+            </a:r>
+            <a:endParaRPr lang="en-US" sz="1100" dirty="0"/>
+          </a:p>
+        </p:txBody>
+      </p:sp>
+      <p:sp>
+        <p:nvSpPr>
+          <p:cNvPr id="10" name="Shape 8"/>
           <p:cNvSpPr/>
           <p:nvPr/>
         </p:nvSpPr>
         <p:spPr>
           <a:xfrm>
-            <a:off x="6080760" y="1691640"/>
-            <a:ext cx="5303520" cy="3017520"/>
+            <a:off x="3506724" y="2057400"/>
+            <a:ext cx="2418588" cy="2651760"/>
           </a:xfrm>
           <a:prstGeom prst="rect">
             <a:avLst/>
@@ -8898,76 +7394,139 @@
           <a:solidFill>
             <a:srgbClr val="FFFFFF"/>
           </a:solidFill>
-          <a:ln w="12700">
+          <a:ln w="15875">
             <a:solidFill>
-              <a:srgbClr val="EDE7DB"/>
+              <a:srgbClr val="2F4F6B"/>
             </a:solidFill>
             <a:prstDash val="solid"/>
           </a:ln>
         </p:spPr>
-        <p:txBody>
-          <a:bodyPr/>
-          <a:p/>
-        </p:txBody>
-      </p:sp>
-      <p:sp>
-        <p:nvSpPr>
-          <p:cNvPr id="8" name="Text 6"/>
-          <p:cNvSpPr txBox="1"/>
-          <p:nvPr/>
-        </p:nvSpPr>
-        <p:spPr>
-          <a:xfrm>
-            <a:off x="6309360" y="1783080"/>
-            <a:ext cx="2743200" cy="274320"/>
-          </a:xfrm>
-          <a:prstGeom prst="rect">
-            <a:avLst/>
-          </a:prstGeom>
-          <a:noFill/>
-          <a:ln/>
-        </p:spPr>
-        <p:txBody>
-          <a:bodyPr wrap="square" lIns="0" tIns="0" rIns="0" bIns="0" rtlCol="0" anchor="ctr"/>
-          <a:lstStyle/>
-          <a:p>
-            <a:pPr indent="0" marL="0">
-              <a:buNone/>
-            </a:pPr>
-            <a:r>
-              <a:rPr lang="en-US" sz="1000" b="1" spc="200" kern="0" dirty="0">
-                <a:solidFill>
-                  <a:srgbClr val="8A8177"/>
-                </a:solidFill>
-                <a:latin typeface="Yu Gothic" pitchFamily="34" charset="0"/>
-                <a:ea typeface="Yu Gothic" pitchFamily="34" charset="-122"/>
-                <a:cs typeface="Yu Gothic" pitchFamily="34" charset="-120"/>
-              </a:rPr>
-              <a:t>出てくるもの</a:t>
-            </a:r>
-            <a:endParaRPr lang="en-US" sz="1000" dirty="0"/>
-          </a:p>
-        </p:txBody>
-      </p:sp>
-      <p:sp>
-        <p:nvSpPr>
-          <p:cNvPr id="9" name="Text 7"/>
-          <p:cNvSpPr txBox="1"/>
-          <p:nvPr/>
-        </p:nvSpPr>
-        <p:spPr>
-          <a:xfrm>
-            <a:off x="6309360" y="2148840"/>
-            <a:ext cx="4846320" cy="566928"/>
-          </a:xfrm>
-          <a:prstGeom prst="rect">
-            <a:avLst/>
-          </a:prstGeom>
-          <a:noFill/>
-          <a:ln/>
-        </p:spPr>
-        <p:txBody>
-          <a:bodyPr wrap="square" lIns="0" tIns="0" rIns="0" bIns="0" rtlCol="0" anchor="ctr"/>
+      </p:sp>
+      <p:sp>
+        <p:nvSpPr>
+          <p:cNvPr id="11" name="Shape 9"/>
+          <p:cNvSpPr/>
+          <p:nvPr/>
+        </p:nvSpPr>
+        <p:spPr>
+          <a:xfrm>
+            <a:off x="3707892" y="2240280"/>
+            <a:ext cx="384048" cy="384048"/>
+          </a:xfrm>
+          <a:prstGeom prst="ellipse">
+            <a:avLst/>
+          </a:prstGeom>
+          <a:solidFill>
+            <a:srgbClr val="2F4F6B"/>
+          </a:solidFill>
+          <a:ln w="12700">
+            <a:solidFill>
+              <a:srgbClr val="2F4F6B"/>
+            </a:solidFill>
+            <a:prstDash val="solid"/>
+          </a:ln>
+        </p:spPr>
+      </p:sp>
+      <p:sp>
+        <p:nvSpPr>
+          <p:cNvPr id="12" name="Text 10"/>
+          <p:cNvSpPr txBox="1"/>
+          <p:nvPr/>
+        </p:nvSpPr>
+        <p:spPr>
+          <a:xfrm>
+            <a:off x="3707892" y="2240280"/>
+            <a:ext cx="384048" cy="384048"/>
+          </a:xfrm>
+          <a:prstGeom prst="rect">
+            <a:avLst/>
+          </a:prstGeom>
+          <a:noFill/>
+          <a:ln/>
+        </p:spPr>
+        <p:txBody>
+          <a:bodyPr wrap="square" lIns="0" tIns="0" rIns="0" bIns="0" rtlCol="0" anchor="ctr"/>
+          <a:lstStyle/>
+          <a:p>
+            <a:pPr algn="ctr" indent="0" marL="0">
+              <a:buNone/>
+            </a:pPr>
+            <a:r>
+              <a:rPr lang="en-US" sz="1300" b="1" dirty="0">
+                <a:solidFill>
+                  <a:srgbClr val="FFFFFF"/>
+                </a:solidFill>
+                <a:latin typeface="Yu Gothic" pitchFamily="34" charset="0"/>
+                <a:ea typeface="Yu Gothic" pitchFamily="34" charset="-122"/>
+                <a:cs typeface="Yu Gothic" pitchFamily="34" charset="-120"/>
+              </a:rPr>
+              <a:t>2</a:t>
+            </a:r>
+            <a:endParaRPr lang="en-US" sz="1300" dirty="0"/>
+          </a:p>
+        </p:txBody>
+      </p:sp>
+      <p:sp>
+        <p:nvSpPr>
+          <p:cNvPr id="13" name="Text 11"/>
+          <p:cNvSpPr txBox="1"/>
+          <p:nvPr/>
+        </p:nvSpPr>
+        <p:spPr>
+          <a:xfrm>
+            <a:off x="3707892" y="2807208"/>
+            <a:ext cx="2016252" cy="658368"/>
+          </a:xfrm>
+          <a:prstGeom prst="rect">
+            <a:avLst/>
+          </a:prstGeom>
+          <a:noFill/>
+          <a:ln/>
+        </p:spPr>
+        <p:txBody>
+          <a:bodyPr wrap="square" lIns="0" tIns="0" rIns="0" bIns="0" rtlCol="0" anchor="t"/>
+          <a:lstStyle/>
+          <a:p>
+            <a:pPr indent="0" marL="0">
+              <a:lnSpc>
+                <a:spcPct val="120000"/>
+              </a:lnSpc>
+              <a:buNone/>
+            </a:pPr>
+            <a:r>
+              <a:rPr lang="en-US" sz="1500" b="1" dirty="0">
+                <a:solidFill>
+                  <a:srgbClr val="23201D"/>
+                </a:solidFill>
+                <a:latin typeface="Yu Gothic" pitchFamily="34" charset="0"/>
+                <a:ea typeface="Yu Gothic" pitchFamily="34" charset="-122"/>
+                <a:cs typeface="Yu Gothic" pitchFamily="34" charset="-120"/>
+              </a:rPr>
+              <a:t>3年構想を1枚にする</a:t>
+            </a:r>
+            <a:endParaRPr lang="en-US" sz="1500" dirty="0"/>
+          </a:p>
+        </p:txBody>
+      </p:sp>
+      <p:sp>
+        <p:nvSpPr>
+          <p:cNvPr id="14" name="Text 12"/>
+          <p:cNvSpPr txBox="1"/>
+          <p:nvPr/>
+        </p:nvSpPr>
+        <p:spPr>
+          <a:xfrm>
+            <a:off x="3707892" y="3520440"/>
+            <a:ext cx="2016252" cy="1051560"/>
+          </a:xfrm>
+          <a:prstGeom prst="rect">
+            <a:avLst/>
+          </a:prstGeom>
+          <a:noFill/>
+          <a:ln/>
+        </p:spPr>
+        <p:txBody>
+          <a:bodyPr wrap="square" lIns="0" tIns="0" rIns="0" bIns="0" rtlCol="0" anchor="t"/>
           <a:lstStyle/>
           <a:p>
             <a:pPr indent="0" marL="0">
@@ -8979,37 +7538,207 @@
             <a:r>
               <a:rPr lang="en-US" sz="1250" dirty="0">
                 <a:solidFill>
+                  <a:srgbClr val="5A534A"/>
+                </a:solidFill>
+                <a:latin typeface="Yu Gothic" pitchFamily="34" charset="0"/>
+                <a:ea typeface="Yu Gothic" pitchFamily="34" charset="-122"/>
+                <a:cs typeface="Yu Gothic" pitchFamily="34" charset="-120"/>
+              </a:rPr>
+              <a:t>4つの問いに答えます</a:t>
+            </a:r>
+            <a:endParaRPr lang="en-US" sz="1250" dirty="0"/>
+          </a:p>
+        </p:txBody>
+      </p:sp>
+      <p:sp>
+        <p:nvSpPr>
+          <p:cNvPr id="15" name="Text 13"/>
+          <p:cNvSpPr txBox="1"/>
+          <p:nvPr/>
+        </p:nvSpPr>
+        <p:spPr>
+          <a:xfrm>
+            <a:off x="5925312" y="3246120"/>
+            <a:ext cx="310896" cy="274320"/>
+          </a:xfrm>
+          <a:prstGeom prst="rect">
+            <a:avLst/>
+          </a:prstGeom>
+          <a:noFill/>
+          <a:ln/>
+        </p:spPr>
+        <p:txBody>
+          <a:bodyPr wrap="square" lIns="0" tIns="0" rIns="0" bIns="0" rtlCol="0" anchor="ctr"/>
+          <a:lstStyle/>
+          <a:p>
+            <a:pPr algn="ctr" indent="0" marL="0">
+              <a:buNone/>
+            </a:pPr>
+            <a:r>
+              <a:rPr lang="en-US" sz="1100" dirty="0">
+                <a:solidFill>
+                  <a:srgbClr val="2F4F6B"/>
+                </a:solidFill>
+                <a:latin typeface="Yu Gothic" pitchFamily="34" charset="0"/>
+                <a:ea typeface="Yu Gothic" pitchFamily="34" charset="-122"/>
+                <a:cs typeface="Yu Gothic" pitchFamily="34" charset="-120"/>
+              </a:rPr>
+              <a:t>▶</a:t>
+            </a:r>
+            <a:endParaRPr lang="en-US" sz="1100" dirty="0"/>
+          </a:p>
+        </p:txBody>
+      </p:sp>
+      <p:sp>
+        <p:nvSpPr>
+          <p:cNvPr id="16" name="Shape 14"/>
+          <p:cNvSpPr/>
+          <p:nvPr/>
+        </p:nvSpPr>
+        <p:spPr>
+          <a:xfrm>
+            <a:off x="6236208" y="2057400"/>
+            <a:ext cx="2418588" cy="2651760"/>
+          </a:xfrm>
+          <a:prstGeom prst="rect">
+            <a:avLst/>
+          </a:prstGeom>
+          <a:solidFill>
+            <a:srgbClr val="FFFFFF"/>
+          </a:solidFill>
+          <a:ln w="15875">
+            <a:solidFill>
+              <a:srgbClr val="2F4F6B"/>
+            </a:solidFill>
+            <a:prstDash val="solid"/>
+          </a:ln>
+        </p:spPr>
+      </p:sp>
+      <p:sp>
+        <p:nvSpPr>
+          <p:cNvPr id="17" name="Shape 15"/>
+          <p:cNvSpPr/>
+          <p:nvPr/>
+        </p:nvSpPr>
+        <p:spPr>
+          <a:xfrm>
+            <a:off x="6437376" y="2240280"/>
+            <a:ext cx="384048" cy="384048"/>
+          </a:xfrm>
+          <a:prstGeom prst="ellipse">
+            <a:avLst/>
+          </a:prstGeom>
+          <a:solidFill>
+            <a:srgbClr val="2F4F6B"/>
+          </a:solidFill>
+          <a:ln w="12700">
+            <a:solidFill>
+              <a:srgbClr val="2F4F6B"/>
+            </a:solidFill>
+            <a:prstDash val="solid"/>
+          </a:ln>
+        </p:spPr>
+      </p:sp>
+      <p:sp>
+        <p:nvSpPr>
+          <p:cNvPr id="18" name="Text 16"/>
+          <p:cNvSpPr txBox="1"/>
+          <p:nvPr/>
+        </p:nvSpPr>
+        <p:spPr>
+          <a:xfrm>
+            <a:off x="6437376" y="2240280"/>
+            <a:ext cx="384048" cy="384048"/>
+          </a:xfrm>
+          <a:prstGeom prst="rect">
+            <a:avLst/>
+          </a:prstGeom>
+          <a:noFill/>
+          <a:ln/>
+        </p:spPr>
+        <p:txBody>
+          <a:bodyPr wrap="square" lIns="0" tIns="0" rIns="0" bIns="0" rtlCol="0" anchor="ctr"/>
+          <a:lstStyle/>
+          <a:p>
+            <a:pPr algn="ctr" indent="0" marL="0">
+              <a:buNone/>
+            </a:pPr>
+            <a:r>
+              <a:rPr lang="en-US" sz="1300" b="1" dirty="0">
+                <a:solidFill>
+                  <a:srgbClr val="FFFFFF"/>
+                </a:solidFill>
+                <a:latin typeface="Yu Gothic" pitchFamily="34" charset="0"/>
+                <a:ea typeface="Yu Gothic" pitchFamily="34" charset="-122"/>
+                <a:cs typeface="Yu Gothic" pitchFamily="34" charset="-120"/>
+              </a:rPr>
+              <a:t>3</a:t>
+            </a:r>
+            <a:endParaRPr lang="en-US" sz="1300" dirty="0"/>
+          </a:p>
+        </p:txBody>
+      </p:sp>
+      <p:sp>
+        <p:nvSpPr>
+          <p:cNvPr id="19" name="Text 17"/>
+          <p:cNvSpPr txBox="1"/>
+          <p:nvPr/>
+        </p:nvSpPr>
+        <p:spPr>
+          <a:xfrm>
+            <a:off x="6437376" y="2807208"/>
+            <a:ext cx="2016252" cy="658368"/>
+          </a:xfrm>
+          <a:prstGeom prst="rect">
+            <a:avLst/>
+          </a:prstGeom>
+          <a:noFill/>
+          <a:ln/>
+        </p:spPr>
+        <p:txBody>
+          <a:bodyPr wrap="square" lIns="0" tIns="0" rIns="0" bIns="0" rtlCol="0" anchor="t"/>
+          <a:lstStyle/>
+          <a:p>
+            <a:pPr indent="0" marL="0">
+              <a:lnSpc>
+                <a:spcPct val="120000"/>
+              </a:lnSpc>
+              <a:buNone/>
+            </a:pPr>
+            <a:r>
+              <a:rPr lang="en-US" sz="1500" b="1" dirty="0">
+                <a:solidFill>
                   <a:srgbClr val="23201D"/>
                 </a:solidFill>
                 <a:latin typeface="Yu Gothic" pitchFamily="34" charset="0"/>
                 <a:ea typeface="Yu Gothic" pitchFamily="34" charset="-122"/>
                 <a:cs typeface="Yu Gothic" pitchFamily="34" charset="-120"/>
               </a:rPr>
-              <a:t>・何を指すのか、誰にも分からない</a:t>
-            </a:r>
-            <a:endParaRPr lang="en-US" sz="1250" dirty="0"/>
-          </a:p>
-        </p:txBody>
-      </p:sp>
-      <p:sp>
-        <p:nvSpPr>
-          <p:cNvPr id="10" name="Text 8"/>
-          <p:cNvSpPr txBox="1"/>
-          <p:nvPr/>
-        </p:nvSpPr>
-        <p:spPr>
-          <a:xfrm>
-            <a:off x="6309360" y="2752344"/>
-            <a:ext cx="4846320" cy="566928"/>
-          </a:xfrm>
-          <a:prstGeom prst="rect">
-            <a:avLst/>
-          </a:prstGeom>
-          <a:noFill/>
-          <a:ln/>
-        </p:spPr>
-        <p:txBody>
-          <a:bodyPr wrap="square" lIns="0" tIns="0" rIns="0" bIns="0" rtlCol="0" anchor="ctr"/>
+              <a:t>社員のみなさんに方針を話す</a:t>
+            </a:r>
+            <a:endParaRPr lang="en-US" sz="1500" dirty="0"/>
+          </a:p>
+        </p:txBody>
+      </p:sp>
+      <p:sp>
+        <p:nvSpPr>
+          <p:cNvPr id="20" name="Text 18"/>
+          <p:cNvSpPr txBox="1"/>
+          <p:nvPr/>
+        </p:nvSpPr>
+        <p:spPr>
+          <a:xfrm>
+            <a:off x="6437376" y="3520440"/>
+            <a:ext cx="2016252" cy="1051560"/>
+          </a:xfrm>
+          <a:prstGeom prst="rect">
+            <a:avLst/>
+          </a:prstGeom>
+          <a:noFill/>
+          <a:ln/>
+        </p:spPr>
+        <p:txBody>
+          <a:bodyPr wrap="square" lIns="0" tIns="0" rIns="0" bIns="0" rtlCol="0" anchor="t"/>
           <a:lstStyle/>
           <a:p>
             <a:pPr indent="0" marL="0">
@@ -9021,37 +7750,207 @@
             <a:r>
               <a:rPr lang="en-US" sz="1250" dirty="0">
                 <a:solidFill>
+                  <a:srgbClr val="5A534A"/>
+                </a:solidFill>
+                <a:latin typeface="Yu Gothic" pitchFamily="34" charset="0"/>
+                <a:ea typeface="Yu Gothic" pitchFamily="34" charset="-122"/>
+                <a:cs typeface="Yu Gothic" pitchFamily="34" charset="-120"/>
+              </a:rPr>
+              <a:t>これからどうするかを、社長ご自身の言葉で</a:t>
+            </a:r>
+            <a:endParaRPr lang="en-US" sz="1250" dirty="0"/>
+          </a:p>
+        </p:txBody>
+      </p:sp>
+      <p:sp>
+        <p:nvSpPr>
+          <p:cNvPr id="21" name="Text 19"/>
+          <p:cNvSpPr txBox="1"/>
+          <p:nvPr/>
+        </p:nvSpPr>
+        <p:spPr>
+          <a:xfrm>
+            <a:off x="8654796" y="3246120"/>
+            <a:ext cx="310896" cy="274320"/>
+          </a:xfrm>
+          <a:prstGeom prst="rect">
+            <a:avLst/>
+          </a:prstGeom>
+          <a:noFill/>
+          <a:ln/>
+        </p:spPr>
+        <p:txBody>
+          <a:bodyPr wrap="square" lIns="0" tIns="0" rIns="0" bIns="0" rtlCol="0" anchor="ctr"/>
+          <a:lstStyle/>
+          <a:p>
+            <a:pPr algn="ctr" indent="0" marL="0">
+              <a:buNone/>
+            </a:pPr>
+            <a:r>
+              <a:rPr lang="en-US" sz="1100" dirty="0">
+                <a:solidFill>
+                  <a:srgbClr val="2F4F6B"/>
+                </a:solidFill>
+                <a:latin typeface="Yu Gothic" pitchFamily="34" charset="0"/>
+                <a:ea typeface="Yu Gothic" pitchFamily="34" charset="-122"/>
+                <a:cs typeface="Yu Gothic" pitchFamily="34" charset="-120"/>
+              </a:rPr>
+              <a:t>▶</a:t>
+            </a:r>
+            <a:endParaRPr lang="en-US" sz="1100" dirty="0"/>
+          </a:p>
+        </p:txBody>
+      </p:sp>
+      <p:sp>
+        <p:nvSpPr>
+          <p:cNvPr id="22" name="Shape 20"/>
+          <p:cNvSpPr/>
+          <p:nvPr/>
+        </p:nvSpPr>
+        <p:spPr>
+          <a:xfrm>
+            <a:off x="8965692" y="2057400"/>
+            <a:ext cx="2418588" cy="2651760"/>
+          </a:xfrm>
+          <a:prstGeom prst="rect">
+            <a:avLst/>
+          </a:prstGeom>
+          <a:solidFill>
+            <a:srgbClr val="FFFFFF"/>
+          </a:solidFill>
+          <a:ln w="15875">
+            <a:solidFill>
+              <a:srgbClr val="2F4F6B"/>
+            </a:solidFill>
+            <a:prstDash val="solid"/>
+          </a:ln>
+        </p:spPr>
+      </p:sp>
+      <p:sp>
+        <p:nvSpPr>
+          <p:cNvPr id="23" name="Shape 21"/>
+          <p:cNvSpPr/>
+          <p:nvPr/>
+        </p:nvSpPr>
+        <p:spPr>
+          <a:xfrm>
+            <a:off x="9166860" y="2240280"/>
+            <a:ext cx="384048" cy="384048"/>
+          </a:xfrm>
+          <a:prstGeom prst="ellipse">
+            <a:avLst/>
+          </a:prstGeom>
+          <a:solidFill>
+            <a:srgbClr val="2F4F6B"/>
+          </a:solidFill>
+          <a:ln w="12700">
+            <a:solidFill>
+              <a:srgbClr val="2F4F6B"/>
+            </a:solidFill>
+            <a:prstDash val="solid"/>
+          </a:ln>
+        </p:spPr>
+      </p:sp>
+      <p:sp>
+        <p:nvSpPr>
+          <p:cNvPr id="24" name="Text 22"/>
+          <p:cNvSpPr txBox="1"/>
+          <p:nvPr/>
+        </p:nvSpPr>
+        <p:spPr>
+          <a:xfrm>
+            <a:off x="9166860" y="2240280"/>
+            <a:ext cx="384048" cy="384048"/>
+          </a:xfrm>
+          <a:prstGeom prst="rect">
+            <a:avLst/>
+          </a:prstGeom>
+          <a:noFill/>
+          <a:ln/>
+        </p:spPr>
+        <p:txBody>
+          <a:bodyPr wrap="square" lIns="0" tIns="0" rIns="0" bIns="0" rtlCol="0" anchor="ctr"/>
+          <a:lstStyle/>
+          <a:p>
+            <a:pPr algn="ctr" indent="0" marL="0">
+              <a:buNone/>
+            </a:pPr>
+            <a:r>
+              <a:rPr lang="en-US" sz="1300" b="1" dirty="0">
+                <a:solidFill>
+                  <a:srgbClr val="FFFFFF"/>
+                </a:solidFill>
+                <a:latin typeface="Yu Gothic" pitchFamily="34" charset="0"/>
+                <a:ea typeface="Yu Gothic" pitchFamily="34" charset="-122"/>
+                <a:cs typeface="Yu Gothic" pitchFamily="34" charset="-120"/>
+              </a:rPr>
+              <a:t>4</a:t>
+            </a:r>
+            <a:endParaRPr lang="en-US" sz="1300" dirty="0"/>
+          </a:p>
+        </p:txBody>
+      </p:sp>
+      <p:sp>
+        <p:nvSpPr>
+          <p:cNvPr id="25" name="Text 23"/>
+          <p:cNvSpPr txBox="1"/>
+          <p:nvPr/>
+        </p:nvSpPr>
+        <p:spPr>
+          <a:xfrm>
+            <a:off x="9166860" y="2807208"/>
+            <a:ext cx="2016252" cy="658368"/>
+          </a:xfrm>
+          <a:prstGeom prst="rect">
+            <a:avLst/>
+          </a:prstGeom>
+          <a:noFill/>
+          <a:ln/>
+        </p:spPr>
+        <p:txBody>
+          <a:bodyPr wrap="square" lIns="0" tIns="0" rIns="0" bIns="0" rtlCol="0" anchor="t"/>
+          <a:lstStyle/>
+          <a:p>
+            <a:pPr indent="0" marL="0">
+              <a:lnSpc>
+                <a:spcPct val="120000"/>
+              </a:lnSpc>
+              <a:buNone/>
+            </a:pPr>
+            <a:r>
+              <a:rPr lang="en-US" sz="1500" b="1" dirty="0">
+                <a:solidFill>
                   <a:srgbClr val="23201D"/>
                 </a:solidFill>
                 <a:latin typeface="Yu Gothic" pitchFamily="34" charset="0"/>
                 <a:ea typeface="Yu Gothic" pitchFamily="34" charset="-122"/>
                 <a:cs typeface="Yu Gothic" pitchFamily="34" charset="-120"/>
               </a:rPr>
-              <a:t>・来年また同じことを書く</a:t>
-            </a:r>
-            <a:endParaRPr lang="en-US" sz="1250" dirty="0"/>
-          </a:p>
-        </p:txBody>
-      </p:sp>
-      <p:sp>
-        <p:nvSpPr>
-          <p:cNvPr id="11" name="Text 9"/>
-          <p:cNvSpPr txBox="1"/>
-          <p:nvPr/>
-        </p:nvSpPr>
-        <p:spPr>
-          <a:xfrm>
-            <a:off x="6309360" y="3355848"/>
-            <a:ext cx="4846320" cy="566928"/>
-          </a:xfrm>
-          <a:prstGeom prst="rect">
-            <a:avLst/>
-          </a:prstGeom>
-          <a:noFill/>
-          <a:ln/>
-        </p:spPr>
-        <p:txBody>
-          <a:bodyPr wrap="square" lIns="0" tIns="0" rIns="0" bIns="0" rtlCol="0" anchor="ctr"/>
+              <a:t>ロードマップを書き直す</a:t>
+            </a:r>
+            <a:endParaRPr lang="en-US" sz="1500" dirty="0"/>
+          </a:p>
+        </p:txBody>
+      </p:sp>
+      <p:sp>
+        <p:nvSpPr>
+          <p:cNvPr id="26" name="Text 24"/>
+          <p:cNvSpPr txBox="1"/>
+          <p:nvPr/>
+        </p:nvSpPr>
+        <p:spPr>
+          <a:xfrm>
+            <a:off x="9166860" y="3520440"/>
+            <a:ext cx="2016252" cy="1051560"/>
+          </a:xfrm>
+          <a:prstGeom prst="rect">
+            <a:avLst/>
+          </a:prstGeom>
+          <a:noFill/>
+          <a:ln/>
+        </p:spPr>
+        <p:txBody>
+          <a:bodyPr wrap="square" lIns="0" tIns="0" rIns="0" bIns="0" rtlCol="0" anchor="t"/>
           <a:lstStyle/>
           <a:p>
             <a:pPr indent="0" marL="0">
@@ -9063,13 +7962,13 @@
             <a:r>
               <a:rPr lang="en-US" sz="1250" dirty="0">
                 <a:solidFill>
-                  <a:srgbClr val="23201D"/>
-                </a:solidFill>
-                <a:latin typeface="Yu Gothic" pitchFamily="34" charset="0"/>
-                <a:ea typeface="Yu Gothic" pitchFamily="34" charset="-122"/>
-                <a:cs typeface="Yu Gothic" pitchFamily="34" charset="-120"/>
-              </a:rPr>
-              <a:t>・社員は何をすればいいか分からない</a:t>
+                  <a:srgbClr val="5A534A"/>
+                </a:solidFill>
+                <a:latin typeface="Yu Gothic" pitchFamily="34" charset="0"/>
+                <a:ea typeface="Yu Gothic" pitchFamily="34" charset="-122"/>
+                <a:cs typeface="Yu Gothic" pitchFamily="34" charset="-120"/>
+              </a:rPr>
+              <a:t>次の12か月を、担当の方と「やめる基準」つきで</a:t>
             </a:r>
             <a:endParaRPr lang="en-US" sz="1250" dirty="0"/>
           </a:p>
@@ -9077,14 +7976,14 @@
       </p:sp>
       <p:sp>
         <p:nvSpPr>
-          <p:cNvPr id="12" name="Text 10"/>
-          <p:cNvSpPr txBox="1"/>
-          <p:nvPr/>
-        </p:nvSpPr>
-        <p:spPr>
-          <a:xfrm>
-            <a:off x="6309360" y="3959352"/>
-            <a:ext cx="4846320" cy="566928"/>
+          <p:cNvPr id="27" name="Text 25"/>
+          <p:cNvSpPr txBox="1"/>
+          <p:nvPr/>
+        </p:nvSpPr>
+        <p:spPr>
+          <a:xfrm>
+            <a:off x="777240" y="5623560"/>
+            <a:ext cx="10607040" cy="457200"/>
           </a:xfrm>
           <a:prstGeom prst="rect">
             <a:avLst/>
@@ -9098,167 +7997,28 @@
           <a:p>
             <a:pPr indent="0" marL="0">
               <a:lnSpc>
-                <a:spcPct val="125000"/>
+                <a:spcPct val="120000"/>
               </a:lnSpc>
               <a:buNone/>
             </a:pPr>
             <a:r>
-              <a:rPr lang="en-US" sz="1250" dirty="0">
-                <a:solidFill>
-                  <a:srgbClr val="23201D"/>
-                </a:solidFill>
-                <a:latin typeface="Yu Gothic" pitchFamily="34" charset="0"/>
-                <a:ea typeface="Yu Gothic" pitchFamily="34" charset="-122"/>
-                <a:cs typeface="Yu Gothic" pitchFamily="34" charset="-120"/>
-              </a:rPr>
-              <a:t>・結局、何も変わらない</a:t>
-            </a:r>
-            <a:endParaRPr lang="en-US" sz="1250" dirty="0"/>
-          </a:p>
-        </p:txBody>
-      </p:sp>
-      <p:sp>
-        <p:nvSpPr>
-          <p:cNvPr id="13" name="Shape 11"/>
-          <p:cNvSpPr/>
-          <p:nvPr/>
-        </p:nvSpPr>
-        <p:spPr>
-          <a:xfrm>
-            <a:off x="777240" y="3291840"/>
-            <a:ext cx="4879238" cy="1417320"/>
-          </a:xfrm>
-          <a:prstGeom prst="rect">
-            <a:avLst/>
-          </a:prstGeom>
-          <a:solidFill>
-            <a:srgbClr val="E4DFD5"/>
-          </a:solidFill>
-          <a:ln w="12700">
-            <a:solidFill>
-              <a:srgbClr val="333333"/>
-            </a:solidFill>
-            <a:prstDash val="solid"/>
-          </a:ln>
-        </p:spPr>
-        <p:txBody>
-          <a:bodyPr/>
-          <a:p/>
-        </p:txBody>
-      </p:sp>
-      <p:sp>
-        <p:nvSpPr>
-          <p:cNvPr id="14" name="Text 12"/>
-          <p:cNvSpPr txBox="1"/>
-          <p:nvPr/>
-        </p:nvSpPr>
-        <p:spPr>
-          <a:xfrm>
-            <a:off x="1005840" y="3383280"/>
-            <a:ext cx="4422038" cy="1234440"/>
-          </a:xfrm>
-          <a:prstGeom prst="rect">
-            <a:avLst/>
-          </a:prstGeom>
-          <a:noFill/>
-          <a:ln/>
-        </p:spPr>
-        <p:txBody>
-          <a:bodyPr wrap="square" lIns="0" tIns="0" rIns="0" bIns="0" rtlCol="0" anchor="ctr"/>
-          <a:lstStyle/>
-          <a:p>
-            <a:pPr indent="0" marL="0">
-              <a:lnSpc>
-                <a:spcPct val="135000"/>
-              </a:lnSpc>
-              <a:buNone/>
-            </a:pPr>
-            <a:r>
-              <a:rPr lang="en-US" sz="1250" dirty="0">
-                <a:solidFill>
-                  <a:srgbClr val="3F3933"/>
-                </a:solidFill>
-                <a:latin typeface="Yu Gothic" pitchFamily="34" charset="0"/>
-                <a:ea typeface="Yu Gothic" pitchFamily="34" charset="-122"/>
-                <a:cs typeface="Yu Gothic" pitchFamily="34" charset="-120"/>
-              </a:rPr>
-              <a:t>抽象的な構想は、書いた本人以外には伝わりません。そして本人も、半年後には忘れています。</a:t>
-            </a:r>
-            <a:endParaRPr lang="en-US" sz="1250" dirty="0"/>
-          </a:p>
-        </p:txBody>
-      </p:sp>
-      <p:sp>
-        <p:nvSpPr>
-          <p:cNvPr id="15" name="Shape 13"/>
-          <p:cNvSpPr/>
-          <p:nvPr/>
-        </p:nvSpPr>
-        <p:spPr>
-          <a:xfrm>
-            <a:off x="777240" y="4983480"/>
-            <a:ext cx="10607040" cy="685800"/>
-          </a:xfrm>
-          <a:prstGeom prst="rect">
-            <a:avLst/>
-          </a:prstGeom>
-          <a:solidFill>
-            <a:srgbClr val="8A8177"/>
-          </a:solidFill>
-          <a:ln w="12700">
-            <a:solidFill>
-              <a:srgbClr val="333333"/>
-            </a:solidFill>
-            <a:prstDash val="solid"/>
-          </a:ln>
-        </p:spPr>
-        <p:txBody>
-          <a:bodyPr/>
-          <a:p/>
-        </p:txBody>
-      </p:sp>
-      <p:sp>
-        <p:nvSpPr>
-          <p:cNvPr id="16" name="Text 14"/>
-          <p:cNvSpPr txBox="1"/>
-          <p:nvPr/>
-        </p:nvSpPr>
-        <p:spPr>
-          <a:xfrm>
-            <a:off x="1097280" y="4983480"/>
-            <a:ext cx="9966960" cy="685800"/>
-          </a:xfrm>
-          <a:prstGeom prst="rect">
-            <a:avLst/>
-          </a:prstGeom>
-          <a:noFill/>
-          <a:ln/>
-        </p:spPr>
-        <p:txBody>
-          <a:bodyPr wrap="square" lIns="0" tIns="0" rIns="0" bIns="0" rtlCol="0" anchor="ctr"/>
-          <a:lstStyle/>
-          <a:p>
-            <a:pPr indent="0" marL="0">
-              <a:buNone/>
-            </a:pPr>
-            <a:r>
-              <a:rPr lang="en-US" sz="1450" b="1" dirty="0">
-                <a:solidFill>
-                  <a:srgbClr val="FFFFFF"/>
-                </a:solidFill>
-                <a:latin typeface="Yu Gothic" pitchFamily="34" charset="0"/>
-                <a:ea typeface="Yu Gothic" pitchFamily="34" charset="-122"/>
-                <a:cs typeface="Yu Gothic" pitchFamily="34" charset="-120"/>
-              </a:rPr>
-              <a:t>「もっと活用する」は、構想ではありません</a:t>
-            </a:r>
-            <a:endParaRPr lang="en-US" sz="1450" dirty="0"/>
-          </a:p>
-        </p:txBody>
-      </p:sp>
-      <p:sp>
-        <p:nvSpPr>
-          <p:cNvPr id="17" name="Text 15"/>
+              <a:rPr lang="en-US" sz="1200" b="1" dirty="0">
+                <a:solidFill>
+                  <a:srgbClr val="2F4F6B"/>
+                </a:solidFill>
+                <a:latin typeface="Yu Gothic" pitchFamily="34" charset="0"/>
+                <a:ea typeface="Yu Gothic" pitchFamily="34" charset="-122"/>
+                <a:cs typeface="Yu Gothic" pitchFamily="34" charset="-120"/>
+              </a:rPr>
+              <a:t>下調べが要るときだけ、deep research で同業他社の公開事例を調べてお見せします。</a:t>
+            </a:r>
+            <a:endParaRPr lang="en-US" sz="1200" dirty="0"/>
+          </a:p>
+        </p:txBody>
+      </p:sp>
+      <p:sp>
+        <p:nvSpPr>
+          <p:cNvPr id="28" name="Text 26"/>
           <p:cNvSpPr txBox="1"/>
           <p:nvPr/>
         </p:nvSpPr>
@@ -9297,7 +8057,7 @@
       </p:sp>
       <p:sp>
         <p:nvSpPr>
-          <p:cNvPr id="18" name="Text 16"/>
+          <p:cNvPr id="29" name="Text 27"/>
           <p:cNvSpPr txBox="1"/>
           <p:nvPr/>
         </p:nvSpPr>
@@ -9328,7 +8088,7 @@
                 <a:ea typeface="Yu Gothic" pitchFamily="34" charset="-122"/>
                 <a:cs typeface="Yu Gothic" pitchFamily="34" charset="-120"/>
               </a:rPr>
-              <a:t>実演 ①</a:t>
+              <a:t>画面の地図</a:t>
             </a:r>
             <a:endParaRPr lang="en-US" sz="900" dirty="0"/>
           </a:p>
@@ -9393,13 +8153,13 @@
             <a:r>
               <a:rPr lang="en-US" sz="1100" b="1" spc="250" kern="0" dirty="0">
                 <a:solidFill>
-                  <a:srgbClr val="3B6B4A"/>
-                </a:solidFill>
-                <a:latin typeface="Yu Gothic" pitchFamily="34" charset="0"/>
-                <a:ea typeface="Yu Gothic" pitchFamily="34" charset="-122"/>
-                <a:cs typeface="Yu Gothic" pitchFamily="34" charset="-120"/>
-              </a:rPr>
-              <a:t>実演 ②</a:t>
+                  <a:srgbClr val="2F4F6B"/>
+                </a:solidFill>
+                <a:latin typeface="Yu Gothic" pitchFamily="34" charset="0"/>
+                <a:ea typeface="Yu Gothic" pitchFamily="34" charset="-122"/>
+                <a:cs typeface="Yu Gothic" pitchFamily="34" charset="-120"/>
+              </a:rPr>
+              <a:t>記入例</a:t>
             </a:r>
             <a:endParaRPr lang="en-US" sz="1100" dirty="0"/>
           </a:p>
@@ -9438,7 +8198,7 @@
                 <a:ea typeface="Yu Gothic" pitchFamily="34" charset="-122"/>
                 <a:cs typeface="Yu Gothic" pitchFamily="34" charset="-120"/>
               </a:rPr>
-              <a:t>事業の言葉で書いた構想</a:t>
+              <a:t>この12回で変わったこと</a:t>
             </a:r>
             <a:endParaRPr lang="en-US" sz="2600" dirty="0"/>
           </a:p>
@@ -9453,7 +8213,7 @@
         <p:spPr>
           <a:xfrm>
             <a:off x="777240" y="1691640"/>
-            <a:ext cx="4879238" cy="1371600"/>
+            <a:ext cx="10607040" cy="3931920"/>
           </a:xfrm>
           <a:prstGeom prst="rect">
             <a:avLst/>
@@ -9463,54 +8223,36 @@
           </a:solidFill>
           <a:ln w="15875">
             <a:solidFill>
-              <a:srgbClr val="3B6B4A"/>
+              <a:srgbClr val="2F4F6B"/>
             </a:solidFill>
             <a:prstDash val="solid"/>
           </a:ln>
         </p:spPr>
-        <p:txBody>
-          <a:bodyPr/>
-          <a:p/>
-        </p:txBody>
-      </p:sp>
-      <p:sp>
-        <p:nvSpPr>
-          <p:cNvPr id="5" name="Text 3"/>
-          <p:cNvSpPr txBox="1"/>
-          <p:nvPr/>
-        </p:nvSpPr>
-        <p:spPr>
-          <a:xfrm>
-            <a:off x="1005840" y="1783080"/>
-            <a:ext cx="1828800" cy="274320"/>
-          </a:xfrm>
-          <a:prstGeom prst="rect">
-            <a:avLst/>
-          </a:prstGeom>
-          <a:noFill/>
-          <a:ln/>
-        </p:spPr>
-        <p:txBody>
-          <a:bodyPr wrap="square" lIns="0" tIns="0" rIns="0" bIns="0" rtlCol="0" anchor="ctr"/>
-          <a:lstStyle/>
-          <a:p>
-            <a:pPr indent="0" marL="0">
-              <a:buNone/>
-            </a:pPr>
-            <a:r>
-              <a:rPr lang="en-US" sz="1000" b="1" spc="200" kern="0" dirty="0">
-                <a:solidFill>
-                  <a:srgbClr val="3B6B4A"/>
-                </a:solidFill>
-                <a:latin typeface="Yu Gothic" pitchFamily="34" charset="0"/>
-                <a:ea typeface="Yu Gothic" pitchFamily="34" charset="-122"/>
-                <a:cs typeface="Yu Gothic" pitchFamily="34" charset="-120"/>
-              </a:rPr>
-              <a:t>入力</a:t>
-            </a:r>
-            <a:endParaRPr lang="en-US" sz="1000" dirty="0"/>
-          </a:p>
-        </p:txBody>
+      </p:sp>
+      <p:sp>
+        <p:nvSpPr>
+          <p:cNvPr id="5" name="Shape 3"/>
+          <p:cNvSpPr/>
+          <p:nvPr/>
+        </p:nvSpPr>
+        <p:spPr>
+          <a:xfrm>
+            <a:off x="777240" y="1691640"/>
+            <a:ext cx="10607040" cy="457200"/>
+          </a:xfrm>
+          <a:prstGeom prst="rect">
+            <a:avLst/>
+          </a:prstGeom>
+          <a:solidFill>
+            <a:srgbClr val="2F4F6B"/>
+          </a:solidFill>
+          <a:ln w="12700">
+            <a:solidFill>
+              <a:srgbClr val="2F4F6B"/>
+            </a:solidFill>
+            <a:prstDash val="solid"/>
+          </a:ln>
+        </p:spPr>
       </p:sp>
       <p:sp>
         <p:nvSpPr>
@@ -9520,8 +8262,47 @@
         </p:nvSpPr>
         <p:spPr>
           <a:xfrm>
-            <a:off x="1005840" y="2084832"/>
-            <a:ext cx="4422038" cy="868680"/>
+            <a:off x="1051560" y="1709928"/>
+            <a:ext cx="10058400" cy="420624"/>
+          </a:xfrm>
+          <a:prstGeom prst="rect">
+            <a:avLst/>
+          </a:prstGeom>
+          <a:noFill/>
+          <a:ln/>
+        </p:spPr>
+        <p:txBody>
+          <a:bodyPr wrap="square" lIns="0" tIns="0" rIns="0" bIns="0" rtlCol="0" anchor="ctr"/>
+          <a:lstStyle/>
+          <a:p>
+            <a:pPr indent="0" marL="0">
+              <a:buNone/>
+            </a:pPr>
+            <a:r>
+              <a:rPr lang="en-US" sz="1200" b="1" dirty="0">
+                <a:solidFill>
+                  <a:srgbClr val="FFFFFF"/>
+                </a:solidFill>
+                <a:latin typeface="Yu Gothic" pitchFamily="34" charset="0"/>
+                <a:ea typeface="Yu Gothic" pitchFamily="34" charset="-122"/>
+                <a:cs typeface="Yu Gothic" pitchFamily="34" charset="-120"/>
+              </a:rPr>
+              <a:t>受講前 → いま（第1回の記録と突き合わせます）</a:t>
+            </a:r>
+            <a:endParaRPr lang="en-US" sz="1200" dirty="0"/>
+          </a:p>
+        </p:txBody>
+      </p:sp>
+      <p:sp>
+        <p:nvSpPr>
+          <p:cNvPr id="7" name="Text 5"/>
+          <p:cNvSpPr txBox="1"/>
+          <p:nvPr/>
+        </p:nvSpPr>
+        <p:spPr>
+          <a:xfrm>
+            <a:off x="1097280" y="2331720"/>
+            <a:ext cx="2377440" cy="530352"/>
           </a:xfrm>
           <a:prstGeom prst="rect">
             <a:avLst/>
@@ -9535,12 +8316,54 @@
           <a:p>
             <a:pPr indent="0" marL="0">
               <a:lnSpc>
-                <a:spcPct val="125000"/>
+                <a:spcPct val="110000"/>
               </a:lnSpc>
               <a:buNone/>
             </a:pPr>
             <a:r>
-              <a:rPr lang="en-US" sz="1200" dirty="0">
+              <a:rPr lang="en-US" sz="1100" b="1" dirty="0">
+                <a:solidFill>
+                  <a:srgbClr val="2F4F6B"/>
+                </a:solidFill>
+                <a:latin typeface="Yu Gothic" pitchFamily="34" charset="0"/>
+                <a:ea typeface="Yu Gothic" pitchFamily="34" charset="-122"/>
+                <a:cs typeface="Yu Gothic" pitchFamily="34" charset="-120"/>
+              </a:rPr>
+              <a:t>指示の出し方</a:t>
+            </a:r>
+            <a:endParaRPr lang="en-US" sz="1100" dirty="0"/>
+          </a:p>
+        </p:txBody>
+      </p:sp>
+      <p:sp>
+        <p:nvSpPr>
+          <p:cNvPr id="8" name="Text 6"/>
+          <p:cNvSpPr txBox="1"/>
+          <p:nvPr/>
+        </p:nvSpPr>
+        <p:spPr>
+          <a:xfrm>
+            <a:off x="3611880" y="2331720"/>
+            <a:ext cx="7452360" cy="530352"/>
+          </a:xfrm>
+          <a:prstGeom prst="rect">
+            <a:avLst/>
+          </a:prstGeom>
+          <a:noFill/>
+          <a:ln/>
+        </p:spPr>
+        <p:txBody>
+          <a:bodyPr wrap="square" lIns="0" tIns="0" rIns="0" bIns="0" rtlCol="0" anchor="ctr"/>
+          <a:lstStyle/>
+          <a:p>
+            <a:pPr indent="0" marL="0">
+              <a:lnSpc>
+                <a:spcPct val="115000"/>
+              </a:lnSpc>
+              <a:buNone/>
+            </a:pPr>
+            <a:r>
+              <a:rPr lang="en-US" sz="1150" dirty="0">
                 <a:solidFill>
                   <a:srgbClr val="23201D"/>
                 </a:solidFill>
@@ -9548,77 +8371,9 @@
                 <a:ea typeface="Consolas" pitchFamily="34" charset="-122"/>
                 <a:cs typeface="Consolas" pitchFamily="34" charset="-120"/>
               </a:rPr>
-              <a:t>「見積の即日回答を強みにして、小口案件を取る」</a:t>
-            </a:r>
-            <a:endParaRPr lang="en-US" sz="1200" dirty="0"/>
-          </a:p>
-        </p:txBody>
-      </p:sp>
-      <p:sp>
-        <p:nvSpPr>
-          <p:cNvPr id="7" name="Shape 5"/>
-          <p:cNvSpPr/>
-          <p:nvPr/>
-        </p:nvSpPr>
-        <p:spPr>
-          <a:xfrm>
-            <a:off x="6080760" y="1691640"/>
-            <a:ext cx="5303520" cy="3017520"/>
-          </a:xfrm>
-          <a:prstGeom prst="rect">
-            <a:avLst/>
-          </a:prstGeom>
-          <a:solidFill>
-            <a:srgbClr val="FFFFFF"/>
-          </a:solidFill>
-          <a:ln w="12700">
-            <a:solidFill>
-              <a:srgbClr val="EDE7DB"/>
-            </a:solidFill>
-            <a:prstDash val="solid"/>
-          </a:ln>
-        </p:spPr>
-        <p:txBody>
-          <a:bodyPr/>
-          <a:p/>
-        </p:txBody>
-      </p:sp>
-      <p:sp>
-        <p:nvSpPr>
-          <p:cNvPr id="8" name="Text 6"/>
-          <p:cNvSpPr txBox="1"/>
-          <p:nvPr/>
-        </p:nvSpPr>
-        <p:spPr>
-          <a:xfrm>
-            <a:off x="6309360" y="1783080"/>
-            <a:ext cx="2743200" cy="274320"/>
-          </a:xfrm>
-          <a:prstGeom prst="rect">
-            <a:avLst/>
-          </a:prstGeom>
-          <a:noFill/>
-          <a:ln/>
-        </p:spPr>
-        <p:txBody>
-          <a:bodyPr wrap="square" lIns="0" tIns="0" rIns="0" bIns="0" rtlCol="0" anchor="ctr"/>
-          <a:lstStyle/>
-          <a:p>
-            <a:pPr indent="0" marL="0">
-              <a:buNone/>
-            </a:pPr>
-            <a:r>
-              <a:rPr lang="en-US" sz="1000" b="1" spc="200" kern="0" dirty="0">
-                <a:solidFill>
-                  <a:srgbClr val="8A8177"/>
-                </a:solidFill>
-                <a:latin typeface="Yu Gothic" pitchFamily="34" charset="0"/>
-                <a:ea typeface="Yu Gothic" pitchFamily="34" charset="-122"/>
-                <a:cs typeface="Yu Gothic" pitchFamily="34" charset="-120"/>
-              </a:rPr>
-              <a:t>出てくるもの</a:t>
-            </a:r>
-            <a:endParaRPr lang="en-US" sz="1000" dirty="0"/>
+              <a:t>毎回ゼロから → 型で書き、頼み方集にたまっている</a:t>
+            </a:r>
+            <a:endParaRPr lang="en-US" sz="1150" dirty="0"/>
           </a:p>
         </p:txBody>
       </p:sp>
@@ -9630,8 +8385,8 @@
         </p:nvSpPr>
         <p:spPr>
           <a:xfrm>
-            <a:off x="6309360" y="2148840"/>
-            <a:ext cx="4846320" cy="566928"/>
+            <a:off x="1097280" y="2862072"/>
+            <a:ext cx="2377440" cy="530352"/>
           </a:xfrm>
           <a:prstGeom prst="rect">
             <a:avLst/>
@@ -9645,20 +8400,440 @@
           <a:p>
             <a:pPr indent="0" marL="0">
               <a:lnSpc>
-                <a:spcPct val="125000"/>
+                <a:spcPct val="110000"/>
               </a:lnSpc>
               <a:buNone/>
             </a:pPr>
             <a:r>
+              <a:rPr lang="en-US" sz="1100" b="1" dirty="0">
+                <a:solidFill>
+                  <a:srgbClr val="2F4F6B"/>
+                </a:solidFill>
+                <a:latin typeface="Yu Gothic" pitchFamily="34" charset="0"/>
+                <a:ea typeface="Yu Gothic" pitchFamily="34" charset="-122"/>
+                <a:cs typeface="Yu Gothic" pitchFamily="34" charset="-120"/>
+              </a:rPr>
+              <a:t>社内の広がり</a:t>
+            </a:r>
+            <a:endParaRPr lang="en-US" sz="1100" dirty="0"/>
+          </a:p>
+        </p:txBody>
+      </p:sp>
+      <p:sp>
+        <p:nvSpPr>
+          <p:cNvPr id="10" name="Text 8"/>
+          <p:cNvSpPr txBox="1"/>
+          <p:nvPr/>
+        </p:nvSpPr>
+        <p:spPr>
+          <a:xfrm>
+            <a:off x="3611880" y="2862072"/>
+            <a:ext cx="7452360" cy="530352"/>
+          </a:xfrm>
+          <a:prstGeom prst="rect">
+            <a:avLst/>
+          </a:prstGeom>
+          <a:noFill/>
+          <a:ln/>
+        </p:spPr>
+        <p:txBody>
+          <a:bodyPr wrap="square" lIns="0" tIns="0" rIns="0" bIns="0" rtlCol="0" anchor="ctr"/>
+          <a:lstStyle/>
+          <a:p>
+            <a:pPr indent="0" marL="0">
+              <a:lnSpc>
+                <a:spcPct val="115000"/>
+              </a:lnSpc>
+              <a:buNone/>
+            </a:pPr>
+            <a:r>
+              <a:rPr lang="en-US" sz="1150" dirty="0">
+                <a:solidFill>
+                  <a:srgbClr val="23201D"/>
+                </a:solidFill>
+                <a:latin typeface="Consolas" pitchFamily="34" charset="0"/>
+                <a:ea typeface="Consolas" pitchFamily="34" charset="-122"/>
+                <a:cs typeface="Consolas" pitchFamily="34" charset="-120"/>
+              </a:rPr>
+              <a:t>社長のみ → 社員◯名が業務で使用</a:t>
+            </a:r>
+            <a:endParaRPr lang="en-US" sz="1150" dirty="0"/>
+          </a:p>
+        </p:txBody>
+      </p:sp>
+      <p:sp>
+        <p:nvSpPr>
+          <p:cNvPr id="11" name="Text 9"/>
+          <p:cNvSpPr txBox="1"/>
+          <p:nvPr/>
+        </p:nvSpPr>
+        <p:spPr>
+          <a:xfrm>
+            <a:off x="1097280" y="3392424"/>
+            <a:ext cx="2377440" cy="530352"/>
+          </a:xfrm>
+          <a:prstGeom prst="rect">
+            <a:avLst/>
+          </a:prstGeom>
+          <a:noFill/>
+          <a:ln/>
+        </p:spPr>
+        <p:txBody>
+          <a:bodyPr wrap="square" lIns="0" tIns="0" rIns="0" bIns="0" rtlCol="0" anchor="ctr"/>
+          <a:lstStyle/>
+          <a:p>
+            <a:pPr indent="0" marL="0">
+              <a:lnSpc>
+                <a:spcPct val="110000"/>
+              </a:lnSpc>
+              <a:buNone/>
+            </a:pPr>
+            <a:r>
+              <a:rPr lang="en-US" sz="1100" b="1" dirty="0">
+                <a:solidFill>
+                  <a:srgbClr val="2F4F6B"/>
+                </a:solidFill>
+                <a:latin typeface="Yu Gothic" pitchFamily="34" charset="0"/>
+                <a:ea typeface="Yu Gothic" pitchFamily="34" charset="-122"/>
+                <a:cs typeface="Yu Gothic" pitchFamily="34" charset="-120"/>
+              </a:rPr>
+              <a:t>数字の扱い</a:t>
+            </a:r>
+            <a:endParaRPr lang="en-US" sz="1100" dirty="0"/>
+          </a:p>
+        </p:txBody>
+      </p:sp>
+      <p:sp>
+        <p:nvSpPr>
+          <p:cNvPr id="12" name="Text 10"/>
+          <p:cNvSpPr txBox="1"/>
+          <p:nvPr/>
+        </p:nvSpPr>
+        <p:spPr>
+          <a:xfrm>
+            <a:off x="3611880" y="3392424"/>
+            <a:ext cx="7452360" cy="530352"/>
+          </a:xfrm>
+          <a:prstGeom prst="rect">
+            <a:avLst/>
+          </a:prstGeom>
+          <a:noFill/>
+          <a:ln/>
+        </p:spPr>
+        <p:txBody>
+          <a:bodyPr wrap="square" lIns="0" tIns="0" rIns="0" bIns="0" rtlCol="0" anchor="ctr"/>
+          <a:lstStyle/>
+          <a:p>
+            <a:pPr indent="0" marL="0">
+              <a:lnSpc>
+                <a:spcPct val="115000"/>
+              </a:lnSpc>
+              <a:buNone/>
+            </a:pPr>
+            <a:r>
+              <a:rPr lang="en-US" sz="1150" dirty="0">
+                <a:solidFill>
+                  <a:srgbClr val="23201D"/>
+                </a:solidFill>
+                <a:latin typeface="Consolas" pitchFamily="34" charset="0"/>
+                <a:ea typeface="Consolas" pitchFamily="34" charset="-122"/>
+                <a:cs typeface="Consolas" pitchFamily="34" charset="-120"/>
+              </a:rPr>
+              <a:t>勘と経験 → 月次レポートの雛形で毎月回している</a:t>
+            </a:r>
+            <a:endParaRPr lang="en-US" sz="1150" dirty="0"/>
+          </a:p>
+        </p:txBody>
+      </p:sp>
+      <p:sp>
+        <p:nvSpPr>
+          <p:cNvPr id="13" name="Text 11"/>
+          <p:cNvSpPr txBox="1"/>
+          <p:nvPr/>
+        </p:nvSpPr>
+        <p:spPr>
+          <a:xfrm>
+            <a:off x="1097280" y="3922776"/>
+            <a:ext cx="2377440" cy="530352"/>
+          </a:xfrm>
+          <a:prstGeom prst="rect">
+            <a:avLst/>
+          </a:prstGeom>
+          <a:noFill/>
+          <a:ln/>
+        </p:spPr>
+        <p:txBody>
+          <a:bodyPr wrap="square" lIns="0" tIns="0" rIns="0" bIns="0" rtlCol="0" anchor="ctr"/>
+          <a:lstStyle/>
+          <a:p>
+            <a:pPr indent="0" marL="0">
+              <a:lnSpc>
+                <a:spcPct val="110000"/>
+              </a:lnSpc>
+              <a:buNone/>
+            </a:pPr>
+            <a:r>
+              <a:rPr lang="en-US" sz="1100" b="1" dirty="0">
+                <a:solidFill>
+                  <a:srgbClr val="2F4F6B"/>
+                </a:solidFill>
+                <a:latin typeface="Yu Gothic" pitchFamily="34" charset="0"/>
+                <a:ea typeface="Yu Gothic" pitchFamily="34" charset="-122"/>
+                <a:cs typeface="Yu Gothic" pitchFamily="34" charset="-120"/>
+              </a:rPr>
+              <a:t>品質</a:t>
+            </a:r>
+            <a:endParaRPr lang="en-US" sz="1100" dirty="0"/>
+          </a:p>
+        </p:txBody>
+      </p:sp>
+      <p:sp>
+        <p:nvSpPr>
+          <p:cNvPr id="14" name="Text 12"/>
+          <p:cNvSpPr txBox="1"/>
+          <p:nvPr/>
+        </p:nvSpPr>
+        <p:spPr>
+          <a:xfrm>
+            <a:off x="3611880" y="3922776"/>
+            <a:ext cx="7452360" cy="530352"/>
+          </a:xfrm>
+          <a:prstGeom prst="rect">
+            <a:avLst/>
+          </a:prstGeom>
+          <a:noFill/>
+          <a:ln/>
+        </p:spPr>
+        <p:txBody>
+          <a:bodyPr wrap="square" lIns="0" tIns="0" rIns="0" bIns="0" rtlCol="0" anchor="ctr"/>
+          <a:lstStyle/>
+          <a:p>
+            <a:pPr indent="0" marL="0">
+              <a:lnSpc>
+                <a:spcPct val="115000"/>
+              </a:lnSpc>
+              <a:buNone/>
+            </a:pPr>
+            <a:r>
+              <a:rPr lang="en-US" sz="1150" dirty="0">
+                <a:solidFill>
+                  <a:srgbClr val="23201D"/>
+                </a:solidFill>
+                <a:latin typeface="Consolas" pitchFamily="34" charset="0"/>
+                <a:ea typeface="Consolas" pitchFamily="34" charset="-122"/>
+                <a:cs typeface="Consolas" pitchFamily="34" charset="-120"/>
+              </a:rPr>
+              <a:t>なんとなく → 正解セット10件で毎月採点</a:t>
+            </a:r>
+            <a:endParaRPr lang="en-US" sz="1150" dirty="0"/>
+          </a:p>
+        </p:txBody>
+      </p:sp>
+      <p:sp>
+        <p:nvSpPr>
+          <p:cNvPr id="15" name="Text 13"/>
+          <p:cNvSpPr txBox="1"/>
+          <p:nvPr/>
+        </p:nvSpPr>
+        <p:spPr>
+          <a:xfrm>
+            <a:off x="1097280" y="4453128"/>
+            <a:ext cx="2377440" cy="530352"/>
+          </a:xfrm>
+          <a:prstGeom prst="rect">
+            <a:avLst/>
+          </a:prstGeom>
+          <a:noFill/>
+          <a:ln/>
+        </p:spPr>
+        <p:txBody>
+          <a:bodyPr wrap="square" lIns="0" tIns="0" rIns="0" bIns="0" rtlCol="0" anchor="ctr"/>
+          <a:lstStyle/>
+          <a:p>
+            <a:pPr indent="0" marL="0">
+              <a:lnSpc>
+                <a:spcPct val="110000"/>
+              </a:lnSpc>
+              <a:buNone/>
+            </a:pPr>
+            <a:r>
+              <a:rPr lang="en-US" sz="1100" b="1" dirty="0">
+                <a:solidFill>
+                  <a:srgbClr val="2F4F6B"/>
+                </a:solidFill>
+                <a:latin typeface="Yu Gothic" pitchFamily="34" charset="0"/>
+                <a:ea typeface="Yu Gothic" pitchFamily="34" charset="-122"/>
+                <a:cs typeface="Yu Gothic" pitchFamily="34" charset="-120"/>
+              </a:rPr>
+              <a:t>体制</a:t>
+            </a:r>
+            <a:endParaRPr lang="en-US" sz="1100" dirty="0"/>
+          </a:p>
+        </p:txBody>
+      </p:sp>
+      <p:sp>
+        <p:nvSpPr>
+          <p:cNvPr id="16" name="Text 14"/>
+          <p:cNvSpPr txBox="1"/>
+          <p:nvPr/>
+        </p:nvSpPr>
+        <p:spPr>
+          <a:xfrm>
+            <a:off x="3611880" y="4453128"/>
+            <a:ext cx="7452360" cy="530352"/>
+          </a:xfrm>
+          <a:prstGeom prst="rect">
+            <a:avLst/>
+          </a:prstGeom>
+          <a:noFill/>
+          <a:ln/>
+        </p:spPr>
+        <p:txBody>
+          <a:bodyPr wrap="square" lIns="0" tIns="0" rIns="0" bIns="0" rtlCol="0" anchor="ctr"/>
+          <a:lstStyle/>
+          <a:p>
+            <a:pPr indent="0" marL="0">
+              <a:lnSpc>
+                <a:spcPct val="115000"/>
+              </a:lnSpc>
+              <a:buNone/>
+            </a:pPr>
+            <a:r>
+              <a:rPr lang="en-US" sz="1150" dirty="0">
+                <a:solidFill>
+                  <a:srgbClr val="23201D"/>
+                </a:solidFill>
+                <a:latin typeface="Consolas" pitchFamily="34" charset="0"/>
+                <a:ea typeface="Consolas" pitchFamily="34" charset="-122"/>
+                <a:cs typeface="Consolas" pitchFamily="34" charset="-120"/>
+              </a:rPr>
+              <a:t>社長が全部 → 推進役・費用・権限が紙になっている</a:t>
+            </a:r>
+            <a:endParaRPr lang="en-US" sz="1150" dirty="0"/>
+          </a:p>
+        </p:txBody>
+      </p:sp>
+      <p:sp>
+        <p:nvSpPr>
+          <p:cNvPr id="17" name="Text 15"/>
+          <p:cNvSpPr txBox="1"/>
+          <p:nvPr/>
+        </p:nvSpPr>
+        <p:spPr>
+          <a:xfrm>
+            <a:off x="1097280" y="4983480"/>
+            <a:ext cx="2377440" cy="530352"/>
+          </a:xfrm>
+          <a:prstGeom prst="rect">
+            <a:avLst/>
+          </a:prstGeom>
+          <a:noFill/>
+          <a:ln/>
+        </p:spPr>
+        <p:txBody>
+          <a:bodyPr wrap="square" lIns="0" tIns="0" rIns="0" bIns="0" rtlCol="0" anchor="ctr"/>
+          <a:lstStyle/>
+          <a:p>
+            <a:pPr indent="0" marL="0">
+              <a:lnSpc>
+                <a:spcPct val="110000"/>
+              </a:lnSpc>
+              <a:buNone/>
+            </a:pPr>
+            <a:r>
+              <a:rPr lang="en-US" sz="1100" b="1" dirty="0">
+                <a:solidFill>
+                  <a:srgbClr val="2F4F6B"/>
+                </a:solidFill>
+                <a:latin typeface="Yu Gothic" pitchFamily="34" charset="0"/>
+                <a:ea typeface="Yu Gothic" pitchFamily="34" charset="-122"/>
+                <a:cs typeface="Yu Gothic" pitchFamily="34" charset="-120"/>
+              </a:rPr>
+              <a:t>診断スコア</a:t>
+            </a:r>
+            <a:endParaRPr lang="en-US" sz="1100" dirty="0"/>
+          </a:p>
+        </p:txBody>
+      </p:sp>
+      <p:sp>
+        <p:nvSpPr>
+          <p:cNvPr id="18" name="Text 16"/>
+          <p:cNvSpPr txBox="1"/>
+          <p:nvPr/>
+        </p:nvSpPr>
+        <p:spPr>
+          <a:xfrm>
+            <a:off x="3611880" y="4983480"/>
+            <a:ext cx="7452360" cy="530352"/>
+          </a:xfrm>
+          <a:prstGeom prst="rect">
+            <a:avLst/>
+          </a:prstGeom>
+          <a:noFill/>
+          <a:ln/>
+        </p:spPr>
+        <p:txBody>
+          <a:bodyPr wrap="square" lIns="0" tIns="0" rIns="0" bIns="0" rtlCol="0" anchor="ctr"/>
+          <a:lstStyle/>
+          <a:p>
+            <a:pPr indent="0" marL="0">
+              <a:lnSpc>
+                <a:spcPct val="115000"/>
+              </a:lnSpc>
+              <a:buNone/>
+            </a:pPr>
+            <a:r>
+              <a:rPr lang="en-US" sz="1150" dirty="0">
+                <a:solidFill>
+                  <a:srgbClr val="23201D"/>
+                </a:solidFill>
+                <a:latin typeface="Consolas" pitchFamily="34" charset="0"/>
+                <a:ea typeface="Consolas" pitchFamily="34" charset="-122"/>
+                <a:cs typeface="Consolas" pitchFamily="34" charset="-120"/>
+              </a:rPr>
+              <a:t>受講前 ◯点 → 修了時 ◯点</a:t>
+            </a:r>
+            <a:endParaRPr lang="en-US" sz="1150" dirty="0"/>
+          </a:p>
+        </p:txBody>
+      </p:sp>
+      <p:sp>
+        <p:nvSpPr>
+          <p:cNvPr id="19" name="Text 17"/>
+          <p:cNvSpPr txBox="1"/>
+          <p:nvPr/>
+        </p:nvSpPr>
+        <p:spPr>
+          <a:xfrm>
+            <a:off x="777240" y="5751576"/>
+            <a:ext cx="10607040" cy="548640"/>
+          </a:xfrm>
+          <a:prstGeom prst="rect">
+            <a:avLst/>
+          </a:prstGeom>
+          <a:noFill/>
+          <a:ln/>
+        </p:spPr>
+        <p:txBody>
+          <a:bodyPr wrap="square" lIns="0" tIns="0" rIns="0" bIns="0" rtlCol="0" anchor="ctr"/>
+          <a:lstStyle/>
+          <a:p>
+            <a:pPr indent="0" marL="0">
+              <a:lnSpc>
+                <a:spcPct val="130000"/>
+              </a:lnSpc>
+              <a:buNone/>
+            </a:pPr>
+            <a:r>
               <a:rPr lang="en-US" sz="1250" dirty="0">
                 <a:solidFill>
-                  <a:srgbClr val="23201D"/>
-                </a:solidFill>
-                <a:latin typeface="Yu Gothic" pitchFamily="34" charset="0"/>
-                <a:ea typeface="Yu Gothic" pitchFamily="34" charset="-122"/>
-                <a:cs typeface="Yu Gothic" pitchFamily="34" charset="-120"/>
-              </a:rPr>
-              <a:t>・AIが何をするかが決まる（見積の下書き）</a:t>
+                  <a:srgbClr val="5A534A"/>
+                </a:solidFill>
+                <a:latin typeface="Yu Gothic" pitchFamily="34" charset="0"/>
+                <a:ea typeface="Yu Gothic" pitchFamily="34" charset="-122"/>
+                <a:cs typeface="Yu Gothic" pitchFamily="34" charset="-120"/>
+              </a:rPr>
+              <a:t>第1回の記録と突き合わせます。自分では気づきにくいので、数字と記録で見ていただきます。</a:t>
             </a:r>
             <a:endParaRPr lang="en-US" sz="1250" dirty="0"/>
           </a:p>
@@ -9666,272 +8841,7 @@
       </p:sp>
       <p:sp>
         <p:nvSpPr>
-          <p:cNvPr id="10" name="Text 8"/>
-          <p:cNvSpPr txBox="1"/>
-          <p:nvPr/>
-        </p:nvSpPr>
-        <p:spPr>
-          <a:xfrm>
-            <a:off x="6309360" y="2752344"/>
-            <a:ext cx="4846320" cy="566928"/>
-          </a:xfrm>
-          <a:prstGeom prst="rect">
-            <a:avLst/>
-          </a:prstGeom>
-          <a:noFill/>
-          <a:ln/>
-        </p:spPr>
-        <p:txBody>
-          <a:bodyPr wrap="square" lIns="0" tIns="0" rIns="0" bIns="0" rtlCol="0" anchor="ctr"/>
-          <a:lstStyle/>
-          <a:p>
-            <a:pPr indent="0" marL="0">
-              <a:lnSpc>
-                <a:spcPct val="125000"/>
-              </a:lnSpc>
-              <a:buNone/>
-            </a:pPr>
-            <a:r>
-              <a:rPr lang="en-US" sz="1250" dirty="0">
-                <a:solidFill>
-                  <a:srgbClr val="23201D"/>
-                </a:solidFill>
-                <a:latin typeface="Yu Gothic" pitchFamily="34" charset="0"/>
-                <a:ea typeface="Yu Gothic" pitchFamily="34" charset="-122"/>
-                <a:cs typeface="Yu Gothic" pitchFamily="34" charset="-120"/>
-              </a:rPr>
-              <a:t>・人が何をするかが決まる（提案と交渉）</a:t>
-            </a:r>
-            <a:endParaRPr lang="en-US" sz="1250" dirty="0"/>
-          </a:p>
-        </p:txBody>
-      </p:sp>
-      <p:sp>
-        <p:nvSpPr>
-          <p:cNvPr id="11" name="Text 9"/>
-          <p:cNvSpPr txBox="1"/>
-          <p:nvPr/>
-        </p:nvSpPr>
-        <p:spPr>
-          <a:xfrm>
-            <a:off x="6309360" y="3355848"/>
-            <a:ext cx="4846320" cy="566928"/>
-          </a:xfrm>
-          <a:prstGeom prst="rect">
-            <a:avLst/>
-          </a:prstGeom>
-          <a:noFill/>
-          <a:ln/>
-        </p:spPr>
-        <p:txBody>
-          <a:bodyPr wrap="square" lIns="0" tIns="0" rIns="0" bIns="0" rtlCol="0" anchor="ctr"/>
-          <a:lstStyle/>
-          <a:p>
-            <a:pPr indent="0" marL="0">
-              <a:lnSpc>
-                <a:spcPct val="125000"/>
-              </a:lnSpc>
-              <a:buNone/>
-            </a:pPr>
-            <a:r>
-              <a:rPr lang="en-US" sz="1250" dirty="0">
-                <a:solidFill>
-                  <a:srgbClr val="23201D"/>
-                </a:solidFill>
-                <a:latin typeface="Yu Gothic" pitchFamily="34" charset="0"/>
-                <a:ea typeface="Yu Gothic" pitchFamily="34" charset="-122"/>
-                <a:cs typeface="Yu Gothic" pitchFamily="34" charset="-120"/>
-              </a:rPr>
-              <a:t>・必要な資産が分かる（過去実績のデータ化）</a:t>
-            </a:r>
-            <a:endParaRPr lang="en-US" sz="1250" dirty="0"/>
-          </a:p>
-        </p:txBody>
-      </p:sp>
-      <p:sp>
-        <p:nvSpPr>
-          <p:cNvPr id="12" name="Text 10"/>
-          <p:cNvSpPr txBox="1"/>
-          <p:nvPr/>
-        </p:nvSpPr>
-        <p:spPr>
-          <a:xfrm>
-            <a:off x="6309360" y="3959352"/>
-            <a:ext cx="4846320" cy="566928"/>
-          </a:xfrm>
-          <a:prstGeom prst="rect">
-            <a:avLst/>
-          </a:prstGeom>
-          <a:noFill/>
-          <a:ln/>
-        </p:spPr>
-        <p:txBody>
-          <a:bodyPr wrap="square" lIns="0" tIns="0" rIns="0" bIns="0" rtlCol="0" anchor="ctr"/>
-          <a:lstStyle/>
-          <a:p>
-            <a:pPr indent="0" marL="0">
-              <a:lnSpc>
-                <a:spcPct val="125000"/>
-              </a:lnSpc>
-              <a:buNone/>
-            </a:pPr>
-            <a:r>
-              <a:rPr lang="en-US" sz="1250" dirty="0">
-                <a:solidFill>
-                  <a:srgbClr val="23201D"/>
-                </a:solidFill>
-                <a:latin typeface="Yu Gothic" pitchFamily="34" charset="0"/>
-                <a:ea typeface="Yu Gothic" pitchFamily="34" charset="-122"/>
-                <a:cs typeface="Yu Gothic" pitchFamily="34" charset="-120"/>
-              </a:rPr>
-              <a:t>・やらないことも決まる（大型案件の深追い）</a:t>
-            </a:r>
-            <a:endParaRPr lang="en-US" sz="1250" dirty="0"/>
-          </a:p>
-        </p:txBody>
-      </p:sp>
-      <p:sp>
-        <p:nvSpPr>
-          <p:cNvPr id="13" name="Shape 11"/>
-          <p:cNvSpPr/>
-          <p:nvPr/>
-        </p:nvSpPr>
-        <p:spPr>
-          <a:xfrm>
-            <a:off x="777240" y="3291840"/>
-            <a:ext cx="4879238" cy="1417320"/>
-          </a:xfrm>
-          <a:prstGeom prst="rect">
-            <a:avLst/>
-          </a:prstGeom>
-          <a:solidFill>
-            <a:srgbClr val="E7F0E9"/>
-          </a:solidFill>
-          <a:ln w="12700">
-            <a:solidFill>
-              <a:srgbClr val="333333"/>
-            </a:solidFill>
-            <a:prstDash val="solid"/>
-          </a:ln>
-        </p:spPr>
-        <p:txBody>
-          <a:bodyPr/>
-          <a:p/>
-        </p:txBody>
-      </p:sp>
-      <p:sp>
-        <p:nvSpPr>
-          <p:cNvPr id="14" name="Text 12"/>
-          <p:cNvSpPr txBox="1"/>
-          <p:nvPr/>
-        </p:nvSpPr>
-        <p:spPr>
-          <a:xfrm>
-            <a:off x="1005840" y="3383280"/>
-            <a:ext cx="4422038" cy="1234440"/>
-          </a:xfrm>
-          <a:prstGeom prst="rect">
-            <a:avLst/>
-          </a:prstGeom>
-          <a:noFill/>
-          <a:ln/>
-        </p:spPr>
-        <p:txBody>
-          <a:bodyPr wrap="square" lIns="0" tIns="0" rIns="0" bIns="0" rtlCol="0" anchor="ctr"/>
-          <a:lstStyle/>
-          <a:p>
-            <a:pPr indent="0" marL="0">
-              <a:lnSpc>
-                <a:spcPct val="135000"/>
-              </a:lnSpc>
-              <a:buNone/>
-            </a:pPr>
-            <a:r>
-              <a:rPr lang="en-US" sz="1250" dirty="0">
-                <a:solidFill>
-                  <a:srgbClr val="3F3933"/>
-                </a:solidFill>
-                <a:latin typeface="Yu Gothic" pitchFamily="34" charset="0"/>
-                <a:ea typeface="Yu Gothic" pitchFamily="34" charset="-122"/>
-                <a:cs typeface="Yu Gothic" pitchFamily="34" charset="-120"/>
-              </a:rPr>
-              <a:t>事業の言葉に翻訳できたとき、はじめてAIは経営の道具になります。</a:t>
-            </a:r>
-            <a:endParaRPr lang="en-US" sz="1250" dirty="0"/>
-          </a:p>
-        </p:txBody>
-      </p:sp>
-      <p:sp>
-        <p:nvSpPr>
-          <p:cNvPr id="15" name="Shape 13"/>
-          <p:cNvSpPr/>
-          <p:nvPr/>
-        </p:nvSpPr>
-        <p:spPr>
-          <a:xfrm>
-            <a:off x="777240" y="4983480"/>
-            <a:ext cx="10607040" cy="685800"/>
-          </a:xfrm>
-          <a:prstGeom prst="rect">
-            <a:avLst/>
-          </a:prstGeom>
-          <a:solidFill>
-            <a:srgbClr val="3B6B4A"/>
-          </a:solidFill>
-          <a:ln w="12700">
-            <a:solidFill>
-              <a:srgbClr val="333333"/>
-            </a:solidFill>
-            <a:prstDash val="solid"/>
-          </a:ln>
-        </p:spPr>
-        <p:txBody>
-          <a:bodyPr/>
-          <a:p/>
-        </p:txBody>
-      </p:sp>
-      <p:sp>
-        <p:nvSpPr>
-          <p:cNvPr id="16" name="Text 14"/>
-          <p:cNvSpPr txBox="1"/>
-          <p:nvPr/>
-        </p:nvSpPr>
-        <p:spPr>
-          <a:xfrm>
-            <a:off x="1097280" y="4983480"/>
-            <a:ext cx="9966960" cy="685800"/>
-          </a:xfrm>
-          <a:prstGeom prst="rect">
-            <a:avLst/>
-          </a:prstGeom>
-          <a:noFill/>
-          <a:ln/>
-        </p:spPr>
-        <p:txBody>
-          <a:bodyPr wrap="square" lIns="0" tIns="0" rIns="0" bIns="0" rtlCol="0" anchor="ctr"/>
-          <a:lstStyle/>
-          <a:p>
-            <a:pPr indent="0" marL="0">
-              <a:buNone/>
-            </a:pPr>
-            <a:r>
-              <a:rPr lang="en-US" sz="1450" b="1" dirty="0">
-                <a:solidFill>
-                  <a:srgbClr val="FFFFFF"/>
-                </a:solidFill>
-                <a:latin typeface="Yu Gothic" pitchFamily="34" charset="0"/>
-                <a:ea typeface="Yu Gothic" pitchFamily="34" charset="-122"/>
-                <a:cs typeface="Yu Gothic" pitchFamily="34" charset="-120"/>
-              </a:rPr>
-              <a:t>AIの話ではなく、何で勝つかの話にする</a:t>
-            </a:r>
-            <a:endParaRPr lang="en-US" sz="1450" dirty="0"/>
-          </a:p>
-        </p:txBody>
-      </p:sp>
-      <p:sp>
-        <p:nvSpPr>
-          <p:cNvPr id="17" name="Text 15"/>
+          <p:cNvPr id="20" name="Text 18"/>
           <p:cNvSpPr txBox="1"/>
           <p:nvPr/>
         </p:nvSpPr>
@@ -9970,7 +8880,7 @@
       </p:sp>
       <p:sp>
         <p:nvSpPr>
-          <p:cNvPr id="18" name="Text 16"/>
+          <p:cNvPr id="21" name="Text 19"/>
           <p:cNvSpPr txBox="1"/>
           <p:nvPr/>
         </p:nvSpPr>
@@ -10001,7 +8911,7 @@
                 <a:ea typeface="Yu Gothic" pitchFamily="34" charset="-122"/>
                 <a:cs typeface="Yu Gothic" pitchFamily="34" charset="-120"/>
               </a:rPr>
-              <a:t>実演 ②</a:t>
+              <a:t>記入例</a:t>
             </a:r>
             <a:endParaRPr lang="en-US" sz="900" dirty="0"/>
           </a:p>
@@ -10072,7 +8982,7 @@
                 <a:ea typeface="Yu Gothic" pitchFamily="34" charset="-122"/>
                 <a:cs typeface="Yu Gothic" pitchFamily="34" charset="-120"/>
               </a:rPr>
-              <a:t>つまずきやすいところ</a:t>
+              <a:t>止まりやすい所</a:t>
             </a:r>
             <a:endParaRPr lang="en-US" sz="1100" dirty="0"/>
           </a:p>
@@ -10111,7 +9021,7 @@
                 <a:ea typeface="Yu Gothic" pitchFamily="34" charset="-122"/>
                 <a:cs typeface="Yu Gothic" pitchFamily="34" charset="-120"/>
               </a:rPr>
-              <a:t>この回で、よく起きること</a:t>
+              <a:t>ここで止まりやすい。止まったら、こうします</a:t>
             </a:r>
             <a:endParaRPr lang="en-US" sz="2600" dirty="0"/>
           </a:p>
@@ -10141,10 +9051,6 @@
             <a:prstDash val="solid"/>
           </a:ln>
         </p:spPr>
-        <p:txBody>
-          <a:bodyPr/>
-          <a:p/>
-        </p:txBody>
       </p:sp>
       <p:sp>
         <p:nvSpPr>
@@ -10246,15 +9152,11 @@
           </a:solidFill>
           <a:ln w="12700">
             <a:solidFill>
-              <a:srgbClr val="333333"/>
+              <a:srgbClr val="EDE7DB"/>
             </a:solidFill>
             <a:prstDash val="solid"/>
           </a:ln>
         </p:spPr>
-        <p:txBody>
-          <a:bodyPr/>
-          <a:p/>
-        </p:txBody>
       </p:sp>
       <p:sp>
         <p:nvSpPr>
@@ -10289,7 +9191,7 @@
                 <a:ea typeface="Yu Gothic" pitchFamily="34" charset="-122"/>
                 <a:cs typeface="Yu Gothic" pitchFamily="34" charset="-120"/>
               </a:rPr>
-              <a:t>こうする</a:t>
+              <a:t>こうします</a:t>
             </a:r>
             <a:endParaRPr lang="en-US" sz="900" dirty="0"/>
           </a:p>
@@ -10304,7 +9206,7 @@
         <p:spPr>
           <a:xfrm>
             <a:off x="6080760" y="2121408"/>
-            <a:ext cx="5091379" cy="566928"/>
+            <a:ext cx="5091379" cy="603504"/>
           </a:xfrm>
           <a:prstGeom prst="rect">
             <a:avLst/>
@@ -10331,7 +9233,7 @@
                 <a:ea typeface="Yu Gothic" pitchFamily="34" charset="-122"/>
                 <a:cs typeface="Yu Gothic" pitchFamily="34" charset="-120"/>
               </a:rPr>
-              <a:t>4つの問いの2番目（人は何をしているか）に戻します。事業の言葉が出るまで粘ります</a:t>
+              <a:t>2つ目の問い（そのとき、人は何をしているか）に戻ります。事業の言葉が出るまで、一緒に考えます</a:t>
             </a:r>
             <a:endParaRPr lang="en-US" sz="1250" dirty="0"/>
           </a:p>
@@ -10361,10 +9263,6 @@
             <a:prstDash val="solid"/>
           </a:ln>
         </p:spPr>
-        <p:txBody>
-          <a:bodyPr/>
-          <a:p/>
-        </p:txBody>
       </p:sp>
       <p:sp>
         <p:nvSpPr>
@@ -10441,7 +9339,7 @@
                 <a:ea typeface="Yu Gothic" pitchFamily="34" charset="-122"/>
                 <a:cs typeface="Yu Gothic" pitchFamily="34" charset="-120"/>
               </a:rPr>
-              <a:t>成果が乏しいまま最終回を迎えた</a:t>
+              <a:t>思ったほど成果が出ていない</a:t>
             </a:r>
             <a:endParaRPr lang="en-US" sz="1350" dirty="0"/>
           </a:p>
@@ -10466,15 +9364,11 @@
           </a:solidFill>
           <a:ln w="12700">
             <a:solidFill>
-              <a:srgbClr val="333333"/>
+              <a:srgbClr val="EDE7DB"/>
             </a:solidFill>
             <a:prstDash val="solid"/>
           </a:ln>
         </p:spPr>
-        <p:txBody>
-          <a:bodyPr/>
-          <a:p/>
-        </p:txBody>
       </p:sp>
       <p:sp>
         <p:nvSpPr>
@@ -10509,7 +9403,7 @@
                 <a:ea typeface="Yu Gothic" pitchFamily="34" charset="-122"/>
                 <a:cs typeface="Yu Gothic" pitchFamily="34" charset="-120"/>
               </a:rPr>
-              <a:t>こうする</a:t>
+              <a:t>こうします</a:t>
             </a:r>
             <a:endParaRPr lang="en-US" sz="900" dirty="0"/>
           </a:p>
@@ -10524,7 +9418,7 @@
         <p:spPr>
           <a:xfrm>
             <a:off x="6080760" y="3328416"/>
-            <a:ext cx="5091379" cy="566928"/>
+            <a:ext cx="5091379" cy="603504"/>
           </a:xfrm>
           <a:prstGeom prst="rect">
             <a:avLst/>
@@ -10551,7 +9445,7 @@
                 <a:ea typeface="Yu Gothic" pitchFamily="34" charset="-122"/>
                 <a:cs typeface="Yu Gothic" pitchFamily="34" charset="-120"/>
               </a:rPr>
-              <a:t>取り繕いません。何が進まなかったかを一緒に言語化するほうが、次につながります。理由は大半が「時間」と「人」です</a:t>
+              <a:t>取り繕いません。何が進まなかったかを言葉にするほうが、次につながります。理由の大半は「時間」と「人」です</a:t>
             </a:r>
             <a:endParaRPr lang="en-US" sz="1250" dirty="0"/>
           </a:p>
@@ -10581,10 +9475,6 @@
             <a:prstDash val="solid"/>
           </a:ln>
         </p:spPr>
-        <p:txBody>
-          <a:bodyPr/>
-          <a:p/>
-        </p:txBody>
       </p:sp>
       <p:sp>
         <p:nvSpPr>
@@ -10661,7 +9551,7 @@
                 <a:ea typeface="Yu Gothic" pitchFamily="34" charset="-122"/>
                 <a:cs typeface="Yu Gothic" pitchFamily="34" charset="-120"/>
               </a:rPr>
-              <a:t>継続の相談をされる</a:t>
+              <a:t>修了後も、続けて相談したい</a:t>
             </a:r>
             <a:endParaRPr lang="en-US" sz="1350" dirty="0"/>
           </a:p>
@@ -10686,15 +9576,11 @@
           </a:solidFill>
           <a:ln w="12700">
             <a:solidFill>
-              <a:srgbClr val="333333"/>
+              <a:srgbClr val="EDE7DB"/>
             </a:solidFill>
             <a:prstDash val="solid"/>
           </a:ln>
         </p:spPr>
-        <p:txBody>
-          <a:bodyPr/>
-          <a:p/>
-        </p:txBody>
       </p:sp>
       <p:sp>
         <p:nvSpPr>
@@ -10729,7 +9615,7 @@
                 <a:ea typeface="Yu Gothic" pitchFamily="34" charset="-122"/>
                 <a:cs typeface="Yu Gothic" pitchFamily="34" charset="-120"/>
               </a:rPr>
-              <a:t>こうする</a:t>
+              <a:t>こうします</a:t>
             </a:r>
             <a:endParaRPr lang="en-US" sz="900" dirty="0"/>
           </a:p>
@@ -10744,7 +9630,7 @@
         <p:spPr>
           <a:xfrm>
             <a:off x="6080760" y="4535424"/>
-            <a:ext cx="5091379" cy="566928"/>
+            <a:ext cx="5091379" cy="603504"/>
           </a:xfrm>
           <a:prstGeom prst="rect">
             <a:avLst/>
@@ -10771,7 +9657,7 @@
                 <a:ea typeface="Yu Gothic" pitchFamily="34" charset="-122"/>
                 <a:cs typeface="Yu Gothic" pitchFamily="34" charset="-120"/>
               </a:rPr>
-              <a:t>講座の延長ではなく、月1回の伴走として別建てにするのが自然です。第10回の月次チェックが接点になります</a:t>
+              <a:t>月1回の伴走という形があります。第10回の月次チェックが、そのまま接点になります</a:t>
             </a:r>
             <a:endParaRPr lang="en-US" sz="1250" dirty="0"/>
           </a:p>
@@ -10849,7 +9735,7 @@
                 <a:ea typeface="Yu Gothic" pitchFamily="34" charset="-122"/>
                 <a:cs typeface="Yu Gothic" pitchFamily="34" charset="-120"/>
               </a:rPr>
-              <a:t>つまずき</a:t>
+              <a:t>止まりやすい所</a:t>
             </a:r>
             <a:endParaRPr lang="en-US" sz="900" dirty="0"/>
           </a:p>
@@ -10989,10 +9875,6 @@
             <a:prstDash val="solid"/>
           </a:ln>
         </p:spPr>
-        <p:txBody>
-          <a:bodyPr/>
-          <a:p/>
-        </p:txBody>
       </p:sp>
       <p:sp>
         <p:nvSpPr>
@@ -11013,15 +9895,11 @@
           </a:solidFill>
           <a:ln w="12700">
             <a:solidFill>
-              <a:srgbClr val="333333"/>
+              <a:srgbClr val="2F4F6B"/>
             </a:solidFill>
             <a:prstDash val="solid"/>
           </a:ln>
         </p:spPr>
-        <p:txBody>
-          <a:bodyPr/>
-          <a:p/>
-        </p:txBody>
       </p:sp>
       <p:sp>
         <p:nvSpPr>
@@ -11128,10 +10006,6 @@
             <a:prstDash val="solid"/>
           </a:ln>
         </p:spPr>
-        <p:txBody>
-          <a:bodyPr/>
-          <a:p/>
-        </p:txBody>
       </p:sp>
       <p:sp>
         <p:nvSpPr>
@@ -11152,15 +10026,11 @@
           </a:solidFill>
           <a:ln w="12700">
             <a:solidFill>
-              <a:srgbClr val="333333"/>
+              <a:srgbClr val="2F4F6B"/>
             </a:solidFill>
             <a:prstDash val="solid"/>
           </a:ln>
         </p:spPr>
-        <p:txBody>
-          <a:bodyPr/>
-          <a:p/>
-        </p:txBody>
       </p:sp>
       <p:sp>
         <p:nvSpPr>
@@ -11267,10 +10137,6 @@
             <a:prstDash val="solid"/>
           </a:ln>
         </p:spPr>
-        <p:txBody>
-          <a:bodyPr/>
-          <a:p/>
-        </p:txBody>
       </p:sp>
       <p:sp>
         <p:nvSpPr>
@@ -11291,15 +10157,11 @@
           </a:solidFill>
           <a:ln w="12700">
             <a:solidFill>
-              <a:srgbClr val="333333"/>
+              <a:srgbClr val="2F4F6B"/>
             </a:solidFill>
             <a:prstDash val="solid"/>
           </a:ln>
         </p:spPr>
-        <p:txBody>
-          <a:bodyPr/>
-          <a:p/>
-        </p:txBody>
       </p:sp>
       <p:sp>
         <p:nvSpPr>
